--- a/deliver/deck/RFP-to-Fit_루미아.pptx
+++ b/deliver/deck/RFP-to-Fit_루미아.pptx
@@ -181,13 +181,13 @@
                 <c:ptCount val="3"/>
                 <c:lvl>
                   <c:pt idx="0">
-                    <c:v>우주항공청 (19쪽)</c:v>
+                    <c:v>우주항공청 · 19쪽</c:v>
                   </c:pt>
                   <c:pt idx="1">
-                    <c:v>산업통상부 (37쪽)</c:v>
+                    <c:v>산업통상부 · 37쪽</c:v>
                   </c:pt>
                   <c:pt idx="2">
-                    <c:v>NAIS 해커톤 (5쪽)</c:v>
+                    <c:v>NAIS 해커톤 · 5쪽</c:v>
                   </c:pt>
                 </c:lvl>
               </c:multiLvlStrCache>
@@ -1007,7 +1007,7 @@
           <a:p>
             <a:r>
               <a:rPr lang="en-US" dirty="0"/>
-              <a:t>[35초] 여기 계신 분들 모두 제안서를 쓰고, 또 심사하시는 분들입니다. 공고 한 건이 37쪽, 지켜야 할 요건이 58개, 평가표가 3종입니다. 떨어지는 제안서의 상당수는 아이디어가 아니라 '이 지표에 대한 근거가 없다'에서 깎입니다. 문제는 그걸 제출 뒤에야 안다는 겁니다.</a:t>
+              <a:t>[30초] 여기 계신 분들 모두 제안서를 쓰고, 또 심사하시는 분들입니다. 저희가 산업통상부 공고 한 건을 쪽마다 읽어 보니 37쪽에 지켜야 할 요건이 58개, 평가표가 3종이었습니다. 연구자는 연구의 언어로 쓰고 평가위원은 지표의 언어로 읽는데, 그 빈칸은 제출 뒤에야 보입니다.</a:t>
             </a:r>
             <a:endParaRPr lang="en-US" dirty="0"/>
           </a:p>
@@ -1095,7 +1095,7 @@
           <a:p>
             <a:r>
               <a:rPr lang="en-US" dirty="0"/>
-              <a:t>[35초] 평가위원 한 명의 점수는 취향입니다. 그래서 관점이 다른 다섯 명이 서로의 답을 모른 채 채점합니다. 네 명 이상이 깎으면 반드시 고칠 곳, 의견이 갈리면 연구자가 판단할 곳입니다. 모델도 Gemini와 국산 Solar로 나눠, 한 회사 모델의 치우침이 합의로 굳지 않게 했습니다.</a:t>
+              <a:t>[30초] 평가위원 한 명의 점수는 취향입니다. 그래서 관점이 다른 다섯 명이 서로의 답을 모른 채 채점합니다. 네 명 이상이 깎으면 반드시 고칠 곳, 의견이 갈리면 연구자가 판단할 곳입니다. 모델도 Gemini와 국산 Solar로 나눠 한 회사 모델의 치우침이 합의로 굳지 않게 했습니다. 과거 심사 기록이 필요 없어서, 오늘 나온 새 공고에도 바로 씁니다.</a:t>
             </a:r>
             <a:endParaRPr lang="en-US" dirty="0"/>
           </a:p>
@@ -1183,7 +1183,7 @@
           <a:p>
             <a:r>
               <a:rPr lang="en-US" dirty="0"/>
-              <a:t>[70초] 지금 보시는 건 이 대회 공고입니다. 공고에서 요건 34개와 본선 심사표 5개를 스스로 찾아냈고, 저희 예선 기획서를 넣었습니다. 점검 질문 15개가 다섯 명에게 따로 가고, 약 44초 뒤 모두가 깎는 곳과 의견이 갈리는 곳이 나옵니다. 보완은 문장을 써 주지 않고 '어떤 근거를, 어느 절에'만 지정합니다.</a:t>
+              <a:t>[60초] 지금 보시는 건 이 대회 공고입니다. 공고에서 요건 34개와 본선 심사표 5개를 스스로 찾아냈고, 저희 예선 기획서를 넣었습니다. 점검 질문 15개가 다섯 명에게 따로 가고, 약 44초 뒤 모두가 깎는 곳과 의견이 갈리는 곳이 나옵니다. 보완은 문장을 써 주지 않고 '어떤 근거를, 어느 절에'만 지정합니다.</a:t>
             </a:r>
             <a:endParaRPr lang="en-US" dirty="0"/>
           </a:p>
@@ -1359,7 +1359,7 @@
           <a:p>
             <a:r>
               <a:rPr lang="en-US" dirty="0"/>
-              <a:t>[20초] 평가위원은 Gemini와 국산 Solar로 나눴고, 전체 흐름은 LangGraph 상태 그래프입니다. 인용 검사에 실패하면 재질의로 되돌아가는 루프가 있습니다. 선행연구 탐색은 MCP 도구 서버로 감싸서, 검색기를 바꿔 끼울 수 있고 다른 AI 비서도 같은 도구를 부를 수 있습니다.</a:t>
+              <a:t>[20초] 평가위원은 Gemini와 국산 Solar로 나눴고, 전체 흐름은 LangGraph 상태 그래프입니다. 검색으로 조각을 넣는 대신 원문을 통째로 넣고 인용으로 대조합니다. 인용 검사에 실패하면 재질의로 되돌아가는 루프가 있습니다. 선행연구 탐색은 MCP 도구 서버로 감싸서, 검색기를 바꿔 끼울 수 있고 다른 AI 비서도 같은 도구를 부를 수 있습니다.</a:t>
             </a:r>
             <a:endParaRPr lang="en-US" dirty="0"/>
           </a:p>
@@ -1447,7 +1447,7 @@
           <a:p>
             <a:r>
               <a:rPr lang="en-US" dirty="0"/>
-              <a:t>[25초] LLM 심사의 가장 큰 위험은 그럴듯한 칭찬입니다. 저희는 칭찬에도 증거를 요구합니다. 인용을 코드가 원문과 대조하고, 없으면 무효로 돌려 한 번 다시 묻습니다. 이 실행에서 60개 판정 중 6건이 원문에 없는 인용이었고, 재질의로 6건이 교정됐습니다.</a:t>
+              <a:t>[25초] LLM 심사의 가장 큰 위험은 그럴듯한 칭찬입니다. 저희는 칭찬에도 증거를 요구합니다. 인용을 코드가 원문과 대조하고, 없으면 무효로 돌려 한 번 다시 묻습니다. 이 실행에서 60개 판정 중 6건이 원문에 없는 인용이었고, 다시 물은 뒤 6건이 무효에서 벗어났습니다. 인용이 판정을 뒷받침하는지는 사람이 보도록 화면에 그대로 둡니다.</a:t>
             </a:r>
             <a:endParaRPr lang="en-US" dirty="0"/>
           </a:p>
@@ -1535,7 +1535,7 @@
           <a:p>
             <a:r>
               <a:rPr lang="en-US" dirty="0"/>
-              <a:t>[25초] 정확도는 말이 아니라 숫자로 보여 드립니다. 공고를 쪽마다 판독한 정답표 대비 요건 재현율이 우주항공청 95%, 산업통상부 91%, 국가과학기술연구회 54%입니다. 기획서에서 지표별 블록을 하나씩 지운 초안 5개로 결함 주입 실험을 했고 2/5를 짚었습니다. 약한 숫자도 그대로 공개합니다.</a:t>
+              <a:t>[25초] 정확도는 숫자로 보여 드립니다. 정답표 대비 요건을 놓치지 않은 비율이 우주항공청 95%, 산업통상부 91%, NAIS 해커톤 54%입니다. 가장 약한 곳도 그대로 둡니다. 기획서에서 근거 블록을 일부러 하나씩 지운 초안 5개 중 4/5를 짚었고, 지운 초안은 점수도 내려갔습니다.</a:t>
             </a:r>
             <a:endParaRPr lang="en-US" dirty="0"/>
           </a:p>
@@ -1623,7 +1623,7 @@
           <a:p>
             <a:r>
               <a:rPr lang="en-US" dirty="0"/>
-              <a:t>[30초] 저희 도구로 저희 예선 기획서를 이 대회 본선 심사표로 먼저 채점했습니다. 94.2점, 그리고 '핵심 기능 UI 구성이 없다', '서비스 흐름도가 없다'는 지적이 나왔습니다. 오늘 이 발표는 그 지적을 반영한 결과이고, 보완 후 98점입니다.</a:t>
+              <a:t>[25초] 저희 도구로 저희 예선 기획서를 이 대회 본선 심사표로 먼저 채점했습니다. 94.2점, 짚은 곳 2곳. 그곳을 채운 뒤 같은 질문으로 다시 채점해 99.0점입니다. 같은 판정자로 잰 자기 점검이라, 변별력 근거는 앞 장의 지운 초안 시험으로 드렸습니다.</a:t>
             </a:r>
             <a:endParaRPr lang="en-US" dirty="0"/>
           </a:p>
@@ -2409,7 +2409,7 @@
                 <a:ea typeface="Arial" pitchFamily="34" charset="-122"/>
                 <a:cs typeface="Arial" pitchFamily="34" charset="-120"/>
               </a:rPr>
-              <a:t>01  연구자</a:t>
+              <a:t>01  연구자 · 구현</a:t>
             </a:r>
             <a:endParaRPr lang="en-US" sz="1500" dirty="0"/>
           </a:p>
@@ -2487,7 +2487,7 @@
                 <a:ea typeface="Arial" pitchFamily="34" charset="-122"/>
                 <a:cs typeface="Arial" pitchFamily="34" charset="-120"/>
               </a:rPr>
-              <a:t>고칠 곳부터 고치고, 갈리는 곳은 판단</a:t>
+              <a:t>지금 이 앱 — 고칠 곳부터, 갈리는 곳은 판단</a:t>
             </a:r>
             <a:endParaRPr lang="en-US" sz="1250" dirty="0"/>
           </a:p>
@@ -2550,7 +2550,7 @@
                 <a:ea typeface="Arial" pitchFamily="34" charset="-122"/>
                 <a:cs typeface="Arial" pitchFamily="34" charset="-120"/>
               </a:rPr>
-              <a:t>02  전문기관</a:t>
+              <a:t>02  전문기관 · 계획</a:t>
             </a:r>
             <a:endParaRPr lang="en-US" sz="1500" dirty="0"/>
           </a:p>
@@ -2691,7 +2691,7 @@
                 <a:ea typeface="Arial" pitchFamily="34" charset="-122"/>
                 <a:cs typeface="Arial" pitchFamily="34" charset="-120"/>
               </a:rPr>
-              <a:t>03  평가위원</a:t>
+              <a:t>03  평가위원 · 계획</a:t>
             </a:r>
             <a:endParaRPr lang="en-US" sz="1500" dirty="0"/>
           </a:p>
@@ -2897,7 +2897,7 @@
                 <a:ea typeface="Arial" pitchFamily="34" charset="-122"/>
                 <a:cs typeface="Arial" pitchFamily="34" charset="-120"/>
               </a:rPr>
-              <a:t>연차·성과보고서</a:t>
+              <a:t>연차·성과보고서 · 계획</a:t>
             </a:r>
             <a:endParaRPr lang="en-US" sz="1500" dirty="0"/>
           </a:p>
@@ -3002,7 +3002,7 @@
                 <a:ea typeface="Arial" pitchFamily="34" charset="-122"/>
                 <a:cs typeface="Arial" pitchFamily="34" charset="-120"/>
               </a:rPr>
-              <a:t>연구비 정산</a:t>
+              <a:t>연구비 정산 · 계획</a:t>
             </a:r>
             <a:endParaRPr lang="en-US" sz="1500" dirty="0"/>
           </a:p>
@@ -3107,7 +3107,7 @@
                 <a:ea typeface="Arial" pitchFamily="34" charset="-122"/>
                 <a:cs typeface="Arial" pitchFamily="34" charset="-120"/>
               </a:rPr>
-              <a:t>MCP로 연결</a:t>
+              <a:t>MCP로 연결 · 구현</a:t>
             </a:r>
             <a:endParaRPr lang="en-US" sz="1500" dirty="0"/>
           </a:p>
@@ -3146,7 +3146,7 @@
                 <a:ea typeface="Arial" pitchFamily="34" charset="-122"/>
                 <a:cs typeface="Arial" pitchFamily="34" charset="-120"/>
               </a:rPr>
-              <a:t>NAIS 플랫폼 · 어떤 AI 비서든</a:t>
+              <a:t>도구 2개 · NAIS 플랫폼·AI 비서 연결</a:t>
             </a:r>
             <a:endParaRPr lang="en-US" sz="1200" dirty="0"/>
           </a:p>
@@ -3185,7 +3185,7 @@
                 <a:ea typeface="Arial" pitchFamily="34" charset="-122"/>
                 <a:cs typeface="Arial" pitchFamily="34" charset="-120"/>
               </a:rPr>
-              <a:t>정답표·측정 스크립트를 공개해 「R&amp;D 공고 결핍 벤치마크」로 — 첫 실증 후보는 전문기관 접수 사전검토</a:t>
+              <a:t>첫 실증 목표: 전문기관 접수 사전검토 1회 — 형식 미비를 정답표 방식 그대로 재서 재현율 90% · 정답표·측정 스크립트는 「R&amp;D 공고 결핍 벤치마크」로 공개</a:t>
             </a:r>
             <a:endParaRPr lang="en-US" sz="1250" dirty="0"/>
           </a:p>
@@ -3350,19 +3350,22 @@
         <p:spPr>
           <a:xfrm>
             <a:off x="822960" y="4069080"/>
-            <a:ext cx="6035040" cy="365760"/>
-          </a:xfrm>
-          <a:prstGeom prst="rect">
-            <a:avLst/>
-          </a:prstGeom>
-          <a:noFill/>
-          <a:ln/>
-        </p:spPr>
-        <p:txBody>
-          <a:bodyPr wrap="square" lIns="0" tIns="0" rIns="0" bIns="0" rtlCol="0" anchor="t"/>
-          <a:lstStyle/>
-          <a:p>
-            <a:pPr indent="0" marL="0">
+            <a:ext cx="6035040" cy="731520"/>
+          </a:xfrm>
+          <a:prstGeom prst="rect">
+            <a:avLst/>
+          </a:prstGeom>
+          <a:noFill/>
+          <a:ln/>
+        </p:spPr>
+        <p:txBody>
+          <a:bodyPr wrap="square" lIns="0" tIns="0" rIns="0" bIns="0" rtlCol="0" anchor="t"/>
+          <a:lstStyle/>
+          <a:p>
+            <a:pPr indent="0" marL="0">
+              <a:lnSpc>
+                <a:spcPct val="125000"/>
+              </a:lnSpc>
               <a:buNone/>
             </a:pPr>
             <a:r>
@@ -3374,15 +3377,77 @@
                 <a:ea typeface="Arial" pitchFamily="34" charset="-122"/>
                 <a:cs typeface="Arial" pitchFamily="34" charset="-120"/>
               </a:rPr>
-              <a:t>커밋 8개 · 코드는 전부 본선 중 커밋(첫 코드 커밋 09/30 19:19, 그 전엔 문서뿐)</a:t>
+              <a:t>커밋 9개 · 코드는 전부 본선 중 커밋(첫 코드 커밋 09/30 19:19, 그 전엔 문서뿐)</a:t>
             </a:r>
             <a:endParaRPr lang="en-US" sz="1400" dirty="0"/>
           </a:p>
+          <a:p>
+            <a:pPr indent="0" marL="0">
+              <a:lnSpc>
+                <a:spcPct val="125000"/>
+              </a:lnSpc>
+              <a:buNone/>
+            </a:pPr>
+            <a:r>
+              <a:rPr lang="en-US" sz="1400" dirty="0">
+                <a:solidFill>
+                  <a:srgbClr val="4E5968"/>
+                </a:solidFill>
+                <a:latin typeface="Arial" pitchFamily="34" charset="0"/>
+                <a:ea typeface="Arial" pitchFamily="34" charset="-122"/>
+                <a:cs typeface="Arial" pitchFamily="34" charset="-120"/>
+              </a:rPr>
+              <a:t>SPEC → 테스트 → 구현 순서 · 코딩 에이전트 활용 규칙까지 공개(AGENTS.md)</a:t>
+            </a:r>
+            <a:endParaRPr lang="en-US" sz="1400" dirty="0"/>
+          </a:p>
         </p:txBody>
       </p:sp>
       <p:sp>
         <p:nvSpPr>
           <p:cNvPr id="5" name="Text 3"/>
+          <p:cNvSpPr/>
+          <p:nvPr/>
+        </p:nvSpPr>
+        <p:spPr>
+          <a:xfrm>
+            <a:off x="822960" y="4983480"/>
+            <a:ext cx="6035040" cy="548640"/>
+          </a:xfrm>
+          <a:prstGeom prst="rect">
+            <a:avLst/>
+          </a:prstGeom>
+          <a:noFill/>
+          <a:ln/>
+        </p:spPr>
+        <p:txBody>
+          <a:bodyPr wrap="square" lIns="0" tIns="0" rIns="0" bIns="0" rtlCol="0" anchor="t"/>
+          <a:lstStyle/>
+          <a:p>
+            <a:pPr indent="0" marL="0">
+              <a:lnSpc>
+                <a:spcPct val="120000"/>
+              </a:lnSpc>
+              <a:buNone/>
+            </a:pPr>
+            <a:r>
+              <a:rPr lang="en-US" sz="1200" dirty="0">
+                <a:solidFill>
+                  <a:srgbClr val="8B95A1"/>
+                </a:solidFill>
+                <a:latin typeface="Arial" pitchFamily="34" charset="0"/>
+                <a:ea typeface="Arial" pitchFamily="34" charset="-122"/>
+                <a:cs typeface="Arial" pitchFamily="34" charset="-120"/>
+              </a:rPr>
+              <a:t>라이브가 끊기면 — 앱의 「② 우리 기획서 전·후」 탭이 저장된 실행 기록으로 같은 결과를 보여 줍니다</a:t>
+            </a:r>
+            <a:endParaRPr lang="en-US" sz="1200" dirty="0"/>
+          </a:p>
+        </p:txBody>
+      </p:sp>
+      <p:sp>
+        <p:nvSpPr>
+          <p:cNvPr id="6" name="Text 4"/>
           <p:cNvSpPr/>
           <p:nvPr/>
         </p:nvSpPr>
@@ -3421,14 +3486,14 @@
       </p:sp>
       <p:sp>
         <p:nvSpPr>
-          <p:cNvPr id="6" name="Shape 4"/>
-          <p:cNvSpPr/>
-          <p:nvPr/>
-        </p:nvSpPr>
-        <p:spPr>
-          <a:xfrm>
-            <a:off x="7269480" y="2377440"/>
-            <a:ext cx="1874520" cy="3246120"/>
+          <p:cNvPr id="7" name="Shape 5"/>
+          <p:cNvSpPr/>
+          <p:nvPr/>
+        </p:nvSpPr>
+        <p:spPr>
+          <a:xfrm>
+            <a:off x="7269480" y="1828800"/>
+            <a:ext cx="1874520" cy="2788920"/>
           </a:xfrm>
           <a:prstGeom prst="roundRect">
             <a:avLst>
@@ -3448,7 +3513,7 @@
       </p:sp>
       <p:pic>
         <p:nvPicPr>
-          <p:cNvPr id="7" name="Image 0" descr="/Users/ryugi62/dev/rfp-to-fit/deliver/deck/build/img/qr-live.png">    </p:cNvPr>
+          <p:cNvPr id="8" name="Image 0" descr="/Users/ryugi62/dev/rfp-to-fit/deliver/deck/build/img/qr-live.png">    </p:cNvPr>
           <p:cNvPicPr>
             <a:picLocks noChangeAspect="1"/>
           </p:cNvPicPr>
@@ -3462,7 +3527,7 @@
         </p:blipFill>
         <p:spPr>
           <a:xfrm>
-            <a:off x="7525512" y="2633472"/>
+            <a:off x="7525512" y="2084832"/>
             <a:ext cx="1371600" cy="1371600"/>
           </a:xfrm>
           <a:prstGeom prst="rect">
@@ -3472,13 +3537,13 @@
       </p:pic>
       <p:sp>
         <p:nvSpPr>
-          <p:cNvPr id="8" name="Text 5"/>
-          <p:cNvSpPr/>
-          <p:nvPr/>
-        </p:nvSpPr>
-        <p:spPr>
-          <a:xfrm>
-            <a:off x="7452360" y="4187952"/>
+          <p:cNvPr id="9" name="Text 6"/>
+          <p:cNvSpPr/>
+          <p:nvPr/>
+        </p:nvSpPr>
+        <p:spPr>
+          <a:xfrm>
+            <a:off x="7452360" y="3639312"/>
             <a:ext cx="1508760" cy="320040"/>
           </a:xfrm>
           <a:prstGeom prst="rect">
@@ -3511,13 +3576,13 @@
       </p:sp>
       <p:sp>
         <p:nvSpPr>
-          <p:cNvPr id="9" name="Text 6"/>
-          <p:cNvSpPr/>
-          <p:nvPr/>
-        </p:nvSpPr>
-        <p:spPr>
-          <a:xfrm>
-            <a:off x="7452360" y="4553712"/>
+          <p:cNvPr id="10" name="Text 7"/>
+          <p:cNvSpPr/>
+          <p:nvPr/>
+        </p:nvSpPr>
+        <p:spPr>
+          <a:xfrm>
+            <a:off x="7452360" y="4005072"/>
             <a:ext cx="1554480" cy="914400"/>
           </a:xfrm>
           <a:prstGeom prst="rect">
@@ -3553,14 +3618,14 @@
       </p:sp>
       <p:sp>
         <p:nvSpPr>
-          <p:cNvPr id="10" name="Shape 7"/>
-          <p:cNvSpPr/>
-          <p:nvPr/>
-        </p:nvSpPr>
-        <p:spPr>
-          <a:xfrm>
-            <a:off x="9372600" y="2377440"/>
-            <a:ext cx="1874520" cy="3246120"/>
+          <p:cNvPr id="11" name="Shape 8"/>
+          <p:cNvSpPr/>
+          <p:nvPr/>
+        </p:nvSpPr>
+        <p:spPr>
+          <a:xfrm>
+            <a:off x="9372600" y="1828800"/>
+            <a:ext cx="1874520" cy="2788920"/>
           </a:xfrm>
           <a:prstGeom prst="roundRect">
             <a:avLst>
@@ -3580,7 +3645,7 @@
       </p:sp>
       <p:pic>
         <p:nvPicPr>
-          <p:cNvPr id="11" name="Image 1" descr="/Users/ryugi62/dev/rfp-to-fit/deliver/deck/build/img/qr-repo.png">    </p:cNvPr>
+          <p:cNvPr id="12" name="Image 1" descr="/Users/ryugi62/dev/rfp-to-fit/deliver/deck/build/img/qr-repo.png">    </p:cNvPr>
           <p:cNvPicPr>
             <a:picLocks noChangeAspect="1"/>
           </p:cNvPicPr>
@@ -3594,7 +3659,7 @@
         </p:blipFill>
         <p:spPr>
           <a:xfrm>
-            <a:off x="9628632" y="2633472"/>
+            <a:off x="9628632" y="2084832"/>
             <a:ext cx="1371600" cy="1371600"/>
           </a:xfrm>
           <a:prstGeom prst="rect">
@@ -3604,13 +3669,13 @@
       </p:pic>
       <p:sp>
         <p:nvSpPr>
-          <p:cNvPr id="12" name="Text 8"/>
-          <p:cNvSpPr/>
-          <p:nvPr/>
-        </p:nvSpPr>
-        <p:spPr>
-          <a:xfrm>
-            <a:off x="9555480" y="4187952"/>
+          <p:cNvPr id="13" name="Text 9"/>
+          <p:cNvSpPr/>
+          <p:nvPr/>
+        </p:nvSpPr>
+        <p:spPr>
+          <a:xfrm>
+            <a:off x="9555480" y="3639312"/>
             <a:ext cx="1508760" cy="320040"/>
           </a:xfrm>
           <a:prstGeom prst="rect">
@@ -3643,13 +3708,13 @@
       </p:sp>
       <p:sp>
         <p:nvSpPr>
-          <p:cNvPr id="13" name="Text 9"/>
-          <p:cNvSpPr/>
-          <p:nvPr/>
-        </p:nvSpPr>
-        <p:spPr>
-          <a:xfrm>
-            <a:off x="9555480" y="4553712"/>
+          <p:cNvPr id="14" name="Text 10"/>
+          <p:cNvSpPr/>
+          <p:nvPr/>
+        </p:nvSpPr>
+        <p:spPr>
+          <a:xfrm>
+            <a:off x="9555480" y="4005072"/>
             <a:ext cx="1554480" cy="914400"/>
           </a:xfrm>
           <a:prstGeom prst="rect">
@@ -3790,7 +3855,7 @@
                 <a:ea typeface="Arial" pitchFamily="34" charset="-122"/>
                 <a:cs typeface="Arial" pitchFamily="34" charset="-120"/>
               </a:rPr>
-              <a:t>제안서는 아이디어보다,</a:t>
+              <a:t>공고 한 건을 쪽마다 읽어 보니,</a:t>
             </a:r>
             <a:endParaRPr lang="en-US" sz="3400" dirty="0"/>
           </a:p>
@@ -3810,7 +3875,7 @@
                 <a:ea typeface="Arial" pitchFamily="34" charset="-122"/>
                 <a:cs typeface="Arial" pitchFamily="34" charset="-120"/>
               </a:rPr>
-              <a:t>심사표</a:t>
+              <a:t>지킬 것</a:t>
             </a:r>
             <a:pPr indent="0" marL="0">
               <a:lnSpc>
@@ -3827,7 +3892,7 @@
                 <a:ea typeface="Arial" pitchFamily="34" charset="-122"/>
                 <a:cs typeface="Arial" pitchFamily="34" charset="-120"/>
               </a:rPr>
-              <a:t>를 잘못 읽어서 떨어집니다</a:t>
+              <a:t>이 이만큼입니다</a:t>
             </a:r>
             <a:endParaRPr lang="en-US" sz="3400" dirty="0"/>
           </a:p>
@@ -4171,7 +4236,7 @@
                 <a:ea typeface="Arial" pitchFamily="34" charset="-122"/>
                 <a:cs typeface="Arial" pitchFamily="34" charset="-120"/>
               </a:rPr>
-              <a:t>산업통상부 공고 제2026-64호 — 요건·평가표를 쪽마다 판독해 만든 정답표(data/gold, 저장소 공개)</a:t>
+              <a:t>산업통상부 공고 제2026-64호 — 요건·평가표 정답표(data/gold, 저장소 공개) · 정답표는 파이프라인과 다른 모델(Claude)로 쪽마다 판독</a:t>
             </a:r>
             <a:endParaRPr lang="en-US" sz="1000" dirty="0"/>
           </a:p>
@@ -5064,7 +5129,7 @@
                 <a:ea typeface="Arial" pitchFamily="34" charset="-122"/>
                 <a:cs typeface="Arial" pitchFamily="34" charset="-120"/>
               </a:rPr>
-              <a:t>합의 결핍</a:t>
+              <a:t>합의 결핍 — 다 같이 깎은 곳</a:t>
             </a:r>
             <a:endParaRPr lang="en-US" sz="1300" dirty="0"/>
           </a:p>
@@ -5103,7 +5168,7 @@
                 <a:ea typeface="Arial" pitchFamily="34" charset="-122"/>
                 <a:cs typeface="Arial" pitchFamily="34" charset="-120"/>
               </a:rPr>
-              <a:t>5명 중 4명 이상이 깎은 곳</a:t>
+              <a:t>응답자의 80% 이상(5명 중 4명+)</a:t>
             </a:r>
             <a:endParaRPr lang="en-US" sz="1700" dirty="0"/>
           </a:p>
@@ -5208,7 +5273,7 @@
                 <a:ea typeface="Arial" pitchFamily="34" charset="-122"/>
                 <a:cs typeface="Arial" pitchFamily="34" charset="-120"/>
               </a:rPr>
-              <a:t>논쟁 지점</a:t>
+              <a:t>논쟁 지점 — 의견이 갈린 곳</a:t>
             </a:r>
             <a:endParaRPr lang="en-US" sz="1300" dirty="0"/>
           </a:p>
@@ -5247,7 +5312,7 @@
                 <a:ea typeface="Arial" pitchFamily="34" charset="-122"/>
                 <a:cs typeface="Arial" pitchFamily="34" charset="-120"/>
               </a:rPr>
-              <a:t>의견이 2~3명으로 갈린 곳</a:t>
+              <a:t>응답자의 20~80%가 깎음(5명 중 2~3명)</a:t>
             </a:r>
             <a:endParaRPr lang="en-US" sz="1700" dirty="0"/>
           </a:p>
@@ -5300,24 +5365,47 @@
         </p:nvSpPr>
         <p:spPr>
           <a:xfrm>
-            <a:off x="822960" y="5897880"/>
-            <a:ext cx="10543032" cy="365760"/>
-          </a:xfrm>
-          <a:prstGeom prst="rect">
-            <a:avLst/>
-          </a:prstGeom>
-          <a:noFill/>
-          <a:ln/>
-        </p:spPr>
-        <p:txBody>
-          <a:bodyPr wrap="square" lIns="0" tIns="0" rIns="0" bIns="0" rtlCol="0" anchor="t"/>
-          <a:lstStyle/>
-          <a:p>
-            <a:pPr indent="0" marL="0">
-              <a:buNone/>
-            </a:pPr>
-            <a:r>
-              <a:rPr lang="en-US" sz="1350" dirty="0">
+            <a:off x="822960" y="5715000"/>
+            <a:ext cx="10543032" cy="685800"/>
+          </a:xfrm>
+          <a:prstGeom prst="rect">
+            <a:avLst/>
+          </a:prstGeom>
+          <a:noFill/>
+          <a:ln/>
+        </p:spPr>
+        <p:txBody>
+          <a:bodyPr wrap="square" lIns="0" tIns="0" rIns="0" bIns="0" rtlCol="0" anchor="t"/>
+          <a:lstStyle/>
+          <a:p>
+            <a:pPr indent="0" marL="0">
+              <a:lnSpc>
+                <a:spcPct val="125000"/>
+              </a:lnSpc>
+              <a:buNone/>
+            </a:pPr>
+            <a:r>
+              <a:rPr lang="en-US" sz="1300" b="1" dirty="0">
+                <a:solidFill>
+                  <a:srgbClr val="191F28"/>
+                </a:solidFill>
+                <a:latin typeface="Arial" pitchFamily="34" charset="0"/>
+                <a:ea typeface="Arial" pitchFamily="34" charset="-122"/>
+                <a:cs typeface="Arial" pitchFamily="34" charset="-120"/>
+              </a:rPr>
+              <a:t>대필·첨삭이 아니라 심사입니다.</a:t>
+            </a:r>
+            <a:endParaRPr lang="en-US" sz="1300" dirty="0"/>
+          </a:p>
+          <a:p>
+            <a:pPr indent="0" marL="0">
+              <a:lnSpc>
+                <a:spcPct val="125000"/>
+              </a:lnSpc>
+              <a:buNone/>
+            </a:pPr>
+            <a:r>
+              <a:rPr lang="en-US" sz="1300" dirty="0">
                 <a:solidFill>
                   <a:srgbClr val="4E5968"/>
                 </a:solidFill>
@@ -5325,9 +5413,9 @@
                 <a:ea typeface="Arial" pitchFamily="34" charset="-122"/>
                 <a:cs typeface="Arial" pitchFamily="34" charset="-120"/>
               </a:rPr>
-              <a:t>평가위원 모델도 나눴습니다 — Gemini 3명 + 국산 Solar 2명. 한 회사 모델의 치우침이 '합의'로 굳지 않게.</a:t>
-            </a:r>
-            <a:endParaRPr lang="en-US" sz="1350" dirty="0"/>
+              <a:t>과거 심사 기록 없이 이번 공고 심사표에서 질문을 만들고 · 평가위원 Gemini 3명 + 국산 Solar 2명 · 칭찬에도 원문 인용</a:t>
+            </a:r>
+            <a:endParaRPr lang="en-US" sz="1300" dirty="0"/>
           </a:p>
         </p:txBody>
       </p:sp>
@@ -5438,7 +5526,7 @@
                 <a:ea typeface="Arial" pitchFamily="34" charset="-122"/>
                 <a:cs typeface="Arial" pitchFamily="34" charset="-120"/>
               </a:rPr>
-              <a:t>공고 한 건과 초안 한 편,</a:t>
+              <a:t>초안 한 편을 넣으면,</a:t>
             </a:r>
             <a:endParaRPr lang="en-US" sz="3400" dirty="0"/>
           </a:p>
@@ -5592,7 +5680,7 @@
                 <a:ea typeface="Arial" pitchFamily="34" charset="-122"/>
                 <a:cs typeface="Arial" pitchFamily="34" charset="-120"/>
               </a:rPr>
-              <a:t>모두 공고 쪽 번호와 원문 인용이 붙습니다</a:t>
+              <a:t>공고 파싱은 처음 한 번(5쪽 15초·37쪽 41초)</a:t>
             </a:r>
             <a:endParaRPr lang="en-US" sz="1250" dirty="0"/>
           </a:p>
@@ -5787,7 +5875,7 @@
                 <a:ea typeface="Arial" pitchFamily="34" charset="-122"/>
                 <a:cs typeface="Arial" pitchFamily="34" charset="-120"/>
               </a:rPr>
-              <a:t>고칠 곳 0 · 판단할 곳 2</a:t>
+              <a:t>고칠 곳과 판단할 곳을 나눠 표시</a:t>
             </a:r>
             <a:endParaRPr lang="en-US" sz="1600" dirty="0"/>
           </a:p>
@@ -5826,7 +5914,7 @@
                 <a:ea typeface="Arial" pitchFamily="34" charset="-122"/>
                 <a:cs typeface="Arial" pitchFamily="34" charset="-120"/>
               </a:rPr>
-              <a:t>보완은 문장 대신 「무엇을·어디에」만</a:t>
+              <a:t>보완은 문장 대신 「무엇을·어디에」만 지정</a:t>
             </a:r>
             <a:endParaRPr lang="en-US" sz="1250" dirty="0"/>
           </a:p>
@@ -5841,11 +5929,11 @@
         <p:spPr>
           <a:xfrm>
             <a:off x="5532120" y="2697480"/>
-            <a:ext cx="5833872" cy="1965960"/>
+            <a:ext cx="4768504" cy="1783080"/>
           </a:xfrm>
           <a:prstGeom prst="roundRect">
             <a:avLst>
-              <a:gd name="adj" fmla="val 3721"/>
+              <a:gd name="adj" fmla="val 4103"/>
             </a:avLst>
           </a:prstGeom>
           <a:solidFill>
@@ -5875,8 +5963,8 @@
         </p:blipFill>
         <p:spPr>
           <a:xfrm>
-            <a:off x="5875601" y="2788920"/>
-            <a:ext cx="5146910" cy="1783080"/>
+            <a:off x="5623560" y="2788920"/>
+            <a:ext cx="4585624" cy="1538830"/>
           </a:xfrm>
           <a:prstGeom prst="rect">
             <a:avLst/>
@@ -5891,12 +5979,12 @@
         </p:nvSpPr>
         <p:spPr>
           <a:xfrm>
-            <a:off x="5532120" y="4846320"/>
-            <a:ext cx="5833872" cy="1371600"/>
+            <a:off x="5532120" y="4663440"/>
+            <a:ext cx="3176980" cy="1554480"/>
           </a:xfrm>
           <a:prstGeom prst="roundRect">
             <a:avLst>
-              <a:gd name="adj" fmla="val 5333"/>
+              <a:gd name="adj" fmla="val 4706"/>
             </a:avLst>
           </a:prstGeom>
           <a:solidFill>
@@ -5926,8 +6014,8 @@
         </p:blipFill>
         <p:spPr>
           <a:xfrm>
-            <a:off x="6384376" y="4937760"/>
-            <a:ext cx="4129360" cy="1188720"/>
+            <a:off x="5623560" y="4754880"/>
+            <a:ext cx="2994100" cy="1292645"/>
           </a:xfrm>
           <a:prstGeom prst="rect">
             <a:avLst/>
@@ -7570,46 +7658,7 @@
       </p:sp>
       <p:sp>
         <p:nvSpPr>
-          <p:cNvPr id="47" name="Text 45"/>
-          <p:cNvSpPr/>
-          <p:nvPr/>
-        </p:nvSpPr>
-        <p:spPr>
-          <a:xfrm>
-            <a:off x="9504274" y="5129784"/>
-            <a:ext cx="444398" cy="228600"/>
-          </a:xfrm>
-          <a:prstGeom prst="rect">
-            <a:avLst/>
-          </a:prstGeom>
-          <a:noFill/>
-          <a:ln/>
-        </p:spPr>
-        <p:txBody>
-          <a:bodyPr wrap="square" lIns="0" tIns="0" rIns="0" bIns="0" rtlCol="0" anchor="t"/>
-          <a:lstStyle/>
-          <a:p>
-            <a:pPr algn="ctr" indent="0" marL="0">
-              <a:buNone/>
-            </a:pPr>
-            <a:r>
-              <a:rPr lang="en-US" sz="1000" b="1" dirty="0">
-                <a:solidFill>
-                  <a:srgbClr val="3182F6"/>
-                </a:solidFill>
-                <a:latin typeface="Arial" pitchFamily="34" charset="0"/>
-                <a:ea typeface="Arial" pitchFamily="34" charset="-122"/>
-                <a:cs typeface="Arial" pitchFamily="34" charset="-120"/>
-              </a:rPr>
-              <a:t>↺ 1회</a:t>
-            </a:r>
-            <a:endParaRPr lang="en-US" sz="1000" dirty="0"/>
-          </a:p>
-        </p:txBody>
-      </p:sp>
-      <p:sp>
-        <p:nvSpPr>
-          <p:cNvPr id="48" name="Shape 46"/>
+          <p:cNvPr id="47" name="Shape 45"/>
           <p:cNvSpPr/>
           <p:nvPr/>
         </p:nvSpPr>
@@ -7636,7 +7685,7 @@
       </p:sp>
       <p:sp>
         <p:nvSpPr>
-          <p:cNvPr id="49" name="Text 47"/>
+          <p:cNvPr id="48" name="Text 46"/>
           <p:cNvSpPr/>
           <p:nvPr/>
         </p:nvSpPr>
@@ -7675,7 +7724,7 @@
       </p:sp>
       <p:sp>
         <p:nvSpPr>
-          <p:cNvPr id="50" name="Shape 48"/>
+          <p:cNvPr id="49" name="Shape 47"/>
           <p:cNvSpPr/>
           <p:nvPr/>
         </p:nvSpPr>
@@ -7702,7 +7751,7 @@
       </p:sp>
       <p:sp>
         <p:nvSpPr>
-          <p:cNvPr id="51" name="Text 49"/>
+          <p:cNvPr id="50" name="Text 48"/>
           <p:cNvSpPr/>
           <p:nvPr/>
         </p:nvSpPr>
@@ -7741,7 +7790,7 @@
       </p:sp>
       <p:sp>
         <p:nvSpPr>
-          <p:cNvPr id="52" name="Shape 50"/>
+          <p:cNvPr id="51" name="Shape 49"/>
           <p:cNvSpPr/>
           <p:nvPr/>
         </p:nvSpPr>
@@ -7768,7 +7817,7 @@
       </p:sp>
       <p:sp>
         <p:nvSpPr>
-          <p:cNvPr id="53" name="Text 51"/>
+          <p:cNvPr id="52" name="Text 50"/>
           <p:cNvSpPr/>
           <p:nvPr/>
         </p:nvSpPr>
@@ -7807,7 +7856,7 @@
       </p:sp>
       <p:sp>
         <p:nvSpPr>
-          <p:cNvPr id="54" name="Shape 52"/>
+          <p:cNvPr id="53" name="Shape 51"/>
           <p:cNvSpPr/>
           <p:nvPr/>
         </p:nvSpPr>
@@ -7830,7 +7879,7 @@
       </p:sp>
       <p:sp>
         <p:nvSpPr>
-          <p:cNvPr id="55" name="Text 53"/>
+          <p:cNvPr id="54" name="Text 52"/>
           <p:cNvSpPr/>
           <p:nvPr/>
         </p:nvSpPr>
@@ -7869,7 +7918,7 @@
       </p:sp>
       <p:sp>
         <p:nvSpPr>
-          <p:cNvPr id="56" name="Text 54"/>
+          <p:cNvPr id="55" name="Text 53"/>
           <p:cNvSpPr/>
           <p:nvPr/>
         </p:nvSpPr>
@@ -8319,23 +8368,23 @@
         <p:spPr>
           <a:xfrm>
             <a:off x="3429000" y="2596896"/>
-            <a:ext cx="2743200" cy="274320"/>
-          </a:xfrm>
-          <a:prstGeom prst="rect">
-            <a:avLst/>
-          </a:prstGeom>
-          <a:noFill/>
-          <a:ln/>
-        </p:spPr>
-        <p:txBody>
-          <a:bodyPr wrap="square" lIns="0" tIns="0" rIns="0" bIns="0" rtlCol="0" anchor="t"/>
-          <a:lstStyle/>
-          <a:p>
-            <a:pPr indent="0" marL="0">
-              <a:buNone/>
-            </a:pPr>
-            <a:r>
-              <a:rPr lang="en-US" sz="1150" b="1" dirty="0">
+            <a:ext cx="4892040" cy="274320"/>
+          </a:xfrm>
+          <a:prstGeom prst="rect">
+            <a:avLst/>
+          </a:prstGeom>
+          <a:noFill/>
+          <a:ln/>
+        </p:spPr>
+        <p:txBody>
+          <a:bodyPr wrap="square" lIns="0" tIns="0" rIns="0" bIns="0" rtlCol="0" anchor="t"/>
+          <a:lstStyle/>
+          <a:p>
+            <a:pPr indent="0" marL="0">
+              <a:buNone/>
+            </a:pPr>
+            <a:r>
+              <a:rPr lang="en-US" sz="1100" b="1" dirty="0">
                 <a:solidFill>
                   <a:srgbClr val="4E5968"/>
                 </a:solidFill>
@@ -8343,9 +8392,9 @@
                 <a:ea typeface="Arial" pitchFamily="34" charset="-122"/>
                 <a:cs typeface="Arial" pitchFamily="34" charset="-120"/>
               </a:rPr>
-              <a:t>LangGraph 상태 그래프</a:t>
-            </a:r>
-            <a:endParaRPr lang="en-US" sz="1150" dirty="0"/>
+              <a:t>LangGraph 상태 그래프 — 원문을 통째로 넣고 인용으로 대조(RAG 대신)</a:t>
+            </a:r>
+            <a:endParaRPr lang="en-US" sz="1100" dirty="0"/>
           </a:p>
         </p:txBody>
       </p:sp>
@@ -8627,7 +8676,7 @@
         </p:nvSpPr>
         <p:spPr>
           <a:xfrm>
-            <a:off x="3429000" y="3886200"/>
+            <a:off x="7223760" y="3886200"/>
             <a:ext cx="1097280" cy="566928"/>
           </a:xfrm>
           <a:prstGeom prst="roundRect">
@@ -8654,7 +8703,7 @@
         </p:nvSpPr>
         <p:spPr>
           <a:xfrm>
-            <a:off x="3474720" y="3959352"/>
+            <a:off x="7269480" y="3959352"/>
             <a:ext cx="1005840" cy="420624"/>
           </a:xfrm>
           <a:prstGeom prst="rect">
@@ -8692,8 +8741,8 @@
           <p:nvPr/>
         </p:nvSpPr>
         <p:spPr>
-          <a:xfrm>
-            <a:off x="4544568" y="4169664"/>
+          <a:xfrm flipH="1">
+            <a:off x="7074408" y="4169664"/>
             <a:ext cx="131064" cy="0"/>
           </a:xfrm>
           <a:prstGeom prst="line">
@@ -8717,7 +8766,7 @@
         </p:nvSpPr>
         <p:spPr>
           <a:xfrm>
-            <a:off x="4693920" y="3886200"/>
+            <a:off x="5958840" y="3886200"/>
             <a:ext cx="1097280" cy="566928"/>
           </a:xfrm>
           <a:prstGeom prst="roundRect">
@@ -8744,7 +8793,7 @@
         </p:nvSpPr>
         <p:spPr>
           <a:xfrm>
-            <a:off x="4739640" y="3959352"/>
+            <a:off x="6004560" y="3959352"/>
             <a:ext cx="1005840" cy="420624"/>
           </a:xfrm>
           <a:prstGeom prst="rect">
@@ -8769,7 +8818,7 @@
                 <a:ea typeface="Arial" pitchFamily="34" charset="-122"/>
                 <a:cs typeface="Arial" pitchFamily="34" charset="-120"/>
               </a:rPr>
-              <a:t>재질의 ↺</a:t>
+              <a:t>재질의(1회)</a:t>
             </a:r>
             <a:endParaRPr lang="en-US" sz="1200" dirty="0"/>
           </a:p>
@@ -8782,7 +8831,7 @@
           <p:nvPr/>
         </p:nvSpPr>
         <p:spPr>
-          <a:xfrm>
+          <a:xfrm flipH="1">
             <a:off x="5809488" y="4169664"/>
             <a:ext cx="131064" cy="0"/>
           </a:xfrm>
@@ -8807,7 +8856,7 @@
         </p:nvSpPr>
         <p:spPr>
           <a:xfrm>
-            <a:off x="5958840" y="3886200"/>
+            <a:off x="4693920" y="3886200"/>
             <a:ext cx="1097280" cy="566928"/>
           </a:xfrm>
           <a:prstGeom prst="roundRect">
@@ -8834,7 +8883,7 @@
         </p:nvSpPr>
         <p:spPr>
           <a:xfrm>
-            <a:off x="6004560" y="3959352"/>
+            <a:off x="4739640" y="3959352"/>
             <a:ext cx="1005840" cy="420624"/>
           </a:xfrm>
           <a:prstGeom prst="rect">
@@ -8872,8 +8921,8 @@
           <p:nvPr/>
         </p:nvSpPr>
         <p:spPr>
-          <a:xfrm>
-            <a:off x="7074408" y="4169664"/>
+          <a:xfrm flipH="1">
+            <a:off x="4544568" y="4169664"/>
             <a:ext cx="131064" cy="0"/>
           </a:xfrm>
           <a:prstGeom prst="line">
@@ -8897,7 +8946,7 @@
         </p:nvSpPr>
         <p:spPr>
           <a:xfrm>
-            <a:off x="7223760" y="3886200"/>
+            <a:off x="3429000" y="3886200"/>
             <a:ext cx="1097280" cy="566928"/>
           </a:xfrm>
           <a:prstGeom prst="roundRect">
@@ -8924,7 +8973,7 @@
         </p:nvSpPr>
         <p:spPr>
           <a:xfrm>
-            <a:off x="7269480" y="3959352"/>
+            <a:off x="3474720" y="3959352"/>
             <a:ext cx="1005840" cy="420624"/>
           </a:xfrm>
           <a:prstGeom prst="rect">
@@ -8962,9 +9011,9 @@
           <p:nvPr/>
         </p:nvSpPr>
         <p:spPr>
-          <a:xfrm flipH="1">
-            <a:off x="4160520" y="3566160"/>
-            <a:ext cx="3451860" cy="292608"/>
+          <a:xfrm>
+            <a:off x="7772400" y="3557016"/>
+            <a:ext cx="0" cy="310896"/>
           </a:xfrm>
           <a:prstGeom prst="line">
             <a:avLst/>
@@ -9183,7 +9232,7 @@
                 <a:ea typeface="Arial" pitchFamily="34" charset="-122"/>
                 <a:cs typeface="Arial" pitchFamily="34" charset="-120"/>
               </a:rPr>
-              <a:t>평가위원 2명 · 장애 시 상호 대체</a:t>
+              <a:t>평가위원 2명 · 다른 회사 모델로 교차</a:t>
             </a:r>
             <a:endParaRPr lang="en-US" sz="1050" dirty="0"/>
           </a:p>
@@ -9263,8 +9312,8 @@
         </p:nvSpPr>
         <p:spPr>
           <a:xfrm>
-            <a:off x="9034272" y="2926080"/>
-            <a:ext cx="2221992" cy="594360"/>
+            <a:off x="9034272" y="2898648"/>
+            <a:ext cx="2221992" cy="685800"/>
           </a:xfrm>
           <a:prstGeom prst="rect">
             <a:avLst/>
@@ -9278,7 +9327,7 @@
           <a:p>
             <a:pPr indent="0" marL="0">
               <a:lnSpc>
-                <a:spcPct val="120000"/>
+                <a:spcPct val="110000"/>
               </a:lnSpc>
               <a:buNone/>
             </a:pPr>
@@ -9291,14 +9340,34 @@
                 <a:ea typeface="Arial" pitchFamily="34" charset="-122"/>
                 <a:cs typeface="Arial" pitchFamily="34" charset="-120"/>
               </a:rPr>
-              <a:t>search_prior_art · stdio</a:t>
+              <a:t>AI 도구 연결 표준</a:t>
             </a:r>
             <a:endParaRPr lang="en-US" sz="1050" dirty="0"/>
           </a:p>
           <a:p>
             <a:pPr indent="0" marL="0">
               <a:lnSpc>
-                <a:spcPct val="120000"/>
+                <a:spcPct val="110000"/>
+              </a:lnSpc>
+              <a:buNone/>
+            </a:pPr>
+            <a:r>
+              <a:rPr lang="en-US" sz="1050" dirty="0">
+                <a:solidFill>
+                  <a:srgbClr val="4E5968"/>
+                </a:solidFill>
+                <a:latin typeface="Arial" pitchFamily="34" charset="0"/>
+                <a:ea typeface="Arial" pitchFamily="34" charset="-122"/>
+                <a:cs typeface="Arial" pitchFamily="34" charset="-120"/>
+              </a:rPr>
+              <a:t>search_prior_art · check_quote</a:t>
+            </a:r>
+            <a:endParaRPr lang="en-US" sz="1050" dirty="0"/>
+          </a:p>
+          <a:p>
+            <a:pPr indent="0" marL="0">
+              <a:lnSpc>
+                <a:spcPct val="110000"/>
               </a:lnSpc>
               <a:buNone/>
             </a:pPr>
@@ -9440,7 +9509,7 @@
                 <a:ea typeface="Arial" pitchFamily="34" charset="-122"/>
                 <a:cs typeface="Arial" pitchFamily="34" charset="-120"/>
               </a:rPr>
-              <a:t>공개 학술 DB · 선행연구 검색</a:t>
+              <a:t>선행연구 → 혁신성 판정 참고</a:t>
             </a:r>
             <a:endParaRPr lang="en-US" sz="1050" dirty="0"/>
           </a:p>
@@ -9583,8 +9652,8 @@
         </p:nvSpPr>
         <p:spPr>
           <a:xfrm>
-            <a:off x="822960" y="5943600"/>
-            <a:ext cx="10543032" cy="320040"/>
+            <a:off x="822960" y="5852160"/>
+            <a:ext cx="10543032" cy="274320"/>
           </a:xfrm>
           <a:prstGeom prst="rect">
             <a:avLst/>
@@ -9609,6 +9678,45 @@
                 <a:cs typeface="Arial" pitchFamily="34" charset="-120"/>
               </a:rPr>
               <a:t>데이터: 공개 R&amp;D 공고 3건(국가과학기술연구회·우주항공청·산업통상부) + 쪽별 정답표 · 인용 검사·집계는 LLM을 모르는 순수 코드(테스트 22개)</a:t>
+            </a:r>
+            <a:endParaRPr lang="en-US" sz="1200" dirty="0"/>
+          </a:p>
+        </p:txBody>
+      </p:sp>
+      <p:sp>
+        <p:nvSpPr>
+          <p:cNvPr id="51" name="Text 49"/>
+          <p:cNvSpPr/>
+          <p:nvPr/>
+        </p:nvSpPr>
+        <p:spPr>
+          <a:xfrm>
+            <a:off x="822960" y="6172200"/>
+            <a:ext cx="10543032" cy="274320"/>
+          </a:xfrm>
+          <a:prstGeom prst="rect">
+            <a:avLst/>
+          </a:prstGeom>
+          <a:noFill/>
+          <a:ln/>
+        </p:spPr>
+        <p:txBody>
+          <a:bodyPr wrap="square" lIns="0" tIns="0" rIns="0" bIns="0" rtlCol="0" anchor="t"/>
+          <a:lstStyle/>
+          <a:p>
+            <a:pPr indent="0" marL="0">
+              <a:buNone/>
+            </a:pPr>
+            <a:r>
+              <a:rPr lang="en-US" sz="1200" dirty="0">
+                <a:solidFill>
+                  <a:srgbClr val="4E5968"/>
+                </a:solidFill>
+                <a:latin typeface="Arial" pitchFamily="34" charset="0"/>
+                <a:ea typeface="Arial" pitchFamily="34" charset="-122"/>
+                <a:cs typeface="Arial" pitchFamily="34" charset="-120"/>
+              </a:rPr>
+              <a:t>보안: 초안은 서버에 저장하지 않지만 외부 모델 API로는 전송됩니다 — LLM은 포트로 분리돼 국산·기관 내부 모델로 교체할 수 있는 구조</a:t>
             </a:r>
             <a:endParaRPr lang="en-US" sz="1200" dirty="0"/>
           </a:p>
@@ -9679,7 +9787,7 @@
                 <a:ea typeface="Arial" pitchFamily="34" charset="-122"/>
                 <a:cs typeface="Arial" pitchFamily="34" charset="-120"/>
               </a:rPr>
-              <a:t>가짜로 돌아가는 척을 못 하게</a:t>
+              <a:t>없는 인용은 통과하지 못하게</a:t>
             </a:r>
             <a:endParaRPr lang="en-US" sz="1400" dirty="0"/>
           </a:p>
@@ -10288,7 +10396,7 @@
                 <a:ea typeface="Arial" pitchFamily="34" charset="-122"/>
                 <a:cs typeface="Arial" pitchFamily="34" charset="-120"/>
               </a:rPr>
-              <a:t>재질의로 원문 인용 교정</a:t>
+              <a:t>다시 물은 뒤 무효에서 벗어남(인용 통과 또는 「부족」으로 하향)</a:t>
             </a:r>
             <a:endParaRPr lang="en-US" sz="1250" dirty="0"/>
           </a:p>
@@ -10350,7 +10458,7 @@
                 <a:ea typeface="Arial" pitchFamily="34" charset="-122"/>
                 <a:cs typeface="Arial" pitchFamily="34" charset="-120"/>
               </a:rPr>
-              <a:t>같은 검사를 공고에도 겁니다 — 요건·심사표도 그 쪽에 원문이 없으면 버립니다.</a:t>
+              <a:t>한계: 인용이 판정을 뒷받침하는지는 사람이 봅니다 — 그래서 화면에 인용을 그대로 펼쳐 둡니다.</a:t>
             </a:r>
             <a:endParaRPr lang="en-US" sz="1500" dirty="0"/>
           </a:p>
@@ -10389,7 +10497,7 @@
                 <a:ea typeface="Arial" pitchFamily="34" charset="-122"/>
                 <a:cs typeface="Arial" pitchFamily="34" charset="-120"/>
               </a:rPr>
-              <a:t>숫자: 예선 기획서 실행 기록(data/runs/nais-hackathon-2026--original.json의 trace)</a:t>
+              <a:t>숫자: 예선 기획서 실행 기록(data/runs/nais-hackathon-2026--original.json의 trace) · 이번 실행은 평가위원 4/5명 응답(1명 응답 실패 — 복구 중)</a:t>
             </a:r>
             <a:endParaRPr lang="en-US" sz="1000" dirty="0"/>
           </a:p>
@@ -10554,7 +10662,7 @@
         <p:spPr>
           <a:xfrm>
             <a:off x="822960" y="2606040"/>
-            <a:ext cx="5852160" cy="320040"/>
+            <a:ext cx="6035040" cy="320040"/>
           </a:xfrm>
           <a:prstGeom prst="rect">
             <a:avLst/>
@@ -10578,7 +10686,7 @@
                 <a:ea typeface="Arial" pitchFamily="34" charset="-122"/>
                 <a:cs typeface="Arial" pitchFamily="34" charset="-120"/>
               </a:rPr>
-              <a:t>공고 파싱 — 정답표 대비 요건 재현율 (목표 90%)</a:t>
+              <a:t>① 공고 파싱 — 정답표 요건을 놓치지 않은 비율(재현율, 목표 90%)</a:t>
             </a:r>
             <a:endParaRPr lang="en-US" sz="1300" dirty="0"/>
           </a:p>
@@ -10592,7 +10700,7 @@
         </p:nvGraphicFramePr>
         <p:xfrm>
           <a:off x="731520" y="2926080"/>
-          <a:ext cx="5943600" cy="2331720"/>
+          <a:ext cx="5943600" cy="2240280"/>
         </p:xfrm>
         <a:graphic xmlns:a="http://schemas.openxmlformats.org/drawingml/2006/main">
           <a:graphicData uri="http://schemas.openxmlformats.org/drawingml/2006/chart">
@@ -10608,8 +10716,8 @@
         </p:nvSpPr>
         <p:spPr>
           <a:xfrm>
-            <a:off x="822960" y="5349240"/>
-            <a:ext cx="5852160" cy="502920"/>
+            <a:off x="822960" y="5257800"/>
+            <a:ext cx="6035040" cy="548640"/>
           </a:xfrm>
           <a:prstGeom prst="rect">
             <a:avLst/>
@@ -10636,7 +10744,7 @@
                 <a:ea typeface="Arial" pitchFamily="34" charset="-122"/>
                 <a:cs typeface="Arial" pitchFamily="34" charset="-120"/>
               </a:rPr>
-              <a:t>우주항공청 37/39 · 산업통상부 53/58 · NAIS 14/26 — NAIS 공고가 가장 약한 곳, 그대로 공개합니다</a:t>
+              <a:t>우주항공청 37/39 · 산업통상부 53/58 — 가장 약한 곳: NAIS 해커톤 14/26, 심사표 일치 0%(놓친 12건 중 5건이 기획서 작성 항목)</a:t>
             </a:r>
             <a:endParaRPr lang="en-US" sz="1150" dirty="0"/>
           </a:p>
@@ -10651,6 +10759,45 @@
         <p:spPr>
           <a:xfrm>
             <a:off x="7406640" y="2606040"/>
+            <a:ext cx="3959352" cy="320040"/>
+          </a:xfrm>
+          <a:prstGeom prst="rect">
+            <a:avLst/>
+          </a:prstGeom>
+          <a:noFill/>
+          <a:ln/>
+        </p:spPr>
+        <p:txBody>
+          <a:bodyPr wrap="square" lIns="0" tIns="0" rIns="0" bIns="0" rtlCol="0" anchor="t"/>
+          <a:lstStyle/>
+          <a:p>
+            <a:pPr indent="0" marL="0">
+              <a:buNone/>
+            </a:pPr>
+            <a:r>
+              <a:rPr lang="en-US" sz="1300" b="1" dirty="0">
+                <a:solidFill>
+                  <a:srgbClr val="4E5968"/>
+                </a:solidFill>
+                <a:latin typeface="Arial" pitchFamily="34" charset="0"/>
+                <a:ea typeface="Arial" pitchFamily="34" charset="-122"/>
+                <a:cs typeface="Arial" pitchFamily="34" charset="-120"/>
+              </a:rPr>
+              <a:t>② 일부러 지운 초안 시험 (예선 심사표)</a:t>
+            </a:r>
+            <a:endParaRPr lang="en-US" sz="1300" dirty="0"/>
+          </a:p>
+        </p:txBody>
+      </p:sp>
+      <p:sp>
+        <p:nvSpPr>
+          <p:cNvPr id="8" name="Text 5"/>
+          <p:cNvSpPr/>
+          <p:nvPr/>
+        </p:nvSpPr>
+        <p:spPr>
+          <a:xfrm>
+            <a:off x="7406640" y="2926080"/>
             <a:ext cx="3959352" cy="868680"/>
           </a:xfrm>
           <a:prstGeom prst="rect">
@@ -10675,7 +10822,7 @@
                 <a:ea typeface="Arial" pitchFamily="34" charset="-122"/>
                 <a:cs typeface="Arial" pitchFamily="34" charset="-120"/>
               </a:rPr>
-              <a:t>2/5</a:t>
+              <a:t>4/5</a:t>
             </a:r>
             <a:endParaRPr lang="en-US" sz="4400" dirty="0"/>
           </a:p>
@@ -10683,13 +10830,13 @@
       </p:sp>
       <p:sp>
         <p:nvSpPr>
-          <p:cNvPr id="8" name="Text 5"/>
-          <p:cNvSpPr/>
-          <p:nvPr/>
-        </p:nvSpPr>
-        <p:spPr>
-          <a:xfrm>
-            <a:off x="7406640" y="3474720"/>
+          <p:cNvPr id="9" name="Text 6"/>
+          <p:cNvSpPr/>
+          <p:nvPr/>
+        </p:nvSpPr>
+        <p:spPr>
+          <a:xfrm>
+            <a:off x="7406640" y="3794760"/>
             <a:ext cx="3959352" cy="685800"/>
           </a:xfrm>
           <a:prstGeom prst="rect">
@@ -10717,110 +10864,10 @@
                 <a:ea typeface="Arial" pitchFamily="34" charset="-122"/>
                 <a:cs typeface="Arial" pitchFamily="34" charset="-120"/>
               </a:rPr>
-              <a:t>결함 주입 — 지표별 블록을 하나씩 지운 초안 5개 중 지운 곳을 짚은 수 · 정밀도 40%</a:t>
+              <a:t>근거 블록을 하나씩 지운 초안 5개 중 짚은 수</a:t>
             </a:r>
             <a:endParaRPr lang="en-US" sz="1250" dirty="0"/>
           </a:p>
-        </p:txBody>
-      </p:sp>
-      <p:sp>
-        <p:nvSpPr>
-          <p:cNvPr id="9" name="Text 6"/>
-          <p:cNvSpPr/>
-          <p:nvPr/>
-        </p:nvSpPr>
-        <p:spPr>
-          <a:xfrm>
-            <a:off x="7406640" y="3931920"/>
-            <a:ext cx="3959352" cy="274320"/>
-          </a:xfrm>
-          <a:prstGeom prst="rect">
-            <a:avLst/>
-          </a:prstGeom>
-          <a:noFill/>
-          <a:ln/>
-        </p:spPr>
-        <p:txBody>
-          <a:bodyPr wrap="square" lIns="0" tIns="0" rIns="0" bIns="0" rtlCol="0" anchor="t"/>
-          <a:lstStyle/>
-          <a:p>
-            <a:pPr indent="0" marL="0">
-              <a:buNone/>
-            </a:pPr>
-            <a:r>
-              <a:rPr lang="en-US" sz="1150" b="1" dirty="0">
-                <a:solidFill>
-                  <a:srgbClr val="4E5968"/>
-                </a:solidFill>
-                <a:latin typeface="Arial" pitchFamily="34" charset="0"/>
-                <a:ea typeface="Arial" pitchFamily="34" charset="-122"/>
-                <a:cs typeface="Arial" pitchFamily="34" charset="-120"/>
-              </a:rPr>
-              <a:t>약한 숫자도 그대로 둡니다 — 항목 단위 감도가 다음 과제</a:t>
-            </a:r>
-            <a:endParaRPr lang="en-US" sz="1150" dirty="0"/>
-          </a:p>
-        </p:txBody>
-      </p:sp>
-      <p:sp>
-        <p:nvSpPr>
-          <p:cNvPr id="10" name="Text 7"/>
-          <p:cNvSpPr/>
-          <p:nvPr/>
-        </p:nvSpPr>
-        <p:spPr>
-          <a:xfrm>
-            <a:off x="7406640" y="4343400"/>
-            <a:ext cx="3959352" cy="868680"/>
-          </a:xfrm>
-          <a:prstGeom prst="rect">
-            <a:avLst/>
-          </a:prstGeom>
-          <a:noFill/>
-          <a:ln/>
-        </p:spPr>
-        <p:txBody>
-          <a:bodyPr wrap="square" lIns="0" tIns="0" rIns="0" bIns="0" rtlCol="0" anchor="t"/>
-          <a:lstStyle/>
-          <a:p>
-            <a:pPr indent="0" marL="0">
-              <a:buNone/>
-            </a:pPr>
-            <a:r>
-              <a:rPr lang="en-US" sz="4400" b="1" dirty="0">
-                <a:solidFill>
-                  <a:srgbClr val="191F28"/>
-                </a:solidFill>
-                <a:latin typeface="Arial" pitchFamily="34" charset="0"/>
-                <a:ea typeface="Arial" pitchFamily="34" charset="-122"/>
-                <a:cs typeface="Arial" pitchFamily="34" charset="-120"/>
-              </a:rPr>
-              <a:t>44초</a:t>
-            </a:r>
-            <a:endParaRPr lang="en-US" sz="4400" dirty="0"/>
-          </a:p>
-        </p:txBody>
-      </p:sp>
-      <p:sp>
-        <p:nvSpPr>
-          <p:cNvPr id="11" name="Text 8"/>
-          <p:cNvSpPr/>
-          <p:nvPr/>
-        </p:nvSpPr>
-        <p:spPr>
-          <a:xfrm>
-            <a:off x="7406640" y="5212080"/>
-            <a:ext cx="3959352" cy="685800"/>
-          </a:xfrm>
-          <a:prstGeom prst="rect">
-            <a:avLst/>
-          </a:prstGeom>
-          <a:noFill/>
-          <a:ln/>
-        </p:spPr>
-        <p:txBody>
-          <a:bodyPr wrap="square" lIns="0" tIns="0" rIns="0" bIns="0" rtlCol="0" anchor="t"/>
-          <a:lstStyle/>
           <a:p>
             <a:pPr indent="0" marL="0">
               <a:lnSpc>
@@ -10837,9 +10884,93 @@
                 <a:ea typeface="Arial" pitchFamily="34" charset="-122"/>
                 <a:cs typeface="Arial" pitchFamily="34" charset="-120"/>
               </a:rPr>
-              <a:t>1건 실행 — 평가위원 5명 · 선행연구 탐색 포함</a:t>
+              <a:t>짚은 곳의 정확도 75%</a:t>
             </a:r>
             <a:endParaRPr lang="en-US" sz="1250" dirty="0"/>
+          </a:p>
+        </p:txBody>
+      </p:sp>
+      <p:sp>
+        <p:nvSpPr>
+          <p:cNvPr id="10" name="Text 7"/>
+          <p:cNvSpPr/>
+          <p:nvPr/>
+        </p:nvSpPr>
+        <p:spPr>
+          <a:xfrm>
+            <a:off x="7406640" y="4434840"/>
+            <a:ext cx="3959352" cy="685800"/>
+          </a:xfrm>
+          <a:prstGeom prst="rect">
+            <a:avLst/>
+          </a:prstGeom>
+          <a:noFill/>
+          <a:ln/>
+        </p:spPr>
+        <p:txBody>
+          <a:bodyPr wrap="square" lIns="0" tIns="0" rIns="0" bIns="0" rtlCol="0" anchor="t"/>
+          <a:lstStyle/>
+          <a:p>
+            <a:pPr indent="0" marL="0">
+              <a:lnSpc>
+                <a:spcPct val="115000"/>
+              </a:lnSpc>
+              <a:buNone/>
+            </a:pPr>
+            <a:r>
+              <a:rPr lang="en-US" sz="1200" dirty="0">
+                <a:solidFill>
+                  <a:srgbClr val="4E5968"/>
+                </a:solidFill>
+                <a:latin typeface="Arial" pitchFamily="34" charset="0"/>
+                <a:ea typeface="Arial" pitchFamily="34" charset="-122"/>
+                <a:cs typeface="Arial" pitchFamily="34" charset="-120"/>
+              </a:rPr>
+              <a:t>첫 초안 세트는 1~2/5 — 결과를 본 뒤 블록을 다시 설계한 두 번째 세트입니다(사전 등록 아님). 지운 초안의 점수는 원본 97점보다 1~15점 낮았습니다.</a:t>
+            </a:r>
+            <a:endParaRPr lang="en-US" sz="1200" dirty="0"/>
+          </a:p>
+        </p:txBody>
+      </p:sp>
+      <p:sp>
+        <p:nvSpPr>
+          <p:cNvPr id="11" name="Text 8"/>
+          <p:cNvSpPr/>
+          <p:nvPr/>
+        </p:nvSpPr>
+        <p:spPr>
+          <a:xfrm>
+            <a:off x="7406640" y="5303520"/>
+            <a:ext cx="3959352" cy="502920"/>
+          </a:xfrm>
+          <a:prstGeom prst="rect">
+            <a:avLst/>
+          </a:prstGeom>
+          <a:noFill/>
+          <a:ln/>
+        </p:spPr>
+        <p:txBody>
+          <a:bodyPr wrap="square" lIns="0" tIns="0" rIns="0" bIns="0" rtlCol="0" anchor="t"/>
+          <a:lstStyle/>
+          <a:p>
+            <a:pPr indent="0" marL="0">
+              <a:lnSpc>
+                <a:spcPct val="115000"/>
+              </a:lnSpc>
+              <a:buNone/>
+            </a:pPr>
+            <a:r>
+              <a:rPr lang="en-US" sz="1200" b="1" dirty="0">
+                <a:solidFill>
+                  <a:srgbClr val="191F28"/>
+                </a:solidFill>
+                <a:latin typeface="Arial" pitchFamily="34" charset="0"/>
+                <a:ea typeface="Arial" pitchFamily="34" charset="-122"/>
+                <a:cs typeface="Arial" pitchFamily="34" charset="-120"/>
+              </a:rPr>
+              <a:t>③ 1건 채점 44초 — 평가위원 4명 응답 · 선행연구 탐색 포함(공고 파싱 제외)</a:t>
+            </a:r>
+            <a:endParaRPr lang="en-US" sz="1200" dirty="0"/>
           </a:p>
         </p:txBody>
       </p:sp>
@@ -10876,7 +11007,7 @@
                 <a:ea typeface="Arial" pitchFamily="34" charset="-122"/>
                 <a:cs typeface="Arial" pitchFamily="34" charset="-120"/>
               </a:rPr>
-              <a:t>정답표: 파이프라인(Gemini·Solar)과 독립된 모델이 공고를 쪽마다 판독 · 측정 스크립트 scripts/eval_extract.py · eval_planted.py 공개</a:t>
+              <a:t>정답표: 다른 모델(Claude)이 쪽마다 판독 · 측정 파싱 모델 gemini-3-flash-preview, gemini-3.1-flash-lite · 시연은 저장된 파싱 결과(재현율 미측정) · 평가위원 모델 gemini-3.5-flash, solar-pro3</a:t>
             </a:r>
             <a:endParaRPr lang="en-US" sz="1000" dirty="0"/>
           </a:p>
@@ -11185,7 +11316,7 @@
                 <a:ea typeface="Arial" pitchFamily="34" charset="-122"/>
                 <a:cs typeface="Arial" pitchFamily="34" charset="-120"/>
               </a:rPr>
-              <a:t>98점</a:t>
+              <a:t>99.0점</a:t>
             </a:r>
             <a:endParaRPr lang="en-US" sz="5000" dirty="0"/>
           </a:p>
@@ -11293,7 +11424,7 @@
                 <a:ea typeface="Arial" pitchFamily="34" charset="-122"/>
                 <a:cs typeface="Arial" pitchFamily="34" charset="-120"/>
               </a:rPr>
-              <a:t>도구가 짚은 합의 결핍 0곳 · 논쟁 지점 2곳</a:t>
+              <a:t>도구가 짚은 곳 — 합의 결핍 0 · 논쟁 지점 2 → 보완 후 0 · 1</a:t>
             </a:r>
             <a:endParaRPr lang="en-US" sz="1200" dirty="0"/>
           </a:p>
@@ -11746,13 +11877,13 @@
             <a:r>
               <a:rPr lang="en-US" sz="1350" b="1" dirty="0">
                 <a:solidFill>
-                  <a:srgbClr val="191F28"/>
-                </a:solidFill>
-                <a:latin typeface="Arial" pitchFamily="34" charset="0"/>
-                <a:ea typeface="Arial" pitchFamily="34" charset="-122"/>
-                <a:cs typeface="Arial" pitchFamily="34" charset="-120"/>
-              </a:rPr>
-              <a:t>18</a:t>
+                  <a:srgbClr val="3182F6"/>
+                </a:solidFill>
+                <a:latin typeface="Arial" pitchFamily="34" charset="0"/>
+                <a:ea typeface="Arial" pitchFamily="34" charset="-122"/>
+                <a:cs typeface="Arial" pitchFamily="34" charset="-120"/>
+              </a:rPr>
+              <a:t>20</a:t>
             </a:r>
             <a:endParaRPr lang="en-US" sz="1350" dirty="0"/>
           </a:p>
@@ -12032,7 +12163,7 @@
                 <a:ea typeface="Arial" pitchFamily="34" charset="-122"/>
                 <a:cs typeface="Arial" pitchFamily="34" charset="-120"/>
               </a:rPr>
-              <a:t>25</a:t>
+              <a:t>24</a:t>
             </a:r>
             <a:endParaRPr lang="en-US" sz="1350" dirty="0"/>
           </a:p>
@@ -12234,7 +12365,7 @@
                 <a:ea typeface="Arial" pitchFamily="34" charset="-122"/>
                 <a:cs typeface="Arial" pitchFamily="34" charset="-120"/>
               </a:rPr>
-              <a:t>그래서 오늘 이 발표에 흐름도·AI 구성도·실제 화면을 넣었습니다.</a:t>
+              <a:t>짚은 곳을 채운 뒤, 같은 점검 질문으로 다시 채점했습니다.</a:t>
             </a:r>
             <a:endParaRPr lang="en-US" sz="1600" dirty="0"/>
           </a:p>
@@ -12273,7 +12404,7 @@
                 <a:ea typeface="Arial" pitchFamily="34" charset="-122"/>
                 <a:cs typeface="Arial" pitchFamily="34" charset="-120"/>
               </a:rPr>
-              <a:t>보완 후 = 예선 기획서에 「본선 구현 결과」 절을 사람이 추가(에이전트는 위치·근거 종류만 지정) · data/runs/*--original.json · *--after.json</a:t>
+              <a:t>점수 예측이 아니라 빈칸 찾기 · 보완 후 = 「본선 구현 결과」 절을 사람이 추가 · 같은 판정자로 잰 자기 점검(변별력 근거는 8장) · 이번 실행은 평가위원 4/5명 응답(1명 응답 실패 — 복구 중)</a:t>
             </a:r>
             <a:endParaRPr lang="en-US" sz="1000" dirty="0"/>
           </a:p>

--- a/deliver/deck/RFP-to-Fit_루미아.pptx
+++ b/deliver/deck/RFP-to-Fit_루미아.pptx
@@ -200,13 +200,13 @@
                 <c:formatCode>General</c:formatCode>
                 <c:ptCount val="3"/>
                 <c:pt idx="0">
-                  <c:v>95</c:v>
+                  <c:v>90</c:v>
                 </c:pt>
                 <c:pt idx="1">
-                  <c:v>91</c:v>
+                  <c:v>97</c:v>
                 </c:pt>
                 <c:pt idx="2">
-                  <c:v>54</c:v>
+                  <c:v>85</c:v>
                 </c:pt>
               </c:numCache>
             </c:numRef>
@@ -831,7 +831,7 @@
           <a:p>
             <a:r>
               <a:rPr lang="en-US" dirty="0"/>
-              <a:t>[20초] 같은 엔진이 연구자의 셀프 점검에서 전문기관 접수 사전검토, 평가위원 심사 보조로 갑니다. 문서만 바꾸면 성과보고서와 연구비 정산에도 씁니다. MCP로 NAIS 플랫폼 어디에든 붙고, 정답표는 공개해 벤치마크로 키웁니다.</a:t>
+              <a:t>[20초] 같은 엔진이 연구자의 셀프 점검에서 전문기관 접수 사전검토, 평가위원 심사 보조로 갑니다. 오늘 멘토링에서, 실제 심사 의견 데이터는 평가기관에 있다고 들었습니다. 전문기관과 연계하면 그 의견 유형으로 가상 평가위원을 보정할 수 있습니다. 지금은 공개 자료와 심사 경험 기반 유형입니다.</a:t>
             </a:r>
             <a:endParaRPr lang="en-US" dirty="0"/>
           </a:p>
@@ -919,7 +919,7 @@
           <a:p>
             <a:r>
               <a:rPr lang="en-US" dirty="0"/>
-              <a:t>[10초] 다섯 명의 평가위원이, 먼저 읽어 드립니다. 화면의 주소에서 지금 직접 눌러 보실 수 있습니다. 감사합니다.</a:t>
+              <a:t>[10초] 여섯 명의 평가위원이, 먼저 읽어 드립니다. 화면의 주소에서 지금 직접 눌러 보실 수 있습니다. 감사합니다.</a:t>
             </a:r>
             <a:endParaRPr lang="en-US" dirty="0"/>
           </a:p>
@@ -1095,7 +1095,7 @@
           <a:p>
             <a:r>
               <a:rPr lang="en-US" dirty="0"/>
-              <a:t>[30초] 평가위원 한 명의 점수는 취향입니다. 그래서 관점이 다른 다섯 명이 서로의 답을 모른 채 채점합니다. 네 명 이상이 깎으면 반드시 고칠 곳, 의견이 갈리면 연구자가 판단할 곳입니다. 모델도 Gemini와 국산 Solar로 나눠 한 회사 모델의 치우침이 합의로 굳지 않게 했습니다. 과거 심사 기록이 필요 없어서, 오늘 나온 새 공고에도 바로 씁니다.</a:t>
+              <a:t>[30초] 평가위원 한 명의 점수는 취향입니다. 그래서 오늘 현장 멘토링에서 들은 실제 심사위원 유형 6가지로 가상 평가위원을 만들어, 서로의 답을 모른 채 채점합니다. 5명 이상이 깎으면 반드시 고칠 곳, 의견이 갈리면 연구자가 판단할 곳입니다. 심사위원은 항목 합산보다 몇 가지 결정 포인트로 마음속 등수를 먼저 정한다고 해서, 각자 선정·보류·탈락과 당락 포인트도 냅니다. 모델은 3개 회사로 나눠 한 회사 모델의 치우침이 합의로 굳지 않게 했습니다.</a:t>
             </a:r>
             <a:endParaRPr lang="en-US" dirty="0"/>
           </a:p>
@@ -1183,7 +1183,7 @@
           <a:p>
             <a:r>
               <a:rPr lang="en-US" dirty="0"/>
-              <a:t>[60초] 지금 보시는 건 이 대회 공고입니다. 공고에서 요건 34개와 본선 심사표 5개를 스스로 찾아냈고, 저희 예선 기획서를 넣었습니다. 점검 질문 15개가 다섯 명에게 따로 가고, 약 44초 뒤 모두가 깎는 곳과 의견이 갈리는 곳이 나옵니다. 보완은 문장을 써 주지 않고 '어떤 근거를, 어느 절에'만 지정합니다.</a:t>
+              <a:t>[60초] 지금 보시는 건 이 대회 공고입니다. 공고에서 요건 39개와 본선 심사표 5개를 스스로 찾아냈고, 저희 예선 기획서를 넣었습니다. 점검 질문 15개가 여섯 명에게 따로 가고, 약 19초 뒤 모두가 깎는 곳과 의견이 갈리는 곳이 나옵니다. 보완은 문장을 써 주지 않고 '어떤 근거를, 어느 절에'만 지정합니다.</a:t>
             </a:r>
             <a:endParaRPr lang="en-US" dirty="0"/>
           </a:p>
@@ -1359,7 +1359,7 @@
           <a:p>
             <a:r>
               <a:rPr lang="en-US" dirty="0"/>
-              <a:t>[20초] 평가위원은 Gemini와 국산 Solar로 나눴고, 전체 흐름은 LangGraph 상태 그래프입니다. 검색으로 조각을 넣는 대신 원문을 통째로 넣고 인용으로 대조합니다. 인용 검사에 실패하면 재질의로 되돌아가는 루프가 있습니다. 선행연구 탐색은 MCP 도구 서버로 감싸서, 검색기를 바꿔 끼울 수 있고 다른 AI 비서도 같은 도구를 부를 수 있습니다.</a:t>
+              <a:t>[20초] 평가위원은 OpenAI, Google Gemini, Upstage Solar 3개 회사 모델로 나눴고, 공고 파싱과 점검 질문은 주 엔진 gpt-4.1가 맡습니다. 전체 흐름은 LangGraph 상태 그래프입니다. 검색으로 조각을 넣는 대신 원문을 통째로 넣고 인용으로 대조합니다. 인용 검사에 실패하면 재질의로 되돌아가는 루프가 있습니다. 선행연구 탐색은 MCP 도구 서버로 감싸서, 검색기를 바꿔 끼울 수 있고 다른 AI 비서도 같은 도구를 부를 수 있습니다.</a:t>
             </a:r>
             <a:endParaRPr lang="en-US" dirty="0"/>
           </a:p>
@@ -1447,7 +1447,7 @@
           <a:p>
             <a:r>
               <a:rPr lang="en-US" dirty="0"/>
-              <a:t>[25초] LLM 심사의 가장 큰 위험은 그럴듯한 칭찬입니다. 저희는 칭찬에도 증거를 요구합니다. 인용을 코드가 원문과 대조하고, 없으면 무효로 돌려 한 번 다시 묻습니다. 이 실행에서 60개 판정 중 6건이 원문에 없는 인용이었고, 다시 물은 뒤 6건이 무효에서 벗어났습니다. 인용이 판정을 뒷받침하는지는 사람이 보도록 화면에 그대로 둡니다.</a:t>
+              <a:t>[25초] LLM 심사의 가장 큰 위험은 그럴듯한 칭찬입니다. 저희는 칭찬에도 증거를 요구합니다. 인용을 코드가 원문과 대조하고, 없으면 무효로 돌려 한 번 다시 묻습니다. 이 실행에서 90개 판정 중 12건이 원문에 없는 인용이었고, 다시 물은 뒤 11건은 원문 인용을 찾았고, 0건은 부족으로 정정, 1건은 끝까지 무효라 점수에서 뺐습니다. 인용이 판정을 뒷받침하는지는 사람이 보도록 화면에 그대로 둡니다.</a:t>
             </a:r>
             <a:endParaRPr lang="en-US" dirty="0"/>
           </a:p>
@@ -1535,7 +1535,7 @@
           <a:p>
             <a:r>
               <a:rPr lang="en-US" dirty="0"/>
-              <a:t>[25초] 정확도는 숫자로 보여 드립니다. 정답표 대비 요건을 놓치지 않은 비율이 우주항공청 95%, 산업통상부 91%, NAIS 해커톤 54%입니다. 가장 약한 곳도 그대로 둡니다. 기획서에서 근거 블록을 일부러 하나씩 지운 초안 5개 중 4/5를 짚었고, 지운 초안은 점수도 내려갔습니다.</a:t>
+              <a:t>[25초] 정확도는 숫자로 보여 드립니다. 정답표 대비 요건을 놓치지 않은 비율이 우주항공청 90%, 산업통상부 97%, NAIS 해커톤 85%입니다. 가장 약한 곳도 그대로 둡니다. 기획서에서 근거 블록을 일부러 하나씩 지운 초안 5개 중 4/5를 짚었고, 지운 초안은 점수도 내려갔습니다.</a:t>
             </a:r>
             <a:endParaRPr lang="en-US" dirty="0"/>
           </a:p>
@@ -1623,7 +1623,7 @@
           <a:p>
             <a:r>
               <a:rPr lang="en-US" dirty="0"/>
-              <a:t>[25초] 저희 도구로 저희 예선 기획서를 이 대회 본선 심사표로 먼저 채점했습니다. 94.2점, 짚은 곳 2곳. 그곳을 채운 뒤 같은 질문으로 다시 채점해 99.0점입니다. 같은 판정자로 잰 자기 점검이라, 변별력 근거는 앞 장의 지운 초안 시험으로 드렸습니다.</a:t>
+              <a:t>[25초] 저희 도구로 저희 예선 기획서를 이 대회 본선 심사표로 먼저 읽혔습니다. 여섯 명 중 3명이 보류였고, 이유가 분명했습니다. 세부 전문형은 '정확도 목표(90% 재현율, 80% 정밀도)가 실제 구현 없이 목표치만 제시되어 구체성 부족', 사업성·시장형은 '시장성은 있으나 실증·구매주체가 아직 약함', 행정·관리형은 'AI 윤리·보안 대책은 있으나, 실제 구현 및 검증 계획이 해커톤 기간 내 2일만에 과도하게 압축되어 실현 가능성에 의문.'. 그래서 오늘은 목표치가 아니라 실측치를 가져왔습니다. 요건 재현율 90%, 97%, 85%, 일부러 지운 초안 5개 중 4/5를 짚었습니다.</a:t>
             </a:r>
             <a:endParaRPr lang="en-US" dirty="0"/>
           </a:p>
@@ -2164,7 +2164,7 @@
                 <a:ea typeface="Arial" pitchFamily="34" charset="-122"/>
                 <a:cs typeface="Arial" pitchFamily="34" charset="-120"/>
               </a:rPr>
-              <a:t>RFP-to-Fit — 국가 R&amp;D 공고를 넣으면, 가상 평가위원 5명이 초안을 먼저 채점합니다</a:t>
+              <a:t>RFP-to-Fit — 국가 R&amp;D 공고를 넣으면, 가상 평가위원 6명이 초안을 먼저 채점합니다</a:t>
             </a:r>
             <a:endParaRPr lang="en-US" sz="1900" dirty="0"/>
           </a:p>
@@ -2783,7 +2783,7 @@
         </p:nvSpPr>
         <p:spPr>
           <a:xfrm>
-            <a:off x="822960" y="4297680"/>
+            <a:off x="822960" y="4160520"/>
             <a:ext cx="10543032" cy="0"/>
           </a:xfrm>
           <a:prstGeom prst="line">
@@ -2806,7 +2806,7 @@
         </p:nvSpPr>
         <p:spPr>
           <a:xfrm>
-            <a:off x="822960" y="4526280"/>
+            <a:off x="822960" y="4343400"/>
             <a:ext cx="3657600" cy="320040"/>
           </a:xfrm>
           <a:prstGeom prst="rect">
@@ -2845,7 +2845,7 @@
         </p:nvSpPr>
         <p:spPr>
           <a:xfrm>
-            <a:off x="822960" y="4937760"/>
+            <a:off x="822960" y="4709160"/>
             <a:ext cx="3108960" cy="868680"/>
           </a:xfrm>
           <a:prstGeom prst="roundRect">
@@ -2872,7 +2872,7 @@
         </p:nvSpPr>
         <p:spPr>
           <a:xfrm>
-            <a:off x="1024128" y="5047488"/>
+            <a:off x="1024128" y="4818888"/>
             <a:ext cx="2743200" cy="320040"/>
           </a:xfrm>
           <a:prstGeom prst="rect">
@@ -2911,7 +2911,7 @@
         </p:nvSpPr>
         <p:spPr>
           <a:xfrm>
-            <a:off x="1024128" y="5394960"/>
+            <a:off x="1024128" y="5166360"/>
             <a:ext cx="2743200" cy="274320"/>
           </a:xfrm>
           <a:prstGeom prst="rect">
@@ -2950,7 +2950,7 @@
         </p:nvSpPr>
         <p:spPr>
           <a:xfrm>
-            <a:off x="4539996" y="4937760"/>
+            <a:off x="4539996" y="4709160"/>
             <a:ext cx="3108960" cy="868680"/>
           </a:xfrm>
           <a:prstGeom prst="roundRect">
@@ -2977,7 +2977,7 @@
         </p:nvSpPr>
         <p:spPr>
           <a:xfrm>
-            <a:off x="4741164" y="5047488"/>
+            <a:off x="4741164" y="4818888"/>
             <a:ext cx="2743200" cy="320040"/>
           </a:xfrm>
           <a:prstGeom prst="rect">
@@ -3016,7 +3016,7 @@
         </p:nvSpPr>
         <p:spPr>
           <a:xfrm>
-            <a:off x="4741164" y="5394960"/>
+            <a:off x="4741164" y="5166360"/>
             <a:ext cx="2743200" cy="274320"/>
           </a:xfrm>
           <a:prstGeom prst="rect">
@@ -3055,7 +3055,7 @@
         </p:nvSpPr>
         <p:spPr>
           <a:xfrm>
-            <a:off x="8257032" y="4937760"/>
+            <a:off x="8257032" y="4709160"/>
             <a:ext cx="3108960" cy="868680"/>
           </a:xfrm>
           <a:prstGeom prst="roundRect">
@@ -3082,7 +3082,7 @@
         </p:nvSpPr>
         <p:spPr>
           <a:xfrm>
-            <a:off x="8458200" y="5047488"/>
+            <a:off x="8458200" y="4818888"/>
             <a:ext cx="2743200" cy="320040"/>
           </a:xfrm>
           <a:prstGeom prst="rect">
@@ -3121,7 +3121,7 @@
         </p:nvSpPr>
         <p:spPr>
           <a:xfrm>
-            <a:off x="8458200" y="5394960"/>
+            <a:off x="8458200" y="5166360"/>
             <a:ext cx="2743200" cy="274320"/>
           </a:xfrm>
           <a:prstGeom prst="rect">
@@ -3160,20 +3160,43 @@
         </p:nvSpPr>
         <p:spPr>
           <a:xfrm>
-            <a:off x="822960" y="6035040"/>
-            <a:ext cx="10543032" cy="320040"/>
-          </a:xfrm>
-          <a:prstGeom prst="rect">
-            <a:avLst/>
-          </a:prstGeom>
-          <a:noFill/>
-          <a:ln/>
-        </p:spPr>
-        <p:txBody>
-          <a:bodyPr wrap="square" lIns="0" tIns="0" rIns="0" bIns="0" rtlCol="0" anchor="t"/>
-          <a:lstStyle/>
-          <a:p>
-            <a:pPr indent="0" marL="0">
+            <a:off x="822960" y="5897880"/>
+            <a:ext cx="10543032" cy="640080"/>
+          </a:xfrm>
+          <a:prstGeom prst="rect">
+            <a:avLst/>
+          </a:prstGeom>
+          <a:noFill/>
+          <a:ln/>
+        </p:spPr>
+        <p:txBody>
+          <a:bodyPr wrap="square" lIns="0" tIns="0" rIns="0" bIns="0" rtlCol="0" anchor="t"/>
+          <a:lstStyle/>
+          <a:p>
+            <a:pPr indent="0" marL="0">
+              <a:lnSpc>
+                <a:spcPct val="120000"/>
+              </a:lnSpc>
+              <a:buNone/>
+            </a:pPr>
+            <a:r>
+              <a:rPr lang="en-US" sz="1250" b="1" dirty="0">
+                <a:solidFill>
+                  <a:srgbClr val="191F28"/>
+                </a:solidFill>
+                <a:latin typeface="Arial" pitchFamily="34" charset="0"/>
+                <a:ea typeface="Arial" pitchFamily="34" charset="-122"/>
+                <a:cs typeface="Arial" pitchFamily="34" charset="-120"/>
+              </a:rPr>
+              <a:t>다음 단계 — 심사 의견 데이터는 평가기관에 있습니다. 전문기관과 연계하면 실제 심사 의견 유형으로 평가위원을 보정합니다.</a:t>
+            </a:r>
+            <a:endParaRPr lang="en-US" sz="1250" dirty="0"/>
+          </a:p>
+          <a:p>
+            <a:pPr indent="0" marL="0">
+              <a:lnSpc>
+                <a:spcPct val="120000"/>
+              </a:lnSpc>
               <a:buNone/>
             </a:pPr>
             <a:r>
@@ -3185,7 +3208,7 @@
                 <a:ea typeface="Arial" pitchFamily="34" charset="-122"/>
                 <a:cs typeface="Arial" pitchFamily="34" charset="-120"/>
               </a:rPr>
-              <a:t>첫 실증 목표: 전문기관 접수 사전검토 1회 — 형식 미비를 정답표 방식 그대로 재서 재현율 90% · 정답표·측정 스크립트는 「R&amp;D 공고 결핍 벤치마크」로 공개</a:t>
+              <a:t>지금은 공개 자료 + 현장 심사 경험 기반 유형 · 첫 실증 목표: 전문기관 접수 사전검토 1회(형식 미비 재현율 90%)</a:t>
             </a:r>
             <a:endParaRPr lang="en-US" sz="1250" dirty="0"/>
           </a:p>
@@ -3298,7 +3321,7 @@
                 <a:ea typeface="Arial" pitchFamily="34" charset="-122"/>
                 <a:cs typeface="Arial" pitchFamily="34" charset="-120"/>
               </a:rPr>
-              <a:t>다섯 명의 평가위원이,</a:t>
+              <a:t>여섯 명의 평가위원이,</a:t>
             </a:r>
             <a:endParaRPr lang="en-US" sz="4600" dirty="0"/>
           </a:p>
@@ -3377,7 +3400,7 @@
                 <a:ea typeface="Arial" pitchFamily="34" charset="-122"/>
                 <a:cs typeface="Arial" pitchFamily="34" charset="-120"/>
               </a:rPr>
-              <a:t>커밋 9개 · 코드는 전부 본선 중 커밋(첫 코드 커밋 09/30 19:19, 그 전엔 문서뿐)</a:t>
+              <a:t>커밋 11개 · 코드는 전부 본선 중 커밋(첫 코드 커밋 09/30 19:19, 그 전엔 문서뿐)</a:t>
             </a:r>
             <a:endParaRPr lang="en-US" sz="1400" dirty="0"/>
           </a:p>
@@ -4307,7 +4330,7 @@
                 <a:ea typeface="Arial" pitchFamily="34" charset="-122"/>
                 <a:cs typeface="Arial" pitchFamily="34" charset="-120"/>
               </a:rPr>
-              <a:t>핵심 아이디어</a:t>
+              <a:t>핵심 아이디어 — 현장 멘토링(국가 R&amp;D 심사 경험) 반영</a:t>
             </a:r>
             <a:endParaRPr lang="en-US" sz="1400" dirty="0"/>
           </a:p>
@@ -4369,7 +4392,7 @@
                 <a:ea typeface="Arial" pitchFamily="34" charset="-122"/>
                 <a:cs typeface="Arial" pitchFamily="34" charset="-120"/>
               </a:rPr>
-              <a:t>다섯 명</a:t>
+              <a:t>여섯 명</a:t>
             </a:r>
             <a:pPr indent="0" marL="0">
               <a:lnSpc>
@@ -4400,24 +4423,24 @@
         </p:nvSpPr>
         <p:spPr>
           <a:xfrm>
-            <a:off x="822960" y="2697480"/>
-            <a:ext cx="548640" cy="365760"/>
-          </a:xfrm>
-          <a:prstGeom prst="rect">
-            <a:avLst/>
-          </a:prstGeom>
-          <a:noFill/>
-          <a:ln/>
-        </p:spPr>
-        <p:txBody>
-          <a:bodyPr wrap="square" lIns="0" tIns="0" rIns="0" bIns="0" rtlCol="0" anchor="t"/>
-          <a:lstStyle/>
-          <a:p>
-            <a:pPr indent="0" marL="0">
-              <a:buNone/>
-            </a:pPr>
-            <a:r>
-              <a:rPr lang="en-US" sz="1600" b="1" dirty="0">
+            <a:off x="822960" y="2606040"/>
+            <a:ext cx="548640" cy="329184"/>
+          </a:xfrm>
+          <a:prstGeom prst="rect">
+            <a:avLst/>
+          </a:prstGeom>
+          <a:noFill/>
+          <a:ln/>
+        </p:spPr>
+        <p:txBody>
+          <a:bodyPr wrap="square" lIns="0" tIns="0" rIns="0" bIns="0" rtlCol="0" anchor="t"/>
+          <a:lstStyle/>
+          <a:p>
+            <a:pPr indent="0" marL="0">
+              <a:buNone/>
+            </a:pPr>
+            <a:r>
+              <a:rPr lang="en-US" sz="1500" b="1" dirty="0">
                 <a:solidFill>
                   <a:srgbClr val="3182F6"/>
                 </a:solidFill>
@@ -4427,7 +4450,7 @@
               </a:rPr>
               <a:t>01</a:t>
             </a:r>
-            <a:endParaRPr lang="en-US" sz="1600" dirty="0"/>
+            <a:endParaRPr lang="en-US" sz="1500" dirty="0"/>
           </a:p>
         </p:txBody>
       </p:sp>
@@ -4439,24 +4462,24 @@
         </p:nvSpPr>
         <p:spPr>
           <a:xfrm>
-            <a:off x="1417320" y="2697480"/>
-            <a:ext cx="3108960" cy="365760"/>
-          </a:xfrm>
-          <a:prstGeom prst="rect">
-            <a:avLst/>
-          </a:prstGeom>
-          <a:noFill/>
-          <a:ln/>
-        </p:spPr>
-        <p:txBody>
-          <a:bodyPr wrap="square" lIns="0" tIns="0" rIns="0" bIns="0" rtlCol="0" anchor="t"/>
-          <a:lstStyle/>
-          <a:p>
-            <a:pPr indent="0" marL="0">
-              <a:buNone/>
-            </a:pPr>
-            <a:r>
-              <a:rPr lang="en-US" sz="1600" b="1" dirty="0">
+            <a:off x="1417320" y="2606040"/>
+            <a:ext cx="3108960" cy="329184"/>
+          </a:xfrm>
+          <a:prstGeom prst="rect">
+            <a:avLst/>
+          </a:prstGeom>
+          <a:noFill/>
+          <a:ln/>
+        </p:spPr>
+        <p:txBody>
+          <a:bodyPr wrap="square" lIns="0" tIns="0" rIns="0" bIns="0" rtlCol="0" anchor="t"/>
+          <a:lstStyle/>
+          <a:p>
+            <a:pPr indent="0" marL="0">
+              <a:buNone/>
+            </a:pPr>
+            <a:r>
+              <a:rPr lang="en-US" sz="1500" b="1" dirty="0">
                 <a:solidFill>
                   <a:srgbClr val="191F28"/>
                 </a:solidFill>
@@ -4464,9 +4487,9 @@
                 <a:ea typeface="Arial" pitchFamily="34" charset="-122"/>
                 <a:cs typeface="Arial" pitchFamily="34" charset="-120"/>
               </a:rPr>
-              <a:t>출연연 연구기획 책임자</a:t>
-            </a:r>
-            <a:endParaRPr lang="en-US" sz="1600" dirty="0"/>
+              <a:t>기술 타당성 검증형</a:t>
+            </a:r>
+            <a:endParaRPr lang="en-US" sz="1500" dirty="0"/>
           </a:p>
         </p:txBody>
       </p:sp>
@@ -4478,24 +4501,24 @@
         </p:nvSpPr>
         <p:spPr>
           <a:xfrm>
-            <a:off x="4526280" y="2724912"/>
-            <a:ext cx="2103120" cy="365760"/>
-          </a:xfrm>
-          <a:prstGeom prst="rect">
-            <a:avLst/>
-          </a:prstGeom>
-          <a:noFill/>
-          <a:ln/>
-        </p:spPr>
-        <p:txBody>
-          <a:bodyPr wrap="square" lIns="0" tIns="0" rIns="0" bIns="0" rtlCol="0" anchor="t"/>
-          <a:lstStyle/>
-          <a:p>
-            <a:pPr indent="0" marL="0">
-              <a:buNone/>
-            </a:pPr>
-            <a:r>
-              <a:rPr lang="en-US" sz="1250" dirty="0">
+            <a:off x="4480560" y="2633472"/>
+            <a:ext cx="2194560" cy="329184"/>
+          </a:xfrm>
+          <a:prstGeom prst="rect">
+            <a:avLst/>
+          </a:prstGeom>
+          <a:noFill/>
+          <a:ln/>
+        </p:spPr>
+        <p:txBody>
+          <a:bodyPr wrap="square" lIns="0" tIns="0" rIns="0" bIns="0" rtlCol="0" anchor="t"/>
+          <a:lstStyle/>
+          <a:p>
+            <a:pPr indent="0" marL="0">
+              <a:buNone/>
+            </a:pPr>
+            <a:r>
+              <a:rPr lang="en-US" sz="1200" dirty="0">
                 <a:solidFill>
                   <a:srgbClr val="8B95A1"/>
                 </a:solidFill>
@@ -4503,9 +4526,9 @@
                 <a:ea typeface="Arial" pitchFamily="34" charset="-122"/>
                 <a:cs typeface="Arial" pitchFamily="34" charset="-120"/>
               </a:rPr>
-              <a:t>Google Gemini</a:t>
-            </a:r>
-            <a:endParaRPr lang="en-US" sz="1250" dirty="0"/>
+              <a:t>OpenAI</a:t>
+            </a:r>
+            <a:endParaRPr lang="en-US" sz="1200" dirty="0"/>
           </a:p>
         </p:txBody>
       </p:sp>
@@ -4517,7 +4540,7 @@
         </p:nvSpPr>
         <p:spPr>
           <a:xfrm>
-            <a:off x="822960" y="3182112"/>
+            <a:off x="822960" y="3017520"/>
             <a:ext cx="5806440" cy="0"/>
           </a:xfrm>
           <a:prstGeom prst="line">
@@ -4540,24 +4563,24 @@
         </p:nvSpPr>
         <p:spPr>
           <a:xfrm>
-            <a:off x="822960" y="3300984"/>
-            <a:ext cx="548640" cy="365760"/>
-          </a:xfrm>
-          <a:prstGeom prst="rect">
-            <a:avLst/>
-          </a:prstGeom>
-          <a:noFill/>
-          <a:ln/>
-        </p:spPr>
-        <p:txBody>
-          <a:bodyPr wrap="square" lIns="0" tIns="0" rIns="0" bIns="0" rtlCol="0" anchor="t"/>
-          <a:lstStyle/>
-          <a:p>
-            <a:pPr indent="0" marL="0">
-              <a:buNone/>
-            </a:pPr>
-            <a:r>
-              <a:rPr lang="en-US" sz="1600" b="1" dirty="0">
+            <a:off x="822960" y="3099816"/>
+            <a:ext cx="548640" cy="329184"/>
+          </a:xfrm>
+          <a:prstGeom prst="rect">
+            <a:avLst/>
+          </a:prstGeom>
+          <a:noFill/>
+          <a:ln/>
+        </p:spPr>
+        <p:txBody>
+          <a:bodyPr wrap="square" lIns="0" tIns="0" rIns="0" bIns="0" rtlCol="0" anchor="t"/>
+          <a:lstStyle/>
+          <a:p>
+            <a:pPr indent="0" marL="0">
+              <a:buNone/>
+            </a:pPr>
+            <a:r>
+              <a:rPr lang="en-US" sz="1500" b="1" dirty="0">
                 <a:solidFill>
                   <a:srgbClr val="3182F6"/>
                 </a:solidFill>
@@ -4567,7 +4590,7 @@
               </a:rPr>
               <a:t>02</a:t>
             </a:r>
-            <a:endParaRPr lang="en-US" sz="1600" dirty="0"/>
+            <a:endParaRPr lang="en-US" sz="1500" dirty="0"/>
           </a:p>
         </p:txBody>
       </p:sp>
@@ -4579,24 +4602,24 @@
         </p:nvSpPr>
         <p:spPr>
           <a:xfrm>
-            <a:off x="1417320" y="3300984"/>
-            <a:ext cx="3108960" cy="365760"/>
-          </a:xfrm>
-          <a:prstGeom prst="rect">
-            <a:avLst/>
-          </a:prstGeom>
-          <a:noFill/>
-          <a:ln/>
-        </p:spPr>
-        <p:txBody>
-          <a:bodyPr wrap="square" lIns="0" tIns="0" rIns="0" bIns="0" rtlCol="0" anchor="t"/>
-          <a:lstStyle/>
-          <a:p>
-            <a:pPr indent="0" marL="0">
-              <a:buNone/>
-            </a:pPr>
-            <a:r>
-              <a:rPr lang="en-US" sz="1600" b="1" dirty="0">
+            <a:off x="1417320" y="3099816"/>
+            <a:ext cx="3108960" cy="329184"/>
+          </a:xfrm>
+          <a:prstGeom prst="rect">
+            <a:avLst/>
+          </a:prstGeom>
+          <a:noFill/>
+          <a:ln/>
+        </p:spPr>
+        <p:txBody>
+          <a:bodyPr wrap="square" lIns="0" tIns="0" rIns="0" bIns="0" rtlCol="0" anchor="t"/>
+          <a:lstStyle/>
+          <a:p>
+            <a:pPr indent="0" marL="0">
+              <a:buNone/>
+            </a:pPr>
+            <a:r>
+              <a:rPr lang="en-US" sz="1500" b="1" dirty="0">
                 <a:solidFill>
                   <a:srgbClr val="191F28"/>
                 </a:solidFill>
@@ -4604,9 +4627,9 @@
                 <a:ea typeface="Arial" pitchFamily="34" charset="-122"/>
                 <a:cs typeface="Arial" pitchFamily="34" charset="-120"/>
               </a:rPr>
-              <a:t>산업체 CTO</a:t>
-            </a:r>
-            <a:endParaRPr lang="en-US" sz="1600" dirty="0"/>
+              <a:t>기술 큰그림형</a:t>
+            </a:r>
+            <a:endParaRPr lang="en-US" sz="1500" dirty="0"/>
           </a:p>
         </p:txBody>
       </p:sp>
@@ -4618,24 +4641,24 @@
         </p:nvSpPr>
         <p:spPr>
           <a:xfrm>
-            <a:off x="4526280" y="3328416"/>
-            <a:ext cx="2103120" cy="365760"/>
-          </a:xfrm>
-          <a:prstGeom prst="rect">
-            <a:avLst/>
-          </a:prstGeom>
-          <a:noFill/>
-          <a:ln/>
-        </p:spPr>
-        <p:txBody>
-          <a:bodyPr wrap="square" lIns="0" tIns="0" rIns="0" bIns="0" rtlCol="0" anchor="t"/>
-          <a:lstStyle/>
-          <a:p>
-            <a:pPr indent="0" marL="0">
-              <a:buNone/>
-            </a:pPr>
-            <a:r>
-              <a:rPr lang="en-US" sz="1250" dirty="0">
+            <a:off x="4480560" y="3127248"/>
+            <a:ext cx="2194560" cy="329184"/>
+          </a:xfrm>
+          <a:prstGeom prst="rect">
+            <a:avLst/>
+          </a:prstGeom>
+          <a:noFill/>
+          <a:ln/>
+        </p:spPr>
+        <p:txBody>
+          <a:bodyPr wrap="square" lIns="0" tIns="0" rIns="0" bIns="0" rtlCol="0" anchor="t"/>
+          <a:lstStyle/>
+          <a:p>
+            <a:pPr indent="0" marL="0">
+              <a:buNone/>
+            </a:pPr>
+            <a:r>
+              <a:rPr lang="en-US" sz="1200" dirty="0">
                 <a:solidFill>
                   <a:srgbClr val="8B95A1"/>
                 </a:solidFill>
@@ -4643,9 +4666,9 @@
                 <a:ea typeface="Arial" pitchFamily="34" charset="-122"/>
                 <a:cs typeface="Arial" pitchFamily="34" charset="-120"/>
               </a:rPr>
-              <a:t>Upstage Solar(국산)</a:t>
-            </a:r>
-            <a:endParaRPr lang="en-US" sz="1250" dirty="0"/>
+              <a:t>Google Gemini</a:t>
+            </a:r>
+            <a:endParaRPr lang="en-US" sz="1200" dirty="0"/>
           </a:p>
         </p:txBody>
       </p:sp>
@@ -4657,7 +4680,7 @@
         </p:nvSpPr>
         <p:spPr>
           <a:xfrm>
-            <a:off x="822960" y="3785616"/>
+            <a:off x="822960" y="3511296"/>
             <a:ext cx="5806440" cy="0"/>
           </a:xfrm>
           <a:prstGeom prst="line">
@@ -4680,24 +4703,24 @@
         </p:nvSpPr>
         <p:spPr>
           <a:xfrm>
-            <a:off x="822960" y="3904488"/>
-            <a:ext cx="548640" cy="365760"/>
-          </a:xfrm>
-          <a:prstGeom prst="rect">
-            <a:avLst/>
-          </a:prstGeom>
-          <a:noFill/>
-          <a:ln/>
-        </p:spPr>
-        <p:txBody>
-          <a:bodyPr wrap="square" lIns="0" tIns="0" rIns="0" bIns="0" rtlCol="0" anchor="t"/>
-          <a:lstStyle/>
-          <a:p>
-            <a:pPr indent="0" marL="0">
-              <a:buNone/>
-            </a:pPr>
-            <a:r>
-              <a:rPr lang="en-US" sz="1600" b="1" dirty="0">
+            <a:off x="822960" y="3593592"/>
+            <a:ext cx="548640" cy="329184"/>
+          </a:xfrm>
+          <a:prstGeom prst="rect">
+            <a:avLst/>
+          </a:prstGeom>
+          <a:noFill/>
+          <a:ln/>
+        </p:spPr>
+        <p:txBody>
+          <a:bodyPr wrap="square" lIns="0" tIns="0" rIns="0" bIns="0" rtlCol="0" anchor="t"/>
+          <a:lstStyle/>
+          <a:p>
+            <a:pPr indent="0" marL="0">
+              <a:buNone/>
+            </a:pPr>
+            <a:r>
+              <a:rPr lang="en-US" sz="1500" b="1" dirty="0">
                 <a:solidFill>
                   <a:srgbClr val="3182F6"/>
                 </a:solidFill>
@@ -4707,7 +4730,7 @@
               </a:rPr>
               <a:t>03</a:t>
             </a:r>
-            <a:endParaRPr lang="en-US" sz="1600" dirty="0"/>
+            <a:endParaRPr lang="en-US" sz="1500" dirty="0"/>
           </a:p>
         </p:txBody>
       </p:sp>
@@ -4719,24 +4742,24 @@
         </p:nvSpPr>
         <p:spPr>
           <a:xfrm>
-            <a:off x="1417320" y="3904488"/>
-            <a:ext cx="3108960" cy="365760"/>
-          </a:xfrm>
-          <a:prstGeom prst="rect">
-            <a:avLst/>
-          </a:prstGeom>
-          <a:noFill/>
-          <a:ln/>
-        </p:spPr>
-        <p:txBody>
-          <a:bodyPr wrap="square" lIns="0" tIns="0" rIns="0" bIns="0" rtlCol="0" anchor="t"/>
-          <a:lstStyle/>
-          <a:p>
-            <a:pPr indent="0" marL="0">
-              <a:buNone/>
-            </a:pPr>
-            <a:r>
-              <a:rPr lang="en-US" sz="1600" b="1" dirty="0">
+            <a:off x="1417320" y="3593592"/>
+            <a:ext cx="3108960" cy="329184"/>
+          </a:xfrm>
+          <a:prstGeom prst="rect">
+            <a:avLst/>
+          </a:prstGeom>
+          <a:noFill/>
+          <a:ln/>
+        </p:spPr>
+        <p:txBody>
+          <a:bodyPr wrap="square" lIns="0" tIns="0" rIns="0" bIns="0" rtlCol="0" anchor="t"/>
+          <a:lstStyle/>
+          <a:p>
+            <a:pPr indent="0" marL="0">
+              <a:buNone/>
+            </a:pPr>
+            <a:r>
+              <a:rPr lang="en-US" sz="1500" b="1" dirty="0">
                 <a:solidFill>
                   <a:srgbClr val="191F28"/>
                 </a:solidFill>
@@ -4744,9 +4767,9 @@
                 <a:ea typeface="Arial" pitchFamily="34" charset="-122"/>
                 <a:cs typeface="Arial" pitchFamily="34" charset="-120"/>
               </a:rPr>
-              <a:t>AI 기술 전문가</a:t>
-            </a:r>
-            <a:endParaRPr lang="en-US" sz="1600" dirty="0"/>
+              <a:t>세부 전문형</a:t>
+            </a:r>
+            <a:endParaRPr lang="en-US" sz="1500" dirty="0"/>
           </a:p>
         </p:txBody>
       </p:sp>
@@ -4758,24 +4781,24 @@
         </p:nvSpPr>
         <p:spPr>
           <a:xfrm>
-            <a:off x="4526280" y="3931920"/>
-            <a:ext cx="2103120" cy="365760"/>
-          </a:xfrm>
-          <a:prstGeom prst="rect">
-            <a:avLst/>
-          </a:prstGeom>
-          <a:noFill/>
-          <a:ln/>
-        </p:spPr>
-        <p:txBody>
-          <a:bodyPr wrap="square" lIns="0" tIns="0" rIns="0" bIns="0" rtlCol="0" anchor="t"/>
-          <a:lstStyle/>
-          <a:p>
-            <a:pPr indent="0" marL="0">
-              <a:buNone/>
-            </a:pPr>
-            <a:r>
-              <a:rPr lang="en-US" sz="1250" dirty="0">
+            <a:off x="4480560" y="3621024"/>
+            <a:ext cx="2194560" cy="329184"/>
+          </a:xfrm>
+          <a:prstGeom prst="rect">
+            <a:avLst/>
+          </a:prstGeom>
+          <a:noFill/>
+          <a:ln/>
+        </p:spPr>
+        <p:txBody>
+          <a:bodyPr wrap="square" lIns="0" tIns="0" rIns="0" bIns="0" rtlCol="0" anchor="t"/>
+          <a:lstStyle/>
+          <a:p>
+            <a:pPr indent="0" marL="0">
+              <a:buNone/>
+            </a:pPr>
+            <a:r>
+              <a:rPr lang="en-US" sz="1200" dirty="0">
                 <a:solidFill>
                   <a:srgbClr val="8B95A1"/>
                 </a:solidFill>
@@ -4783,9 +4806,9 @@
                 <a:ea typeface="Arial" pitchFamily="34" charset="-122"/>
                 <a:cs typeface="Arial" pitchFamily="34" charset="-120"/>
               </a:rPr>
-              <a:t>Google Gemini</a:t>
-            </a:r>
-            <a:endParaRPr lang="en-US" sz="1250" dirty="0"/>
+              <a:t>국산 Upstage Solar</a:t>
+            </a:r>
+            <a:endParaRPr lang="en-US" sz="1200" dirty="0"/>
           </a:p>
         </p:txBody>
       </p:sp>
@@ -4797,7 +4820,7 @@
         </p:nvSpPr>
         <p:spPr>
           <a:xfrm>
-            <a:off x="822960" y="4389120"/>
+            <a:off x="822960" y="4005072"/>
             <a:ext cx="5806440" cy="0"/>
           </a:xfrm>
           <a:prstGeom prst="line">
@@ -4820,24 +4843,24 @@
         </p:nvSpPr>
         <p:spPr>
           <a:xfrm>
-            <a:off x="822960" y="4507992"/>
-            <a:ext cx="548640" cy="365760"/>
-          </a:xfrm>
-          <a:prstGeom prst="rect">
-            <a:avLst/>
-          </a:prstGeom>
-          <a:noFill/>
-          <a:ln/>
-        </p:spPr>
-        <p:txBody>
-          <a:bodyPr wrap="square" lIns="0" tIns="0" rIns="0" bIns="0" rtlCol="0" anchor="t"/>
-          <a:lstStyle/>
-          <a:p>
-            <a:pPr indent="0" marL="0">
-              <a:buNone/>
-            </a:pPr>
-            <a:r>
-              <a:rPr lang="en-US" sz="1600" b="1" dirty="0">
+            <a:off x="822960" y="4087368"/>
+            <a:ext cx="548640" cy="329184"/>
+          </a:xfrm>
+          <a:prstGeom prst="rect">
+            <a:avLst/>
+          </a:prstGeom>
+          <a:noFill/>
+          <a:ln/>
+        </p:spPr>
+        <p:txBody>
+          <a:bodyPr wrap="square" lIns="0" tIns="0" rIns="0" bIns="0" rtlCol="0" anchor="t"/>
+          <a:lstStyle/>
+          <a:p>
+            <a:pPr indent="0" marL="0">
+              <a:buNone/>
+            </a:pPr>
+            <a:r>
+              <a:rPr lang="en-US" sz="1500" b="1" dirty="0">
                 <a:solidFill>
                   <a:srgbClr val="3182F6"/>
                 </a:solidFill>
@@ -4847,7 +4870,7 @@
               </a:rPr>
               <a:t>04</a:t>
             </a:r>
-            <a:endParaRPr lang="en-US" sz="1600" dirty="0"/>
+            <a:endParaRPr lang="en-US" sz="1500" dirty="0"/>
           </a:p>
         </p:txBody>
       </p:sp>
@@ -4859,24 +4882,24 @@
         </p:nvSpPr>
         <p:spPr>
           <a:xfrm>
-            <a:off x="1417320" y="4507992"/>
-            <a:ext cx="3108960" cy="365760"/>
-          </a:xfrm>
-          <a:prstGeom prst="rect">
-            <a:avLst/>
-          </a:prstGeom>
-          <a:noFill/>
-          <a:ln/>
-        </p:spPr>
-        <p:txBody>
-          <a:bodyPr wrap="square" lIns="0" tIns="0" rIns="0" bIns="0" rtlCol="0" anchor="t"/>
-          <a:lstStyle/>
-          <a:p>
-            <a:pPr indent="0" marL="0">
-              <a:buNone/>
-            </a:pPr>
-            <a:r>
-              <a:rPr lang="en-US" sz="1600" b="1" dirty="0">
+            <a:off x="1417320" y="4087368"/>
+            <a:ext cx="3108960" cy="329184"/>
+          </a:xfrm>
+          <a:prstGeom prst="rect">
+            <a:avLst/>
+          </a:prstGeom>
+          <a:noFill/>
+          <a:ln/>
+        </p:spPr>
+        <p:txBody>
+          <a:bodyPr wrap="square" lIns="0" tIns="0" rIns="0" bIns="0" rtlCol="0" anchor="t"/>
+          <a:lstStyle/>
+          <a:p>
+            <a:pPr indent="0" marL="0">
+              <a:buNone/>
+            </a:pPr>
+            <a:r>
+              <a:rPr lang="en-US" sz="1500" b="1" dirty="0">
                 <a:solidFill>
                   <a:srgbClr val="191F28"/>
                 </a:solidFill>
@@ -4884,9 +4907,9 @@
                 <a:ea typeface="Arial" pitchFamily="34" charset="-122"/>
                 <a:cs typeface="Arial" pitchFamily="34" charset="-120"/>
               </a:rPr>
-              <a:t>전문기관 과제관리 PM</a:t>
-            </a:r>
-            <a:endParaRPr lang="en-US" sz="1600" dirty="0"/>
+              <a:t>사업성·시장형</a:t>
+            </a:r>
+            <a:endParaRPr lang="en-US" sz="1500" dirty="0"/>
           </a:p>
         </p:txBody>
       </p:sp>
@@ -4898,24 +4921,24 @@
         </p:nvSpPr>
         <p:spPr>
           <a:xfrm>
-            <a:off x="4526280" y="4535424"/>
-            <a:ext cx="2103120" cy="365760"/>
-          </a:xfrm>
-          <a:prstGeom prst="rect">
-            <a:avLst/>
-          </a:prstGeom>
-          <a:noFill/>
-          <a:ln/>
-        </p:spPr>
-        <p:txBody>
-          <a:bodyPr wrap="square" lIns="0" tIns="0" rIns="0" bIns="0" rtlCol="0" anchor="t"/>
-          <a:lstStyle/>
-          <a:p>
-            <a:pPr indent="0" marL="0">
-              <a:buNone/>
-            </a:pPr>
-            <a:r>
-              <a:rPr lang="en-US" sz="1250" dirty="0">
+            <a:off x="4480560" y="4114800"/>
+            <a:ext cx="2194560" cy="329184"/>
+          </a:xfrm>
+          <a:prstGeom prst="rect">
+            <a:avLst/>
+          </a:prstGeom>
+          <a:noFill/>
+          <a:ln/>
+        </p:spPr>
+        <p:txBody>
+          <a:bodyPr wrap="square" lIns="0" tIns="0" rIns="0" bIns="0" rtlCol="0" anchor="t"/>
+          <a:lstStyle/>
+          <a:p>
+            <a:pPr indent="0" marL="0">
+              <a:buNone/>
+            </a:pPr>
+            <a:r>
+              <a:rPr lang="en-US" sz="1200" dirty="0">
                 <a:solidFill>
                   <a:srgbClr val="8B95A1"/>
                 </a:solidFill>
@@ -4923,9 +4946,9 @@
                 <a:ea typeface="Arial" pitchFamily="34" charset="-122"/>
                 <a:cs typeface="Arial" pitchFamily="34" charset="-120"/>
               </a:rPr>
-              <a:t>Upstage Solar(국산)</a:t>
-            </a:r>
-            <a:endParaRPr lang="en-US" sz="1250" dirty="0"/>
+              <a:t>OpenAI</a:t>
+            </a:r>
+            <a:endParaRPr lang="en-US" sz="1200" dirty="0"/>
           </a:p>
         </p:txBody>
       </p:sp>
@@ -4937,7 +4960,7 @@
         </p:nvSpPr>
         <p:spPr>
           <a:xfrm>
-            <a:off x="822960" y="4992624"/>
+            <a:off x="822960" y="4498848"/>
             <a:ext cx="5806440" cy="0"/>
           </a:xfrm>
           <a:prstGeom prst="line">
@@ -4960,24 +4983,24 @@
         </p:nvSpPr>
         <p:spPr>
           <a:xfrm>
-            <a:off x="822960" y="5111496"/>
-            <a:ext cx="548640" cy="365760"/>
-          </a:xfrm>
-          <a:prstGeom prst="rect">
-            <a:avLst/>
-          </a:prstGeom>
-          <a:noFill/>
-          <a:ln/>
-        </p:spPr>
-        <p:txBody>
-          <a:bodyPr wrap="square" lIns="0" tIns="0" rIns="0" bIns="0" rtlCol="0" anchor="t"/>
-          <a:lstStyle/>
-          <a:p>
-            <a:pPr indent="0" marL="0">
-              <a:buNone/>
-            </a:pPr>
-            <a:r>
-              <a:rPr lang="en-US" sz="1600" b="1" dirty="0">
+            <a:off x="822960" y="4581144"/>
+            <a:ext cx="548640" cy="329184"/>
+          </a:xfrm>
+          <a:prstGeom prst="rect">
+            <a:avLst/>
+          </a:prstGeom>
+          <a:noFill/>
+          <a:ln/>
+        </p:spPr>
+        <p:txBody>
+          <a:bodyPr wrap="square" lIns="0" tIns="0" rIns="0" bIns="0" rtlCol="0" anchor="t"/>
+          <a:lstStyle/>
+          <a:p>
+            <a:pPr indent="0" marL="0">
+              <a:buNone/>
+            </a:pPr>
+            <a:r>
+              <a:rPr lang="en-US" sz="1500" b="1" dirty="0">
                 <a:solidFill>
                   <a:srgbClr val="3182F6"/>
                 </a:solidFill>
@@ -4987,7 +5010,7 @@
               </a:rPr>
               <a:t>05</a:t>
             </a:r>
-            <a:endParaRPr lang="en-US" sz="1600" dirty="0"/>
+            <a:endParaRPr lang="en-US" sz="1500" dirty="0"/>
           </a:p>
         </p:txBody>
       </p:sp>
@@ -4999,24 +5022,24 @@
         </p:nvSpPr>
         <p:spPr>
           <a:xfrm>
-            <a:off x="1417320" y="5111496"/>
-            <a:ext cx="3108960" cy="365760"/>
-          </a:xfrm>
-          <a:prstGeom prst="rect">
-            <a:avLst/>
-          </a:prstGeom>
-          <a:noFill/>
-          <a:ln/>
-        </p:spPr>
-        <p:txBody>
-          <a:bodyPr wrap="square" lIns="0" tIns="0" rIns="0" bIns="0" rtlCol="0" anchor="t"/>
-          <a:lstStyle/>
-          <a:p>
-            <a:pPr indent="0" marL="0">
-              <a:buNone/>
-            </a:pPr>
-            <a:r>
-              <a:rPr lang="en-US" sz="1600" b="1" dirty="0">
+            <a:off x="1417320" y="4581144"/>
+            <a:ext cx="3108960" cy="329184"/>
+          </a:xfrm>
+          <a:prstGeom prst="rect">
+            <a:avLst/>
+          </a:prstGeom>
+          <a:noFill/>
+          <a:ln/>
+        </p:spPr>
+        <p:txBody>
+          <a:bodyPr wrap="square" lIns="0" tIns="0" rIns="0" bIns="0" rtlCol="0" anchor="t"/>
+          <a:lstStyle/>
+          <a:p>
+            <a:pPr indent="0" marL="0">
+              <a:buNone/>
+            </a:pPr>
+            <a:r>
+              <a:rPr lang="en-US" sz="1500" b="1" dirty="0">
                 <a:solidFill>
                   <a:srgbClr val="191F28"/>
                 </a:solidFill>
@@ -5024,9 +5047,9 @@
                 <a:ea typeface="Arial" pitchFamily="34" charset="-122"/>
                 <a:cs typeface="Arial" pitchFamily="34" charset="-120"/>
               </a:rPr>
-              <a:t>연구윤리·신뢰성 심사자</a:t>
-            </a:r>
-            <a:endParaRPr lang="en-US" sz="1600" dirty="0"/>
+              <a:t>행정·관리형</a:t>
+            </a:r>
+            <a:endParaRPr lang="en-US" sz="1500" dirty="0"/>
           </a:p>
         </p:txBody>
       </p:sp>
@@ -5038,24 +5061,24 @@
         </p:nvSpPr>
         <p:spPr>
           <a:xfrm>
-            <a:off x="4526280" y="5138928"/>
-            <a:ext cx="2103120" cy="365760"/>
-          </a:xfrm>
-          <a:prstGeom prst="rect">
-            <a:avLst/>
-          </a:prstGeom>
-          <a:noFill/>
-          <a:ln/>
-        </p:spPr>
-        <p:txBody>
-          <a:bodyPr wrap="square" lIns="0" tIns="0" rIns="0" bIns="0" rtlCol="0" anchor="t"/>
-          <a:lstStyle/>
-          <a:p>
-            <a:pPr indent="0" marL="0">
-              <a:buNone/>
-            </a:pPr>
-            <a:r>
-              <a:rPr lang="en-US" sz="1250" dirty="0">
+            <a:off x="4480560" y="4608576"/>
+            <a:ext cx="2194560" cy="329184"/>
+          </a:xfrm>
+          <a:prstGeom prst="rect">
+            <a:avLst/>
+          </a:prstGeom>
+          <a:noFill/>
+          <a:ln/>
+        </p:spPr>
+        <p:txBody>
+          <a:bodyPr wrap="square" lIns="0" tIns="0" rIns="0" bIns="0" rtlCol="0" anchor="t"/>
+          <a:lstStyle/>
+          <a:p>
+            <a:pPr indent="0" marL="0">
+              <a:buNone/>
+            </a:pPr>
+            <a:r>
+              <a:rPr lang="en-US" sz="1200" dirty="0">
                 <a:solidFill>
                   <a:srgbClr val="8B95A1"/>
                 </a:solidFill>
@@ -5063,26 +5086,166 @@
                 <a:ea typeface="Arial" pitchFamily="34" charset="-122"/>
                 <a:cs typeface="Arial" pitchFamily="34" charset="-120"/>
               </a:rPr>
+              <a:t>국산 Upstage Solar</a:t>
+            </a:r>
+            <a:endParaRPr lang="en-US" sz="1200" dirty="0"/>
+          </a:p>
+        </p:txBody>
+      </p:sp>
+      <p:sp>
+        <p:nvSpPr>
+          <p:cNvPr id="23" name="Shape 21"/>
+          <p:cNvSpPr/>
+          <p:nvPr/>
+        </p:nvSpPr>
+        <p:spPr>
+          <a:xfrm>
+            <a:off x="822960" y="4992624"/>
+            <a:ext cx="5806440" cy="0"/>
+          </a:xfrm>
+          <a:prstGeom prst="line">
+            <a:avLst/>
+          </a:prstGeom>
+          <a:noFill/>
+          <a:ln w="12700">
+            <a:solidFill>
+              <a:srgbClr val="E5E8EB"/>
+            </a:solidFill>
+            <a:prstDash val="solid"/>
+          </a:ln>
+        </p:spPr>
+      </p:sp>
+      <p:sp>
+        <p:nvSpPr>
+          <p:cNvPr id="24" name="Text 22"/>
+          <p:cNvSpPr/>
+          <p:nvPr/>
+        </p:nvSpPr>
+        <p:spPr>
+          <a:xfrm>
+            <a:off x="822960" y="5074920"/>
+            <a:ext cx="548640" cy="329184"/>
+          </a:xfrm>
+          <a:prstGeom prst="rect">
+            <a:avLst/>
+          </a:prstGeom>
+          <a:noFill/>
+          <a:ln/>
+        </p:spPr>
+        <p:txBody>
+          <a:bodyPr wrap="square" lIns="0" tIns="0" rIns="0" bIns="0" rtlCol="0" anchor="t"/>
+          <a:lstStyle/>
+          <a:p>
+            <a:pPr indent="0" marL="0">
+              <a:buNone/>
+            </a:pPr>
+            <a:r>
+              <a:rPr lang="en-US" sz="1500" b="1" dirty="0">
+                <a:solidFill>
+                  <a:srgbClr val="3182F6"/>
+                </a:solidFill>
+                <a:latin typeface="Arial" pitchFamily="34" charset="0"/>
+                <a:ea typeface="Arial" pitchFamily="34" charset="-122"/>
+                <a:cs typeface="Arial" pitchFamily="34" charset="-120"/>
+              </a:rPr>
+              <a:t>06</a:t>
+            </a:r>
+            <a:endParaRPr lang="en-US" sz="1500" dirty="0"/>
+          </a:p>
+        </p:txBody>
+      </p:sp>
+      <p:sp>
+        <p:nvSpPr>
+          <p:cNvPr id="25" name="Text 23"/>
+          <p:cNvSpPr/>
+          <p:nvPr/>
+        </p:nvSpPr>
+        <p:spPr>
+          <a:xfrm>
+            <a:off x="1417320" y="5074920"/>
+            <a:ext cx="3108960" cy="329184"/>
+          </a:xfrm>
+          <a:prstGeom prst="rect">
+            <a:avLst/>
+          </a:prstGeom>
+          <a:noFill/>
+          <a:ln/>
+        </p:spPr>
+        <p:txBody>
+          <a:bodyPr wrap="square" lIns="0" tIns="0" rIns="0" bIns="0" rtlCol="0" anchor="t"/>
+          <a:lstStyle/>
+          <a:p>
+            <a:pPr indent="0" marL="0">
+              <a:buNone/>
+            </a:pPr>
+            <a:r>
+              <a:rPr lang="en-US" sz="1500" b="1" dirty="0">
+                <a:solidFill>
+                  <a:srgbClr val="191F28"/>
+                </a:solidFill>
+                <a:latin typeface="Arial" pitchFamily="34" charset="0"/>
+                <a:ea typeface="Arial" pitchFamily="34" charset="-122"/>
+                <a:cs typeface="Arial" pitchFamily="34" charset="-120"/>
+              </a:rPr>
+              <a:t>사업 취지형</a:t>
+            </a:r>
+            <a:endParaRPr lang="en-US" sz="1500" dirty="0"/>
+          </a:p>
+        </p:txBody>
+      </p:sp>
+      <p:sp>
+        <p:nvSpPr>
+          <p:cNvPr id="26" name="Text 24"/>
+          <p:cNvSpPr/>
+          <p:nvPr/>
+        </p:nvSpPr>
+        <p:spPr>
+          <a:xfrm>
+            <a:off x="4480560" y="5102352"/>
+            <a:ext cx="2194560" cy="329184"/>
+          </a:xfrm>
+          <a:prstGeom prst="rect">
+            <a:avLst/>
+          </a:prstGeom>
+          <a:noFill/>
+          <a:ln/>
+        </p:spPr>
+        <p:txBody>
+          <a:bodyPr wrap="square" lIns="0" tIns="0" rIns="0" bIns="0" rtlCol="0" anchor="t"/>
+          <a:lstStyle/>
+          <a:p>
+            <a:pPr indent="0" marL="0">
+              <a:buNone/>
+            </a:pPr>
+            <a:r>
+              <a:rPr lang="en-US" sz="1200" dirty="0">
+                <a:solidFill>
+                  <a:srgbClr val="8B95A1"/>
+                </a:solidFill>
+                <a:latin typeface="Arial" pitchFamily="34" charset="0"/>
+                <a:ea typeface="Arial" pitchFamily="34" charset="-122"/>
+                <a:cs typeface="Arial" pitchFamily="34" charset="-120"/>
+              </a:rPr>
               <a:t>Google Gemini</a:t>
             </a:r>
-            <a:endParaRPr lang="en-US" sz="1250" dirty="0"/>
-          </a:p>
-        </p:txBody>
-      </p:sp>
-      <p:sp>
-        <p:nvSpPr>
-          <p:cNvPr id="23" name="Shape 21"/>
-          <p:cNvSpPr/>
-          <p:nvPr/>
-        </p:nvSpPr>
-        <p:spPr>
-          <a:xfrm>
-            <a:off x="7178040" y="2697480"/>
-            <a:ext cx="4187952" cy="1280160"/>
+            <a:endParaRPr lang="en-US" sz="1200" dirty="0"/>
+          </a:p>
+        </p:txBody>
+      </p:sp>
+      <p:sp>
+        <p:nvSpPr>
+          <p:cNvPr id="27" name="Shape 25"/>
+          <p:cNvSpPr/>
+          <p:nvPr/>
+        </p:nvSpPr>
+        <p:spPr>
+          <a:xfrm>
+            <a:off x="7178040" y="2606040"/>
+            <a:ext cx="4187952" cy="1097280"/>
           </a:xfrm>
           <a:prstGeom prst="roundRect">
             <a:avLst>
-              <a:gd name="adj" fmla="val 5714"/>
+              <a:gd name="adj" fmla="val 6667"/>
             </a:avLst>
           </a:prstGeom>
           <a:solidFill>
@@ -5098,30 +5261,30 @@
       </p:sp>
       <p:sp>
         <p:nvSpPr>
-          <p:cNvPr id="24" name="Text 22"/>
-          <p:cNvSpPr/>
-          <p:nvPr/>
-        </p:nvSpPr>
-        <p:spPr>
-          <a:xfrm>
-            <a:off x="7452360" y="2898648"/>
-            <a:ext cx="3639312" cy="320040"/>
-          </a:xfrm>
-          <a:prstGeom prst="rect">
-            <a:avLst/>
-          </a:prstGeom>
-          <a:noFill/>
-          <a:ln/>
-        </p:spPr>
-        <p:txBody>
-          <a:bodyPr wrap="square" lIns="0" tIns="0" rIns="0" bIns="0" rtlCol="0" anchor="t"/>
-          <a:lstStyle/>
-          <a:p>
-            <a:pPr indent="0" marL="0">
-              <a:buNone/>
-            </a:pPr>
-            <a:r>
-              <a:rPr lang="en-US" sz="1300" b="1" dirty="0">
+          <p:cNvPr id="28" name="Text 26"/>
+          <p:cNvSpPr/>
+          <p:nvPr/>
+        </p:nvSpPr>
+        <p:spPr>
+          <a:xfrm>
+            <a:off x="7452360" y="2752344"/>
+            <a:ext cx="3639312" cy="292608"/>
+          </a:xfrm>
+          <a:prstGeom prst="rect">
+            <a:avLst/>
+          </a:prstGeom>
+          <a:noFill/>
+          <a:ln/>
+        </p:spPr>
+        <p:txBody>
+          <a:bodyPr wrap="square" lIns="0" tIns="0" rIns="0" bIns="0" rtlCol="0" anchor="t"/>
+          <a:lstStyle/>
+          <a:p>
+            <a:pPr indent="0" marL="0">
+              <a:buNone/>
+            </a:pPr>
+            <a:r>
+              <a:rPr lang="en-US" sz="1250" b="1" dirty="0">
                 <a:solidFill>
                   <a:srgbClr val="3182F6"/>
                 </a:solidFill>
@@ -5131,36 +5294,36 @@
               </a:rPr>
               <a:t>합의 결핍 — 다 같이 깎은 곳</a:t>
             </a:r>
-            <a:endParaRPr lang="en-US" sz="1300" dirty="0"/>
-          </a:p>
-        </p:txBody>
-      </p:sp>
-      <p:sp>
-        <p:nvSpPr>
-          <p:cNvPr id="25" name="Text 23"/>
-          <p:cNvSpPr/>
-          <p:nvPr/>
-        </p:nvSpPr>
-        <p:spPr>
-          <a:xfrm>
-            <a:off x="7452360" y="3200400"/>
-            <a:ext cx="3639312" cy="365760"/>
-          </a:xfrm>
-          <a:prstGeom prst="rect">
-            <a:avLst/>
-          </a:prstGeom>
-          <a:noFill/>
-          <a:ln/>
-        </p:spPr>
-        <p:txBody>
-          <a:bodyPr wrap="square" lIns="0" tIns="0" rIns="0" bIns="0" rtlCol="0" anchor="t"/>
-          <a:lstStyle/>
-          <a:p>
-            <a:pPr indent="0" marL="0">
-              <a:buNone/>
-            </a:pPr>
-            <a:r>
-              <a:rPr lang="en-US" sz="1700" b="1" dirty="0">
+            <a:endParaRPr lang="en-US" sz="1250" dirty="0"/>
+          </a:p>
+        </p:txBody>
+      </p:sp>
+      <p:sp>
+        <p:nvSpPr>
+          <p:cNvPr id="29" name="Text 27"/>
+          <p:cNvSpPr/>
+          <p:nvPr/>
+        </p:nvSpPr>
+        <p:spPr>
+          <a:xfrm>
+            <a:off x="7452360" y="3026664"/>
+            <a:ext cx="3639312" cy="329184"/>
+          </a:xfrm>
+          <a:prstGeom prst="rect">
+            <a:avLst/>
+          </a:prstGeom>
+          <a:noFill/>
+          <a:ln/>
+        </p:spPr>
+        <p:txBody>
+          <a:bodyPr wrap="square" lIns="0" tIns="0" rIns="0" bIns="0" rtlCol="0" anchor="t"/>
+          <a:lstStyle/>
+          <a:p>
+            <a:pPr indent="0" marL="0">
+              <a:buNone/>
+            </a:pPr>
+            <a:r>
+              <a:rPr lang="en-US" sz="1600" b="1" dirty="0">
                 <a:solidFill>
                   <a:srgbClr val="191F28"/>
                 </a:solidFill>
@@ -5168,38 +5331,38 @@
                 <a:ea typeface="Arial" pitchFamily="34" charset="-122"/>
                 <a:cs typeface="Arial" pitchFamily="34" charset="-120"/>
               </a:rPr>
-              <a:t>응답자의 80% 이상(5명 중 4명+)</a:t>
-            </a:r>
-            <a:endParaRPr lang="en-US" sz="1700" dirty="0"/>
-          </a:p>
-        </p:txBody>
-      </p:sp>
-      <p:sp>
-        <p:nvSpPr>
-          <p:cNvPr id="26" name="Text 24"/>
-          <p:cNvSpPr/>
-          <p:nvPr/>
-        </p:nvSpPr>
-        <p:spPr>
-          <a:xfrm>
-            <a:off x="7452360" y="3575304"/>
-            <a:ext cx="3639312" cy="320040"/>
-          </a:xfrm>
-          <a:prstGeom prst="rect">
-            <a:avLst/>
-          </a:prstGeom>
-          <a:noFill/>
-          <a:ln/>
-        </p:spPr>
-        <p:txBody>
-          <a:bodyPr wrap="square" lIns="0" tIns="0" rIns="0" bIns="0" rtlCol="0" anchor="t"/>
-          <a:lstStyle/>
-          <a:p>
-            <a:pPr indent="0" marL="0">
-              <a:buNone/>
-            </a:pPr>
-            <a:r>
-              <a:rPr lang="en-US" sz="1300" dirty="0">
+              <a:t>6명 중 5명 이상이 깎음</a:t>
+            </a:r>
+            <a:endParaRPr lang="en-US" sz="1600" dirty="0"/>
+          </a:p>
+        </p:txBody>
+      </p:sp>
+      <p:sp>
+        <p:nvSpPr>
+          <p:cNvPr id="30" name="Text 28"/>
+          <p:cNvSpPr/>
+          <p:nvPr/>
+        </p:nvSpPr>
+        <p:spPr>
+          <a:xfrm>
+            <a:off x="7452360" y="3364992"/>
+            <a:ext cx="3639312" cy="274320"/>
+          </a:xfrm>
+          <a:prstGeom prst="rect">
+            <a:avLst/>
+          </a:prstGeom>
+          <a:noFill/>
+          <a:ln/>
+        </p:spPr>
+        <p:txBody>
+          <a:bodyPr wrap="square" lIns="0" tIns="0" rIns="0" bIns="0" rtlCol="0" anchor="t"/>
+          <a:lstStyle/>
+          <a:p>
+            <a:pPr indent="0" marL="0">
+              <a:buNone/>
+            </a:pPr>
+            <a:r>
+              <a:rPr lang="en-US" sz="1200" dirty="0">
                 <a:solidFill>
                   <a:srgbClr val="4E5968"/>
                 </a:solidFill>
@@ -5209,24 +5372,24 @@
               </a:rPr>
               <a:t>→ 반드시 고칠 곳</a:t>
             </a:r>
-            <a:endParaRPr lang="en-US" sz="1300" dirty="0"/>
-          </a:p>
-        </p:txBody>
-      </p:sp>
-      <p:sp>
-        <p:nvSpPr>
-          <p:cNvPr id="27" name="Shape 25"/>
-          <p:cNvSpPr/>
-          <p:nvPr/>
-        </p:nvSpPr>
-        <p:spPr>
-          <a:xfrm>
-            <a:off x="7178040" y="4206240"/>
-            <a:ext cx="4187952" cy="1280160"/>
+            <a:endParaRPr lang="en-US" sz="1200" dirty="0"/>
+          </a:p>
+        </p:txBody>
+      </p:sp>
+      <p:sp>
+        <p:nvSpPr>
+          <p:cNvPr id="31" name="Shape 29"/>
+          <p:cNvSpPr/>
+          <p:nvPr/>
+        </p:nvSpPr>
+        <p:spPr>
+          <a:xfrm>
+            <a:off x="7178040" y="3840480"/>
+            <a:ext cx="4187952" cy="1097280"/>
           </a:xfrm>
           <a:prstGeom prst="roundRect">
             <a:avLst>
-              <a:gd name="adj" fmla="val 5714"/>
+              <a:gd name="adj" fmla="val 6667"/>
             </a:avLst>
           </a:prstGeom>
           <a:solidFill>
@@ -5242,30 +5405,30 @@
       </p:sp>
       <p:sp>
         <p:nvSpPr>
-          <p:cNvPr id="28" name="Text 26"/>
-          <p:cNvSpPr/>
-          <p:nvPr/>
-        </p:nvSpPr>
-        <p:spPr>
-          <a:xfrm>
-            <a:off x="7452360" y="4407408"/>
-            <a:ext cx="3639312" cy="320040"/>
-          </a:xfrm>
-          <a:prstGeom prst="rect">
-            <a:avLst/>
-          </a:prstGeom>
-          <a:noFill/>
-          <a:ln/>
-        </p:spPr>
-        <p:txBody>
-          <a:bodyPr wrap="square" lIns="0" tIns="0" rIns="0" bIns="0" rtlCol="0" anchor="t"/>
-          <a:lstStyle/>
-          <a:p>
-            <a:pPr indent="0" marL="0">
-              <a:buNone/>
-            </a:pPr>
-            <a:r>
-              <a:rPr lang="en-US" sz="1300" b="1" dirty="0">
+          <p:cNvPr id="32" name="Text 30"/>
+          <p:cNvSpPr/>
+          <p:nvPr/>
+        </p:nvSpPr>
+        <p:spPr>
+          <a:xfrm>
+            <a:off x="7452360" y="3986784"/>
+            <a:ext cx="3639312" cy="292608"/>
+          </a:xfrm>
+          <a:prstGeom prst="rect">
+            <a:avLst/>
+          </a:prstGeom>
+          <a:noFill/>
+          <a:ln/>
+        </p:spPr>
+        <p:txBody>
+          <a:bodyPr wrap="square" lIns="0" tIns="0" rIns="0" bIns="0" rtlCol="0" anchor="t"/>
+          <a:lstStyle/>
+          <a:p>
+            <a:pPr indent="0" marL="0">
+              <a:buNone/>
+            </a:pPr>
+            <a:r>
+              <a:rPr lang="en-US" sz="1250" b="1" dirty="0">
                 <a:solidFill>
                   <a:srgbClr val="3182F6"/>
                 </a:solidFill>
@@ -5275,36 +5438,36 @@
               </a:rPr>
               <a:t>논쟁 지점 — 의견이 갈린 곳</a:t>
             </a:r>
-            <a:endParaRPr lang="en-US" sz="1300" dirty="0"/>
-          </a:p>
-        </p:txBody>
-      </p:sp>
-      <p:sp>
-        <p:nvSpPr>
-          <p:cNvPr id="29" name="Text 27"/>
-          <p:cNvSpPr/>
-          <p:nvPr/>
-        </p:nvSpPr>
-        <p:spPr>
-          <a:xfrm>
-            <a:off x="7452360" y="4709160"/>
-            <a:ext cx="3639312" cy="365760"/>
-          </a:xfrm>
-          <a:prstGeom prst="rect">
-            <a:avLst/>
-          </a:prstGeom>
-          <a:noFill/>
-          <a:ln/>
-        </p:spPr>
-        <p:txBody>
-          <a:bodyPr wrap="square" lIns="0" tIns="0" rIns="0" bIns="0" rtlCol="0" anchor="t"/>
-          <a:lstStyle/>
-          <a:p>
-            <a:pPr indent="0" marL="0">
-              <a:buNone/>
-            </a:pPr>
-            <a:r>
-              <a:rPr lang="en-US" sz="1700" b="1" dirty="0">
+            <a:endParaRPr lang="en-US" sz="1250" dirty="0"/>
+          </a:p>
+        </p:txBody>
+      </p:sp>
+      <p:sp>
+        <p:nvSpPr>
+          <p:cNvPr id="33" name="Text 31"/>
+          <p:cNvSpPr/>
+          <p:nvPr/>
+        </p:nvSpPr>
+        <p:spPr>
+          <a:xfrm>
+            <a:off x="7452360" y="4261104"/>
+            <a:ext cx="3639312" cy="329184"/>
+          </a:xfrm>
+          <a:prstGeom prst="rect">
+            <a:avLst/>
+          </a:prstGeom>
+          <a:noFill/>
+          <a:ln/>
+        </p:spPr>
+        <p:txBody>
+          <a:bodyPr wrap="square" lIns="0" tIns="0" rIns="0" bIns="0" rtlCol="0" anchor="t"/>
+          <a:lstStyle/>
+          <a:p>
+            <a:pPr indent="0" marL="0">
+              <a:buNone/>
+            </a:pPr>
+            <a:r>
+              <a:rPr lang="en-US" sz="1600" b="1" dirty="0">
                 <a:solidFill>
                   <a:srgbClr val="191F28"/>
                 </a:solidFill>
@@ -5312,38 +5475,38 @@
                 <a:ea typeface="Arial" pitchFamily="34" charset="-122"/>
                 <a:cs typeface="Arial" pitchFamily="34" charset="-120"/>
               </a:rPr>
-              <a:t>응답자의 20~80%가 깎음(5명 중 2~3명)</a:t>
-            </a:r>
-            <a:endParaRPr lang="en-US" sz="1700" dirty="0"/>
-          </a:p>
-        </p:txBody>
-      </p:sp>
-      <p:sp>
-        <p:nvSpPr>
-          <p:cNvPr id="30" name="Text 28"/>
-          <p:cNvSpPr/>
-          <p:nvPr/>
-        </p:nvSpPr>
-        <p:spPr>
-          <a:xfrm>
-            <a:off x="7452360" y="5084064"/>
-            <a:ext cx="3639312" cy="320040"/>
-          </a:xfrm>
-          <a:prstGeom prst="rect">
-            <a:avLst/>
-          </a:prstGeom>
-          <a:noFill/>
-          <a:ln/>
-        </p:spPr>
-        <p:txBody>
-          <a:bodyPr wrap="square" lIns="0" tIns="0" rIns="0" bIns="0" rtlCol="0" anchor="t"/>
-          <a:lstStyle/>
-          <a:p>
-            <a:pPr indent="0" marL="0">
-              <a:buNone/>
-            </a:pPr>
-            <a:r>
-              <a:rPr lang="en-US" sz="1300" dirty="0">
+              <a:t>6명 중 2~4명이 깎음</a:t>
+            </a:r>
+            <a:endParaRPr lang="en-US" sz="1600" dirty="0"/>
+          </a:p>
+        </p:txBody>
+      </p:sp>
+      <p:sp>
+        <p:nvSpPr>
+          <p:cNvPr id="34" name="Text 32"/>
+          <p:cNvSpPr/>
+          <p:nvPr/>
+        </p:nvSpPr>
+        <p:spPr>
+          <a:xfrm>
+            <a:off x="7452360" y="4599432"/>
+            <a:ext cx="3639312" cy="274320"/>
+          </a:xfrm>
+          <a:prstGeom prst="rect">
+            <a:avLst/>
+          </a:prstGeom>
+          <a:noFill/>
+          <a:ln/>
+        </p:spPr>
+        <p:txBody>
+          <a:bodyPr wrap="square" lIns="0" tIns="0" rIns="0" bIns="0" rtlCol="0" anchor="t"/>
+          <a:lstStyle/>
+          <a:p>
+            <a:pPr indent="0" marL="0">
+              <a:buNone/>
+            </a:pPr>
+            <a:r>
+              <a:rPr lang="en-US" sz="1200" dirty="0">
                 <a:solidFill>
                   <a:srgbClr val="4E5968"/>
                 </a:solidFill>
@@ -5353,19 +5516,61 @@
               </a:rPr>
               <a:t>→ 연구자가 판단할 곳</a:t>
             </a:r>
-            <a:endParaRPr lang="en-US" sz="1300" dirty="0"/>
-          </a:p>
-        </p:txBody>
-      </p:sp>
-      <p:sp>
-        <p:nvSpPr>
-          <p:cNvPr id="31" name="Text 29"/>
-          <p:cNvSpPr/>
-          <p:nvPr/>
-        </p:nvSpPr>
-        <p:spPr>
-          <a:xfrm>
-            <a:off x="822960" y="5715000"/>
+            <a:endParaRPr lang="en-US" sz="1200" dirty="0"/>
+          </a:p>
+        </p:txBody>
+      </p:sp>
+      <p:sp>
+        <p:nvSpPr>
+          <p:cNvPr id="35" name="Text 33"/>
+          <p:cNvSpPr/>
+          <p:nvPr/>
+        </p:nvSpPr>
+        <p:spPr>
+          <a:xfrm>
+            <a:off x="7178040" y="5120640"/>
+            <a:ext cx="4187952" cy="548640"/>
+          </a:xfrm>
+          <a:prstGeom prst="rect">
+            <a:avLst/>
+          </a:prstGeom>
+          <a:noFill/>
+          <a:ln/>
+        </p:spPr>
+        <p:txBody>
+          <a:bodyPr wrap="square" lIns="0" tIns="0" rIns="0" bIns="0" rtlCol="0" anchor="t"/>
+          <a:lstStyle/>
+          <a:p>
+            <a:pPr indent="0" marL="0">
+              <a:lnSpc>
+                <a:spcPct val="120000"/>
+              </a:lnSpc>
+              <a:buNone/>
+            </a:pPr>
+            <a:r>
+              <a:rPr lang="en-US" sz="1200" dirty="0">
+                <a:solidFill>
+                  <a:srgbClr val="4E5968"/>
+                </a:solidFill>
+                <a:latin typeface="Arial" pitchFamily="34" charset="0"/>
+                <a:ea typeface="Arial" pitchFamily="34" charset="-122"/>
+                <a:cs typeface="Arial" pitchFamily="34" charset="-120"/>
+              </a:rPr>
+              <a:t>각자 「마음속 등수」(선정·보류·탈락)와 당락 포인트 1개도 냅니다 · 근거 충족도는 실제 심사처럼 최고·최저 제외 평균</a:t>
+            </a:r>
+            <a:endParaRPr lang="en-US" sz="1200" dirty="0"/>
+          </a:p>
+        </p:txBody>
+      </p:sp>
+      <p:sp>
+        <p:nvSpPr>
+          <p:cNvPr id="36" name="Text 34"/>
+          <p:cNvSpPr/>
+          <p:nvPr/>
+        </p:nvSpPr>
+        <p:spPr>
+          <a:xfrm>
+            <a:off x="822960" y="5760720"/>
             <a:ext cx="10543032" cy="685800"/>
           </a:xfrm>
           <a:prstGeom prst="rect">
@@ -5413,7 +5618,7 @@
                 <a:ea typeface="Arial" pitchFamily="34" charset="-122"/>
                 <a:cs typeface="Arial" pitchFamily="34" charset="-120"/>
               </a:rPr>
-              <a:t>과거 심사 기록 없이 이번 공고 심사표에서 질문을 만들고 · 평가위원 Gemini 3명 + 국산 Solar 2명 · 칭찬에도 원문 인용</a:t>
+              <a:t>과거 심사 기록 없이 이번 공고 심사표에서 질문을 만들고 · 평가위원 OpenAI 2명 · Google Gemini 2명 · 국산 Upstage Solar 2명 · 칭찬에도 원문 인용</a:t>
             </a:r>
             <a:endParaRPr lang="en-US" sz="1300" dirty="0"/>
           </a:p>
@@ -5546,7 +5751,7 @@
                 <a:ea typeface="Arial" pitchFamily="34" charset="-122"/>
                 <a:cs typeface="Arial" pitchFamily="34" charset="-120"/>
               </a:rPr>
-              <a:t>44초</a:t>
+              <a:t>19초</a:t>
             </a:r>
             <a:pPr indent="0" marL="0">
               <a:lnSpc>
@@ -5641,7 +5846,7 @@
                 <a:ea typeface="Arial" pitchFamily="34" charset="-122"/>
                 <a:cs typeface="Arial" pitchFamily="34" charset="-120"/>
               </a:rPr>
-              <a:t>요건 34개 · 심사표 5개 자동 추출</a:t>
+              <a:t>요건 39개 · 심사표 5개 자동 추출</a:t>
             </a:r>
             <a:endParaRPr lang="en-US" sz="1600" dirty="0"/>
           </a:p>
@@ -5680,7 +5885,7 @@
                 <a:ea typeface="Arial" pitchFamily="34" charset="-122"/>
                 <a:cs typeface="Arial" pitchFamily="34" charset="-120"/>
               </a:rPr>
-              <a:t>공고 파싱은 처음 한 번(5쪽 15초·37쪽 41초)</a:t>
+              <a:t>공고 파싱은 처음 한 번(5쪽 7초·37쪽 16초)</a:t>
             </a:r>
             <a:endParaRPr lang="en-US" sz="1250" dirty="0"/>
           </a:p>
@@ -5758,7 +5963,7 @@
                 <a:ea typeface="Arial" pitchFamily="34" charset="-122"/>
                 <a:cs typeface="Arial" pitchFamily="34" charset="-120"/>
               </a:rPr>
-              <a:t>점검 질문 15개를 5명에게 따로</a:t>
+              <a:t>점검 질문 15개를 6명에게 따로</a:t>
             </a:r>
             <a:endParaRPr lang="en-US" sz="1600" dirty="0"/>
           </a:p>
@@ -5797,7 +6002,7 @@
                 <a:ea typeface="Arial" pitchFamily="34" charset="-122"/>
                 <a:cs typeface="Arial" pitchFamily="34" charset="-120"/>
               </a:rPr>
-              <a:t>서로의 답을 모른 채 판정 + 인용</a:t>
+              <a:t>서로의 답을 모른 채 판정 + 인용 + 마음속 등수</a:t>
             </a:r>
             <a:endParaRPr lang="en-US" sz="1250" dirty="0"/>
           </a:p>
@@ -5980,7 +6185,7 @@
         <p:spPr>
           <a:xfrm>
             <a:off x="5532120" y="4663440"/>
-            <a:ext cx="3176980" cy="1554480"/>
+            <a:ext cx="4087289" cy="1554480"/>
           </a:xfrm>
           <a:prstGeom prst="roundRect">
             <a:avLst>
@@ -6015,7 +6220,7 @@
         <p:spPr>
           <a:xfrm>
             <a:off x="5623560" y="4754880"/>
-            <a:ext cx="2994100" cy="1292645"/>
+            <a:ext cx="3904409" cy="1310230"/>
           </a:xfrm>
           <a:prstGeom prst="rect">
             <a:avLst/>
@@ -6870,7 +7075,7 @@
                 <a:ea typeface="Arial" pitchFamily="34" charset="-122"/>
                 <a:cs typeface="Arial" pitchFamily="34" charset="-120"/>
               </a:rPr>
-              <a:t>5명 독립 채점</a:t>
+              <a:t>6명 독립 채점</a:t>
             </a:r>
             <a:endParaRPr lang="en-US" sz="1300" dirty="0"/>
           </a:p>
@@ -8062,7 +8267,7 @@
                 <a:ea typeface="Arial" pitchFamily="34" charset="-122"/>
                 <a:cs typeface="Arial" pitchFamily="34" charset="-120"/>
               </a:rPr>
-              <a:t>두 회사 모델, 그래프 하나,</a:t>
+              <a:t>세 회사 모델, 그래프 하나,</a:t>
             </a:r>
             <a:endParaRPr lang="en-US" sz="3400" dirty="0"/>
           </a:p>
@@ -8662,7 +8867,7 @@
                 <a:ea typeface="Arial" pitchFamily="34" charset="-122"/>
                 <a:cs typeface="Arial" pitchFamily="34" charset="-120"/>
               </a:rPr>
-              <a:t>5명 독립 채점</a:t>
+              <a:t>6명 독립 채점</a:t>
             </a:r>
             <a:endParaRPr lang="en-US" sz="1200" dirty="0"/>
           </a:p>
@@ -9036,12 +9241,12 @@
         </p:nvSpPr>
         <p:spPr>
           <a:xfrm>
-            <a:off x="3246120" y="4846320"/>
-            <a:ext cx="2537460" cy="777240"/>
+            <a:off x="3246120" y="4800600"/>
+            <a:ext cx="1661160" cy="914400"/>
           </a:xfrm>
           <a:prstGeom prst="roundRect">
             <a:avLst>
-              <a:gd name="adj" fmla="val 9412"/>
+              <a:gd name="adj" fmla="val 8000"/>
             </a:avLst>
           </a:prstGeom>
           <a:solidFill>
@@ -9063,24 +9268,24 @@
         </p:nvSpPr>
         <p:spPr>
           <a:xfrm>
-            <a:off x="3410712" y="4956048"/>
-            <a:ext cx="2263140" cy="292608"/>
-          </a:xfrm>
-          <a:prstGeom prst="rect">
-            <a:avLst/>
-          </a:prstGeom>
-          <a:noFill/>
-          <a:ln/>
-        </p:spPr>
-        <p:txBody>
-          <a:bodyPr wrap="square" lIns="0" tIns="0" rIns="0" bIns="0" rtlCol="0" anchor="t"/>
-          <a:lstStyle/>
-          <a:p>
-            <a:pPr indent="0" marL="0">
-              <a:buNone/>
-            </a:pPr>
-            <a:r>
-              <a:rPr lang="en-US" sz="1350" b="1" dirty="0">
+            <a:off x="3374136" y="4892040"/>
+            <a:ext cx="1459992" cy="274320"/>
+          </a:xfrm>
+          <a:prstGeom prst="rect">
+            <a:avLst/>
+          </a:prstGeom>
+          <a:noFill/>
+          <a:ln/>
+        </p:spPr>
+        <p:txBody>
+          <a:bodyPr wrap="square" lIns="0" tIns="0" rIns="0" bIns="0" rtlCol="0" anchor="t"/>
+          <a:lstStyle/>
+          <a:p>
+            <a:pPr indent="0" marL="0">
+              <a:buNone/>
+            </a:pPr>
+            <a:r>
+              <a:rPr lang="en-US" sz="1250" b="1" dirty="0">
                 <a:solidFill>
                   <a:srgbClr val="1B64DA"/>
                 </a:solidFill>
@@ -9088,9 +9293,9 @@
                 <a:ea typeface="Arial" pitchFamily="34" charset="-122"/>
                 <a:cs typeface="Arial" pitchFamily="34" charset="-120"/>
               </a:rPr>
-              <a:t>Google Gemini</a:t>
-            </a:r>
-            <a:endParaRPr lang="en-US" sz="1350" dirty="0"/>
+              <a:t>OpenAI</a:t>
+            </a:r>
+            <a:endParaRPr lang="en-US" sz="1250" dirty="0"/>
           </a:p>
         </p:txBody>
       </p:sp>
@@ -9102,24 +9307,27 @@
         </p:nvSpPr>
         <p:spPr>
           <a:xfrm>
-            <a:off x="3410712" y="5276088"/>
-            <a:ext cx="2263140" cy="274320"/>
-          </a:xfrm>
-          <a:prstGeom prst="rect">
-            <a:avLst/>
-          </a:prstGeom>
-          <a:noFill/>
-          <a:ln/>
-        </p:spPr>
-        <p:txBody>
-          <a:bodyPr wrap="square" lIns="0" tIns="0" rIns="0" bIns="0" rtlCol="0" anchor="t"/>
-          <a:lstStyle/>
-          <a:p>
-            <a:pPr indent="0" marL="0">
-              <a:buNone/>
-            </a:pPr>
-            <a:r>
-              <a:rPr lang="en-US" sz="1050" dirty="0">
+            <a:off x="3374136" y="5202936"/>
+            <a:ext cx="1459992" cy="457200"/>
+          </a:xfrm>
+          <a:prstGeom prst="rect">
+            <a:avLst/>
+          </a:prstGeom>
+          <a:noFill/>
+          <a:ln/>
+        </p:spPr>
+        <p:txBody>
+          <a:bodyPr wrap="square" lIns="0" tIns="0" rIns="0" bIns="0" rtlCol="0" anchor="t"/>
+          <a:lstStyle/>
+          <a:p>
+            <a:pPr indent="0" marL="0">
+              <a:lnSpc>
+                <a:spcPct val="110000"/>
+              </a:lnSpc>
+              <a:buNone/>
+            </a:pPr>
+            <a:r>
+              <a:rPr lang="en-US" sz="950" dirty="0">
                 <a:solidFill>
                   <a:srgbClr val="4E5968"/>
                 </a:solidFill>
@@ -9127,9 +9335,29 @@
                 <a:ea typeface="Arial" pitchFamily="34" charset="-122"/>
                 <a:cs typeface="Arial" pitchFamily="34" charset="-120"/>
               </a:rPr>
-              <a:t>파싱 · 점검 질문 · 평가위원 3명</a:t>
-            </a:r>
-            <a:endParaRPr lang="en-US" sz="1050" dirty="0"/>
+              <a:t>주 엔진 gpt-4.1(파싱·질문·보완)</a:t>
+            </a:r>
+            <a:endParaRPr lang="en-US" sz="950" dirty="0"/>
+          </a:p>
+          <a:p>
+            <a:pPr indent="0" marL="0">
+              <a:lnSpc>
+                <a:spcPct val="110000"/>
+              </a:lnSpc>
+              <a:buNone/>
+            </a:pPr>
+            <a:r>
+              <a:rPr lang="en-US" sz="950" dirty="0">
+                <a:solidFill>
+                  <a:srgbClr val="4E5968"/>
+                </a:solidFill>
+                <a:latin typeface="Arial" pitchFamily="34" charset="0"/>
+                <a:ea typeface="Arial" pitchFamily="34" charset="-122"/>
+                <a:cs typeface="Arial" pitchFamily="34" charset="-120"/>
+              </a:rPr>
+              <a:t>평가위원 2명 gpt-5.4-mini</a:t>
+            </a:r>
+            <a:endParaRPr lang="en-US" sz="950" dirty="0"/>
           </a:p>
         </p:txBody>
       </p:sp>
@@ -9141,12 +9369,12 @@
         </p:nvSpPr>
         <p:spPr>
           <a:xfrm>
-            <a:off x="5966460" y="4846320"/>
-            <a:ext cx="2537460" cy="777240"/>
+            <a:off x="5044440" y="4800600"/>
+            <a:ext cx="1661160" cy="914400"/>
           </a:xfrm>
           <a:prstGeom prst="roundRect">
             <a:avLst>
-              <a:gd name="adj" fmla="val 9412"/>
+              <a:gd name="adj" fmla="val 8000"/>
             </a:avLst>
           </a:prstGeom>
           <a:solidFill>
@@ -9168,24 +9396,24 @@
         </p:nvSpPr>
         <p:spPr>
           <a:xfrm>
-            <a:off x="6131052" y="4956048"/>
-            <a:ext cx="2263140" cy="292608"/>
-          </a:xfrm>
-          <a:prstGeom prst="rect">
-            <a:avLst/>
-          </a:prstGeom>
-          <a:noFill/>
-          <a:ln/>
-        </p:spPr>
-        <p:txBody>
-          <a:bodyPr wrap="square" lIns="0" tIns="0" rIns="0" bIns="0" rtlCol="0" anchor="t"/>
-          <a:lstStyle/>
-          <a:p>
-            <a:pPr indent="0" marL="0">
-              <a:buNone/>
-            </a:pPr>
-            <a:r>
-              <a:rPr lang="en-US" sz="1350" b="1" dirty="0">
+            <a:off x="5172456" y="4892040"/>
+            <a:ext cx="1459992" cy="274320"/>
+          </a:xfrm>
+          <a:prstGeom prst="rect">
+            <a:avLst/>
+          </a:prstGeom>
+          <a:noFill/>
+          <a:ln/>
+        </p:spPr>
+        <p:txBody>
+          <a:bodyPr wrap="square" lIns="0" tIns="0" rIns="0" bIns="0" rtlCol="0" anchor="t"/>
+          <a:lstStyle/>
+          <a:p>
+            <a:pPr indent="0" marL="0">
+              <a:buNone/>
+            </a:pPr>
+            <a:r>
+              <a:rPr lang="en-US" sz="1250" b="1" dirty="0">
                 <a:solidFill>
                   <a:srgbClr val="1B64DA"/>
                 </a:solidFill>
@@ -9193,9 +9421,9 @@
                 <a:ea typeface="Arial" pitchFamily="34" charset="-122"/>
                 <a:cs typeface="Arial" pitchFamily="34" charset="-120"/>
               </a:rPr>
-              <a:t>Upstage Solar (국산)</a:t>
-            </a:r>
-            <a:endParaRPr lang="en-US" sz="1350" dirty="0"/>
+              <a:t>Google Gemini</a:t>
+            </a:r>
+            <a:endParaRPr lang="en-US" sz="1250" dirty="0"/>
           </a:p>
         </p:txBody>
       </p:sp>
@@ -9207,24 +9435,27 @@
         </p:nvSpPr>
         <p:spPr>
           <a:xfrm>
-            <a:off x="6131052" y="5276088"/>
-            <a:ext cx="2263140" cy="274320"/>
-          </a:xfrm>
-          <a:prstGeom prst="rect">
-            <a:avLst/>
-          </a:prstGeom>
-          <a:noFill/>
-          <a:ln/>
-        </p:spPr>
-        <p:txBody>
-          <a:bodyPr wrap="square" lIns="0" tIns="0" rIns="0" bIns="0" rtlCol="0" anchor="t"/>
-          <a:lstStyle/>
-          <a:p>
-            <a:pPr indent="0" marL="0">
-              <a:buNone/>
-            </a:pPr>
-            <a:r>
-              <a:rPr lang="en-US" sz="1050" dirty="0">
+            <a:off x="5172456" y="5202936"/>
+            <a:ext cx="1459992" cy="457200"/>
+          </a:xfrm>
+          <a:prstGeom prst="rect">
+            <a:avLst/>
+          </a:prstGeom>
+          <a:noFill/>
+          <a:ln/>
+        </p:spPr>
+        <p:txBody>
+          <a:bodyPr wrap="square" lIns="0" tIns="0" rIns="0" bIns="0" rtlCol="0" anchor="t"/>
+          <a:lstStyle/>
+          <a:p>
+            <a:pPr indent="0" marL="0">
+              <a:lnSpc>
+                <a:spcPct val="110000"/>
+              </a:lnSpc>
+              <a:buNone/>
+            </a:pPr>
+            <a:r>
+              <a:rPr lang="en-US" sz="950" dirty="0">
                 <a:solidFill>
                   <a:srgbClr val="4E5968"/>
                 </a:solidFill>
@@ -9232,15 +9463,163 @@
                 <a:ea typeface="Arial" pitchFamily="34" charset="-122"/>
                 <a:cs typeface="Arial" pitchFamily="34" charset="-120"/>
               </a:rPr>
-              <a:t>평가위원 2명 · 다른 회사 모델로 교차</a:t>
-            </a:r>
-            <a:endParaRPr lang="en-US" sz="1050" dirty="0"/>
+              <a:t>평가위원 2명</a:t>
+            </a:r>
+            <a:endParaRPr lang="en-US" sz="950" dirty="0"/>
+          </a:p>
+          <a:p>
+            <a:pPr indent="0" marL="0">
+              <a:lnSpc>
+                <a:spcPct val="110000"/>
+              </a:lnSpc>
+              <a:buNone/>
+            </a:pPr>
+            <a:r>
+              <a:rPr lang="en-US" sz="950" dirty="0">
+                <a:solidFill>
+                  <a:srgbClr val="4E5968"/>
+                </a:solidFill>
+                <a:latin typeface="Arial" pitchFamily="34" charset="0"/>
+                <a:ea typeface="Arial" pitchFamily="34" charset="-122"/>
+                <a:cs typeface="Arial" pitchFamily="34" charset="-120"/>
+              </a:rPr>
+              <a:t>한도 소진 시 gpt-4.1-mini</a:t>
+            </a:r>
+            <a:endParaRPr lang="en-US" sz="950" dirty="0"/>
           </a:p>
         </p:txBody>
       </p:sp>
       <p:sp>
         <p:nvSpPr>
           <p:cNvPr id="39" name="Shape 37"/>
+          <p:cNvSpPr/>
+          <p:nvPr/>
+        </p:nvSpPr>
+        <p:spPr>
+          <a:xfrm>
+            <a:off x="6842760" y="4800600"/>
+            <a:ext cx="1661160" cy="914400"/>
+          </a:xfrm>
+          <a:prstGeom prst="roundRect">
+            <a:avLst>
+              <a:gd name="adj" fmla="val 8000"/>
+            </a:avLst>
+          </a:prstGeom>
+          <a:solidFill>
+            <a:srgbClr val="EAF3FF"/>
+          </a:solidFill>
+          <a:ln w="12700">
+            <a:solidFill>
+              <a:srgbClr val="3182F6"/>
+            </a:solidFill>
+            <a:prstDash val="solid"/>
+          </a:ln>
+        </p:spPr>
+      </p:sp>
+      <p:sp>
+        <p:nvSpPr>
+          <p:cNvPr id="40" name="Text 38"/>
+          <p:cNvSpPr/>
+          <p:nvPr/>
+        </p:nvSpPr>
+        <p:spPr>
+          <a:xfrm>
+            <a:off x="6970776" y="4892040"/>
+            <a:ext cx="1459992" cy="274320"/>
+          </a:xfrm>
+          <a:prstGeom prst="rect">
+            <a:avLst/>
+          </a:prstGeom>
+          <a:noFill/>
+          <a:ln/>
+        </p:spPr>
+        <p:txBody>
+          <a:bodyPr wrap="square" lIns="0" tIns="0" rIns="0" bIns="0" rtlCol="0" anchor="t"/>
+          <a:lstStyle/>
+          <a:p>
+            <a:pPr indent="0" marL="0">
+              <a:buNone/>
+            </a:pPr>
+            <a:r>
+              <a:rPr lang="en-US" sz="1250" b="1" dirty="0">
+                <a:solidFill>
+                  <a:srgbClr val="1B64DA"/>
+                </a:solidFill>
+                <a:latin typeface="Arial" pitchFamily="34" charset="0"/>
+                <a:ea typeface="Arial" pitchFamily="34" charset="-122"/>
+                <a:cs typeface="Arial" pitchFamily="34" charset="-120"/>
+              </a:rPr>
+              <a:t>Upstage Solar</a:t>
+            </a:r>
+            <a:endParaRPr lang="en-US" sz="1250" dirty="0"/>
+          </a:p>
+        </p:txBody>
+      </p:sp>
+      <p:sp>
+        <p:nvSpPr>
+          <p:cNvPr id="41" name="Text 39"/>
+          <p:cNvSpPr/>
+          <p:nvPr/>
+        </p:nvSpPr>
+        <p:spPr>
+          <a:xfrm>
+            <a:off x="6970776" y="5202936"/>
+            <a:ext cx="1459992" cy="457200"/>
+          </a:xfrm>
+          <a:prstGeom prst="rect">
+            <a:avLst/>
+          </a:prstGeom>
+          <a:noFill/>
+          <a:ln/>
+        </p:spPr>
+        <p:txBody>
+          <a:bodyPr wrap="square" lIns="0" tIns="0" rIns="0" bIns="0" rtlCol="0" anchor="t"/>
+          <a:lstStyle/>
+          <a:p>
+            <a:pPr indent="0" marL="0">
+              <a:lnSpc>
+                <a:spcPct val="110000"/>
+              </a:lnSpc>
+              <a:buNone/>
+            </a:pPr>
+            <a:r>
+              <a:rPr lang="en-US" sz="950" dirty="0">
+                <a:solidFill>
+                  <a:srgbClr val="4E5968"/>
+                </a:solidFill>
+                <a:latin typeface="Arial" pitchFamily="34" charset="0"/>
+                <a:ea typeface="Arial" pitchFamily="34" charset="-122"/>
+                <a:cs typeface="Arial" pitchFamily="34" charset="-120"/>
+              </a:rPr>
+              <a:t>국산 · 평가위원 2명</a:t>
+            </a:r>
+            <a:endParaRPr lang="en-US" sz="950" dirty="0"/>
+          </a:p>
+          <a:p>
+            <a:pPr indent="0" marL="0">
+              <a:lnSpc>
+                <a:spcPct val="110000"/>
+              </a:lnSpc>
+              <a:buNone/>
+            </a:pPr>
+            <a:r>
+              <a:rPr lang="en-US" sz="950" dirty="0">
+                <a:solidFill>
+                  <a:srgbClr val="4E5968"/>
+                </a:solidFill>
+                <a:latin typeface="Arial" pitchFamily="34" charset="0"/>
+                <a:ea typeface="Arial" pitchFamily="34" charset="-122"/>
+                <a:cs typeface="Arial" pitchFamily="34" charset="-120"/>
+              </a:rPr>
+              <a:t>주 엔진 장애 시 대체</a:t>
+            </a:r>
+            <a:endParaRPr lang="en-US" sz="950" dirty="0"/>
+          </a:p>
+        </p:txBody>
+      </p:sp>
+      <p:sp>
+        <p:nvSpPr>
+          <p:cNvPr id="42" name="Shape 40"/>
           <p:cNvSpPr/>
           <p:nvPr/>
         </p:nvSpPr>
@@ -9267,7 +9646,7 @@
       </p:sp>
       <p:sp>
         <p:nvSpPr>
-          <p:cNvPr id="40" name="Text 38"/>
+          <p:cNvPr id="43" name="Text 41"/>
           <p:cNvSpPr/>
           <p:nvPr/>
         </p:nvSpPr>
@@ -9306,7 +9685,7 @@
       </p:sp>
       <p:sp>
         <p:nvSpPr>
-          <p:cNvPr id="41" name="Text 39"/>
+          <p:cNvPr id="44" name="Text 42"/>
           <p:cNvSpPr/>
           <p:nvPr/>
         </p:nvSpPr>
@@ -9388,7 +9767,7 @@
       </p:sp>
       <p:sp>
         <p:nvSpPr>
-          <p:cNvPr id="42" name="Shape 40"/>
+          <p:cNvPr id="45" name="Shape 43"/>
           <p:cNvSpPr/>
           <p:nvPr/>
         </p:nvSpPr>
@@ -9412,7 +9791,7 @@
       </p:sp>
       <p:sp>
         <p:nvSpPr>
-          <p:cNvPr id="43" name="Shape 41"/>
+          <p:cNvPr id="46" name="Shape 44"/>
           <p:cNvSpPr/>
           <p:nvPr/>
         </p:nvSpPr>
@@ -9439,7 +9818,7 @@
       </p:sp>
       <p:sp>
         <p:nvSpPr>
-          <p:cNvPr id="44" name="Text 42"/>
+          <p:cNvPr id="47" name="Text 45"/>
           <p:cNvSpPr/>
           <p:nvPr/>
         </p:nvSpPr>
@@ -9478,7 +9857,7 @@
       </p:sp>
       <p:sp>
         <p:nvSpPr>
-          <p:cNvPr id="45" name="Text 43"/>
+          <p:cNvPr id="48" name="Text 46"/>
           <p:cNvSpPr/>
           <p:nvPr/>
         </p:nvSpPr>
@@ -9517,7 +9896,7 @@
       </p:sp>
       <p:sp>
         <p:nvSpPr>
-          <p:cNvPr id="46" name="Shape 44"/>
+          <p:cNvPr id="49" name="Shape 47"/>
           <p:cNvSpPr/>
           <p:nvPr/>
         </p:nvSpPr>
@@ -9541,7 +9920,7 @@
       </p:sp>
       <p:sp>
         <p:nvSpPr>
-          <p:cNvPr id="47" name="Shape 45"/>
+          <p:cNvPr id="50" name="Shape 48"/>
           <p:cNvSpPr/>
           <p:nvPr/>
         </p:nvSpPr>
@@ -9568,7 +9947,7 @@
       </p:sp>
       <p:sp>
         <p:nvSpPr>
-          <p:cNvPr id="48" name="Text 46"/>
+          <p:cNvPr id="51" name="Text 49"/>
           <p:cNvSpPr/>
           <p:nvPr/>
         </p:nvSpPr>
@@ -9607,7 +9986,7 @@
       </p:sp>
       <p:sp>
         <p:nvSpPr>
-          <p:cNvPr id="49" name="Text 47"/>
+          <p:cNvPr id="52" name="Text 50"/>
           <p:cNvSpPr/>
           <p:nvPr/>
         </p:nvSpPr>
@@ -9646,7 +10025,7 @@
       </p:sp>
       <p:sp>
         <p:nvSpPr>
-          <p:cNvPr id="50" name="Text 48"/>
+          <p:cNvPr id="53" name="Text 51"/>
           <p:cNvSpPr/>
           <p:nvPr/>
         </p:nvSpPr>
@@ -9677,7 +10056,7 @@
                 <a:ea typeface="Arial" pitchFamily="34" charset="-122"/>
                 <a:cs typeface="Arial" pitchFamily="34" charset="-120"/>
               </a:rPr>
-              <a:t>데이터: 공개 R&amp;D 공고 3건(국가과학기술연구회·우주항공청·산업통상부) + 쪽별 정답표 · 인용 검사·집계는 LLM을 모르는 순수 코드(테스트 22개)</a:t>
+              <a:t>데이터: 공개 R&amp;D 공고 3건(국가과학기술연구회·우주항공청·산업통상부) + 쪽별 정답표 · 인용 검사·집계는 LLM을 모르는 순수 코드(테스트 25개)</a:t>
             </a:r>
             <a:endParaRPr lang="en-US" sz="1200" dirty="0"/>
           </a:p>
@@ -9685,7 +10064,7 @@
       </p:sp>
       <p:sp>
         <p:nvSpPr>
-          <p:cNvPr id="51" name="Text 49"/>
+          <p:cNvPr id="54" name="Text 52"/>
           <p:cNvSpPr/>
           <p:nvPr/>
         </p:nvSpPr>
@@ -10234,7 +10613,7 @@
                 <a:ea typeface="Arial" pitchFamily="34" charset="-122"/>
                 <a:cs typeface="Arial" pitchFamily="34" charset="-120"/>
               </a:rPr>
-              <a:t>그래도 없으면 「충족」을 점수에서 뺍니다(강등)</a:t>
+              <a:t>그래도 없으면 「충족」을 인정하지 않습니다(강등)</a:t>
             </a:r>
             <a:endParaRPr lang="en-US" sz="1250" dirty="0"/>
           </a:p>
@@ -10273,7 +10652,7 @@
                 <a:ea typeface="Arial" pitchFamily="34" charset="-122"/>
                 <a:cs typeface="Arial" pitchFamily="34" charset="-120"/>
               </a:rPr>
-              <a:t>6건</a:t>
+              <a:t>12건</a:t>
             </a:r>
             <a:endParaRPr lang="en-US" sz="4400" dirty="0"/>
           </a:p>
@@ -10315,7 +10694,7 @@
                 <a:ea typeface="Arial" pitchFamily="34" charset="-122"/>
                 <a:cs typeface="Arial" pitchFamily="34" charset="-120"/>
               </a:rPr>
-              <a:t>판정 60개 중 인용이 원문에 없던 것</a:t>
+              <a:t>판정 90개 중 인용이 원문에 없던 것</a:t>
             </a:r>
             <a:endParaRPr lang="en-US" sz="1250" dirty="0"/>
           </a:p>
@@ -10329,7 +10708,7 @@
         </p:nvSpPr>
         <p:spPr>
           <a:xfrm>
-            <a:off x="7635240" y="4069080"/>
+            <a:off x="7635240" y="3977640"/>
             <a:ext cx="3730752" cy="868680"/>
           </a:xfrm>
           <a:prstGeom prst="rect">
@@ -10354,7 +10733,7 @@
                 <a:ea typeface="Arial" pitchFamily="34" charset="-122"/>
                 <a:cs typeface="Arial" pitchFamily="34" charset="-120"/>
               </a:rPr>
-              <a:t>6건</a:t>
+              <a:t>11건</a:t>
             </a:r>
             <a:endParaRPr lang="en-US" sz="4400" dirty="0"/>
           </a:p>
@@ -10368,7 +10747,7 @@
         </p:nvSpPr>
         <p:spPr>
           <a:xfrm>
-            <a:off x="7635240" y="4937760"/>
+            <a:off x="7635240" y="4846320"/>
             <a:ext cx="3730752" cy="685800"/>
           </a:xfrm>
           <a:prstGeom prst="rect">
@@ -10396,7 +10775,7 @@
                 <a:ea typeface="Arial" pitchFamily="34" charset="-122"/>
                 <a:cs typeface="Arial" pitchFamily="34" charset="-120"/>
               </a:rPr>
-              <a:t>다시 물은 뒤 무효에서 벗어남(인용 통과 또는 「부족」으로 하향)</a:t>
+              <a:t>다시 물어 원문 인용을 찾은 판정(충족 유지)</a:t>
             </a:r>
             <a:endParaRPr lang="en-US" sz="1250" dirty="0"/>
           </a:p>
@@ -10404,7 +10783,46 @@
       </p:sp>
       <p:sp>
         <p:nvSpPr>
-          <p:cNvPr id="17" name="Shape 15"/>
+          <p:cNvPr id="17" name="Text 15"/>
+          <p:cNvSpPr/>
+          <p:nvPr/>
+        </p:nvSpPr>
+        <p:spPr>
+          <a:xfrm>
+            <a:off x="7635240" y="5166360"/>
+            <a:ext cx="3730752" cy="320040"/>
+          </a:xfrm>
+          <a:prstGeom prst="rect">
+            <a:avLst/>
+          </a:prstGeom>
+          <a:noFill/>
+          <a:ln/>
+        </p:spPr>
+        <p:txBody>
+          <a:bodyPr wrap="square" lIns="0" tIns="0" rIns="0" bIns="0" rtlCol="0" anchor="t"/>
+          <a:lstStyle/>
+          <a:p>
+            <a:pPr indent="0" marL="0">
+              <a:buNone/>
+            </a:pPr>
+            <a:r>
+              <a:rPr lang="en-US" sz="1200" b="1" dirty="0">
+                <a:solidFill>
+                  <a:srgbClr val="4E5968"/>
+                </a:solidFill>
+                <a:latin typeface="Arial" pitchFamily="34" charset="0"/>
+                <a:ea typeface="Arial" pitchFamily="34" charset="-122"/>
+                <a:cs typeface="Arial" pitchFamily="34" charset="-120"/>
+              </a:rPr>
+              <a:t>「부족·누락」으로 정정 0건 · 여전히 무효 1건(충족 인정 안 함)</a:t>
+            </a:r>
+            <a:endParaRPr lang="en-US" sz="1200" dirty="0"/>
+          </a:p>
+        </p:txBody>
+      </p:sp>
+      <p:sp>
+        <p:nvSpPr>
+          <p:cNvPr id="18" name="Shape 16"/>
           <p:cNvSpPr/>
           <p:nvPr/>
         </p:nvSpPr>
@@ -10427,7 +10845,7 @@
       </p:sp>
       <p:sp>
         <p:nvSpPr>
-          <p:cNvPr id="18" name="Text 16"/>
+          <p:cNvPr id="19" name="Text 17"/>
           <p:cNvSpPr/>
           <p:nvPr/>
         </p:nvSpPr>
@@ -10466,7 +10884,7 @@
       </p:sp>
       <p:sp>
         <p:nvSpPr>
-          <p:cNvPr id="19" name="Text 17"/>
+          <p:cNvPr id="20" name="Text 18"/>
           <p:cNvSpPr/>
           <p:nvPr/>
         </p:nvSpPr>
@@ -10497,7 +10915,7 @@
                 <a:ea typeface="Arial" pitchFamily="34" charset="-122"/>
                 <a:cs typeface="Arial" pitchFamily="34" charset="-120"/>
               </a:rPr>
-              <a:t>숫자: 예선 기획서 실행 기록(data/runs/nais-hackathon-2026--original.json의 trace) · 이번 실행은 평가위원 4/5명 응답(1명 응답 실패 — 복구 중)</a:t>
+              <a:t>숫자: 예선 기획서 실행 기록(data/runs/nais-hackathon-2026--original.json의 trace)</a:t>
             </a:r>
             <a:endParaRPr lang="en-US" sz="1000" dirty="0"/>
           </a:p>
@@ -10744,110 +11162,10 @@
                 <a:ea typeface="Arial" pitchFamily="34" charset="-122"/>
                 <a:cs typeface="Arial" pitchFamily="34" charset="-120"/>
               </a:rPr>
-              <a:t>우주항공청 37/39 · 산업통상부 53/58 — 가장 약한 곳: NAIS 해커톤 14/26, 심사표 일치 0%(놓친 12건 중 5건이 기획서 작성 항목)</a:t>
+              <a:t>우주항공청 35/39 · 산업통상부 56/58 · NAIS 해커톤 22/26(가장 약한 곳: NAIS 해커톤)</a:t>
             </a:r>
             <a:endParaRPr lang="en-US" sz="1150" dirty="0"/>
           </a:p>
-        </p:txBody>
-      </p:sp>
-      <p:sp>
-        <p:nvSpPr>
-          <p:cNvPr id="7" name="Text 4"/>
-          <p:cNvSpPr/>
-          <p:nvPr/>
-        </p:nvSpPr>
-        <p:spPr>
-          <a:xfrm>
-            <a:off x="7406640" y="2606040"/>
-            <a:ext cx="3959352" cy="320040"/>
-          </a:xfrm>
-          <a:prstGeom prst="rect">
-            <a:avLst/>
-          </a:prstGeom>
-          <a:noFill/>
-          <a:ln/>
-        </p:spPr>
-        <p:txBody>
-          <a:bodyPr wrap="square" lIns="0" tIns="0" rIns="0" bIns="0" rtlCol="0" anchor="t"/>
-          <a:lstStyle/>
-          <a:p>
-            <a:pPr indent="0" marL="0">
-              <a:buNone/>
-            </a:pPr>
-            <a:r>
-              <a:rPr lang="en-US" sz="1300" b="1" dirty="0">
-                <a:solidFill>
-                  <a:srgbClr val="4E5968"/>
-                </a:solidFill>
-                <a:latin typeface="Arial" pitchFamily="34" charset="0"/>
-                <a:ea typeface="Arial" pitchFamily="34" charset="-122"/>
-                <a:cs typeface="Arial" pitchFamily="34" charset="-120"/>
-              </a:rPr>
-              <a:t>② 일부러 지운 초안 시험 (예선 심사표)</a:t>
-            </a:r>
-            <a:endParaRPr lang="en-US" sz="1300" dirty="0"/>
-          </a:p>
-        </p:txBody>
-      </p:sp>
-      <p:sp>
-        <p:nvSpPr>
-          <p:cNvPr id="8" name="Text 5"/>
-          <p:cNvSpPr/>
-          <p:nvPr/>
-        </p:nvSpPr>
-        <p:spPr>
-          <a:xfrm>
-            <a:off x="7406640" y="2926080"/>
-            <a:ext cx="3959352" cy="868680"/>
-          </a:xfrm>
-          <a:prstGeom prst="rect">
-            <a:avLst/>
-          </a:prstGeom>
-          <a:noFill/>
-          <a:ln/>
-        </p:spPr>
-        <p:txBody>
-          <a:bodyPr wrap="square" lIns="0" tIns="0" rIns="0" bIns="0" rtlCol="0" anchor="t"/>
-          <a:lstStyle/>
-          <a:p>
-            <a:pPr indent="0" marL="0">
-              <a:buNone/>
-            </a:pPr>
-            <a:r>
-              <a:rPr lang="en-US" sz="4400" b="1" dirty="0">
-                <a:solidFill>
-                  <a:srgbClr val="3182F6"/>
-                </a:solidFill>
-                <a:latin typeface="Arial" pitchFamily="34" charset="0"/>
-                <a:ea typeface="Arial" pitchFamily="34" charset="-122"/>
-                <a:cs typeface="Arial" pitchFamily="34" charset="-120"/>
-              </a:rPr>
-              <a:t>4/5</a:t>
-            </a:r>
-            <a:endParaRPr lang="en-US" sz="4400" dirty="0"/>
-          </a:p>
-        </p:txBody>
-      </p:sp>
-      <p:sp>
-        <p:nvSpPr>
-          <p:cNvPr id="9" name="Text 6"/>
-          <p:cNvSpPr/>
-          <p:nvPr/>
-        </p:nvSpPr>
-        <p:spPr>
-          <a:xfrm>
-            <a:off x="7406640" y="3794760"/>
-            <a:ext cx="3959352" cy="685800"/>
-          </a:xfrm>
-          <a:prstGeom prst="rect">
-            <a:avLst/>
-          </a:prstGeom>
-          <a:noFill/>
-          <a:ln/>
-        </p:spPr>
-        <p:txBody>
-          <a:bodyPr wrap="square" lIns="0" tIns="0" rIns="0" bIns="0" rtlCol="0" anchor="t"/>
-          <a:lstStyle/>
           <a:p>
             <a:pPr indent="0" marL="0">
               <a:lnSpc>
@@ -10856,7 +11174,7 @@
               <a:buNone/>
             </a:pPr>
             <a:r>
-              <a:rPr lang="en-US" sz="1250" dirty="0">
+              <a:rPr lang="en-US" sz="1150" dirty="0">
                 <a:solidFill>
                   <a:srgbClr val="8B95A1"/>
                 </a:solidFill>
@@ -10864,10 +11182,110 @@
                 <a:ea typeface="Arial" pitchFamily="34" charset="-122"/>
                 <a:cs typeface="Arial" pitchFamily="34" charset="-120"/>
               </a:rPr>
-              <a:t>근거 블록을 하나씩 지운 초안 5개 중 짚은 수</a:t>
-            </a:r>
-            <a:endParaRPr lang="en-US" sz="1250" dirty="0"/>
-          </a:p>
+              <a:t>심사표 이름·배점 일치 3건 모두 100% · 1건 7~16초</a:t>
+            </a:r>
+            <a:endParaRPr lang="en-US" sz="1150" dirty="0"/>
+          </a:p>
+        </p:txBody>
+      </p:sp>
+      <p:sp>
+        <p:nvSpPr>
+          <p:cNvPr id="7" name="Text 4"/>
+          <p:cNvSpPr/>
+          <p:nvPr/>
+        </p:nvSpPr>
+        <p:spPr>
+          <a:xfrm>
+            <a:off x="7406640" y="2606040"/>
+            <a:ext cx="3959352" cy="320040"/>
+          </a:xfrm>
+          <a:prstGeom prst="rect">
+            <a:avLst/>
+          </a:prstGeom>
+          <a:noFill/>
+          <a:ln/>
+        </p:spPr>
+        <p:txBody>
+          <a:bodyPr wrap="square" lIns="0" tIns="0" rIns="0" bIns="0" rtlCol="0" anchor="t"/>
+          <a:lstStyle/>
+          <a:p>
+            <a:pPr indent="0" marL="0">
+              <a:buNone/>
+            </a:pPr>
+            <a:r>
+              <a:rPr lang="en-US" sz="1300" b="1" dirty="0">
+                <a:solidFill>
+                  <a:srgbClr val="4E5968"/>
+                </a:solidFill>
+                <a:latin typeface="Arial" pitchFamily="34" charset="0"/>
+                <a:ea typeface="Arial" pitchFamily="34" charset="-122"/>
+                <a:cs typeface="Arial" pitchFamily="34" charset="-120"/>
+              </a:rPr>
+              <a:t>② 일부러 지운 초안 시험 (예선 심사표)</a:t>
+            </a:r>
+            <a:endParaRPr lang="en-US" sz="1300" dirty="0"/>
+          </a:p>
+        </p:txBody>
+      </p:sp>
+      <p:sp>
+        <p:nvSpPr>
+          <p:cNvPr id="8" name="Text 5"/>
+          <p:cNvSpPr/>
+          <p:nvPr/>
+        </p:nvSpPr>
+        <p:spPr>
+          <a:xfrm>
+            <a:off x="7406640" y="2926080"/>
+            <a:ext cx="3959352" cy="868680"/>
+          </a:xfrm>
+          <a:prstGeom prst="rect">
+            <a:avLst/>
+          </a:prstGeom>
+          <a:noFill/>
+          <a:ln/>
+        </p:spPr>
+        <p:txBody>
+          <a:bodyPr wrap="square" lIns="0" tIns="0" rIns="0" bIns="0" rtlCol="0" anchor="t"/>
+          <a:lstStyle/>
+          <a:p>
+            <a:pPr indent="0" marL="0">
+              <a:buNone/>
+            </a:pPr>
+            <a:r>
+              <a:rPr lang="en-US" sz="4400" b="1" dirty="0">
+                <a:solidFill>
+                  <a:srgbClr val="3182F6"/>
+                </a:solidFill>
+                <a:latin typeface="Arial" pitchFamily="34" charset="0"/>
+                <a:ea typeface="Arial" pitchFamily="34" charset="-122"/>
+                <a:cs typeface="Arial" pitchFamily="34" charset="-120"/>
+              </a:rPr>
+              <a:t>4/5</a:t>
+            </a:r>
+            <a:endParaRPr lang="en-US" sz="4400" dirty="0"/>
+          </a:p>
+        </p:txBody>
+      </p:sp>
+      <p:sp>
+        <p:nvSpPr>
+          <p:cNvPr id="9" name="Text 6"/>
+          <p:cNvSpPr/>
+          <p:nvPr/>
+        </p:nvSpPr>
+        <p:spPr>
+          <a:xfrm>
+            <a:off x="7406640" y="3794760"/>
+            <a:ext cx="3959352" cy="685800"/>
+          </a:xfrm>
+          <a:prstGeom prst="rect">
+            <a:avLst/>
+          </a:prstGeom>
+          <a:noFill/>
+          <a:ln/>
+        </p:spPr>
+        <p:txBody>
+          <a:bodyPr wrap="square" lIns="0" tIns="0" rIns="0" bIns="0" rtlCol="0" anchor="t"/>
+          <a:lstStyle/>
           <a:p>
             <a:pPr indent="0" marL="0">
               <a:lnSpc>
@@ -10884,32 +11302,10 @@
                 <a:ea typeface="Arial" pitchFamily="34" charset="-122"/>
                 <a:cs typeface="Arial" pitchFamily="34" charset="-120"/>
               </a:rPr>
-              <a:t>짚은 곳의 정확도 75%</a:t>
+              <a:t>근거 블록을 하나씩 지운 초안 5개 중 짚은 수</a:t>
             </a:r>
             <a:endParaRPr lang="en-US" sz="1250" dirty="0"/>
           </a:p>
-        </p:txBody>
-      </p:sp>
-      <p:sp>
-        <p:nvSpPr>
-          <p:cNvPr id="10" name="Text 7"/>
-          <p:cNvSpPr/>
-          <p:nvPr/>
-        </p:nvSpPr>
-        <p:spPr>
-          <a:xfrm>
-            <a:off x="7406640" y="4434840"/>
-            <a:ext cx="3959352" cy="685800"/>
-          </a:xfrm>
-          <a:prstGeom prst="rect">
-            <a:avLst/>
-          </a:prstGeom>
-          <a:noFill/>
-          <a:ln/>
-        </p:spPr>
-        <p:txBody>
-          <a:bodyPr wrap="square" lIns="0" tIns="0" rIns="0" bIns="0" rtlCol="0" anchor="t"/>
-          <a:lstStyle/>
           <a:p>
             <a:pPr indent="0" marL="0">
               <a:lnSpc>
@@ -10918,30 +11314,30 @@
               <a:buNone/>
             </a:pPr>
             <a:r>
-              <a:rPr lang="en-US" sz="1200" dirty="0">
-                <a:solidFill>
-                  <a:srgbClr val="4E5968"/>
-                </a:solidFill>
-                <a:latin typeface="Arial" pitchFamily="34" charset="0"/>
-                <a:ea typeface="Arial" pitchFamily="34" charset="-122"/>
-                <a:cs typeface="Arial" pitchFamily="34" charset="-120"/>
-              </a:rPr>
-              <a:t>첫 초안 세트는 1~2/5 — 결과를 본 뒤 블록을 다시 설계한 두 번째 세트입니다(사전 등록 아님). 지운 초안의 점수는 원본 97점보다 1~15점 낮았습니다.</a:t>
-            </a:r>
-            <a:endParaRPr lang="en-US" sz="1200" dirty="0"/>
-          </a:p>
-        </p:txBody>
-      </p:sp>
-      <p:sp>
-        <p:nvSpPr>
-          <p:cNvPr id="11" name="Text 8"/>
-          <p:cNvSpPr/>
-          <p:nvPr/>
-        </p:nvSpPr>
-        <p:spPr>
-          <a:xfrm>
-            <a:off x="7406640" y="5303520"/>
-            <a:ext cx="3959352" cy="502920"/>
+              <a:rPr lang="en-US" sz="1250" dirty="0">
+                <a:solidFill>
+                  <a:srgbClr val="8B95A1"/>
+                </a:solidFill>
+                <a:latin typeface="Arial" pitchFamily="34" charset="0"/>
+                <a:ea typeface="Arial" pitchFamily="34" charset="-122"/>
+                <a:cs typeface="Arial" pitchFamily="34" charset="-120"/>
+              </a:rPr>
+              <a:t>짚은 곳의 정확도 100%</a:t>
+            </a:r>
+            <a:endParaRPr lang="en-US" sz="1250" dirty="0"/>
+          </a:p>
+        </p:txBody>
+      </p:sp>
+      <p:sp>
+        <p:nvSpPr>
+          <p:cNvPr id="10" name="Text 7"/>
+          <p:cNvSpPr/>
+          <p:nvPr/>
+        </p:nvSpPr>
+        <p:spPr>
+          <a:xfrm>
+            <a:off x="7406640" y="4434840"/>
+            <a:ext cx="3959352" cy="685800"/>
           </a:xfrm>
           <a:prstGeom prst="rect">
             <a:avLst/>
@@ -10960,6 +11356,48 @@
               <a:buNone/>
             </a:pPr>
             <a:r>
+              <a:rPr lang="en-US" sz="1200" dirty="0">
+                <a:solidFill>
+                  <a:srgbClr val="4E5968"/>
+                </a:solidFill>
+                <a:latin typeface="Arial" pitchFamily="34" charset="0"/>
+                <a:ea typeface="Arial" pitchFamily="34" charset="-122"/>
+                <a:cs typeface="Arial" pitchFamily="34" charset="-120"/>
+              </a:rPr>
+              <a:t>첫 초안 세트는 1~2/5 — 결과를 본 뒤 블록을 다시 설계한 두 번째 세트입니다(사전 등록 아님). 근거 충족도는 지운 초안 5개 중 3개만 원본(91.2)보다 낮았습니다 — 총점이 아니라 「짚은 곳」으로 판정합니다.</a:t>
+            </a:r>
+            <a:endParaRPr lang="en-US" sz="1200" dirty="0"/>
+          </a:p>
+        </p:txBody>
+      </p:sp>
+      <p:sp>
+        <p:nvSpPr>
+          <p:cNvPr id="11" name="Text 8"/>
+          <p:cNvSpPr/>
+          <p:nvPr/>
+        </p:nvSpPr>
+        <p:spPr>
+          <a:xfrm>
+            <a:off x="7406640" y="5303520"/>
+            <a:ext cx="3959352" cy="502920"/>
+          </a:xfrm>
+          <a:prstGeom prst="rect">
+            <a:avLst/>
+          </a:prstGeom>
+          <a:noFill/>
+          <a:ln/>
+        </p:spPr>
+        <p:txBody>
+          <a:bodyPr wrap="square" lIns="0" tIns="0" rIns="0" bIns="0" rtlCol="0" anchor="t"/>
+          <a:lstStyle/>
+          <a:p>
+            <a:pPr indent="0" marL="0">
+              <a:lnSpc>
+                <a:spcPct val="115000"/>
+              </a:lnSpc>
+              <a:buNone/>
+            </a:pPr>
+            <a:r>
               <a:rPr lang="en-US" sz="1200" b="1" dirty="0">
                 <a:solidFill>
                   <a:srgbClr val="191F28"/>
@@ -10968,7 +11406,7 @@
                 <a:ea typeface="Arial" pitchFamily="34" charset="-122"/>
                 <a:cs typeface="Arial" pitchFamily="34" charset="-120"/>
               </a:rPr>
-              <a:t>③ 1건 채점 44초 — 평가위원 4명 응답 · 선행연구 탐색 포함(공고 파싱 제외)</a:t>
+              <a:t>③ 1건 채점 19초 — 평가위원 6/6명 응답 · 선행연구 탐색 포함(공고 파싱 제외)</a:t>
             </a:r>
             <a:endParaRPr lang="en-US" sz="1200" dirty="0"/>
           </a:p>
@@ -11007,7 +11445,7 @@
                 <a:ea typeface="Arial" pitchFamily="34" charset="-122"/>
                 <a:cs typeface="Arial" pitchFamily="34" charset="-120"/>
               </a:rPr>
-              <a:t>정답표: 다른 모델(Claude)이 쪽마다 판독 · 측정 파싱 모델 gemini-3-flash-preview, gemini-3.1-flash-lite · 시연은 저장된 파싱 결과(재현율 미측정) · 평가위원 모델 gemini-3.5-flash, solar-pro3</a:t>
+              <a:t>정답표: 다른 모델(Claude)이 쪽마다 판독 · 파싱 주 엔진 gpt-4.1 · 추출 수는 정답보다 많음(145·194·37개 vs 39·58·26개) · 시연은 저장된 파싱 결과</a:t>
             </a:r>
             <a:endParaRPr lang="en-US" sz="1000" dirty="0"/>
           </a:p>
@@ -11078,7 +11516,7 @@
                 <a:ea typeface="Arial" pitchFamily="34" charset="-122"/>
                 <a:cs typeface="Arial" pitchFamily="34" charset="-120"/>
               </a:rPr>
-              <a:t>우리 자신에게 먼저</a:t>
+              <a:t>우리 자신에게 먼저 — 이 대회 본선 심사표로 예선 기획서를</a:t>
             </a:r>
             <a:endParaRPr lang="en-US" sz="1400" dirty="0"/>
           </a:p>
@@ -11120,7 +11558,7 @@
                 <a:ea typeface="Arial" pitchFamily="34" charset="-122"/>
                 <a:cs typeface="Arial" pitchFamily="34" charset="-120"/>
               </a:rPr>
-              <a:t>이 대회 심사표로,</a:t>
+              <a:t>평가위원 여섯 명 중,</a:t>
             </a:r>
             <a:endParaRPr lang="en-US" sz="3400" dirty="0"/>
           </a:p>
@@ -11140,7 +11578,7 @@
                 <a:ea typeface="Arial" pitchFamily="34" charset="-122"/>
                 <a:cs typeface="Arial" pitchFamily="34" charset="-120"/>
               </a:rPr>
-              <a:t>우리</a:t>
+              <a:t>3명</a:t>
             </a:r>
             <a:pPr indent="0" marL="0">
               <a:lnSpc>
@@ -11157,7 +11595,7 @@
                 <a:ea typeface="Arial" pitchFamily="34" charset="-122"/>
                 <a:cs typeface="Arial" pitchFamily="34" charset="-120"/>
               </a:rPr>
-              <a:t>를 먼저 채점했습니다</a:t>
+              <a:t>은 보류였습니다</a:t>
             </a:r>
             <a:endParaRPr lang="en-US" sz="3400" dirty="0"/>
           </a:p>
@@ -11172,23 +11610,23 @@
         <p:spPr>
           <a:xfrm>
             <a:off x="822960" y="2651760"/>
-            <a:ext cx="2926080" cy="868680"/>
-          </a:xfrm>
-          <a:prstGeom prst="rect">
-            <a:avLst/>
-          </a:prstGeom>
-          <a:noFill/>
-          <a:ln/>
-        </p:spPr>
-        <p:txBody>
-          <a:bodyPr wrap="square" lIns="0" tIns="0" rIns="0" bIns="0" rtlCol="0" anchor="t"/>
-          <a:lstStyle/>
-          <a:p>
-            <a:pPr indent="0" marL="0">
-              <a:buNone/>
-            </a:pPr>
-            <a:r>
-              <a:rPr lang="en-US" sz="5000" b="1" dirty="0">
+            <a:ext cx="2743200" cy="329184"/>
+          </a:xfrm>
+          <a:prstGeom prst="rect">
+            <a:avLst/>
+          </a:prstGeom>
+          <a:noFill/>
+          <a:ln/>
+        </p:spPr>
+        <p:txBody>
+          <a:bodyPr wrap="square" lIns="0" tIns="0" rIns="0" bIns="0" rtlCol="0" anchor="t"/>
+          <a:lstStyle/>
+          <a:p>
+            <a:pPr indent="0" marL="0">
+              <a:buNone/>
+            </a:pPr>
+            <a:r>
+              <a:rPr lang="en-US" sz="1500" b="1" dirty="0">
                 <a:solidFill>
                   <a:srgbClr val="191F28"/>
                 </a:solidFill>
@@ -11196,9 +11634,9 @@
                 <a:ea typeface="Arial" pitchFamily="34" charset="-122"/>
                 <a:cs typeface="Arial" pitchFamily="34" charset="-120"/>
               </a:rPr>
-              <a:t>94.2점</a:t>
-            </a:r>
-            <a:endParaRPr lang="en-US" sz="5000" dirty="0"/>
+              <a:t>기술 타당성 검증형</a:t>
+            </a:r>
+            <a:endParaRPr lang="en-US" sz="1500" dirty="0"/>
           </a:p>
         </p:txBody>
       </p:sp>
@@ -11210,27 +11648,529 @@
         </p:nvSpPr>
         <p:spPr>
           <a:xfrm>
+            <a:off x="3657600" y="2651760"/>
+            <a:ext cx="914400" cy="329184"/>
+          </a:xfrm>
+          <a:prstGeom prst="rect">
+            <a:avLst/>
+          </a:prstGeom>
+          <a:noFill/>
+          <a:ln/>
+        </p:spPr>
+        <p:txBody>
+          <a:bodyPr wrap="square" lIns="0" tIns="0" rIns="0" bIns="0" rtlCol="0" anchor="t"/>
+          <a:lstStyle/>
+          <a:p>
+            <a:pPr indent="0" marL="0">
+              <a:buNone/>
+            </a:pPr>
+            <a:r>
+              <a:rPr lang="en-US" sz="1500" b="1" dirty="0">
+                <a:solidFill>
+                  <a:srgbClr val="8B95A1"/>
+                </a:solidFill>
+                <a:latin typeface="Arial" pitchFamily="34" charset="0"/>
+                <a:ea typeface="Arial" pitchFamily="34" charset="-122"/>
+                <a:cs typeface="Arial" pitchFamily="34" charset="-120"/>
+              </a:rPr>
+              <a:t>선정</a:t>
+            </a:r>
+            <a:endParaRPr lang="en-US" sz="1500" dirty="0"/>
+          </a:p>
+        </p:txBody>
+      </p:sp>
+      <p:sp>
+        <p:nvSpPr>
+          <p:cNvPr id="6" name="Shape 4"/>
+          <p:cNvSpPr/>
+          <p:nvPr/>
+        </p:nvSpPr>
+        <p:spPr>
+          <a:xfrm>
+            <a:off x="822960" y="3044952"/>
+            <a:ext cx="3749040" cy="0"/>
+          </a:xfrm>
+          <a:prstGeom prst="line">
+            <a:avLst/>
+          </a:prstGeom>
+          <a:noFill/>
+          <a:ln w="12700">
+            <a:solidFill>
+              <a:srgbClr val="E5E8EB"/>
+            </a:solidFill>
+            <a:prstDash val="solid"/>
+          </a:ln>
+        </p:spPr>
+      </p:sp>
+      <p:sp>
+        <p:nvSpPr>
+          <p:cNvPr id="7" name="Text 5"/>
+          <p:cNvSpPr/>
+          <p:nvPr/>
+        </p:nvSpPr>
+        <p:spPr>
+          <a:xfrm>
+            <a:off x="822960" y="3108960"/>
+            <a:ext cx="2743200" cy="329184"/>
+          </a:xfrm>
+          <a:prstGeom prst="rect">
+            <a:avLst/>
+          </a:prstGeom>
+          <a:noFill/>
+          <a:ln/>
+        </p:spPr>
+        <p:txBody>
+          <a:bodyPr wrap="square" lIns="0" tIns="0" rIns="0" bIns="0" rtlCol="0" anchor="t"/>
+          <a:lstStyle/>
+          <a:p>
+            <a:pPr indent="0" marL="0">
+              <a:buNone/>
+            </a:pPr>
+            <a:r>
+              <a:rPr lang="en-US" sz="1500" b="1" dirty="0">
+                <a:solidFill>
+                  <a:srgbClr val="191F28"/>
+                </a:solidFill>
+                <a:latin typeface="Arial" pitchFamily="34" charset="0"/>
+                <a:ea typeface="Arial" pitchFamily="34" charset="-122"/>
+                <a:cs typeface="Arial" pitchFamily="34" charset="-120"/>
+              </a:rPr>
+              <a:t>기술 큰그림형</a:t>
+            </a:r>
+            <a:endParaRPr lang="en-US" sz="1500" dirty="0"/>
+          </a:p>
+        </p:txBody>
+      </p:sp>
+      <p:sp>
+        <p:nvSpPr>
+          <p:cNvPr id="8" name="Text 6"/>
+          <p:cNvSpPr/>
+          <p:nvPr/>
+        </p:nvSpPr>
+        <p:spPr>
+          <a:xfrm>
+            <a:off x="3657600" y="3108960"/>
+            <a:ext cx="914400" cy="329184"/>
+          </a:xfrm>
+          <a:prstGeom prst="rect">
+            <a:avLst/>
+          </a:prstGeom>
+          <a:noFill/>
+          <a:ln/>
+        </p:spPr>
+        <p:txBody>
+          <a:bodyPr wrap="square" lIns="0" tIns="0" rIns="0" bIns="0" rtlCol="0" anchor="t"/>
+          <a:lstStyle/>
+          <a:p>
+            <a:pPr indent="0" marL="0">
+              <a:buNone/>
+            </a:pPr>
+            <a:r>
+              <a:rPr lang="en-US" sz="1500" b="1" dirty="0">
+                <a:solidFill>
+                  <a:srgbClr val="8B95A1"/>
+                </a:solidFill>
+                <a:latin typeface="Arial" pitchFamily="34" charset="0"/>
+                <a:ea typeface="Arial" pitchFamily="34" charset="-122"/>
+                <a:cs typeface="Arial" pitchFamily="34" charset="-120"/>
+              </a:rPr>
+              <a:t>선정</a:t>
+            </a:r>
+            <a:endParaRPr lang="en-US" sz="1500" dirty="0"/>
+          </a:p>
+        </p:txBody>
+      </p:sp>
+      <p:sp>
+        <p:nvSpPr>
+          <p:cNvPr id="9" name="Shape 7"/>
+          <p:cNvSpPr/>
+          <p:nvPr/>
+        </p:nvSpPr>
+        <p:spPr>
+          <a:xfrm>
+            <a:off x="822960" y="3502152"/>
+            <a:ext cx="3749040" cy="0"/>
+          </a:xfrm>
+          <a:prstGeom prst="line">
+            <a:avLst/>
+          </a:prstGeom>
+          <a:noFill/>
+          <a:ln w="12700">
+            <a:solidFill>
+              <a:srgbClr val="E5E8EB"/>
+            </a:solidFill>
+            <a:prstDash val="solid"/>
+          </a:ln>
+        </p:spPr>
+      </p:sp>
+      <p:sp>
+        <p:nvSpPr>
+          <p:cNvPr id="10" name="Text 8"/>
+          <p:cNvSpPr/>
+          <p:nvPr/>
+        </p:nvSpPr>
+        <p:spPr>
+          <a:xfrm>
             <a:off x="822960" y="3566160"/>
-            <a:ext cx="2926080" cy="685800"/>
-          </a:xfrm>
-          <a:prstGeom prst="rect">
-            <a:avLst/>
-          </a:prstGeom>
-          <a:noFill/>
-          <a:ln/>
-        </p:spPr>
-        <p:txBody>
-          <a:bodyPr wrap="square" lIns="0" tIns="0" rIns="0" bIns="0" rtlCol="0" anchor="t"/>
-          <a:lstStyle/>
-          <a:p>
-            <a:pPr indent="0" marL="0">
-              <a:lnSpc>
-                <a:spcPct val="115000"/>
-              </a:lnSpc>
-              <a:buNone/>
-            </a:pPr>
-            <a:r>
-              <a:rPr lang="en-US" sz="1300" dirty="0">
+            <a:ext cx="2743200" cy="329184"/>
+          </a:xfrm>
+          <a:prstGeom prst="rect">
+            <a:avLst/>
+          </a:prstGeom>
+          <a:noFill/>
+          <a:ln/>
+        </p:spPr>
+        <p:txBody>
+          <a:bodyPr wrap="square" lIns="0" tIns="0" rIns="0" bIns="0" rtlCol="0" anchor="t"/>
+          <a:lstStyle/>
+          <a:p>
+            <a:pPr indent="0" marL="0">
+              <a:buNone/>
+            </a:pPr>
+            <a:r>
+              <a:rPr lang="en-US" sz="1500" b="1" dirty="0">
+                <a:solidFill>
+                  <a:srgbClr val="191F28"/>
+                </a:solidFill>
+                <a:latin typeface="Arial" pitchFamily="34" charset="0"/>
+                <a:ea typeface="Arial" pitchFamily="34" charset="-122"/>
+                <a:cs typeface="Arial" pitchFamily="34" charset="-120"/>
+              </a:rPr>
+              <a:t>세부 전문형</a:t>
+            </a:r>
+            <a:endParaRPr lang="en-US" sz="1500" dirty="0"/>
+          </a:p>
+        </p:txBody>
+      </p:sp>
+      <p:sp>
+        <p:nvSpPr>
+          <p:cNvPr id="11" name="Text 9"/>
+          <p:cNvSpPr/>
+          <p:nvPr/>
+        </p:nvSpPr>
+        <p:spPr>
+          <a:xfrm>
+            <a:off x="3657600" y="3566160"/>
+            <a:ext cx="914400" cy="329184"/>
+          </a:xfrm>
+          <a:prstGeom prst="rect">
+            <a:avLst/>
+          </a:prstGeom>
+          <a:noFill/>
+          <a:ln/>
+        </p:spPr>
+        <p:txBody>
+          <a:bodyPr wrap="square" lIns="0" tIns="0" rIns="0" bIns="0" rtlCol="0" anchor="t"/>
+          <a:lstStyle/>
+          <a:p>
+            <a:pPr indent="0" marL="0">
+              <a:buNone/>
+            </a:pPr>
+            <a:r>
+              <a:rPr lang="en-US" sz="1500" b="1" dirty="0">
+                <a:solidFill>
+                  <a:srgbClr val="3182F6"/>
+                </a:solidFill>
+                <a:latin typeface="Arial" pitchFamily="34" charset="0"/>
+                <a:ea typeface="Arial" pitchFamily="34" charset="-122"/>
+                <a:cs typeface="Arial" pitchFamily="34" charset="-120"/>
+              </a:rPr>
+              <a:t>보류</a:t>
+            </a:r>
+            <a:endParaRPr lang="en-US" sz="1500" dirty="0"/>
+          </a:p>
+        </p:txBody>
+      </p:sp>
+      <p:sp>
+        <p:nvSpPr>
+          <p:cNvPr id="12" name="Shape 10"/>
+          <p:cNvSpPr/>
+          <p:nvPr/>
+        </p:nvSpPr>
+        <p:spPr>
+          <a:xfrm>
+            <a:off x="822960" y="3959352"/>
+            <a:ext cx="3749040" cy="0"/>
+          </a:xfrm>
+          <a:prstGeom prst="line">
+            <a:avLst/>
+          </a:prstGeom>
+          <a:noFill/>
+          <a:ln w="12700">
+            <a:solidFill>
+              <a:srgbClr val="E5E8EB"/>
+            </a:solidFill>
+            <a:prstDash val="solid"/>
+          </a:ln>
+        </p:spPr>
+      </p:sp>
+      <p:sp>
+        <p:nvSpPr>
+          <p:cNvPr id="13" name="Text 11"/>
+          <p:cNvSpPr/>
+          <p:nvPr/>
+        </p:nvSpPr>
+        <p:spPr>
+          <a:xfrm>
+            <a:off x="822960" y="4023360"/>
+            <a:ext cx="2743200" cy="329184"/>
+          </a:xfrm>
+          <a:prstGeom prst="rect">
+            <a:avLst/>
+          </a:prstGeom>
+          <a:noFill/>
+          <a:ln/>
+        </p:spPr>
+        <p:txBody>
+          <a:bodyPr wrap="square" lIns="0" tIns="0" rIns="0" bIns="0" rtlCol="0" anchor="t"/>
+          <a:lstStyle/>
+          <a:p>
+            <a:pPr indent="0" marL="0">
+              <a:buNone/>
+            </a:pPr>
+            <a:r>
+              <a:rPr lang="en-US" sz="1500" b="1" dirty="0">
+                <a:solidFill>
+                  <a:srgbClr val="191F28"/>
+                </a:solidFill>
+                <a:latin typeface="Arial" pitchFamily="34" charset="0"/>
+                <a:ea typeface="Arial" pitchFamily="34" charset="-122"/>
+                <a:cs typeface="Arial" pitchFamily="34" charset="-120"/>
+              </a:rPr>
+              <a:t>사업성·시장형</a:t>
+            </a:r>
+            <a:endParaRPr lang="en-US" sz="1500" dirty="0"/>
+          </a:p>
+        </p:txBody>
+      </p:sp>
+      <p:sp>
+        <p:nvSpPr>
+          <p:cNvPr id="14" name="Text 12"/>
+          <p:cNvSpPr/>
+          <p:nvPr/>
+        </p:nvSpPr>
+        <p:spPr>
+          <a:xfrm>
+            <a:off x="3657600" y="4023360"/>
+            <a:ext cx="914400" cy="329184"/>
+          </a:xfrm>
+          <a:prstGeom prst="rect">
+            <a:avLst/>
+          </a:prstGeom>
+          <a:noFill/>
+          <a:ln/>
+        </p:spPr>
+        <p:txBody>
+          <a:bodyPr wrap="square" lIns="0" tIns="0" rIns="0" bIns="0" rtlCol="0" anchor="t"/>
+          <a:lstStyle/>
+          <a:p>
+            <a:pPr indent="0" marL="0">
+              <a:buNone/>
+            </a:pPr>
+            <a:r>
+              <a:rPr lang="en-US" sz="1500" b="1" dirty="0">
+                <a:solidFill>
+                  <a:srgbClr val="3182F6"/>
+                </a:solidFill>
+                <a:latin typeface="Arial" pitchFamily="34" charset="0"/>
+                <a:ea typeface="Arial" pitchFamily="34" charset="-122"/>
+                <a:cs typeface="Arial" pitchFamily="34" charset="-120"/>
+              </a:rPr>
+              <a:t>보류</a:t>
+            </a:r>
+            <a:endParaRPr lang="en-US" sz="1500" dirty="0"/>
+          </a:p>
+        </p:txBody>
+      </p:sp>
+      <p:sp>
+        <p:nvSpPr>
+          <p:cNvPr id="15" name="Shape 13"/>
+          <p:cNvSpPr/>
+          <p:nvPr/>
+        </p:nvSpPr>
+        <p:spPr>
+          <a:xfrm>
+            <a:off x="822960" y="4416552"/>
+            <a:ext cx="3749040" cy="0"/>
+          </a:xfrm>
+          <a:prstGeom prst="line">
+            <a:avLst/>
+          </a:prstGeom>
+          <a:noFill/>
+          <a:ln w="12700">
+            <a:solidFill>
+              <a:srgbClr val="E5E8EB"/>
+            </a:solidFill>
+            <a:prstDash val="solid"/>
+          </a:ln>
+        </p:spPr>
+      </p:sp>
+      <p:sp>
+        <p:nvSpPr>
+          <p:cNvPr id="16" name="Text 14"/>
+          <p:cNvSpPr/>
+          <p:nvPr/>
+        </p:nvSpPr>
+        <p:spPr>
+          <a:xfrm>
+            <a:off x="822960" y="4480560"/>
+            <a:ext cx="2743200" cy="329184"/>
+          </a:xfrm>
+          <a:prstGeom prst="rect">
+            <a:avLst/>
+          </a:prstGeom>
+          <a:noFill/>
+          <a:ln/>
+        </p:spPr>
+        <p:txBody>
+          <a:bodyPr wrap="square" lIns="0" tIns="0" rIns="0" bIns="0" rtlCol="0" anchor="t"/>
+          <a:lstStyle/>
+          <a:p>
+            <a:pPr indent="0" marL="0">
+              <a:buNone/>
+            </a:pPr>
+            <a:r>
+              <a:rPr lang="en-US" sz="1500" b="1" dirty="0">
+                <a:solidFill>
+                  <a:srgbClr val="191F28"/>
+                </a:solidFill>
+                <a:latin typeface="Arial" pitchFamily="34" charset="0"/>
+                <a:ea typeface="Arial" pitchFamily="34" charset="-122"/>
+                <a:cs typeface="Arial" pitchFamily="34" charset="-120"/>
+              </a:rPr>
+              <a:t>행정·관리형</a:t>
+            </a:r>
+            <a:endParaRPr lang="en-US" sz="1500" dirty="0"/>
+          </a:p>
+        </p:txBody>
+      </p:sp>
+      <p:sp>
+        <p:nvSpPr>
+          <p:cNvPr id="17" name="Text 15"/>
+          <p:cNvSpPr/>
+          <p:nvPr/>
+        </p:nvSpPr>
+        <p:spPr>
+          <a:xfrm>
+            <a:off x="3657600" y="4480560"/>
+            <a:ext cx="914400" cy="329184"/>
+          </a:xfrm>
+          <a:prstGeom prst="rect">
+            <a:avLst/>
+          </a:prstGeom>
+          <a:noFill/>
+          <a:ln/>
+        </p:spPr>
+        <p:txBody>
+          <a:bodyPr wrap="square" lIns="0" tIns="0" rIns="0" bIns="0" rtlCol="0" anchor="t"/>
+          <a:lstStyle/>
+          <a:p>
+            <a:pPr indent="0" marL="0">
+              <a:buNone/>
+            </a:pPr>
+            <a:r>
+              <a:rPr lang="en-US" sz="1500" b="1" dirty="0">
+                <a:solidFill>
+                  <a:srgbClr val="3182F6"/>
+                </a:solidFill>
+                <a:latin typeface="Arial" pitchFamily="34" charset="0"/>
+                <a:ea typeface="Arial" pitchFamily="34" charset="-122"/>
+                <a:cs typeface="Arial" pitchFamily="34" charset="-120"/>
+              </a:rPr>
+              <a:t>보류</a:t>
+            </a:r>
+            <a:endParaRPr lang="en-US" sz="1500" dirty="0"/>
+          </a:p>
+        </p:txBody>
+      </p:sp>
+      <p:sp>
+        <p:nvSpPr>
+          <p:cNvPr id="18" name="Shape 16"/>
+          <p:cNvSpPr/>
+          <p:nvPr/>
+        </p:nvSpPr>
+        <p:spPr>
+          <a:xfrm>
+            <a:off x="822960" y="4873752"/>
+            <a:ext cx="3749040" cy="0"/>
+          </a:xfrm>
+          <a:prstGeom prst="line">
+            <a:avLst/>
+          </a:prstGeom>
+          <a:noFill/>
+          <a:ln w="12700">
+            <a:solidFill>
+              <a:srgbClr val="E5E8EB"/>
+            </a:solidFill>
+            <a:prstDash val="solid"/>
+          </a:ln>
+        </p:spPr>
+      </p:sp>
+      <p:sp>
+        <p:nvSpPr>
+          <p:cNvPr id="19" name="Text 17"/>
+          <p:cNvSpPr/>
+          <p:nvPr/>
+        </p:nvSpPr>
+        <p:spPr>
+          <a:xfrm>
+            <a:off x="822960" y="4937760"/>
+            <a:ext cx="2743200" cy="329184"/>
+          </a:xfrm>
+          <a:prstGeom prst="rect">
+            <a:avLst/>
+          </a:prstGeom>
+          <a:noFill/>
+          <a:ln/>
+        </p:spPr>
+        <p:txBody>
+          <a:bodyPr wrap="square" lIns="0" tIns="0" rIns="0" bIns="0" rtlCol="0" anchor="t"/>
+          <a:lstStyle/>
+          <a:p>
+            <a:pPr indent="0" marL="0">
+              <a:buNone/>
+            </a:pPr>
+            <a:r>
+              <a:rPr lang="en-US" sz="1500" b="1" dirty="0">
+                <a:solidFill>
+                  <a:srgbClr val="191F28"/>
+                </a:solidFill>
+                <a:latin typeface="Arial" pitchFamily="34" charset="0"/>
+                <a:ea typeface="Arial" pitchFamily="34" charset="-122"/>
+                <a:cs typeface="Arial" pitchFamily="34" charset="-120"/>
+              </a:rPr>
+              <a:t>사업 취지형</a:t>
+            </a:r>
+            <a:endParaRPr lang="en-US" sz="1500" dirty="0"/>
+          </a:p>
+        </p:txBody>
+      </p:sp>
+      <p:sp>
+        <p:nvSpPr>
+          <p:cNvPr id="20" name="Text 18"/>
+          <p:cNvSpPr/>
+          <p:nvPr/>
+        </p:nvSpPr>
+        <p:spPr>
+          <a:xfrm>
+            <a:off x="3657600" y="4937760"/>
+            <a:ext cx="914400" cy="329184"/>
+          </a:xfrm>
+          <a:prstGeom prst="rect">
+            <a:avLst/>
+          </a:prstGeom>
+          <a:noFill/>
+          <a:ln/>
+        </p:spPr>
+        <p:txBody>
+          <a:bodyPr wrap="square" lIns="0" tIns="0" rIns="0" bIns="0" rtlCol="0" anchor="t"/>
+          <a:lstStyle/>
+          <a:p>
+            <a:pPr indent="0" marL="0">
+              <a:buNone/>
+            </a:pPr>
+            <a:r>
+              <a:rPr lang="en-US" sz="1500" b="1" dirty="0">
                 <a:solidFill>
                   <a:srgbClr val="8B95A1"/>
                 </a:solidFill>
@@ -11238,146 +12178,26 @@
                 <a:ea typeface="Arial" pitchFamily="34" charset="-122"/>
                 <a:cs typeface="Arial" pitchFamily="34" charset="-120"/>
               </a:rPr>
-              <a:t>예선 기획서 — 본선 심사표 기준</a:t>
-            </a:r>
-            <a:endParaRPr lang="en-US" sz="1300" dirty="0"/>
-          </a:p>
-        </p:txBody>
-      </p:sp>
-      <p:sp>
-        <p:nvSpPr>
-          <p:cNvPr id="6" name="Text 4"/>
-          <p:cNvSpPr/>
-          <p:nvPr/>
-        </p:nvSpPr>
-        <p:spPr>
-          <a:xfrm>
-            <a:off x="3749040" y="2743200"/>
-            <a:ext cx="548640" cy="731520"/>
-          </a:xfrm>
-          <a:prstGeom prst="rect">
-            <a:avLst/>
-          </a:prstGeom>
-          <a:noFill/>
-          <a:ln/>
-        </p:spPr>
-        <p:txBody>
-          <a:bodyPr wrap="square" lIns="0" tIns="0" rIns="0" bIns="0" rtlCol="0" anchor="t"/>
-          <a:lstStyle/>
-          <a:p>
-            <a:pPr indent="0" marL="0">
-              <a:buNone/>
-            </a:pPr>
-            <a:r>
-              <a:rPr lang="en-US" sz="3600" dirty="0">
-                <a:solidFill>
-                  <a:srgbClr val="8B95A1"/>
-                </a:solidFill>
-                <a:latin typeface="Arial" pitchFamily="34" charset="0"/>
-                <a:ea typeface="Arial" pitchFamily="34" charset="-122"/>
-                <a:cs typeface="Arial" pitchFamily="34" charset="-120"/>
-              </a:rPr>
-              <a:t>→</a:t>
-            </a:r>
-            <a:endParaRPr lang="en-US" sz="3600" dirty="0"/>
-          </a:p>
-        </p:txBody>
-      </p:sp>
-      <p:sp>
-        <p:nvSpPr>
-          <p:cNvPr id="7" name="Text 5"/>
-          <p:cNvSpPr/>
-          <p:nvPr/>
-        </p:nvSpPr>
-        <p:spPr>
-          <a:xfrm>
-            <a:off x="4434840" y="2651760"/>
-            <a:ext cx="2743200" cy="868680"/>
-          </a:xfrm>
-          <a:prstGeom prst="rect">
-            <a:avLst/>
-          </a:prstGeom>
-          <a:noFill/>
-          <a:ln/>
-        </p:spPr>
-        <p:txBody>
-          <a:bodyPr wrap="square" lIns="0" tIns="0" rIns="0" bIns="0" rtlCol="0" anchor="t"/>
-          <a:lstStyle/>
-          <a:p>
-            <a:pPr indent="0" marL="0">
-              <a:buNone/>
-            </a:pPr>
-            <a:r>
-              <a:rPr lang="en-US" sz="5000" b="1" dirty="0">
-                <a:solidFill>
-                  <a:srgbClr val="3182F6"/>
-                </a:solidFill>
-                <a:latin typeface="Arial" pitchFamily="34" charset="0"/>
-                <a:ea typeface="Arial" pitchFamily="34" charset="-122"/>
-                <a:cs typeface="Arial" pitchFamily="34" charset="-120"/>
-              </a:rPr>
-              <a:t>99.0점</a:t>
-            </a:r>
-            <a:endParaRPr lang="en-US" sz="5000" dirty="0"/>
-          </a:p>
-        </p:txBody>
-      </p:sp>
-      <p:sp>
-        <p:nvSpPr>
-          <p:cNvPr id="8" name="Text 6"/>
-          <p:cNvSpPr/>
-          <p:nvPr/>
-        </p:nvSpPr>
-        <p:spPr>
-          <a:xfrm>
-            <a:off x="4434840" y="3566160"/>
-            <a:ext cx="2743200" cy="685800"/>
-          </a:xfrm>
-          <a:prstGeom prst="rect">
-            <a:avLst/>
-          </a:prstGeom>
-          <a:noFill/>
-          <a:ln/>
-        </p:spPr>
-        <p:txBody>
-          <a:bodyPr wrap="square" lIns="0" tIns="0" rIns="0" bIns="0" rtlCol="0" anchor="t"/>
-          <a:lstStyle/>
-          <a:p>
-            <a:pPr indent="0" marL="0">
-              <a:lnSpc>
-                <a:spcPct val="115000"/>
-              </a:lnSpc>
-              <a:buNone/>
-            </a:pPr>
-            <a:r>
-              <a:rPr lang="en-US" sz="1300" dirty="0">
-                <a:solidFill>
-                  <a:srgbClr val="8B95A1"/>
-                </a:solidFill>
-                <a:latin typeface="Arial" pitchFamily="34" charset="0"/>
-                <a:ea typeface="Arial" pitchFamily="34" charset="-122"/>
-                <a:cs typeface="Arial" pitchFamily="34" charset="-120"/>
-              </a:rPr>
-              <a:t>보완 후</a:t>
-            </a:r>
-            <a:endParaRPr lang="en-US" sz="1300" dirty="0"/>
-          </a:p>
-        </p:txBody>
-      </p:sp>
-      <p:sp>
-        <p:nvSpPr>
-          <p:cNvPr id="9" name="Shape 7"/>
-          <p:cNvSpPr/>
-          <p:nvPr/>
-        </p:nvSpPr>
-        <p:spPr>
-          <a:xfrm>
-            <a:off x="822960" y="4160520"/>
-            <a:ext cx="6309360" cy="1234440"/>
+              <a:t>선정</a:t>
+            </a:r>
+            <a:endParaRPr lang="en-US" sz="1500" dirty="0"/>
+          </a:p>
+        </p:txBody>
+      </p:sp>
+      <p:sp>
+        <p:nvSpPr>
+          <p:cNvPr id="21" name="Shape 19"/>
+          <p:cNvSpPr/>
+          <p:nvPr/>
+        </p:nvSpPr>
+        <p:spPr>
+          <a:xfrm>
+            <a:off x="5212080" y="2606040"/>
+            <a:ext cx="6153912" cy="2606040"/>
           </a:xfrm>
           <a:prstGeom prst="roundRect">
             <a:avLst>
-              <a:gd name="adj" fmla="val 5926"/>
+              <a:gd name="adj" fmla="val 2807"/>
             </a:avLst>
           </a:prstGeom>
           <a:solidFill>
@@ -11393,14 +12213,14 @@
       </p:sp>
       <p:sp>
         <p:nvSpPr>
-          <p:cNvPr id="10" name="Text 8"/>
-          <p:cNvSpPr/>
-          <p:nvPr/>
-        </p:nvSpPr>
-        <p:spPr>
-          <a:xfrm>
-            <a:off x="1051560" y="4325112"/>
-            <a:ext cx="5852160" cy="274320"/>
+          <p:cNvPr id="22" name="Text 20"/>
+          <p:cNvSpPr/>
+          <p:nvPr/>
+        </p:nvSpPr>
+        <p:spPr>
+          <a:xfrm>
+            <a:off x="5486400" y="2788920"/>
+            <a:ext cx="5605272" cy="274320"/>
           </a:xfrm>
           <a:prstGeom prst="rect">
             <a:avLst/>
@@ -11424,7 +12244,7 @@
                 <a:ea typeface="Arial" pitchFamily="34" charset="-122"/>
                 <a:cs typeface="Arial" pitchFamily="34" charset="-120"/>
               </a:rPr>
-              <a:t>도구가 짚은 곳 — 합의 결핍 0 · 논쟁 지점 2 → 보완 후 0 · 1</a:t>
+              <a:t>보류의 결정 포인트 — 평가위원이 쓴 원문 그대로</a:t>
             </a:r>
             <a:endParaRPr lang="en-US" sz="1200" dirty="0"/>
           </a:p>
@@ -11432,14 +12252,14 @@
       </p:sp>
       <p:sp>
         <p:nvSpPr>
-          <p:cNvPr id="11" name="Text 9"/>
-          <p:cNvSpPr/>
-          <p:nvPr/>
-        </p:nvSpPr>
-        <p:spPr>
-          <a:xfrm>
-            <a:off x="1051560" y="4617720"/>
-            <a:ext cx="5897880" cy="731520"/>
+          <p:cNvPr id="23" name="Text 21"/>
+          <p:cNvSpPr/>
+          <p:nvPr/>
+        </p:nvSpPr>
+        <p:spPr>
+          <a:xfrm>
+            <a:off x="5486400" y="3154680"/>
+            <a:ext cx="5605272" cy="1965960"/>
           </a:xfrm>
           <a:prstGeom prst="rect">
             <a:avLst/>
@@ -11455,10 +12275,13 @@
               <a:lnSpc>
                 <a:spcPct val="115000"/>
               </a:lnSpc>
-              <a:buNone/>
-            </a:pPr>
-            <a:r>
-              <a:rPr lang="en-US" sz="1150" dirty="0">
+              <a:spcAft>
+                <a:spcPts val="800"/>
+              </a:spcAft>
+              <a:buNone/>
+            </a:pPr>
+            <a:r>
+              <a:rPr lang="en-US" sz="1200" dirty="0">
                 <a:solidFill>
                   <a:srgbClr val="191F28"/>
                 </a:solidFill>
@@ -11466,19 +12289,22 @@
                 <a:ea typeface="Arial" pitchFamily="34" charset="-122"/>
                 <a:cs typeface="Arial" pitchFamily="34" charset="-120"/>
               </a:rPr>
-              <a:t>“AI 모델의 신뢰성 확보를 위해 데이터 편향성이나 윤리적 이슈에 대한 대응 방안을 포함하는가”</a:t>
-            </a:r>
-            <a:endParaRPr lang="en-US" sz="1150" dirty="0"/>
+              <a:t>세부 전문형  “정확도 목표(90% 재현율, 80% 정밀도)가 실제 구현 없이 목표치만 제시되어 구체성 부족”</a:t>
+            </a:r>
+            <a:endParaRPr lang="en-US" sz="1200" dirty="0"/>
           </a:p>
           <a:p>
             <a:pPr indent="0" marL="0">
               <a:lnSpc>
                 <a:spcPct val="115000"/>
               </a:lnSpc>
-              <a:buNone/>
-            </a:pPr>
-            <a:r>
-              <a:rPr lang="en-US" sz="1150" dirty="0">
+              <a:spcAft>
+                <a:spcPts val="800"/>
+              </a:spcAft>
+              <a:buNone/>
+            </a:pPr>
+            <a:r>
+              <a:rPr lang="en-US" sz="1200" dirty="0">
                 <a:solidFill>
                   <a:srgbClr val="191F28"/>
                 </a:solidFill>
@@ -11486,139 +12312,45 @@
                 <a:ea typeface="Arial" pitchFamily="34" charset="-122"/>
                 <a:cs typeface="Arial" pitchFamily="34" charset="-120"/>
               </a:rPr>
-              <a:t>“연구 종료 후 기대효과를 정량적 또는 정성적 지표로 예측하여 제시하는가”</a:t>
-            </a:r>
-            <a:endParaRPr lang="en-US" sz="1150" dirty="0"/>
-          </a:p>
-        </p:txBody>
-      </p:sp>
-      <p:sp>
-        <p:nvSpPr>
-          <p:cNvPr id="12" name="Text 10"/>
-          <p:cNvSpPr/>
-          <p:nvPr/>
-        </p:nvSpPr>
-        <p:spPr>
-          <a:xfrm>
-            <a:off x="7635240" y="2697480"/>
-            <a:ext cx="2011680" cy="274320"/>
-          </a:xfrm>
-          <a:prstGeom prst="rect">
-            <a:avLst/>
-          </a:prstGeom>
-          <a:noFill/>
-          <a:ln/>
-        </p:spPr>
-        <p:txBody>
-          <a:bodyPr wrap="square" lIns="0" tIns="0" rIns="0" bIns="0" rtlCol="0" anchor="t"/>
-          <a:lstStyle/>
-          <a:p>
-            <a:pPr indent="0" marL="0">
-              <a:buNone/>
-            </a:pPr>
-            <a:r>
-              <a:rPr lang="en-US" sz="1150" dirty="0">
-                <a:solidFill>
-                  <a:srgbClr val="8B95A1"/>
-                </a:solidFill>
-                <a:latin typeface="Arial" pitchFamily="34" charset="0"/>
-                <a:ea typeface="Arial" pitchFamily="34" charset="-122"/>
-                <a:cs typeface="Arial" pitchFamily="34" charset="-120"/>
-              </a:rPr>
-              <a:t>지표(배점)</a:t>
-            </a:r>
-            <a:endParaRPr lang="en-US" sz="1150" dirty="0"/>
-          </a:p>
-        </p:txBody>
-      </p:sp>
-      <p:sp>
-        <p:nvSpPr>
-          <p:cNvPr id="13" name="Text 11"/>
-          <p:cNvSpPr/>
-          <p:nvPr/>
-        </p:nvSpPr>
-        <p:spPr>
-          <a:xfrm>
-            <a:off x="9738360" y="2697480"/>
-            <a:ext cx="731520" cy="274320"/>
-          </a:xfrm>
-          <a:prstGeom prst="rect">
-            <a:avLst/>
-          </a:prstGeom>
-          <a:noFill/>
-          <a:ln/>
-        </p:spPr>
-        <p:txBody>
-          <a:bodyPr wrap="square" lIns="0" tIns="0" rIns="0" bIns="0" rtlCol="0" anchor="t"/>
-          <a:lstStyle/>
-          <a:p>
-            <a:pPr algn="r" indent="0" marL="0">
-              <a:buNone/>
-            </a:pPr>
-            <a:r>
-              <a:rPr lang="en-US" sz="1150" dirty="0">
-                <a:solidFill>
-                  <a:srgbClr val="8B95A1"/>
-                </a:solidFill>
-                <a:latin typeface="Arial" pitchFamily="34" charset="0"/>
-                <a:ea typeface="Arial" pitchFamily="34" charset="-122"/>
-                <a:cs typeface="Arial" pitchFamily="34" charset="-120"/>
-              </a:rPr>
-              <a:t>전</a:t>
-            </a:r>
-            <a:endParaRPr lang="en-US" sz="1150" dirty="0"/>
-          </a:p>
-        </p:txBody>
-      </p:sp>
-      <p:sp>
-        <p:nvSpPr>
-          <p:cNvPr id="14" name="Text 12"/>
-          <p:cNvSpPr/>
-          <p:nvPr/>
-        </p:nvSpPr>
-        <p:spPr>
-          <a:xfrm>
-            <a:off x="10561320" y="2697480"/>
-            <a:ext cx="777240" cy="274320"/>
-          </a:xfrm>
-          <a:prstGeom prst="rect">
-            <a:avLst/>
-          </a:prstGeom>
-          <a:noFill/>
-          <a:ln/>
-        </p:spPr>
-        <p:txBody>
-          <a:bodyPr wrap="square" lIns="0" tIns="0" rIns="0" bIns="0" rtlCol="0" anchor="t"/>
-          <a:lstStyle/>
-          <a:p>
-            <a:pPr algn="r" indent="0" marL="0">
-              <a:buNone/>
-            </a:pPr>
-            <a:r>
-              <a:rPr lang="en-US" sz="1150" dirty="0">
-                <a:solidFill>
-                  <a:srgbClr val="8B95A1"/>
-                </a:solidFill>
-                <a:latin typeface="Arial" pitchFamily="34" charset="0"/>
-                <a:ea typeface="Arial" pitchFamily="34" charset="-122"/>
-                <a:cs typeface="Arial" pitchFamily="34" charset="-120"/>
-              </a:rPr>
-              <a:t>후</a:t>
-            </a:r>
-            <a:endParaRPr lang="en-US" sz="1150" dirty="0"/>
-          </a:p>
-        </p:txBody>
-      </p:sp>
-      <p:sp>
-        <p:nvSpPr>
-          <p:cNvPr id="15" name="Shape 13"/>
-          <p:cNvSpPr/>
-          <p:nvPr/>
-        </p:nvSpPr>
-        <p:spPr>
-          <a:xfrm>
-            <a:off x="7635240" y="3008376"/>
-            <a:ext cx="3703320" cy="0"/>
+              <a:t>사업성·시장형  “시장성은 있으나 실증·구매주체가 아직 약함”</a:t>
+            </a:r>
+            <a:endParaRPr lang="en-US" sz="1200" dirty="0"/>
+          </a:p>
+          <a:p>
+            <a:pPr indent="0" marL="0">
+              <a:lnSpc>
+                <a:spcPct val="115000"/>
+              </a:lnSpc>
+              <a:spcAft>
+                <a:spcPts val="800"/>
+              </a:spcAft>
+              <a:buNone/>
+            </a:pPr>
+            <a:r>
+              <a:rPr lang="en-US" sz="1200" dirty="0">
+                <a:solidFill>
+                  <a:srgbClr val="191F28"/>
+                </a:solidFill>
+                <a:latin typeface="Arial" pitchFamily="34" charset="0"/>
+                <a:ea typeface="Arial" pitchFamily="34" charset="-122"/>
+                <a:cs typeface="Arial" pitchFamily="34" charset="-120"/>
+              </a:rPr>
+              <a:t>행정·관리형  “AI 윤리·보안 대책은 있으나, 실제 구현 및 검증 계획이 해커톤 기간 내 2일만에 과도하게 압축되어 실현 가능성에 의문.”</a:t>
+            </a:r>
+            <a:endParaRPr lang="en-US" sz="1200" dirty="0"/>
+          </a:p>
+        </p:txBody>
+      </p:sp>
+      <p:sp>
+        <p:nvSpPr>
+          <p:cNvPr id="24" name="Shape 22"/>
+          <p:cNvSpPr/>
+          <p:nvPr/>
+        </p:nvSpPr>
+        <p:spPr>
+          <a:xfrm>
+            <a:off x="822960" y="5486400"/>
+            <a:ext cx="10543032" cy="0"/>
           </a:xfrm>
           <a:prstGeom prst="line">
             <a:avLst/>
@@ -11634,30 +12366,30 @@
       </p:sp>
       <p:sp>
         <p:nvSpPr>
-          <p:cNvPr id="16" name="Text 14"/>
-          <p:cNvSpPr/>
-          <p:nvPr/>
-        </p:nvSpPr>
-        <p:spPr>
-          <a:xfrm>
-            <a:off x="7635240" y="3099816"/>
-            <a:ext cx="2103120" cy="320040"/>
-          </a:xfrm>
-          <a:prstGeom prst="rect">
-            <a:avLst/>
-          </a:prstGeom>
-          <a:noFill/>
-          <a:ln/>
-        </p:spPr>
-        <p:txBody>
-          <a:bodyPr wrap="square" lIns="0" tIns="0" rIns="0" bIns="0" rtlCol="0" anchor="t"/>
-          <a:lstStyle/>
-          <a:p>
-            <a:pPr indent="0" marL="0">
-              <a:buNone/>
-            </a:pPr>
-            <a:r>
-              <a:rPr lang="en-US" sz="1350" b="1" dirty="0">
+          <p:cNvPr id="25" name="Text 23"/>
+          <p:cNvSpPr/>
+          <p:nvPr/>
+        </p:nvSpPr>
+        <p:spPr>
+          <a:xfrm>
+            <a:off x="822960" y="5605272"/>
+            <a:ext cx="10543032" cy="365760"/>
+          </a:xfrm>
+          <a:prstGeom prst="rect">
+            <a:avLst/>
+          </a:prstGeom>
+          <a:noFill/>
+          <a:ln/>
+        </p:spPr>
+        <p:txBody>
+          <a:bodyPr wrap="square" lIns="0" tIns="0" rIns="0" bIns="0" rtlCol="0" anchor="t"/>
+          <a:lstStyle/>
+          <a:p>
+            <a:pPr indent="0" marL="0">
+              <a:buNone/>
+            </a:pPr>
+            <a:r>
+              <a:rPr lang="en-US" sz="1600" b="1" dirty="0">
                 <a:solidFill>
                   <a:srgbClr val="191F28"/>
                 </a:solidFill>
@@ -11665,38 +12397,38 @@
                 <a:ea typeface="Arial" pitchFamily="34" charset="-122"/>
                 <a:cs typeface="Arial" pitchFamily="34" charset="-120"/>
               </a:rPr>
-              <a:t>적합성 (10)</a:t>
-            </a:r>
-            <a:endParaRPr lang="en-US" sz="1350" dirty="0"/>
-          </a:p>
-        </p:txBody>
-      </p:sp>
-      <p:sp>
-        <p:nvSpPr>
-          <p:cNvPr id="17" name="Text 15"/>
-          <p:cNvSpPr/>
-          <p:nvPr/>
-        </p:nvSpPr>
-        <p:spPr>
-          <a:xfrm>
-            <a:off x="9738360" y="3099816"/>
-            <a:ext cx="731520" cy="320040"/>
-          </a:xfrm>
-          <a:prstGeom prst="rect">
-            <a:avLst/>
-          </a:prstGeom>
-          <a:noFill/>
-          <a:ln/>
-        </p:spPr>
-        <p:txBody>
-          <a:bodyPr wrap="square" lIns="0" tIns="0" rIns="0" bIns="0" rtlCol="0" anchor="t"/>
-          <a:lstStyle/>
-          <a:p>
-            <a:pPr algn="r" indent="0" marL="0">
-              <a:buNone/>
-            </a:pPr>
-            <a:r>
-              <a:rPr lang="en-US" sz="1350" dirty="0">
+              <a:t>그래서 오늘은 목표치가 아니라 실측치를 가져왔습니다.</a:t>
+            </a:r>
+            <a:endParaRPr lang="en-US" sz="1600" dirty="0"/>
+          </a:p>
+        </p:txBody>
+      </p:sp>
+      <p:sp>
+        <p:nvSpPr>
+          <p:cNvPr id="26" name="Text 24"/>
+          <p:cNvSpPr/>
+          <p:nvPr/>
+        </p:nvSpPr>
+        <p:spPr>
+          <a:xfrm>
+            <a:off x="822960" y="5989320"/>
+            <a:ext cx="10543032" cy="320040"/>
+          </a:xfrm>
+          <a:prstGeom prst="rect">
+            <a:avLst/>
+          </a:prstGeom>
+          <a:noFill/>
+          <a:ln/>
+        </p:spPr>
+        <p:txBody>
+          <a:bodyPr wrap="square" lIns="0" tIns="0" rIns="0" bIns="0" rtlCol="0" anchor="t"/>
+          <a:lstStyle/>
+          <a:p>
+            <a:pPr indent="0" marL="0">
+              <a:buNone/>
+            </a:pPr>
+            <a:r>
+              <a:rPr lang="en-US" sz="1300" dirty="0">
                 <a:solidFill>
                   <a:srgbClr val="4E5968"/>
                 </a:solidFill>
@@ -11704,676 +12436,15 @@
                 <a:ea typeface="Arial" pitchFamily="34" charset="-122"/>
                 <a:cs typeface="Arial" pitchFamily="34" charset="-120"/>
               </a:rPr>
-              <a:t>10</a:t>
-            </a:r>
-            <a:endParaRPr lang="en-US" sz="1350" dirty="0"/>
-          </a:p>
-        </p:txBody>
-      </p:sp>
-      <p:sp>
-        <p:nvSpPr>
-          <p:cNvPr id="18" name="Text 16"/>
-          <p:cNvSpPr/>
-          <p:nvPr/>
-        </p:nvSpPr>
-        <p:spPr>
-          <a:xfrm>
-            <a:off x="10561320" y="3099816"/>
-            <a:ext cx="777240" cy="320040"/>
-          </a:xfrm>
-          <a:prstGeom prst="rect">
-            <a:avLst/>
-          </a:prstGeom>
-          <a:noFill/>
-          <a:ln/>
-        </p:spPr>
-        <p:txBody>
-          <a:bodyPr wrap="square" lIns="0" tIns="0" rIns="0" bIns="0" rtlCol="0" anchor="t"/>
-          <a:lstStyle/>
-          <a:p>
-            <a:pPr algn="r" indent="0" marL="0">
-              <a:buNone/>
-            </a:pPr>
-            <a:r>
-              <a:rPr lang="en-US" sz="1350" b="1" dirty="0">
-                <a:solidFill>
-                  <a:srgbClr val="191F28"/>
-                </a:solidFill>
-                <a:latin typeface="Arial" pitchFamily="34" charset="0"/>
-                <a:ea typeface="Arial" pitchFamily="34" charset="-122"/>
-                <a:cs typeface="Arial" pitchFamily="34" charset="-120"/>
-              </a:rPr>
-              <a:t>10</a:t>
-            </a:r>
-            <a:endParaRPr lang="en-US" sz="1350" dirty="0"/>
-          </a:p>
-        </p:txBody>
-      </p:sp>
-      <p:sp>
-        <p:nvSpPr>
-          <p:cNvPr id="19" name="Shape 17"/>
-          <p:cNvSpPr/>
-          <p:nvPr/>
-        </p:nvSpPr>
-        <p:spPr>
-          <a:xfrm>
-            <a:off x="7635240" y="3465576"/>
-            <a:ext cx="3703320" cy="0"/>
-          </a:xfrm>
-          <a:prstGeom prst="line">
-            <a:avLst/>
-          </a:prstGeom>
-          <a:noFill/>
-          <a:ln w="12700">
-            <a:solidFill>
-              <a:srgbClr val="E5E8EB"/>
-            </a:solidFill>
-            <a:prstDash val="solid"/>
-          </a:ln>
-        </p:spPr>
-      </p:sp>
-      <p:sp>
-        <p:nvSpPr>
-          <p:cNvPr id="20" name="Text 18"/>
-          <p:cNvSpPr/>
-          <p:nvPr/>
-        </p:nvSpPr>
-        <p:spPr>
-          <a:xfrm>
-            <a:off x="7635240" y="3557016"/>
-            <a:ext cx="2103120" cy="320040"/>
-          </a:xfrm>
-          <a:prstGeom prst="rect">
-            <a:avLst/>
-          </a:prstGeom>
-          <a:noFill/>
-          <a:ln/>
-        </p:spPr>
-        <p:txBody>
-          <a:bodyPr wrap="square" lIns="0" tIns="0" rIns="0" bIns="0" rtlCol="0" anchor="t"/>
-          <a:lstStyle/>
-          <a:p>
-            <a:pPr indent="0" marL="0">
-              <a:buNone/>
-            </a:pPr>
-            <a:r>
-              <a:rPr lang="en-US" sz="1350" b="1" dirty="0">
-                <a:solidFill>
-                  <a:srgbClr val="191F28"/>
-                </a:solidFill>
-                <a:latin typeface="Arial" pitchFamily="34" charset="0"/>
-                <a:ea typeface="Arial" pitchFamily="34" charset="-122"/>
-                <a:cs typeface="Arial" pitchFamily="34" charset="-120"/>
-              </a:rPr>
-              <a:t>활용성 (20)</a:t>
-            </a:r>
-            <a:endParaRPr lang="en-US" sz="1350" dirty="0"/>
-          </a:p>
-        </p:txBody>
-      </p:sp>
-      <p:sp>
-        <p:nvSpPr>
-          <p:cNvPr id="21" name="Text 19"/>
-          <p:cNvSpPr/>
-          <p:nvPr/>
-        </p:nvSpPr>
-        <p:spPr>
-          <a:xfrm>
-            <a:off x="9738360" y="3557016"/>
-            <a:ext cx="731520" cy="320040"/>
-          </a:xfrm>
-          <a:prstGeom prst="rect">
-            <a:avLst/>
-          </a:prstGeom>
-          <a:noFill/>
-          <a:ln/>
-        </p:spPr>
-        <p:txBody>
-          <a:bodyPr wrap="square" lIns="0" tIns="0" rIns="0" bIns="0" rtlCol="0" anchor="t"/>
-          <a:lstStyle/>
-          <a:p>
-            <a:pPr algn="r" indent="0" marL="0">
-              <a:buNone/>
-            </a:pPr>
-            <a:r>
-              <a:rPr lang="en-US" sz="1350" dirty="0">
-                <a:solidFill>
-                  <a:srgbClr val="4E5968"/>
-                </a:solidFill>
-                <a:latin typeface="Arial" pitchFamily="34" charset="0"/>
-                <a:ea typeface="Arial" pitchFamily="34" charset="-122"/>
-                <a:cs typeface="Arial" pitchFamily="34" charset="-120"/>
-              </a:rPr>
-              <a:t>18.3</a:t>
-            </a:r>
-            <a:endParaRPr lang="en-US" sz="1350" dirty="0"/>
-          </a:p>
-        </p:txBody>
-      </p:sp>
-      <p:sp>
-        <p:nvSpPr>
-          <p:cNvPr id="22" name="Text 20"/>
-          <p:cNvSpPr/>
-          <p:nvPr/>
-        </p:nvSpPr>
-        <p:spPr>
-          <a:xfrm>
-            <a:off x="10561320" y="3557016"/>
-            <a:ext cx="777240" cy="320040"/>
-          </a:xfrm>
-          <a:prstGeom prst="rect">
-            <a:avLst/>
-          </a:prstGeom>
-          <a:noFill/>
-          <a:ln/>
-        </p:spPr>
-        <p:txBody>
-          <a:bodyPr wrap="square" lIns="0" tIns="0" rIns="0" bIns="0" rtlCol="0" anchor="t"/>
-          <a:lstStyle/>
-          <a:p>
-            <a:pPr algn="r" indent="0" marL="0">
-              <a:buNone/>
-            </a:pPr>
-            <a:r>
-              <a:rPr lang="en-US" sz="1350" b="1" dirty="0">
-                <a:solidFill>
-                  <a:srgbClr val="3182F6"/>
-                </a:solidFill>
-                <a:latin typeface="Arial" pitchFamily="34" charset="0"/>
-                <a:ea typeface="Arial" pitchFamily="34" charset="-122"/>
-                <a:cs typeface="Arial" pitchFamily="34" charset="-120"/>
-              </a:rPr>
-              <a:t>20</a:t>
-            </a:r>
-            <a:endParaRPr lang="en-US" sz="1350" dirty="0"/>
-          </a:p>
-        </p:txBody>
-      </p:sp>
-      <p:sp>
-        <p:nvSpPr>
-          <p:cNvPr id="23" name="Shape 21"/>
-          <p:cNvSpPr/>
-          <p:nvPr/>
-        </p:nvSpPr>
-        <p:spPr>
-          <a:xfrm>
-            <a:off x="7635240" y="3922776"/>
-            <a:ext cx="3703320" cy="0"/>
-          </a:xfrm>
-          <a:prstGeom prst="line">
-            <a:avLst/>
-          </a:prstGeom>
-          <a:noFill/>
-          <a:ln w="12700">
-            <a:solidFill>
-              <a:srgbClr val="E5E8EB"/>
-            </a:solidFill>
-            <a:prstDash val="solid"/>
-          </a:ln>
-        </p:spPr>
-      </p:sp>
-      <p:sp>
-        <p:nvSpPr>
-          <p:cNvPr id="24" name="Text 22"/>
-          <p:cNvSpPr/>
-          <p:nvPr/>
-        </p:nvSpPr>
-        <p:spPr>
-          <a:xfrm>
-            <a:off x="7635240" y="4014216"/>
-            <a:ext cx="2103120" cy="320040"/>
-          </a:xfrm>
-          <a:prstGeom prst="rect">
-            <a:avLst/>
-          </a:prstGeom>
-          <a:noFill/>
-          <a:ln/>
-        </p:spPr>
-        <p:txBody>
-          <a:bodyPr wrap="square" lIns="0" tIns="0" rIns="0" bIns="0" rtlCol="0" anchor="t"/>
-          <a:lstStyle/>
-          <a:p>
-            <a:pPr indent="0" marL="0">
-              <a:buNone/>
-            </a:pPr>
-            <a:r>
-              <a:rPr lang="en-US" sz="1350" b="1" dirty="0">
-                <a:solidFill>
-                  <a:srgbClr val="191F28"/>
-                </a:solidFill>
-                <a:latin typeface="Arial" pitchFamily="34" charset="0"/>
-                <a:ea typeface="Arial" pitchFamily="34" charset="-122"/>
-                <a:cs typeface="Arial" pitchFamily="34" charset="-120"/>
-              </a:rPr>
-              <a:t>혁신성 (25)</a:t>
-            </a:r>
-            <a:endParaRPr lang="en-US" sz="1350" dirty="0"/>
-          </a:p>
-        </p:txBody>
-      </p:sp>
-      <p:sp>
-        <p:nvSpPr>
-          <p:cNvPr id="25" name="Text 23"/>
-          <p:cNvSpPr/>
-          <p:nvPr/>
-        </p:nvSpPr>
-        <p:spPr>
-          <a:xfrm>
-            <a:off x="9738360" y="4014216"/>
-            <a:ext cx="731520" cy="320040"/>
-          </a:xfrm>
-          <a:prstGeom prst="rect">
-            <a:avLst/>
-          </a:prstGeom>
-          <a:noFill/>
-          <a:ln/>
-        </p:spPr>
-        <p:txBody>
-          <a:bodyPr wrap="square" lIns="0" tIns="0" rIns="0" bIns="0" rtlCol="0" anchor="t"/>
-          <a:lstStyle/>
-          <a:p>
-            <a:pPr algn="r" indent="0" marL="0">
-              <a:buNone/>
-            </a:pPr>
-            <a:r>
-              <a:rPr lang="en-US" sz="1350" dirty="0">
-                <a:solidFill>
-                  <a:srgbClr val="4E5968"/>
-                </a:solidFill>
-                <a:latin typeface="Arial" pitchFamily="34" charset="0"/>
-                <a:ea typeface="Arial" pitchFamily="34" charset="-122"/>
-                <a:cs typeface="Arial" pitchFamily="34" charset="-120"/>
-              </a:rPr>
-              <a:t>25</a:t>
-            </a:r>
-            <a:endParaRPr lang="en-US" sz="1350" dirty="0"/>
-          </a:p>
-        </p:txBody>
-      </p:sp>
-      <p:sp>
-        <p:nvSpPr>
-          <p:cNvPr id="26" name="Text 24"/>
-          <p:cNvSpPr/>
-          <p:nvPr/>
-        </p:nvSpPr>
-        <p:spPr>
-          <a:xfrm>
-            <a:off x="10561320" y="4014216"/>
-            <a:ext cx="777240" cy="320040"/>
-          </a:xfrm>
-          <a:prstGeom prst="rect">
-            <a:avLst/>
-          </a:prstGeom>
-          <a:noFill/>
-          <a:ln/>
-        </p:spPr>
-        <p:txBody>
-          <a:bodyPr wrap="square" lIns="0" tIns="0" rIns="0" bIns="0" rtlCol="0" anchor="t"/>
-          <a:lstStyle/>
-          <a:p>
-            <a:pPr algn="r" indent="0" marL="0">
-              <a:buNone/>
-            </a:pPr>
-            <a:r>
-              <a:rPr lang="en-US" sz="1350" b="1" dirty="0">
-                <a:solidFill>
-                  <a:srgbClr val="191F28"/>
-                </a:solidFill>
-                <a:latin typeface="Arial" pitchFamily="34" charset="0"/>
-                <a:ea typeface="Arial" pitchFamily="34" charset="-122"/>
-                <a:cs typeface="Arial" pitchFamily="34" charset="-120"/>
-              </a:rPr>
-              <a:t>25</a:t>
-            </a:r>
-            <a:endParaRPr lang="en-US" sz="1350" dirty="0"/>
-          </a:p>
-        </p:txBody>
-      </p:sp>
-      <p:sp>
-        <p:nvSpPr>
-          <p:cNvPr id="27" name="Shape 25"/>
-          <p:cNvSpPr/>
-          <p:nvPr/>
-        </p:nvSpPr>
-        <p:spPr>
-          <a:xfrm>
-            <a:off x="7635240" y="4379976"/>
-            <a:ext cx="3703320" cy="0"/>
-          </a:xfrm>
-          <a:prstGeom prst="line">
-            <a:avLst/>
-          </a:prstGeom>
-          <a:noFill/>
-          <a:ln w="12700">
-            <a:solidFill>
-              <a:srgbClr val="E5E8EB"/>
-            </a:solidFill>
-            <a:prstDash val="solid"/>
-          </a:ln>
-        </p:spPr>
-      </p:sp>
-      <p:sp>
-        <p:nvSpPr>
-          <p:cNvPr id="28" name="Text 26"/>
-          <p:cNvSpPr/>
-          <p:nvPr/>
-        </p:nvSpPr>
-        <p:spPr>
-          <a:xfrm>
-            <a:off x="7635240" y="4471416"/>
-            <a:ext cx="2103120" cy="320040"/>
-          </a:xfrm>
-          <a:prstGeom prst="rect">
-            <a:avLst/>
-          </a:prstGeom>
-          <a:noFill/>
-          <a:ln/>
-        </p:spPr>
-        <p:txBody>
-          <a:bodyPr wrap="square" lIns="0" tIns="0" rIns="0" bIns="0" rtlCol="0" anchor="t"/>
-          <a:lstStyle/>
-          <a:p>
-            <a:pPr indent="0" marL="0">
-              <a:buNone/>
-            </a:pPr>
-            <a:r>
-              <a:rPr lang="en-US" sz="1350" b="1" dirty="0">
-                <a:solidFill>
-                  <a:srgbClr val="191F28"/>
-                </a:solidFill>
-                <a:latin typeface="Arial" pitchFamily="34" charset="0"/>
-                <a:ea typeface="Arial" pitchFamily="34" charset="-122"/>
-                <a:cs typeface="Arial" pitchFamily="34" charset="-120"/>
-              </a:rPr>
-              <a:t>실현가능성 (25)</a:t>
-            </a:r>
-            <a:endParaRPr lang="en-US" sz="1350" dirty="0"/>
-          </a:p>
-        </p:txBody>
-      </p:sp>
-      <p:sp>
-        <p:nvSpPr>
-          <p:cNvPr id="29" name="Text 27"/>
-          <p:cNvSpPr/>
-          <p:nvPr/>
-        </p:nvSpPr>
-        <p:spPr>
-          <a:xfrm>
-            <a:off x="9738360" y="4471416"/>
-            <a:ext cx="731520" cy="320040"/>
-          </a:xfrm>
-          <a:prstGeom prst="rect">
-            <a:avLst/>
-          </a:prstGeom>
-          <a:noFill/>
-          <a:ln/>
-        </p:spPr>
-        <p:txBody>
-          <a:bodyPr wrap="square" lIns="0" tIns="0" rIns="0" bIns="0" rtlCol="0" anchor="t"/>
-          <a:lstStyle/>
-          <a:p>
-            <a:pPr algn="r" indent="0" marL="0">
-              <a:buNone/>
-            </a:pPr>
-            <a:r>
-              <a:rPr lang="en-US" sz="1350" dirty="0">
-                <a:solidFill>
-                  <a:srgbClr val="4E5968"/>
-                </a:solidFill>
-                <a:latin typeface="Arial" pitchFamily="34" charset="0"/>
-                <a:ea typeface="Arial" pitchFamily="34" charset="-122"/>
-                <a:cs typeface="Arial" pitchFamily="34" charset="-120"/>
-              </a:rPr>
-              <a:t>25</a:t>
-            </a:r>
-            <a:endParaRPr lang="en-US" sz="1350" dirty="0"/>
-          </a:p>
-        </p:txBody>
-      </p:sp>
-      <p:sp>
-        <p:nvSpPr>
-          <p:cNvPr id="30" name="Text 28"/>
-          <p:cNvSpPr/>
-          <p:nvPr/>
-        </p:nvSpPr>
-        <p:spPr>
-          <a:xfrm>
-            <a:off x="10561320" y="4471416"/>
-            <a:ext cx="777240" cy="320040"/>
-          </a:xfrm>
-          <a:prstGeom prst="rect">
-            <a:avLst/>
-          </a:prstGeom>
-          <a:noFill/>
-          <a:ln/>
-        </p:spPr>
-        <p:txBody>
-          <a:bodyPr wrap="square" lIns="0" tIns="0" rIns="0" bIns="0" rtlCol="0" anchor="t"/>
-          <a:lstStyle/>
-          <a:p>
-            <a:pPr algn="r" indent="0" marL="0">
-              <a:buNone/>
-            </a:pPr>
-            <a:r>
-              <a:rPr lang="en-US" sz="1350" b="1" dirty="0">
-                <a:solidFill>
-                  <a:srgbClr val="191F28"/>
-                </a:solidFill>
-                <a:latin typeface="Arial" pitchFamily="34" charset="0"/>
-                <a:ea typeface="Arial" pitchFamily="34" charset="-122"/>
-                <a:cs typeface="Arial" pitchFamily="34" charset="-120"/>
-              </a:rPr>
-              <a:t>24</a:t>
-            </a:r>
-            <a:endParaRPr lang="en-US" sz="1350" dirty="0"/>
-          </a:p>
-        </p:txBody>
-      </p:sp>
-      <p:sp>
-        <p:nvSpPr>
-          <p:cNvPr id="31" name="Shape 29"/>
-          <p:cNvSpPr/>
-          <p:nvPr/>
-        </p:nvSpPr>
-        <p:spPr>
-          <a:xfrm>
-            <a:off x="7635240" y="4837176"/>
-            <a:ext cx="3703320" cy="0"/>
-          </a:xfrm>
-          <a:prstGeom prst="line">
-            <a:avLst/>
-          </a:prstGeom>
-          <a:noFill/>
-          <a:ln w="12700">
-            <a:solidFill>
-              <a:srgbClr val="E5E8EB"/>
-            </a:solidFill>
-            <a:prstDash val="solid"/>
-          </a:ln>
-        </p:spPr>
-      </p:sp>
-      <p:sp>
-        <p:nvSpPr>
-          <p:cNvPr id="32" name="Text 30"/>
-          <p:cNvSpPr/>
-          <p:nvPr/>
-        </p:nvSpPr>
-        <p:spPr>
-          <a:xfrm>
-            <a:off x="7635240" y="4928616"/>
-            <a:ext cx="2103120" cy="320040"/>
-          </a:xfrm>
-          <a:prstGeom prst="rect">
-            <a:avLst/>
-          </a:prstGeom>
-          <a:noFill/>
-          <a:ln/>
-        </p:spPr>
-        <p:txBody>
-          <a:bodyPr wrap="square" lIns="0" tIns="0" rIns="0" bIns="0" rtlCol="0" anchor="t"/>
-          <a:lstStyle/>
-          <a:p>
-            <a:pPr indent="0" marL="0">
-              <a:buNone/>
-            </a:pPr>
-            <a:r>
-              <a:rPr lang="en-US" sz="1350" b="1" dirty="0">
-                <a:solidFill>
-                  <a:srgbClr val="191F28"/>
-                </a:solidFill>
-                <a:latin typeface="Arial" pitchFamily="34" charset="0"/>
-                <a:ea typeface="Arial" pitchFamily="34" charset="-122"/>
-                <a:cs typeface="Arial" pitchFamily="34" charset="-120"/>
-              </a:rPr>
-              <a:t>확장성 (20)</a:t>
-            </a:r>
-            <a:endParaRPr lang="en-US" sz="1350" dirty="0"/>
-          </a:p>
-        </p:txBody>
-      </p:sp>
-      <p:sp>
-        <p:nvSpPr>
-          <p:cNvPr id="33" name="Text 31"/>
-          <p:cNvSpPr/>
-          <p:nvPr/>
-        </p:nvSpPr>
-        <p:spPr>
-          <a:xfrm>
-            <a:off x="9738360" y="4928616"/>
-            <a:ext cx="731520" cy="320040"/>
-          </a:xfrm>
-          <a:prstGeom prst="rect">
-            <a:avLst/>
-          </a:prstGeom>
-          <a:noFill/>
-          <a:ln/>
-        </p:spPr>
-        <p:txBody>
-          <a:bodyPr wrap="square" lIns="0" tIns="0" rIns="0" bIns="0" rtlCol="0" anchor="t"/>
-          <a:lstStyle/>
-          <a:p>
-            <a:pPr algn="r" indent="0" marL="0">
-              <a:buNone/>
-            </a:pPr>
-            <a:r>
-              <a:rPr lang="en-US" sz="1350" dirty="0">
-                <a:solidFill>
-                  <a:srgbClr val="4E5968"/>
-                </a:solidFill>
-                <a:latin typeface="Arial" pitchFamily="34" charset="0"/>
-                <a:ea typeface="Arial" pitchFamily="34" charset="-122"/>
-                <a:cs typeface="Arial" pitchFamily="34" charset="-120"/>
-              </a:rPr>
-              <a:t>15.8</a:t>
-            </a:r>
-            <a:endParaRPr lang="en-US" sz="1350" dirty="0"/>
-          </a:p>
-        </p:txBody>
-      </p:sp>
-      <p:sp>
-        <p:nvSpPr>
-          <p:cNvPr id="34" name="Text 32"/>
-          <p:cNvSpPr/>
-          <p:nvPr/>
-        </p:nvSpPr>
-        <p:spPr>
-          <a:xfrm>
-            <a:off x="10561320" y="4928616"/>
-            <a:ext cx="777240" cy="320040"/>
-          </a:xfrm>
-          <a:prstGeom prst="rect">
-            <a:avLst/>
-          </a:prstGeom>
-          <a:noFill/>
-          <a:ln/>
-        </p:spPr>
-        <p:txBody>
-          <a:bodyPr wrap="square" lIns="0" tIns="0" rIns="0" bIns="0" rtlCol="0" anchor="t"/>
-          <a:lstStyle/>
-          <a:p>
-            <a:pPr algn="r" indent="0" marL="0">
-              <a:buNone/>
-            </a:pPr>
-            <a:r>
-              <a:rPr lang="en-US" sz="1350" b="1" dirty="0">
-                <a:solidFill>
-                  <a:srgbClr val="3182F6"/>
-                </a:solidFill>
-                <a:latin typeface="Arial" pitchFamily="34" charset="0"/>
-                <a:ea typeface="Arial" pitchFamily="34" charset="-122"/>
-                <a:cs typeface="Arial" pitchFamily="34" charset="-120"/>
-              </a:rPr>
-              <a:t>20</a:t>
-            </a:r>
-            <a:endParaRPr lang="en-US" sz="1350" dirty="0"/>
-          </a:p>
-        </p:txBody>
-      </p:sp>
-      <p:sp>
-        <p:nvSpPr>
-          <p:cNvPr id="35" name="Shape 33"/>
-          <p:cNvSpPr/>
-          <p:nvPr/>
-        </p:nvSpPr>
-        <p:spPr>
-          <a:xfrm>
-            <a:off x="822960" y="5577840"/>
-            <a:ext cx="10543032" cy="0"/>
-          </a:xfrm>
-          <a:prstGeom prst="line">
-            <a:avLst/>
-          </a:prstGeom>
-          <a:noFill/>
-          <a:ln w="12700">
-            <a:solidFill>
-              <a:srgbClr val="E5E8EB"/>
-            </a:solidFill>
-            <a:prstDash val="solid"/>
-          </a:ln>
-        </p:spPr>
-      </p:sp>
-      <p:sp>
-        <p:nvSpPr>
-          <p:cNvPr id="36" name="Text 34"/>
-          <p:cNvSpPr/>
-          <p:nvPr/>
-        </p:nvSpPr>
-        <p:spPr>
-          <a:xfrm>
-            <a:off x="822960" y="5742432"/>
-            <a:ext cx="10543032" cy="365760"/>
-          </a:xfrm>
-          <a:prstGeom prst="rect">
-            <a:avLst/>
-          </a:prstGeom>
-          <a:noFill/>
-          <a:ln/>
-        </p:spPr>
-        <p:txBody>
-          <a:bodyPr wrap="square" lIns="0" tIns="0" rIns="0" bIns="0" rtlCol="0" anchor="t"/>
-          <a:lstStyle/>
-          <a:p>
-            <a:pPr indent="0" marL="0">
-              <a:buNone/>
-            </a:pPr>
-            <a:r>
-              <a:rPr lang="en-US" sz="1600" b="1" dirty="0">
-                <a:solidFill>
-                  <a:srgbClr val="191F28"/>
-                </a:solidFill>
-                <a:latin typeface="Arial" pitchFamily="34" charset="0"/>
-                <a:ea typeface="Arial" pitchFamily="34" charset="-122"/>
-                <a:cs typeface="Arial" pitchFamily="34" charset="-120"/>
-              </a:rPr>
-              <a:t>짚은 곳을 채운 뒤, 같은 점검 질문으로 다시 채점했습니다.</a:t>
-            </a:r>
-            <a:endParaRPr lang="en-US" sz="1600" dirty="0"/>
-          </a:p>
-        </p:txBody>
-      </p:sp>
-      <p:sp>
-        <p:nvSpPr>
-          <p:cNvPr id="37" name="Text 35"/>
+              <a:t>공고 파싱 요건 재현율 90%·97%·85%(심사표 이름·배점 100%) · 일부러 지운 초안 탐지 4/5 · 정밀도 100% — 8장</a:t>
+            </a:r>
+            <a:endParaRPr lang="en-US" sz="1300" dirty="0"/>
+          </a:p>
+        </p:txBody>
+      </p:sp>
+      <p:sp>
+        <p:nvSpPr>
+          <p:cNvPr id="27" name="Text 25"/>
           <p:cNvSpPr/>
           <p:nvPr/>
         </p:nvSpPr>
@@ -12404,7 +12475,7 @@
                 <a:ea typeface="Arial" pitchFamily="34" charset="-122"/>
                 <a:cs typeface="Arial" pitchFamily="34" charset="-120"/>
               </a:rPr>
-              <a:t>점수 예측이 아니라 빈칸 찾기 · 보완 후 = 「본선 구현 결과」 절을 사람이 추가 · 같은 판정자로 잰 자기 점검(변별력 근거는 8장) · 이번 실행은 평가위원 4/5명 응답(1명 응답 실패 — 복구 중)</a:t>
+              <a:t>data/runs/nais-hackathon-2026--original.json 의 stances(선정·보류·탈락 + 결정 포인트) · 항목 합산보다 결정 포인트로 등수를 먼저 정한다(현장 멘토링)</a:t>
             </a:r>
             <a:endParaRPr lang="en-US" sz="1000" dirty="0"/>
           </a:p>

--- a/deliver/deck/RFP-to-Fit_루미아.pptx
+++ b/deliver/deck/RFP-to-Fit_루미아.pptx
@@ -3400,7 +3400,7 @@
                 <a:ea typeface="Arial" pitchFamily="34" charset="-122"/>
                 <a:cs typeface="Arial" pitchFamily="34" charset="-120"/>
               </a:rPr>
-              <a:t>커밋 11개 · 코드는 전부 본선 중 커밋(첫 코드 커밋 09/30 19:19, 그 전엔 문서뿐)</a:t>
+              <a:t>커밋 12개 · 코드는 전부 본선 중 커밋(첫 코드 커밋 09/30 19:19, 그 전엔 문서뿐)</a:t>
             </a:r>
             <a:endParaRPr lang="en-US" sz="1400" dirty="0"/>
           </a:p>
@@ -9335,7 +9335,7 @@
                 <a:ea typeface="Arial" pitchFamily="34" charset="-122"/>
                 <a:cs typeface="Arial" pitchFamily="34" charset="-120"/>
               </a:rPr>
-              <a:t>주 엔진 gpt-4.1(파싱·질문·보완)</a:t>
+              <a:t>주 엔진 gpt-4.1</a:t>
             </a:r>
             <a:endParaRPr lang="en-US" sz="950" dirty="0"/>
           </a:p>
@@ -11364,7 +11364,7 @@
                 <a:ea typeface="Arial" pitchFamily="34" charset="-122"/>
                 <a:cs typeface="Arial" pitchFamily="34" charset="-120"/>
               </a:rPr>
-              <a:t>첫 초안 세트는 1~2/5 — 결과를 본 뒤 블록을 다시 설계한 두 번째 세트입니다(사전 등록 아님). 근거 충족도는 지운 초안 5개 중 3개만 원본(91.2)보다 낮았습니다 — 총점이 아니라 「짚은 곳」으로 판정합니다.</a:t>
+              <a:t>첫 초안 세트 1~2/5 → 블록 재설계 후 결과(사전 등록 아님). 지운 초안 5개 중 3개만 근거 충족도가 원본(91.2)보다 낮음 — 판정은 총점이 아니라 「짚은 곳」.</a:t>
             </a:r>
             <a:endParaRPr lang="en-US" sz="1200" dirty="0"/>
           </a:p>
@@ -11378,7 +11378,7 @@
         </p:nvSpPr>
         <p:spPr>
           <a:xfrm>
-            <a:off x="7406640" y="5303520"/>
+            <a:off x="7406640" y="5440680"/>
             <a:ext cx="3959352" cy="502920"/>
           </a:xfrm>
           <a:prstGeom prst="rect">

--- a/deliver/deck/RFP-to-Fit_루미아.pptx
+++ b/deliver/deck/RFP-to-Fit_루미아.pptx
@@ -3400,7 +3400,7 @@
                 <a:ea typeface="Arial" pitchFamily="34" charset="-122"/>
                 <a:cs typeface="Arial" pitchFamily="34" charset="-120"/>
               </a:rPr>
-              <a:t>커밋 12개 · 코드는 전부 본선 중 커밋(첫 코드 커밋 09/30 19:19, 그 전엔 문서뿐)</a:t>
+              <a:t>커밋 13개 · 코드는 전부 본선 중 커밋(첫 코드 커밋 09/30 19:19, 그 전엔 문서뿐)</a:t>
             </a:r>
             <a:endParaRPr lang="en-US" sz="1400" dirty="0"/>
           </a:p>
@@ -5885,7 +5885,7 @@
                 <a:ea typeface="Arial" pitchFamily="34" charset="-122"/>
                 <a:cs typeface="Arial" pitchFamily="34" charset="-120"/>
               </a:rPr>
-              <a:t>공고 파싱은 처음 한 번(5쪽 7초·37쪽 16초)</a:t>
+              <a:t>파싱은 처음 한 번(5쪽 7초·37쪽 16초) · 시연은 저장본</a:t>
             </a:r>
             <a:endParaRPr lang="en-US" sz="1250" dirty="0"/>
           </a:p>
@@ -6260,7 +6260,7 @@
                 <a:ea typeface="Arial" pitchFamily="34" charset="-122"/>
                 <a:cs typeface="Arial" pitchFamily="34" charset="-120"/>
               </a:rPr>
-              <a:t>라이브 앱 실제 화면(Streamlit) — 마지막 장의 주소에서 직접 눌러 볼 수 있습니다</a:t>
+              <a:t>라이브 앱 실제 화면(Streamlit) — 시연 공고는 저장된 파싱 결과(8장 재현율은 별도 측정 실행) · 마지막 장 주소에서 직접 눌러 볼 수 있습니다</a:t>
             </a:r>
             <a:endParaRPr lang="en-US" sz="1000" dirty="0"/>
           </a:p>
@@ -11406,7 +11406,7 @@
                 <a:ea typeface="Arial" pitchFamily="34" charset="-122"/>
                 <a:cs typeface="Arial" pitchFamily="34" charset="-120"/>
               </a:rPr>
-              <a:t>③ 1건 채점 19초 — 평가위원 6/6명 응답 · 선행연구 탐색 포함(공고 파싱 제외)</a:t>
+              <a:t>③ 1건 채점 19초 — 평가위원 6/6명 응답(공고 파싱 제외)</a:t>
             </a:r>
             <a:endParaRPr lang="en-US" sz="1200" dirty="0"/>
           </a:p>
@@ -11558,7 +11558,7 @@
                 <a:ea typeface="Arial" pitchFamily="34" charset="-122"/>
                 <a:cs typeface="Arial" pitchFamily="34" charset="-120"/>
               </a:rPr>
-              <a:t>평가위원 여섯 명 중,</a:t>
+              <a:t>항목 판정은 모두 충족인데,</a:t>
             </a:r>
             <a:endParaRPr lang="en-US" sz="3400" dirty="0"/>
           </a:p>

--- a/deliver/deck/RFP-to-Fit_루미아.pptx
+++ b/deliver/deck/RFP-to-Fit_루미아.pptx
@@ -3400,7 +3400,7 @@
                 <a:ea typeface="Arial" pitchFamily="34" charset="-122"/>
                 <a:cs typeface="Arial" pitchFamily="34" charset="-120"/>
               </a:rPr>
-              <a:t>커밋 13개 · 코드는 전부 본선 중 커밋(첫 코드 커밋 09/30 19:19, 그 전엔 문서뿐)</a:t>
+              <a:t>커밋 14개 · 코드는 전부 본선 중 커밋(첫 코드 커밋 09/30 19:19, 그 전엔 문서뿐)</a:t>
             </a:r>
             <a:endParaRPr lang="en-US" sz="1400" dirty="0"/>
           </a:p>
@@ -10056,7 +10056,7 @@
                 <a:ea typeface="Arial" pitchFamily="34" charset="-122"/>
                 <a:cs typeface="Arial" pitchFamily="34" charset="-120"/>
               </a:rPr>
-              <a:t>데이터: 공개 R&amp;D 공고 3건(국가과학기술연구회·우주항공청·산업통상부) + 쪽별 정답표 · 인용 검사·집계는 LLM을 모르는 순수 코드(테스트 25개)</a:t>
+              <a:t>데이터: 공개 R&amp;D 공고 3건(국가과학기술연구회·우주항공청·산업통상부) + 쪽별 정답표 · 인용 검사·집계는 LLM을 모르는 순수 코드(테스트 29개)</a:t>
             </a:r>
             <a:endParaRPr lang="en-US" sz="1200" dirty="0"/>
           </a:p>

--- a/deliver/deck/RFP-to-Fit_루미아.pptx
+++ b/deliver/deck/RFP-to-Fit_루미아.pptx
@@ -1007,7 +1007,7 @@
           <a:p>
             <a:r>
               <a:rPr lang="en-US" dirty="0"/>
-              <a:t>[30초] 여기 계신 분들 모두 제안서를 쓰고, 또 심사하시는 분들입니다. 저희가 산업통상부 공고 한 건을 쪽마다 읽어 보니 37쪽에 지켜야 할 요건이 58개, 평가표가 3종이었습니다. 연구자는 연구의 언어로 쓰고 평가위원은 지표의 언어로 읽는데, 그 빈칸은 제출 뒤에야 보입니다.</a:t>
+              <a:t>[30초] 여기 계신 분들 모두 제안서를 쓰고, 또 심사하시는 분들입니다. 심사 기준은 공고에 이미 다 적혀 있습니다. 산업통상부 공고 한 건을 쪽마다 읽어 보니 37쪽에 지켜야 할 요건이 58개, 평가표가 3종이었습니다. 그런데 제출 전에 그 기준의 눈으로 내 초안을 읽어 줄 사람은 없습니다. 연구자는 연구의 언어로 쓰고 평가위원은 지표의 언어로 읽기 때문에, 그 사이의 빈칸은 심사평을 받은 뒤에야 보입니다. 저희가 푼 문제는 이 하나입니다.</a:t>
             </a:r>
             <a:endParaRPr lang="en-US" dirty="0"/>
           </a:p>
@@ -3400,7 +3400,7 @@
                 <a:ea typeface="Arial" pitchFamily="34" charset="-122"/>
                 <a:cs typeface="Arial" pitchFamily="34" charset="-120"/>
               </a:rPr>
-              <a:t>커밋 14개 · 코드는 전부 본선 중 커밋(첫 코드 커밋 09/30 19:19, 그 전엔 문서뿐)</a:t>
+              <a:t>커밋 15개 · 코드는 전부 본선 중 커밋(첫 코드 커밋 09/30 19:19, 그 전엔 문서뿐)</a:t>
             </a:r>
             <a:endParaRPr lang="en-US" sz="1400" dirty="0"/>
           </a:p>
@@ -3878,7 +3878,7 @@
                 <a:ea typeface="Arial" pitchFamily="34" charset="-122"/>
                 <a:cs typeface="Arial" pitchFamily="34" charset="-120"/>
               </a:rPr>
-              <a:t>공고 한 건을 쪽마다 읽어 보니,</a:t>
+              <a:t>심사 기준은 공고에 다 있는데,</a:t>
             </a:r>
             <a:endParaRPr lang="en-US" sz="3400" dirty="0"/>
           </a:p>
@@ -3892,13 +3892,13 @@
             <a:r>
               <a:rPr lang="en-US" sz="3400" b="1" dirty="0">
                 <a:solidFill>
-                  <a:srgbClr val="3182F6"/>
-                </a:solidFill>
-                <a:latin typeface="Arial" pitchFamily="34" charset="0"/>
-                <a:ea typeface="Arial" pitchFamily="34" charset="-122"/>
-                <a:cs typeface="Arial" pitchFamily="34" charset="-120"/>
-              </a:rPr>
-              <a:t>지킬 것</a:t>
+                  <a:srgbClr val="191F28"/>
+                </a:solidFill>
+                <a:latin typeface="Arial" pitchFamily="34" charset="0"/>
+                <a:ea typeface="Arial" pitchFamily="34" charset="-122"/>
+                <a:cs typeface="Arial" pitchFamily="34" charset="-120"/>
+              </a:rPr>
+              <a:t>그 눈으로 </a:t>
             </a:r>
             <a:pPr indent="0" marL="0">
               <a:lnSpc>
@@ -3909,13 +3909,30 @@
             <a:r>
               <a:rPr lang="en-US" sz="3400" b="1" dirty="0">
                 <a:solidFill>
+                  <a:srgbClr val="3182F6"/>
+                </a:solidFill>
+                <a:latin typeface="Arial" pitchFamily="34" charset="0"/>
+                <a:ea typeface="Arial" pitchFamily="34" charset="-122"/>
+                <a:cs typeface="Arial" pitchFamily="34" charset="-120"/>
+              </a:rPr>
+              <a:t>내 초안</a:t>
+            </a:r>
+            <a:pPr indent="0" marL="0">
+              <a:lnSpc>
+                <a:spcPct val="112000"/>
+              </a:lnSpc>
+              <a:buNone/>
+            </a:pPr>
+            <a:r>
+              <a:rPr lang="en-US" sz="3400" b="1" dirty="0">
+                <a:solidFill>
                   <a:srgbClr val="191F28"/>
                 </a:solidFill>
                 <a:latin typeface="Arial" pitchFamily="34" charset="0"/>
                 <a:ea typeface="Arial" pitchFamily="34" charset="-122"/>
                 <a:cs typeface="Arial" pitchFamily="34" charset="-120"/>
               </a:rPr>
-              <a:t>이 이만큼입니다</a:t>
+              <a:t>을 읽어 줄 사람은 없습니다</a:t>
             </a:r>
             <a:endParaRPr lang="en-US" sz="3400" dirty="0"/>
           </a:p>
@@ -4220,7 +4237,7 @@
                 <a:ea typeface="Arial" pitchFamily="34" charset="-122"/>
                 <a:cs typeface="Arial" pitchFamily="34" charset="-120"/>
               </a:rPr>
-              <a:t>연구자는 연구의 언어로 쓰고, 평가위원은 지표의 언어로 읽습니다. 그 사이의 빈칸은 제출 뒤에야 보입니다.</a:t>
+              <a:t>연구자는 연구의 언어로 쓰고, 평가위원은 지표의 언어로 읽습니다. 그 사이의 빈칸은 심사평을 받은 뒤에야 보입니다.</a:t>
             </a:r>
             <a:endParaRPr lang="en-US" sz="1600" dirty="0"/>
           </a:p>

--- a/deliver/deck/RFP-to-Fit_루미아.pptx
+++ b/deliver/deck/RFP-to-Fit_루미아.pptx
@@ -200,13 +200,13 @@
                 <c:formatCode>General</c:formatCode>
                 <c:ptCount val="3"/>
                 <c:pt idx="0">
-                  <c:v>90</c:v>
+                  <c:v>85</c:v>
                 </c:pt>
                 <c:pt idx="1">
-                  <c:v>97</c:v>
+                  <c:v>93</c:v>
                 </c:pt>
                 <c:pt idx="2">
-                  <c:v>85</c:v>
+                  <c:v>87</c:v>
                 </c:pt>
               </c:numCache>
             </c:numRef>
@@ -1535,7 +1535,7 @@
           <a:p>
             <a:r>
               <a:rPr lang="en-US" dirty="0"/>
-              <a:t>[25초] 정확도는 숫자로 보여 드립니다. 정답표 대비 요건을 놓치지 않은 비율이 우주항공청 90%, 산업통상부 97%, NAIS 해커톤 85%입니다. 가장 약한 곳도 그대로 둡니다. 기획서에서 근거 블록을 일부러 하나씩 지운 초안 5개 중 4/5를 짚었고, 지운 초안은 점수도 내려갔습니다.</a:t>
+              <a:t>[25초] 정확도는 숫자로 보여 드립니다. 정답표 대비 요건을 놓치지 않은 비율이 세 번 평균 우주항공청 85%, 산업통상부 93%, NAIS 해커톤 87%입니다. 목표에 못 미친 곳도 그대로 둡니다. 그리고 "평가위원 여러 명이 정말 필요하냐"를 직접 쟀습니다. 근거를 일부러 지운 초안 5개에서, 평가위원 한 명은 다 짚었지만 엉뚱한 곳도 3곳 짚었습니다. 역할 여섯 개로 나누자 오탐이 0이 됐습니다.</a:t>
             </a:r>
             <a:endParaRPr lang="en-US" dirty="0"/>
           </a:p>
@@ -1623,7 +1623,7 @@
           <a:p>
             <a:r>
               <a:rPr lang="en-US" dirty="0"/>
-              <a:t>[25초] 저희 도구로 저희 예선 기획서를 이 대회 본선 심사표로 먼저 읽혔습니다. 여섯 명 중 3명이 보류였고, 이유가 분명했습니다. 세부 전문형은 '정확도 목표(90% 재현율, 80% 정밀도)가 실제 구현 없이 목표치만 제시되어 구체성 부족', 사업성·시장형은 '시장성은 있으나 실증·구매주체가 아직 약함', 행정·관리형은 'AI 윤리·보안 대책은 있으나, 실제 구현 및 검증 계획이 해커톤 기간 내 2일만에 과도하게 압축되어 실현 가능성에 의문.'. 그래서 오늘은 목표치가 아니라 실측치를 가져왔습니다. 요건 재현율 90%, 97%, 85%, 일부러 지운 초안 5개 중 4/5를 짚었습니다.</a:t>
+              <a:t>[25초] 저희 도구로 저희 예선 기획서를 이 대회 본선 심사표로 먼저 읽혔습니다. 여섯 명 중 3명이 보류였고, 이유가 분명했습니다. 세부 전문형은 '정확도 목표(90% 재현율, 80% 정밀도)가 실제 구현 없이 목표치만 제시되어 구체성 부족', 사업성·시장형은 '시장성은 있으나 실증·구매주체가 아직 약함', 행정·관리형은 'AI 윤리·보안 대책은 있으나, 실제 구현 및 검증 계획이 해커톤 기간 내 2일만에 과도하게 압축되어 실현 가능성에 의문.'. 그래서 오늘은 목표치가 아니라 실측치를 가져왔습니다. 요건 재현율 85%, 93%, 87%, 일부러 지운 초안 5개 중 4/5를 짚었습니다.</a:t>
             </a:r>
             <a:endParaRPr lang="en-US" dirty="0"/>
           </a:p>
@@ -3400,7 +3400,7 @@
                 <a:ea typeface="Arial" pitchFamily="34" charset="-122"/>
                 <a:cs typeface="Arial" pitchFamily="34" charset="-120"/>
               </a:rPr>
-              <a:t>커밋 15개 · 코드는 전부 본선 중 커밋(첫 코드 커밋 09/30 19:19, 그 전엔 문서뿐)</a:t>
+              <a:t>커밋 16개 · 코드는 전부 본선 중 커밋(첫 코드 커밋 09/30 19:19, 그 전엔 문서뿐)</a:t>
             </a:r>
             <a:endParaRPr lang="en-US" sz="1400" dirty="0"/>
           </a:p>
@@ -3462,7 +3462,7 @@
                 <a:ea typeface="Arial" pitchFamily="34" charset="-122"/>
                 <a:cs typeface="Arial" pitchFamily="34" charset="-120"/>
               </a:rPr>
-              <a:t>라이브가 끊기면 — 앱의 「② 우리 기획서 전·후」 탭이 저장된 실행 기록으로 같은 결과를 보여 줍니다</a:t>
+              <a:t>라이브가 끊기면 — 앱의 「② 우리 기획서 먼저 채점」 탭이 저장된 실행 기록으로 같은 결과를 보여 줍니다</a:t>
             </a:r>
             <a:endParaRPr lang="en-US" sz="1200" dirty="0"/>
           </a:p>
@@ -5902,7 +5902,7 @@
                 <a:ea typeface="Arial" pitchFamily="34" charset="-122"/>
                 <a:cs typeface="Arial" pitchFamily="34" charset="-120"/>
               </a:rPr>
-              <a:t>파싱은 처음 한 번(5쪽 7초·37쪽 16초) · 시연은 저장본</a:t>
+              <a:t>파싱은 처음 한 번(5쪽 12초·37쪽 15초) · 시연은 저장본</a:t>
             </a:r>
             <a:endParaRPr lang="en-US" sz="1250" dirty="0"/>
           </a:p>
@@ -11097,7 +11097,7 @@
         <p:spPr>
           <a:xfrm>
             <a:off x="822960" y="2606040"/>
-            <a:ext cx="6035040" cy="320040"/>
+            <a:ext cx="5852160" cy="320040"/>
           </a:xfrm>
           <a:prstGeom prst="rect">
             <a:avLst/>
@@ -11135,7 +11135,7 @@
         </p:nvGraphicFramePr>
         <p:xfrm>
           <a:off x="731520" y="2926080"/>
-          <a:ext cx="5943600" cy="2240280"/>
+          <a:ext cx="5760720" cy="2240280"/>
         </p:xfrm>
         <a:graphic xmlns:a="http://schemas.openxmlformats.org/drawingml/2006/main">
           <a:graphicData uri="http://schemas.openxmlformats.org/drawingml/2006/chart">
@@ -11152,7 +11152,7 @@
         <p:spPr>
           <a:xfrm>
             <a:off x="822960" y="5257800"/>
-            <a:ext cx="6035040" cy="548640"/>
+            <a:ext cx="5852160" cy="548640"/>
           </a:xfrm>
           <a:prstGeom prst="rect">
             <a:avLst/>
@@ -11179,7 +11179,7 @@
                 <a:ea typeface="Arial" pitchFamily="34" charset="-122"/>
                 <a:cs typeface="Arial" pitchFamily="34" charset="-120"/>
               </a:rPr>
-              <a:t>우주항공청 35/39 · 산업통상부 56/58 · NAIS 해커톤 22/26(가장 약한 곳: NAIS 해커톤)</a:t>
+              <a:t>3회 평균 · 범위 우주항공청 85~87% · 산업통상부 91~95% · NAIS 해커톤 85~88% (목표 미달: 우주항공청·NAIS 해커톤)</a:t>
             </a:r>
             <a:endParaRPr lang="en-US" sz="1150" dirty="0"/>
           </a:p>
@@ -11199,7 +11199,7 @@
                 <a:ea typeface="Arial" pitchFamily="34" charset="-122"/>
                 <a:cs typeface="Arial" pitchFamily="34" charset="-120"/>
               </a:rPr>
-              <a:t>심사표 이름·배점 일치 3건 모두 100% · 1건 7~16초</a:t>
+              <a:t>심사표 이름·배점 일치 3건 모두 100% · 추출 정밀도 45%·54%·84% · 1건 11~15초</a:t>
             </a:r>
             <a:endParaRPr lang="en-US" sz="1150" dirty="0"/>
           </a:p>
@@ -11213,8 +11213,8 @@
         </p:nvSpPr>
         <p:spPr>
           <a:xfrm>
-            <a:off x="7406640" y="2606040"/>
-            <a:ext cx="3959352" cy="320040"/>
+            <a:off x="7086600" y="2606040"/>
+            <a:ext cx="4279392" cy="320040"/>
           </a:xfrm>
           <a:prstGeom prst="rect">
             <a:avLst/>
@@ -11238,7 +11238,7 @@
                 <a:ea typeface="Arial" pitchFamily="34" charset="-122"/>
                 <a:cs typeface="Arial" pitchFamily="34" charset="-120"/>
               </a:rPr>
-              <a:t>② 일부러 지운 초안 시험 (예선 심사표)</a:t>
+              <a:t>② 일부러 지운 초안 5개 — 누가 더 정확히 짚나 (예선 심사표)</a:t>
             </a:r>
             <a:endParaRPr lang="en-US" sz="1300" dirty="0"/>
           </a:p>
@@ -11252,24 +11252,359 @@
         </p:nvSpPr>
         <p:spPr>
           <a:xfrm>
-            <a:off x="7406640" y="2926080"/>
-            <a:ext cx="3959352" cy="868680"/>
-          </a:xfrm>
-          <a:prstGeom prst="rect">
-            <a:avLst/>
-          </a:prstGeom>
-          <a:noFill/>
-          <a:ln/>
-        </p:spPr>
-        <p:txBody>
-          <a:bodyPr wrap="square" lIns="0" tIns="0" rIns="0" bIns="0" rtlCol="0" anchor="t"/>
-          <a:lstStyle/>
-          <a:p>
-            <a:pPr indent="0" marL="0">
-              <a:buNone/>
-            </a:pPr>
-            <a:r>
-              <a:rPr lang="en-US" sz="4400" b="1" dirty="0">
+            <a:off x="7086600" y="3017520"/>
+            <a:ext cx="2194560" cy="274320"/>
+          </a:xfrm>
+          <a:prstGeom prst="rect">
+            <a:avLst/>
+          </a:prstGeom>
+          <a:noFill/>
+          <a:ln/>
+        </p:spPr>
+        <p:txBody>
+          <a:bodyPr wrap="square" lIns="0" tIns="0" rIns="0" bIns="0" rtlCol="0" anchor="t"/>
+          <a:lstStyle/>
+          <a:p>
+            <a:pPr indent="0" marL="0">
+              <a:buNone/>
+            </a:pPr>
+            <a:r>
+              <a:rPr lang="en-US" sz="1100" dirty="0">
+                <a:solidFill>
+                  <a:srgbClr val="8B95A1"/>
+                </a:solidFill>
+                <a:latin typeface="Arial" pitchFamily="34" charset="0"/>
+                <a:ea typeface="Arial" pitchFamily="34" charset="-122"/>
+                <a:cs typeface="Arial" pitchFamily="34" charset="-120"/>
+              </a:rPr>
+              <a:t>구성</a:t>
+            </a:r>
+            <a:endParaRPr lang="en-US" sz="1100" dirty="0"/>
+          </a:p>
+        </p:txBody>
+      </p:sp>
+      <p:sp>
+        <p:nvSpPr>
+          <p:cNvPr id="9" name="Text 6"/>
+          <p:cNvSpPr/>
+          <p:nvPr/>
+        </p:nvSpPr>
+        <p:spPr>
+          <a:xfrm>
+            <a:off x="9418320" y="3017520"/>
+            <a:ext cx="822960" cy="274320"/>
+          </a:xfrm>
+          <a:prstGeom prst="rect">
+            <a:avLst/>
+          </a:prstGeom>
+          <a:noFill/>
+          <a:ln/>
+        </p:spPr>
+        <p:txBody>
+          <a:bodyPr wrap="square" lIns="0" tIns="0" rIns="0" bIns="0" rtlCol="0" anchor="t"/>
+          <a:lstStyle/>
+          <a:p>
+            <a:pPr algn="r" indent="0" marL="0">
+              <a:buNone/>
+            </a:pPr>
+            <a:r>
+              <a:rPr lang="en-US" sz="1100" dirty="0">
+                <a:solidFill>
+                  <a:srgbClr val="8B95A1"/>
+                </a:solidFill>
+                <a:latin typeface="Arial" pitchFamily="34" charset="0"/>
+                <a:ea typeface="Arial" pitchFamily="34" charset="-122"/>
+                <a:cs typeface="Arial" pitchFamily="34" charset="-120"/>
+              </a:rPr>
+              <a:t>짚은 수</a:t>
+            </a:r>
+            <a:endParaRPr lang="en-US" sz="1100" dirty="0"/>
+          </a:p>
+        </p:txBody>
+      </p:sp>
+      <p:sp>
+        <p:nvSpPr>
+          <p:cNvPr id="10" name="Text 7"/>
+          <p:cNvSpPr/>
+          <p:nvPr/>
+        </p:nvSpPr>
+        <p:spPr>
+          <a:xfrm>
+            <a:off x="10287000" y="3017520"/>
+            <a:ext cx="1078992" cy="274320"/>
+          </a:xfrm>
+          <a:prstGeom prst="rect">
+            <a:avLst/>
+          </a:prstGeom>
+          <a:noFill/>
+          <a:ln/>
+        </p:spPr>
+        <p:txBody>
+          <a:bodyPr wrap="square" lIns="0" tIns="0" rIns="0" bIns="0" rtlCol="0" anchor="t"/>
+          <a:lstStyle/>
+          <a:p>
+            <a:pPr algn="r" indent="0" marL="0">
+              <a:buNone/>
+            </a:pPr>
+            <a:r>
+              <a:rPr lang="en-US" sz="1100" dirty="0">
+                <a:solidFill>
+                  <a:srgbClr val="8B95A1"/>
+                </a:solidFill>
+                <a:latin typeface="Arial" pitchFamily="34" charset="0"/>
+                <a:ea typeface="Arial" pitchFamily="34" charset="-122"/>
+                <a:cs typeface="Arial" pitchFamily="34" charset="-120"/>
+              </a:rPr>
+              <a:t>정확도(오탐)</a:t>
+            </a:r>
+            <a:endParaRPr lang="en-US" sz="1100" dirty="0"/>
+          </a:p>
+        </p:txBody>
+      </p:sp>
+      <p:sp>
+        <p:nvSpPr>
+          <p:cNvPr id="11" name="Text 8"/>
+          <p:cNvSpPr/>
+          <p:nvPr/>
+        </p:nvSpPr>
+        <p:spPr>
+          <a:xfrm>
+            <a:off x="7086600" y="3383280"/>
+            <a:ext cx="2286000" cy="329184"/>
+          </a:xfrm>
+          <a:prstGeom prst="rect">
+            <a:avLst/>
+          </a:prstGeom>
+          <a:noFill/>
+          <a:ln/>
+        </p:spPr>
+        <p:txBody>
+          <a:bodyPr wrap="square" lIns="0" tIns="0" rIns="0" bIns="0" rtlCol="0" anchor="t"/>
+          <a:lstStyle/>
+          <a:p>
+            <a:pPr indent="0" marL="0">
+              <a:buNone/>
+            </a:pPr>
+            <a:r>
+              <a:rPr lang="en-US" sz="1300" b="1" dirty="0">
+                <a:solidFill>
+                  <a:srgbClr val="191F28"/>
+                </a:solidFill>
+                <a:latin typeface="Arial" pitchFamily="34" charset="0"/>
+                <a:ea typeface="Arial" pitchFamily="34" charset="-122"/>
+                <a:cs typeface="Arial" pitchFamily="34" charset="-120"/>
+              </a:rPr>
+              <a:t>평가위원 1명(단일 LLM)</a:t>
+            </a:r>
+            <a:endParaRPr lang="en-US" sz="1300" dirty="0"/>
+          </a:p>
+        </p:txBody>
+      </p:sp>
+      <p:sp>
+        <p:nvSpPr>
+          <p:cNvPr id="12" name="Text 9"/>
+          <p:cNvSpPr/>
+          <p:nvPr/>
+        </p:nvSpPr>
+        <p:spPr>
+          <a:xfrm>
+            <a:off x="9418320" y="3383280"/>
+            <a:ext cx="822960" cy="329184"/>
+          </a:xfrm>
+          <a:prstGeom prst="rect">
+            <a:avLst/>
+          </a:prstGeom>
+          <a:noFill/>
+          <a:ln/>
+        </p:spPr>
+        <p:txBody>
+          <a:bodyPr wrap="square" lIns="0" tIns="0" rIns="0" bIns="0" rtlCol="0" anchor="t"/>
+          <a:lstStyle/>
+          <a:p>
+            <a:pPr algn="r" indent="0" marL="0">
+              <a:buNone/>
+            </a:pPr>
+            <a:r>
+              <a:rPr lang="en-US" sz="1500" b="1" dirty="0">
+                <a:solidFill>
+                  <a:srgbClr val="191F28"/>
+                </a:solidFill>
+                <a:latin typeface="Arial" pitchFamily="34" charset="0"/>
+                <a:ea typeface="Arial" pitchFamily="34" charset="-122"/>
+                <a:cs typeface="Arial" pitchFamily="34" charset="-120"/>
+              </a:rPr>
+              <a:t>5/5</a:t>
+            </a:r>
+            <a:endParaRPr lang="en-US" sz="1500" dirty="0"/>
+          </a:p>
+        </p:txBody>
+      </p:sp>
+      <p:sp>
+        <p:nvSpPr>
+          <p:cNvPr id="13" name="Text 10"/>
+          <p:cNvSpPr/>
+          <p:nvPr/>
+        </p:nvSpPr>
+        <p:spPr>
+          <a:xfrm>
+            <a:off x="10287000" y="3383280"/>
+            <a:ext cx="1078992" cy="329184"/>
+          </a:xfrm>
+          <a:prstGeom prst="rect">
+            <a:avLst/>
+          </a:prstGeom>
+          <a:noFill/>
+          <a:ln/>
+        </p:spPr>
+        <p:txBody>
+          <a:bodyPr wrap="square" lIns="0" tIns="0" rIns="0" bIns="0" rtlCol="0" anchor="t"/>
+          <a:lstStyle/>
+          <a:p>
+            <a:pPr algn="r" indent="0" marL="0">
+              <a:buNone/>
+            </a:pPr>
+            <a:r>
+              <a:rPr lang="en-US" sz="1500" b="1" dirty="0">
+                <a:solidFill>
+                  <a:srgbClr val="191F28"/>
+                </a:solidFill>
+                <a:latin typeface="Arial" pitchFamily="34" charset="0"/>
+                <a:ea typeface="Arial" pitchFamily="34" charset="-122"/>
+                <a:cs typeface="Arial" pitchFamily="34" charset="-120"/>
+              </a:rPr>
+              <a:t>73%  (3)</a:t>
+            </a:r>
+            <a:endParaRPr lang="en-US" sz="1500" dirty="0"/>
+          </a:p>
+        </p:txBody>
+      </p:sp>
+      <p:sp>
+        <p:nvSpPr>
+          <p:cNvPr id="14" name="Shape 11"/>
+          <p:cNvSpPr/>
+          <p:nvPr/>
+        </p:nvSpPr>
+        <p:spPr>
+          <a:xfrm>
+            <a:off x="7086600" y="3785616"/>
+            <a:ext cx="4279392" cy="0"/>
+          </a:xfrm>
+          <a:prstGeom prst="line">
+            <a:avLst/>
+          </a:prstGeom>
+          <a:noFill/>
+          <a:ln w="12700">
+            <a:solidFill>
+              <a:srgbClr val="E5E8EB"/>
+            </a:solidFill>
+            <a:prstDash val="solid"/>
+          </a:ln>
+        </p:spPr>
+      </p:sp>
+      <p:sp>
+        <p:nvSpPr>
+          <p:cNvPr id="15" name="Text 12"/>
+          <p:cNvSpPr/>
+          <p:nvPr/>
+        </p:nvSpPr>
+        <p:spPr>
+          <a:xfrm>
+            <a:off x="7086600" y="3858768"/>
+            <a:ext cx="2286000" cy="329184"/>
+          </a:xfrm>
+          <a:prstGeom prst="rect">
+            <a:avLst/>
+          </a:prstGeom>
+          <a:noFill/>
+          <a:ln/>
+        </p:spPr>
+        <p:txBody>
+          <a:bodyPr wrap="square" lIns="0" tIns="0" rIns="0" bIns="0" rtlCol="0" anchor="t"/>
+          <a:lstStyle/>
+          <a:p>
+            <a:pPr indent="0" marL="0">
+              <a:buNone/>
+            </a:pPr>
+            <a:r>
+              <a:rPr lang="en-US" sz="1300" b="1" dirty="0">
+                <a:solidFill>
+                  <a:srgbClr val="191F28"/>
+                </a:solidFill>
+                <a:latin typeface="Arial" pitchFamily="34" charset="0"/>
+                <a:ea typeface="Arial" pitchFamily="34" charset="-122"/>
+                <a:cs typeface="Arial" pitchFamily="34" charset="-120"/>
+              </a:rPr>
+              <a:t>6역할 · 한 회사 모델</a:t>
+            </a:r>
+            <a:endParaRPr lang="en-US" sz="1300" dirty="0"/>
+          </a:p>
+        </p:txBody>
+      </p:sp>
+      <p:sp>
+        <p:nvSpPr>
+          <p:cNvPr id="16" name="Text 13"/>
+          <p:cNvSpPr/>
+          <p:nvPr/>
+        </p:nvSpPr>
+        <p:spPr>
+          <a:xfrm>
+            <a:off x="9418320" y="3858768"/>
+            <a:ext cx="822960" cy="329184"/>
+          </a:xfrm>
+          <a:prstGeom prst="rect">
+            <a:avLst/>
+          </a:prstGeom>
+          <a:noFill/>
+          <a:ln/>
+        </p:spPr>
+        <p:txBody>
+          <a:bodyPr wrap="square" lIns="0" tIns="0" rIns="0" bIns="0" rtlCol="0" anchor="t"/>
+          <a:lstStyle/>
+          <a:p>
+            <a:pPr algn="r" indent="0" marL="0">
+              <a:buNone/>
+            </a:pPr>
+            <a:r>
+              <a:rPr lang="en-US" sz="1500" b="1" dirty="0">
+                <a:solidFill>
+                  <a:srgbClr val="191F28"/>
+                </a:solidFill>
+                <a:latin typeface="Arial" pitchFamily="34" charset="0"/>
+                <a:ea typeface="Arial" pitchFamily="34" charset="-122"/>
+                <a:cs typeface="Arial" pitchFamily="34" charset="-120"/>
+              </a:rPr>
+              <a:t>5/5</a:t>
+            </a:r>
+            <a:endParaRPr lang="en-US" sz="1500" dirty="0"/>
+          </a:p>
+        </p:txBody>
+      </p:sp>
+      <p:sp>
+        <p:nvSpPr>
+          <p:cNvPr id="17" name="Text 14"/>
+          <p:cNvSpPr/>
+          <p:nvPr/>
+        </p:nvSpPr>
+        <p:spPr>
+          <a:xfrm>
+            <a:off x="10287000" y="3858768"/>
+            <a:ext cx="1078992" cy="329184"/>
+          </a:xfrm>
+          <a:prstGeom prst="rect">
+            <a:avLst/>
+          </a:prstGeom>
+          <a:noFill/>
+          <a:ln/>
+        </p:spPr>
+        <p:txBody>
+          <a:bodyPr wrap="square" lIns="0" tIns="0" rIns="0" bIns="0" rtlCol="0" anchor="t"/>
+          <a:lstStyle/>
+          <a:p>
+            <a:pPr algn="r" indent="0" marL="0">
+              <a:buNone/>
+            </a:pPr>
+            <a:r>
+              <a:rPr lang="en-US" sz="1500" b="1" dirty="0">
                 <a:solidFill>
                   <a:srgbClr val="3182F6"/>
                 </a:solidFill>
@@ -11277,22 +11612,162 @@
                 <a:ea typeface="Arial" pitchFamily="34" charset="-122"/>
                 <a:cs typeface="Arial" pitchFamily="34" charset="-120"/>
               </a:rPr>
+              <a:t>100%  (0)</a:t>
+            </a:r>
+            <a:endParaRPr lang="en-US" sz="1500" dirty="0"/>
+          </a:p>
+        </p:txBody>
+      </p:sp>
+      <p:sp>
+        <p:nvSpPr>
+          <p:cNvPr id="18" name="Shape 15"/>
+          <p:cNvSpPr/>
+          <p:nvPr/>
+        </p:nvSpPr>
+        <p:spPr>
+          <a:xfrm>
+            <a:off x="7086600" y="4261104"/>
+            <a:ext cx="4279392" cy="0"/>
+          </a:xfrm>
+          <a:prstGeom prst="line">
+            <a:avLst/>
+          </a:prstGeom>
+          <a:noFill/>
+          <a:ln w="12700">
+            <a:solidFill>
+              <a:srgbClr val="E5E8EB"/>
+            </a:solidFill>
+            <a:prstDash val="solid"/>
+          </a:ln>
+        </p:spPr>
+      </p:sp>
+      <p:sp>
+        <p:nvSpPr>
+          <p:cNvPr id="19" name="Text 16"/>
+          <p:cNvSpPr/>
+          <p:nvPr/>
+        </p:nvSpPr>
+        <p:spPr>
+          <a:xfrm>
+            <a:off x="7086600" y="4334256"/>
+            <a:ext cx="2286000" cy="329184"/>
+          </a:xfrm>
+          <a:prstGeom prst="rect">
+            <a:avLst/>
+          </a:prstGeom>
+          <a:noFill/>
+          <a:ln/>
+        </p:spPr>
+        <p:txBody>
+          <a:bodyPr wrap="square" lIns="0" tIns="0" rIns="0" bIns="0" rtlCol="0" anchor="t"/>
+          <a:lstStyle/>
+          <a:p>
+            <a:pPr indent="0" marL="0">
+              <a:buNone/>
+            </a:pPr>
+            <a:r>
+              <a:rPr lang="en-US" sz="1300" b="1" dirty="0">
+                <a:solidFill>
+                  <a:srgbClr val="191F28"/>
+                </a:solidFill>
+                <a:latin typeface="Arial" pitchFamily="34" charset="0"/>
+                <a:ea typeface="Arial" pitchFamily="34" charset="-122"/>
+                <a:cs typeface="Arial" pitchFamily="34" charset="-120"/>
+              </a:rPr>
+              <a:t>6역할 · 3사 모델(현재)</a:t>
+            </a:r>
+            <a:endParaRPr lang="en-US" sz="1300" dirty="0"/>
+          </a:p>
+        </p:txBody>
+      </p:sp>
+      <p:sp>
+        <p:nvSpPr>
+          <p:cNvPr id="20" name="Text 17"/>
+          <p:cNvSpPr/>
+          <p:nvPr/>
+        </p:nvSpPr>
+        <p:spPr>
+          <a:xfrm>
+            <a:off x="9418320" y="4334256"/>
+            <a:ext cx="822960" cy="329184"/>
+          </a:xfrm>
+          <a:prstGeom prst="rect">
+            <a:avLst/>
+          </a:prstGeom>
+          <a:noFill/>
+          <a:ln/>
+        </p:spPr>
+        <p:txBody>
+          <a:bodyPr wrap="square" lIns="0" tIns="0" rIns="0" bIns="0" rtlCol="0" anchor="t"/>
+          <a:lstStyle/>
+          <a:p>
+            <a:pPr algn="r" indent="0" marL="0">
+              <a:buNone/>
+            </a:pPr>
+            <a:r>
+              <a:rPr lang="en-US" sz="1500" b="1" dirty="0">
+                <a:solidFill>
+                  <a:srgbClr val="191F28"/>
+                </a:solidFill>
+                <a:latin typeface="Arial" pitchFamily="34" charset="0"/>
+                <a:ea typeface="Arial" pitchFamily="34" charset="-122"/>
+                <a:cs typeface="Arial" pitchFamily="34" charset="-120"/>
+              </a:rPr>
               <a:t>4/5</a:t>
             </a:r>
-            <a:endParaRPr lang="en-US" sz="4400" dirty="0"/>
-          </a:p>
-        </p:txBody>
-      </p:sp>
-      <p:sp>
-        <p:nvSpPr>
-          <p:cNvPr id="9" name="Text 6"/>
-          <p:cNvSpPr/>
-          <p:nvPr/>
-        </p:nvSpPr>
-        <p:spPr>
-          <a:xfrm>
-            <a:off x="7406640" y="3794760"/>
-            <a:ext cx="3959352" cy="685800"/>
+            <a:endParaRPr lang="en-US" sz="1500" dirty="0"/>
+          </a:p>
+        </p:txBody>
+      </p:sp>
+      <p:sp>
+        <p:nvSpPr>
+          <p:cNvPr id="21" name="Text 18"/>
+          <p:cNvSpPr/>
+          <p:nvPr/>
+        </p:nvSpPr>
+        <p:spPr>
+          <a:xfrm>
+            <a:off x="10287000" y="4334256"/>
+            <a:ext cx="1078992" cy="329184"/>
+          </a:xfrm>
+          <a:prstGeom prst="rect">
+            <a:avLst/>
+          </a:prstGeom>
+          <a:noFill/>
+          <a:ln/>
+        </p:spPr>
+        <p:txBody>
+          <a:bodyPr wrap="square" lIns="0" tIns="0" rIns="0" bIns="0" rtlCol="0" anchor="t"/>
+          <a:lstStyle/>
+          <a:p>
+            <a:pPr algn="r" indent="0" marL="0">
+              <a:buNone/>
+            </a:pPr>
+            <a:r>
+              <a:rPr lang="en-US" sz="1500" b="1" dirty="0">
+                <a:solidFill>
+                  <a:srgbClr val="3182F6"/>
+                </a:solidFill>
+                <a:latin typeface="Arial" pitchFamily="34" charset="0"/>
+                <a:ea typeface="Arial" pitchFamily="34" charset="-122"/>
+                <a:cs typeface="Arial" pitchFamily="34" charset="-120"/>
+              </a:rPr>
+              <a:t>100%  (0)</a:t>
+            </a:r>
+            <a:endParaRPr lang="en-US" sz="1500" dirty="0"/>
+          </a:p>
+        </p:txBody>
+      </p:sp>
+      <p:sp>
+        <p:nvSpPr>
+          <p:cNvPr id="22" name="Text 19"/>
+          <p:cNvSpPr/>
+          <p:nvPr/>
+        </p:nvSpPr>
+        <p:spPr>
+          <a:xfrm>
+            <a:off x="7086600" y="4846320"/>
+            <a:ext cx="4279392" cy="566928"/>
           </a:xfrm>
           <a:prstGeom prst="rect">
             <a:avLst/>
@@ -11311,18 +11786,40 @@
               <a:buNone/>
             </a:pPr>
             <a:r>
-              <a:rPr lang="en-US" sz="1250" dirty="0">
-                <a:solidFill>
-                  <a:srgbClr val="8B95A1"/>
-                </a:solidFill>
-                <a:latin typeface="Arial" pitchFamily="34" charset="0"/>
-                <a:ea typeface="Arial" pitchFamily="34" charset="-122"/>
-                <a:cs typeface="Arial" pitchFamily="34" charset="-120"/>
-              </a:rPr>
-              <a:t>근거 블록을 하나씩 지운 초안 5개 중 짚은 수</a:t>
-            </a:r>
-            <a:endParaRPr lang="en-US" sz="1250" dirty="0"/>
-          </a:p>
+              <a:rPr lang="en-US" sz="1150" dirty="0">
+                <a:solidFill>
+                  <a:srgbClr val="4E5968"/>
+                </a:solidFill>
+                <a:latin typeface="Arial" pitchFamily="34" charset="0"/>
+                <a:ea typeface="Arial" pitchFamily="34" charset="-122"/>
+                <a:cs typeface="Arial" pitchFamily="34" charset="-120"/>
+              </a:rPr>
+              <a:t>역할 6개가 오탐을 없앴습니다. 회사 모델 섞기의 추가 효과는 이 표본(5개·각 1회)에선 확인 안 됨 — 섞는 이유는 가용성·국산 모델 선택지.</a:t>
+            </a:r>
+            <a:endParaRPr lang="en-US" sz="1150" dirty="0"/>
+          </a:p>
+        </p:txBody>
+      </p:sp>
+      <p:sp>
+        <p:nvSpPr>
+          <p:cNvPr id="23" name="Text 20"/>
+          <p:cNvSpPr/>
+          <p:nvPr/>
+        </p:nvSpPr>
+        <p:spPr>
+          <a:xfrm>
+            <a:off x="7086600" y="5532120"/>
+            <a:ext cx="4279392" cy="457200"/>
+          </a:xfrm>
+          <a:prstGeom prst="rect">
+            <a:avLst/>
+          </a:prstGeom>
+          <a:noFill/>
+          <a:ln/>
+        </p:spPr>
+        <p:txBody>
+          <a:bodyPr wrap="square" lIns="0" tIns="0" rIns="0" bIns="0" rtlCol="0" anchor="t"/>
+          <a:lstStyle/>
           <a:p>
             <a:pPr indent="0" marL="0">
               <a:lnSpc>
@@ -11331,57 +11828,15 @@
               <a:buNone/>
             </a:pPr>
             <a:r>
-              <a:rPr lang="en-US" sz="1250" dirty="0">
-                <a:solidFill>
-                  <a:srgbClr val="8B95A1"/>
-                </a:solidFill>
-                <a:latin typeface="Arial" pitchFamily="34" charset="0"/>
-                <a:ea typeface="Arial" pitchFamily="34" charset="-122"/>
-                <a:cs typeface="Arial" pitchFamily="34" charset="-120"/>
-              </a:rPr>
-              <a:t>짚은 곳의 정확도 100%</a:t>
-            </a:r>
-            <a:endParaRPr lang="en-US" sz="1250" dirty="0"/>
-          </a:p>
-        </p:txBody>
-      </p:sp>
-      <p:sp>
-        <p:nvSpPr>
-          <p:cNvPr id="10" name="Text 7"/>
-          <p:cNvSpPr/>
-          <p:nvPr/>
-        </p:nvSpPr>
-        <p:spPr>
-          <a:xfrm>
-            <a:off x="7406640" y="4434840"/>
-            <a:ext cx="3959352" cy="685800"/>
-          </a:xfrm>
-          <a:prstGeom prst="rect">
-            <a:avLst/>
-          </a:prstGeom>
-          <a:noFill/>
-          <a:ln/>
-        </p:spPr>
-        <p:txBody>
-          <a:bodyPr wrap="square" lIns="0" tIns="0" rIns="0" bIns="0" rtlCol="0" anchor="t"/>
-          <a:lstStyle/>
-          <a:p>
-            <a:pPr indent="0" marL="0">
-              <a:lnSpc>
-                <a:spcPct val="115000"/>
-              </a:lnSpc>
-              <a:buNone/>
-            </a:pPr>
-            <a:r>
-              <a:rPr lang="en-US" sz="1200" dirty="0">
-                <a:solidFill>
-                  <a:srgbClr val="4E5968"/>
-                </a:solidFill>
-                <a:latin typeface="Arial" pitchFamily="34" charset="0"/>
-                <a:ea typeface="Arial" pitchFamily="34" charset="-122"/>
-                <a:cs typeface="Arial" pitchFamily="34" charset="-120"/>
-              </a:rPr>
-              <a:t>첫 초안 세트 1~2/5 → 블록 재설계 후 결과(사전 등록 아님). 지운 초안 5개 중 3개만 근거 충족도가 원본(91.2)보다 낮음 — 판정은 총점이 아니라 「짚은 곳」.</a:t>
+              <a:rPr lang="en-US" sz="1200" b="1" dirty="0">
+                <a:solidFill>
+                  <a:srgbClr val="191F28"/>
+                </a:solidFill>
+                <a:latin typeface="Arial" pitchFamily="34" charset="0"/>
+                <a:ea typeface="Arial" pitchFamily="34" charset="-122"/>
+                <a:cs typeface="Arial" pitchFamily="34" charset="-120"/>
+              </a:rPr>
+              <a:t>③ 1건 채점 19초 — 평가위원 6/6명 응답(공고 파싱 제외)</a:t>
             </a:r>
             <a:endParaRPr lang="en-US" sz="1200" dirty="0"/>
           </a:p>
@@ -11389,49 +11844,7 @@
       </p:sp>
       <p:sp>
         <p:nvSpPr>
-          <p:cNvPr id="11" name="Text 8"/>
-          <p:cNvSpPr/>
-          <p:nvPr/>
-        </p:nvSpPr>
-        <p:spPr>
-          <a:xfrm>
-            <a:off x="7406640" y="5440680"/>
-            <a:ext cx="3959352" cy="502920"/>
-          </a:xfrm>
-          <a:prstGeom prst="rect">
-            <a:avLst/>
-          </a:prstGeom>
-          <a:noFill/>
-          <a:ln/>
-        </p:spPr>
-        <p:txBody>
-          <a:bodyPr wrap="square" lIns="0" tIns="0" rIns="0" bIns="0" rtlCol="0" anchor="t"/>
-          <a:lstStyle/>
-          <a:p>
-            <a:pPr indent="0" marL="0">
-              <a:lnSpc>
-                <a:spcPct val="115000"/>
-              </a:lnSpc>
-              <a:buNone/>
-            </a:pPr>
-            <a:r>
-              <a:rPr lang="en-US" sz="1200" b="1" dirty="0">
-                <a:solidFill>
-                  <a:srgbClr val="191F28"/>
-                </a:solidFill>
-                <a:latin typeface="Arial" pitchFamily="34" charset="0"/>
-                <a:ea typeface="Arial" pitchFamily="34" charset="-122"/>
-                <a:cs typeface="Arial" pitchFamily="34" charset="-120"/>
-              </a:rPr>
-              <a:t>③ 1건 채점 19초 — 평가위원 6/6명 응답(공고 파싱 제외)</a:t>
-            </a:r>
-            <a:endParaRPr lang="en-US" sz="1200" dirty="0"/>
-          </a:p>
-        </p:txBody>
-      </p:sp>
-      <p:sp>
-        <p:nvSpPr>
-          <p:cNvPr id="12" name="Text 9"/>
+          <p:cNvPr id="24" name="Text 21"/>
           <p:cNvSpPr/>
           <p:nvPr/>
         </p:nvSpPr>
@@ -11462,7 +11875,7 @@
                 <a:ea typeface="Arial" pitchFamily="34" charset="-122"/>
                 <a:cs typeface="Arial" pitchFamily="34" charset="-120"/>
               </a:rPr>
-              <a:t>정답표: 다른 모델(Claude)이 쪽마다 판독 · 파싱 주 엔진 gpt-4.1 · 추출 수는 정답보다 많음(145·194·37개 vs 39·58·26개) · 시연은 저장된 파싱 결과</a:t>
+              <a:t>정답표: 다른 모델(Claude)이 쪽마다 판독 · 파싱 주 엔진 gpt-4.1 · 추출 수는 정답보다 많음(91·121·39개 vs 39·58·26개) · 시연은 저장된 파싱 결과</a:t>
             </a:r>
             <a:endParaRPr lang="en-US" sz="1000" dirty="0"/>
           </a:p>
@@ -12453,7 +12866,7 @@
                 <a:ea typeface="Arial" pitchFamily="34" charset="-122"/>
                 <a:cs typeface="Arial" pitchFamily="34" charset="-120"/>
               </a:rPr>
-              <a:t>공고 파싱 요건 재현율 90%·97%·85%(심사표 이름·배점 100%) · 일부러 지운 초안 탐지 4/5 · 정밀도 100% — 8장</a:t>
+              <a:t>공고 파싱 요건 재현율 85%·93%·87%(심사표 이름·배점 100%) · 일부러 지운 초안 탐지 4/5 · 정밀도 100% — 8장</a:t>
             </a:r>
             <a:endParaRPr lang="en-US" sz="1300" dirty="0"/>
           </a:p>

--- a/deliver/deck/RFP-to-Fit_루미아.pptx
+++ b/deliver/deck/RFP-to-Fit_루미아.pptx
@@ -17,9 +17,10 @@
     <p:sldId id="265" r:id="rId11"/>
     <p:sldId id="266" r:id="rId12"/>
     <p:sldId id="267" r:id="rId13"/>
+    <p:sldId id="268" r:id="rId14"/>
   </p:sldIdLst>
   <p:notesMasterIdLst>
-    <p:notesMasterId r:id="rId14"/>
+    <p:notesMasterId r:id="rId15"/>
   </p:notesMasterIdLst>
   <p:sldSz cx="12192000" cy="6858000"/>
   <p:notesSz cx="6858000" cy="12192000"/>
@@ -513,7 +514,7 @@
           <a:p>
             <a:r>
               <a:rPr lang="en-US" dirty="0"/>
-              <a:t>[10초] 안녕하세요, 팀 루미아 김태걸입니다. 저희는 제안서를 대신 써 주는 AI가 아니라, 제출하기 전에 그 공고의 심사위원 눈으로 먼저 읽어 주는 에이전트를 만들었습니다.</a:t>
+              <a:t>[10초] 안녕하세요, 팀 루미아 김태걸입니다. 저희는 심사 결과를 맞히는 AI를 만들지 않았습니다. 공고가 요구하는데 내 초안에 근거가 없는 곳을, 제출 전에 원문으로 짚어 주는 에이전트를 만들었습니다.</a:t>
             </a:r>
             <a:endParaRPr lang="en-US" dirty="0"/>
           </a:p>
@@ -601,7 +602,7 @@
           <a:p>
             <a:r>
               <a:rPr lang="en-US" dirty="0"/>
-              <a:t>[25초] 이 대회 본선 심사표로 저희 예선 기획서를 먼저 채점했습니다. 항목 근거는 다 있었는데 여섯 명 중 3명이 보류했습니다. 이유는 목표치만 있고 실측이 없다, 구매 주체가 약하다, 검증 계획이 빠듯하다였습니다. 그래서 오늘 목표치 대신 실측치를, 첫 실증 대상을, 검증 가능한 과정을 가져왔습니다.</a:t>
+              <a:t>[20초] 평가위원이 정말 여러 명 필요한지 직접 쟀습니다. 근거를 일부러 지운 초안 5개에서 한 명짜리는 지운 곳을 다 짚었지만 안 지운 곳도 3곳 잘못 짚었습니다. 역할을 여섯으로 나누자 오탐이 0이 됐습니다. 세 회사 모델을 섞는 효과는 이 표본에선 확인되지 않았고, 그렇게 말씀드립니다. 섞는 이유는 가용성입니다.</a:t>
             </a:r>
             <a:endParaRPr lang="en-US" dirty="0"/>
           </a:p>
@@ -689,7 +690,7 @@
           <a:p>
             <a:r>
               <a:rPr lang="en-US" dirty="0"/>
-              <a:t>[20초] 같은 엔진이 세 시점으로 이어집니다. 지금은 연구자의 제출 전 셀프 점검이고, 첫 실증 목표는 전문기관의 접수 후 요건 사전검토, 그다음은 심사 중 평가위원에게 근거 위치를 띄워 주는 보조입니다. 실제 심사 의견 데이터는 평가기관에 있으니, 연계하면 가상 평가위원을 실제 유형으로 보정할 수 있습니다.</a:t>
+              <a:t>[20초] 이 대회 본선 심사표로 저희 예선 기획서를 먼저 검사했습니다. 결과를 예측한 게 아니라, 세 관점에서 걸리는 점을 받았습니다. 목표치만 있고 실측이 없다, 구매 주체가 약하다, 검증 계획이 빠듯하다. 그래서 오늘 실측치와 첫 실증 대상과 검증 가능한 과정을 가져왔습니다.</a:t>
             </a:r>
             <a:endParaRPr lang="en-US" dirty="0"/>
           </a:p>
@@ -777,7 +778,7 @@
           <a:p>
             <a:r>
               <a:rPr lang="en-US" dirty="0"/>
-              <a:t>[10초] 공고 링크 하나, 초안 하나. 심사위원 여섯 명이 먼저 읽어 드립니다. 화면의 주소에서 지금 직접 해 보실 수 있습니다. 감사합니다.</a:t>
+              <a:t>[15초] 같은 엔진이 세 시점으로 이어집니다. 지금은 연구자의 제출 전 셀프 점검이고, 첫 실증 목표는 전문기관의 접수 후 요건 사전검토, 그다음은 심사 중 평가위원에게 근거 위치를 띄워 주는 보조입니다. 실제 심사 의견 데이터는 평가기관에 있으니, 연계하면 가상 평가위원을 실제 유형으로 보정할 수 있습니다.</a:t>
             </a:r>
             <a:endParaRPr lang="en-US" dirty="0"/>
           </a:p>
@@ -801,6 +802,94 @@
             <a:fld id="{F7021451-1387-4CA6-816F-3879F97B5CBC}" type="slidenum">
               <a:rPr lang="en-US"/>
               <a:t>12</a:t>
+            </a:fld>
+            <a:endParaRPr lang="en-US"/>
+          </a:p>
+        </p:txBody>
+      </p:sp>
+    </p:spTree>
+    <p:extLst>
+      <p:ext uri="{BB962C8B-B14F-4D97-AF65-F5344CB8AC3E}">
+        <p14:creationId xmlns:p14="http://schemas.microsoft.com/office/powerpoint/2010/main" val="1024086991"/>
+      </p:ext>
+    </p:extLst>
+  </p:cSld>
+  <p:clrMapOvr>
+    <a:masterClrMapping/>
+  </p:clrMapOvr>
+</p:notes>
+</file>
+
+<file path=ppt/notesSlides/notesSlide13.xml><?xml version="1.0" encoding="utf-8"?>
+<p:notes xmlns:a="http://schemas.openxmlformats.org/drawingml/2006/main" xmlns:r="http://schemas.openxmlformats.org/officeDocument/2006/relationships" xmlns:p="http://schemas.openxmlformats.org/presentationml/2006/main">
+  <p:cSld>
+    <p:spTree>
+      <p:nvGrpSpPr>
+        <p:cNvPr id="1" name=""/>
+        <p:cNvGrpSpPr/>
+        <p:nvPr/>
+      </p:nvGrpSpPr>
+      <p:grpSpPr>
+        <a:xfrm>
+          <a:off x="0" y="0"/>
+          <a:ext cx="0" cy="0"/>
+          <a:chOff x="0" y="0"/>
+          <a:chExt cx="0" cy="0"/>
+        </a:xfrm>
+      </p:grpSpPr>
+      <p:sp>
+        <p:nvSpPr>
+          <p:cNvPr id="2" name="Slide Image Placeholder 1"/>
+          <p:cNvSpPr>
+            <a:spLocks noGrp="1" noRot="1" noChangeAspect="1"/>
+          </p:cNvSpPr>
+          <p:nvPr>
+            <p:ph type="sldImg"/>
+          </p:nvPr>
+        </p:nvSpPr>
+        <p:spPr/>
+      </p:sp>
+      <p:sp>
+        <p:nvSpPr>
+          <p:cNvPr id="3" name="Notes Placeholder 2"/>
+          <p:cNvSpPr>
+            <a:spLocks noGrp="1"/>
+          </p:cNvSpPr>
+          <p:nvPr>
+            <p:ph type="body" idx="1"/>
+          </p:nvPr>
+        </p:nvSpPr>
+        <p:spPr/>
+        <p:txBody>
+          <a:bodyPr/>
+          <a:lstStyle/>
+          <a:p>
+            <a:r>
+              <a:rPr lang="en-US" dirty="0"/>
+              <a:t>[10초] 공고 링크 하나, 초안 하나. 제출 전에 빈칸부터 짚어 드립니다. 화면의 주소에서 지금 직접 해 보실 수 있습니다. 감사합니다.</a:t>
+            </a:r>
+            <a:endParaRPr lang="en-US" dirty="0"/>
+          </a:p>
+        </p:txBody>
+      </p:sp>
+      <p:sp>
+        <p:nvSpPr>
+          <p:cNvPr id="4" name="Slide Number Placeholder 3"/>
+          <p:cNvSpPr>
+            <a:spLocks noGrp="1"/>
+          </p:cNvSpPr>
+          <p:nvPr>
+            <p:ph type="sldNum" sz="quarter" idx="10"/>
+          </p:nvPr>
+        </p:nvSpPr>
+        <p:spPr/>
+        <p:txBody>
+          <a:bodyPr/>
+          <a:lstStyle/>
+          <a:p>
+            <a:fld id="{F7021451-1387-4CA6-816F-3879F97B5CBC}" type="slidenum">
+              <a:rPr lang="en-US"/>
+              <a:t>13</a:t>
             </a:fld>
             <a:endParaRPr lang="en-US"/>
           </a:p>
@@ -953,7 +1042,7 @@
           <a:p>
             <a:r>
               <a:rPr lang="en-US" dirty="0"/>
-              <a:t>[30초] 어려운 점은 세 가지였습니다. 요건이 흩어져 있고, 심사위원마다 보는 게 다르고, AI가 심사하면 믿을 수 있느냐. 그래서 장치를 세 개 만들었습니다. 링크만 넣으면 공고문을 찾아 요건과 심사표를 쪽 번호와 함께 뽑고, 실제 심사위원 유형 여섯 명이 따로 채점하고, 칭찬에도 원문 인용을 요구해 코드가 대조합니다. 오른쪽 숫자는 전부 오늘 밤 직접 잰 값입니다.</a:t>
+              <a:t>[25초] 어려운 점은 세 가지였습니다. 요건이 흩어져 있고, 심사위원마다 보는 게 다르고, AI가 검사한 걸 믿을 수 있느냐. 그래서 링크만 넣으면 공고문을 찾아 요건과 심사표를 쪽 번호와 함께 뽑고, 실제 심사 경험에서 나온 관점 여섯 개로 나눠 근거를 찾게 하고, 칭찬에도 원문 인용을 요구해 코드가 대조합니다. 오른쪽 숫자는 오늘 밤 직접 잰 값입니다.</a:t>
             </a:r>
             <a:endParaRPr lang="en-US" dirty="0"/>
           </a:p>
@@ -1041,7 +1130,7 @@
           <a:p>
             <a:r>
               <a:rPr lang="en-US" dirty="0"/>
-              <a:t>[35초] 연구자가 할 일은 두 번의 붙여넣기입니다. 공고 링크를 넣으면 공지에 붙은 첨부 중 공고문을 알아서 골라 읽고, 내 초안을 올리면 개인정보를 가린 뒤 여섯 명에게 보냅니다. 약 45초 뒤 모두가 깎은 곳, 의견이 갈린 곳, 그리고 평가위원별로 선정인지 보류인지와 그 이유가 나옵니다. 보완은 문장을 써 주지 않고, 어떤 근거를 어느 절에 넣을지만 알려 줍니다.</a:t>
+              <a:t>[35초] 연구자가 할 일은 두 번의 붙여넣기입니다. 공고 링크를 넣으면 공지에 붙은 첨부 중 공고문을 알아서 골라 읽고, 내 초안을 올리면 개인정보를 가린 뒤 여섯 명에게 보냅니다. 약 45초 뒤 모든 관점이 근거를 못 찾은 곳, 의견이 갈린 곳, 관점마다 가장 걸리는 점이 나옵니다. 보완은 문장을 써 주지 않고, 어떤 근거를 어느 절에 넣을지만 알려 줍니다.</a:t>
             </a:r>
             <a:endParaRPr lang="en-US" dirty="0"/>
           </a:p>
@@ -1129,7 +1218,7 @@
           <a:p>
             <a:r>
               <a:rPr lang="en-US" dirty="0"/>
-              <a:t>[25초] 역할을 나눴습니다. 사람은 세 가지만 판단합니다. 어떤 공고에 낼지, 의견이 갈린 곳을 고칠지, 그리고 문장을 직접 씁니다. AI는 생성만 합니다. 공고 파싱과 점검 질문은 주 엔진이, 판정은 세 회사 모델의 평가위원 여섯 명이 합니다. 규칙은 코드로 검사합니다. 인용이 초안에 글자 그대로 있는지, 몇 명이 깎았는지로 합의와 논쟁을 나누고, 개인정보는 보내기 전에 가립니다.</a:t>
+              <a:t>[25초] 역할을 나눴습니다. 사람은 세 가지만 판단합니다. 어떤 공고에 낼지, 의견이 갈린 곳을 고칠지, 그리고 문장을 직접 씁니다. AI는 생성만 합니다. 공고 파싱과 점검 질문은 주 엔진이, 관점별 근거 찾기는 세 회사 모델에 나눈 여섯 관점이 합니다. 규칙은 코드로 검사합니다. 인용이 초안에 글자 그대로 있는지, 몇 관점이 근거를 못 찾았는지로 합의와 논쟁을 나누고, 개인정보는 보내기 전에 가립니다.</a:t>
             </a:r>
             <a:endParaRPr lang="en-US" dirty="0"/>
           </a:p>
@@ -1217,7 +1306,7 @@
           <a:p>
             <a:r>
               <a:rPr lang="en-US" dirty="0"/>
-              <a:t>[25초] 흐름은 LangGraph 상태 그래프 한 장입니다. 점검 질문, 선행 탐색, 여섯 명 병렬 채점까지 가고, 인용 검사에서 원문에 없는 판정이 있으면 그 평가위원에게만 한 번 되돌아가 다시 묻습니다. 없으면 바로 집계로 갑니다. 한 회사 모델이 한도에 걸리거나 멈추면 다음 모델로 자동으로 넘어가고, 실제로 판정한 모델은 기록에 남깁니다.</a:t>
+              <a:t>[25초] 저희 구조의 핵심은 LLM을 판사로 쓰지 않는다는 겁니다. LLM은 증인처럼 증거, 즉 원문 인용만 냅니다. 채택할지, 몇 관점이 동의했는지, 판정을 보류할지는 결정론 코드가 정합니다. 흐름은 LangGraph 상태 그래프 한 장입니다. 점검 질문, 선행 탐색, 여섯 명 병렬 채점까지 가고, 인용 검사에서 원문에 없는 판정이 있으면 그 평가위원에게만 한 번 되돌아가 다시 묻습니다. 없으면 바로 집계로 갑니다. 한 회사 모델이 한도에 걸리거나 멈추면 다음 모델로 자동으로 넘어가고, 실제로 판정한 모델은 기록에 남깁니다.</a:t>
             </a:r>
             <a:endParaRPr lang="en-US" dirty="0"/>
           </a:p>
@@ -1305,7 +1394,7 @@
           <a:p>
             <a:r>
               <a:rPr lang="en-US" dirty="0"/>
-              <a:t>[25초] 검사 도구 두 개를 MCP 서버로 감쌌습니다. 선행연구 검색과 인용 검사입니다. 실제로 다른 AI 비서인 Codex에 이 서버를 붙여 호출해 봤고, 원문에 있는 인용은 참, 없는 인용은 거짓이 나왔습니다. OpenAlex를 쓴 이유는 무료이고 키가 필요 없어서인데, 오늘 밤 실측 중에 OpenAlex가 장애를 냈고 도구 뒤에서 Crossref로 바뀌었습니다. MCP로 감싼 이유가 바로 이겁니다. 국내 DB도 같은 자리에 꽂으면 됩니다.</a:t>
+              <a:t>[25초] 심사위원의 판단엔 정답이 없습니다. 그래서 저희는 심사 결과를 맞힌다고 주장하지 않습니다. 대신 신뢰를 네 가지로 정의했습니다. 모든 지적은 공고 원문과 초안 원문 두 끝에 묶여 바로 확인할 수 있고, 원문에 없는 인용은 코드가 걸러내고, 관점이 갈리면 판정하지 않고 사람에게 넘기고, 잴 수 있는 것만 숫자로 말합니다.</a:t>
             </a:r>
             <a:endParaRPr lang="en-US" dirty="0"/>
           </a:p>
@@ -1393,7 +1482,7 @@
           <a:p>
             <a:r>
               <a:rPr lang="en-US" dirty="0"/>
-              <a:t>[30초] 예시 공고에만 맞춘 게 아닌지 의심하실 수 있어서, 개발에 한 번도 안 쓴 과기정통부 공고 두 건을 링크로 새로 가져와 쟀습니다. 정답표는 측정 전에 먼저 커밋해 고정했습니다. 국가과학자 공모는 평균 94%, 라이징스타는 78%였고, 심사표 배점은 둘 다 100% 맞혔습니다. 라이징스타에서 놓친 건 대부분 주석 속 조건이어서 규칙 한 줄을 넣었고, 이건 블라인드 숫자와 따로 표기했습니다.</a:t>
+              <a:t>[20초] 검사 도구 두 개를 MCP 서버로 감쌌습니다. 선행연구 검색과 인용 검사입니다. 실제로 다른 AI 비서인 Codex에 이 서버를 붙여 호출해 봤고, 원문에 있는 인용은 참, 없는 인용은 거짓이 나왔습니다. OpenAlex를 쓴 이유는 무료이고 키가 필요 없어서인데, 오늘 밤 실측 중에 OpenAlex가 장애를 냈고 도구 뒤에서 Crossref로 바뀌었습니다. MCP로 감싼 이유가 바로 이겁니다. 국내 DB도 같은 자리에 꽂으면 됩니다.</a:t>
             </a:r>
             <a:endParaRPr lang="en-US" dirty="0"/>
           </a:p>
@@ -1481,7 +1570,7 @@
           <a:p>
             <a:r>
               <a:rPr lang="en-US" dirty="0"/>
-              <a:t>[25초] 평가위원이 정말 여러 명 필요한지 직접 쟀습니다. 근거를 일부러 지운 초안 5개에서 한 명짜리는 지운 곳을 다 짚었지만 안 지운 곳도 3곳 잘못 짚었습니다. 역할을 여섯으로 나누자 오탐이 0이 됐습니다. 세 회사 모델을 섞는 효과는 이 표본에선 확인되지 않았고, 그렇게 말씀드립니다. 섞는 이유는 가용성입니다.</a:t>
+              <a:t>[25초] 예시 공고에만 맞춘 게 아닌지 의심하실 수 있어서, 개발에 한 번도 안 쓴 과기정통부 공고 두 건을 링크로 새로 가져와 쟀습니다. 정답표는 측정 전에 먼저 커밋해 고정했습니다. 국가과학자 공모는 평균 94%, 라이징스타는 78%였고, 심사표 배점은 둘 다 100% 맞혔습니다. 라이징스타에서 놓친 건 대부분 주석 속 조건이어서 규칙 한 줄을 넣었고, 이건 블라인드 숫자와 따로 표기했습니다.</a:t>
             </a:r>
             <a:endParaRPr lang="en-US" dirty="0"/>
           </a:p>
@@ -1949,7 +2038,7 @@
                 <a:ea typeface="Arial" pitchFamily="34" charset="-122"/>
                 <a:cs typeface="Arial" pitchFamily="34" charset="-120"/>
               </a:rPr>
-              <a:t>심사위원 여섯 명이 </a:t>
+              <a:t>제출 전에 </a:t>
             </a:r>
             <a:pPr indent="0" marL="0">
               <a:lnSpc>
@@ -1966,7 +2055,7 @@
                 <a:ea typeface="Arial" pitchFamily="34" charset="-122"/>
                 <a:cs typeface="Arial" pitchFamily="34" charset="-120"/>
               </a:rPr>
-              <a:t>먼저</a:t>
+              <a:t>빈칸</a:t>
             </a:r>
             <a:pPr indent="0" marL="0">
               <a:lnSpc>
@@ -1983,7 +2072,7 @@
                 <a:ea typeface="Arial" pitchFamily="34" charset="-122"/>
                 <a:cs typeface="Arial" pitchFamily="34" charset="-120"/>
               </a:rPr>
-              <a:t> 읽어 드립니다.</a:t>
+              <a:t>부터 짚어 드립니다.</a:t>
             </a:r>
             <a:endParaRPr lang="en-US" sz="4800" dirty="0"/>
           </a:p>
@@ -2022,7 +2111,7 @@
                 <a:ea typeface="Arial" pitchFamily="34" charset="-122"/>
                 <a:cs typeface="Arial" pitchFamily="34" charset="-120"/>
               </a:rPr>
-              <a:t>국가 R&amp;D 제안서를 제출 전에, 그 공고의 실제 심사표와 실제 심사위원 유형으로 채점하는 에이전트</a:t>
+              <a:t>심사 결과를 맞히는 AI가 아니라 — 공고가 요구하는데 내 초안에 근거가 없는 곳을, 원문으로 짚어 주는 에이전트</a:t>
             </a:r>
             <a:endParaRPr lang="en-US" sz="1900" dirty="0"/>
           </a:p>
@@ -2132,7 +2221,7 @@
                 <a:ea typeface="Arial" pitchFamily="34" charset="-122"/>
                 <a:cs typeface="Arial" pitchFamily="34" charset="-120"/>
               </a:rPr>
-              <a:t>우리 자신에게 먼저 — 이 대회 본선 심사표로 예선 기획서를</a:t>
+              <a:t>제거 실험 — 관점을 여러 개로 나눌 필요가 있나</a:t>
             </a:r>
             <a:endParaRPr lang="en-US" sz="1400" dirty="0"/>
           </a:p>
@@ -2166,7 +2255,7 @@
               <a:buNone/>
             </a:pPr>
             <a:r>
-              <a:rPr lang="en-US" sz="3100" b="1" dirty="0">
+              <a:rPr lang="en-US" sz="3400" b="1" dirty="0">
                 <a:solidFill>
                   <a:srgbClr val="191F28"/>
                 </a:solidFill>
@@ -2174,9 +2263,9 @@
                 <a:ea typeface="Arial" pitchFamily="34" charset="-122"/>
                 <a:cs typeface="Arial" pitchFamily="34" charset="-120"/>
               </a:rPr>
-              <a:t>항목 근거는 다 있었는데 3명이 보류했고,</a:t>
-            </a:r>
-            <a:endParaRPr lang="en-US" sz="3100" dirty="0"/>
+              <a:t>관점 하나로는 엉뚱한 곳도 짚고,</a:t>
+            </a:r>
+            <a:endParaRPr lang="en-US" sz="3400" dirty="0"/>
           </a:p>
           <a:p>
             <a:pPr indent="0" marL="0">
@@ -2186,15 +2275,15 @@
               <a:buNone/>
             </a:pPr>
             <a:r>
-              <a:rPr lang="en-US" sz="3100" b="1" dirty="0">
-                <a:solidFill>
-                  <a:srgbClr val="191F28"/>
-                </a:solidFill>
-                <a:latin typeface="Arial" pitchFamily="34" charset="0"/>
-                <a:ea typeface="Arial" pitchFamily="34" charset="-122"/>
-                <a:cs typeface="Arial" pitchFamily="34" charset="-120"/>
-              </a:rPr>
-              <a:t>그 </a:t>
+              <a:rPr lang="en-US" sz="3400" b="1" dirty="0">
+                <a:solidFill>
+                  <a:srgbClr val="3182F6"/>
+                </a:solidFill>
+                <a:latin typeface="Arial" pitchFamily="34" charset="0"/>
+                <a:ea typeface="Arial" pitchFamily="34" charset="-122"/>
+                <a:cs typeface="Arial" pitchFamily="34" charset="-120"/>
+              </a:rPr>
+              <a:t>역할을 나누면</a:t>
             </a:r>
             <a:pPr indent="0" marL="0">
               <a:lnSpc>
@@ -2203,24 +2292,7 @@
               <a:buNone/>
             </a:pPr>
             <a:r>
-              <a:rPr lang="en-US" sz="3100" b="1" dirty="0">
-                <a:solidFill>
-                  <a:srgbClr val="3182F6"/>
-                </a:solidFill>
-                <a:latin typeface="Arial" pitchFamily="34" charset="0"/>
-                <a:ea typeface="Arial" pitchFamily="34" charset="-122"/>
-                <a:cs typeface="Arial" pitchFamily="34" charset="-120"/>
-              </a:rPr>
-              <a:t>이유</a:t>
-            </a:r>
-            <a:pPr indent="0" marL="0">
-              <a:lnSpc>
-                <a:spcPct val="112000"/>
-              </a:lnSpc>
-              <a:buNone/>
-            </a:pPr>
-            <a:r>
-              <a:rPr lang="en-US" sz="3100" b="1" dirty="0">
+              <a:rPr lang="en-US" sz="3400" b="1" dirty="0">
                 <a:solidFill>
                   <a:srgbClr val="191F28"/>
                 </a:solidFill>
@@ -2228,9 +2300,9 @@
                 <a:ea typeface="Arial" pitchFamily="34" charset="-122"/>
                 <a:cs typeface="Arial" pitchFamily="34" charset="-120"/>
               </a:rPr>
-              <a:t>가 오늘의 준비물이 됐습니다</a:t>
-            </a:r>
-            <a:endParaRPr lang="en-US" sz="3100" dirty="0"/>
+              <a:t> 오탐이 사라졌습니다</a:t>
+            </a:r>
+            <a:endParaRPr lang="en-US" sz="3400" dirty="0"/>
           </a:p>
         </p:txBody>
       </p:sp>
@@ -2243,85 +2315,7 @@
         <p:spPr>
           <a:xfrm>
             <a:off x="822960" y="2606040"/>
-            <a:ext cx="5486400" cy="274320"/>
-          </a:xfrm>
-          <a:prstGeom prst="rect">
-            <a:avLst/>
-          </a:prstGeom>
-          <a:noFill/>
-          <a:ln/>
-        </p:spPr>
-        <p:txBody>
-          <a:bodyPr wrap="square" lIns="0" tIns="0" rIns="0" bIns="0" rtlCol="0" anchor="t"/>
-          <a:lstStyle/>
-          <a:p>
-            <a:pPr indent="0" marL="0">
-              <a:buNone/>
-            </a:pPr>
-            <a:r>
-              <a:rPr lang="en-US" sz="1250" b="1" dirty="0">
-                <a:solidFill>
-                  <a:srgbClr val="3182F6"/>
-                </a:solidFill>
-                <a:latin typeface="Arial" pitchFamily="34" charset="0"/>
-                <a:ea typeface="Arial" pitchFamily="34" charset="-122"/>
-                <a:cs typeface="Arial" pitchFamily="34" charset="-120"/>
-              </a:rPr>
-              <a:t>보류한 평가위원의 결정 포인트(원문)</a:t>
-            </a:r>
-            <a:endParaRPr lang="en-US" sz="1250" dirty="0"/>
-          </a:p>
-        </p:txBody>
-      </p:sp>
-      <p:sp>
-        <p:nvSpPr>
-          <p:cNvPr id="5" name="Text 3"/>
-          <p:cNvSpPr/>
-          <p:nvPr/>
-        </p:nvSpPr>
-        <p:spPr>
-          <a:xfrm>
-            <a:off x="6720840" y="2606040"/>
-            <a:ext cx="4572000" cy="274320"/>
-          </a:xfrm>
-          <a:prstGeom prst="rect">
-            <a:avLst/>
-          </a:prstGeom>
-          <a:noFill/>
-          <a:ln/>
-        </p:spPr>
-        <p:txBody>
-          <a:bodyPr wrap="square" lIns="0" tIns="0" rIns="0" bIns="0" rtlCol="0" anchor="t"/>
-          <a:lstStyle/>
-          <a:p>
-            <a:pPr indent="0" marL="0">
-              <a:buNone/>
-            </a:pPr>
-            <a:r>
-              <a:rPr lang="en-US" sz="1250" b="1" dirty="0">
-                <a:solidFill>
-                  <a:srgbClr val="3182F6"/>
-                </a:solidFill>
-                <a:latin typeface="Arial" pitchFamily="34" charset="0"/>
-                <a:ea typeface="Arial" pitchFamily="34" charset="-122"/>
-                <a:cs typeface="Arial" pitchFamily="34" charset="-120"/>
-              </a:rPr>
-              <a:t>그래서 오늘 가져온 것</a:t>
-            </a:r>
-            <a:endParaRPr lang="en-US" sz="1250" dirty="0"/>
-          </a:p>
-        </p:txBody>
-      </p:sp>
-      <p:sp>
-        <p:nvSpPr>
-          <p:cNvPr id="6" name="Text 4"/>
-          <p:cNvSpPr/>
-          <p:nvPr/>
-        </p:nvSpPr>
-        <p:spPr>
-          <a:xfrm>
-            <a:off x="822960" y="3017520"/>
-            <a:ext cx="5486400" cy="274320"/>
+            <a:ext cx="10543032" cy="292608"/>
           </a:xfrm>
           <a:prstGeom prst="rect">
             <a:avLst/>
@@ -2339,13 +2333,13 @@
             <a:r>
               <a:rPr lang="en-US" sz="1300" b="1" dirty="0">
                 <a:solidFill>
-                  <a:srgbClr val="191F28"/>
-                </a:solidFill>
-                <a:latin typeface="Arial" pitchFamily="34" charset="0"/>
-                <a:ea typeface="Arial" pitchFamily="34" charset="-122"/>
-                <a:cs typeface="Arial" pitchFamily="34" charset="-120"/>
-              </a:rPr>
-              <a:t>세부 전문형</a:t>
+                  <a:srgbClr val="4E5968"/>
+                </a:solidFill>
+                <a:latin typeface="Arial" pitchFamily="34" charset="0"/>
+                <a:ea typeface="Arial" pitchFamily="34" charset="-122"/>
+                <a:cs typeface="Arial" pitchFamily="34" charset="-120"/>
+              </a:rPr>
+              <a:t>근거 블록을 일부러 하나씩 지운 초안 5개(예선 심사표) — 지운 곳을 짚었나, 안 지운 곳을 잘못 짚었나</a:t>
             </a:r>
             <a:endParaRPr lang="en-US" sz="1300" dirty="0"/>
           </a:p>
@@ -2353,421 +2347,23 @@
       </p:sp>
       <p:sp>
         <p:nvSpPr>
-          <p:cNvPr id="7" name="Text 5"/>
-          <p:cNvSpPr/>
-          <p:nvPr/>
-        </p:nvSpPr>
-        <p:spPr>
-          <a:xfrm>
-            <a:off x="822960" y="3310128"/>
-            <a:ext cx="5486400" cy="548640"/>
-          </a:xfrm>
-          <a:prstGeom prst="rect">
-            <a:avLst/>
-          </a:prstGeom>
-          <a:noFill/>
-          <a:ln/>
-        </p:spPr>
-        <p:txBody>
-          <a:bodyPr wrap="square" lIns="0" tIns="0" rIns="0" bIns="0" rtlCol="0" anchor="t"/>
-          <a:lstStyle/>
-          <a:p>
-            <a:pPr indent="0" marL="0">
-              <a:lnSpc>
-                <a:spcPct val="112000"/>
-              </a:lnSpc>
-              <a:buNone/>
-            </a:pPr>
-            <a:r>
-              <a:rPr lang="en-US" sz="1150" dirty="0">
-                <a:solidFill>
-                  <a:srgbClr val="4E5968"/>
-                </a:solidFill>
-                <a:latin typeface="Arial" pitchFamily="34" charset="0"/>
-                <a:ea typeface="Arial" pitchFamily="34" charset="-122"/>
-                <a:cs typeface="Arial" pitchFamily="34" charset="-120"/>
-              </a:rPr>
-              <a:t>“정확도 목표(90% 재현율, 80% 정밀도)가 실제 구현 없이 목표치만 제시되어 구체성 부족”</a:t>
-            </a:r>
-            <a:endParaRPr lang="en-US" sz="1150" dirty="0"/>
-          </a:p>
-        </p:txBody>
-      </p:sp>
-      <p:sp>
-        <p:nvSpPr>
-          <p:cNvPr id="8" name="Shape 6"/>
-          <p:cNvSpPr/>
-          <p:nvPr/>
-        </p:nvSpPr>
-        <p:spPr>
-          <a:xfrm>
-            <a:off x="6400800" y="3337560"/>
-            <a:ext cx="228600" cy="0"/>
-          </a:xfrm>
-          <a:prstGeom prst="line">
-            <a:avLst/>
-          </a:prstGeom>
-          <a:noFill/>
-          <a:ln w="15875">
-            <a:solidFill>
-              <a:srgbClr val="3182F6"/>
-            </a:solidFill>
-            <a:prstDash val="solid"/>
-            <a:tailEnd type="triangle"/>
-          </a:ln>
-        </p:spPr>
-      </p:sp>
-      <p:sp>
-        <p:nvSpPr>
-          <p:cNvPr id="9" name="Text 7"/>
-          <p:cNvSpPr/>
-          <p:nvPr/>
-        </p:nvSpPr>
-        <p:spPr>
-          <a:xfrm>
-            <a:off x="6720840" y="3127248"/>
-            <a:ext cx="4645152" cy="548640"/>
-          </a:xfrm>
-          <a:prstGeom prst="rect">
-            <a:avLst/>
-          </a:prstGeom>
-          <a:noFill/>
-          <a:ln/>
-        </p:spPr>
-        <p:txBody>
-          <a:bodyPr wrap="square" lIns="0" tIns="0" rIns="0" bIns="0" rtlCol="0" anchor="t"/>
-          <a:lstStyle/>
-          <a:p>
-            <a:pPr indent="0" marL="0">
-              <a:lnSpc>
-                <a:spcPct val="112000"/>
-              </a:lnSpc>
-              <a:buNone/>
-            </a:pPr>
-            <a:r>
-              <a:rPr lang="en-US" sz="1300" b="1" dirty="0">
-                <a:solidFill>
-                  <a:srgbClr val="1B64DA"/>
-                </a:solidFill>
-                <a:latin typeface="Arial" pitchFamily="34" charset="0"/>
-                <a:ea typeface="Arial" pitchFamily="34" charset="-122"/>
-                <a:cs typeface="Arial" pitchFamily="34" charset="-120"/>
-              </a:rPr>
-              <a:t>목표치 대신 실측치 — 처음 보는 공고 재현율·제거 실험(8·9장)</a:t>
-            </a:r>
-            <a:endParaRPr lang="en-US" sz="1300" dirty="0"/>
-          </a:p>
-        </p:txBody>
-      </p:sp>
-      <p:sp>
-        <p:nvSpPr>
-          <p:cNvPr id="10" name="Text 8"/>
-          <p:cNvSpPr/>
-          <p:nvPr/>
-        </p:nvSpPr>
-        <p:spPr>
-          <a:xfrm>
-            <a:off x="822960" y="3977640"/>
-            <a:ext cx="5486400" cy="274320"/>
-          </a:xfrm>
-          <a:prstGeom prst="rect">
-            <a:avLst/>
-          </a:prstGeom>
-          <a:noFill/>
-          <a:ln/>
-        </p:spPr>
-        <p:txBody>
-          <a:bodyPr wrap="square" lIns="0" tIns="0" rIns="0" bIns="0" rtlCol="0" anchor="t"/>
-          <a:lstStyle/>
-          <a:p>
-            <a:pPr indent="0" marL="0">
-              <a:buNone/>
-            </a:pPr>
-            <a:r>
-              <a:rPr lang="en-US" sz="1300" b="1" dirty="0">
-                <a:solidFill>
-                  <a:srgbClr val="191F28"/>
-                </a:solidFill>
-                <a:latin typeface="Arial" pitchFamily="34" charset="0"/>
-                <a:ea typeface="Arial" pitchFamily="34" charset="-122"/>
-                <a:cs typeface="Arial" pitchFamily="34" charset="-120"/>
-              </a:rPr>
-              <a:t>사업성·시장형</a:t>
-            </a:r>
-            <a:endParaRPr lang="en-US" sz="1300" dirty="0"/>
-          </a:p>
-        </p:txBody>
-      </p:sp>
-      <p:sp>
-        <p:nvSpPr>
-          <p:cNvPr id="11" name="Text 9"/>
-          <p:cNvSpPr/>
-          <p:nvPr/>
-        </p:nvSpPr>
-        <p:spPr>
-          <a:xfrm>
-            <a:off x="822960" y="4270248"/>
-            <a:ext cx="5486400" cy="548640"/>
-          </a:xfrm>
-          <a:prstGeom prst="rect">
-            <a:avLst/>
-          </a:prstGeom>
-          <a:noFill/>
-          <a:ln/>
-        </p:spPr>
-        <p:txBody>
-          <a:bodyPr wrap="square" lIns="0" tIns="0" rIns="0" bIns="0" rtlCol="0" anchor="t"/>
-          <a:lstStyle/>
-          <a:p>
-            <a:pPr indent="0" marL="0">
-              <a:lnSpc>
-                <a:spcPct val="112000"/>
-              </a:lnSpc>
-              <a:buNone/>
-            </a:pPr>
-            <a:r>
-              <a:rPr lang="en-US" sz="1150" dirty="0">
-                <a:solidFill>
-                  <a:srgbClr val="4E5968"/>
-                </a:solidFill>
-                <a:latin typeface="Arial" pitchFamily="34" charset="0"/>
-                <a:ea typeface="Arial" pitchFamily="34" charset="-122"/>
-                <a:cs typeface="Arial" pitchFamily="34" charset="-120"/>
-              </a:rPr>
-              <a:t>“시장성은 있으나 실증·구매주체가 아직 약함”</a:t>
-            </a:r>
-            <a:endParaRPr lang="en-US" sz="1150" dirty="0"/>
-          </a:p>
-        </p:txBody>
-      </p:sp>
-      <p:sp>
-        <p:nvSpPr>
-          <p:cNvPr id="12" name="Shape 10"/>
-          <p:cNvSpPr/>
-          <p:nvPr/>
-        </p:nvSpPr>
-        <p:spPr>
-          <a:xfrm>
-            <a:off x="6400800" y="4297680"/>
-            <a:ext cx="228600" cy="0"/>
-          </a:xfrm>
-          <a:prstGeom prst="line">
-            <a:avLst/>
-          </a:prstGeom>
-          <a:noFill/>
-          <a:ln w="15875">
-            <a:solidFill>
-              <a:srgbClr val="3182F6"/>
-            </a:solidFill>
-            <a:prstDash val="solid"/>
-            <a:tailEnd type="triangle"/>
-          </a:ln>
-        </p:spPr>
-      </p:sp>
-      <p:sp>
-        <p:nvSpPr>
-          <p:cNvPr id="13" name="Text 11"/>
-          <p:cNvSpPr/>
-          <p:nvPr/>
-        </p:nvSpPr>
-        <p:spPr>
-          <a:xfrm>
-            <a:off x="6720840" y="4087368"/>
-            <a:ext cx="4645152" cy="548640"/>
-          </a:xfrm>
-          <a:prstGeom prst="rect">
-            <a:avLst/>
-          </a:prstGeom>
-          <a:noFill/>
-          <a:ln/>
-        </p:spPr>
-        <p:txBody>
-          <a:bodyPr wrap="square" lIns="0" tIns="0" rIns="0" bIns="0" rtlCol="0" anchor="t"/>
-          <a:lstStyle/>
-          <a:p>
-            <a:pPr indent="0" marL="0">
-              <a:lnSpc>
-                <a:spcPct val="112000"/>
-              </a:lnSpc>
-              <a:buNone/>
-            </a:pPr>
-            <a:r>
-              <a:rPr lang="en-US" sz="1300" b="1" dirty="0">
-                <a:solidFill>
-                  <a:srgbClr val="1B64DA"/>
-                </a:solidFill>
-                <a:latin typeface="Arial" pitchFamily="34" charset="0"/>
-                <a:ea typeface="Arial" pitchFamily="34" charset="-122"/>
-                <a:cs typeface="Arial" pitchFamily="34" charset="-120"/>
-              </a:rPr>
-              <a:t>첫 실증 대상 — 전문기관 접수 후 요건 사전검토(11장)</a:t>
-            </a:r>
-            <a:endParaRPr lang="en-US" sz="1300" dirty="0"/>
-          </a:p>
-        </p:txBody>
-      </p:sp>
-      <p:sp>
-        <p:nvSpPr>
-          <p:cNvPr id="14" name="Text 12"/>
-          <p:cNvSpPr/>
-          <p:nvPr/>
-        </p:nvSpPr>
-        <p:spPr>
-          <a:xfrm>
-            <a:off x="822960" y="4937760"/>
-            <a:ext cx="5486400" cy="274320"/>
-          </a:xfrm>
-          <a:prstGeom prst="rect">
-            <a:avLst/>
-          </a:prstGeom>
-          <a:noFill/>
-          <a:ln/>
-        </p:spPr>
-        <p:txBody>
-          <a:bodyPr wrap="square" lIns="0" tIns="0" rIns="0" bIns="0" rtlCol="0" anchor="t"/>
-          <a:lstStyle/>
-          <a:p>
-            <a:pPr indent="0" marL="0">
-              <a:buNone/>
-            </a:pPr>
-            <a:r>
-              <a:rPr lang="en-US" sz="1300" b="1" dirty="0">
-                <a:solidFill>
-                  <a:srgbClr val="191F28"/>
-                </a:solidFill>
-                <a:latin typeface="Arial" pitchFamily="34" charset="0"/>
-                <a:ea typeface="Arial" pitchFamily="34" charset="-122"/>
-                <a:cs typeface="Arial" pitchFamily="34" charset="-120"/>
-              </a:rPr>
-              <a:t>행정·관리형</a:t>
-            </a:r>
-            <a:endParaRPr lang="en-US" sz="1300" dirty="0"/>
-          </a:p>
-        </p:txBody>
-      </p:sp>
-      <p:sp>
-        <p:nvSpPr>
-          <p:cNvPr id="15" name="Text 13"/>
-          <p:cNvSpPr/>
-          <p:nvPr/>
-        </p:nvSpPr>
-        <p:spPr>
-          <a:xfrm>
-            <a:off x="822960" y="5230368"/>
-            <a:ext cx="5486400" cy="548640"/>
-          </a:xfrm>
-          <a:prstGeom prst="rect">
-            <a:avLst/>
-          </a:prstGeom>
-          <a:noFill/>
-          <a:ln/>
-        </p:spPr>
-        <p:txBody>
-          <a:bodyPr wrap="square" lIns="0" tIns="0" rIns="0" bIns="0" rtlCol="0" anchor="t"/>
-          <a:lstStyle/>
-          <a:p>
-            <a:pPr indent="0" marL="0">
-              <a:lnSpc>
-                <a:spcPct val="112000"/>
-              </a:lnSpc>
-              <a:buNone/>
-            </a:pPr>
-            <a:r>
-              <a:rPr lang="en-US" sz="1150" dirty="0">
-                <a:solidFill>
-                  <a:srgbClr val="4E5968"/>
-                </a:solidFill>
-                <a:latin typeface="Arial" pitchFamily="34" charset="0"/>
-                <a:ea typeface="Arial" pitchFamily="34" charset="-122"/>
-                <a:cs typeface="Arial" pitchFamily="34" charset="-120"/>
-              </a:rPr>
-              <a:t>“AI 윤리·보안 대책은 있으나, 실제 구현 및 검증 계획이 해커톤 기간 내 2일만에 과도하게 압축되어 실현 가능성에 의문.”</a:t>
-            </a:r>
-            <a:endParaRPr lang="en-US" sz="1150" dirty="0"/>
-          </a:p>
-        </p:txBody>
-      </p:sp>
-      <p:sp>
-        <p:nvSpPr>
-          <p:cNvPr id="16" name="Shape 14"/>
-          <p:cNvSpPr/>
-          <p:nvPr/>
-        </p:nvSpPr>
-        <p:spPr>
-          <a:xfrm>
-            <a:off x="6400800" y="5257800"/>
-            <a:ext cx="228600" cy="0"/>
-          </a:xfrm>
-          <a:prstGeom prst="line">
-            <a:avLst/>
-          </a:prstGeom>
-          <a:noFill/>
-          <a:ln w="15875">
-            <a:solidFill>
-              <a:srgbClr val="3182F6"/>
-            </a:solidFill>
-            <a:prstDash val="solid"/>
-            <a:tailEnd type="triangle"/>
-          </a:ln>
-        </p:spPr>
-      </p:sp>
-      <p:sp>
-        <p:nvSpPr>
-          <p:cNvPr id="17" name="Text 15"/>
-          <p:cNvSpPr/>
-          <p:nvPr/>
-        </p:nvSpPr>
-        <p:spPr>
-          <a:xfrm>
-            <a:off x="6720840" y="5047488"/>
-            <a:ext cx="4645152" cy="548640"/>
-          </a:xfrm>
-          <a:prstGeom prst="rect">
-            <a:avLst/>
-          </a:prstGeom>
-          <a:noFill/>
-          <a:ln/>
-        </p:spPr>
-        <p:txBody>
-          <a:bodyPr wrap="square" lIns="0" tIns="0" rIns="0" bIns="0" rtlCol="0" anchor="t"/>
-          <a:lstStyle/>
-          <a:p>
-            <a:pPr indent="0" marL="0">
-              <a:lnSpc>
-                <a:spcPct val="112000"/>
-              </a:lnSpc>
-              <a:buNone/>
-            </a:pPr>
-            <a:r>
-              <a:rPr lang="en-US" sz="1300" b="1" dirty="0">
-                <a:solidFill>
-                  <a:srgbClr val="1B64DA"/>
-                </a:solidFill>
-                <a:latin typeface="Arial" pitchFamily="34" charset="0"/>
-                <a:ea typeface="Arial" pitchFamily="34" charset="-122"/>
-                <a:cs typeface="Arial" pitchFamily="34" charset="-120"/>
-              </a:rPr>
-              <a:t>검증 가능한 과정 — 커밋 20개·테스트 34개·측정 스크립트 공개</a:t>
-            </a:r>
-            <a:endParaRPr lang="en-US" sz="1300" dirty="0"/>
-          </a:p>
-        </p:txBody>
-      </p:sp>
-      <p:sp>
-        <p:nvSpPr>
-          <p:cNvPr id="18" name="Shape 16"/>
-          <p:cNvSpPr/>
-          <p:nvPr/>
-        </p:nvSpPr>
-        <p:spPr>
-          <a:xfrm>
-            <a:off x="822960" y="5989320"/>
-            <a:ext cx="10543032" cy="0"/>
-          </a:xfrm>
-          <a:prstGeom prst="line">
-            <a:avLst/>
-          </a:prstGeom>
-          <a:noFill/>
+          <p:cNvPr id="5" name="Shape 3"/>
+          <p:cNvSpPr/>
+          <p:nvPr/>
+        </p:nvSpPr>
+        <p:spPr>
+          <a:xfrm>
+            <a:off x="822960" y="3063240"/>
+            <a:ext cx="3331464" cy="2148840"/>
+          </a:xfrm>
+          <a:prstGeom prst="roundRect">
+            <a:avLst>
+              <a:gd name="adj" fmla="val 3404"/>
+            </a:avLst>
+          </a:prstGeom>
+          <a:solidFill>
+            <a:srgbClr val="FFFFFF"/>
+          </a:solidFill>
           <a:ln w="12700">
             <a:solidFill>
               <a:srgbClr val="E5E8EB"/>
@@ -2778,40 +2374,471 @@
       </p:sp>
       <p:sp>
         <p:nvSpPr>
-          <p:cNvPr id="19" name="Text 17"/>
-          <p:cNvSpPr/>
-          <p:nvPr/>
-        </p:nvSpPr>
-        <p:spPr>
-          <a:xfrm>
-            <a:off x="822960" y="6080760"/>
-            <a:ext cx="10543032" cy="274320"/>
-          </a:xfrm>
-          <a:prstGeom prst="rect">
-            <a:avLst/>
-          </a:prstGeom>
-          <a:noFill/>
-          <a:ln/>
-        </p:spPr>
-        <p:txBody>
-          <a:bodyPr wrap="square" lIns="0" tIns="0" rIns="0" bIns="0" rtlCol="0" anchor="t"/>
-          <a:lstStyle/>
-          <a:p>
-            <a:pPr indent="0" marL="0">
-              <a:buNone/>
-            </a:pPr>
-            <a:r>
-              <a:rPr lang="en-US" sz="1150" dirty="0">
-                <a:solidFill>
-                  <a:srgbClr val="8B95A1"/>
-                </a:solidFill>
-                <a:latin typeface="Arial" pitchFamily="34" charset="0"/>
-                <a:ea typeface="Arial" pitchFamily="34" charset="-122"/>
-                <a:cs typeface="Arial" pitchFamily="34" charset="-120"/>
-              </a:rPr>
-              <a:t>선정 3 · 보류 3 — 항목 점수(근거 충족도)가 아니라 「마음속 등수」가 당락을 가른다는 멘토링을 그대로 구현한 결과</a:t>
-            </a:r>
-            <a:endParaRPr lang="en-US" sz="1150" dirty="0"/>
+          <p:cNvPr id="6" name="Text 4"/>
+          <p:cNvSpPr/>
+          <p:nvPr/>
+        </p:nvSpPr>
+        <p:spPr>
+          <a:xfrm>
+            <a:off x="1051560" y="3200400"/>
+            <a:ext cx="2874264" cy="320040"/>
+          </a:xfrm>
+          <a:prstGeom prst="rect">
+            <a:avLst/>
+          </a:prstGeom>
+          <a:noFill/>
+          <a:ln/>
+        </p:spPr>
+        <p:txBody>
+          <a:bodyPr wrap="square" lIns="0" tIns="0" rIns="0" bIns="0" rtlCol="0" anchor="t"/>
+          <a:lstStyle/>
+          <a:p>
+            <a:pPr indent="0" marL="0">
+              <a:buNone/>
+            </a:pPr>
+            <a:r>
+              <a:rPr lang="en-US" sz="1400" b="1" dirty="0">
+                <a:solidFill>
+                  <a:srgbClr val="191F28"/>
+                </a:solidFill>
+                <a:latin typeface="Arial" pitchFamily="34" charset="0"/>
+                <a:ea typeface="Arial" pitchFamily="34" charset="-122"/>
+                <a:cs typeface="Arial" pitchFamily="34" charset="-120"/>
+              </a:rPr>
+              <a:t>관점 1개(단일 LLM)</a:t>
+            </a:r>
+            <a:endParaRPr lang="en-US" sz="1400" dirty="0"/>
+          </a:p>
+        </p:txBody>
+      </p:sp>
+      <p:sp>
+        <p:nvSpPr>
+          <p:cNvPr id="7" name="Text 5"/>
+          <p:cNvSpPr/>
+          <p:nvPr/>
+        </p:nvSpPr>
+        <p:spPr>
+          <a:xfrm>
+            <a:off x="1051560" y="3657600"/>
+            <a:ext cx="2874264" cy="731520"/>
+          </a:xfrm>
+          <a:prstGeom prst="rect">
+            <a:avLst/>
+          </a:prstGeom>
+          <a:noFill/>
+          <a:ln/>
+        </p:spPr>
+        <p:txBody>
+          <a:bodyPr wrap="square" lIns="0" tIns="0" rIns="0" bIns="0" rtlCol="0" anchor="t"/>
+          <a:lstStyle/>
+          <a:p>
+            <a:pPr indent="0" marL="0">
+              <a:buNone/>
+            </a:pPr>
+            <a:r>
+              <a:rPr lang="en-US" sz="4000" b="1" dirty="0">
+                <a:solidFill>
+                  <a:srgbClr val="191F28"/>
+                </a:solidFill>
+                <a:latin typeface="Arial" pitchFamily="34" charset="0"/>
+                <a:ea typeface="Arial" pitchFamily="34" charset="-122"/>
+                <a:cs typeface="Arial" pitchFamily="34" charset="-120"/>
+              </a:rPr>
+              <a:t>오탐 3</a:t>
+            </a:r>
+            <a:endParaRPr lang="en-US" sz="4000" dirty="0"/>
+          </a:p>
+        </p:txBody>
+      </p:sp>
+      <p:sp>
+        <p:nvSpPr>
+          <p:cNvPr id="8" name="Text 6"/>
+          <p:cNvSpPr/>
+          <p:nvPr/>
+        </p:nvSpPr>
+        <p:spPr>
+          <a:xfrm>
+            <a:off x="1051560" y="4526280"/>
+            <a:ext cx="2874264" cy="320040"/>
+          </a:xfrm>
+          <a:prstGeom prst="rect">
+            <a:avLst/>
+          </a:prstGeom>
+          <a:noFill/>
+          <a:ln/>
+        </p:spPr>
+        <p:txBody>
+          <a:bodyPr wrap="square" lIns="0" tIns="0" rIns="0" bIns="0" rtlCol="0" anchor="t"/>
+          <a:lstStyle/>
+          <a:p>
+            <a:pPr indent="0" marL="0">
+              <a:buNone/>
+            </a:pPr>
+            <a:r>
+              <a:rPr lang="en-US" sz="1300" dirty="0">
+                <a:solidFill>
+                  <a:srgbClr val="4E5968"/>
+                </a:solidFill>
+                <a:latin typeface="Arial" pitchFamily="34" charset="0"/>
+                <a:ea typeface="Arial" pitchFamily="34" charset="-122"/>
+                <a:cs typeface="Arial" pitchFamily="34" charset="-120"/>
+              </a:rPr>
+              <a:t>짚은 수 5/5 · 정확도 73%</a:t>
+            </a:r>
+            <a:endParaRPr lang="en-US" sz="1300" dirty="0"/>
+          </a:p>
+        </p:txBody>
+      </p:sp>
+      <p:sp>
+        <p:nvSpPr>
+          <p:cNvPr id="9" name="Shape 7"/>
+          <p:cNvSpPr/>
+          <p:nvPr/>
+        </p:nvSpPr>
+        <p:spPr>
+          <a:xfrm>
+            <a:off x="4428744" y="3063240"/>
+            <a:ext cx="3331464" cy="2148840"/>
+          </a:xfrm>
+          <a:prstGeom prst="roundRect">
+            <a:avLst>
+              <a:gd name="adj" fmla="val 3404"/>
+            </a:avLst>
+          </a:prstGeom>
+          <a:solidFill>
+            <a:srgbClr val="EAF3FF"/>
+          </a:solidFill>
+          <a:ln w="12700">
+            <a:solidFill>
+              <a:srgbClr val="3182F6"/>
+            </a:solidFill>
+            <a:prstDash val="solid"/>
+          </a:ln>
+        </p:spPr>
+      </p:sp>
+      <p:sp>
+        <p:nvSpPr>
+          <p:cNvPr id="10" name="Text 8"/>
+          <p:cNvSpPr/>
+          <p:nvPr/>
+        </p:nvSpPr>
+        <p:spPr>
+          <a:xfrm>
+            <a:off x="4657344" y="3200400"/>
+            <a:ext cx="2874264" cy="320040"/>
+          </a:xfrm>
+          <a:prstGeom prst="rect">
+            <a:avLst/>
+          </a:prstGeom>
+          <a:noFill/>
+          <a:ln/>
+        </p:spPr>
+        <p:txBody>
+          <a:bodyPr wrap="square" lIns="0" tIns="0" rIns="0" bIns="0" rtlCol="0" anchor="t"/>
+          <a:lstStyle/>
+          <a:p>
+            <a:pPr indent="0" marL="0">
+              <a:buNone/>
+            </a:pPr>
+            <a:r>
+              <a:rPr lang="en-US" sz="1400" b="1" dirty="0">
+                <a:solidFill>
+                  <a:srgbClr val="191F28"/>
+                </a:solidFill>
+                <a:latin typeface="Arial" pitchFamily="34" charset="0"/>
+                <a:ea typeface="Arial" pitchFamily="34" charset="-122"/>
+                <a:cs typeface="Arial" pitchFamily="34" charset="-120"/>
+              </a:rPr>
+              <a:t>6역할 · 한 회사 모델</a:t>
+            </a:r>
+            <a:endParaRPr lang="en-US" sz="1400" dirty="0"/>
+          </a:p>
+        </p:txBody>
+      </p:sp>
+      <p:sp>
+        <p:nvSpPr>
+          <p:cNvPr id="11" name="Text 9"/>
+          <p:cNvSpPr/>
+          <p:nvPr/>
+        </p:nvSpPr>
+        <p:spPr>
+          <a:xfrm>
+            <a:off x="4657344" y="3657600"/>
+            <a:ext cx="2874264" cy="731520"/>
+          </a:xfrm>
+          <a:prstGeom prst="rect">
+            <a:avLst/>
+          </a:prstGeom>
+          <a:noFill/>
+          <a:ln/>
+        </p:spPr>
+        <p:txBody>
+          <a:bodyPr wrap="square" lIns="0" tIns="0" rIns="0" bIns="0" rtlCol="0" anchor="t"/>
+          <a:lstStyle/>
+          <a:p>
+            <a:pPr indent="0" marL="0">
+              <a:buNone/>
+            </a:pPr>
+            <a:r>
+              <a:rPr lang="en-US" sz="4000" b="1" dirty="0">
+                <a:solidFill>
+                  <a:srgbClr val="1B64DA"/>
+                </a:solidFill>
+                <a:latin typeface="Arial" pitchFamily="34" charset="0"/>
+                <a:ea typeface="Arial" pitchFamily="34" charset="-122"/>
+                <a:cs typeface="Arial" pitchFamily="34" charset="-120"/>
+              </a:rPr>
+              <a:t>오탐 0</a:t>
+            </a:r>
+            <a:endParaRPr lang="en-US" sz="4000" dirty="0"/>
+          </a:p>
+        </p:txBody>
+      </p:sp>
+      <p:sp>
+        <p:nvSpPr>
+          <p:cNvPr id="12" name="Text 10"/>
+          <p:cNvSpPr/>
+          <p:nvPr/>
+        </p:nvSpPr>
+        <p:spPr>
+          <a:xfrm>
+            <a:off x="4657344" y="4526280"/>
+            <a:ext cx="2874264" cy="320040"/>
+          </a:xfrm>
+          <a:prstGeom prst="rect">
+            <a:avLst/>
+          </a:prstGeom>
+          <a:noFill/>
+          <a:ln/>
+        </p:spPr>
+        <p:txBody>
+          <a:bodyPr wrap="square" lIns="0" tIns="0" rIns="0" bIns="0" rtlCol="0" anchor="t"/>
+          <a:lstStyle/>
+          <a:p>
+            <a:pPr indent="0" marL="0">
+              <a:buNone/>
+            </a:pPr>
+            <a:r>
+              <a:rPr lang="en-US" sz="1300" dirty="0">
+                <a:solidFill>
+                  <a:srgbClr val="4E5968"/>
+                </a:solidFill>
+                <a:latin typeface="Arial" pitchFamily="34" charset="0"/>
+                <a:ea typeface="Arial" pitchFamily="34" charset="-122"/>
+                <a:cs typeface="Arial" pitchFamily="34" charset="-120"/>
+              </a:rPr>
+              <a:t>짚은 수 5/5 · 정확도 100%</a:t>
+            </a:r>
+            <a:endParaRPr lang="en-US" sz="1300" dirty="0"/>
+          </a:p>
+        </p:txBody>
+      </p:sp>
+      <p:sp>
+        <p:nvSpPr>
+          <p:cNvPr id="13" name="Shape 11"/>
+          <p:cNvSpPr/>
+          <p:nvPr/>
+        </p:nvSpPr>
+        <p:spPr>
+          <a:xfrm>
+            <a:off x="8034528" y="3063240"/>
+            <a:ext cx="3331464" cy="2148840"/>
+          </a:xfrm>
+          <a:prstGeom prst="roundRect">
+            <a:avLst>
+              <a:gd name="adj" fmla="val 3404"/>
+            </a:avLst>
+          </a:prstGeom>
+          <a:solidFill>
+            <a:srgbClr val="EAF3FF"/>
+          </a:solidFill>
+          <a:ln w="12700">
+            <a:solidFill>
+              <a:srgbClr val="3182F6"/>
+            </a:solidFill>
+            <a:prstDash val="solid"/>
+          </a:ln>
+        </p:spPr>
+      </p:sp>
+      <p:sp>
+        <p:nvSpPr>
+          <p:cNvPr id="14" name="Text 12"/>
+          <p:cNvSpPr/>
+          <p:nvPr/>
+        </p:nvSpPr>
+        <p:spPr>
+          <a:xfrm>
+            <a:off x="8263128" y="3200400"/>
+            <a:ext cx="2874264" cy="320040"/>
+          </a:xfrm>
+          <a:prstGeom prst="rect">
+            <a:avLst/>
+          </a:prstGeom>
+          <a:noFill/>
+          <a:ln/>
+        </p:spPr>
+        <p:txBody>
+          <a:bodyPr wrap="square" lIns="0" tIns="0" rIns="0" bIns="0" rtlCol="0" anchor="t"/>
+          <a:lstStyle/>
+          <a:p>
+            <a:pPr indent="0" marL="0">
+              <a:buNone/>
+            </a:pPr>
+            <a:r>
+              <a:rPr lang="en-US" sz="1400" b="1" dirty="0">
+                <a:solidFill>
+                  <a:srgbClr val="191F28"/>
+                </a:solidFill>
+                <a:latin typeface="Arial" pitchFamily="34" charset="0"/>
+                <a:ea typeface="Arial" pitchFamily="34" charset="-122"/>
+                <a:cs typeface="Arial" pitchFamily="34" charset="-120"/>
+              </a:rPr>
+              <a:t>6역할 · 3사 모델(현재)</a:t>
+            </a:r>
+            <a:endParaRPr lang="en-US" sz="1400" dirty="0"/>
+          </a:p>
+        </p:txBody>
+      </p:sp>
+      <p:sp>
+        <p:nvSpPr>
+          <p:cNvPr id="15" name="Text 13"/>
+          <p:cNvSpPr/>
+          <p:nvPr/>
+        </p:nvSpPr>
+        <p:spPr>
+          <a:xfrm>
+            <a:off x="8263128" y="3657600"/>
+            <a:ext cx="2874264" cy="731520"/>
+          </a:xfrm>
+          <a:prstGeom prst="rect">
+            <a:avLst/>
+          </a:prstGeom>
+          <a:noFill/>
+          <a:ln/>
+        </p:spPr>
+        <p:txBody>
+          <a:bodyPr wrap="square" lIns="0" tIns="0" rIns="0" bIns="0" rtlCol="0" anchor="t"/>
+          <a:lstStyle/>
+          <a:p>
+            <a:pPr indent="0" marL="0">
+              <a:buNone/>
+            </a:pPr>
+            <a:r>
+              <a:rPr lang="en-US" sz="4000" b="1" dirty="0">
+                <a:solidFill>
+                  <a:srgbClr val="1B64DA"/>
+                </a:solidFill>
+                <a:latin typeface="Arial" pitchFamily="34" charset="0"/>
+                <a:ea typeface="Arial" pitchFamily="34" charset="-122"/>
+                <a:cs typeface="Arial" pitchFamily="34" charset="-120"/>
+              </a:rPr>
+              <a:t>오탐 0</a:t>
+            </a:r>
+            <a:endParaRPr lang="en-US" sz="4000" dirty="0"/>
+          </a:p>
+        </p:txBody>
+      </p:sp>
+      <p:sp>
+        <p:nvSpPr>
+          <p:cNvPr id="16" name="Text 14"/>
+          <p:cNvSpPr/>
+          <p:nvPr/>
+        </p:nvSpPr>
+        <p:spPr>
+          <a:xfrm>
+            <a:off x="8263128" y="4526280"/>
+            <a:ext cx="2874264" cy="320040"/>
+          </a:xfrm>
+          <a:prstGeom prst="rect">
+            <a:avLst/>
+          </a:prstGeom>
+          <a:noFill/>
+          <a:ln/>
+        </p:spPr>
+        <p:txBody>
+          <a:bodyPr wrap="square" lIns="0" tIns="0" rIns="0" bIns="0" rtlCol="0" anchor="t"/>
+          <a:lstStyle/>
+          <a:p>
+            <a:pPr indent="0" marL="0">
+              <a:buNone/>
+            </a:pPr>
+            <a:r>
+              <a:rPr lang="en-US" sz="1300" dirty="0">
+                <a:solidFill>
+                  <a:srgbClr val="4E5968"/>
+                </a:solidFill>
+                <a:latin typeface="Arial" pitchFamily="34" charset="0"/>
+                <a:ea typeface="Arial" pitchFamily="34" charset="-122"/>
+                <a:cs typeface="Arial" pitchFamily="34" charset="-120"/>
+              </a:rPr>
+              <a:t>짚은 수 4/5 · 정확도 100%</a:t>
+            </a:r>
+            <a:endParaRPr lang="en-US" sz="1300" dirty="0"/>
+          </a:p>
+        </p:txBody>
+      </p:sp>
+      <p:sp>
+        <p:nvSpPr>
+          <p:cNvPr id="17" name="Shape 15"/>
+          <p:cNvSpPr/>
+          <p:nvPr/>
+        </p:nvSpPr>
+        <p:spPr>
+          <a:xfrm>
+            <a:off x="822960" y="5486400"/>
+            <a:ext cx="10543032" cy="0"/>
+          </a:xfrm>
+          <a:prstGeom prst="line">
+            <a:avLst/>
+          </a:prstGeom>
+          <a:noFill/>
+          <a:ln w="12700">
+            <a:solidFill>
+              <a:srgbClr val="E5E8EB"/>
+            </a:solidFill>
+            <a:prstDash val="solid"/>
+          </a:ln>
+        </p:spPr>
+      </p:sp>
+      <p:sp>
+        <p:nvSpPr>
+          <p:cNvPr id="18" name="Text 16"/>
+          <p:cNvSpPr/>
+          <p:nvPr/>
+        </p:nvSpPr>
+        <p:spPr>
+          <a:xfrm>
+            <a:off x="822960" y="5623560"/>
+            <a:ext cx="10543032" cy="640080"/>
+          </a:xfrm>
+          <a:prstGeom prst="rect">
+            <a:avLst/>
+          </a:prstGeom>
+          <a:noFill/>
+          <a:ln/>
+        </p:spPr>
+        <p:txBody>
+          <a:bodyPr wrap="square" lIns="0" tIns="0" rIns="0" bIns="0" rtlCol="0" anchor="t"/>
+          <a:lstStyle/>
+          <a:p>
+            <a:pPr indent="0" marL="0">
+              <a:lnSpc>
+                <a:spcPct val="120000"/>
+              </a:lnSpc>
+              <a:buNone/>
+            </a:pPr>
+            <a:r>
+              <a:rPr lang="en-US" sz="1400" b="1" dirty="0">
+                <a:solidFill>
+                  <a:srgbClr val="191F28"/>
+                </a:solidFill>
+                <a:latin typeface="Arial" pitchFamily="34" charset="0"/>
+                <a:ea typeface="Arial" pitchFamily="34" charset="-122"/>
+                <a:cs typeface="Arial" pitchFamily="34" charset="-120"/>
+              </a:rPr>
+              <a:t>역할 6개가 오탐을 없앴습니다. 세 회사 모델을 섞는 효과는 이 표본(5개·각 1회)에서 확인되지 않았고 — 섞는 이유는 한도·장애에도 멈추지 않는 가용성과 국산 모델 선택지입니다.</a:t>
+            </a:r>
+            <a:endParaRPr lang="en-US" sz="1400" dirty="0"/>
           </a:p>
         </p:txBody>
       </p:sp>
@@ -2880,7 +2907,7 @@
                 <a:ea typeface="Arial" pitchFamily="34" charset="-122"/>
                 <a:cs typeface="Arial" pitchFamily="34" charset="-120"/>
               </a:rPr>
-              <a:t>확장 — 같은 엔진, 세 개의 시점</a:t>
+              <a:t>우리 자신에게 먼저 — 이 대회 본선 심사표로 예선 기획서를</a:t>
             </a:r>
             <a:endParaRPr lang="en-US" sz="1400" dirty="0"/>
           </a:p>
@@ -2914,7 +2941,7 @@
               <a:buNone/>
             </a:pPr>
             <a:r>
-              <a:rPr lang="en-US" sz="3400" b="1" dirty="0">
+              <a:rPr lang="en-US" sz="3000" b="1" dirty="0">
                 <a:solidFill>
                   <a:srgbClr val="191F28"/>
                 </a:solidFill>
@@ -2922,9 +2949,9 @@
                 <a:ea typeface="Arial" pitchFamily="34" charset="-122"/>
                 <a:cs typeface="Arial" pitchFamily="34" charset="-120"/>
               </a:rPr>
-              <a:t>제출 전 → 접수 후 → 심사 중,</a:t>
-            </a:r>
-            <a:endParaRPr lang="en-US" sz="3400" dirty="0"/>
+              <a:t>이 대회 심사표로 우리를 먼저 검사하니,</a:t>
+            </a:r>
+            <a:endParaRPr lang="en-US" sz="3000" dirty="0"/>
           </a:p>
           <a:p>
             <a:pPr indent="0" marL="0">
@@ -2934,7 +2961,7 @@
               <a:buNone/>
             </a:pPr>
             <a:r>
-              <a:rPr lang="en-US" sz="3400" b="1" dirty="0">
+              <a:rPr lang="en-US" sz="3000" b="1" dirty="0">
                 <a:solidFill>
                   <a:srgbClr val="3182F6"/>
                 </a:solidFill>
@@ -2942,7 +2969,7 @@
                 <a:ea typeface="Arial" pitchFamily="34" charset="-122"/>
                 <a:cs typeface="Arial" pitchFamily="34" charset="-120"/>
               </a:rPr>
-              <a:t>같은 엔진</a:t>
+              <a:t>3개 관점</a:t>
             </a:r>
             <a:pPr indent="0" marL="0">
               <a:lnSpc>
@@ -2951,7 +2978,7 @@
               <a:buNone/>
             </a:pPr>
             <a:r>
-              <a:rPr lang="en-US" sz="3400" b="1" dirty="0">
+              <a:rPr lang="en-US" sz="3000" b="1" dirty="0">
                 <a:solidFill>
                   <a:srgbClr val="191F28"/>
                 </a:solidFill>
@@ -2959,38 +2986,50 @@
                 <a:ea typeface="Arial" pitchFamily="34" charset="-122"/>
                 <a:cs typeface="Arial" pitchFamily="34" charset="-120"/>
               </a:rPr>
-              <a:t>이 이어집니다</a:t>
-            </a:r>
-            <a:endParaRPr lang="en-US" sz="3400" dirty="0"/>
-          </a:p>
-        </p:txBody>
-      </p:sp>
-      <p:sp>
-        <p:nvSpPr>
-          <p:cNvPr id="4" name="Shape 2"/>
+              <a:t>에서 걸린 점이 오늘의 준비물이 됐습니다</a:t>
+            </a:r>
+            <a:endParaRPr lang="en-US" sz="3000" dirty="0"/>
+          </a:p>
+        </p:txBody>
+      </p:sp>
+      <p:sp>
+        <p:nvSpPr>
+          <p:cNvPr id="4" name="Text 2"/>
           <p:cNvSpPr/>
           <p:nvPr/>
         </p:nvSpPr>
         <p:spPr>
           <a:xfrm>
             <a:off x="822960" y="2606040"/>
-            <a:ext cx="3331464" cy="2331720"/>
-          </a:xfrm>
-          <a:prstGeom prst="roundRect">
-            <a:avLst>
-              <a:gd name="adj" fmla="val 3137"/>
-            </a:avLst>
-          </a:prstGeom>
-          <a:solidFill>
-            <a:srgbClr val="EAF3FF"/>
-          </a:solidFill>
-          <a:ln w="12700">
-            <a:solidFill>
-              <a:srgbClr val="3182F6"/>
-            </a:solidFill>
-            <a:prstDash val="solid"/>
-          </a:ln>
-        </p:spPr>
+            <a:ext cx="5486400" cy="274320"/>
+          </a:xfrm>
+          <a:prstGeom prst="rect">
+            <a:avLst/>
+          </a:prstGeom>
+          <a:noFill/>
+          <a:ln/>
+        </p:spPr>
+        <p:txBody>
+          <a:bodyPr wrap="square" lIns="0" tIns="0" rIns="0" bIns="0" rtlCol="0" anchor="t"/>
+          <a:lstStyle/>
+          <a:p>
+            <a:pPr indent="0" marL="0">
+              <a:buNone/>
+            </a:pPr>
+            <a:r>
+              <a:rPr lang="en-US" sz="1250" b="1" dirty="0">
+                <a:solidFill>
+                  <a:srgbClr val="3182F6"/>
+                </a:solidFill>
+                <a:latin typeface="Arial" pitchFamily="34" charset="0"/>
+                <a:ea typeface="Arial" pitchFamily="34" charset="-122"/>
+                <a:cs typeface="Arial" pitchFamily="34" charset="-120"/>
+              </a:rPr>
+              <a:t>각 관점이 쓴 「가장 걸리는 점」(원문)</a:t>
+            </a:r>
+            <a:endParaRPr lang="en-US" sz="1250" dirty="0"/>
+          </a:p>
+        </p:txBody>
       </p:sp>
       <p:sp>
         <p:nvSpPr>
@@ -3000,24 +3039,24 @@
         </p:nvSpPr>
         <p:spPr>
           <a:xfrm>
-            <a:off x="1051560" y="2743200"/>
-            <a:ext cx="2874264" cy="274320"/>
-          </a:xfrm>
-          <a:prstGeom prst="rect">
-            <a:avLst/>
-          </a:prstGeom>
-          <a:noFill/>
-          <a:ln/>
-        </p:spPr>
-        <p:txBody>
-          <a:bodyPr wrap="square" lIns="0" tIns="0" rIns="0" bIns="0" rtlCol="0" anchor="t"/>
-          <a:lstStyle/>
-          <a:p>
-            <a:pPr indent="0" marL="0">
-              <a:buNone/>
-            </a:pPr>
-            <a:r>
-              <a:rPr lang="en-US" sz="1200" b="1" dirty="0">
+            <a:off x="6720840" y="2606040"/>
+            <a:ext cx="4572000" cy="274320"/>
+          </a:xfrm>
+          <a:prstGeom prst="rect">
+            <a:avLst/>
+          </a:prstGeom>
+          <a:noFill/>
+          <a:ln/>
+        </p:spPr>
+        <p:txBody>
+          <a:bodyPr wrap="square" lIns="0" tIns="0" rIns="0" bIns="0" rtlCol="0" anchor="t"/>
+          <a:lstStyle/>
+          <a:p>
+            <a:pPr indent="0" marL="0">
+              <a:buNone/>
+            </a:pPr>
+            <a:r>
+              <a:rPr lang="en-US" sz="1250" b="1" dirty="0">
                 <a:solidFill>
                   <a:srgbClr val="3182F6"/>
                 </a:solidFill>
@@ -3025,9 +3064,9 @@
                 <a:ea typeface="Arial" pitchFamily="34" charset="-122"/>
                 <a:cs typeface="Arial" pitchFamily="34" charset="-120"/>
               </a:rPr>
-              <a:t>제출 전 · 연구자</a:t>
-            </a:r>
-            <a:endParaRPr lang="en-US" sz="1200" dirty="0"/>
+              <a:t>그래서 오늘 가져온 것</a:t>
+            </a:r>
+            <a:endParaRPr lang="en-US" sz="1250" dirty="0"/>
           </a:p>
         </p:txBody>
       </p:sp>
@@ -3039,24 +3078,24 @@
         </p:nvSpPr>
         <p:spPr>
           <a:xfrm>
-            <a:off x="1051560" y="3090672"/>
-            <a:ext cx="2874264" cy="411480"/>
-          </a:xfrm>
-          <a:prstGeom prst="rect">
-            <a:avLst/>
-          </a:prstGeom>
-          <a:noFill/>
-          <a:ln/>
-        </p:spPr>
-        <p:txBody>
-          <a:bodyPr wrap="square" lIns="0" tIns="0" rIns="0" bIns="0" rtlCol="0" anchor="t"/>
-          <a:lstStyle/>
-          <a:p>
-            <a:pPr indent="0" marL="0">
-              <a:buNone/>
-            </a:pPr>
-            <a:r>
-              <a:rPr lang="en-US" sz="2000" b="1" dirty="0">
+            <a:off x="822960" y="3017520"/>
+            <a:ext cx="5486400" cy="274320"/>
+          </a:xfrm>
+          <a:prstGeom prst="rect">
+            <a:avLst/>
+          </a:prstGeom>
+          <a:noFill/>
+          <a:ln/>
+        </p:spPr>
+        <p:txBody>
+          <a:bodyPr wrap="square" lIns="0" tIns="0" rIns="0" bIns="0" rtlCol="0" anchor="t"/>
+          <a:lstStyle/>
+          <a:p>
+            <a:pPr indent="0" marL="0">
+              <a:buNone/>
+            </a:pPr>
+            <a:r>
+              <a:rPr lang="en-US" sz="1300" b="1" dirty="0">
                 <a:solidFill>
                   <a:srgbClr val="191F28"/>
                 </a:solidFill>
@@ -3064,9 +3103,9 @@
                 <a:ea typeface="Arial" pitchFamily="34" charset="-122"/>
                 <a:cs typeface="Arial" pitchFamily="34" charset="-120"/>
               </a:rPr>
-              <a:t>셀프 점검</a:t>
-            </a:r>
-            <a:endParaRPr lang="en-US" sz="2000" dirty="0"/>
+              <a:t>세부 전문형</a:t>
+            </a:r>
+            <a:endParaRPr lang="en-US" sz="1300" dirty="0"/>
           </a:p>
         </p:txBody>
       </p:sp>
@@ -3078,8 +3117,8 @@
         </p:nvSpPr>
         <p:spPr>
           <a:xfrm>
-            <a:off x="1051560" y="3611880"/>
-            <a:ext cx="2874264" cy="868680"/>
+            <a:off x="822960" y="3310128"/>
+            <a:ext cx="5486400" cy="548640"/>
           </a:xfrm>
           <a:prstGeom prst="rect">
             <a:avLst/>
@@ -3093,12 +3132,12 @@
           <a:p>
             <a:pPr indent="0" marL="0">
               <a:lnSpc>
-                <a:spcPct val="115000"/>
+                <a:spcPct val="112000"/>
               </a:lnSpc>
               <a:buNone/>
             </a:pPr>
             <a:r>
-              <a:rPr lang="en-US" sz="1200" dirty="0">
+              <a:rPr lang="en-US" sz="1150" dirty="0">
                 <a:solidFill>
                   <a:srgbClr val="4E5968"/>
                 </a:solidFill>
@@ -3106,46 +3145,7 @@
                 <a:ea typeface="Arial" pitchFamily="34" charset="-122"/>
                 <a:cs typeface="Arial" pitchFamily="34" charset="-120"/>
               </a:rPr>
-              <a:t>고칠 곳·판단할 곳·심사위원의 마음</a:t>
-            </a:r>
-            <a:endParaRPr lang="en-US" sz="1200" dirty="0"/>
-          </a:p>
-        </p:txBody>
-      </p:sp>
-      <p:sp>
-        <p:nvSpPr>
-          <p:cNvPr id="8" name="Text 6"/>
-          <p:cNvSpPr/>
-          <p:nvPr/>
-        </p:nvSpPr>
-        <p:spPr>
-          <a:xfrm>
-            <a:off x="1051560" y="4526280"/>
-            <a:ext cx="2874264" cy="274320"/>
-          </a:xfrm>
-          <a:prstGeom prst="rect">
-            <a:avLst/>
-          </a:prstGeom>
-          <a:noFill/>
-          <a:ln/>
-        </p:spPr>
-        <p:txBody>
-          <a:bodyPr wrap="square" lIns="0" tIns="0" rIns="0" bIns="0" rtlCol="0" anchor="t"/>
-          <a:lstStyle/>
-          <a:p>
-            <a:pPr indent="0" marL="0">
-              <a:buNone/>
-            </a:pPr>
-            <a:r>
-              <a:rPr lang="en-US" sz="1150" b="1" dirty="0">
-                <a:solidFill>
-                  <a:srgbClr val="1B64DA"/>
-                </a:solidFill>
-                <a:latin typeface="Arial" pitchFamily="34" charset="0"/>
-                <a:ea typeface="Arial" pitchFamily="34" charset="-122"/>
-                <a:cs typeface="Arial" pitchFamily="34" charset="-120"/>
-              </a:rPr>
-              <a:t>지금 이 앱 — 구현</a:t>
+              <a:t>“정확도 목표(90% 재현율, 80% 정밀도)가 실제 구현 없이 목표치만 제시되어 구체성 부족”</a:t>
             </a:r>
             <a:endParaRPr lang="en-US" sz="1150" dirty="0"/>
           </a:p>
@@ -3153,14 +3153,14 @@
       </p:sp>
       <p:sp>
         <p:nvSpPr>
-          <p:cNvPr id="9" name="Shape 7"/>
-          <p:cNvSpPr/>
-          <p:nvPr/>
-        </p:nvSpPr>
-        <p:spPr>
-          <a:xfrm>
-            <a:off x="4181856" y="3749040"/>
-            <a:ext cx="219456" cy="0"/>
+          <p:cNvPr id="8" name="Shape 6"/>
+          <p:cNvSpPr/>
+          <p:nvPr/>
+        </p:nvSpPr>
+        <p:spPr>
+          <a:xfrm>
+            <a:off x="6400800" y="3337560"/>
+            <a:ext cx="228600" cy="0"/>
           </a:xfrm>
           <a:prstGeom prst="line">
             <a:avLst/>
@@ -3177,30 +3177,84 @@
       </p:sp>
       <p:sp>
         <p:nvSpPr>
-          <p:cNvPr id="10" name="Shape 8"/>
-          <p:cNvSpPr/>
-          <p:nvPr/>
-        </p:nvSpPr>
-        <p:spPr>
-          <a:xfrm>
-            <a:off x="4428744" y="2606040"/>
-            <a:ext cx="3331464" cy="2331720"/>
-          </a:xfrm>
-          <a:prstGeom prst="roundRect">
-            <a:avLst>
-              <a:gd name="adj" fmla="val 3137"/>
-            </a:avLst>
-          </a:prstGeom>
-          <a:solidFill>
-            <a:srgbClr val="FFFFFF"/>
-          </a:solidFill>
-          <a:ln w="12700">
-            <a:solidFill>
-              <a:srgbClr val="E5E8EB"/>
-            </a:solidFill>
-            <a:prstDash val="solid"/>
-          </a:ln>
-        </p:spPr>
+          <p:cNvPr id="9" name="Text 7"/>
+          <p:cNvSpPr/>
+          <p:nvPr/>
+        </p:nvSpPr>
+        <p:spPr>
+          <a:xfrm>
+            <a:off x="6720840" y="3127248"/>
+            <a:ext cx="4645152" cy="548640"/>
+          </a:xfrm>
+          <a:prstGeom prst="rect">
+            <a:avLst/>
+          </a:prstGeom>
+          <a:noFill/>
+          <a:ln/>
+        </p:spPr>
+        <p:txBody>
+          <a:bodyPr wrap="square" lIns="0" tIns="0" rIns="0" bIns="0" rtlCol="0" anchor="t"/>
+          <a:lstStyle/>
+          <a:p>
+            <a:pPr indent="0" marL="0">
+              <a:lnSpc>
+                <a:spcPct val="112000"/>
+              </a:lnSpc>
+              <a:buNone/>
+            </a:pPr>
+            <a:r>
+              <a:rPr lang="en-US" sz="1300" b="1" dirty="0">
+                <a:solidFill>
+                  <a:srgbClr val="1B64DA"/>
+                </a:solidFill>
+                <a:latin typeface="Arial" pitchFamily="34" charset="0"/>
+                <a:ea typeface="Arial" pitchFamily="34" charset="-122"/>
+                <a:cs typeface="Arial" pitchFamily="34" charset="-120"/>
+              </a:rPr>
+              <a:t>목표치 대신 실측치 — 처음 보는 공고 재현율·제거 실험(9·10장)</a:t>
+            </a:r>
+            <a:endParaRPr lang="en-US" sz="1300" dirty="0"/>
+          </a:p>
+        </p:txBody>
+      </p:sp>
+      <p:sp>
+        <p:nvSpPr>
+          <p:cNvPr id="10" name="Text 8"/>
+          <p:cNvSpPr/>
+          <p:nvPr/>
+        </p:nvSpPr>
+        <p:spPr>
+          <a:xfrm>
+            <a:off x="822960" y="3977640"/>
+            <a:ext cx="5486400" cy="274320"/>
+          </a:xfrm>
+          <a:prstGeom prst="rect">
+            <a:avLst/>
+          </a:prstGeom>
+          <a:noFill/>
+          <a:ln/>
+        </p:spPr>
+        <p:txBody>
+          <a:bodyPr wrap="square" lIns="0" tIns="0" rIns="0" bIns="0" rtlCol="0" anchor="t"/>
+          <a:lstStyle/>
+          <a:p>
+            <a:pPr indent="0" marL="0">
+              <a:buNone/>
+            </a:pPr>
+            <a:r>
+              <a:rPr lang="en-US" sz="1300" b="1" dirty="0">
+                <a:solidFill>
+                  <a:srgbClr val="191F28"/>
+                </a:solidFill>
+                <a:latin typeface="Arial" pitchFamily="34" charset="0"/>
+                <a:ea typeface="Arial" pitchFamily="34" charset="-122"/>
+                <a:cs typeface="Arial" pitchFamily="34" charset="-120"/>
+              </a:rPr>
+              <a:t>사업성·시장형</a:t>
+            </a:r>
+            <a:endParaRPr lang="en-US" sz="1300" dirty="0"/>
+          </a:p>
+        </p:txBody>
       </p:sp>
       <p:sp>
         <p:nvSpPr>
@@ -3210,86 +3264,8 @@
         </p:nvSpPr>
         <p:spPr>
           <a:xfrm>
-            <a:off x="4657344" y="2743200"/>
-            <a:ext cx="2874264" cy="274320"/>
-          </a:xfrm>
-          <a:prstGeom prst="rect">
-            <a:avLst/>
-          </a:prstGeom>
-          <a:noFill/>
-          <a:ln/>
-        </p:spPr>
-        <p:txBody>
-          <a:bodyPr wrap="square" lIns="0" tIns="0" rIns="0" bIns="0" rtlCol="0" anchor="t"/>
-          <a:lstStyle/>
-          <a:p>
-            <a:pPr indent="0" marL="0">
-              <a:buNone/>
-            </a:pPr>
-            <a:r>
-              <a:rPr lang="en-US" sz="1200" b="1" dirty="0">
-                <a:solidFill>
-                  <a:srgbClr val="3182F6"/>
-                </a:solidFill>
-                <a:latin typeface="Arial" pitchFamily="34" charset="0"/>
-                <a:ea typeface="Arial" pitchFamily="34" charset="-122"/>
-                <a:cs typeface="Arial" pitchFamily="34" charset="-120"/>
-              </a:rPr>
-              <a:t>접수 후 · 전문기관</a:t>
-            </a:r>
-            <a:endParaRPr lang="en-US" sz="1200" dirty="0"/>
-          </a:p>
-        </p:txBody>
-      </p:sp>
-      <p:sp>
-        <p:nvSpPr>
-          <p:cNvPr id="12" name="Text 10"/>
-          <p:cNvSpPr/>
-          <p:nvPr/>
-        </p:nvSpPr>
-        <p:spPr>
-          <a:xfrm>
-            <a:off x="4657344" y="3090672"/>
-            <a:ext cx="2874264" cy="411480"/>
-          </a:xfrm>
-          <a:prstGeom prst="rect">
-            <a:avLst/>
-          </a:prstGeom>
-          <a:noFill/>
-          <a:ln/>
-        </p:spPr>
-        <p:txBody>
-          <a:bodyPr wrap="square" lIns="0" tIns="0" rIns="0" bIns="0" rtlCol="0" anchor="t"/>
-          <a:lstStyle/>
-          <a:p>
-            <a:pPr indent="0" marL="0">
-              <a:buNone/>
-            </a:pPr>
-            <a:r>
-              <a:rPr lang="en-US" sz="2000" b="1" dirty="0">
-                <a:solidFill>
-                  <a:srgbClr val="191F28"/>
-                </a:solidFill>
-                <a:latin typeface="Arial" pitchFamily="34" charset="0"/>
-                <a:ea typeface="Arial" pitchFamily="34" charset="-122"/>
-                <a:cs typeface="Arial" pitchFamily="34" charset="-120"/>
-              </a:rPr>
-              <a:t>요건 사전검토</a:t>
-            </a:r>
-            <a:endParaRPr lang="en-US" sz="2000" dirty="0"/>
-          </a:p>
-        </p:txBody>
-      </p:sp>
-      <p:sp>
-        <p:nvSpPr>
-          <p:cNvPr id="13" name="Text 11"/>
-          <p:cNvSpPr/>
-          <p:nvPr/>
-        </p:nvSpPr>
-        <p:spPr>
-          <a:xfrm>
-            <a:off x="4657344" y="3611880"/>
-            <a:ext cx="2874264" cy="868680"/>
+            <a:off x="822960" y="4270248"/>
+            <a:ext cx="5486400" cy="548640"/>
           </a:xfrm>
           <a:prstGeom prst="rect">
             <a:avLst/>
@@ -3303,12 +3279,12 @@
           <a:p>
             <a:pPr indent="0" marL="0">
               <a:lnSpc>
-                <a:spcPct val="115000"/>
+                <a:spcPct val="112000"/>
               </a:lnSpc>
               <a:buNone/>
             </a:pPr>
             <a:r>
-              <a:rPr lang="en-US" sz="1200" dirty="0">
+              <a:rPr lang="en-US" sz="1150" dirty="0">
                 <a:solidFill>
                   <a:srgbClr val="4E5968"/>
                 </a:solidFill>
@@ -3316,46 +3292,7 @@
                 <a:ea typeface="Arial" pitchFamily="34" charset="-122"/>
                 <a:cs typeface="Arial" pitchFamily="34" charset="-120"/>
               </a:rPr>
-              <a:t>같은 요건 매트릭스로 형식 미비·필수 서류 누락을 먼저 걸러 담당자 검토 시간 단축</a:t>
-            </a:r>
-            <a:endParaRPr lang="en-US" sz="1200" dirty="0"/>
-          </a:p>
-        </p:txBody>
-      </p:sp>
-      <p:sp>
-        <p:nvSpPr>
-          <p:cNvPr id="14" name="Text 12"/>
-          <p:cNvSpPr/>
-          <p:nvPr/>
-        </p:nvSpPr>
-        <p:spPr>
-          <a:xfrm>
-            <a:off x="4657344" y="4526280"/>
-            <a:ext cx="2874264" cy="274320"/>
-          </a:xfrm>
-          <a:prstGeom prst="rect">
-            <a:avLst/>
-          </a:prstGeom>
-          <a:noFill/>
-          <a:ln/>
-        </p:spPr>
-        <p:txBody>
-          <a:bodyPr wrap="square" lIns="0" tIns="0" rIns="0" bIns="0" rtlCol="0" anchor="t"/>
-          <a:lstStyle/>
-          <a:p>
-            <a:pPr indent="0" marL="0">
-              <a:buNone/>
-            </a:pPr>
-            <a:r>
-              <a:rPr lang="en-US" sz="1150" b="1" dirty="0">
-                <a:solidFill>
-                  <a:srgbClr val="8B95A1"/>
-                </a:solidFill>
-                <a:latin typeface="Arial" pitchFamily="34" charset="0"/>
-                <a:ea typeface="Arial" pitchFamily="34" charset="-122"/>
-                <a:cs typeface="Arial" pitchFamily="34" charset="-120"/>
-              </a:rPr>
-              <a:t>첫 실증 목표 — 계획</a:t>
+              <a:t>“시장성은 있으나 실증·구매주체가 아직 약함”</a:t>
             </a:r>
             <a:endParaRPr lang="en-US" sz="1150" dirty="0"/>
           </a:p>
@@ -3363,14 +3300,14 @@
       </p:sp>
       <p:sp>
         <p:nvSpPr>
-          <p:cNvPr id="15" name="Shape 13"/>
-          <p:cNvSpPr/>
-          <p:nvPr/>
-        </p:nvSpPr>
-        <p:spPr>
-          <a:xfrm>
-            <a:off x="7787640" y="3749040"/>
-            <a:ext cx="219456" cy="0"/>
+          <p:cNvPr id="12" name="Shape 10"/>
+          <p:cNvSpPr/>
+          <p:nvPr/>
+        </p:nvSpPr>
+        <p:spPr>
+          <a:xfrm>
+            <a:off x="6400800" y="4297680"/>
+            <a:ext cx="228600" cy="0"/>
           </a:xfrm>
           <a:prstGeom prst="line">
             <a:avLst/>
@@ -3387,23 +3324,208 @@
       </p:sp>
       <p:sp>
         <p:nvSpPr>
+          <p:cNvPr id="13" name="Text 11"/>
+          <p:cNvSpPr/>
+          <p:nvPr/>
+        </p:nvSpPr>
+        <p:spPr>
+          <a:xfrm>
+            <a:off x="6720840" y="4087368"/>
+            <a:ext cx="4645152" cy="548640"/>
+          </a:xfrm>
+          <a:prstGeom prst="rect">
+            <a:avLst/>
+          </a:prstGeom>
+          <a:noFill/>
+          <a:ln/>
+        </p:spPr>
+        <p:txBody>
+          <a:bodyPr wrap="square" lIns="0" tIns="0" rIns="0" bIns="0" rtlCol="0" anchor="t"/>
+          <a:lstStyle/>
+          <a:p>
+            <a:pPr indent="0" marL="0">
+              <a:lnSpc>
+                <a:spcPct val="112000"/>
+              </a:lnSpc>
+              <a:buNone/>
+            </a:pPr>
+            <a:r>
+              <a:rPr lang="en-US" sz="1300" b="1" dirty="0">
+                <a:solidFill>
+                  <a:srgbClr val="1B64DA"/>
+                </a:solidFill>
+                <a:latin typeface="Arial" pitchFamily="34" charset="0"/>
+                <a:ea typeface="Arial" pitchFamily="34" charset="-122"/>
+                <a:cs typeface="Arial" pitchFamily="34" charset="-120"/>
+              </a:rPr>
+              <a:t>첫 실증 대상 — 전문기관 접수 후 요건 사전검토(12장)</a:t>
+            </a:r>
+            <a:endParaRPr lang="en-US" sz="1300" dirty="0"/>
+          </a:p>
+        </p:txBody>
+      </p:sp>
+      <p:sp>
+        <p:nvSpPr>
+          <p:cNvPr id="14" name="Text 12"/>
+          <p:cNvSpPr/>
+          <p:nvPr/>
+        </p:nvSpPr>
+        <p:spPr>
+          <a:xfrm>
+            <a:off x="822960" y="4937760"/>
+            <a:ext cx="5486400" cy="274320"/>
+          </a:xfrm>
+          <a:prstGeom prst="rect">
+            <a:avLst/>
+          </a:prstGeom>
+          <a:noFill/>
+          <a:ln/>
+        </p:spPr>
+        <p:txBody>
+          <a:bodyPr wrap="square" lIns="0" tIns="0" rIns="0" bIns="0" rtlCol="0" anchor="t"/>
+          <a:lstStyle/>
+          <a:p>
+            <a:pPr indent="0" marL="0">
+              <a:buNone/>
+            </a:pPr>
+            <a:r>
+              <a:rPr lang="en-US" sz="1300" b="1" dirty="0">
+                <a:solidFill>
+                  <a:srgbClr val="191F28"/>
+                </a:solidFill>
+                <a:latin typeface="Arial" pitchFamily="34" charset="0"/>
+                <a:ea typeface="Arial" pitchFamily="34" charset="-122"/>
+                <a:cs typeface="Arial" pitchFamily="34" charset="-120"/>
+              </a:rPr>
+              <a:t>행정·관리형</a:t>
+            </a:r>
+            <a:endParaRPr lang="en-US" sz="1300" dirty="0"/>
+          </a:p>
+        </p:txBody>
+      </p:sp>
+      <p:sp>
+        <p:nvSpPr>
+          <p:cNvPr id="15" name="Text 13"/>
+          <p:cNvSpPr/>
+          <p:nvPr/>
+        </p:nvSpPr>
+        <p:spPr>
+          <a:xfrm>
+            <a:off x="822960" y="5230368"/>
+            <a:ext cx="5486400" cy="548640"/>
+          </a:xfrm>
+          <a:prstGeom prst="rect">
+            <a:avLst/>
+          </a:prstGeom>
+          <a:noFill/>
+          <a:ln/>
+        </p:spPr>
+        <p:txBody>
+          <a:bodyPr wrap="square" lIns="0" tIns="0" rIns="0" bIns="0" rtlCol="0" anchor="t"/>
+          <a:lstStyle/>
+          <a:p>
+            <a:pPr indent="0" marL="0">
+              <a:lnSpc>
+                <a:spcPct val="112000"/>
+              </a:lnSpc>
+              <a:buNone/>
+            </a:pPr>
+            <a:r>
+              <a:rPr lang="en-US" sz="1150" dirty="0">
+                <a:solidFill>
+                  <a:srgbClr val="4E5968"/>
+                </a:solidFill>
+                <a:latin typeface="Arial" pitchFamily="34" charset="0"/>
+                <a:ea typeface="Arial" pitchFamily="34" charset="-122"/>
+                <a:cs typeface="Arial" pitchFamily="34" charset="-120"/>
+              </a:rPr>
+              <a:t>“AI 윤리·보안 대책은 있으나, 실제 구현 및 검증 계획이 해커톤 기간 내 2일만에 과도하게 압축되어 실현 가능성에 의문.”</a:t>
+            </a:r>
+            <a:endParaRPr lang="en-US" sz="1150" dirty="0"/>
+          </a:p>
+        </p:txBody>
+      </p:sp>
+      <p:sp>
+        <p:nvSpPr>
           <p:cNvPr id="16" name="Shape 14"/>
           <p:cNvSpPr/>
           <p:nvPr/>
         </p:nvSpPr>
         <p:spPr>
           <a:xfrm>
-            <a:off x="8034528" y="2606040"/>
-            <a:ext cx="3331464" cy="2331720"/>
-          </a:xfrm>
-          <a:prstGeom prst="roundRect">
-            <a:avLst>
-              <a:gd name="adj" fmla="val 3137"/>
-            </a:avLst>
-          </a:prstGeom>
-          <a:solidFill>
-            <a:srgbClr val="FFFFFF"/>
-          </a:solidFill>
+            <a:off x="6400800" y="5257800"/>
+            <a:ext cx="228600" cy="0"/>
+          </a:xfrm>
+          <a:prstGeom prst="line">
+            <a:avLst/>
+          </a:prstGeom>
+          <a:noFill/>
+          <a:ln w="15875">
+            <a:solidFill>
+              <a:srgbClr val="3182F6"/>
+            </a:solidFill>
+            <a:prstDash val="solid"/>
+            <a:tailEnd type="triangle"/>
+          </a:ln>
+        </p:spPr>
+      </p:sp>
+      <p:sp>
+        <p:nvSpPr>
+          <p:cNvPr id="17" name="Text 15"/>
+          <p:cNvSpPr/>
+          <p:nvPr/>
+        </p:nvSpPr>
+        <p:spPr>
+          <a:xfrm>
+            <a:off x="6720840" y="5047488"/>
+            <a:ext cx="4645152" cy="548640"/>
+          </a:xfrm>
+          <a:prstGeom prst="rect">
+            <a:avLst/>
+          </a:prstGeom>
+          <a:noFill/>
+          <a:ln/>
+        </p:spPr>
+        <p:txBody>
+          <a:bodyPr wrap="square" lIns="0" tIns="0" rIns="0" bIns="0" rtlCol="0" anchor="t"/>
+          <a:lstStyle/>
+          <a:p>
+            <a:pPr indent="0" marL="0">
+              <a:lnSpc>
+                <a:spcPct val="112000"/>
+              </a:lnSpc>
+              <a:buNone/>
+            </a:pPr>
+            <a:r>
+              <a:rPr lang="en-US" sz="1300" b="1" dirty="0">
+                <a:solidFill>
+                  <a:srgbClr val="1B64DA"/>
+                </a:solidFill>
+                <a:latin typeface="Arial" pitchFamily="34" charset="0"/>
+                <a:ea typeface="Arial" pitchFamily="34" charset="-122"/>
+                <a:cs typeface="Arial" pitchFamily="34" charset="-120"/>
+              </a:rPr>
+              <a:t>검증 가능한 과정 — 커밋 22개·테스트 34개·측정 스크립트 공개</a:t>
+            </a:r>
+            <a:endParaRPr lang="en-US" sz="1300" dirty="0"/>
+          </a:p>
+        </p:txBody>
+      </p:sp>
+      <p:sp>
+        <p:nvSpPr>
+          <p:cNvPr id="18" name="Shape 16"/>
+          <p:cNvSpPr/>
+          <p:nvPr/>
+        </p:nvSpPr>
+        <p:spPr>
+          <a:xfrm>
+            <a:off x="822960" y="5989320"/>
+            <a:ext cx="10543032" cy="0"/>
+          </a:xfrm>
+          <a:prstGeom prst="line">
+            <a:avLst/>
+          </a:prstGeom>
+          <a:noFill/>
           <a:ln w="12700">
             <a:solidFill>
               <a:srgbClr val="E5E8EB"/>
@@ -3414,150 +3536,30 @@
       </p:sp>
       <p:sp>
         <p:nvSpPr>
-          <p:cNvPr id="17" name="Text 15"/>
-          <p:cNvSpPr/>
-          <p:nvPr/>
-        </p:nvSpPr>
-        <p:spPr>
-          <a:xfrm>
-            <a:off x="8263128" y="2743200"/>
-            <a:ext cx="2874264" cy="274320"/>
-          </a:xfrm>
-          <a:prstGeom prst="rect">
-            <a:avLst/>
-          </a:prstGeom>
-          <a:noFill/>
-          <a:ln/>
-        </p:spPr>
-        <p:txBody>
-          <a:bodyPr wrap="square" lIns="0" tIns="0" rIns="0" bIns="0" rtlCol="0" anchor="t"/>
-          <a:lstStyle/>
-          <a:p>
-            <a:pPr indent="0" marL="0">
-              <a:buNone/>
-            </a:pPr>
-            <a:r>
-              <a:rPr lang="en-US" sz="1200" b="1" dirty="0">
-                <a:solidFill>
-                  <a:srgbClr val="3182F6"/>
-                </a:solidFill>
-                <a:latin typeface="Arial" pitchFamily="34" charset="0"/>
-                <a:ea typeface="Arial" pitchFamily="34" charset="-122"/>
-                <a:cs typeface="Arial" pitchFamily="34" charset="-120"/>
-              </a:rPr>
-              <a:t>심사 중 · 평가위원</a:t>
-            </a:r>
-            <a:endParaRPr lang="en-US" sz="1200" dirty="0"/>
-          </a:p>
-        </p:txBody>
-      </p:sp>
-      <p:sp>
-        <p:nvSpPr>
-          <p:cNvPr id="18" name="Text 16"/>
-          <p:cNvSpPr/>
-          <p:nvPr/>
-        </p:nvSpPr>
-        <p:spPr>
-          <a:xfrm>
-            <a:off x="8263128" y="3090672"/>
-            <a:ext cx="2874264" cy="411480"/>
-          </a:xfrm>
-          <a:prstGeom prst="rect">
-            <a:avLst/>
-          </a:prstGeom>
-          <a:noFill/>
-          <a:ln/>
-        </p:spPr>
-        <p:txBody>
-          <a:bodyPr wrap="square" lIns="0" tIns="0" rIns="0" bIns="0" rtlCol="0" anchor="t"/>
-          <a:lstStyle/>
-          <a:p>
-            <a:pPr indent="0" marL="0">
-              <a:buNone/>
-            </a:pPr>
-            <a:r>
-              <a:rPr lang="en-US" sz="2000" b="1" dirty="0">
-                <a:solidFill>
-                  <a:srgbClr val="191F28"/>
-                </a:solidFill>
-                <a:latin typeface="Arial" pitchFamily="34" charset="0"/>
-                <a:ea typeface="Arial" pitchFamily="34" charset="-122"/>
-                <a:cs typeface="Arial" pitchFamily="34" charset="-120"/>
-              </a:rPr>
-              <a:t>근거 위치 표시</a:t>
-            </a:r>
-            <a:endParaRPr lang="en-US" sz="2000" dirty="0"/>
-          </a:p>
-        </p:txBody>
-      </p:sp>
-      <p:sp>
-        <p:nvSpPr>
           <p:cNvPr id="19" name="Text 17"/>
           <p:cNvSpPr/>
           <p:nvPr/>
         </p:nvSpPr>
         <p:spPr>
           <a:xfrm>
-            <a:off x="8263128" y="3611880"/>
-            <a:ext cx="2874264" cy="868680"/>
-          </a:xfrm>
-          <a:prstGeom prst="rect">
-            <a:avLst/>
-          </a:prstGeom>
-          <a:noFill/>
-          <a:ln/>
-        </p:spPr>
-        <p:txBody>
-          <a:bodyPr wrap="square" lIns="0" tIns="0" rIns="0" bIns="0" rtlCol="0" anchor="t"/>
-          <a:lstStyle/>
-          <a:p>
-            <a:pPr indent="0" marL="0">
-              <a:lnSpc>
-                <a:spcPct val="115000"/>
-              </a:lnSpc>
-              <a:buNone/>
-            </a:pPr>
-            <a:r>
-              <a:rPr lang="en-US" sz="1200" dirty="0">
-                <a:solidFill>
-                  <a:srgbClr val="4E5968"/>
-                </a:solidFill>
-                <a:latin typeface="Arial" pitchFamily="34" charset="0"/>
-                <a:ea typeface="Arial" pitchFamily="34" charset="-122"/>
-                <a:cs typeface="Arial" pitchFamily="34" charset="-120"/>
-              </a:rPr>
-              <a:t>지표마다 제안서의 근거 문장 위치를 옆에 띄워 심사 보조 — 판정은 사람</a:t>
-            </a:r>
-            <a:endParaRPr lang="en-US" sz="1200" dirty="0"/>
-          </a:p>
-        </p:txBody>
-      </p:sp>
-      <p:sp>
-        <p:nvSpPr>
-          <p:cNvPr id="20" name="Text 18"/>
-          <p:cNvSpPr/>
-          <p:nvPr/>
-        </p:nvSpPr>
-        <p:spPr>
-          <a:xfrm>
-            <a:off x="8263128" y="4526280"/>
-            <a:ext cx="2874264" cy="274320"/>
-          </a:xfrm>
-          <a:prstGeom prst="rect">
-            <a:avLst/>
-          </a:prstGeom>
-          <a:noFill/>
-          <a:ln/>
-        </p:spPr>
-        <p:txBody>
-          <a:bodyPr wrap="square" lIns="0" tIns="0" rIns="0" bIns="0" rtlCol="0" anchor="t"/>
-          <a:lstStyle/>
-          <a:p>
-            <a:pPr indent="0" marL="0">
-              <a:buNone/>
-            </a:pPr>
-            <a:r>
-              <a:rPr lang="en-US" sz="1150" b="1" dirty="0">
+            <a:off x="822960" y="6080760"/>
+            <a:ext cx="10543032" cy="274320"/>
+          </a:xfrm>
+          <a:prstGeom prst="rect">
+            <a:avLst/>
+          </a:prstGeom>
+          <a:noFill/>
+          <a:ln/>
+        </p:spPr>
+        <p:txBody>
+          <a:bodyPr wrap="square" lIns="0" tIns="0" rIns="0" bIns="0" rtlCol="0" anchor="t"/>
+          <a:lstStyle/>
+          <a:p>
+            <a:pPr indent="0" marL="0">
+              <a:buNone/>
+            </a:pPr>
+            <a:r>
+              <a:rPr lang="en-US" sz="1150" dirty="0">
                 <a:solidFill>
                   <a:srgbClr val="8B95A1"/>
                 </a:solidFill>
@@ -3565,105 +3567,9 @@
                 <a:ea typeface="Arial" pitchFamily="34" charset="-122"/>
                 <a:cs typeface="Arial" pitchFamily="34" charset="-120"/>
               </a:rPr>
-              <a:t>계획</a:t>
+              <a:t>항목 근거는 거의 다 있었지만 3개 관점이 전체 인상을 「보류」로 적었습니다 — 결과 예측이 아니라, 발표 전에 대비할 질문을 먼저 받은 것</a:t>
             </a:r>
             <a:endParaRPr lang="en-US" sz="1150" dirty="0"/>
-          </a:p>
-        </p:txBody>
-      </p:sp>
-      <p:sp>
-        <p:nvSpPr>
-          <p:cNvPr id="21" name="Text 19"/>
-          <p:cNvSpPr/>
-          <p:nvPr/>
-        </p:nvSpPr>
-        <p:spPr>
-          <a:xfrm>
-            <a:off x="822960" y="5166360"/>
-            <a:ext cx="10543032" cy="1005840"/>
-          </a:xfrm>
-          <a:prstGeom prst="rect">
-            <a:avLst/>
-          </a:prstGeom>
-          <a:noFill/>
-          <a:ln/>
-        </p:spPr>
-        <p:txBody>
-          <a:bodyPr wrap="square" lIns="0" tIns="0" rIns="0" bIns="0" rtlCol="0" anchor="t"/>
-          <a:lstStyle/>
-          <a:p>
-            <a:pPr indent="0" marL="0">
-              <a:lnSpc>
-                <a:spcPct val="130000"/>
-              </a:lnSpc>
-              <a:buNone/>
-            </a:pPr>
-            <a:r>
-              <a:rPr lang="en-US" sz="1250" b="1" dirty="0">
-                <a:solidFill>
-                  <a:srgbClr val="4E5968"/>
-                </a:solidFill>
-                <a:latin typeface="Arial" pitchFamily="34" charset="0"/>
-                <a:ea typeface="Arial" pitchFamily="34" charset="-122"/>
-                <a:cs typeface="Arial" pitchFamily="34" charset="-120"/>
-              </a:rPr>
-              <a:t>데이터가 쌓이는 방향 — </a:t>
-            </a:r>
-            <a:pPr indent="0" marL="0">
-              <a:lnSpc>
-                <a:spcPct val="130000"/>
-              </a:lnSpc>
-              <a:buNone/>
-            </a:pPr>
-            <a:r>
-              <a:rPr lang="en-US" sz="1250" dirty="0">
-                <a:solidFill>
-                  <a:srgbClr val="4E5968"/>
-                </a:solidFill>
-                <a:latin typeface="Arial" pitchFamily="34" charset="0"/>
-                <a:ea typeface="Arial" pitchFamily="34" charset="-122"/>
-                <a:cs typeface="Arial" pitchFamily="34" charset="-120"/>
-              </a:rPr>
-              <a:t>실제 심사 의견은 평가기관에 있습니다(멘토링). 전문기관과 연계하면 가상 평가위원을 실제 심사 의견 유형으로 보정합니다.</a:t>
-            </a:r>
-            <a:endParaRPr lang="en-US" sz="1250" dirty="0"/>
-          </a:p>
-          <a:p>
-            <a:pPr indent="0" marL="0">
-              <a:lnSpc>
-                <a:spcPct val="130000"/>
-              </a:lnSpc>
-              <a:buNone/>
-            </a:pPr>
-            <a:r>
-              <a:rPr lang="en-US" sz="1250" b="1" dirty="0">
-                <a:solidFill>
-                  <a:srgbClr val="4E5968"/>
-                </a:solidFill>
-                <a:latin typeface="Arial" pitchFamily="34" charset="0"/>
-                <a:ea typeface="Arial" pitchFamily="34" charset="-122"/>
-                <a:cs typeface="Arial" pitchFamily="34" charset="-120"/>
-              </a:rPr>
-              <a:t>연결 — </a:t>
-            </a:r>
-            <a:pPr indent="0" marL="0">
-              <a:lnSpc>
-                <a:spcPct val="130000"/>
-              </a:lnSpc>
-              <a:buNone/>
-            </a:pPr>
-            <a:r>
-              <a:rPr lang="en-US" sz="1250" dirty="0">
-                <a:solidFill>
-                  <a:srgbClr val="4E5968"/>
-                </a:solidFill>
-                <a:latin typeface="Arial" pitchFamily="34" charset="0"/>
-                <a:ea typeface="Arial" pitchFamily="34" charset="-122"/>
-                <a:cs typeface="Arial" pitchFamily="34" charset="-120"/>
-              </a:rPr>
-              <a:t>MCP 도구로 NAIS 플랫폼·연구자 AI 비서에 그대로 꽂히고, 같은 엔진이 연차·성과보고서(지표 대비 실적)와 연구비 정산(증빙 대비 항목)으로 넓어집니다.</a:t>
-            </a:r>
-            <a:endParaRPr lang="en-US" sz="1250" dirty="0"/>
           </a:p>
         </p:txBody>
       </p:sp>
@@ -3707,7 +3613,7 @@
         </p:nvSpPr>
         <p:spPr>
           <a:xfrm>
-            <a:off x="822960" y="1051560"/>
+            <a:off x="822960" y="548640"/>
             <a:ext cx="7315200" cy="365760"/>
           </a:xfrm>
           <a:prstGeom prst="rect">
@@ -3732,7 +3638,7 @@
                 <a:ea typeface="Arial" pitchFamily="34" charset="-122"/>
                 <a:cs typeface="Arial" pitchFamily="34" charset="-120"/>
               </a:rPr>
-              <a:t>지금 직접 해 보세요 — 공고 링크 하나, 초안 하나</a:t>
+              <a:t>확장 — 같은 엔진, 세 개의 시점</a:t>
             </a:r>
             <a:endParaRPr lang="en-US" sz="1400" dirty="0"/>
           </a:p>
@@ -3746,8 +3652,8 @@
         </p:nvSpPr>
         <p:spPr>
           <a:xfrm>
-            <a:off x="795528" y="1645920"/>
-            <a:ext cx="10543032" cy="2103120"/>
+            <a:off x="795528" y="960120"/>
+            <a:ext cx="10543032" cy="1371600"/>
           </a:xfrm>
           <a:prstGeom prst="rect">
             <a:avLst/>
@@ -3766,7 +3672,7 @@
               <a:buNone/>
             </a:pPr>
             <a:r>
-              <a:rPr lang="en-US" sz="4600" b="1" dirty="0">
+              <a:rPr lang="en-US" sz="3400" b="1" dirty="0">
                 <a:solidFill>
                   <a:srgbClr val="191F28"/>
                 </a:solidFill>
@@ -3774,9 +3680,9 @@
                 <a:ea typeface="Arial" pitchFamily="34" charset="-122"/>
                 <a:cs typeface="Arial" pitchFamily="34" charset="-120"/>
               </a:rPr>
-              <a:t>심사위원 여섯 명이,</a:t>
-            </a:r>
-            <a:endParaRPr lang="en-US" sz="4600" dirty="0"/>
+              <a:t>제출 전 → 접수 후 → 심사 중,</a:t>
+            </a:r>
+            <a:endParaRPr lang="en-US" sz="3400" dirty="0"/>
           </a:p>
           <a:p>
             <a:pPr indent="0" marL="0">
@@ -3786,7 +3692,7 @@
               <a:buNone/>
             </a:pPr>
             <a:r>
-              <a:rPr lang="en-US" sz="4600" b="1" dirty="0">
+              <a:rPr lang="en-US" sz="3400" b="1" dirty="0">
                 <a:solidFill>
                   <a:srgbClr val="3182F6"/>
                 </a:solidFill>
@@ -3794,7 +3700,7 @@
                 <a:ea typeface="Arial" pitchFamily="34" charset="-122"/>
                 <a:cs typeface="Arial" pitchFamily="34" charset="-120"/>
               </a:rPr>
-              <a:t>먼저</a:t>
+              <a:t>같은 엔진</a:t>
             </a:r>
             <a:pPr indent="0" marL="0">
               <a:lnSpc>
@@ -3803,7 +3709,7 @@
               <a:buNone/>
             </a:pPr>
             <a:r>
-              <a:rPr lang="en-US" sz="4600" b="1" dirty="0">
+              <a:rPr lang="en-US" sz="3400" b="1" dirty="0">
                 <a:solidFill>
                   <a:srgbClr val="191F28"/>
                 </a:solidFill>
@@ -3811,9 +3717,861 @@
                 <a:ea typeface="Arial" pitchFamily="34" charset="-122"/>
                 <a:cs typeface="Arial" pitchFamily="34" charset="-120"/>
               </a:rPr>
-              <a:t> 읽어 드립니다.</a:t>
-            </a:r>
-            <a:endParaRPr lang="en-US" sz="4600" dirty="0"/>
+              <a:t>이 이어집니다</a:t>
+            </a:r>
+            <a:endParaRPr lang="en-US" sz="3400" dirty="0"/>
+          </a:p>
+        </p:txBody>
+      </p:sp>
+      <p:sp>
+        <p:nvSpPr>
+          <p:cNvPr id="4" name="Shape 2"/>
+          <p:cNvSpPr/>
+          <p:nvPr/>
+        </p:nvSpPr>
+        <p:spPr>
+          <a:xfrm>
+            <a:off x="822960" y="2606040"/>
+            <a:ext cx="3331464" cy="2331720"/>
+          </a:xfrm>
+          <a:prstGeom prst="roundRect">
+            <a:avLst>
+              <a:gd name="adj" fmla="val 3137"/>
+            </a:avLst>
+          </a:prstGeom>
+          <a:solidFill>
+            <a:srgbClr val="EAF3FF"/>
+          </a:solidFill>
+          <a:ln w="12700">
+            <a:solidFill>
+              <a:srgbClr val="3182F6"/>
+            </a:solidFill>
+            <a:prstDash val="solid"/>
+          </a:ln>
+        </p:spPr>
+      </p:sp>
+      <p:sp>
+        <p:nvSpPr>
+          <p:cNvPr id="5" name="Text 3"/>
+          <p:cNvSpPr/>
+          <p:nvPr/>
+        </p:nvSpPr>
+        <p:spPr>
+          <a:xfrm>
+            <a:off x="1051560" y="2743200"/>
+            <a:ext cx="2874264" cy="274320"/>
+          </a:xfrm>
+          <a:prstGeom prst="rect">
+            <a:avLst/>
+          </a:prstGeom>
+          <a:noFill/>
+          <a:ln/>
+        </p:spPr>
+        <p:txBody>
+          <a:bodyPr wrap="square" lIns="0" tIns="0" rIns="0" bIns="0" rtlCol="0" anchor="t"/>
+          <a:lstStyle/>
+          <a:p>
+            <a:pPr indent="0" marL="0">
+              <a:buNone/>
+            </a:pPr>
+            <a:r>
+              <a:rPr lang="en-US" sz="1200" b="1" dirty="0">
+                <a:solidFill>
+                  <a:srgbClr val="3182F6"/>
+                </a:solidFill>
+                <a:latin typeface="Arial" pitchFamily="34" charset="0"/>
+                <a:ea typeface="Arial" pitchFamily="34" charset="-122"/>
+                <a:cs typeface="Arial" pitchFamily="34" charset="-120"/>
+              </a:rPr>
+              <a:t>제출 전 · 연구자</a:t>
+            </a:r>
+            <a:endParaRPr lang="en-US" sz="1200" dirty="0"/>
+          </a:p>
+        </p:txBody>
+      </p:sp>
+      <p:sp>
+        <p:nvSpPr>
+          <p:cNvPr id="6" name="Text 4"/>
+          <p:cNvSpPr/>
+          <p:nvPr/>
+        </p:nvSpPr>
+        <p:spPr>
+          <a:xfrm>
+            <a:off x="1051560" y="3090672"/>
+            <a:ext cx="2874264" cy="411480"/>
+          </a:xfrm>
+          <a:prstGeom prst="rect">
+            <a:avLst/>
+          </a:prstGeom>
+          <a:noFill/>
+          <a:ln/>
+        </p:spPr>
+        <p:txBody>
+          <a:bodyPr wrap="square" lIns="0" tIns="0" rIns="0" bIns="0" rtlCol="0" anchor="t"/>
+          <a:lstStyle/>
+          <a:p>
+            <a:pPr indent="0" marL="0">
+              <a:buNone/>
+            </a:pPr>
+            <a:r>
+              <a:rPr lang="en-US" sz="2000" b="1" dirty="0">
+                <a:solidFill>
+                  <a:srgbClr val="191F28"/>
+                </a:solidFill>
+                <a:latin typeface="Arial" pitchFamily="34" charset="0"/>
+                <a:ea typeface="Arial" pitchFamily="34" charset="-122"/>
+                <a:cs typeface="Arial" pitchFamily="34" charset="-120"/>
+              </a:rPr>
+              <a:t>셀프 점검</a:t>
+            </a:r>
+            <a:endParaRPr lang="en-US" sz="2000" dirty="0"/>
+          </a:p>
+        </p:txBody>
+      </p:sp>
+      <p:sp>
+        <p:nvSpPr>
+          <p:cNvPr id="7" name="Text 5"/>
+          <p:cNvSpPr/>
+          <p:nvPr/>
+        </p:nvSpPr>
+        <p:spPr>
+          <a:xfrm>
+            <a:off x="1051560" y="3611880"/>
+            <a:ext cx="2874264" cy="868680"/>
+          </a:xfrm>
+          <a:prstGeom prst="rect">
+            <a:avLst/>
+          </a:prstGeom>
+          <a:noFill/>
+          <a:ln/>
+        </p:spPr>
+        <p:txBody>
+          <a:bodyPr wrap="square" lIns="0" tIns="0" rIns="0" bIns="0" rtlCol="0" anchor="t"/>
+          <a:lstStyle/>
+          <a:p>
+            <a:pPr indent="0" marL="0">
+              <a:lnSpc>
+                <a:spcPct val="115000"/>
+              </a:lnSpc>
+              <a:buNone/>
+            </a:pPr>
+            <a:r>
+              <a:rPr lang="en-US" sz="1200" dirty="0">
+                <a:solidFill>
+                  <a:srgbClr val="4E5968"/>
+                </a:solidFill>
+                <a:latin typeface="Arial" pitchFamily="34" charset="0"/>
+                <a:ea typeface="Arial" pitchFamily="34" charset="-122"/>
+                <a:cs typeface="Arial" pitchFamily="34" charset="-120"/>
+              </a:rPr>
+              <a:t>고칠 곳·판단할 곳·관점별로 걸리는 점</a:t>
+            </a:r>
+            <a:endParaRPr lang="en-US" sz="1200" dirty="0"/>
+          </a:p>
+        </p:txBody>
+      </p:sp>
+      <p:sp>
+        <p:nvSpPr>
+          <p:cNvPr id="8" name="Text 6"/>
+          <p:cNvSpPr/>
+          <p:nvPr/>
+        </p:nvSpPr>
+        <p:spPr>
+          <a:xfrm>
+            <a:off x="1051560" y="4526280"/>
+            <a:ext cx="2874264" cy="274320"/>
+          </a:xfrm>
+          <a:prstGeom prst="rect">
+            <a:avLst/>
+          </a:prstGeom>
+          <a:noFill/>
+          <a:ln/>
+        </p:spPr>
+        <p:txBody>
+          <a:bodyPr wrap="square" lIns="0" tIns="0" rIns="0" bIns="0" rtlCol="0" anchor="t"/>
+          <a:lstStyle/>
+          <a:p>
+            <a:pPr indent="0" marL="0">
+              <a:buNone/>
+            </a:pPr>
+            <a:r>
+              <a:rPr lang="en-US" sz="1150" b="1" dirty="0">
+                <a:solidFill>
+                  <a:srgbClr val="1B64DA"/>
+                </a:solidFill>
+                <a:latin typeface="Arial" pitchFamily="34" charset="0"/>
+                <a:ea typeface="Arial" pitchFamily="34" charset="-122"/>
+                <a:cs typeface="Arial" pitchFamily="34" charset="-120"/>
+              </a:rPr>
+              <a:t>지금 이 앱 — 구현</a:t>
+            </a:r>
+            <a:endParaRPr lang="en-US" sz="1150" dirty="0"/>
+          </a:p>
+        </p:txBody>
+      </p:sp>
+      <p:sp>
+        <p:nvSpPr>
+          <p:cNvPr id="9" name="Shape 7"/>
+          <p:cNvSpPr/>
+          <p:nvPr/>
+        </p:nvSpPr>
+        <p:spPr>
+          <a:xfrm>
+            <a:off x="4181856" y="3749040"/>
+            <a:ext cx="219456" cy="0"/>
+          </a:xfrm>
+          <a:prstGeom prst="line">
+            <a:avLst/>
+          </a:prstGeom>
+          <a:noFill/>
+          <a:ln w="15875">
+            <a:solidFill>
+              <a:srgbClr val="3182F6"/>
+            </a:solidFill>
+            <a:prstDash val="solid"/>
+            <a:tailEnd type="triangle"/>
+          </a:ln>
+        </p:spPr>
+      </p:sp>
+      <p:sp>
+        <p:nvSpPr>
+          <p:cNvPr id="10" name="Shape 8"/>
+          <p:cNvSpPr/>
+          <p:nvPr/>
+        </p:nvSpPr>
+        <p:spPr>
+          <a:xfrm>
+            <a:off x="4428744" y="2606040"/>
+            <a:ext cx="3331464" cy="2331720"/>
+          </a:xfrm>
+          <a:prstGeom prst="roundRect">
+            <a:avLst>
+              <a:gd name="adj" fmla="val 3137"/>
+            </a:avLst>
+          </a:prstGeom>
+          <a:solidFill>
+            <a:srgbClr val="FFFFFF"/>
+          </a:solidFill>
+          <a:ln w="12700">
+            <a:solidFill>
+              <a:srgbClr val="E5E8EB"/>
+            </a:solidFill>
+            <a:prstDash val="solid"/>
+          </a:ln>
+        </p:spPr>
+      </p:sp>
+      <p:sp>
+        <p:nvSpPr>
+          <p:cNvPr id="11" name="Text 9"/>
+          <p:cNvSpPr/>
+          <p:nvPr/>
+        </p:nvSpPr>
+        <p:spPr>
+          <a:xfrm>
+            <a:off x="4657344" y="2743200"/>
+            <a:ext cx="2874264" cy="274320"/>
+          </a:xfrm>
+          <a:prstGeom prst="rect">
+            <a:avLst/>
+          </a:prstGeom>
+          <a:noFill/>
+          <a:ln/>
+        </p:spPr>
+        <p:txBody>
+          <a:bodyPr wrap="square" lIns="0" tIns="0" rIns="0" bIns="0" rtlCol="0" anchor="t"/>
+          <a:lstStyle/>
+          <a:p>
+            <a:pPr indent="0" marL="0">
+              <a:buNone/>
+            </a:pPr>
+            <a:r>
+              <a:rPr lang="en-US" sz="1200" b="1" dirty="0">
+                <a:solidFill>
+                  <a:srgbClr val="3182F6"/>
+                </a:solidFill>
+                <a:latin typeface="Arial" pitchFamily="34" charset="0"/>
+                <a:ea typeface="Arial" pitchFamily="34" charset="-122"/>
+                <a:cs typeface="Arial" pitchFamily="34" charset="-120"/>
+              </a:rPr>
+              <a:t>접수 후 · 전문기관</a:t>
+            </a:r>
+            <a:endParaRPr lang="en-US" sz="1200" dirty="0"/>
+          </a:p>
+        </p:txBody>
+      </p:sp>
+      <p:sp>
+        <p:nvSpPr>
+          <p:cNvPr id="12" name="Text 10"/>
+          <p:cNvSpPr/>
+          <p:nvPr/>
+        </p:nvSpPr>
+        <p:spPr>
+          <a:xfrm>
+            <a:off x="4657344" y="3090672"/>
+            <a:ext cx="2874264" cy="411480"/>
+          </a:xfrm>
+          <a:prstGeom prst="rect">
+            <a:avLst/>
+          </a:prstGeom>
+          <a:noFill/>
+          <a:ln/>
+        </p:spPr>
+        <p:txBody>
+          <a:bodyPr wrap="square" lIns="0" tIns="0" rIns="0" bIns="0" rtlCol="0" anchor="t"/>
+          <a:lstStyle/>
+          <a:p>
+            <a:pPr indent="0" marL="0">
+              <a:buNone/>
+            </a:pPr>
+            <a:r>
+              <a:rPr lang="en-US" sz="2000" b="1" dirty="0">
+                <a:solidFill>
+                  <a:srgbClr val="191F28"/>
+                </a:solidFill>
+                <a:latin typeface="Arial" pitchFamily="34" charset="0"/>
+                <a:ea typeface="Arial" pitchFamily="34" charset="-122"/>
+                <a:cs typeface="Arial" pitchFamily="34" charset="-120"/>
+              </a:rPr>
+              <a:t>요건 사전검토</a:t>
+            </a:r>
+            <a:endParaRPr lang="en-US" sz="2000" dirty="0"/>
+          </a:p>
+        </p:txBody>
+      </p:sp>
+      <p:sp>
+        <p:nvSpPr>
+          <p:cNvPr id="13" name="Text 11"/>
+          <p:cNvSpPr/>
+          <p:nvPr/>
+        </p:nvSpPr>
+        <p:spPr>
+          <a:xfrm>
+            <a:off x="4657344" y="3611880"/>
+            <a:ext cx="2874264" cy="868680"/>
+          </a:xfrm>
+          <a:prstGeom prst="rect">
+            <a:avLst/>
+          </a:prstGeom>
+          <a:noFill/>
+          <a:ln/>
+        </p:spPr>
+        <p:txBody>
+          <a:bodyPr wrap="square" lIns="0" tIns="0" rIns="0" bIns="0" rtlCol="0" anchor="t"/>
+          <a:lstStyle/>
+          <a:p>
+            <a:pPr indent="0" marL="0">
+              <a:lnSpc>
+                <a:spcPct val="115000"/>
+              </a:lnSpc>
+              <a:buNone/>
+            </a:pPr>
+            <a:r>
+              <a:rPr lang="en-US" sz="1200" dirty="0">
+                <a:solidFill>
+                  <a:srgbClr val="4E5968"/>
+                </a:solidFill>
+                <a:latin typeface="Arial" pitchFamily="34" charset="0"/>
+                <a:ea typeface="Arial" pitchFamily="34" charset="-122"/>
+                <a:cs typeface="Arial" pitchFamily="34" charset="-120"/>
+              </a:rPr>
+              <a:t>같은 요건 매트릭스로 형식 미비·필수 서류 누락을 먼저 걸러 담당자 검토 시간 단축</a:t>
+            </a:r>
+            <a:endParaRPr lang="en-US" sz="1200" dirty="0"/>
+          </a:p>
+        </p:txBody>
+      </p:sp>
+      <p:sp>
+        <p:nvSpPr>
+          <p:cNvPr id="14" name="Text 12"/>
+          <p:cNvSpPr/>
+          <p:nvPr/>
+        </p:nvSpPr>
+        <p:spPr>
+          <a:xfrm>
+            <a:off x="4657344" y="4526280"/>
+            <a:ext cx="2874264" cy="274320"/>
+          </a:xfrm>
+          <a:prstGeom prst="rect">
+            <a:avLst/>
+          </a:prstGeom>
+          <a:noFill/>
+          <a:ln/>
+        </p:spPr>
+        <p:txBody>
+          <a:bodyPr wrap="square" lIns="0" tIns="0" rIns="0" bIns="0" rtlCol="0" anchor="t"/>
+          <a:lstStyle/>
+          <a:p>
+            <a:pPr indent="0" marL="0">
+              <a:buNone/>
+            </a:pPr>
+            <a:r>
+              <a:rPr lang="en-US" sz="1150" b="1" dirty="0">
+                <a:solidFill>
+                  <a:srgbClr val="8B95A1"/>
+                </a:solidFill>
+                <a:latin typeface="Arial" pitchFamily="34" charset="0"/>
+                <a:ea typeface="Arial" pitchFamily="34" charset="-122"/>
+                <a:cs typeface="Arial" pitchFamily="34" charset="-120"/>
+              </a:rPr>
+              <a:t>첫 실증 목표 — 계획</a:t>
+            </a:r>
+            <a:endParaRPr lang="en-US" sz="1150" dirty="0"/>
+          </a:p>
+        </p:txBody>
+      </p:sp>
+      <p:sp>
+        <p:nvSpPr>
+          <p:cNvPr id="15" name="Shape 13"/>
+          <p:cNvSpPr/>
+          <p:nvPr/>
+        </p:nvSpPr>
+        <p:spPr>
+          <a:xfrm>
+            <a:off x="7787640" y="3749040"/>
+            <a:ext cx="219456" cy="0"/>
+          </a:xfrm>
+          <a:prstGeom prst="line">
+            <a:avLst/>
+          </a:prstGeom>
+          <a:noFill/>
+          <a:ln w="15875">
+            <a:solidFill>
+              <a:srgbClr val="3182F6"/>
+            </a:solidFill>
+            <a:prstDash val="solid"/>
+            <a:tailEnd type="triangle"/>
+          </a:ln>
+        </p:spPr>
+      </p:sp>
+      <p:sp>
+        <p:nvSpPr>
+          <p:cNvPr id="16" name="Shape 14"/>
+          <p:cNvSpPr/>
+          <p:nvPr/>
+        </p:nvSpPr>
+        <p:spPr>
+          <a:xfrm>
+            <a:off x="8034528" y="2606040"/>
+            <a:ext cx="3331464" cy="2331720"/>
+          </a:xfrm>
+          <a:prstGeom prst="roundRect">
+            <a:avLst>
+              <a:gd name="adj" fmla="val 3137"/>
+            </a:avLst>
+          </a:prstGeom>
+          <a:solidFill>
+            <a:srgbClr val="FFFFFF"/>
+          </a:solidFill>
+          <a:ln w="12700">
+            <a:solidFill>
+              <a:srgbClr val="E5E8EB"/>
+            </a:solidFill>
+            <a:prstDash val="solid"/>
+          </a:ln>
+        </p:spPr>
+      </p:sp>
+      <p:sp>
+        <p:nvSpPr>
+          <p:cNvPr id="17" name="Text 15"/>
+          <p:cNvSpPr/>
+          <p:nvPr/>
+        </p:nvSpPr>
+        <p:spPr>
+          <a:xfrm>
+            <a:off x="8263128" y="2743200"/>
+            <a:ext cx="2874264" cy="274320"/>
+          </a:xfrm>
+          <a:prstGeom prst="rect">
+            <a:avLst/>
+          </a:prstGeom>
+          <a:noFill/>
+          <a:ln/>
+        </p:spPr>
+        <p:txBody>
+          <a:bodyPr wrap="square" lIns="0" tIns="0" rIns="0" bIns="0" rtlCol="0" anchor="t"/>
+          <a:lstStyle/>
+          <a:p>
+            <a:pPr indent="0" marL="0">
+              <a:buNone/>
+            </a:pPr>
+            <a:r>
+              <a:rPr lang="en-US" sz="1200" b="1" dirty="0">
+                <a:solidFill>
+                  <a:srgbClr val="3182F6"/>
+                </a:solidFill>
+                <a:latin typeface="Arial" pitchFamily="34" charset="0"/>
+                <a:ea typeface="Arial" pitchFamily="34" charset="-122"/>
+                <a:cs typeface="Arial" pitchFamily="34" charset="-120"/>
+              </a:rPr>
+              <a:t>심사 중 · 평가위원</a:t>
+            </a:r>
+            <a:endParaRPr lang="en-US" sz="1200" dirty="0"/>
+          </a:p>
+        </p:txBody>
+      </p:sp>
+      <p:sp>
+        <p:nvSpPr>
+          <p:cNvPr id="18" name="Text 16"/>
+          <p:cNvSpPr/>
+          <p:nvPr/>
+        </p:nvSpPr>
+        <p:spPr>
+          <a:xfrm>
+            <a:off x="8263128" y="3090672"/>
+            <a:ext cx="2874264" cy="411480"/>
+          </a:xfrm>
+          <a:prstGeom prst="rect">
+            <a:avLst/>
+          </a:prstGeom>
+          <a:noFill/>
+          <a:ln/>
+        </p:spPr>
+        <p:txBody>
+          <a:bodyPr wrap="square" lIns="0" tIns="0" rIns="0" bIns="0" rtlCol="0" anchor="t"/>
+          <a:lstStyle/>
+          <a:p>
+            <a:pPr indent="0" marL="0">
+              <a:buNone/>
+            </a:pPr>
+            <a:r>
+              <a:rPr lang="en-US" sz="2000" b="1" dirty="0">
+                <a:solidFill>
+                  <a:srgbClr val="191F28"/>
+                </a:solidFill>
+                <a:latin typeface="Arial" pitchFamily="34" charset="0"/>
+                <a:ea typeface="Arial" pitchFamily="34" charset="-122"/>
+                <a:cs typeface="Arial" pitchFamily="34" charset="-120"/>
+              </a:rPr>
+              <a:t>근거 위치 표시</a:t>
+            </a:r>
+            <a:endParaRPr lang="en-US" sz="2000" dirty="0"/>
+          </a:p>
+        </p:txBody>
+      </p:sp>
+      <p:sp>
+        <p:nvSpPr>
+          <p:cNvPr id="19" name="Text 17"/>
+          <p:cNvSpPr/>
+          <p:nvPr/>
+        </p:nvSpPr>
+        <p:spPr>
+          <a:xfrm>
+            <a:off x="8263128" y="3611880"/>
+            <a:ext cx="2874264" cy="868680"/>
+          </a:xfrm>
+          <a:prstGeom prst="rect">
+            <a:avLst/>
+          </a:prstGeom>
+          <a:noFill/>
+          <a:ln/>
+        </p:spPr>
+        <p:txBody>
+          <a:bodyPr wrap="square" lIns="0" tIns="0" rIns="0" bIns="0" rtlCol="0" anchor="t"/>
+          <a:lstStyle/>
+          <a:p>
+            <a:pPr indent="0" marL="0">
+              <a:lnSpc>
+                <a:spcPct val="115000"/>
+              </a:lnSpc>
+              <a:buNone/>
+            </a:pPr>
+            <a:r>
+              <a:rPr lang="en-US" sz="1200" dirty="0">
+                <a:solidFill>
+                  <a:srgbClr val="4E5968"/>
+                </a:solidFill>
+                <a:latin typeface="Arial" pitchFamily="34" charset="0"/>
+                <a:ea typeface="Arial" pitchFamily="34" charset="-122"/>
+                <a:cs typeface="Arial" pitchFamily="34" charset="-120"/>
+              </a:rPr>
+              <a:t>지표마다 제안서의 근거 문장 위치를 옆에 띄워 심사 보조 — 판정은 사람</a:t>
+            </a:r>
+            <a:endParaRPr lang="en-US" sz="1200" dirty="0"/>
+          </a:p>
+        </p:txBody>
+      </p:sp>
+      <p:sp>
+        <p:nvSpPr>
+          <p:cNvPr id="20" name="Text 18"/>
+          <p:cNvSpPr/>
+          <p:nvPr/>
+        </p:nvSpPr>
+        <p:spPr>
+          <a:xfrm>
+            <a:off x="8263128" y="4526280"/>
+            <a:ext cx="2874264" cy="274320"/>
+          </a:xfrm>
+          <a:prstGeom prst="rect">
+            <a:avLst/>
+          </a:prstGeom>
+          <a:noFill/>
+          <a:ln/>
+        </p:spPr>
+        <p:txBody>
+          <a:bodyPr wrap="square" lIns="0" tIns="0" rIns="0" bIns="0" rtlCol="0" anchor="t"/>
+          <a:lstStyle/>
+          <a:p>
+            <a:pPr indent="0" marL="0">
+              <a:buNone/>
+            </a:pPr>
+            <a:r>
+              <a:rPr lang="en-US" sz="1150" b="1" dirty="0">
+                <a:solidFill>
+                  <a:srgbClr val="8B95A1"/>
+                </a:solidFill>
+                <a:latin typeface="Arial" pitchFamily="34" charset="0"/>
+                <a:ea typeface="Arial" pitchFamily="34" charset="-122"/>
+                <a:cs typeface="Arial" pitchFamily="34" charset="-120"/>
+              </a:rPr>
+              <a:t>계획</a:t>
+            </a:r>
+            <a:endParaRPr lang="en-US" sz="1150" dirty="0"/>
+          </a:p>
+        </p:txBody>
+      </p:sp>
+      <p:sp>
+        <p:nvSpPr>
+          <p:cNvPr id="21" name="Text 19"/>
+          <p:cNvSpPr/>
+          <p:nvPr/>
+        </p:nvSpPr>
+        <p:spPr>
+          <a:xfrm>
+            <a:off x="822960" y="5166360"/>
+            <a:ext cx="10543032" cy="1005840"/>
+          </a:xfrm>
+          <a:prstGeom prst="rect">
+            <a:avLst/>
+          </a:prstGeom>
+          <a:noFill/>
+          <a:ln/>
+        </p:spPr>
+        <p:txBody>
+          <a:bodyPr wrap="square" lIns="0" tIns="0" rIns="0" bIns="0" rtlCol="0" anchor="t"/>
+          <a:lstStyle/>
+          <a:p>
+            <a:pPr indent="0" marL="0">
+              <a:lnSpc>
+                <a:spcPct val="130000"/>
+              </a:lnSpc>
+              <a:buNone/>
+            </a:pPr>
+            <a:r>
+              <a:rPr lang="en-US" sz="1250" b="1" dirty="0">
+                <a:solidFill>
+                  <a:srgbClr val="4E5968"/>
+                </a:solidFill>
+                <a:latin typeface="Arial" pitchFamily="34" charset="0"/>
+                <a:ea typeface="Arial" pitchFamily="34" charset="-122"/>
+                <a:cs typeface="Arial" pitchFamily="34" charset="-120"/>
+              </a:rPr>
+              <a:t>데이터가 쌓이는 방향 — </a:t>
+            </a:r>
+            <a:pPr indent="0" marL="0">
+              <a:lnSpc>
+                <a:spcPct val="130000"/>
+              </a:lnSpc>
+              <a:buNone/>
+            </a:pPr>
+            <a:r>
+              <a:rPr lang="en-US" sz="1250" dirty="0">
+                <a:solidFill>
+                  <a:srgbClr val="4E5968"/>
+                </a:solidFill>
+                <a:latin typeface="Arial" pitchFamily="34" charset="0"/>
+                <a:ea typeface="Arial" pitchFamily="34" charset="-122"/>
+                <a:cs typeface="Arial" pitchFamily="34" charset="-120"/>
+              </a:rPr>
+              <a:t>실제 심사 의견은 평가기관에 있습니다(멘토링). 전문기관과 연계하면 가상 평가위원을 실제 심사 의견 유형으로 보정합니다.</a:t>
+            </a:r>
+            <a:endParaRPr lang="en-US" sz="1250" dirty="0"/>
+          </a:p>
+          <a:p>
+            <a:pPr indent="0" marL="0">
+              <a:lnSpc>
+                <a:spcPct val="130000"/>
+              </a:lnSpc>
+              <a:buNone/>
+            </a:pPr>
+            <a:r>
+              <a:rPr lang="en-US" sz="1250" b="1" dirty="0">
+                <a:solidFill>
+                  <a:srgbClr val="4E5968"/>
+                </a:solidFill>
+                <a:latin typeface="Arial" pitchFamily="34" charset="0"/>
+                <a:ea typeface="Arial" pitchFamily="34" charset="-122"/>
+                <a:cs typeface="Arial" pitchFamily="34" charset="-120"/>
+              </a:rPr>
+              <a:t>연결 — </a:t>
+            </a:r>
+            <a:pPr indent="0" marL="0">
+              <a:lnSpc>
+                <a:spcPct val="130000"/>
+              </a:lnSpc>
+              <a:buNone/>
+            </a:pPr>
+            <a:r>
+              <a:rPr lang="en-US" sz="1250" dirty="0">
+                <a:solidFill>
+                  <a:srgbClr val="4E5968"/>
+                </a:solidFill>
+                <a:latin typeface="Arial" pitchFamily="34" charset="0"/>
+                <a:ea typeface="Arial" pitchFamily="34" charset="-122"/>
+                <a:cs typeface="Arial" pitchFamily="34" charset="-120"/>
+              </a:rPr>
+              <a:t>MCP 도구로 NAIS 플랫폼·연구자 AI 비서에 그대로 꽂히고, 같은 엔진이 연차·성과보고서(지표 대비 실적)와 연구비 정산(증빙 대비 항목)으로 넓어집니다.</a:t>
+            </a:r>
+            <a:endParaRPr lang="en-US" sz="1250" dirty="0"/>
+          </a:p>
+        </p:txBody>
+      </p:sp>
+    </p:spTree>
+  </p:cSld>
+  <p:clrMapOvr>
+    <a:masterClrMapping/>
+  </p:clrMapOvr>
+</p:sld>
+</file>
+
+<file path=ppt/slides/slide13.xml><?xml version="1.0" encoding="utf-8"?>
+<p:sld xmlns:a="http://schemas.openxmlformats.org/drawingml/2006/main" xmlns:r="http://schemas.openxmlformats.org/officeDocument/2006/relationships" xmlns:p="http://schemas.openxmlformats.org/presentationml/2006/main">
+  <p:cSld name="Slide 13">
+    <p:bg>
+      <p:bgPr>
+        <a:solidFill>
+          <a:srgbClr val="FFFFFF"/>
+        </a:solidFill>
+      </p:bgPr>
+    </p:bg>
+    <p:spTree>
+      <p:nvGrpSpPr>
+        <p:cNvPr id="1" name=""/>
+        <p:cNvGrpSpPr/>
+        <p:nvPr/>
+      </p:nvGrpSpPr>
+      <p:grpSpPr>
+        <a:xfrm>
+          <a:off x="0" y="0"/>
+          <a:ext cx="0" cy="0"/>
+          <a:chOff x="0" y="0"/>
+          <a:chExt cx="0" cy="0"/>
+        </a:xfrm>
+      </p:grpSpPr>
+      <p:sp>
+        <p:nvSpPr>
+          <p:cNvPr id="2" name="Text 0"/>
+          <p:cNvSpPr/>
+          <p:nvPr/>
+        </p:nvSpPr>
+        <p:spPr>
+          <a:xfrm>
+            <a:off x="822960" y="1051560"/>
+            <a:ext cx="7315200" cy="365760"/>
+          </a:xfrm>
+          <a:prstGeom prst="rect">
+            <a:avLst/>
+          </a:prstGeom>
+          <a:noFill/>
+          <a:ln/>
+        </p:spPr>
+        <p:txBody>
+          <a:bodyPr wrap="square" lIns="0" tIns="0" rIns="0" bIns="0" rtlCol="0" anchor="t"/>
+          <a:lstStyle/>
+          <a:p>
+            <a:pPr indent="0" marL="0">
+              <a:buNone/>
+            </a:pPr>
+            <a:r>
+              <a:rPr lang="en-US" sz="1400" b="1" dirty="0">
+                <a:solidFill>
+                  <a:srgbClr val="3182F6"/>
+                </a:solidFill>
+                <a:latin typeface="Arial" pitchFamily="34" charset="0"/>
+                <a:ea typeface="Arial" pitchFamily="34" charset="-122"/>
+                <a:cs typeface="Arial" pitchFamily="34" charset="-120"/>
+              </a:rPr>
+              <a:t>지금 직접 해 보세요 — 공고 링크 하나, 초안 하나</a:t>
+            </a:r>
+            <a:endParaRPr lang="en-US" sz="1400" dirty="0"/>
+          </a:p>
+        </p:txBody>
+      </p:sp>
+      <p:sp>
+        <p:nvSpPr>
+          <p:cNvPr id="3" name="Text 1"/>
+          <p:cNvSpPr/>
+          <p:nvPr/>
+        </p:nvSpPr>
+        <p:spPr>
+          <a:xfrm>
+            <a:off x="795528" y="1645920"/>
+            <a:ext cx="10543032" cy="2103120"/>
+          </a:xfrm>
+          <a:prstGeom prst="rect">
+            <a:avLst/>
+          </a:prstGeom>
+          <a:noFill/>
+          <a:ln/>
+        </p:spPr>
+        <p:txBody>
+          <a:bodyPr wrap="square" lIns="0" tIns="0" rIns="0" bIns="0" rtlCol="0" anchor="t"/>
+          <a:lstStyle/>
+          <a:p>
+            <a:pPr indent="0" marL="0">
+              <a:lnSpc>
+                <a:spcPct val="112000"/>
+              </a:lnSpc>
+              <a:buNone/>
+            </a:pPr>
+            <a:r>
+              <a:rPr lang="en-US" sz="5200" b="1" dirty="0">
+                <a:solidFill>
+                  <a:srgbClr val="191F28"/>
+                </a:solidFill>
+                <a:latin typeface="Arial" pitchFamily="34" charset="0"/>
+                <a:ea typeface="Arial" pitchFamily="34" charset="-122"/>
+                <a:cs typeface="Arial" pitchFamily="34" charset="-120"/>
+              </a:rPr>
+              <a:t>제출 전에,</a:t>
+            </a:r>
+            <a:endParaRPr lang="en-US" sz="5200" dirty="0"/>
+          </a:p>
+          <a:p>
+            <a:pPr indent="0" marL="0">
+              <a:lnSpc>
+                <a:spcPct val="112000"/>
+              </a:lnSpc>
+              <a:buNone/>
+            </a:pPr>
+            <a:r>
+              <a:rPr lang="en-US" sz="5200" b="1" dirty="0">
+                <a:solidFill>
+                  <a:srgbClr val="3182F6"/>
+                </a:solidFill>
+                <a:latin typeface="Arial" pitchFamily="34" charset="0"/>
+                <a:ea typeface="Arial" pitchFamily="34" charset="-122"/>
+                <a:cs typeface="Arial" pitchFamily="34" charset="-120"/>
+              </a:rPr>
+              <a:t>빈칸</a:t>
+            </a:r>
+            <a:pPr indent="0" marL="0">
+              <a:lnSpc>
+                <a:spcPct val="112000"/>
+              </a:lnSpc>
+              <a:buNone/>
+            </a:pPr>
+            <a:r>
+              <a:rPr lang="en-US" sz="5200" b="1" dirty="0">
+                <a:solidFill>
+                  <a:srgbClr val="191F28"/>
+                </a:solidFill>
+                <a:latin typeface="Arial" pitchFamily="34" charset="0"/>
+                <a:ea typeface="Arial" pitchFamily="34" charset="-122"/>
+                <a:cs typeface="Arial" pitchFamily="34" charset="-120"/>
+              </a:rPr>
+              <a:t>부터.</a:t>
+            </a:r>
+            <a:endParaRPr lang="en-US" sz="5200" dirty="0"/>
           </a:p>
         </p:txBody>
       </p:sp>
@@ -3853,7 +4611,7 @@
                 <a:ea typeface="Arial" pitchFamily="34" charset="-122"/>
                 <a:cs typeface="Arial" pitchFamily="34" charset="-120"/>
               </a:rPr>
-              <a:t>커밋 20개 · 코드는 전부 본선 중 커밋(첫 코드 커밋 09/30 19:19, 그 전엔 문서뿐) · 테스트 34개</a:t>
+              <a:t>커밋 22개 · 코드는 전부 본선 중 커밋(첫 코드 커밋 09/30 19:19, 그 전엔 문서뿐) · 테스트 34개</a:t>
             </a:r>
             <a:endParaRPr lang="en-US" sz="1400" dirty="0"/>
           </a:p>
@@ -5315,7 +6073,7 @@
                 <a:ea typeface="Arial" pitchFamily="34" charset="-122"/>
                 <a:cs typeface="Arial" pitchFamily="34" charset="-120"/>
               </a:rPr>
-              <a:t>실제 심사위원 유형 6명이 서로의 답을 모른 채 채점 → 모두 깎는 곳(고칠 곳)과 갈리는 곳(판단할 곳)을 나누고, 각자 선정·보류와 결정 포인트를 냅니다</a:t>
+              <a:t>실제 심사 경험에서 나온 관점 6개로 나눠 서로 모른 채 근거를 찾게 하고 → 모두 못 찾은 곳(고칠 곳)과 갈리는 곳(사람이 판단할 곳)을 나눕니다</a:t>
             </a:r>
             <a:endParaRPr lang="en-US" sz="1250" dirty="0"/>
           </a:p>
@@ -6044,7 +6802,7 @@
                 <a:ea typeface="Arial" pitchFamily="34" charset="-122"/>
                 <a:cs typeface="Arial" pitchFamily="34" charset="-120"/>
               </a:rPr>
-              <a:t>고칠 곳 · 판단할 곳 · 심사위원의 마음</a:t>
+              <a:t>고칠 곳 · 판단할 곳 · 관점별로 걸리는 점</a:t>
             </a:r>
             <a:endParaRPr lang="en-US" sz="1700" dirty="0"/>
           </a:p>
@@ -6083,7 +6841,7 @@
                 <a:ea typeface="Arial" pitchFamily="34" charset="-122"/>
                 <a:cs typeface="Arial" pitchFamily="34" charset="-120"/>
               </a:rPr>
-              <a:t>모두 깎은 곳, 의견이 갈린 곳, 평가위원별 선정/보류와 결정 포인트 + 「어떤 근거를 어느 절에」</a:t>
+              <a:t>모든 관점이 근거를 못 찾은 곳, 의견이 갈린 곳, 관점마다 가장 걸리는 점 + 「어떤 근거를 어느 절에」</a:t>
             </a:r>
             <a:endParaRPr lang="en-US" sz="1150" dirty="0"/>
           </a:p>
@@ -6869,7 +7627,7 @@
                 <a:ea typeface="Arial" pitchFamily="34" charset="-122"/>
                 <a:cs typeface="Arial" pitchFamily="34" charset="-120"/>
               </a:rPr>
-              <a:t>평가위원 6명 판정</a:t>
+              <a:t>관점 6개의 근거 찾기</a:t>
             </a:r>
             <a:endParaRPr lang="en-US" sz="1400" dirty="0"/>
           </a:p>
@@ -7429,7 +8187,7 @@
               <a:buNone/>
             </a:pPr>
             <a:r>
-              <a:rPr lang="en-US" sz="3400" b="1" dirty="0">
+              <a:rPr lang="en-US" sz="3200" b="1" dirty="0">
                 <a:solidFill>
                   <a:srgbClr val="191F28"/>
                 </a:solidFill>
@@ -7437,11 +8195,8 @@
                 <a:ea typeface="Arial" pitchFamily="34" charset="-122"/>
                 <a:cs typeface="Arial" pitchFamily="34" charset="-120"/>
               </a:rPr>
-              <a:t>그래프 한 장에,</a:t>
-            </a:r>
-            <a:endParaRPr lang="en-US" sz="3400" dirty="0"/>
-          </a:p>
-          <a:p>
+              <a:t>LLM은 판사가 아니라 </a:t>
+            </a:r>
             <a:pPr indent="0" marL="0">
               <a:lnSpc>
                 <a:spcPct val="112000"/>
@@ -7449,7 +8204,7 @@
               <a:buNone/>
             </a:pPr>
             <a:r>
-              <a:rPr lang="en-US" sz="3400" b="1" dirty="0">
+              <a:rPr lang="en-US" sz="3200" b="1" dirty="0">
                 <a:solidFill>
                   <a:srgbClr val="3182F6"/>
                 </a:solidFill>
@@ -7457,7 +8212,7 @@
                 <a:ea typeface="Arial" pitchFamily="34" charset="-122"/>
                 <a:cs typeface="Arial" pitchFamily="34" charset="-120"/>
               </a:rPr>
-              <a:t>되돌아가는 루프</a:t>
+              <a:t>증인</a:t>
             </a:r>
             <a:pPr indent="0" marL="0">
               <a:lnSpc>
@@ -7466,7 +8221,7 @@
               <a:buNone/>
             </a:pPr>
             <a:r>
-              <a:rPr lang="en-US" sz="3400" b="1" dirty="0">
+              <a:rPr lang="en-US" sz="3200" b="1" dirty="0">
                 <a:solidFill>
                   <a:srgbClr val="191F28"/>
                 </a:solidFill>
@@ -7474,9 +8229,29 @@
                 <a:ea typeface="Arial" pitchFamily="34" charset="-122"/>
                 <a:cs typeface="Arial" pitchFamily="34" charset="-120"/>
               </a:rPr>
-              <a:t>가 하나 있습니다</a:t>
-            </a:r>
-            <a:endParaRPr lang="en-US" sz="3400" dirty="0"/>
+              <a:t>입니다 —</a:t>
+            </a:r>
+            <a:endParaRPr lang="en-US" sz="3200" dirty="0"/>
+          </a:p>
+          <a:p>
+            <a:pPr indent="0" marL="0">
+              <a:lnSpc>
+                <a:spcPct val="112000"/>
+              </a:lnSpc>
+              <a:buNone/>
+            </a:pPr>
+            <a:r>
+              <a:rPr lang="en-US" sz="3200" b="1" dirty="0">
+                <a:solidFill>
+                  <a:srgbClr val="191F28"/>
+                </a:solidFill>
+                <a:latin typeface="Arial" pitchFamily="34" charset="0"/>
+                <a:ea typeface="Arial" pitchFamily="34" charset="-122"/>
+                <a:cs typeface="Arial" pitchFamily="34" charset="-120"/>
+              </a:rPr>
+              <a:t>판정은 코드가 합니다</a:t>
+            </a:r>
+            <a:endParaRPr lang="en-US" sz="3200" dirty="0"/>
           </a:p>
         </p:txBody>
       </p:sp>
@@ -9157,7 +9932,7 @@
                 <a:ea typeface="Arial" pitchFamily="34" charset="-122"/>
                 <a:cs typeface="Arial" pitchFamily="34" charset="-120"/>
               </a:rPr>
-              <a:t>MCP 도구 서버 — AI 도구 연결 표준</a:t>
+              <a:t>신뢰도 — 정답이 없는 영역이라, 기준을 먼저 세웠습니다</a:t>
             </a:r>
             <a:endParaRPr lang="en-US" sz="1400" dirty="0"/>
           </a:p>
@@ -9199,7 +9974,7 @@
                 <a:ea typeface="Arial" pitchFamily="34" charset="-122"/>
                 <a:cs typeface="Arial" pitchFamily="34" charset="-120"/>
               </a:rPr>
-              <a:t>검사 도구를 MCP로 감싸,</a:t>
+              <a:t>맞히는 것이 아니라,</a:t>
             </a:r>
             <a:endParaRPr lang="en-US" sz="3400" dirty="0"/>
           </a:p>
@@ -9219,7 +9994,7 @@
                 <a:ea typeface="Arial" pitchFamily="34" charset="-122"/>
                 <a:cs typeface="Arial" pitchFamily="34" charset="-120"/>
               </a:rPr>
-              <a:t>다른 AI 비서</a:t>
+              <a:t>확인할 수 있는 것</a:t>
             </a:r>
             <a:pPr indent="0" marL="0">
               <a:lnSpc>
@@ -9236,7 +10011,7 @@
                 <a:ea typeface="Arial" pitchFamily="34" charset="-122"/>
                 <a:cs typeface="Arial" pitchFamily="34" charset="-120"/>
               </a:rPr>
-              <a:t>도 같은 검사를 씁니다</a:t>
+              <a:t>을 신뢰라고 정의했습니다</a:t>
             </a:r>
             <a:endParaRPr lang="en-US" sz="3400" dirty="0"/>
           </a:p>
@@ -9244,369 +10019,18 @@
       </p:sp>
       <p:sp>
         <p:nvSpPr>
-          <p:cNvPr id="4" name="Text 2"/>
-          <p:cNvSpPr/>
-          <p:nvPr/>
-        </p:nvSpPr>
-        <p:spPr>
-          <a:xfrm>
-            <a:off x="822960" y="2715768"/>
-            <a:ext cx="548640" cy="365760"/>
-          </a:xfrm>
-          <a:prstGeom prst="rect">
-            <a:avLst/>
-          </a:prstGeom>
-          <a:noFill/>
-          <a:ln/>
-        </p:spPr>
-        <p:txBody>
-          <a:bodyPr wrap="square" lIns="0" tIns="0" rIns="0" bIns="0" rtlCol="0" anchor="t"/>
-          <a:lstStyle/>
-          <a:p>
-            <a:pPr indent="0" marL="0">
-              <a:buNone/>
-            </a:pPr>
-            <a:r>
-              <a:rPr lang="en-US" sz="1800" b="1" dirty="0">
-                <a:solidFill>
-                  <a:srgbClr val="3182F6"/>
-                </a:solidFill>
-                <a:latin typeface="Arial" pitchFamily="34" charset="0"/>
-                <a:ea typeface="Arial" pitchFamily="34" charset="-122"/>
-                <a:cs typeface="Arial" pitchFamily="34" charset="-120"/>
-              </a:rPr>
-              <a:t>01</a:t>
-            </a:r>
-            <a:endParaRPr lang="en-US" sz="1800" dirty="0"/>
-          </a:p>
-        </p:txBody>
-      </p:sp>
-      <p:sp>
-        <p:nvSpPr>
-          <p:cNvPr id="5" name="Text 3"/>
-          <p:cNvSpPr/>
-          <p:nvPr/>
-        </p:nvSpPr>
-        <p:spPr>
-          <a:xfrm>
-            <a:off x="1463040" y="2697480"/>
-            <a:ext cx="5120640" cy="384048"/>
-          </a:xfrm>
-          <a:prstGeom prst="rect">
-            <a:avLst/>
-          </a:prstGeom>
-          <a:noFill/>
-          <a:ln/>
-        </p:spPr>
-        <p:txBody>
-          <a:bodyPr wrap="square" lIns="0" tIns="0" rIns="0" bIns="0" rtlCol="0" anchor="t"/>
-          <a:lstStyle/>
-          <a:p>
-            <a:pPr indent="0" marL="0">
-              <a:buNone/>
-            </a:pPr>
-            <a:r>
-              <a:rPr lang="en-US" sz="1600" b="1" dirty="0">
-                <a:solidFill>
-                  <a:srgbClr val="191F28"/>
-                </a:solidFill>
-                <a:latin typeface="Arial" pitchFamily="34" charset="0"/>
-                <a:ea typeface="Arial" pitchFamily="34" charset="-122"/>
-                <a:cs typeface="Arial" pitchFamily="34" charset="-120"/>
-              </a:rPr>
-              <a:t>search_prior_art(query, n)</a:t>
-            </a:r>
-            <a:endParaRPr lang="en-US" sz="1600" dirty="0"/>
-          </a:p>
-        </p:txBody>
-      </p:sp>
-      <p:sp>
-        <p:nvSpPr>
-          <p:cNvPr id="6" name="Text 4"/>
-          <p:cNvSpPr/>
-          <p:nvPr/>
-        </p:nvSpPr>
-        <p:spPr>
-          <a:xfrm>
-            <a:off x="1463040" y="3108960"/>
-            <a:ext cx="5120640" cy="365760"/>
-          </a:xfrm>
-          <a:prstGeom prst="rect">
-            <a:avLst/>
-          </a:prstGeom>
-          <a:noFill/>
-          <a:ln/>
-        </p:spPr>
-        <p:txBody>
-          <a:bodyPr wrap="square" lIns="0" tIns="0" rIns="0" bIns="0" rtlCol="0" anchor="t"/>
-          <a:lstStyle/>
-          <a:p>
-            <a:pPr indent="0" marL="0">
-              <a:buNone/>
-            </a:pPr>
-            <a:r>
-              <a:rPr lang="en-US" sz="1150" dirty="0">
-                <a:solidFill>
-                  <a:srgbClr val="8B95A1"/>
-                </a:solidFill>
-                <a:latin typeface="Arial" pitchFamily="34" charset="0"/>
-                <a:ea typeface="Arial" pitchFamily="34" charset="-122"/>
-                <a:cs typeface="Arial" pitchFamily="34" charset="-120"/>
-              </a:rPr>
-              <a:t>공개 학술 DB 검색 — OpenAlex 우선, 장애 시 Crossref로 자동 전환 · 결과는 혁신성 판정의 참고 자료</a:t>
-            </a:r>
-            <a:endParaRPr lang="en-US" sz="1150" dirty="0"/>
-          </a:p>
-        </p:txBody>
-      </p:sp>
-      <p:sp>
-        <p:nvSpPr>
-          <p:cNvPr id="7" name="Text 5"/>
-          <p:cNvSpPr/>
-          <p:nvPr/>
-        </p:nvSpPr>
-        <p:spPr>
-          <a:xfrm>
-            <a:off x="822960" y="3675888"/>
-            <a:ext cx="548640" cy="365760"/>
-          </a:xfrm>
-          <a:prstGeom prst="rect">
-            <a:avLst/>
-          </a:prstGeom>
-          <a:noFill/>
-          <a:ln/>
-        </p:spPr>
-        <p:txBody>
-          <a:bodyPr wrap="square" lIns="0" tIns="0" rIns="0" bIns="0" rtlCol="0" anchor="t"/>
-          <a:lstStyle/>
-          <a:p>
-            <a:pPr indent="0" marL="0">
-              <a:buNone/>
-            </a:pPr>
-            <a:r>
-              <a:rPr lang="en-US" sz="1800" b="1" dirty="0">
-                <a:solidFill>
-                  <a:srgbClr val="3182F6"/>
-                </a:solidFill>
-                <a:latin typeface="Arial" pitchFamily="34" charset="0"/>
-                <a:ea typeface="Arial" pitchFamily="34" charset="-122"/>
-                <a:cs typeface="Arial" pitchFamily="34" charset="-120"/>
-              </a:rPr>
-              <a:t>02</a:t>
-            </a:r>
-            <a:endParaRPr lang="en-US" sz="1800" dirty="0"/>
-          </a:p>
-        </p:txBody>
-      </p:sp>
-      <p:sp>
-        <p:nvSpPr>
-          <p:cNvPr id="8" name="Text 6"/>
-          <p:cNvSpPr/>
-          <p:nvPr/>
-        </p:nvSpPr>
-        <p:spPr>
-          <a:xfrm>
-            <a:off x="1463040" y="3657600"/>
-            <a:ext cx="5120640" cy="384048"/>
-          </a:xfrm>
-          <a:prstGeom prst="rect">
-            <a:avLst/>
-          </a:prstGeom>
-          <a:noFill/>
-          <a:ln/>
-        </p:spPr>
-        <p:txBody>
-          <a:bodyPr wrap="square" lIns="0" tIns="0" rIns="0" bIns="0" rtlCol="0" anchor="t"/>
-          <a:lstStyle/>
-          <a:p>
-            <a:pPr indent="0" marL="0">
-              <a:buNone/>
-            </a:pPr>
-            <a:r>
-              <a:rPr lang="en-US" sz="1600" b="1" dirty="0">
-                <a:solidFill>
-                  <a:srgbClr val="191F28"/>
-                </a:solidFill>
-                <a:latin typeface="Arial" pitchFamily="34" charset="0"/>
-                <a:ea typeface="Arial" pitchFamily="34" charset="-122"/>
-                <a:cs typeface="Arial" pitchFamily="34" charset="-120"/>
-              </a:rPr>
-              <a:t>check_quote(quote, text)</a:t>
-            </a:r>
-            <a:endParaRPr lang="en-US" sz="1600" dirty="0"/>
-          </a:p>
-        </p:txBody>
-      </p:sp>
-      <p:sp>
-        <p:nvSpPr>
-          <p:cNvPr id="9" name="Text 7"/>
-          <p:cNvSpPr/>
-          <p:nvPr/>
-        </p:nvSpPr>
-        <p:spPr>
-          <a:xfrm>
-            <a:off x="1463040" y="4069080"/>
-            <a:ext cx="5120640" cy="365760"/>
-          </a:xfrm>
-          <a:prstGeom prst="rect">
-            <a:avLst/>
-          </a:prstGeom>
-          <a:noFill/>
-          <a:ln/>
-        </p:spPr>
-        <p:txBody>
-          <a:bodyPr wrap="square" lIns="0" tIns="0" rIns="0" bIns="0" rtlCol="0" anchor="t"/>
-          <a:lstStyle/>
-          <a:p>
-            <a:pPr indent="0" marL="0">
-              <a:buNone/>
-            </a:pPr>
-            <a:r>
-              <a:rPr lang="en-US" sz="1150" dirty="0">
-                <a:solidFill>
-                  <a:srgbClr val="8B95A1"/>
-                </a:solidFill>
-                <a:latin typeface="Arial" pitchFamily="34" charset="0"/>
-                <a:ea typeface="Arial" pitchFamily="34" charset="-122"/>
-                <a:cs typeface="Arial" pitchFamily="34" charset="-120"/>
-              </a:rPr>
-              <a:t>인용이 원문에 있는지 true/false — LLM 없이 같은 규칙 코드로</a:t>
-            </a:r>
-            <a:endParaRPr lang="en-US" sz="1150" dirty="0"/>
-          </a:p>
-        </p:txBody>
-      </p:sp>
-      <p:sp>
-        <p:nvSpPr>
-          <p:cNvPr id="10" name="Text 8"/>
-          <p:cNvSpPr/>
-          <p:nvPr/>
-        </p:nvSpPr>
-        <p:spPr>
-          <a:xfrm>
-            <a:off x="822960" y="4636008"/>
-            <a:ext cx="548640" cy="365760"/>
-          </a:xfrm>
-          <a:prstGeom prst="rect">
-            <a:avLst/>
-          </a:prstGeom>
-          <a:noFill/>
-          <a:ln/>
-        </p:spPr>
-        <p:txBody>
-          <a:bodyPr wrap="square" lIns="0" tIns="0" rIns="0" bIns="0" rtlCol="0" anchor="t"/>
-          <a:lstStyle/>
-          <a:p>
-            <a:pPr indent="0" marL="0">
-              <a:buNone/>
-            </a:pPr>
-            <a:r>
-              <a:rPr lang="en-US" sz="1800" b="1" dirty="0">
-                <a:solidFill>
-                  <a:srgbClr val="3182F6"/>
-                </a:solidFill>
-                <a:latin typeface="Arial" pitchFamily="34" charset="0"/>
-                <a:ea typeface="Arial" pitchFamily="34" charset="-122"/>
-                <a:cs typeface="Arial" pitchFamily="34" charset="-120"/>
-              </a:rPr>
-              <a:t>03</a:t>
-            </a:r>
-            <a:endParaRPr lang="en-US" sz="1800" dirty="0"/>
-          </a:p>
-        </p:txBody>
-      </p:sp>
-      <p:sp>
-        <p:nvSpPr>
-          <p:cNvPr id="11" name="Text 9"/>
-          <p:cNvSpPr/>
-          <p:nvPr/>
-        </p:nvSpPr>
-        <p:spPr>
-          <a:xfrm>
-            <a:off x="1463040" y="4617720"/>
-            <a:ext cx="5120640" cy="384048"/>
-          </a:xfrm>
-          <a:prstGeom prst="rect">
-            <a:avLst/>
-          </a:prstGeom>
-          <a:noFill/>
-          <a:ln/>
-        </p:spPr>
-        <p:txBody>
-          <a:bodyPr wrap="square" lIns="0" tIns="0" rIns="0" bIns="0" rtlCol="0" anchor="t"/>
-          <a:lstStyle/>
-          <a:p>
-            <a:pPr indent="0" marL="0">
-              <a:buNone/>
-            </a:pPr>
-            <a:r>
-              <a:rPr lang="en-US" sz="1600" b="1" dirty="0">
-                <a:solidFill>
-                  <a:srgbClr val="191F28"/>
-                </a:solidFill>
-                <a:latin typeface="Arial" pitchFamily="34" charset="0"/>
-                <a:ea typeface="Arial" pitchFamily="34" charset="-122"/>
-                <a:cs typeface="Arial" pitchFamily="34" charset="-120"/>
-              </a:rPr>
-              <a:t>왜 OpenAlex인가, 왜 MCP인가</a:t>
-            </a:r>
-            <a:endParaRPr lang="en-US" sz="1600" dirty="0"/>
-          </a:p>
-        </p:txBody>
-      </p:sp>
-      <p:sp>
-        <p:nvSpPr>
-          <p:cNvPr id="12" name="Text 10"/>
-          <p:cNvSpPr/>
-          <p:nvPr/>
-        </p:nvSpPr>
-        <p:spPr>
-          <a:xfrm>
-            <a:off x="1463040" y="5029200"/>
-            <a:ext cx="5120640" cy="365760"/>
-          </a:xfrm>
-          <a:prstGeom prst="rect">
-            <a:avLst/>
-          </a:prstGeom>
-          <a:noFill/>
-          <a:ln/>
-        </p:spPr>
-        <p:txBody>
-          <a:bodyPr wrap="square" lIns="0" tIns="0" rIns="0" bIns="0" rtlCol="0" anchor="t"/>
-          <a:lstStyle/>
-          <a:p>
-            <a:pPr indent="0" marL="0">
-              <a:buNone/>
-            </a:pPr>
-            <a:r>
-              <a:rPr lang="en-US" sz="1150" dirty="0">
-                <a:solidFill>
-                  <a:srgbClr val="8B95A1"/>
-                </a:solidFill>
-                <a:latin typeface="Arial" pitchFamily="34" charset="0"/>
-                <a:ea typeface="Arial" pitchFamily="34" charset="-122"/>
-                <a:cs typeface="Arial" pitchFamily="34" charset="-120"/>
-              </a:rPr>
-              <a:t>무료·키 없음·메타데이터 공개 라이선스라 기관 어디서든 비용 0 — 다만 오늘 밤 실측 중 OpenAlex가 503을 냈고 도구 뒤에서 Crossref로 바뀌었습니다. 국내 DB(NTIS·KCI)도 같은 자리에 꽂으면 됩니다</a:t>
-            </a:r>
-            <a:endParaRPr lang="en-US" sz="1150" dirty="0"/>
-          </a:p>
-        </p:txBody>
-      </p:sp>
-      <p:sp>
-        <p:nvSpPr>
-          <p:cNvPr id="13" name="Shape 11"/>
-          <p:cNvSpPr/>
-          <p:nvPr/>
-        </p:nvSpPr>
-        <p:spPr>
-          <a:xfrm>
-            <a:off x="6903720" y="2606040"/>
-            <a:ext cx="4462272" cy="3429000"/>
+          <p:cNvPr id="4" name="Shape 2"/>
+          <p:cNvSpPr/>
+          <p:nvPr/>
+        </p:nvSpPr>
+        <p:spPr>
+          <a:xfrm>
+            <a:off x="822960" y="2606040"/>
+            <a:ext cx="3291840" cy="3246120"/>
           </a:xfrm>
           <a:prstGeom prst="roundRect">
             <a:avLst>
-              <a:gd name="adj" fmla="val 2133"/>
+              <a:gd name="adj" fmla="val 2254"/>
             </a:avLst>
           </a:prstGeom>
           <a:solidFill>
@@ -9622,128 +10046,112 @@
       </p:sp>
       <p:sp>
         <p:nvSpPr>
-          <p:cNvPr id="14" name="Text 12"/>
-          <p:cNvSpPr/>
-          <p:nvPr/>
-        </p:nvSpPr>
-        <p:spPr>
-          <a:xfrm>
-            <a:off x="7132320" y="2743200"/>
-            <a:ext cx="4005072" cy="274320"/>
-          </a:xfrm>
-          <a:prstGeom prst="rect">
-            <a:avLst/>
-          </a:prstGeom>
-          <a:noFill/>
-          <a:ln/>
-        </p:spPr>
-        <p:txBody>
-          <a:bodyPr wrap="square" lIns="0" tIns="0" rIns="0" bIns="0" rtlCol="0" anchor="t"/>
-          <a:lstStyle/>
-          <a:p>
-            <a:pPr indent="0" marL="0">
-              <a:buNone/>
-            </a:pPr>
-            <a:r>
-              <a:rPr lang="en-US" sz="1200" b="1" dirty="0">
-                <a:solidFill>
-                  <a:srgbClr val="3182F6"/>
-                </a:solidFill>
-                <a:latin typeface="Arial" pitchFamily="34" charset="0"/>
-                <a:ea typeface="Arial" pitchFamily="34" charset="-122"/>
-                <a:cs typeface="Arial" pitchFamily="34" charset="-120"/>
-              </a:rPr>
-              <a:t>실측 — 다른 AI 비서(Codex CLI)에 서버를 붙여 호출</a:t>
-            </a:r>
-            <a:endParaRPr lang="en-US" sz="1200" dirty="0"/>
-          </a:p>
-        </p:txBody>
-      </p:sp>
-      <p:sp>
-        <p:nvSpPr>
-          <p:cNvPr id="15" name="Text 13"/>
-          <p:cNvSpPr/>
-          <p:nvPr/>
-        </p:nvSpPr>
-        <p:spPr>
-          <a:xfrm>
-            <a:off x="7132320" y="3108960"/>
-            <a:ext cx="4005072" cy="548640"/>
-          </a:xfrm>
-          <a:prstGeom prst="rect">
-            <a:avLst/>
-          </a:prstGeom>
-          <a:noFill/>
-          <a:ln/>
-        </p:spPr>
-        <p:txBody>
-          <a:bodyPr wrap="square" lIns="0" tIns="0" rIns="0" bIns="0" rtlCol="0" anchor="t"/>
-          <a:lstStyle/>
-          <a:p>
-            <a:pPr indent="0" marL="0">
-              <a:buNone/>
-            </a:pPr>
-            <a:r>
-              <a:rPr lang="en-US" sz="1050" dirty="0">
+          <p:cNvPr id="5" name="Text 3"/>
+          <p:cNvSpPr/>
+          <p:nvPr/>
+        </p:nvSpPr>
+        <p:spPr>
+          <a:xfrm>
+            <a:off x="1051560" y="2743200"/>
+            <a:ext cx="2834640" cy="274320"/>
+          </a:xfrm>
+          <a:prstGeom prst="rect">
+            <a:avLst/>
+          </a:prstGeom>
+          <a:noFill/>
+          <a:ln/>
+        </p:spPr>
+        <p:txBody>
+          <a:bodyPr wrap="square" lIns="0" tIns="0" rIns="0" bIns="0" rtlCol="0" anchor="t"/>
+          <a:lstStyle/>
+          <a:p>
+            <a:pPr indent="0" marL="0">
+              <a:buNone/>
+            </a:pPr>
+            <a:r>
+              <a:rPr lang="en-US" sz="1300" b="1" dirty="0">
+                <a:solidFill>
+                  <a:srgbClr val="8B95A1"/>
+                </a:solidFill>
+                <a:latin typeface="Arial" pitchFamily="34" charset="0"/>
+                <a:ea typeface="Arial" pitchFamily="34" charset="-122"/>
+                <a:cs typeface="Arial" pitchFamily="34" charset="-120"/>
+              </a:rPr>
+              <a:t>주장하지 않는 것</a:t>
+            </a:r>
+            <a:endParaRPr lang="en-US" sz="1300" dirty="0"/>
+          </a:p>
+        </p:txBody>
+      </p:sp>
+      <p:sp>
+        <p:nvSpPr>
+          <p:cNvPr id="6" name="Text 4"/>
+          <p:cNvSpPr/>
+          <p:nvPr/>
+        </p:nvSpPr>
+        <p:spPr>
+          <a:xfrm>
+            <a:off x="1051560" y="3154680"/>
+            <a:ext cx="2834640" cy="1463040"/>
+          </a:xfrm>
+          <a:prstGeom prst="rect">
+            <a:avLst/>
+          </a:prstGeom>
+          <a:noFill/>
+          <a:ln/>
+        </p:spPr>
+        <p:txBody>
+          <a:bodyPr wrap="square" lIns="0" tIns="0" rIns="0" bIns="0" rtlCol="0" anchor="t"/>
+          <a:lstStyle/>
+          <a:p>
+            <a:pPr indent="0" marL="0">
+              <a:lnSpc>
+                <a:spcPct val="160000"/>
+              </a:lnSpc>
+              <a:buNone/>
+            </a:pPr>
+            <a:r>
+              <a:rPr lang="en-US" sz="1450" b="1" dirty="0">
                 <a:solidFill>
                   <a:srgbClr val="191F28"/>
                 </a:solidFill>
-                <a:latin typeface="Courier New" pitchFamily="34" charset="0"/>
-                <a:ea typeface="Courier New" pitchFamily="34" charset="-122"/>
-                <a:cs typeface="Courier New" pitchFamily="34" charset="-120"/>
-              </a:rPr>
-              <a:t>mcp_servers.rfp_to_fit.command = "python"</a:t>
-            </a:r>
-            <a:endParaRPr lang="en-US" sz="1050" dirty="0"/>
-          </a:p>
-          <a:p>
-            <a:pPr indent="0" marL="0">
-              <a:buNone/>
-            </a:pPr>
-            <a:r>
-              <a:rPr lang="en-US" sz="1050" dirty="0">
+                <a:latin typeface="Arial" pitchFamily="34" charset="0"/>
+                <a:ea typeface="Arial" pitchFamily="34" charset="-122"/>
+                <a:cs typeface="Arial" pitchFamily="34" charset="-120"/>
+              </a:rPr>
+              <a:t>✕  심사 결과·점수를 맞힌다</a:t>
+            </a:r>
+            <a:endParaRPr lang="en-US" sz="1450" dirty="0"/>
+          </a:p>
+          <a:p>
+            <a:pPr indent="0" marL="0">
+              <a:lnSpc>
+                <a:spcPct val="160000"/>
+              </a:lnSpc>
+              <a:buNone/>
+            </a:pPr>
+            <a:r>
+              <a:rPr lang="en-US" sz="1450" b="1" dirty="0">
                 <a:solidFill>
                   <a:srgbClr val="191F28"/>
                 </a:solidFill>
-                <a:latin typeface="Courier New" pitchFamily="34" charset="0"/>
-                <a:ea typeface="Courier New" pitchFamily="34" charset="-122"/>
-                <a:cs typeface="Courier New" pitchFamily="34" charset="-120"/>
-              </a:rPr>
-              <a:t>args = ["-m", "rfp_to_fit.infrastructure.mcp_server"]</a:t>
-            </a:r>
-            <a:endParaRPr lang="en-US" sz="1050" dirty="0"/>
-          </a:p>
-        </p:txBody>
-      </p:sp>
-      <p:sp>
-        <p:nvSpPr>
-          <p:cNvPr id="16" name="Text 14"/>
-          <p:cNvSpPr/>
-          <p:nvPr/>
-        </p:nvSpPr>
-        <p:spPr>
-          <a:xfrm>
-            <a:off x="7132320" y="3794760"/>
-            <a:ext cx="4005072" cy="1005840"/>
-          </a:xfrm>
-          <a:prstGeom prst="rect">
-            <a:avLst/>
-          </a:prstGeom>
-          <a:noFill/>
-          <a:ln/>
-        </p:spPr>
-        <p:txBody>
-          <a:bodyPr wrap="square" lIns="0" tIns="0" rIns="0" bIns="0" rtlCol="0" anchor="t"/>
-          <a:lstStyle/>
+                <a:latin typeface="Arial" pitchFamily="34" charset="0"/>
+                <a:ea typeface="Arial" pitchFamily="34" charset="-122"/>
+                <a:cs typeface="Arial" pitchFamily="34" charset="-120"/>
+              </a:rPr>
+              <a:t>✕  가상 관점 = 실제 심사위원</a:t>
+            </a:r>
+            <a:endParaRPr lang="en-US" sz="1450" dirty="0"/>
+          </a:p>
           <a:p>
             <a:pPr indent="0" marL="0">
               <a:lnSpc>
-                <a:spcPct val="130000"/>
+                <a:spcPct val="160000"/>
               </a:lnSpc>
               <a:buNone/>
             </a:pPr>
             <a:r>
-              <a:rPr lang="en-US" sz="1200" b="1" dirty="0">
+              <a:rPr lang="en-US" sz="1450" b="1" dirty="0">
                 <a:solidFill>
                   <a:srgbClr val="191F28"/>
                 </a:solidFill>
@@ -9751,62 +10159,22 @@
                 <a:ea typeface="Arial" pitchFamily="34" charset="-122"/>
                 <a:cs typeface="Arial" pitchFamily="34" charset="-120"/>
               </a:rPr>
-              <a:t>check_quote(「재현율 90% 이상」) → true</a:t>
-            </a:r>
-            <a:endParaRPr lang="en-US" sz="1200" dirty="0"/>
-          </a:p>
-          <a:p>
-            <a:pPr indent="0" marL="0">
-              <a:lnSpc>
-                <a:spcPct val="130000"/>
-              </a:lnSpc>
-              <a:buNone/>
-            </a:pPr>
-            <a:r>
-              <a:rPr lang="en-US" sz="1200" b="1" dirty="0">
-                <a:solidFill>
-                  <a:srgbClr val="191F28"/>
-                </a:solidFill>
-                <a:latin typeface="Arial" pitchFamily="34" charset="0"/>
-                <a:ea typeface="Arial" pitchFamily="34" charset="-122"/>
-                <a:cs typeface="Arial" pitchFamily="34" charset="-120"/>
-              </a:rPr>
-              <a:t>check_quote(「정밀도 95% 달성」) → false</a:t>
-            </a:r>
-            <a:endParaRPr lang="en-US" sz="1200" dirty="0"/>
-          </a:p>
-          <a:p>
-            <a:pPr indent="0" marL="0">
-              <a:lnSpc>
-                <a:spcPct val="130000"/>
-              </a:lnSpc>
-              <a:buNone/>
-            </a:pPr>
-            <a:r>
-              <a:rPr lang="en-US" sz="1200" b="1" dirty="0">
-                <a:solidFill>
-                  <a:srgbClr val="191F28"/>
-                </a:solidFill>
-                <a:latin typeface="Arial" pitchFamily="34" charset="0"/>
-                <a:ea typeface="Arial" pitchFamily="34" charset="-122"/>
-                <a:cs typeface="Arial" pitchFamily="34" charset="-120"/>
-              </a:rPr>
-              <a:t>search_prior_art(「multi-agent LLM grant proposal review」) → 3편(Crossref)</a:t>
-            </a:r>
-            <a:endParaRPr lang="en-US" sz="1200" dirty="0"/>
-          </a:p>
-        </p:txBody>
-      </p:sp>
-      <p:sp>
-        <p:nvSpPr>
-          <p:cNvPr id="17" name="Text 15"/>
-          <p:cNvSpPr/>
-          <p:nvPr/>
-        </p:nvSpPr>
-        <p:spPr>
-          <a:xfrm>
-            <a:off x="7132320" y="4937760"/>
-            <a:ext cx="4005072" cy="914400"/>
+              <a:t>✕  제안서를 대신 써 준다</a:t>
+            </a:r>
+            <a:endParaRPr lang="en-US" sz="1450" dirty="0"/>
+          </a:p>
+        </p:txBody>
+      </p:sp>
+      <p:sp>
+        <p:nvSpPr>
+          <p:cNvPr id="7" name="Text 5"/>
+          <p:cNvSpPr/>
+          <p:nvPr/>
+        </p:nvSpPr>
+        <p:spPr>
+          <a:xfrm>
+            <a:off x="1051560" y="4754880"/>
+            <a:ext cx="2834640" cy="914400"/>
           </a:xfrm>
           <a:prstGeom prst="rect">
             <a:avLst/>
@@ -9833,7 +10201,7 @@
                 <a:ea typeface="Arial" pitchFamily="34" charset="-122"/>
                 <a:cs typeface="Arial" pitchFamily="34" charset="-120"/>
               </a:rPr>
-              <a:t>찾은 선행연구 중 하나는 다중 에이전트로 지원서를 「생성」하는 연구 — 저희는 생성하지 않고, 이 공고의 심사표로 「검사」합니다.</a:t>
+              <a:t>심사위원의 판단은 주관적이고 정답이 없습니다 — 그래서 이것들은 주장하지 않습니다.</a:t>
             </a:r>
             <a:endParaRPr lang="en-US" sz="1150" dirty="0"/>
           </a:p>
@@ -9841,13 +10209,585 @@
       </p:sp>
       <p:sp>
         <p:nvSpPr>
+          <p:cNvPr id="8" name="Text 6"/>
+          <p:cNvSpPr/>
+          <p:nvPr/>
+        </p:nvSpPr>
+        <p:spPr>
+          <a:xfrm>
+            <a:off x="4434840" y="2651760"/>
+            <a:ext cx="457200" cy="329184"/>
+          </a:xfrm>
+          <a:prstGeom prst="rect">
+            <a:avLst/>
+          </a:prstGeom>
+          <a:noFill/>
+          <a:ln/>
+        </p:spPr>
+        <p:txBody>
+          <a:bodyPr wrap="square" lIns="0" tIns="0" rIns="0" bIns="0" rtlCol="0" anchor="t"/>
+          <a:lstStyle/>
+          <a:p>
+            <a:pPr indent="0" marL="0">
+              <a:buNone/>
+            </a:pPr>
+            <a:r>
+              <a:rPr lang="en-US" sz="1600" b="1" dirty="0">
+                <a:solidFill>
+                  <a:srgbClr val="3182F6"/>
+                </a:solidFill>
+                <a:latin typeface="Arial" pitchFamily="34" charset="0"/>
+                <a:ea typeface="Arial" pitchFamily="34" charset="-122"/>
+                <a:cs typeface="Arial" pitchFamily="34" charset="-120"/>
+              </a:rPr>
+              <a:t>01</a:t>
+            </a:r>
+            <a:endParaRPr lang="en-US" sz="1600" dirty="0"/>
+          </a:p>
+        </p:txBody>
+      </p:sp>
+      <p:sp>
+        <p:nvSpPr>
+          <p:cNvPr id="9" name="Text 7"/>
+          <p:cNvSpPr/>
+          <p:nvPr/>
+        </p:nvSpPr>
+        <p:spPr>
+          <a:xfrm>
+            <a:off x="4937760" y="2651760"/>
+            <a:ext cx="1920240" cy="329184"/>
+          </a:xfrm>
+          <a:prstGeom prst="rect">
+            <a:avLst/>
+          </a:prstGeom>
+          <a:noFill/>
+          <a:ln/>
+        </p:spPr>
+        <p:txBody>
+          <a:bodyPr wrap="square" lIns="0" tIns="0" rIns="0" bIns="0" rtlCol="0" anchor="t"/>
+          <a:lstStyle/>
+          <a:p>
+            <a:pPr indent="0" marL="0">
+              <a:buNone/>
+            </a:pPr>
+            <a:r>
+              <a:rPr lang="en-US" sz="1500" b="1" dirty="0">
+                <a:solidFill>
+                  <a:srgbClr val="191F28"/>
+                </a:solidFill>
+                <a:latin typeface="Arial" pitchFamily="34" charset="0"/>
+                <a:ea typeface="Arial" pitchFamily="34" charset="-122"/>
+                <a:cs typeface="Arial" pitchFamily="34" charset="-120"/>
+              </a:rPr>
+              <a:t>추적 가능</a:t>
+            </a:r>
+            <a:endParaRPr lang="en-US" sz="1500" dirty="0"/>
+          </a:p>
+        </p:txBody>
+      </p:sp>
+      <p:sp>
+        <p:nvSpPr>
+          <p:cNvPr id="10" name="Text 8"/>
+          <p:cNvSpPr/>
+          <p:nvPr/>
+        </p:nvSpPr>
+        <p:spPr>
+          <a:xfrm>
+            <a:off x="6903720" y="2670048"/>
+            <a:ext cx="4462272" cy="731520"/>
+          </a:xfrm>
+          <a:prstGeom prst="rect">
+            <a:avLst/>
+          </a:prstGeom>
+          <a:noFill/>
+          <a:ln/>
+        </p:spPr>
+        <p:txBody>
+          <a:bodyPr wrap="square" lIns="0" tIns="0" rIns="0" bIns="0" rtlCol="0" anchor="t"/>
+          <a:lstStyle/>
+          <a:p>
+            <a:pPr indent="0" marL="0">
+              <a:lnSpc>
+                <a:spcPct val="115000"/>
+              </a:lnSpc>
+              <a:buNone/>
+            </a:pPr>
+            <a:r>
+              <a:rPr lang="en-US" sz="1150" dirty="0">
+                <a:solidFill>
+                  <a:srgbClr val="4E5968"/>
+                </a:solidFill>
+                <a:latin typeface="Arial" pitchFamily="34" charset="0"/>
+                <a:ea typeface="Arial" pitchFamily="34" charset="-122"/>
+                <a:cs typeface="Arial" pitchFamily="34" charset="-120"/>
+              </a:rPr>
+              <a:t>모든 지적은 두 끝에 묶입니다 — 공고 원문(쪽·인용)과 초안 원문(인용). 사람이 원문을 바로 열어 확인합니다.</a:t>
+            </a:r>
+            <a:endParaRPr lang="en-US" sz="1150" dirty="0"/>
+          </a:p>
+        </p:txBody>
+      </p:sp>
+      <p:sp>
+        <p:nvSpPr>
+          <p:cNvPr id="11" name="Shape 9"/>
+          <p:cNvSpPr/>
+          <p:nvPr/>
+        </p:nvSpPr>
+        <p:spPr>
+          <a:xfrm>
+            <a:off x="4434840" y="3383280"/>
+            <a:ext cx="6931152" cy="0"/>
+          </a:xfrm>
+          <a:prstGeom prst="line">
+            <a:avLst/>
+          </a:prstGeom>
+          <a:noFill/>
+          <a:ln w="12700">
+            <a:solidFill>
+              <a:srgbClr val="E5E8EB"/>
+            </a:solidFill>
+            <a:prstDash val="solid"/>
+          </a:ln>
+        </p:spPr>
+      </p:sp>
+      <p:sp>
+        <p:nvSpPr>
+          <p:cNvPr id="12" name="Text 10"/>
+          <p:cNvSpPr/>
+          <p:nvPr/>
+        </p:nvSpPr>
+        <p:spPr>
+          <a:xfrm>
+            <a:off x="4434840" y="3474720"/>
+            <a:ext cx="457200" cy="329184"/>
+          </a:xfrm>
+          <a:prstGeom prst="rect">
+            <a:avLst/>
+          </a:prstGeom>
+          <a:noFill/>
+          <a:ln/>
+        </p:spPr>
+        <p:txBody>
+          <a:bodyPr wrap="square" lIns="0" tIns="0" rIns="0" bIns="0" rtlCol="0" anchor="t"/>
+          <a:lstStyle/>
+          <a:p>
+            <a:pPr indent="0" marL="0">
+              <a:buNone/>
+            </a:pPr>
+            <a:r>
+              <a:rPr lang="en-US" sz="1600" b="1" dirty="0">
+                <a:solidFill>
+                  <a:srgbClr val="3182F6"/>
+                </a:solidFill>
+                <a:latin typeface="Arial" pitchFamily="34" charset="0"/>
+                <a:ea typeface="Arial" pitchFamily="34" charset="-122"/>
+                <a:cs typeface="Arial" pitchFamily="34" charset="-120"/>
+              </a:rPr>
+              <a:t>02</a:t>
+            </a:r>
+            <a:endParaRPr lang="en-US" sz="1600" dirty="0"/>
+          </a:p>
+        </p:txBody>
+      </p:sp>
+      <p:sp>
+        <p:nvSpPr>
+          <p:cNvPr id="13" name="Text 11"/>
+          <p:cNvSpPr/>
+          <p:nvPr/>
+        </p:nvSpPr>
+        <p:spPr>
+          <a:xfrm>
+            <a:off x="4937760" y="3474720"/>
+            <a:ext cx="1920240" cy="329184"/>
+          </a:xfrm>
+          <a:prstGeom prst="rect">
+            <a:avLst/>
+          </a:prstGeom>
+          <a:noFill/>
+          <a:ln/>
+        </p:spPr>
+        <p:txBody>
+          <a:bodyPr wrap="square" lIns="0" tIns="0" rIns="0" bIns="0" rtlCol="0" anchor="t"/>
+          <a:lstStyle/>
+          <a:p>
+            <a:pPr indent="0" marL="0">
+              <a:buNone/>
+            </a:pPr>
+            <a:r>
+              <a:rPr lang="en-US" sz="1500" b="1" dirty="0">
+                <a:solidFill>
+                  <a:srgbClr val="191F28"/>
+                </a:solidFill>
+                <a:latin typeface="Arial" pitchFamily="34" charset="0"/>
+                <a:ea typeface="Arial" pitchFamily="34" charset="-122"/>
+                <a:cs typeface="Arial" pitchFamily="34" charset="-120"/>
+              </a:rPr>
+              <a:t>날조 없음</a:t>
+            </a:r>
+            <a:endParaRPr lang="en-US" sz="1500" dirty="0"/>
+          </a:p>
+        </p:txBody>
+      </p:sp>
+      <p:sp>
+        <p:nvSpPr>
+          <p:cNvPr id="14" name="Text 12"/>
+          <p:cNvSpPr/>
+          <p:nvPr/>
+        </p:nvSpPr>
+        <p:spPr>
+          <a:xfrm>
+            <a:off x="6903720" y="3493008"/>
+            <a:ext cx="4462272" cy="731520"/>
+          </a:xfrm>
+          <a:prstGeom prst="rect">
+            <a:avLst/>
+          </a:prstGeom>
+          <a:noFill/>
+          <a:ln/>
+        </p:spPr>
+        <p:txBody>
+          <a:bodyPr wrap="square" lIns="0" tIns="0" rIns="0" bIns="0" rtlCol="0" anchor="t"/>
+          <a:lstStyle/>
+          <a:p>
+            <a:pPr indent="0" marL="0">
+              <a:lnSpc>
+                <a:spcPct val="115000"/>
+              </a:lnSpc>
+              <a:buNone/>
+            </a:pPr>
+            <a:r>
+              <a:rPr lang="en-US" sz="1150" dirty="0">
+                <a:solidFill>
+                  <a:srgbClr val="4E5968"/>
+                </a:solidFill>
+                <a:latin typeface="Arial" pitchFamily="34" charset="0"/>
+                <a:ea typeface="Arial" pitchFamily="34" charset="-122"/>
+                <a:cs typeface="Arial" pitchFamily="34" charset="-120"/>
+              </a:rPr>
+              <a:t>원문에 없는 인용은 코드가 걸러 판정에서 뺍니다 — 이번 실행 90개 중 12건 적발 → 11건 원문 확인 · 1건 무효.</a:t>
+            </a:r>
+            <a:endParaRPr lang="en-US" sz="1150" dirty="0"/>
+          </a:p>
+        </p:txBody>
+      </p:sp>
+      <p:sp>
+        <p:nvSpPr>
+          <p:cNvPr id="15" name="Shape 13"/>
+          <p:cNvSpPr/>
+          <p:nvPr/>
+        </p:nvSpPr>
+        <p:spPr>
+          <a:xfrm>
+            <a:off x="4434840" y="4206240"/>
+            <a:ext cx="6931152" cy="0"/>
+          </a:xfrm>
+          <a:prstGeom prst="line">
+            <a:avLst/>
+          </a:prstGeom>
+          <a:noFill/>
+          <a:ln w="12700">
+            <a:solidFill>
+              <a:srgbClr val="E5E8EB"/>
+            </a:solidFill>
+            <a:prstDash val="solid"/>
+          </a:ln>
+        </p:spPr>
+      </p:sp>
+      <p:sp>
+        <p:nvSpPr>
+          <p:cNvPr id="16" name="Text 14"/>
+          <p:cNvSpPr/>
+          <p:nvPr/>
+        </p:nvSpPr>
+        <p:spPr>
+          <a:xfrm>
+            <a:off x="4434840" y="4297680"/>
+            <a:ext cx="457200" cy="329184"/>
+          </a:xfrm>
+          <a:prstGeom prst="rect">
+            <a:avLst/>
+          </a:prstGeom>
+          <a:noFill/>
+          <a:ln/>
+        </p:spPr>
+        <p:txBody>
+          <a:bodyPr wrap="square" lIns="0" tIns="0" rIns="0" bIns="0" rtlCol="0" anchor="t"/>
+          <a:lstStyle/>
+          <a:p>
+            <a:pPr indent="0" marL="0">
+              <a:buNone/>
+            </a:pPr>
+            <a:r>
+              <a:rPr lang="en-US" sz="1600" b="1" dirty="0">
+                <a:solidFill>
+                  <a:srgbClr val="3182F6"/>
+                </a:solidFill>
+                <a:latin typeface="Arial" pitchFamily="34" charset="0"/>
+                <a:ea typeface="Arial" pitchFamily="34" charset="-122"/>
+                <a:cs typeface="Arial" pitchFamily="34" charset="-120"/>
+              </a:rPr>
+              <a:t>03</a:t>
+            </a:r>
+            <a:endParaRPr lang="en-US" sz="1600" dirty="0"/>
+          </a:p>
+        </p:txBody>
+      </p:sp>
+      <p:sp>
+        <p:nvSpPr>
+          <p:cNvPr id="17" name="Text 15"/>
+          <p:cNvSpPr/>
+          <p:nvPr/>
+        </p:nvSpPr>
+        <p:spPr>
+          <a:xfrm>
+            <a:off x="4937760" y="4297680"/>
+            <a:ext cx="1920240" cy="329184"/>
+          </a:xfrm>
+          <a:prstGeom prst="rect">
+            <a:avLst/>
+          </a:prstGeom>
+          <a:noFill/>
+          <a:ln/>
+        </p:spPr>
+        <p:txBody>
+          <a:bodyPr wrap="square" lIns="0" tIns="0" rIns="0" bIns="0" rtlCol="0" anchor="t"/>
+          <a:lstStyle/>
+          <a:p>
+            <a:pPr indent="0" marL="0">
+              <a:buNone/>
+            </a:pPr>
+            <a:r>
+              <a:rPr lang="en-US" sz="1500" b="1" dirty="0">
+                <a:solidFill>
+                  <a:srgbClr val="191F28"/>
+                </a:solidFill>
+                <a:latin typeface="Arial" pitchFamily="34" charset="0"/>
+                <a:ea typeface="Arial" pitchFamily="34" charset="-122"/>
+                <a:cs typeface="Arial" pitchFamily="34" charset="-120"/>
+              </a:rPr>
+              <a:t>모르면 넘김</a:t>
+            </a:r>
+            <a:endParaRPr lang="en-US" sz="1500" dirty="0"/>
+          </a:p>
+        </p:txBody>
+      </p:sp>
+      <p:sp>
+        <p:nvSpPr>
           <p:cNvPr id="18" name="Text 16"/>
           <p:cNvSpPr/>
           <p:nvPr/>
         </p:nvSpPr>
         <p:spPr>
           <a:xfrm>
-            <a:off x="822960" y="6355080"/>
+            <a:off x="6903720" y="4315968"/>
+            <a:ext cx="4462272" cy="731520"/>
+          </a:xfrm>
+          <a:prstGeom prst="rect">
+            <a:avLst/>
+          </a:prstGeom>
+          <a:noFill/>
+          <a:ln/>
+        </p:spPr>
+        <p:txBody>
+          <a:bodyPr wrap="square" lIns="0" tIns="0" rIns="0" bIns="0" rtlCol="0" anchor="t"/>
+          <a:lstStyle/>
+          <a:p>
+            <a:pPr indent="0" marL="0">
+              <a:lnSpc>
+                <a:spcPct val="115000"/>
+              </a:lnSpc>
+              <a:buNone/>
+            </a:pPr>
+            <a:r>
+              <a:rPr lang="en-US" sz="1150" dirty="0">
+                <a:solidFill>
+                  <a:srgbClr val="4E5968"/>
+                </a:solidFill>
+                <a:latin typeface="Arial" pitchFamily="34" charset="0"/>
+                <a:ea typeface="Arial" pitchFamily="34" charset="-122"/>
+                <a:cs typeface="Arial" pitchFamily="34" charset="-120"/>
+              </a:rPr>
+              <a:t>관점이 갈리면(20~80%) 판정하지 않고 「논쟁 지점」으로 사람에게, 근거 있는 판정이 절반 미만이면 「확인 불가」.</a:t>
+            </a:r>
+            <a:endParaRPr lang="en-US" sz="1150" dirty="0"/>
+          </a:p>
+        </p:txBody>
+      </p:sp>
+      <p:sp>
+        <p:nvSpPr>
+          <p:cNvPr id="19" name="Shape 17"/>
+          <p:cNvSpPr/>
+          <p:nvPr/>
+        </p:nvSpPr>
+        <p:spPr>
+          <a:xfrm>
+            <a:off x="4434840" y="5029200"/>
+            <a:ext cx="6931152" cy="0"/>
+          </a:xfrm>
+          <a:prstGeom prst="line">
+            <a:avLst/>
+          </a:prstGeom>
+          <a:noFill/>
+          <a:ln w="12700">
+            <a:solidFill>
+              <a:srgbClr val="E5E8EB"/>
+            </a:solidFill>
+            <a:prstDash val="solid"/>
+          </a:ln>
+        </p:spPr>
+      </p:sp>
+      <p:sp>
+        <p:nvSpPr>
+          <p:cNvPr id="20" name="Text 18"/>
+          <p:cNvSpPr/>
+          <p:nvPr/>
+        </p:nvSpPr>
+        <p:spPr>
+          <a:xfrm>
+            <a:off x="4434840" y="5120640"/>
+            <a:ext cx="457200" cy="329184"/>
+          </a:xfrm>
+          <a:prstGeom prst="rect">
+            <a:avLst/>
+          </a:prstGeom>
+          <a:noFill/>
+          <a:ln/>
+        </p:spPr>
+        <p:txBody>
+          <a:bodyPr wrap="square" lIns="0" tIns="0" rIns="0" bIns="0" rtlCol="0" anchor="t"/>
+          <a:lstStyle/>
+          <a:p>
+            <a:pPr indent="0" marL="0">
+              <a:buNone/>
+            </a:pPr>
+            <a:r>
+              <a:rPr lang="en-US" sz="1600" b="1" dirty="0">
+                <a:solidFill>
+                  <a:srgbClr val="3182F6"/>
+                </a:solidFill>
+                <a:latin typeface="Arial" pitchFamily="34" charset="0"/>
+                <a:ea typeface="Arial" pitchFamily="34" charset="-122"/>
+                <a:cs typeface="Arial" pitchFamily="34" charset="-120"/>
+              </a:rPr>
+              <a:t>04</a:t>
+            </a:r>
+            <a:endParaRPr lang="en-US" sz="1600" dirty="0"/>
+          </a:p>
+        </p:txBody>
+      </p:sp>
+      <p:sp>
+        <p:nvSpPr>
+          <p:cNvPr id="21" name="Text 19"/>
+          <p:cNvSpPr/>
+          <p:nvPr/>
+        </p:nvSpPr>
+        <p:spPr>
+          <a:xfrm>
+            <a:off x="4937760" y="5120640"/>
+            <a:ext cx="1920240" cy="329184"/>
+          </a:xfrm>
+          <a:prstGeom prst="rect">
+            <a:avLst/>
+          </a:prstGeom>
+          <a:noFill/>
+          <a:ln/>
+        </p:spPr>
+        <p:txBody>
+          <a:bodyPr wrap="square" lIns="0" tIns="0" rIns="0" bIns="0" rtlCol="0" anchor="t"/>
+          <a:lstStyle/>
+          <a:p>
+            <a:pPr indent="0" marL="0">
+              <a:buNone/>
+            </a:pPr>
+            <a:r>
+              <a:rPr lang="en-US" sz="1500" b="1" dirty="0">
+                <a:solidFill>
+                  <a:srgbClr val="191F28"/>
+                </a:solidFill>
+                <a:latin typeface="Arial" pitchFamily="34" charset="0"/>
+                <a:ea typeface="Arial" pitchFamily="34" charset="-122"/>
+                <a:cs typeface="Arial" pitchFamily="34" charset="-120"/>
+              </a:rPr>
+              <a:t>잴 수 있는 것만 숫자로</a:t>
+            </a:r>
+            <a:endParaRPr lang="en-US" sz="1500" dirty="0"/>
+          </a:p>
+        </p:txBody>
+      </p:sp>
+      <p:sp>
+        <p:nvSpPr>
+          <p:cNvPr id="22" name="Text 20"/>
+          <p:cNvSpPr/>
+          <p:nvPr/>
+        </p:nvSpPr>
+        <p:spPr>
+          <a:xfrm>
+            <a:off x="6903720" y="5138928"/>
+            <a:ext cx="4462272" cy="731520"/>
+          </a:xfrm>
+          <a:prstGeom prst="rect">
+            <a:avLst/>
+          </a:prstGeom>
+          <a:noFill/>
+          <a:ln/>
+        </p:spPr>
+        <p:txBody>
+          <a:bodyPr wrap="square" lIns="0" tIns="0" rIns="0" bIns="0" rtlCol="0" anchor="t"/>
+          <a:lstStyle/>
+          <a:p>
+            <a:pPr indent="0" marL="0">
+              <a:lnSpc>
+                <a:spcPct val="115000"/>
+              </a:lnSpc>
+              <a:buNone/>
+            </a:pPr>
+            <a:r>
+              <a:rPr lang="en-US" sz="1150" dirty="0">
+                <a:solidFill>
+                  <a:srgbClr val="4E5968"/>
+                </a:solidFill>
+                <a:latin typeface="Arial" pitchFamily="34" charset="0"/>
+                <a:ea typeface="Arial" pitchFamily="34" charset="-122"/>
+                <a:cs typeface="Arial" pitchFamily="34" charset="-120"/>
+              </a:rPr>
+              <a:t>요건 추출(정답표 대비)과 일부러 지운 근거 탐지(오탐)만 숫자로 말하고, 심사 예측 정확도는 말하지 않습니다.</a:t>
+            </a:r>
+            <a:endParaRPr lang="en-US" sz="1150" dirty="0"/>
+          </a:p>
+        </p:txBody>
+      </p:sp>
+      <p:sp>
+        <p:nvSpPr>
+          <p:cNvPr id="23" name="Shape 21"/>
+          <p:cNvSpPr/>
+          <p:nvPr/>
+        </p:nvSpPr>
+        <p:spPr>
+          <a:xfrm>
+            <a:off x="822960" y="6035040"/>
+            <a:ext cx="10543032" cy="0"/>
+          </a:xfrm>
+          <a:prstGeom prst="line">
+            <a:avLst/>
+          </a:prstGeom>
+          <a:noFill/>
+          <a:ln w="12700">
+            <a:solidFill>
+              <a:srgbClr val="E5E8EB"/>
+            </a:solidFill>
+            <a:prstDash val="solid"/>
+          </a:ln>
+        </p:spPr>
+      </p:sp>
+      <p:sp>
+        <p:nvSpPr>
+          <p:cNvPr id="24" name="Text 22"/>
+          <p:cNvSpPr/>
+          <p:nvPr/>
+        </p:nvSpPr>
+        <p:spPr>
+          <a:xfrm>
+            <a:off x="822960" y="6126480"/>
             <a:ext cx="10543032" cy="274320"/>
           </a:xfrm>
           <a:prstGeom prst="rect">
@@ -9864,7 +10804,7 @@
               <a:buNone/>
             </a:pPr>
             <a:r>
-              <a:rPr lang="en-US" sz="1000" dirty="0">
+              <a:rPr lang="en-US" sz="1150" dirty="0">
                 <a:solidFill>
                   <a:srgbClr val="8B95A1"/>
                 </a:solidFill>
@@ -9872,9 +10812,9 @@
                 <a:ea typeface="Arial" pitchFamily="34" charset="-122"/>
                 <a:cs typeface="Arial" pitchFamily="34" charset="-120"/>
               </a:rPr>
-              <a:t>증거: deliver/mcp-codex-transcript.txt(호출 기록) · Crossref 대체 전환은 tests/test_scholar.py</a:t>
-            </a:r>
-            <a:endParaRPr lang="en-US" sz="1000" dirty="0"/>
+              <a:t>이 기준은 현장 심사위원 멘토링의 조언(주장 범위를 좁히고, 신뢰의 논리를 스스로 세울 것)을 그대로 따른 것입니다.</a:t>
+            </a:r>
+            <a:endParaRPr lang="en-US" sz="1150" dirty="0"/>
           </a:p>
         </p:txBody>
       </p:sp>
@@ -9943,7 +10883,7 @@
                 <a:ea typeface="Arial" pitchFamily="34" charset="-122"/>
                 <a:cs typeface="Arial" pitchFamily="34" charset="-120"/>
               </a:rPr>
-              <a:t>검증 — 예시 공고에만 맞춘 게 아닌지</a:t>
+              <a:t>MCP 도구 서버 — AI 도구 연결 표준</a:t>
             </a:r>
             <a:endParaRPr lang="en-US" sz="1400" dirty="0"/>
           </a:p>
@@ -9985,7 +10925,7 @@
                 <a:ea typeface="Arial" pitchFamily="34" charset="-122"/>
                 <a:cs typeface="Arial" pitchFamily="34" charset="-120"/>
               </a:rPr>
-              <a:t>정답표를 먼저 고정하고,</a:t>
+              <a:t>검사 도구를 MCP로 감싸,</a:t>
             </a:r>
             <a:endParaRPr lang="en-US" sz="3400" dirty="0"/>
           </a:p>
@@ -10005,7 +10945,7 @@
                 <a:ea typeface="Arial" pitchFamily="34" charset="-122"/>
                 <a:cs typeface="Arial" pitchFamily="34" charset="-120"/>
               </a:rPr>
-              <a:t>처음 보는 공고</a:t>
+              <a:t>다른 AI 비서</a:t>
             </a:r>
             <a:pPr indent="0" marL="0">
               <a:lnSpc>
@@ -10022,7 +10962,7 @@
                 <a:ea typeface="Arial" pitchFamily="34" charset="-122"/>
                 <a:cs typeface="Arial" pitchFamily="34" charset="-120"/>
               </a:rPr>
-              <a:t>로 쟀습니다</a:t>
+              <a:t>도 같은 검사를 씁니다</a:t>
             </a:r>
             <a:endParaRPr lang="en-US" sz="3400" dirty="0"/>
           </a:p>
@@ -10036,34 +10976,34 @@
         </p:nvSpPr>
         <p:spPr>
           <a:xfrm>
-            <a:off x="822960" y="2606040"/>
-            <a:ext cx="4937760" cy="292608"/>
-          </a:xfrm>
-          <a:prstGeom prst="rect">
-            <a:avLst/>
-          </a:prstGeom>
-          <a:noFill/>
-          <a:ln/>
-        </p:spPr>
-        <p:txBody>
-          <a:bodyPr wrap="square" lIns="0" tIns="0" rIns="0" bIns="0" rtlCol="0" anchor="t"/>
-          <a:lstStyle/>
-          <a:p>
-            <a:pPr indent="0" marL="0">
-              <a:buNone/>
-            </a:pPr>
-            <a:r>
-              <a:rPr lang="en-US" sz="1300" b="1" dirty="0">
-                <a:solidFill>
-                  <a:srgbClr val="4E5968"/>
-                </a:solidFill>
-                <a:latin typeface="Arial" pitchFamily="34" charset="0"/>
-                <a:ea typeface="Arial" pitchFamily="34" charset="-122"/>
-                <a:cs typeface="Arial" pitchFamily="34" charset="-120"/>
-              </a:rPr>
-              <a:t>① 개발에 쓴 공고 3건 — 요건 재현율(3회 평균)</a:t>
-            </a:r>
-            <a:endParaRPr lang="en-US" sz="1300" dirty="0"/>
+            <a:off x="822960" y="2715768"/>
+            <a:ext cx="548640" cy="365760"/>
+          </a:xfrm>
+          <a:prstGeom prst="rect">
+            <a:avLst/>
+          </a:prstGeom>
+          <a:noFill/>
+          <a:ln/>
+        </p:spPr>
+        <p:txBody>
+          <a:bodyPr wrap="square" lIns="0" tIns="0" rIns="0" bIns="0" rtlCol="0" anchor="t"/>
+          <a:lstStyle/>
+          <a:p>
+            <a:pPr indent="0" marL="0">
+              <a:buNone/>
+            </a:pPr>
+            <a:r>
+              <a:rPr lang="en-US" sz="1800" b="1" dirty="0">
+                <a:solidFill>
+                  <a:srgbClr val="3182F6"/>
+                </a:solidFill>
+                <a:latin typeface="Arial" pitchFamily="34" charset="0"/>
+                <a:ea typeface="Arial" pitchFamily="34" charset="-122"/>
+                <a:cs typeface="Arial" pitchFamily="34" charset="-120"/>
+              </a:rPr>
+              <a:t>01</a:t>
+            </a:r>
+            <a:endParaRPr lang="en-US" sz="1800" dirty="0"/>
           </a:p>
         </p:txBody>
       </p:sp>
@@ -10075,24 +11015,24 @@
         </p:nvSpPr>
         <p:spPr>
           <a:xfrm>
-            <a:off x="822960" y="3017520"/>
-            <a:ext cx="2926080" cy="329184"/>
-          </a:xfrm>
-          <a:prstGeom prst="rect">
-            <a:avLst/>
-          </a:prstGeom>
-          <a:noFill/>
-          <a:ln/>
-        </p:spPr>
-        <p:txBody>
-          <a:bodyPr wrap="square" lIns="0" tIns="0" rIns="0" bIns="0" rtlCol="0" anchor="t"/>
-          <a:lstStyle/>
-          <a:p>
-            <a:pPr indent="0" marL="0">
-              <a:buNone/>
-            </a:pPr>
-            <a:r>
-              <a:rPr lang="en-US" sz="1350" b="1" dirty="0">
+            <a:off x="1463040" y="2697480"/>
+            <a:ext cx="5120640" cy="384048"/>
+          </a:xfrm>
+          <a:prstGeom prst="rect">
+            <a:avLst/>
+          </a:prstGeom>
+          <a:noFill/>
+          <a:ln/>
+        </p:spPr>
+        <p:txBody>
+          <a:bodyPr wrap="square" lIns="0" tIns="0" rIns="0" bIns="0" rtlCol="0" anchor="t"/>
+          <a:lstStyle/>
+          <a:p>
+            <a:pPr indent="0" marL="0">
+              <a:buNone/>
+            </a:pPr>
+            <a:r>
+              <a:rPr lang="en-US" sz="1600" b="1" dirty="0">
                 <a:solidFill>
                   <a:srgbClr val="191F28"/>
                 </a:solidFill>
@@ -10100,9 +11040,9 @@
                 <a:ea typeface="Arial" pitchFamily="34" charset="-122"/>
                 <a:cs typeface="Arial" pitchFamily="34" charset="-120"/>
               </a:rPr>
-              <a:t>우주항공청 · 19쪽</a:t>
-            </a:r>
-            <a:endParaRPr lang="en-US" sz="1350" dirty="0"/>
+              <a:t>search_prior_art(query, n)</a:t>
+            </a:r>
+            <a:endParaRPr lang="en-US" sz="1600" dirty="0"/>
           </a:p>
         </p:txBody>
       </p:sp>
@@ -10114,20 +11054,98 @@
         </p:nvSpPr>
         <p:spPr>
           <a:xfrm>
-            <a:off x="3749040" y="3017520"/>
-            <a:ext cx="914400" cy="329184"/>
-          </a:xfrm>
-          <a:prstGeom prst="rect">
-            <a:avLst/>
-          </a:prstGeom>
-          <a:noFill/>
-          <a:ln/>
-        </p:spPr>
-        <p:txBody>
-          <a:bodyPr wrap="square" lIns="0" tIns="0" rIns="0" bIns="0" rtlCol="0" anchor="t"/>
-          <a:lstStyle/>
-          <a:p>
-            <a:pPr algn="r" indent="0" marL="0">
+            <a:off x="1463040" y="3108960"/>
+            <a:ext cx="5120640" cy="365760"/>
+          </a:xfrm>
+          <a:prstGeom prst="rect">
+            <a:avLst/>
+          </a:prstGeom>
+          <a:noFill/>
+          <a:ln/>
+        </p:spPr>
+        <p:txBody>
+          <a:bodyPr wrap="square" lIns="0" tIns="0" rIns="0" bIns="0" rtlCol="0" anchor="t"/>
+          <a:lstStyle/>
+          <a:p>
+            <a:pPr indent="0" marL="0">
+              <a:buNone/>
+            </a:pPr>
+            <a:r>
+              <a:rPr lang="en-US" sz="1150" dirty="0">
+                <a:solidFill>
+                  <a:srgbClr val="8B95A1"/>
+                </a:solidFill>
+                <a:latin typeface="Arial" pitchFamily="34" charset="0"/>
+                <a:ea typeface="Arial" pitchFamily="34" charset="-122"/>
+                <a:cs typeface="Arial" pitchFamily="34" charset="-120"/>
+              </a:rPr>
+              <a:t>공개 학술 DB 검색 — OpenAlex 우선, 장애 시 Crossref로 자동 전환 · 결과는 혁신성 판정의 참고 자료</a:t>
+            </a:r>
+            <a:endParaRPr lang="en-US" sz="1150" dirty="0"/>
+          </a:p>
+        </p:txBody>
+      </p:sp>
+      <p:sp>
+        <p:nvSpPr>
+          <p:cNvPr id="7" name="Text 5"/>
+          <p:cNvSpPr/>
+          <p:nvPr/>
+        </p:nvSpPr>
+        <p:spPr>
+          <a:xfrm>
+            <a:off x="822960" y="3675888"/>
+            <a:ext cx="548640" cy="365760"/>
+          </a:xfrm>
+          <a:prstGeom prst="rect">
+            <a:avLst/>
+          </a:prstGeom>
+          <a:noFill/>
+          <a:ln/>
+        </p:spPr>
+        <p:txBody>
+          <a:bodyPr wrap="square" lIns="0" tIns="0" rIns="0" bIns="0" rtlCol="0" anchor="t"/>
+          <a:lstStyle/>
+          <a:p>
+            <a:pPr indent="0" marL="0">
+              <a:buNone/>
+            </a:pPr>
+            <a:r>
+              <a:rPr lang="en-US" sz="1800" b="1" dirty="0">
+                <a:solidFill>
+                  <a:srgbClr val="3182F6"/>
+                </a:solidFill>
+                <a:latin typeface="Arial" pitchFamily="34" charset="0"/>
+                <a:ea typeface="Arial" pitchFamily="34" charset="-122"/>
+                <a:cs typeface="Arial" pitchFamily="34" charset="-120"/>
+              </a:rPr>
+              <a:t>02</a:t>
+            </a:r>
+            <a:endParaRPr lang="en-US" sz="1800" dirty="0"/>
+          </a:p>
+        </p:txBody>
+      </p:sp>
+      <p:sp>
+        <p:nvSpPr>
+          <p:cNvPr id="8" name="Text 6"/>
+          <p:cNvSpPr/>
+          <p:nvPr/>
+        </p:nvSpPr>
+        <p:spPr>
+          <a:xfrm>
+            <a:off x="1463040" y="3657600"/>
+            <a:ext cx="5120640" cy="384048"/>
+          </a:xfrm>
+          <a:prstGeom prst="rect">
+            <a:avLst/>
+          </a:prstGeom>
+          <a:noFill/>
+          <a:ln/>
+        </p:spPr>
+        <p:txBody>
+          <a:bodyPr wrap="square" lIns="0" tIns="0" rIns="0" bIns="0" rtlCol="0" anchor="t"/>
+          <a:lstStyle/>
+          <a:p>
+            <a:pPr indent="0" marL="0">
               <a:buNone/>
             </a:pPr>
             <a:r>
@@ -10139,7 +11157,7 @@
                 <a:ea typeface="Arial" pitchFamily="34" charset="-122"/>
                 <a:cs typeface="Arial" pitchFamily="34" charset="-120"/>
               </a:rPr>
-              <a:t>85%</a:t>
+              <a:t>check_quote(quote, text)</a:t>
             </a:r>
             <a:endParaRPr lang="en-US" sz="1600" dirty="0"/>
           </a:p>
@@ -10147,30 +11165,30 @@
       </p:sp>
       <p:sp>
         <p:nvSpPr>
-          <p:cNvPr id="7" name="Text 5"/>
-          <p:cNvSpPr/>
-          <p:nvPr/>
-        </p:nvSpPr>
-        <p:spPr>
-          <a:xfrm>
-            <a:off x="4754880" y="3063240"/>
-            <a:ext cx="1005840" cy="274320"/>
-          </a:xfrm>
-          <a:prstGeom prst="rect">
-            <a:avLst/>
-          </a:prstGeom>
-          <a:noFill/>
-          <a:ln/>
-        </p:spPr>
-        <p:txBody>
-          <a:bodyPr wrap="square" lIns="0" tIns="0" rIns="0" bIns="0" rtlCol="0" anchor="t"/>
-          <a:lstStyle/>
-          <a:p>
-            <a:pPr indent="0" marL="0">
-              <a:buNone/>
-            </a:pPr>
-            <a:r>
-              <a:rPr lang="en-US" sz="1100" dirty="0">
+          <p:cNvPr id="9" name="Text 7"/>
+          <p:cNvSpPr/>
+          <p:nvPr/>
+        </p:nvSpPr>
+        <p:spPr>
+          <a:xfrm>
+            <a:off x="1463040" y="4069080"/>
+            <a:ext cx="5120640" cy="365760"/>
+          </a:xfrm>
+          <a:prstGeom prst="rect">
+            <a:avLst/>
+          </a:prstGeom>
+          <a:noFill/>
+          <a:ln/>
+        </p:spPr>
+        <p:txBody>
+          <a:bodyPr wrap="square" lIns="0" tIns="0" rIns="0" bIns="0" rtlCol="0" anchor="t"/>
+          <a:lstStyle/>
+          <a:p>
+            <a:pPr indent="0" marL="0">
+              <a:buNone/>
+            </a:pPr>
+            <a:r>
+              <a:rPr lang="en-US" sz="1150" dirty="0">
                 <a:solidFill>
                   <a:srgbClr val="8B95A1"/>
                 </a:solidFill>
@@ -10178,38 +11196,77 @@
                 <a:ea typeface="Arial" pitchFamily="34" charset="-122"/>
                 <a:cs typeface="Arial" pitchFamily="34" charset="-120"/>
               </a:rPr>
-              <a:t>85~87</a:t>
-            </a:r>
-            <a:endParaRPr lang="en-US" sz="1100" dirty="0"/>
-          </a:p>
-        </p:txBody>
-      </p:sp>
-      <p:sp>
-        <p:nvSpPr>
-          <p:cNvPr id="8" name="Text 6"/>
-          <p:cNvSpPr/>
-          <p:nvPr/>
-        </p:nvSpPr>
-        <p:spPr>
-          <a:xfrm>
-            <a:off x="822960" y="3493008"/>
-            <a:ext cx="2926080" cy="329184"/>
-          </a:xfrm>
-          <a:prstGeom prst="rect">
-            <a:avLst/>
-          </a:prstGeom>
-          <a:noFill/>
-          <a:ln/>
-        </p:spPr>
-        <p:txBody>
-          <a:bodyPr wrap="square" lIns="0" tIns="0" rIns="0" bIns="0" rtlCol="0" anchor="t"/>
-          <a:lstStyle/>
-          <a:p>
-            <a:pPr indent="0" marL="0">
-              <a:buNone/>
-            </a:pPr>
-            <a:r>
-              <a:rPr lang="en-US" sz="1350" b="1" dirty="0">
+              <a:t>인용이 원문에 있는지 true/false — LLM 없이 같은 규칙 코드로</a:t>
+            </a:r>
+            <a:endParaRPr lang="en-US" sz="1150" dirty="0"/>
+          </a:p>
+        </p:txBody>
+      </p:sp>
+      <p:sp>
+        <p:nvSpPr>
+          <p:cNvPr id="10" name="Text 8"/>
+          <p:cNvSpPr/>
+          <p:nvPr/>
+        </p:nvSpPr>
+        <p:spPr>
+          <a:xfrm>
+            <a:off x="822960" y="4636008"/>
+            <a:ext cx="548640" cy="365760"/>
+          </a:xfrm>
+          <a:prstGeom prst="rect">
+            <a:avLst/>
+          </a:prstGeom>
+          <a:noFill/>
+          <a:ln/>
+        </p:spPr>
+        <p:txBody>
+          <a:bodyPr wrap="square" lIns="0" tIns="0" rIns="0" bIns="0" rtlCol="0" anchor="t"/>
+          <a:lstStyle/>
+          <a:p>
+            <a:pPr indent="0" marL="0">
+              <a:buNone/>
+            </a:pPr>
+            <a:r>
+              <a:rPr lang="en-US" sz="1800" b="1" dirty="0">
+                <a:solidFill>
+                  <a:srgbClr val="3182F6"/>
+                </a:solidFill>
+                <a:latin typeface="Arial" pitchFamily="34" charset="0"/>
+                <a:ea typeface="Arial" pitchFamily="34" charset="-122"/>
+                <a:cs typeface="Arial" pitchFamily="34" charset="-120"/>
+              </a:rPr>
+              <a:t>03</a:t>
+            </a:r>
+            <a:endParaRPr lang="en-US" sz="1800" dirty="0"/>
+          </a:p>
+        </p:txBody>
+      </p:sp>
+      <p:sp>
+        <p:nvSpPr>
+          <p:cNvPr id="11" name="Text 9"/>
+          <p:cNvSpPr/>
+          <p:nvPr/>
+        </p:nvSpPr>
+        <p:spPr>
+          <a:xfrm>
+            <a:off x="1463040" y="4617720"/>
+            <a:ext cx="5120640" cy="384048"/>
+          </a:xfrm>
+          <a:prstGeom prst="rect">
+            <a:avLst/>
+          </a:prstGeom>
+          <a:noFill/>
+          <a:ln/>
+        </p:spPr>
+        <p:txBody>
+          <a:bodyPr wrap="square" lIns="0" tIns="0" rIns="0" bIns="0" rtlCol="0" anchor="t"/>
+          <a:lstStyle/>
+          <a:p>
+            <a:pPr indent="0" marL="0">
+              <a:buNone/>
+            </a:pPr>
+            <a:r>
+              <a:rPr lang="en-US" sz="1600" b="1" dirty="0">
                 <a:solidFill>
                   <a:srgbClr val="191F28"/>
                 </a:solidFill>
@@ -10217,155 +11274,202 @@
                 <a:ea typeface="Arial" pitchFamily="34" charset="-122"/>
                 <a:cs typeface="Arial" pitchFamily="34" charset="-120"/>
               </a:rPr>
-              <a:t>산업통상부 · 37쪽</a:t>
-            </a:r>
-            <a:endParaRPr lang="en-US" sz="1350" dirty="0"/>
-          </a:p>
-        </p:txBody>
-      </p:sp>
-      <p:sp>
-        <p:nvSpPr>
-          <p:cNvPr id="9" name="Text 7"/>
-          <p:cNvSpPr/>
-          <p:nvPr/>
-        </p:nvSpPr>
-        <p:spPr>
-          <a:xfrm>
-            <a:off x="3749040" y="3493008"/>
-            <a:ext cx="914400" cy="329184"/>
-          </a:xfrm>
-          <a:prstGeom prst="rect">
-            <a:avLst/>
-          </a:prstGeom>
-          <a:noFill/>
-          <a:ln/>
-        </p:spPr>
-        <p:txBody>
-          <a:bodyPr wrap="square" lIns="0" tIns="0" rIns="0" bIns="0" rtlCol="0" anchor="t"/>
-          <a:lstStyle/>
-          <a:p>
-            <a:pPr algn="r" indent="0" marL="0">
-              <a:buNone/>
-            </a:pPr>
-            <a:r>
-              <a:rPr lang="en-US" sz="1600" b="1" dirty="0">
+              <a:t>왜 OpenAlex인가, 왜 MCP인가</a:t>
+            </a:r>
+            <a:endParaRPr lang="en-US" sz="1600" dirty="0"/>
+          </a:p>
+        </p:txBody>
+      </p:sp>
+      <p:sp>
+        <p:nvSpPr>
+          <p:cNvPr id="12" name="Text 10"/>
+          <p:cNvSpPr/>
+          <p:nvPr/>
+        </p:nvSpPr>
+        <p:spPr>
+          <a:xfrm>
+            <a:off x="1463040" y="5029200"/>
+            <a:ext cx="5120640" cy="365760"/>
+          </a:xfrm>
+          <a:prstGeom prst="rect">
+            <a:avLst/>
+          </a:prstGeom>
+          <a:noFill/>
+          <a:ln/>
+        </p:spPr>
+        <p:txBody>
+          <a:bodyPr wrap="square" lIns="0" tIns="0" rIns="0" bIns="0" rtlCol="0" anchor="t"/>
+          <a:lstStyle/>
+          <a:p>
+            <a:pPr indent="0" marL="0">
+              <a:buNone/>
+            </a:pPr>
+            <a:r>
+              <a:rPr lang="en-US" sz="1150" dirty="0">
+                <a:solidFill>
+                  <a:srgbClr val="8B95A1"/>
+                </a:solidFill>
+                <a:latin typeface="Arial" pitchFamily="34" charset="0"/>
+                <a:ea typeface="Arial" pitchFamily="34" charset="-122"/>
+                <a:cs typeface="Arial" pitchFamily="34" charset="-120"/>
+              </a:rPr>
+              <a:t>무료·키 없음·메타데이터 공개 라이선스라 기관 어디서든 비용 0 — 다만 오늘 밤 실측 중 OpenAlex가 503을 냈고 도구 뒤에서 Crossref로 바뀌었습니다. 국내 DB(NTIS·KCI)도 같은 자리에 꽂으면 됩니다</a:t>
+            </a:r>
+            <a:endParaRPr lang="en-US" sz="1150" dirty="0"/>
+          </a:p>
+        </p:txBody>
+      </p:sp>
+      <p:sp>
+        <p:nvSpPr>
+          <p:cNvPr id="13" name="Shape 11"/>
+          <p:cNvSpPr/>
+          <p:nvPr/>
+        </p:nvSpPr>
+        <p:spPr>
+          <a:xfrm>
+            <a:off x="6903720" y="2606040"/>
+            <a:ext cx="4462272" cy="3429000"/>
+          </a:xfrm>
+          <a:prstGeom prst="roundRect">
+            <a:avLst>
+              <a:gd name="adj" fmla="val 2133"/>
+            </a:avLst>
+          </a:prstGeom>
+          <a:solidFill>
+            <a:srgbClr val="F4F6F8"/>
+          </a:solidFill>
+          <a:ln w="12700">
+            <a:solidFill>
+              <a:srgbClr val="F4F6F8"/>
+            </a:solidFill>
+            <a:prstDash val="solid"/>
+          </a:ln>
+        </p:spPr>
+      </p:sp>
+      <p:sp>
+        <p:nvSpPr>
+          <p:cNvPr id="14" name="Text 12"/>
+          <p:cNvSpPr/>
+          <p:nvPr/>
+        </p:nvSpPr>
+        <p:spPr>
+          <a:xfrm>
+            <a:off x="7132320" y="2743200"/>
+            <a:ext cx="4005072" cy="274320"/>
+          </a:xfrm>
+          <a:prstGeom prst="rect">
+            <a:avLst/>
+          </a:prstGeom>
+          <a:noFill/>
+          <a:ln/>
+        </p:spPr>
+        <p:txBody>
+          <a:bodyPr wrap="square" lIns="0" tIns="0" rIns="0" bIns="0" rtlCol="0" anchor="t"/>
+          <a:lstStyle/>
+          <a:p>
+            <a:pPr indent="0" marL="0">
+              <a:buNone/>
+            </a:pPr>
+            <a:r>
+              <a:rPr lang="en-US" sz="1200" b="1" dirty="0">
+                <a:solidFill>
+                  <a:srgbClr val="3182F6"/>
+                </a:solidFill>
+                <a:latin typeface="Arial" pitchFamily="34" charset="0"/>
+                <a:ea typeface="Arial" pitchFamily="34" charset="-122"/>
+                <a:cs typeface="Arial" pitchFamily="34" charset="-120"/>
+              </a:rPr>
+              <a:t>실측 — 다른 AI 비서(Codex CLI)에 서버를 붙여 호출</a:t>
+            </a:r>
+            <a:endParaRPr lang="en-US" sz="1200" dirty="0"/>
+          </a:p>
+        </p:txBody>
+      </p:sp>
+      <p:sp>
+        <p:nvSpPr>
+          <p:cNvPr id="15" name="Text 13"/>
+          <p:cNvSpPr/>
+          <p:nvPr/>
+        </p:nvSpPr>
+        <p:spPr>
+          <a:xfrm>
+            <a:off x="7132320" y="3108960"/>
+            <a:ext cx="4005072" cy="548640"/>
+          </a:xfrm>
+          <a:prstGeom prst="rect">
+            <a:avLst/>
+          </a:prstGeom>
+          <a:noFill/>
+          <a:ln/>
+        </p:spPr>
+        <p:txBody>
+          <a:bodyPr wrap="square" lIns="0" tIns="0" rIns="0" bIns="0" rtlCol="0" anchor="t"/>
+          <a:lstStyle/>
+          <a:p>
+            <a:pPr indent="0" marL="0">
+              <a:buNone/>
+            </a:pPr>
+            <a:r>
+              <a:rPr lang="en-US" sz="1050" dirty="0">
                 <a:solidFill>
                   <a:srgbClr val="191F28"/>
                 </a:solidFill>
-                <a:latin typeface="Arial" pitchFamily="34" charset="0"/>
-                <a:ea typeface="Arial" pitchFamily="34" charset="-122"/>
-                <a:cs typeface="Arial" pitchFamily="34" charset="-120"/>
-              </a:rPr>
-              <a:t>93%</a:t>
-            </a:r>
-            <a:endParaRPr lang="en-US" sz="1600" dirty="0"/>
-          </a:p>
-        </p:txBody>
-      </p:sp>
-      <p:sp>
-        <p:nvSpPr>
-          <p:cNvPr id="10" name="Text 8"/>
-          <p:cNvSpPr/>
-          <p:nvPr/>
-        </p:nvSpPr>
-        <p:spPr>
-          <a:xfrm>
-            <a:off x="4754880" y="3538728"/>
-            <a:ext cx="1005840" cy="274320"/>
-          </a:xfrm>
-          <a:prstGeom prst="rect">
-            <a:avLst/>
-          </a:prstGeom>
-          <a:noFill/>
-          <a:ln/>
-        </p:spPr>
-        <p:txBody>
-          <a:bodyPr wrap="square" lIns="0" tIns="0" rIns="0" bIns="0" rtlCol="0" anchor="t"/>
-          <a:lstStyle/>
-          <a:p>
-            <a:pPr indent="0" marL="0">
-              <a:buNone/>
-            </a:pPr>
-            <a:r>
-              <a:rPr lang="en-US" sz="1100" dirty="0">
-                <a:solidFill>
-                  <a:srgbClr val="8B95A1"/>
-                </a:solidFill>
-                <a:latin typeface="Arial" pitchFamily="34" charset="0"/>
-                <a:ea typeface="Arial" pitchFamily="34" charset="-122"/>
-                <a:cs typeface="Arial" pitchFamily="34" charset="-120"/>
-              </a:rPr>
-              <a:t>91~95</a:t>
-            </a:r>
-            <a:endParaRPr lang="en-US" sz="1100" dirty="0"/>
-          </a:p>
-        </p:txBody>
-      </p:sp>
-      <p:sp>
-        <p:nvSpPr>
-          <p:cNvPr id="11" name="Text 9"/>
-          <p:cNvSpPr/>
-          <p:nvPr/>
-        </p:nvSpPr>
-        <p:spPr>
-          <a:xfrm>
-            <a:off x="822960" y="3968496"/>
-            <a:ext cx="2926080" cy="329184"/>
-          </a:xfrm>
-          <a:prstGeom prst="rect">
-            <a:avLst/>
-          </a:prstGeom>
-          <a:noFill/>
-          <a:ln/>
-        </p:spPr>
-        <p:txBody>
-          <a:bodyPr wrap="square" lIns="0" tIns="0" rIns="0" bIns="0" rtlCol="0" anchor="t"/>
-          <a:lstStyle/>
-          <a:p>
-            <a:pPr indent="0" marL="0">
-              <a:buNone/>
-            </a:pPr>
-            <a:r>
-              <a:rPr lang="en-US" sz="1350" b="1" dirty="0">
+                <a:latin typeface="Courier New" pitchFamily="34" charset="0"/>
+                <a:ea typeface="Courier New" pitchFamily="34" charset="-122"/>
+                <a:cs typeface="Courier New" pitchFamily="34" charset="-120"/>
+              </a:rPr>
+              <a:t>mcp_servers.rfp_to_fit.command = "python"</a:t>
+            </a:r>
+            <a:endParaRPr lang="en-US" sz="1050" dirty="0"/>
+          </a:p>
+          <a:p>
+            <a:pPr indent="0" marL="0">
+              <a:buNone/>
+            </a:pPr>
+            <a:r>
+              <a:rPr lang="en-US" sz="1050" dirty="0">
                 <a:solidFill>
                   <a:srgbClr val="191F28"/>
                 </a:solidFill>
-                <a:latin typeface="Arial" pitchFamily="34" charset="0"/>
-                <a:ea typeface="Arial" pitchFamily="34" charset="-122"/>
-                <a:cs typeface="Arial" pitchFamily="34" charset="-120"/>
-              </a:rPr>
-              <a:t>NAIS 해커톤 · 5쪽</a:t>
-            </a:r>
-            <a:endParaRPr lang="en-US" sz="1350" dirty="0"/>
-          </a:p>
-        </p:txBody>
-      </p:sp>
-      <p:sp>
-        <p:nvSpPr>
-          <p:cNvPr id="12" name="Text 10"/>
-          <p:cNvSpPr/>
-          <p:nvPr/>
-        </p:nvSpPr>
-        <p:spPr>
-          <a:xfrm>
-            <a:off x="3749040" y="3968496"/>
-            <a:ext cx="914400" cy="329184"/>
-          </a:xfrm>
-          <a:prstGeom prst="rect">
-            <a:avLst/>
-          </a:prstGeom>
-          <a:noFill/>
-          <a:ln/>
-        </p:spPr>
-        <p:txBody>
-          <a:bodyPr wrap="square" lIns="0" tIns="0" rIns="0" bIns="0" rtlCol="0" anchor="t"/>
-          <a:lstStyle/>
-          <a:p>
-            <a:pPr algn="r" indent="0" marL="0">
-              <a:buNone/>
-            </a:pPr>
-            <a:r>
-              <a:rPr lang="en-US" sz="1600" b="1" dirty="0">
+                <a:latin typeface="Courier New" pitchFamily="34" charset="0"/>
+                <a:ea typeface="Courier New" pitchFamily="34" charset="-122"/>
+                <a:cs typeface="Courier New" pitchFamily="34" charset="-120"/>
+              </a:rPr>
+              <a:t>args = ["-m", "rfp_to_fit.infrastructure.mcp_server"]</a:t>
+            </a:r>
+            <a:endParaRPr lang="en-US" sz="1050" dirty="0"/>
+          </a:p>
+        </p:txBody>
+      </p:sp>
+      <p:sp>
+        <p:nvSpPr>
+          <p:cNvPr id="16" name="Text 14"/>
+          <p:cNvSpPr/>
+          <p:nvPr/>
+        </p:nvSpPr>
+        <p:spPr>
+          <a:xfrm>
+            <a:off x="7132320" y="3794760"/>
+            <a:ext cx="4005072" cy="1005840"/>
+          </a:xfrm>
+          <a:prstGeom prst="rect">
+            <a:avLst/>
+          </a:prstGeom>
+          <a:noFill/>
+          <a:ln/>
+        </p:spPr>
+        <p:txBody>
+          <a:bodyPr wrap="square" lIns="0" tIns="0" rIns="0" bIns="0" rtlCol="0" anchor="t"/>
+          <a:lstStyle/>
+          <a:p>
+            <a:pPr indent="0" marL="0">
+              <a:lnSpc>
+                <a:spcPct val="130000"/>
+              </a:lnSpc>
+              <a:buNone/>
+            </a:pPr>
+            <a:r>
+              <a:rPr lang="en-US" sz="1200" b="1" dirty="0">
                 <a:solidFill>
                   <a:srgbClr val="191F28"/>
                 </a:solidFill>
@@ -10373,155 +11477,19 @@
                 <a:ea typeface="Arial" pitchFamily="34" charset="-122"/>
                 <a:cs typeface="Arial" pitchFamily="34" charset="-120"/>
               </a:rPr>
-              <a:t>87%</a:t>
-            </a:r>
-            <a:endParaRPr lang="en-US" sz="1600" dirty="0"/>
-          </a:p>
-        </p:txBody>
-      </p:sp>
-      <p:sp>
-        <p:nvSpPr>
-          <p:cNvPr id="13" name="Text 11"/>
-          <p:cNvSpPr/>
-          <p:nvPr/>
-        </p:nvSpPr>
-        <p:spPr>
-          <a:xfrm>
-            <a:off x="4754880" y="4014216"/>
-            <a:ext cx="1005840" cy="274320"/>
-          </a:xfrm>
-          <a:prstGeom prst="rect">
-            <a:avLst/>
-          </a:prstGeom>
-          <a:noFill/>
-          <a:ln/>
-        </p:spPr>
-        <p:txBody>
-          <a:bodyPr wrap="square" lIns="0" tIns="0" rIns="0" bIns="0" rtlCol="0" anchor="t"/>
-          <a:lstStyle/>
-          <a:p>
-            <a:pPr indent="0" marL="0">
-              <a:buNone/>
-            </a:pPr>
-            <a:r>
-              <a:rPr lang="en-US" sz="1100" dirty="0">
-                <a:solidFill>
-                  <a:srgbClr val="8B95A1"/>
-                </a:solidFill>
-                <a:latin typeface="Arial" pitchFamily="34" charset="0"/>
-                <a:ea typeface="Arial" pitchFamily="34" charset="-122"/>
-                <a:cs typeface="Arial" pitchFamily="34" charset="-120"/>
-              </a:rPr>
-              <a:t>85~88</a:t>
-            </a:r>
-            <a:endParaRPr lang="en-US" sz="1100" dirty="0"/>
-          </a:p>
-        </p:txBody>
-      </p:sp>
-      <p:sp>
-        <p:nvSpPr>
-          <p:cNvPr id="14" name="Text 12"/>
-          <p:cNvSpPr/>
-          <p:nvPr/>
-        </p:nvSpPr>
-        <p:spPr>
-          <a:xfrm>
-            <a:off x="822960" y="4526280"/>
-            <a:ext cx="4937760" cy="274320"/>
-          </a:xfrm>
-          <a:prstGeom prst="rect">
-            <a:avLst/>
-          </a:prstGeom>
-          <a:noFill/>
-          <a:ln/>
-        </p:spPr>
-        <p:txBody>
-          <a:bodyPr wrap="square" lIns="0" tIns="0" rIns="0" bIns="0" rtlCol="0" anchor="t"/>
-          <a:lstStyle/>
-          <a:p>
-            <a:pPr indent="0" marL="0">
-              <a:buNone/>
-            </a:pPr>
-            <a:r>
-              <a:rPr lang="en-US" sz="1150" dirty="0">
-                <a:solidFill>
-                  <a:srgbClr val="8B95A1"/>
-                </a:solidFill>
-                <a:latin typeface="Arial" pitchFamily="34" charset="0"/>
-                <a:ea typeface="Arial" pitchFamily="34" charset="-122"/>
-                <a:cs typeface="Arial" pitchFamily="34" charset="-120"/>
-              </a:rPr>
-              <a:t>심사표 배점 일치 3건 모두 100% · 1건 11~15초</a:t>
-            </a:r>
-            <a:endParaRPr lang="en-US" sz="1150" dirty="0"/>
-          </a:p>
-        </p:txBody>
-      </p:sp>
-      <p:sp>
-        <p:nvSpPr>
-          <p:cNvPr id="15" name="Text 13"/>
-          <p:cNvSpPr/>
-          <p:nvPr/>
-        </p:nvSpPr>
-        <p:spPr>
-          <a:xfrm>
-            <a:off x="6309360" y="2606040"/>
-            <a:ext cx="5056632" cy="292608"/>
-          </a:xfrm>
-          <a:prstGeom prst="rect">
-            <a:avLst/>
-          </a:prstGeom>
-          <a:noFill/>
-          <a:ln/>
-        </p:spPr>
-        <p:txBody>
-          <a:bodyPr wrap="square" lIns="0" tIns="0" rIns="0" bIns="0" rtlCol="0" anchor="t"/>
-          <a:lstStyle/>
-          <a:p>
-            <a:pPr indent="0" marL="0">
-              <a:buNone/>
-            </a:pPr>
-            <a:r>
-              <a:rPr lang="en-US" sz="1300" b="1" dirty="0">
-                <a:solidFill>
-                  <a:srgbClr val="3182F6"/>
-                </a:solidFill>
-                <a:latin typeface="Arial" pitchFamily="34" charset="0"/>
-                <a:ea typeface="Arial" pitchFamily="34" charset="-122"/>
-                <a:cs typeface="Arial" pitchFamily="34" charset="-120"/>
-              </a:rPr>
-              <a:t>② 처음 보는 공고 2건 — 링크로 새로 가져와, 정답표를 측정 전에 커밋</a:t>
-            </a:r>
-            <a:endParaRPr lang="en-US" sz="1300" dirty="0"/>
-          </a:p>
-        </p:txBody>
-      </p:sp>
-      <p:sp>
-        <p:nvSpPr>
-          <p:cNvPr id="16" name="Text 14"/>
-          <p:cNvSpPr/>
-          <p:nvPr/>
-        </p:nvSpPr>
-        <p:spPr>
-          <a:xfrm>
-            <a:off x="6309360" y="3017520"/>
-            <a:ext cx="3108960" cy="329184"/>
-          </a:xfrm>
-          <a:prstGeom prst="rect">
-            <a:avLst/>
-          </a:prstGeom>
-          <a:noFill/>
-          <a:ln/>
-        </p:spPr>
-        <p:txBody>
-          <a:bodyPr wrap="square" lIns="0" tIns="0" rIns="0" bIns="0" rtlCol="0" anchor="t"/>
-          <a:lstStyle/>
-          <a:p>
-            <a:pPr indent="0" marL="0">
-              <a:buNone/>
-            </a:pPr>
-            <a:r>
-              <a:rPr lang="en-US" sz="1350" b="1" dirty="0">
+              <a:t>check_quote(「재현율 90% 이상」) → true</a:t>
+            </a:r>
+            <a:endParaRPr lang="en-US" sz="1200" dirty="0"/>
+          </a:p>
+          <a:p>
+            <a:pPr indent="0" marL="0">
+              <a:lnSpc>
+                <a:spcPct val="130000"/>
+              </a:lnSpc>
+              <a:buNone/>
+            </a:pPr>
+            <a:r>
+              <a:rPr lang="en-US" sz="1200" b="1" dirty="0">
                 <a:solidFill>
                   <a:srgbClr val="191F28"/>
                 </a:solidFill>
@@ -10529,9 +11497,29 @@
                 <a:ea typeface="Arial" pitchFamily="34" charset="-122"/>
                 <a:cs typeface="Arial" pitchFamily="34" charset="-120"/>
               </a:rPr>
-              <a:t>과기정통부 국가과학자 공모</a:t>
-            </a:r>
-            <a:endParaRPr lang="en-US" sz="1350" dirty="0"/>
+              <a:t>check_quote(「정밀도 95% 달성」) → false</a:t>
+            </a:r>
+            <a:endParaRPr lang="en-US" sz="1200" dirty="0"/>
+          </a:p>
+          <a:p>
+            <a:pPr indent="0" marL="0">
+              <a:lnSpc>
+                <a:spcPct val="130000"/>
+              </a:lnSpc>
+              <a:buNone/>
+            </a:pPr>
+            <a:r>
+              <a:rPr lang="en-US" sz="1200" b="1" dirty="0">
+                <a:solidFill>
+                  <a:srgbClr val="191F28"/>
+                </a:solidFill>
+                <a:latin typeface="Arial" pitchFamily="34" charset="0"/>
+                <a:ea typeface="Arial" pitchFamily="34" charset="-122"/>
+                <a:cs typeface="Arial" pitchFamily="34" charset="-120"/>
+              </a:rPr>
+              <a:t>search_prior_art(「multi-agent LLM grant proposal review」) → 3편(Crossref)</a:t>
+            </a:r>
+            <a:endParaRPr lang="en-US" sz="1200" dirty="0"/>
           </a:p>
         </p:txBody>
       </p:sp>
@@ -10543,203 +11531,8 @@
         </p:nvSpPr>
         <p:spPr>
           <a:xfrm>
-            <a:off x="9418320" y="3017520"/>
-            <a:ext cx="914400" cy="329184"/>
-          </a:xfrm>
-          <a:prstGeom prst="rect">
-            <a:avLst/>
-          </a:prstGeom>
-          <a:noFill/>
-          <a:ln/>
-        </p:spPr>
-        <p:txBody>
-          <a:bodyPr wrap="square" lIns="0" tIns="0" rIns="0" bIns="0" rtlCol="0" anchor="t"/>
-          <a:lstStyle/>
-          <a:p>
-            <a:pPr algn="r" indent="0" marL="0">
-              <a:buNone/>
-            </a:pPr>
-            <a:r>
-              <a:rPr lang="en-US" sz="1600" b="1" dirty="0">
-                <a:solidFill>
-                  <a:srgbClr val="1B64DA"/>
-                </a:solidFill>
-                <a:latin typeface="Arial" pitchFamily="34" charset="0"/>
-                <a:ea typeface="Arial" pitchFamily="34" charset="-122"/>
-                <a:cs typeface="Arial" pitchFamily="34" charset="-120"/>
-              </a:rPr>
-              <a:t>94%</a:t>
-            </a:r>
-            <a:endParaRPr lang="en-US" sz="1600" dirty="0"/>
-          </a:p>
-        </p:txBody>
-      </p:sp>
-      <p:sp>
-        <p:nvSpPr>
-          <p:cNvPr id="18" name="Text 16"/>
-          <p:cNvSpPr/>
-          <p:nvPr/>
-        </p:nvSpPr>
-        <p:spPr>
-          <a:xfrm>
-            <a:off x="10424160" y="3063240"/>
-            <a:ext cx="941832" cy="274320"/>
-          </a:xfrm>
-          <a:prstGeom prst="rect">
-            <a:avLst/>
-          </a:prstGeom>
-          <a:noFill/>
-          <a:ln/>
-        </p:spPr>
-        <p:txBody>
-          <a:bodyPr wrap="square" lIns="0" tIns="0" rIns="0" bIns="0" rtlCol="0" anchor="t"/>
-          <a:lstStyle/>
-          <a:p>
-            <a:pPr indent="0" marL="0">
-              <a:buNone/>
-            </a:pPr>
-            <a:r>
-              <a:rPr lang="en-US" sz="1100" dirty="0">
-                <a:solidFill>
-                  <a:srgbClr val="8B95A1"/>
-                </a:solidFill>
-                <a:latin typeface="Arial" pitchFamily="34" charset="0"/>
-                <a:ea typeface="Arial" pitchFamily="34" charset="-122"/>
-                <a:cs typeface="Arial" pitchFamily="34" charset="-120"/>
-              </a:rPr>
-              <a:t>92~97 · 심사표 100%</a:t>
-            </a:r>
-            <a:endParaRPr lang="en-US" sz="1100" dirty="0"/>
-          </a:p>
-        </p:txBody>
-      </p:sp>
-      <p:sp>
-        <p:nvSpPr>
-          <p:cNvPr id="19" name="Text 17"/>
-          <p:cNvSpPr/>
-          <p:nvPr/>
-        </p:nvSpPr>
-        <p:spPr>
-          <a:xfrm>
-            <a:off x="6309360" y="3493008"/>
-            <a:ext cx="3108960" cy="329184"/>
-          </a:xfrm>
-          <a:prstGeom prst="rect">
-            <a:avLst/>
-          </a:prstGeom>
-          <a:noFill/>
-          <a:ln/>
-        </p:spPr>
-        <p:txBody>
-          <a:bodyPr wrap="square" lIns="0" tIns="0" rIns="0" bIns="0" rtlCol="0" anchor="t"/>
-          <a:lstStyle/>
-          <a:p>
-            <a:pPr indent="0" marL="0">
-              <a:buNone/>
-            </a:pPr>
-            <a:r>
-              <a:rPr lang="en-US" sz="1350" b="1" dirty="0">
-                <a:solidFill>
-                  <a:srgbClr val="191F28"/>
-                </a:solidFill>
-                <a:latin typeface="Arial" pitchFamily="34" charset="0"/>
-                <a:ea typeface="Arial" pitchFamily="34" charset="-122"/>
-                <a:cs typeface="Arial" pitchFamily="34" charset="-120"/>
-              </a:rPr>
-              <a:t>과기정통부 라이징스타 지정</a:t>
-            </a:r>
-            <a:endParaRPr lang="en-US" sz="1350" dirty="0"/>
-          </a:p>
-        </p:txBody>
-      </p:sp>
-      <p:sp>
-        <p:nvSpPr>
-          <p:cNvPr id="20" name="Text 18"/>
-          <p:cNvSpPr/>
-          <p:nvPr/>
-        </p:nvSpPr>
-        <p:spPr>
-          <a:xfrm>
-            <a:off x="9418320" y="3493008"/>
-            <a:ext cx="914400" cy="329184"/>
-          </a:xfrm>
-          <a:prstGeom prst="rect">
-            <a:avLst/>
-          </a:prstGeom>
-          <a:noFill/>
-          <a:ln/>
-        </p:spPr>
-        <p:txBody>
-          <a:bodyPr wrap="square" lIns="0" tIns="0" rIns="0" bIns="0" rtlCol="0" anchor="t"/>
-          <a:lstStyle/>
-          <a:p>
-            <a:pPr algn="r" indent="0" marL="0">
-              <a:buNone/>
-            </a:pPr>
-            <a:r>
-              <a:rPr lang="en-US" sz="1600" b="1" dirty="0">
-                <a:solidFill>
-                  <a:srgbClr val="1B64DA"/>
-                </a:solidFill>
-                <a:latin typeface="Arial" pitchFamily="34" charset="0"/>
-                <a:ea typeface="Arial" pitchFamily="34" charset="-122"/>
-                <a:cs typeface="Arial" pitchFamily="34" charset="-120"/>
-              </a:rPr>
-              <a:t>78%</a:t>
-            </a:r>
-            <a:endParaRPr lang="en-US" sz="1600" dirty="0"/>
-          </a:p>
-        </p:txBody>
-      </p:sp>
-      <p:sp>
-        <p:nvSpPr>
-          <p:cNvPr id="21" name="Text 19"/>
-          <p:cNvSpPr/>
-          <p:nvPr/>
-        </p:nvSpPr>
-        <p:spPr>
-          <a:xfrm>
-            <a:off x="10424160" y="3538728"/>
-            <a:ext cx="941832" cy="274320"/>
-          </a:xfrm>
-          <a:prstGeom prst="rect">
-            <a:avLst/>
-          </a:prstGeom>
-          <a:noFill/>
-          <a:ln/>
-        </p:spPr>
-        <p:txBody>
-          <a:bodyPr wrap="square" lIns="0" tIns="0" rIns="0" bIns="0" rtlCol="0" anchor="t"/>
-          <a:lstStyle/>
-          <a:p>
-            <a:pPr indent="0" marL="0">
-              <a:buNone/>
-            </a:pPr>
-            <a:r>
-              <a:rPr lang="en-US" sz="1100" dirty="0">
-                <a:solidFill>
-                  <a:srgbClr val="8B95A1"/>
-                </a:solidFill>
-                <a:latin typeface="Arial" pitchFamily="34" charset="0"/>
-                <a:ea typeface="Arial" pitchFamily="34" charset="-122"/>
-                <a:cs typeface="Arial" pitchFamily="34" charset="-120"/>
-              </a:rPr>
-              <a:t>76~78 · 심사표 100%</a:t>
-            </a:r>
-            <a:endParaRPr lang="en-US" sz="1100" dirty="0"/>
-          </a:p>
-        </p:txBody>
-      </p:sp>
-      <p:sp>
-        <p:nvSpPr>
-          <p:cNvPr id="22" name="Text 20"/>
-          <p:cNvSpPr/>
-          <p:nvPr/>
-        </p:nvSpPr>
-        <p:spPr>
-          <a:xfrm>
-            <a:off x="6309360" y="4069080"/>
-            <a:ext cx="5056632" cy="685800"/>
+            <a:off x="7132320" y="4937760"/>
+            <a:ext cx="4005072" cy="914400"/>
           </a:xfrm>
           <a:prstGeom prst="rect">
             <a:avLst/>
@@ -10766,97 +11559,15 @@
                 <a:ea typeface="Arial" pitchFamily="34" charset="-122"/>
                 <a:cs typeface="Arial" pitchFamily="34" charset="-120"/>
               </a:rPr>
-              <a:t>라이징스타에서 놓친 9개 중 6개가 ※주석 속 조건(「증빙 시에만 인정」 등) → 일반 규칙 1줄 추가 후 89~95%</a:t>
+              <a:t>찾은 선행연구 중 하나는 다중 에이전트로 지원서를 「생성」하는 연구 — 저희는 생성하지 않고, 이 공고의 심사표로 「검사」합니다.</a:t>
             </a:r>
             <a:endParaRPr lang="en-US" sz="1150" dirty="0"/>
           </a:p>
-          <a:p>
-            <a:pPr indent="0" marL="0">
-              <a:lnSpc>
-                <a:spcPct val="120000"/>
-              </a:lnSpc>
-              <a:buNone/>
-            </a:pPr>
-            <a:r>
-              <a:rPr lang="en-US" sz="1150" dirty="0">
-                <a:solidFill>
-                  <a:srgbClr val="4E5968"/>
-                </a:solidFill>
-                <a:latin typeface="Arial" pitchFamily="34" charset="0"/>
-                <a:ea typeface="Arial" pitchFamily="34" charset="-122"/>
-                <a:cs typeface="Arial" pitchFamily="34" charset="-120"/>
-              </a:rPr>
-              <a:t>(검증 공고를 본 뒤의 수정이라 위 블라인드 숫자와 따로 표기)</a:t>
-            </a:r>
-            <a:endParaRPr lang="en-US" sz="1150" dirty="0"/>
-          </a:p>
-        </p:txBody>
-      </p:sp>
-      <p:sp>
-        <p:nvSpPr>
-          <p:cNvPr id="23" name="Shape 21"/>
-          <p:cNvSpPr/>
-          <p:nvPr/>
-        </p:nvSpPr>
-        <p:spPr>
-          <a:xfrm>
-            <a:off x="822960" y="5074920"/>
-            <a:ext cx="10543032" cy="0"/>
-          </a:xfrm>
-          <a:prstGeom prst="line">
-            <a:avLst/>
-          </a:prstGeom>
-          <a:noFill/>
-          <a:ln w="12700">
-            <a:solidFill>
-              <a:srgbClr val="E5E8EB"/>
-            </a:solidFill>
-            <a:prstDash val="solid"/>
-          </a:ln>
-        </p:spPr>
-      </p:sp>
-      <p:sp>
-        <p:nvSpPr>
-          <p:cNvPr id="24" name="Text 22"/>
-          <p:cNvSpPr/>
-          <p:nvPr/>
-        </p:nvSpPr>
-        <p:spPr>
-          <a:xfrm>
-            <a:off x="822960" y="5257800"/>
-            <a:ext cx="10543032" cy="320040"/>
-          </a:xfrm>
-          <a:prstGeom prst="rect">
-            <a:avLst/>
-          </a:prstGeom>
-          <a:noFill/>
-          <a:ln/>
-        </p:spPr>
-        <p:txBody>
-          <a:bodyPr wrap="square" lIns="0" tIns="0" rIns="0" bIns="0" rtlCol="0" anchor="t"/>
-          <a:lstStyle/>
-          <a:p>
-            <a:pPr indent="0" marL="0">
-              <a:buNone/>
-            </a:pPr>
-            <a:r>
-              <a:rPr lang="en-US" sz="1300" b="1" dirty="0">
-                <a:solidFill>
-                  <a:srgbClr val="191F28"/>
-                </a:solidFill>
-                <a:latin typeface="Arial" pitchFamily="34" charset="0"/>
-                <a:ea typeface="Arial" pitchFamily="34" charset="-122"/>
-                <a:cs typeface="Arial" pitchFamily="34" charset="-120"/>
-              </a:rPr>
-              <a:t>링크 입력 실측: 실제 공지 주소 13건 중 13건에서 공고문을 골라 읽음(HWP 첨부·스크립트 다운로드·공고문 2개 합치기 포함) · IRIS 상세 페이지는 미실측</a:t>
-            </a:r>
-            <a:endParaRPr lang="en-US" sz="1300" dirty="0"/>
-          </a:p>
-        </p:txBody>
-      </p:sp>
-      <p:sp>
-        <p:nvSpPr>
-          <p:cNvPr id="25" name="Text 23"/>
+        </p:txBody>
+      </p:sp>
+      <p:sp>
+        <p:nvSpPr>
+          <p:cNvPr id="18" name="Text 16"/>
           <p:cNvSpPr/>
           <p:nvPr/>
         </p:nvSpPr>
@@ -10887,7 +11598,7 @@
                 <a:ea typeface="Arial" pitchFamily="34" charset="-122"/>
                 <a:cs typeface="Arial" pitchFamily="34" charset="-120"/>
               </a:rPr>
-              <a:t>정답표: 파이프라인(OpenAI)과 다른 회사 모델(Claude)이 원문을 읽어 작성 · 검증 정답표 커밋 430ea7d(21:37) 뒤에 측정 · 정밀도(추출 중 정답 비율) 45~84%는 다음 개선 대상</a:t>
+              <a:t>증거: deliver/mcp-codex-transcript.txt(호출 기록) · Crossref 대체 전환은 tests/test_scholar.py</a:t>
             </a:r>
             <a:endParaRPr lang="en-US" sz="1000" dirty="0"/>
           </a:p>
@@ -10958,7 +11669,7 @@
                 <a:ea typeface="Arial" pitchFamily="34" charset="-122"/>
                 <a:cs typeface="Arial" pitchFamily="34" charset="-120"/>
               </a:rPr>
-              <a:t>제거 실험 — 평가위원 여러 명이 정말 필요한가</a:t>
+              <a:t>검증 — 예시 공고에만 맞춘 게 아닌지</a:t>
             </a:r>
             <a:endParaRPr lang="en-US" sz="1400" dirty="0"/>
           </a:p>
@@ -11000,7 +11711,7 @@
                 <a:ea typeface="Arial" pitchFamily="34" charset="-122"/>
                 <a:cs typeface="Arial" pitchFamily="34" charset="-120"/>
               </a:rPr>
-              <a:t>한 명은 엉뚱한 곳도 짚고,</a:t>
+              <a:t>정답표를 먼저 고정하고,</a:t>
             </a:r>
             <a:endParaRPr lang="en-US" sz="3400" dirty="0"/>
           </a:p>
@@ -11020,7 +11731,7 @@
                 <a:ea typeface="Arial" pitchFamily="34" charset="-122"/>
                 <a:cs typeface="Arial" pitchFamily="34" charset="-120"/>
               </a:rPr>
-              <a:t>역할을 나누면</a:t>
+              <a:t>처음 보는 공고</a:t>
             </a:r>
             <a:pPr indent="0" marL="0">
               <a:lnSpc>
@@ -11037,7 +11748,7 @@
                 <a:ea typeface="Arial" pitchFamily="34" charset="-122"/>
                 <a:cs typeface="Arial" pitchFamily="34" charset="-120"/>
               </a:rPr>
-              <a:t> 오탐이 사라졌습니다</a:t>
+              <a:t>로 쟀습니다</a:t>
             </a:r>
             <a:endParaRPr lang="en-US" sz="3400" dirty="0"/>
           </a:p>
@@ -11052,7 +11763,7 @@
         <p:spPr>
           <a:xfrm>
             <a:off x="822960" y="2606040"/>
-            <a:ext cx="10543032" cy="292608"/>
+            <a:ext cx="4937760" cy="292608"/>
           </a:xfrm>
           <a:prstGeom prst="rect">
             <a:avLst/>
@@ -11076,7 +11787,7 @@
                 <a:ea typeface="Arial" pitchFamily="34" charset="-122"/>
                 <a:cs typeface="Arial" pitchFamily="34" charset="-120"/>
               </a:rPr>
-              <a:t>근거 블록을 일부러 하나씩 지운 초안 5개(예선 심사표) — 지운 곳을 짚었나, 안 지운 곳을 잘못 짚었나</a:t>
+              <a:t>① 개발에 쓴 공고 3건 — 요건 재현율(3회 평균)</a:t>
             </a:r>
             <a:endParaRPr lang="en-US" sz="1300" dirty="0"/>
           </a:p>
@@ -11084,23 +11795,744 @@
       </p:sp>
       <p:sp>
         <p:nvSpPr>
-          <p:cNvPr id="5" name="Shape 3"/>
-          <p:cNvSpPr/>
-          <p:nvPr/>
-        </p:nvSpPr>
-        <p:spPr>
-          <a:xfrm>
-            <a:off x="822960" y="3063240"/>
-            <a:ext cx="3331464" cy="2148840"/>
-          </a:xfrm>
-          <a:prstGeom prst="roundRect">
-            <a:avLst>
-              <a:gd name="adj" fmla="val 3404"/>
-            </a:avLst>
-          </a:prstGeom>
-          <a:solidFill>
-            <a:srgbClr val="FFFFFF"/>
-          </a:solidFill>
+          <p:cNvPr id="5" name="Text 3"/>
+          <p:cNvSpPr/>
+          <p:nvPr/>
+        </p:nvSpPr>
+        <p:spPr>
+          <a:xfrm>
+            <a:off x="822960" y="3017520"/>
+            <a:ext cx="2926080" cy="329184"/>
+          </a:xfrm>
+          <a:prstGeom prst="rect">
+            <a:avLst/>
+          </a:prstGeom>
+          <a:noFill/>
+          <a:ln/>
+        </p:spPr>
+        <p:txBody>
+          <a:bodyPr wrap="square" lIns="0" tIns="0" rIns="0" bIns="0" rtlCol="0" anchor="t"/>
+          <a:lstStyle/>
+          <a:p>
+            <a:pPr indent="0" marL="0">
+              <a:buNone/>
+            </a:pPr>
+            <a:r>
+              <a:rPr lang="en-US" sz="1350" b="1" dirty="0">
+                <a:solidFill>
+                  <a:srgbClr val="191F28"/>
+                </a:solidFill>
+                <a:latin typeface="Arial" pitchFamily="34" charset="0"/>
+                <a:ea typeface="Arial" pitchFamily="34" charset="-122"/>
+                <a:cs typeface="Arial" pitchFamily="34" charset="-120"/>
+              </a:rPr>
+              <a:t>우주항공청 · 19쪽</a:t>
+            </a:r>
+            <a:endParaRPr lang="en-US" sz="1350" dirty="0"/>
+          </a:p>
+        </p:txBody>
+      </p:sp>
+      <p:sp>
+        <p:nvSpPr>
+          <p:cNvPr id="6" name="Text 4"/>
+          <p:cNvSpPr/>
+          <p:nvPr/>
+        </p:nvSpPr>
+        <p:spPr>
+          <a:xfrm>
+            <a:off x="3749040" y="3017520"/>
+            <a:ext cx="914400" cy="329184"/>
+          </a:xfrm>
+          <a:prstGeom prst="rect">
+            <a:avLst/>
+          </a:prstGeom>
+          <a:noFill/>
+          <a:ln/>
+        </p:spPr>
+        <p:txBody>
+          <a:bodyPr wrap="square" lIns="0" tIns="0" rIns="0" bIns="0" rtlCol="0" anchor="t"/>
+          <a:lstStyle/>
+          <a:p>
+            <a:pPr algn="r" indent="0" marL="0">
+              <a:buNone/>
+            </a:pPr>
+            <a:r>
+              <a:rPr lang="en-US" sz="1600" b="1" dirty="0">
+                <a:solidFill>
+                  <a:srgbClr val="191F28"/>
+                </a:solidFill>
+                <a:latin typeface="Arial" pitchFamily="34" charset="0"/>
+                <a:ea typeface="Arial" pitchFamily="34" charset="-122"/>
+                <a:cs typeface="Arial" pitchFamily="34" charset="-120"/>
+              </a:rPr>
+              <a:t>85%</a:t>
+            </a:r>
+            <a:endParaRPr lang="en-US" sz="1600" dirty="0"/>
+          </a:p>
+        </p:txBody>
+      </p:sp>
+      <p:sp>
+        <p:nvSpPr>
+          <p:cNvPr id="7" name="Text 5"/>
+          <p:cNvSpPr/>
+          <p:nvPr/>
+        </p:nvSpPr>
+        <p:spPr>
+          <a:xfrm>
+            <a:off x="4754880" y="3063240"/>
+            <a:ext cx="1005840" cy="274320"/>
+          </a:xfrm>
+          <a:prstGeom prst="rect">
+            <a:avLst/>
+          </a:prstGeom>
+          <a:noFill/>
+          <a:ln/>
+        </p:spPr>
+        <p:txBody>
+          <a:bodyPr wrap="square" lIns="0" tIns="0" rIns="0" bIns="0" rtlCol="0" anchor="t"/>
+          <a:lstStyle/>
+          <a:p>
+            <a:pPr indent="0" marL="0">
+              <a:buNone/>
+            </a:pPr>
+            <a:r>
+              <a:rPr lang="en-US" sz="1100" dirty="0">
+                <a:solidFill>
+                  <a:srgbClr val="8B95A1"/>
+                </a:solidFill>
+                <a:latin typeface="Arial" pitchFamily="34" charset="0"/>
+                <a:ea typeface="Arial" pitchFamily="34" charset="-122"/>
+                <a:cs typeface="Arial" pitchFamily="34" charset="-120"/>
+              </a:rPr>
+              <a:t>85~87</a:t>
+            </a:r>
+            <a:endParaRPr lang="en-US" sz="1100" dirty="0"/>
+          </a:p>
+        </p:txBody>
+      </p:sp>
+      <p:sp>
+        <p:nvSpPr>
+          <p:cNvPr id="8" name="Text 6"/>
+          <p:cNvSpPr/>
+          <p:nvPr/>
+        </p:nvSpPr>
+        <p:spPr>
+          <a:xfrm>
+            <a:off x="822960" y="3493008"/>
+            <a:ext cx="2926080" cy="329184"/>
+          </a:xfrm>
+          <a:prstGeom prst="rect">
+            <a:avLst/>
+          </a:prstGeom>
+          <a:noFill/>
+          <a:ln/>
+        </p:spPr>
+        <p:txBody>
+          <a:bodyPr wrap="square" lIns="0" tIns="0" rIns="0" bIns="0" rtlCol="0" anchor="t"/>
+          <a:lstStyle/>
+          <a:p>
+            <a:pPr indent="0" marL="0">
+              <a:buNone/>
+            </a:pPr>
+            <a:r>
+              <a:rPr lang="en-US" sz="1350" b="1" dirty="0">
+                <a:solidFill>
+                  <a:srgbClr val="191F28"/>
+                </a:solidFill>
+                <a:latin typeface="Arial" pitchFamily="34" charset="0"/>
+                <a:ea typeface="Arial" pitchFamily="34" charset="-122"/>
+                <a:cs typeface="Arial" pitchFamily="34" charset="-120"/>
+              </a:rPr>
+              <a:t>산업통상부 · 37쪽</a:t>
+            </a:r>
+            <a:endParaRPr lang="en-US" sz="1350" dirty="0"/>
+          </a:p>
+        </p:txBody>
+      </p:sp>
+      <p:sp>
+        <p:nvSpPr>
+          <p:cNvPr id="9" name="Text 7"/>
+          <p:cNvSpPr/>
+          <p:nvPr/>
+        </p:nvSpPr>
+        <p:spPr>
+          <a:xfrm>
+            <a:off x="3749040" y="3493008"/>
+            <a:ext cx="914400" cy="329184"/>
+          </a:xfrm>
+          <a:prstGeom prst="rect">
+            <a:avLst/>
+          </a:prstGeom>
+          <a:noFill/>
+          <a:ln/>
+        </p:spPr>
+        <p:txBody>
+          <a:bodyPr wrap="square" lIns="0" tIns="0" rIns="0" bIns="0" rtlCol="0" anchor="t"/>
+          <a:lstStyle/>
+          <a:p>
+            <a:pPr algn="r" indent="0" marL="0">
+              <a:buNone/>
+            </a:pPr>
+            <a:r>
+              <a:rPr lang="en-US" sz="1600" b="1" dirty="0">
+                <a:solidFill>
+                  <a:srgbClr val="191F28"/>
+                </a:solidFill>
+                <a:latin typeface="Arial" pitchFamily="34" charset="0"/>
+                <a:ea typeface="Arial" pitchFamily="34" charset="-122"/>
+                <a:cs typeface="Arial" pitchFamily="34" charset="-120"/>
+              </a:rPr>
+              <a:t>93%</a:t>
+            </a:r>
+            <a:endParaRPr lang="en-US" sz="1600" dirty="0"/>
+          </a:p>
+        </p:txBody>
+      </p:sp>
+      <p:sp>
+        <p:nvSpPr>
+          <p:cNvPr id="10" name="Text 8"/>
+          <p:cNvSpPr/>
+          <p:nvPr/>
+        </p:nvSpPr>
+        <p:spPr>
+          <a:xfrm>
+            <a:off x="4754880" y="3538728"/>
+            <a:ext cx="1005840" cy="274320"/>
+          </a:xfrm>
+          <a:prstGeom prst="rect">
+            <a:avLst/>
+          </a:prstGeom>
+          <a:noFill/>
+          <a:ln/>
+        </p:spPr>
+        <p:txBody>
+          <a:bodyPr wrap="square" lIns="0" tIns="0" rIns="0" bIns="0" rtlCol="0" anchor="t"/>
+          <a:lstStyle/>
+          <a:p>
+            <a:pPr indent="0" marL="0">
+              <a:buNone/>
+            </a:pPr>
+            <a:r>
+              <a:rPr lang="en-US" sz="1100" dirty="0">
+                <a:solidFill>
+                  <a:srgbClr val="8B95A1"/>
+                </a:solidFill>
+                <a:latin typeface="Arial" pitchFamily="34" charset="0"/>
+                <a:ea typeface="Arial" pitchFamily="34" charset="-122"/>
+                <a:cs typeface="Arial" pitchFamily="34" charset="-120"/>
+              </a:rPr>
+              <a:t>91~95</a:t>
+            </a:r>
+            <a:endParaRPr lang="en-US" sz="1100" dirty="0"/>
+          </a:p>
+        </p:txBody>
+      </p:sp>
+      <p:sp>
+        <p:nvSpPr>
+          <p:cNvPr id="11" name="Text 9"/>
+          <p:cNvSpPr/>
+          <p:nvPr/>
+        </p:nvSpPr>
+        <p:spPr>
+          <a:xfrm>
+            <a:off x="822960" y="3968496"/>
+            <a:ext cx="2926080" cy="329184"/>
+          </a:xfrm>
+          <a:prstGeom prst="rect">
+            <a:avLst/>
+          </a:prstGeom>
+          <a:noFill/>
+          <a:ln/>
+        </p:spPr>
+        <p:txBody>
+          <a:bodyPr wrap="square" lIns="0" tIns="0" rIns="0" bIns="0" rtlCol="0" anchor="t"/>
+          <a:lstStyle/>
+          <a:p>
+            <a:pPr indent="0" marL="0">
+              <a:buNone/>
+            </a:pPr>
+            <a:r>
+              <a:rPr lang="en-US" sz="1350" b="1" dirty="0">
+                <a:solidFill>
+                  <a:srgbClr val="191F28"/>
+                </a:solidFill>
+                <a:latin typeface="Arial" pitchFamily="34" charset="0"/>
+                <a:ea typeface="Arial" pitchFamily="34" charset="-122"/>
+                <a:cs typeface="Arial" pitchFamily="34" charset="-120"/>
+              </a:rPr>
+              <a:t>NAIS 해커톤 · 5쪽</a:t>
+            </a:r>
+            <a:endParaRPr lang="en-US" sz="1350" dirty="0"/>
+          </a:p>
+        </p:txBody>
+      </p:sp>
+      <p:sp>
+        <p:nvSpPr>
+          <p:cNvPr id="12" name="Text 10"/>
+          <p:cNvSpPr/>
+          <p:nvPr/>
+        </p:nvSpPr>
+        <p:spPr>
+          <a:xfrm>
+            <a:off x="3749040" y="3968496"/>
+            <a:ext cx="914400" cy="329184"/>
+          </a:xfrm>
+          <a:prstGeom prst="rect">
+            <a:avLst/>
+          </a:prstGeom>
+          <a:noFill/>
+          <a:ln/>
+        </p:spPr>
+        <p:txBody>
+          <a:bodyPr wrap="square" lIns="0" tIns="0" rIns="0" bIns="0" rtlCol="0" anchor="t"/>
+          <a:lstStyle/>
+          <a:p>
+            <a:pPr algn="r" indent="0" marL="0">
+              <a:buNone/>
+            </a:pPr>
+            <a:r>
+              <a:rPr lang="en-US" sz="1600" b="1" dirty="0">
+                <a:solidFill>
+                  <a:srgbClr val="191F28"/>
+                </a:solidFill>
+                <a:latin typeface="Arial" pitchFamily="34" charset="0"/>
+                <a:ea typeface="Arial" pitchFamily="34" charset="-122"/>
+                <a:cs typeface="Arial" pitchFamily="34" charset="-120"/>
+              </a:rPr>
+              <a:t>87%</a:t>
+            </a:r>
+            <a:endParaRPr lang="en-US" sz="1600" dirty="0"/>
+          </a:p>
+        </p:txBody>
+      </p:sp>
+      <p:sp>
+        <p:nvSpPr>
+          <p:cNvPr id="13" name="Text 11"/>
+          <p:cNvSpPr/>
+          <p:nvPr/>
+        </p:nvSpPr>
+        <p:spPr>
+          <a:xfrm>
+            <a:off x="4754880" y="4014216"/>
+            <a:ext cx="1005840" cy="274320"/>
+          </a:xfrm>
+          <a:prstGeom prst="rect">
+            <a:avLst/>
+          </a:prstGeom>
+          <a:noFill/>
+          <a:ln/>
+        </p:spPr>
+        <p:txBody>
+          <a:bodyPr wrap="square" lIns="0" tIns="0" rIns="0" bIns="0" rtlCol="0" anchor="t"/>
+          <a:lstStyle/>
+          <a:p>
+            <a:pPr indent="0" marL="0">
+              <a:buNone/>
+            </a:pPr>
+            <a:r>
+              <a:rPr lang="en-US" sz="1100" dirty="0">
+                <a:solidFill>
+                  <a:srgbClr val="8B95A1"/>
+                </a:solidFill>
+                <a:latin typeface="Arial" pitchFamily="34" charset="0"/>
+                <a:ea typeface="Arial" pitchFamily="34" charset="-122"/>
+                <a:cs typeface="Arial" pitchFamily="34" charset="-120"/>
+              </a:rPr>
+              <a:t>85~88</a:t>
+            </a:r>
+            <a:endParaRPr lang="en-US" sz="1100" dirty="0"/>
+          </a:p>
+        </p:txBody>
+      </p:sp>
+      <p:sp>
+        <p:nvSpPr>
+          <p:cNvPr id="14" name="Text 12"/>
+          <p:cNvSpPr/>
+          <p:nvPr/>
+        </p:nvSpPr>
+        <p:spPr>
+          <a:xfrm>
+            <a:off x="822960" y="4526280"/>
+            <a:ext cx="4937760" cy="274320"/>
+          </a:xfrm>
+          <a:prstGeom prst="rect">
+            <a:avLst/>
+          </a:prstGeom>
+          <a:noFill/>
+          <a:ln/>
+        </p:spPr>
+        <p:txBody>
+          <a:bodyPr wrap="square" lIns="0" tIns="0" rIns="0" bIns="0" rtlCol="0" anchor="t"/>
+          <a:lstStyle/>
+          <a:p>
+            <a:pPr indent="0" marL="0">
+              <a:buNone/>
+            </a:pPr>
+            <a:r>
+              <a:rPr lang="en-US" sz="1150" dirty="0">
+                <a:solidFill>
+                  <a:srgbClr val="8B95A1"/>
+                </a:solidFill>
+                <a:latin typeface="Arial" pitchFamily="34" charset="0"/>
+                <a:ea typeface="Arial" pitchFamily="34" charset="-122"/>
+                <a:cs typeface="Arial" pitchFamily="34" charset="-120"/>
+              </a:rPr>
+              <a:t>심사표 배점 일치 3건 모두 100% · 1건 11~15초</a:t>
+            </a:r>
+            <a:endParaRPr lang="en-US" sz="1150" dirty="0"/>
+          </a:p>
+        </p:txBody>
+      </p:sp>
+      <p:sp>
+        <p:nvSpPr>
+          <p:cNvPr id="15" name="Text 13"/>
+          <p:cNvSpPr/>
+          <p:nvPr/>
+        </p:nvSpPr>
+        <p:spPr>
+          <a:xfrm>
+            <a:off x="6309360" y="2606040"/>
+            <a:ext cx="5056632" cy="292608"/>
+          </a:xfrm>
+          <a:prstGeom prst="rect">
+            <a:avLst/>
+          </a:prstGeom>
+          <a:noFill/>
+          <a:ln/>
+        </p:spPr>
+        <p:txBody>
+          <a:bodyPr wrap="square" lIns="0" tIns="0" rIns="0" bIns="0" rtlCol="0" anchor="t"/>
+          <a:lstStyle/>
+          <a:p>
+            <a:pPr indent="0" marL="0">
+              <a:buNone/>
+            </a:pPr>
+            <a:r>
+              <a:rPr lang="en-US" sz="1300" b="1" dirty="0">
+                <a:solidFill>
+                  <a:srgbClr val="3182F6"/>
+                </a:solidFill>
+                <a:latin typeface="Arial" pitchFamily="34" charset="0"/>
+                <a:ea typeface="Arial" pitchFamily="34" charset="-122"/>
+                <a:cs typeface="Arial" pitchFamily="34" charset="-120"/>
+              </a:rPr>
+              <a:t>② 처음 보는 공고 2건 — 링크로 새로 가져와, 정답표를 측정 전에 커밋</a:t>
+            </a:r>
+            <a:endParaRPr lang="en-US" sz="1300" dirty="0"/>
+          </a:p>
+        </p:txBody>
+      </p:sp>
+      <p:sp>
+        <p:nvSpPr>
+          <p:cNvPr id="16" name="Text 14"/>
+          <p:cNvSpPr/>
+          <p:nvPr/>
+        </p:nvSpPr>
+        <p:spPr>
+          <a:xfrm>
+            <a:off x="6309360" y="3017520"/>
+            <a:ext cx="3108960" cy="329184"/>
+          </a:xfrm>
+          <a:prstGeom prst="rect">
+            <a:avLst/>
+          </a:prstGeom>
+          <a:noFill/>
+          <a:ln/>
+        </p:spPr>
+        <p:txBody>
+          <a:bodyPr wrap="square" lIns="0" tIns="0" rIns="0" bIns="0" rtlCol="0" anchor="t"/>
+          <a:lstStyle/>
+          <a:p>
+            <a:pPr indent="0" marL="0">
+              <a:buNone/>
+            </a:pPr>
+            <a:r>
+              <a:rPr lang="en-US" sz="1350" b="1" dirty="0">
+                <a:solidFill>
+                  <a:srgbClr val="191F28"/>
+                </a:solidFill>
+                <a:latin typeface="Arial" pitchFamily="34" charset="0"/>
+                <a:ea typeface="Arial" pitchFamily="34" charset="-122"/>
+                <a:cs typeface="Arial" pitchFamily="34" charset="-120"/>
+              </a:rPr>
+              <a:t>과기정통부 국가과학자 공모</a:t>
+            </a:r>
+            <a:endParaRPr lang="en-US" sz="1350" dirty="0"/>
+          </a:p>
+        </p:txBody>
+      </p:sp>
+      <p:sp>
+        <p:nvSpPr>
+          <p:cNvPr id="17" name="Text 15"/>
+          <p:cNvSpPr/>
+          <p:nvPr/>
+        </p:nvSpPr>
+        <p:spPr>
+          <a:xfrm>
+            <a:off x="9418320" y="3017520"/>
+            <a:ext cx="914400" cy="329184"/>
+          </a:xfrm>
+          <a:prstGeom prst="rect">
+            <a:avLst/>
+          </a:prstGeom>
+          <a:noFill/>
+          <a:ln/>
+        </p:spPr>
+        <p:txBody>
+          <a:bodyPr wrap="square" lIns="0" tIns="0" rIns="0" bIns="0" rtlCol="0" anchor="t"/>
+          <a:lstStyle/>
+          <a:p>
+            <a:pPr algn="r" indent="0" marL="0">
+              <a:buNone/>
+            </a:pPr>
+            <a:r>
+              <a:rPr lang="en-US" sz="1600" b="1" dirty="0">
+                <a:solidFill>
+                  <a:srgbClr val="1B64DA"/>
+                </a:solidFill>
+                <a:latin typeface="Arial" pitchFamily="34" charset="0"/>
+                <a:ea typeface="Arial" pitchFamily="34" charset="-122"/>
+                <a:cs typeface="Arial" pitchFamily="34" charset="-120"/>
+              </a:rPr>
+              <a:t>94%</a:t>
+            </a:r>
+            <a:endParaRPr lang="en-US" sz="1600" dirty="0"/>
+          </a:p>
+        </p:txBody>
+      </p:sp>
+      <p:sp>
+        <p:nvSpPr>
+          <p:cNvPr id="18" name="Text 16"/>
+          <p:cNvSpPr/>
+          <p:nvPr/>
+        </p:nvSpPr>
+        <p:spPr>
+          <a:xfrm>
+            <a:off x="10424160" y="3063240"/>
+            <a:ext cx="941832" cy="274320"/>
+          </a:xfrm>
+          <a:prstGeom prst="rect">
+            <a:avLst/>
+          </a:prstGeom>
+          <a:noFill/>
+          <a:ln/>
+        </p:spPr>
+        <p:txBody>
+          <a:bodyPr wrap="square" lIns="0" tIns="0" rIns="0" bIns="0" rtlCol="0" anchor="t"/>
+          <a:lstStyle/>
+          <a:p>
+            <a:pPr indent="0" marL="0">
+              <a:buNone/>
+            </a:pPr>
+            <a:r>
+              <a:rPr lang="en-US" sz="1100" dirty="0">
+                <a:solidFill>
+                  <a:srgbClr val="8B95A1"/>
+                </a:solidFill>
+                <a:latin typeface="Arial" pitchFamily="34" charset="0"/>
+                <a:ea typeface="Arial" pitchFamily="34" charset="-122"/>
+                <a:cs typeface="Arial" pitchFamily="34" charset="-120"/>
+              </a:rPr>
+              <a:t>92~97 · 심사표 100%</a:t>
+            </a:r>
+            <a:endParaRPr lang="en-US" sz="1100" dirty="0"/>
+          </a:p>
+        </p:txBody>
+      </p:sp>
+      <p:sp>
+        <p:nvSpPr>
+          <p:cNvPr id="19" name="Text 17"/>
+          <p:cNvSpPr/>
+          <p:nvPr/>
+        </p:nvSpPr>
+        <p:spPr>
+          <a:xfrm>
+            <a:off x="6309360" y="3493008"/>
+            <a:ext cx="3108960" cy="329184"/>
+          </a:xfrm>
+          <a:prstGeom prst="rect">
+            <a:avLst/>
+          </a:prstGeom>
+          <a:noFill/>
+          <a:ln/>
+        </p:spPr>
+        <p:txBody>
+          <a:bodyPr wrap="square" lIns="0" tIns="0" rIns="0" bIns="0" rtlCol="0" anchor="t"/>
+          <a:lstStyle/>
+          <a:p>
+            <a:pPr indent="0" marL="0">
+              <a:buNone/>
+            </a:pPr>
+            <a:r>
+              <a:rPr lang="en-US" sz="1350" b="1" dirty="0">
+                <a:solidFill>
+                  <a:srgbClr val="191F28"/>
+                </a:solidFill>
+                <a:latin typeface="Arial" pitchFamily="34" charset="0"/>
+                <a:ea typeface="Arial" pitchFamily="34" charset="-122"/>
+                <a:cs typeface="Arial" pitchFamily="34" charset="-120"/>
+              </a:rPr>
+              <a:t>과기정통부 라이징스타 지정</a:t>
+            </a:r>
+            <a:endParaRPr lang="en-US" sz="1350" dirty="0"/>
+          </a:p>
+        </p:txBody>
+      </p:sp>
+      <p:sp>
+        <p:nvSpPr>
+          <p:cNvPr id="20" name="Text 18"/>
+          <p:cNvSpPr/>
+          <p:nvPr/>
+        </p:nvSpPr>
+        <p:spPr>
+          <a:xfrm>
+            <a:off x="9418320" y="3493008"/>
+            <a:ext cx="914400" cy="329184"/>
+          </a:xfrm>
+          <a:prstGeom prst="rect">
+            <a:avLst/>
+          </a:prstGeom>
+          <a:noFill/>
+          <a:ln/>
+        </p:spPr>
+        <p:txBody>
+          <a:bodyPr wrap="square" lIns="0" tIns="0" rIns="0" bIns="0" rtlCol="0" anchor="t"/>
+          <a:lstStyle/>
+          <a:p>
+            <a:pPr algn="r" indent="0" marL="0">
+              <a:buNone/>
+            </a:pPr>
+            <a:r>
+              <a:rPr lang="en-US" sz="1600" b="1" dirty="0">
+                <a:solidFill>
+                  <a:srgbClr val="1B64DA"/>
+                </a:solidFill>
+                <a:latin typeface="Arial" pitchFamily="34" charset="0"/>
+                <a:ea typeface="Arial" pitchFamily="34" charset="-122"/>
+                <a:cs typeface="Arial" pitchFamily="34" charset="-120"/>
+              </a:rPr>
+              <a:t>78%</a:t>
+            </a:r>
+            <a:endParaRPr lang="en-US" sz="1600" dirty="0"/>
+          </a:p>
+        </p:txBody>
+      </p:sp>
+      <p:sp>
+        <p:nvSpPr>
+          <p:cNvPr id="21" name="Text 19"/>
+          <p:cNvSpPr/>
+          <p:nvPr/>
+        </p:nvSpPr>
+        <p:spPr>
+          <a:xfrm>
+            <a:off x="10424160" y="3538728"/>
+            <a:ext cx="941832" cy="274320"/>
+          </a:xfrm>
+          <a:prstGeom prst="rect">
+            <a:avLst/>
+          </a:prstGeom>
+          <a:noFill/>
+          <a:ln/>
+        </p:spPr>
+        <p:txBody>
+          <a:bodyPr wrap="square" lIns="0" tIns="0" rIns="0" bIns="0" rtlCol="0" anchor="t"/>
+          <a:lstStyle/>
+          <a:p>
+            <a:pPr indent="0" marL="0">
+              <a:buNone/>
+            </a:pPr>
+            <a:r>
+              <a:rPr lang="en-US" sz="1100" dirty="0">
+                <a:solidFill>
+                  <a:srgbClr val="8B95A1"/>
+                </a:solidFill>
+                <a:latin typeface="Arial" pitchFamily="34" charset="0"/>
+                <a:ea typeface="Arial" pitchFamily="34" charset="-122"/>
+                <a:cs typeface="Arial" pitchFamily="34" charset="-120"/>
+              </a:rPr>
+              <a:t>76~78 · 심사표 100%</a:t>
+            </a:r>
+            <a:endParaRPr lang="en-US" sz="1100" dirty="0"/>
+          </a:p>
+        </p:txBody>
+      </p:sp>
+      <p:sp>
+        <p:nvSpPr>
+          <p:cNvPr id="22" name="Text 20"/>
+          <p:cNvSpPr/>
+          <p:nvPr/>
+        </p:nvSpPr>
+        <p:spPr>
+          <a:xfrm>
+            <a:off x="6309360" y="4069080"/>
+            <a:ext cx="5056632" cy="685800"/>
+          </a:xfrm>
+          <a:prstGeom prst="rect">
+            <a:avLst/>
+          </a:prstGeom>
+          <a:noFill/>
+          <a:ln/>
+        </p:spPr>
+        <p:txBody>
+          <a:bodyPr wrap="square" lIns="0" tIns="0" rIns="0" bIns="0" rtlCol="0" anchor="t"/>
+          <a:lstStyle/>
+          <a:p>
+            <a:pPr indent="0" marL="0">
+              <a:lnSpc>
+                <a:spcPct val="120000"/>
+              </a:lnSpc>
+              <a:buNone/>
+            </a:pPr>
+            <a:r>
+              <a:rPr lang="en-US" sz="1150" dirty="0">
+                <a:solidFill>
+                  <a:srgbClr val="4E5968"/>
+                </a:solidFill>
+                <a:latin typeface="Arial" pitchFamily="34" charset="0"/>
+                <a:ea typeface="Arial" pitchFamily="34" charset="-122"/>
+                <a:cs typeface="Arial" pitchFamily="34" charset="-120"/>
+              </a:rPr>
+              <a:t>라이징스타에서 놓친 9개 중 6개가 ※주석 속 조건(「증빙 시에만 인정」 등) → 일반 규칙 1줄 추가 후 89~95%</a:t>
+            </a:r>
+            <a:endParaRPr lang="en-US" sz="1150" dirty="0"/>
+          </a:p>
+          <a:p>
+            <a:pPr indent="0" marL="0">
+              <a:lnSpc>
+                <a:spcPct val="120000"/>
+              </a:lnSpc>
+              <a:buNone/>
+            </a:pPr>
+            <a:r>
+              <a:rPr lang="en-US" sz="1150" dirty="0">
+                <a:solidFill>
+                  <a:srgbClr val="4E5968"/>
+                </a:solidFill>
+                <a:latin typeface="Arial" pitchFamily="34" charset="0"/>
+                <a:ea typeface="Arial" pitchFamily="34" charset="-122"/>
+                <a:cs typeface="Arial" pitchFamily="34" charset="-120"/>
+              </a:rPr>
+              <a:t>(검증 공고를 본 뒤의 수정이라 위 블라인드 숫자와 따로 표기)</a:t>
+            </a:r>
+            <a:endParaRPr lang="en-US" sz="1150" dirty="0"/>
+          </a:p>
+        </p:txBody>
+      </p:sp>
+      <p:sp>
+        <p:nvSpPr>
+          <p:cNvPr id="23" name="Shape 21"/>
+          <p:cNvSpPr/>
+          <p:nvPr/>
+        </p:nvSpPr>
+        <p:spPr>
+          <a:xfrm>
+            <a:off x="822960" y="5074920"/>
+            <a:ext cx="10543032" cy="0"/>
+          </a:xfrm>
+          <a:prstGeom prst="line">
+            <a:avLst/>
+          </a:prstGeom>
+          <a:noFill/>
           <a:ln w="12700">
             <a:solidFill>
               <a:srgbClr val="E5E8EB"/>
@@ -11111,30 +12543,30 @@
       </p:sp>
       <p:sp>
         <p:nvSpPr>
-          <p:cNvPr id="6" name="Text 4"/>
-          <p:cNvSpPr/>
-          <p:nvPr/>
-        </p:nvSpPr>
-        <p:spPr>
-          <a:xfrm>
-            <a:off x="1051560" y="3200400"/>
-            <a:ext cx="2874264" cy="320040"/>
-          </a:xfrm>
-          <a:prstGeom prst="rect">
-            <a:avLst/>
-          </a:prstGeom>
-          <a:noFill/>
-          <a:ln/>
-        </p:spPr>
-        <p:txBody>
-          <a:bodyPr wrap="square" lIns="0" tIns="0" rIns="0" bIns="0" rtlCol="0" anchor="t"/>
-          <a:lstStyle/>
-          <a:p>
-            <a:pPr indent="0" marL="0">
-              <a:buNone/>
-            </a:pPr>
-            <a:r>
-              <a:rPr lang="en-US" sz="1400" b="1" dirty="0">
+          <p:cNvPr id="24" name="Text 22"/>
+          <p:cNvSpPr/>
+          <p:nvPr/>
+        </p:nvSpPr>
+        <p:spPr>
+          <a:xfrm>
+            <a:off x="822960" y="5257800"/>
+            <a:ext cx="10543032" cy="320040"/>
+          </a:xfrm>
+          <a:prstGeom prst="rect">
+            <a:avLst/>
+          </a:prstGeom>
+          <a:noFill/>
+          <a:ln/>
+        </p:spPr>
+        <p:txBody>
+          <a:bodyPr wrap="square" lIns="0" tIns="0" rIns="0" bIns="0" rtlCol="0" anchor="t"/>
+          <a:lstStyle/>
+          <a:p>
+            <a:pPr indent="0" marL="0">
+              <a:buNone/>
+            </a:pPr>
+            <a:r>
+              <a:rPr lang="en-US" sz="1300" b="1" dirty="0">
                 <a:solidFill>
                   <a:srgbClr val="191F28"/>
                 </a:solidFill>
@@ -11142,85 +12574,7 @@
                 <a:ea typeface="Arial" pitchFamily="34" charset="-122"/>
                 <a:cs typeface="Arial" pitchFamily="34" charset="-120"/>
               </a:rPr>
-              <a:t>평가위원 1명(단일 LLM)</a:t>
-            </a:r>
-            <a:endParaRPr lang="en-US" sz="1400" dirty="0"/>
-          </a:p>
-        </p:txBody>
-      </p:sp>
-      <p:sp>
-        <p:nvSpPr>
-          <p:cNvPr id="7" name="Text 5"/>
-          <p:cNvSpPr/>
-          <p:nvPr/>
-        </p:nvSpPr>
-        <p:spPr>
-          <a:xfrm>
-            <a:off x="1051560" y="3657600"/>
-            <a:ext cx="2874264" cy="731520"/>
-          </a:xfrm>
-          <a:prstGeom prst="rect">
-            <a:avLst/>
-          </a:prstGeom>
-          <a:noFill/>
-          <a:ln/>
-        </p:spPr>
-        <p:txBody>
-          <a:bodyPr wrap="square" lIns="0" tIns="0" rIns="0" bIns="0" rtlCol="0" anchor="t"/>
-          <a:lstStyle/>
-          <a:p>
-            <a:pPr indent="0" marL="0">
-              <a:buNone/>
-            </a:pPr>
-            <a:r>
-              <a:rPr lang="en-US" sz="4000" b="1" dirty="0">
-                <a:solidFill>
-                  <a:srgbClr val="191F28"/>
-                </a:solidFill>
-                <a:latin typeface="Arial" pitchFamily="34" charset="0"/>
-                <a:ea typeface="Arial" pitchFamily="34" charset="-122"/>
-                <a:cs typeface="Arial" pitchFamily="34" charset="-120"/>
-              </a:rPr>
-              <a:t>오탐 3</a:t>
-            </a:r>
-            <a:endParaRPr lang="en-US" sz="4000" dirty="0"/>
-          </a:p>
-        </p:txBody>
-      </p:sp>
-      <p:sp>
-        <p:nvSpPr>
-          <p:cNvPr id="8" name="Text 6"/>
-          <p:cNvSpPr/>
-          <p:nvPr/>
-        </p:nvSpPr>
-        <p:spPr>
-          <a:xfrm>
-            <a:off x="1051560" y="4526280"/>
-            <a:ext cx="2874264" cy="320040"/>
-          </a:xfrm>
-          <a:prstGeom prst="rect">
-            <a:avLst/>
-          </a:prstGeom>
-          <a:noFill/>
-          <a:ln/>
-        </p:spPr>
-        <p:txBody>
-          <a:bodyPr wrap="square" lIns="0" tIns="0" rIns="0" bIns="0" rtlCol="0" anchor="t"/>
-          <a:lstStyle/>
-          <a:p>
-            <a:pPr indent="0" marL="0">
-              <a:buNone/>
-            </a:pPr>
-            <a:r>
-              <a:rPr lang="en-US" sz="1300" dirty="0">
-                <a:solidFill>
-                  <a:srgbClr val="4E5968"/>
-                </a:solidFill>
-                <a:latin typeface="Arial" pitchFamily="34" charset="0"/>
-                <a:ea typeface="Arial" pitchFamily="34" charset="-122"/>
-                <a:cs typeface="Arial" pitchFamily="34" charset="-120"/>
-              </a:rPr>
-              <a:t>짚은 수 5/5 · 정확도 73%</a:t>
+              <a:t>링크 입력 실측: 실제 공지 주소 13건 중 13건에서 공고문을 골라 읽음(HWP 첨부·스크립트 다운로드·공고문 2개 합치기 포함) · IRIS 상세 페이지는 미실측</a:t>
             </a:r>
             <a:endParaRPr lang="en-US" sz="1300" dirty="0"/>
           </a:p>
@@ -11228,354 +12582,40 @@
       </p:sp>
       <p:sp>
         <p:nvSpPr>
-          <p:cNvPr id="9" name="Shape 7"/>
-          <p:cNvSpPr/>
-          <p:nvPr/>
-        </p:nvSpPr>
-        <p:spPr>
-          <a:xfrm>
-            <a:off x="4428744" y="3063240"/>
-            <a:ext cx="3331464" cy="2148840"/>
-          </a:xfrm>
-          <a:prstGeom prst="roundRect">
-            <a:avLst>
-              <a:gd name="adj" fmla="val 3404"/>
-            </a:avLst>
-          </a:prstGeom>
-          <a:solidFill>
-            <a:srgbClr val="EAF3FF"/>
-          </a:solidFill>
-          <a:ln w="12700">
-            <a:solidFill>
-              <a:srgbClr val="3182F6"/>
-            </a:solidFill>
-            <a:prstDash val="solid"/>
-          </a:ln>
-        </p:spPr>
-      </p:sp>
-      <p:sp>
-        <p:nvSpPr>
-          <p:cNvPr id="10" name="Text 8"/>
-          <p:cNvSpPr/>
-          <p:nvPr/>
-        </p:nvSpPr>
-        <p:spPr>
-          <a:xfrm>
-            <a:off x="4657344" y="3200400"/>
-            <a:ext cx="2874264" cy="320040"/>
-          </a:xfrm>
-          <a:prstGeom prst="rect">
-            <a:avLst/>
-          </a:prstGeom>
-          <a:noFill/>
-          <a:ln/>
-        </p:spPr>
-        <p:txBody>
-          <a:bodyPr wrap="square" lIns="0" tIns="0" rIns="0" bIns="0" rtlCol="0" anchor="t"/>
-          <a:lstStyle/>
-          <a:p>
-            <a:pPr indent="0" marL="0">
-              <a:buNone/>
-            </a:pPr>
-            <a:r>
-              <a:rPr lang="en-US" sz="1400" b="1" dirty="0">
-                <a:solidFill>
-                  <a:srgbClr val="191F28"/>
-                </a:solidFill>
-                <a:latin typeface="Arial" pitchFamily="34" charset="0"/>
-                <a:ea typeface="Arial" pitchFamily="34" charset="-122"/>
-                <a:cs typeface="Arial" pitchFamily="34" charset="-120"/>
-              </a:rPr>
-              <a:t>6역할 · 한 회사 모델</a:t>
-            </a:r>
-            <a:endParaRPr lang="en-US" sz="1400" dirty="0"/>
-          </a:p>
-        </p:txBody>
-      </p:sp>
-      <p:sp>
-        <p:nvSpPr>
-          <p:cNvPr id="11" name="Text 9"/>
-          <p:cNvSpPr/>
-          <p:nvPr/>
-        </p:nvSpPr>
-        <p:spPr>
-          <a:xfrm>
-            <a:off x="4657344" y="3657600"/>
-            <a:ext cx="2874264" cy="731520"/>
-          </a:xfrm>
-          <a:prstGeom prst="rect">
-            <a:avLst/>
-          </a:prstGeom>
-          <a:noFill/>
-          <a:ln/>
-        </p:spPr>
-        <p:txBody>
-          <a:bodyPr wrap="square" lIns="0" tIns="0" rIns="0" bIns="0" rtlCol="0" anchor="t"/>
-          <a:lstStyle/>
-          <a:p>
-            <a:pPr indent="0" marL="0">
-              <a:buNone/>
-            </a:pPr>
-            <a:r>
-              <a:rPr lang="en-US" sz="4000" b="1" dirty="0">
-                <a:solidFill>
-                  <a:srgbClr val="1B64DA"/>
-                </a:solidFill>
-                <a:latin typeface="Arial" pitchFamily="34" charset="0"/>
-                <a:ea typeface="Arial" pitchFamily="34" charset="-122"/>
-                <a:cs typeface="Arial" pitchFamily="34" charset="-120"/>
-              </a:rPr>
-              <a:t>오탐 0</a:t>
-            </a:r>
-            <a:endParaRPr lang="en-US" sz="4000" dirty="0"/>
-          </a:p>
-        </p:txBody>
-      </p:sp>
-      <p:sp>
-        <p:nvSpPr>
-          <p:cNvPr id="12" name="Text 10"/>
-          <p:cNvSpPr/>
-          <p:nvPr/>
-        </p:nvSpPr>
-        <p:spPr>
-          <a:xfrm>
-            <a:off x="4657344" y="4526280"/>
-            <a:ext cx="2874264" cy="320040"/>
-          </a:xfrm>
-          <a:prstGeom prst="rect">
-            <a:avLst/>
-          </a:prstGeom>
-          <a:noFill/>
-          <a:ln/>
-        </p:spPr>
-        <p:txBody>
-          <a:bodyPr wrap="square" lIns="0" tIns="0" rIns="0" bIns="0" rtlCol="0" anchor="t"/>
-          <a:lstStyle/>
-          <a:p>
-            <a:pPr indent="0" marL="0">
-              <a:buNone/>
-            </a:pPr>
-            <a:r>
-              <a:rPr lang="en-US" sz="1300" dirty="0">
-                <a:solidFill>
-                  <a:srgbClr val="4E5968"/>
-                </a:solidFill>
-                <a:latin typeface="Arial" pitchFamily="34" charset="0"/>
-                <a:ea typeface="Arial" pitchFamily="34" charset="-122"/>
-                <a:cs typeface="Arial" pitchFamily="34" charset="-120"/>
-              </a:rPr>
-              <a:t>짚은 수 5/5 · 정확도 100%</a:t>
-            </a:r>
-            <a:endParaRPr lang="en-US" sz="1300" dirty="0"/>
-          </a:p>
-        </p:txBody>
-      </p:sp>
-      <p:sp>
-        <p:nvSpPr>
-          <p:cNvPr id="13" name="Shape 11"/>
-          <p:cNvSpPr/>
-          <p:nvPr/>
-        </p:nvSpPr>
-        <p:spPr>
-          <a:xfrm>
-            <a:off x="8034528" y="3063240"/>
-            <a:ext cx="3331464" cy="2148840"/>
-          </a:xfrm>
-          <a:prstGeom prst="roundRect">
-            <a:avLst>
-              <a:gd name="adj" fmla="val 3404"/>
-            </a:avLst>
-          </a:prstGeom>
-          <a:solidFill>
-            <a:srgbClr val="EAF3FF"/>
-          </a:solidFill>
-          <a:ln w="12700">
-            <a:solidFill>
-              <a:srgbClr val="3182F6"/>
-            </a:solidFill>
-            <a:prstDash val="solid"/>
-          </a:ln>
-        </p:spPr>
-      </p:sp>
-      <p:sp>
-        <p:nvSpPr>
-          <p:cNvPr id="14" name="Text 12"/>
-          <p:cNvSpPr/>
-          <p:nvPr/>
-        </p:nvSpPr>
-        <p:spPr>
-          <a:xfrm>
-            <a:off x="8263128" y="3200400"/>
-            <a:ext cx="2874264" cy="320040"/>
-          </a:xfrm>
-          <a:prstGeom prst="rect">
-            <a:avLst/>
-          </a:prstGeom>
-          <a:noFill/>
-          <a:ln/>
-        </p:spPr>
-        <p:txBody>
-          <a:bodyPr wrap="square" lIns="0" tIns="0" rIns="0" bIns="0" rtlCol="0" anchor="t"/>
-          <a:lstStyle/>
-          <a:p>
-            <a:pPr indent="0" marL="0">
-              <a:buNone/>
-            </a:pPr>
-            <a:r>
-              <a:rPr lang="en-US" sz="1400" b="1" dirty="0">
-                <a:solidFill>
-                  <a:srgbClr val="191F28"/>
-                </a:solidFill>
-                <a:latin typeface="Arial" pitchFamily="34" charset="0"/>
-                <a:ea typeface="Arial" pitchFamily="34" charset="-122"/>
-                <a:cs typeface="Arial" pitchFamily="34" charset="-120"/>
-              </a:rPr>
-              <a:t>6역할 · 3사 모델(현재)</a:t>
-            </a:r>
-            <a:endParaRPr lang="en-US" sz="1400" dirty="0"/>
-          </a:p>
-        </p:txBody>
-      </p:sp>
-      <p:sp>
-        <p:nvSpPr>
-          <p:cNvPr id="15" name="Text 13"/>
-          <p:cNvSpPr/>
-          <p:nvPr/>
-        </p:nvSpPr>
-        <p:spPr>
-          <a:xfrm>
-            <a:off x="8263128" y="3657600"/>
-            <a:ext cx="2874264" cy="731520"/>
-          </a:xfrm>
-          <a:prstGeom prst="rect">
-            <a:avLst/>
-          </a:prstGeom>
-          <a:noFill/>
-          <a:ln/>
-        </p:spPr>
-        <p:txBody>
-          <a:bodyPr wrap="square" lIns="0" tIns="0" rIns="0" bIns="0" rtlCol="0" anchor="t"/>
-          <a:lstStyle/>
-          <a:p>
-            <a:pPr indent="0" marL="0">
-              <a:buNone/>
-            </a:pPr>
-            <a:r>
-              <a:rPr lang="en-US" sz="4000" b="1" dirty="0">
-                <a:solidFill>
-                  <a:srgbClr val="1B64DA"/>
-                </a:solidFill>
-                <a:latin typeface="Arial" pitchFamily="34" charset="0"/>
-                <a:ea typeface="Arial" pitchFamily="34" charset="-122"/>
-                <a:cs typeface="Arial" pitchFamily="34" charset="-120"/>
-              </a:rPr>
-              <a:t>오탐 0</a:t>
-            </a:r>
-            <a:endParaRPr lang="en-US" sz="4000" dirty="0"/>
-          </a:p>
-        </p:txBody>
-      </p:sp>
-      <p:sp>
-        <p:nvSpPr>
-          <p:cNvPr id="16" name="Text 14"/>
-          <p:cNvSpPr/>
-          <p:nvPr/>
-        </p:nvSpPr>
-        <p:spPr>
-          <a:xfrm>
-            <a:off x="8263128" y="4526280"/>
-            <a:ext cx="2874264" cy="320040"/>
-          </a:xfrm>
-          <a:prstGeom prst="rect">
-            <a:avLst/>
-          </a:prstGeom>
-          <a:noFill/>
-          <a:ln/>
-        </p:spPr>
-        <p:txBody>
-          <a:bodyPr wrap="square" lIns="0" tIns="0" rIns="0" bIns="0" rtlCol="0" anchor="t"/>
-          <a:lstStyle/>
-          <a:p>
-            <a:pPr indent="0" marL="0">
-              <a:buNone/>
-            </a:pPr>
-            <a:r>
-              <a:rPr lang="en-US" sz="1300" dirty="0">
-                <a:solidFill>
-                  <a:srgbClr val="4E5968"/>
-                </a:solidFill>
-                <a:latin typeface="Arial" pitchFamily="34" charset="0"/>
-                <a:ea typeface="Arial" pitchFamily="34" charset="-122"/>
-                <a:cs typeface="Arial" pitchFamily="34" charset="-120"/>
-              </a:rPr>
-              <a:t>짚은 수 4/5 · 정확도 100%</a:t>
-            </a:r>
-            <a:endParaRPr lang="en-US" sz="1300" dirty="0"/>
-          </a:p>
-        </p:txBody>
-      </p:sp>
-      <p:sp>
-        <p:nvSpPr>
-          <p:cNvPr id="17" name="Shape 15"/>
-          <p:cNvSpPr/>
-          <p:nvPr/>
-        </p:nvSpPr>
-        <p:spPr>
-          <a:xfrm>
-            <a:off x="822960" y="5486400"/>
-            <a:ext cx="10543032" cy="0"/>
-          </a:xfrm>
-          <a:prstGeom prst="line">
-            <a:avLst/>
-          </a:prstGeom>
-          <a:noFill/>
-          <a:ln w="12700">
-            <a:solidFill>
-              <a:srgbClr val="E5E8EB"/>
-            </a:solidFill>
-            <a:prstDash val="solid"/>
-          </a:ln>
-        </p:spPr>
-      </p:sp>
-      <p:sp>
-        <p:nvSpPr>
-          <p:cNvPr id="18" name="Text 16"/>
-          <p:cNvSpPr/>
-          <p:nvPr/>
-        </p:nvSpPr>
-        <p:spPr>
-          <a:xfrm>
-            <a:off x="822960" y="5623560"/>
-            <a:ext cx="10543032" cy="640080"/>
-          </a:xfrm>
-          <a:prstGeom prst="rect">
-            <a:avLst/>
-          </a:prstGeom>
-          <a:noFill/>
-          <a:ln/>
-        </p:spPr>
-        <p:txBody>
-          <a:bodyPr wrap="square" lIns="0" tIns="0" rIns="0" bIns="0" rtlCol="0" anchor="t"/>
-          <a:lstStyle/>
-          <a:p>
-            <a:pPr indent="0" marL="0">
-              <a:lnSpc>
-                <a:spcPct val="120000"/>
-              </a:lnSpc>
-              <a:buNone/>
-            </a:pPr>
-            <a:r>
-              <a:rPr lang="en-US" sz="1400" b="1" dirty="0">
-                <a:solidFill>
-                  <a:srgbClr val="191F28"/>
-                </a:solidFill>
-                <a:latin typeface="Arial" pitchFamily="34" charset="0"/>
-                <a:ea typeface="Arial" pitchFamily="34" charset="-122"/>
-                <a:cs typeface="Arial" pitchFamily="34" charset="-120"/>
-              </a:rPr>
-              <a:t>역할 6개가 오탐을 없앴습니다. 세 회사 모델을 섞는 효과는 이 표본(5개·각 1회)에서 확인되지 않았고 — 섞는 이유는 한도·장애에도 멈추지 않는 가용성과 국산 모델 선택지입니다.</a:t>
-            </a:r>
-            <a:endParaRPr lang="en-US" sz="1400" dirty="0"/>
+          <p:cNvPr id="25" name="Text 23"/>
+          <p:cNvSpPr/>
+          <p:nvPr/>
+        </p:nvSpPr>
+        <p:spPr>
+          <a:xfrm>
+            <a:off x="822960" y="6355080"/>
+            <a:ext cx="10543032" cy="274320"/>
+          </a:xfrm>
+          <a:prstGeom prst="rect">
+            <a:avLst/>
+          </a:prstGeom>
+          <a:noFill/>
+          <a:ln/>
+        </p:spPr>
+        <p:txBody>
+          <a:bodyPr wrap="square" lIns="0" tIns="0" rIns="0" bIns="0" rtlCol="0" anchor="t"/>
+          <a:lstStyle/>
+          <a:p>
+            <a:pPr indent="0" marL="0">
+              <a:buNone/>
+            </a:pPr>
+            <a:r>
+              <a:rPr lang="en-US" sz="1000" dirty="0">
+                <a:solidFill>
+                  <a:srgbClr val="8B95A1"/>
+                </a:solidFill>
+                <a:latin typeface="Arial" pitchFamily="34" charset="0"/>
+                <a:ea typeface="Arial" pitchFamily="34" charset="-122"/>
+                <a:cs typeface="Arial" pitchFamily="34" charset="-120"/>
+              </a:rPr>
+              <a:t>정답표: 파이프라인(OpenAI)과 다른 회사 모델(Claude)이 원문을 읽어 작성 · 검증 정답표 커밋 430ea7d(21:37) 뒤에 측정 · 정밀도(추출 중 정답 비율) 45~84%는 다음 개선 대상</a:t>
+            </a:r>
+            <a:endParaRPr lang="en-US" sz="1000" dirty="0"/>
           </a:p>
         </p:txBody>
       </p:sp>

--- a/deliver/deck/RFP-to-Fit_루미아.pptx
+++ b/deliver/deck/RFP-to-Fit_루미아.pptx
@@ -602,7 +602,7 @@
           <a:p>
             <a:r>
               <a:rPr lang="en-US" dirty="0"/>
-              <a:t>[20초] 평가위원이 정말 여러 명 필요한지 직접 쟀습니다. 근거를 일부러 지운 초안 5개에서 한 명짜리는 지운 곳을 다 짚었지만 안 지운 곳도 3곳 잘못 짚었습니다. 역할을 여섯으로 나누자 오탐이 0이 됐습니다. 세 회사 모델을 섞는 효과는 이 표본에선 확인되지 않았고, 그렇게 말씀드립니다. 섞는 이유는 가용성입니다.</a:t>
+              <a:t>[20초] 예선 때 약속한 것을 그대로 대조했습니다. 링크 입력, 구조화, 독립 채점, 보완 지정은 했습니다. 특허·과제 탐색은 논문만 했고, RAG는 원문 인용 대조로 바꿨고, 재현율 90%는 공고에 따라 못 미친 곳이 있습니다. 못 한 것도 지우지 않았습니다.</a:t>
             </a:r>
             <a:endParaRPr lang="en-US" dirty="0"/>
           </a:p>
@@ -1570,7 +1570,7 @@
           <a:p>
             <a:r>
               <a:rPr lang="en-US" dirty="0"/>
-              <a:t>[25초] 예시 공고에만 맞춘 게 아닌지 의심하실 수 있어서, 개발에 한 번도 안 쓴 과기정통부 공고 두 건을 링크로 새로 가져와 쟀습니다. 정답표는 측정 전에 먼저 커밋해 고정했습니다. 국가과학자 공모는 평균 94%, 라이징스타는 78%였고, 심사표 배점은 둘 다 100% 맞혔습니다. 라이징스타에서 놓친 건 대부분 주석 속 조건이어서 규칙 한 줄을 넣었고, 이건 블라인드 숫자와 따로 표기했습니다.</a:t>
+              <a:t>[30초] 잴 수 있는 것만 숫자로 말씀드립니다. 예시 공고에만 맞춘 게 아닌지 보려고, 개발에 안 쓴 과기정통부 공고 두 건을 링크로 가져와 정답표를 먼저 고정하고 쟀습니다. 94%와 77%, 심사표 배점은 다섯 건 모두 맞혔습니다. 그리고 관점을 여러 개로 나눌 필요가 있는지 제거 실험을 했습니다. 관점 하나는 안 지운 곳을 3곳 잘못 짚었고, 여섯으로 나누자 0이었습니다. 회사 모델을 섞는 효과는 확인되지 않았다고 그대로 말씀드립니다.</a:t>
             </a:r>
             <a:endParaRPr lang="en-US" dirty="0"/>
           </a:p>
@@ -2221,7 +2221,7 @@
                 <a:ea typeface="Arial" pitchFamily="34" charset="-122"/>
                 <a:cs typeface="Arial" pitchFamily="34" charset="-120"/>
               </a:rPr>
-              <a:t>제거 실험 — 관점을 여러 개로 나눌 필요가 있나</a:t>
+              <a:t>예선 약속 → 본선 구현 — 포스터와 현실의 거리</a:t>
             </a:r>
             <a:endParaRPr lang="en-US" sz="1400" dirty="0"/>
           </a:p>
@@ -2263,7 +2263,7 @@
                 <a:ea typeface="Arial" pitchFamily="34" charset="-122"/>
                 <a:cs typeface="Arial" pitchFamily="34" charset="-120"/>
               </a:rPr>
-              <a:t>관점 하나로는 엉뚱한 곳도 짚고,</a:t>
+              <a:t>예선 때 약속한 것을,</a:t>
             </a:r>
             <a:endParaRPr lang="en-US" sz="3400" dirty="0"/>
           </a:p>
@@ -2283,7 +2283,7 @@
                 <a:ea typeface="Arial" pitchFamily="34" charset="-122"/>
                 <a:cs typeface="Arial" pitchFamily="34" charset="-120"/>
               </a:rPr>
-              <a:t>역할을 나누면</a:t>
+              <a:t>그대로</a:t>
             </a:r>
             <a:pPr indent="0" marL="0">
               <a:lnSpc>
@@ -2300,7 +2300,7 @@
                 <a:ea typeface="Arial" pitchFamily="34" charset="-122"/>
                 <a:cs typeface="Arial" pitchFamily="34" charset="-120"/>
               </a:rPr>
-              <a:t> 오탐이 사라졌습니다</a:t>
+              <a:t> 대조했습니다</a:t>
             </a:r>
             <a:endParaRPr lang="en-US" sz="3400" dirty="0"/>
           </a:p>
@@ -2315,23 +2315,101 @@
         <p:spPr>
           <a:xfrm>
             <a:off x="822960" y="2606040"/>
-            <a:ext cx="10543032" cy="292608"/>
-          </a:xfrm>
-          <a:prstGeom prst="rect">
-            <a:avLst/>
-          </a:prstGeom>
-          <a:noFill/>
-          <a:ln/>
-        </p:spPr>
-        <p:txBody>
-          <a:bodyPr wrap="square" lIns="0" tIns="0" rIns="0" bIns="0" rtlCol="0" anchor="t"/>
-          <a:lstStyle/>
-          <a:p>
-            <a:pPr indent="0" marL="0">
-              <a:buNone/>
-            </a:pPr>
-            <a:r>
-              <a:rPr lang="en-US" sz="1300" b="1" dirty="0">
+            <a:ext cx="5669280" cy="310896"/>
+          </a:xfrm>
+          <a:prstGeom prst="rect">
+            <a:avLst/>
+          </a:prstGeom>
+          <a:noFill/>
+          <a:ln/>
+        </p:spPr>
+        <p:txBody>
+          <a:bodyPr wrap="square" lIns="0" tIns="0" rIns="0" bIns="0" rtlCol="0" anchor="t"/>
+          <a:lstStyle/>
+          <a:p>
+            <a:pPr indent="0" marL="0">
+              <a:buNone/>
+            </a:pPr>
+            <a:r>
+              <a:rPr lang="en-US" sz="1350" b="1" dirty="0">
+                <a:solidFill>
+                  <a:srgbClr val="191F28"/>
+                </a:solidFill>
+                <a:latin typeface="Arial" pitchFamily="34" charset="0"/>
+                <a:ea typeface="Arial" pitchFamily="34" charset="-122"/>
+                <a:cs typeface="Arial" pitchFamily="34" charset="-120"/>
+              </a:rPr>
+              <a:t>공고 URL·PDF·HWPX 입력</a:t>
+            </a:r>
+            <a:endParaRPr lang="en-US" sz="1350" dirty="0"/>
+          </a:p>
+        </p:txBody>
+      </p:sp>
+      <p:sp>
+        <p:nvSpPr>
+          <p:cNvPr id="5" name="Text 3"/>
+          <p:cNvSpPr/>
+          <p:nvPr/>
+        </p:nvSpPr>
+        <p:spPr>
+          <a:xfrm>
+            <a:off x="6583680" y="2606040"/>
+            <a:ext cx="457200" cy="310896"/>
+          </a:xfrm>
+          <a:prstGeom prst="rect">
+            <a:avLst/>
+          </a:prstGeom>
+          <a:noFill/>
+          <a:ln/>
+        </p:spPr>
+        <p:txBody>
+          <a:bodyPr wrap="square" lIns="0" tIns="0" rIns="0" bIns="0" rtlCol="0" anchor="t"/>
+          <a:lstStyle/>
+          <a:p>
+            <a:pPr algn="ctr" indent="0" marL="0">
+              <a:buNone/>
+            </a:pPr>
+            <a:r>
+              <a:rPr lang="en-US" sz="1600" b="1" dirty="0">
+                <a:solidFill>
+                  <a:srgbClr val="1B64DA"/>
+                </a:solidFill>
+                <a:latin typeface="Arial" pitchFamily="34" charset="0"/>
+                <a:ea typeface="Arial" pitchFamily="34" charset="-122"/>
+                <a:cs typeface="Arial" pitchFamily="34" charset="-120"/>
+              </a:rPr>
+              <a:t>✓</a:t>
+            </a:r>
+            <a:endParaRPr lang="en-US" sz="1600" dirty="0"/>
+          </a:p>
+        </p:txBody>
+      </p:sp>
+      <p:sp>
+        <p:nvSpPr>
+          <p:cNvPr id="6" name="Text 4"/>
+          <p:cNvSpPr/>
+          <p:nvPr/>
+        </p:nvSpPr>
+        <p:spPr>
+          <a:xfrm>
+            <a:off x="7223760" y="2624328"/>
+            <a:ext cx="4142232" cy="292608"/>
+          </a:xfrm>
+          <a:prstGeom prst="rect">
+            <a:avLst/>
+          </a:prstGeom>
+          <a:noFill/>
+          <a:ln/>
+        </p:spPr>
+        <p:txBody>
+          <a:bodyPr wrap="square" lIns="0" tIns="0" rIns="0" bIns="0" rtlCol="0" anchor="t"/>
+          <a:lstStyle/>
+          <a:p>
+            <a:pPr indent="0" marL="0">
+              <a:buNone/>
+            </a:pPr>
+            <a:r>
+              <a:rPr lang="en-US" sz="1200" dirty="0">
                 <a:solidFill>
                   <a:srgbClr val="4E5968"/>
                 </a:solidFill>
@@ -2339,31 +2417,27 @@
                 <a:ea typeface="Arial" pitchFamily="34" charset="-122"/>
                 <a:cs typeface="Arial" pitchFamily="34" charset="-120"/>
               </a:rPr>
-              <a:t>근거 블록을 일부러 하나씩 지운 초안 5개(예선 심사표) — 지운 곳을 짚었나, 안 지운 곳을 잘못 짚었나</a:t>
-            </a:r>
-            <a:endParaRPr lang="en-US" sz="1300" dirty="0"/>
-          </a:p>
-        </p:txBody>
-      </p:sp>
-      <p:sp>
-        <p:nvSpPr>
-          <p:cNvPr id="5" name="Shape 3"/>
-          <p:cNvSpPr/>
-          <p:nvPr/>
-        </p:nvSpPr>
-        <p:spPr>
-          <a:xfrm>
-            <a:off x="822960" y="3063240"/>
-            <a:ext cx="3331464" cy="2148840"/>
-          </a:xfrm>
-          <a:prstGeom prst="roundRect">
-            <a:avLst>
-              <a:gd name="adj" fmla="val 3404"/>
-            </a:avLst>
-          </a:prstGeom>
-          <a:solidFill>
-            <a:srgbClr val="FFFFFF"/>
-          </a:solidFill>
+              <a:t>+HWP, 실제 공지 13/13</a:t>
+            </a:r>
+            <a:endParaRPr lang="en-US" sz="1200" dirty="0"/>
+          </a:p>
+        </p:txBody>
+      </p:sp>
+      <p:sp>
+        <p:nvSpPr>
+          <p:cNvPr id="7" name="Shape 5"/>
+          <p:cNvSpPr/>
+          <p:nvPr/>
+        </p:nvSpPr>
+        <p:spPr>
+          <a:xfrm>
+            <a:off x="822960" y="2962656"/>
+            <a:ext cx="10543032" cy="0"/>
+          </a:xfrm>
+          <a:prstGeom prst="line">
+            <a:avLst/>
+          </a:prstGeom>
+          <a:noFill/>
           <a:ln w="12700">
             <a:solidFill>
               <a:srgbClr val="E5E8EB"/>
@@ -2374,30 +2448,30 @@
       </p:sp>
       <p:sp>
         <p:nvSpPr>
-          <p:cNvPr id="6" name="Text 4"/>
-          <p:cNvSpPr/>
-          <p:nvPr/>
-        </p:nvSpPr>
-        <p:spPr>
-          <a:xfrm>
-            <a:off x="1051560" y="3200400"/>
-            <a:ext cx="2874264" cy="320040"/>
-          </a:xfrm>
-          <a:prstGeom prst="rect">
-            <a:avLst/>
-          </a:prstGeom>
-          <a:noFill/>
-          <a:ln/>
-        </p:spPr>
-        <p:txBody>
-          <a:bodyPr wrap="square" lIns="0" tIns="0" rIns="0" bIns="0" rtlCol="0" anchor="t"/>
-          <a:lstStyle/>
-          <a:p>
-            <a:pPr indent="0" marL="0">
-              <a:buNone/>
-            </a:pPr>
-            <a:r>
-              <a:rPr lang="en-US" sz="1400" b="1" dirty="0">
+          <p:cNvPr id="8" name="Text 6"/>
+          <p:cNvSpPr/>
+          <p:nvPr/>
+        </p:nvSpPr>
+        <p:spPr>
+          <a:xfrm>
+            <a:off x="822960" y="2999232"/>
+            <a:ext cx="5669280" cy="310896"/>
+          </a:xfrm>
+          <a:prstGeom prst="rect">
+            <a:avLst/>
+          </a:prstGeom>
+          <a:noFill/>
+          <a:ln/>
+        </p:spPr>
+        <p:txBody>
+          <a:bodyPr wrap="square" lIns="0" tIns="0" rIns="0" bIns="0" rtlCol="0" anchor="t"/>
+          <a:lstStyle/>
+          <a:p>
+            <a:pPr indent="0" marL="0">
+              <a:buNone/>
+            </a:pPr>
+            <a:r>
+              <a:rPr lang="en-US" sz="1350" b="1" dirty="0">
                 <a:solidFill>
                   <a:srgbClr val="191F28"/>
                 </a:solidFill>
@@ -2405,77 +2479,77 @@
                 <a:ea typeface="Arial" pitchFamily="34" charset="-122"/>
                 <a:cs typeface="Arial" pitchFamily="34" charset="-120"/>
               </a:rPr>
-              <a:t>관점 1개(단일 LLM)</a:t>
-            </a:r>
-            <a:endParaRPr lang="en-US" sz="1400" dirty="0"/>
-          </a:p>
-        </p:txBody>
-      </p:sp>
-      <p:sp>
-        <p:nvSpPr>
-          <p:cNvPr id="7" name="Text 5"/>
-          <p:cNvSpPr/>
-          <p:nvPr/>
-        </p:nvSpPr>
-        <p:spPr>
-          <a:xfrm>
-            <a:off x="1051560" y="3657600"/>
-            <a:ext cx="2874264" cy="731520"/>
-          </a:xfrm>
-          <a:prstGeom prst="rect">
-            <a:avLst/>
-          </a:prstGeom>
-          <a:noFill/>
-          <a:ln/>
-        </p:spPr>
-        <p:txBody>
-          <a:bodyPr wrap="square" lIns="0" tIns="0" rIns="0" bIns="0" rtlCol="0" anchor="t"/>
-          <a:lstStyle/>
-          <a:p>
-            <a:pPr indent="0" marL="0">
-              <a:buNone/>
-            </a:pPr>
-            <a:r>
-              <a:rPr lang="en-US" sz="4000" b="1" dirty="0">
-                <a:solidFill>
-                  <a:srgbClr val="191F28"/>
-                </a:solidFill>
-                <a:latin typeface="Arial" pitchFamily="34" charset="0"/>
-                <a:ea typeface="Arial" pitchFamily="34" charset="-122"/>
-                <a:cs typeface="Arial" pitchFamily="34" charset="-120"/>
-              </a:rPr>
-              <a:t>오탐 3</a:t>
-            </a:r>
-            <a:endParaRPr lang="en-US" sz="4000" dirty="0"/>
-          </a:p>
-        </p:txBody>
-      </p:sp>
-      <p:sp>
-        <p:nvSpPr>
-          <p:cNvPr id="8" name="Text 6"/>
-          <p:cNvSpPr/>
-          <p:nvPr/>
-        </p:nvSpPr>
-        <p:spPr>
-          <a:xfrm>
-            <a:off x="1051560" y="4526280"/>
-            <a:ext cx="2874264" cy="320040"/>
-          </a:xfrm>
-          <a:prstGeom prst="rect">
-            <a:avLst/>
-          </a:prstGeom>
-          <a:noFill/>
-          <a:ln/>
-        </p:spPr>
-        <p:txBody>
-          <a:bodyPr wrap="square" lIns="0" tIns="0" rIns="0" bIns="0" rtlCol="0" anchor="t"/>
-          <a:lstStyle/>
-          <a:p>
-            <a:pPr indent="0" marL="0">
-              <a:buNone/>
-            </a:pPr>
-            <a:r>
-              <a:rPr lang="en-US" sz="1300" dirty="0">
+              <a:t>요건·평가지표 구조화(출처 쪽)</a:t>
+            </a:r>
+            <a:endParaRPr lang="en-US" sz="1350" dirty="0"/>
+          </a:p>
+        </p:txBody>
+      </p:sp>
+      <p:sp>
+        <p:nvSpPr>
+          <p:cNvPr id="9" name="Text 7"/>
+          <p:cNvSpPr/>
+          <p:nvPr/>
+        </p:nvSpPr>
+        <p:spPr>
+          <a:xfrm>
+            <a:off x="6583680" y="2999232"/>
+            <a:ext cx="457200" cy="310896"/>
+          </a:xfrm>
+          <a:prstGeom prst="rect">
+            <a:avLst/>
+          </a:prstGeom>
+          <a:noFill/>
+          <a:ln/>
+        </p:spPr>
+        <p:txBody>
+          <a:bodyPr wrap="square" lIns="0" tIns="0" rIns="0" bIns="0" rtlCol="0" anchor="t"/>
+          <a:lstStyle/>
+          <a:p>
+            <a:pPr algn="ctr" indent="0" marL="0">
+              <a:buNone/>
+            </a:pPr>
+            <a:r>
+              <a:rPr lang="en-US" sz="1600" b="1" dirty="0">
+                <a:solidFill>
+                  <a:srgbClr val="1B64DA"/>
+                </a:solidFill>
+                <a:latin typeface="Arial" pitchFamily="34" charset="0"/>
+                <a:ea typeface="Arial" pitchFamily="34" charset="-122"/>
+                <a:cs typeface="Arial" pitchFamily="34" charset="-120"/>
+              </a:rPr>
+              <a:t>✓</a:t>
+            </a:r>
+            <a:endParaRPr lang="en-US" sz="1600" dirty="0"/>
+          </a:p>
+        </p:txBody>
+      </p:sp>
+      <p:sp>
+        <p:nvSpPr>
+          <p:cNvPr id="10" name="Text 8"/>
+          <p:cNvSpPr/>
+          <p:nvPr/>
+        </p:nvSpPr>
+        <p:spPr>
+          <a:xfrm>
+            <a:off x="7223760" y="3017520"/>
+            <a:ext cx="4142232" cy="292608"/>
+          </a:xfrm>
+          <a:prstGeom prst="rect">
+            <a:avLst/>
+          </a:prstGeom>
+          <a:noFill/>
+          <a:ln/>
+        </p:spPr>
+        <p:txBody>
+          <a:bodyPr wrap="square" lIns="0" tIns="0" rIns="0" bIns="0" rtlCol="0" anchor="t"/>
+          <a:lstStyle/>
+          <a:p>
+            <a:pPr indent="0" marL="0">
+              <a:buNone/>
+            </a:pPr>
+            <a:r>
+              <a:rPr lang="en-US" sz="1200" dirty="0">
                 <a:solidFill>
                   <a:srgbClr val="4E5968"/>
                 </a:solidFill>
@@ -2483,309 +2557,21 @@
                 <a:ea typeface="Arial" pitchFamily="34" charset="-122"/>
                 <a:cs typeface="Arial" pitchFamily="34" charset="-120"/>
               </a:rPr>
-              <a:t>짚은 수 5/5 · 정확도 73%</a:t>
-            </a:r>
-            <a:endParaRPr lang="en-US" sz="1300" dirty="0"/>
-          </a:p>
-        </p:txBody>
-      </p:sp>
-      <p:sp>
-        <p:nvSpPr>
-          <p:cNvPr id="9" name="Shape 7"/>
-          <p:cNvSpPr/>
-          <p:nvPr/>
-        </p:nvSpPr>
-        <p:spPr>
-          <a:xfrm>
-            <a:off x="4428744" y="3063240"/>
-            <a:ext cx="3331464" cy="2148840"/>
-          </a:xfrm>
-          <a:prstGeom prst="roundRect">
-            <a:avLst>
-              <a:gd name="adj" fmla="val 3404"/>
-            </a:avLst>
-          </a:prstGeom>
-          <a:solidFill>
-            <a:srgbClr val="EAF3FF"/>
-          </a:solidFill>
-          <a:ln w="12700">
-            <a:solidFill>
-              <a:srgbClr val="3182F6"/>
-            </a:solidFill>
-            <a:prstDash val="solid"/>
-          </a:ln>
-        </p:spPr>
-      </p:sp>
-      <p:sp>
-        <p:nvSpPr>
-          <p:cNvPr id="10" name="Text 8"/>
-          <p:cNvSpPr/>
-          <p:nvPr/>
-        </p:nvSpPr>
-        <p:spPr>
-          <a:xfrm>
-            <a:off x="4657344" y="3200400"/>
-            <a:ext cx="2874264" cy="320040"/>
-          </a:xfrm>
-          <a:prstGeom prst="rect">
-            <a:avLst/>
-          </a:prstGeom>
-          <a:noFill/>
-          <a:ln/>
-        </p:spPr>
-        <p:txBody>
-          <a:bodyPr wrap="square" lIns="0" tIns="0" rIns="0" bIns="0" rtlCol="0" anchor="t"/>
-          <a:lstStyle/>
-          <a:p>
-            <a:pPr indent="0" marL="0">
-              <a:buNone/>
-            </a:pPr>
-            <a:r>
-              <a:rPr lang="en-US" sz="1400" b="1" dirty="0">
-                <a:solidFill>
-                  <a:srgbClr val="191F28"/>
-                </a:solidFill>
-                <a:latin typeface="Arial" pitchFamily="34" charset="0"/>
-                <a:ea typeface="Arial" pitchFamily="34" charset="-122"/>
-                <a:cs typeface="Arial" pitchFamily="34" charset="-120"/>
-              </a:rPr>
-              <a:t>6역할 · 한 회사 모델</a:t>
-            </a:r>
-            <a:endParaRPr lang="en-US" sz="1400" dirty="0"/>
-          </a:p>
-        </p:txBody>
-      </p:sp>
-      <p:sp>
-        <p:nvSpPr>
-          <p:cNvPr id="11" name="Text 9"/>
-          <p:cNvSpPr/>
-          <p:nvPr/>
-        </p:nvSpPr>
-        <p:spPr>
-          <a:xfrm>
-            <a:off x="4657344" y="3657600"/>
-            <a:ext cx="2874264" cy="731520"/>
-          </a:xfrm>
-          <a:prstGeom prst="rect">
-            <a:avLst/>
-          </a:prstGeom>
-          <a:noFill/>
-          <a:ln/>
-        </p:spPr>
-        <p:txBody>
-          <a:bodyPr wrap="square" lIns="0" tIns="0" rIns="0" bIns="0" rtlCol="0" anchor="t"/>
-          <a:lstStyle/>
-          <a:p>
-            <a:pPr indent="0" marL="0">
-              <a:buNone/>
-            </a:pPr>
-            <a:r>
-              <a:rPr lang="en-US" sz="4000" b="1" dirty="0">
-                <a:solidFill>
-                  <a:srgbClr val="1B64DA"/>
-                </a:solidFill>
-                <a:latin typeface="Arial" pitchFamily="34" charset="0"/>
-                <a:ea typeface="Arial" pitchFamily="34" charset="-122"/>
-                <a:cs typeface="Arial" pitchFamily="34" charset="-120"/>
-              </a:rPr>
-              <a:t>오탐 0</a:t>
-            </a:r>
-            <a:endParaRPr lang="en-US" sz="4000" dirty="0"/>
-          </a:p>
-        </p:txBody>
-      </p:sp>
-      <p:sp>
-        <p:nvSpPr>
-          <p:cNvPr id="12" name="Text 10"/>
-          <p:cNvSpPr/>
-          <p:nvPr/>
-        </p:nvSpPr>
-        <p:spPr>
-          <a:xfrm>
-            <a:off x="4657344" y="4526280"/>
-            <a:ext cx="2874264" cy="320040"/>
-          </a:xfrm>
-          <a:prstGeom prst="rect">
-            <a:avLst/>
-          </a:prstGeom>
-          <a:noFill/>
-          <a:ln/>
-        </p:spPr>
-        <p:txBody>
-          <a:bodyPr wrap="square" lIns="0" tIns="0" rIns="0" bIns="0" rtlCol="0" anchor="t"/>
-          <a:lstStyle/>
-          <a:p>
-            <a:pPr indent="0" marL="0">
-              <a:buNone/>
-            </a:pPr>
-            <a:r>
-              <a:rPr lang="en-US" sz="1300" dirty="0">
-                <a:solidFill>
-                  <a:srgbClr val="4E5968"/>
-                </a:solidFill>
-                <a:latin typeface="Arial" pitchFamily="34" charset="0"/>
-                <a:ea typeface="Arial" pitchFamily="34" charset="-122"/>
-                <a:cs typeface="Arial" pitchFamily="34" charset="-120"/>
-              </a:rPr>
-              <a:t>짚은 수 5/5 · 정확도 100%</a:t>
-            </a:r>
-            <a:endParaRPr lang="en-US" sz="1300" dirty="0"/>
-          </a:p>
-        </p:txBody>
-      </p:sp>
-      <p:sp>
-        <p:nvSpPr>
-          <p:cNvPr id="13" name="Shape 11"/>
-          <p:cNvSpPr/>
-          <p:nvPr/>
-        </p:nvSpPr>
-        <p:spPr>
-          <a:xfrm>
-            <a:off x="8034528" y="3063240"/>
-            <a:ext cx="3331464" cy="2148840"/>
-          </a:xfrm>
-          <a:prstGeom prst="roundRect">
-            <a:avLst>
-              <a:gd name="adj" fmla="val 3404"/>
-            </a:avLst>
-          </a:prstGeom>
-          <a:solidFill>
-            <a:srgbClr val="EAF3FF"/>
-          </a:solidFill>
-          <a:ln w="12700">
-            <a:solidFill>
-              <a:srgbClr val="3182F6"/>
-            </a:solidFill>
-            <a:prstDash val="solid"/>
-          </a:ln>
-        </p:spPr>
-      </p:sp>
-      <p:sp>
-        <p:nvSpPr>
-          <p:cNvPr id="14" name="Text 12"/>
-          <p:cNvSpPr/>
-          <p:nvPr/>
-        </p:nvSpPr>
-        <p:spPr>
-          <a:xfrm>
-            <a:off x="8263128" y="3200400"/>
-            <a:ext cx="2874264" cy="320040"/>
-          </a:xfrm>
-          <a:prstGeom prst="rect">
-            <a:avLst/>
-          </a:prstGeom>
-          <a:noFill/>
-          <a:ln/>
-        </p:spPr>
-        <p:txBody>
-          <a:bodyPr wrap="square" lIns="0" tIns="0" rIns="0" bIns="0" rtlCol="0" anchor="t"/>
-          <a:lstStyle/>
-          <a:p>
-            <a:pPr indent="0" marL="0">
-              <a:buNone/>
-            </a:pPr>
-            <a:r>
-              <a:rPr lang="en-US" sz="1400" b="1" dirty="0">
-                <a:solidFill>
-                  <a:srgbClr val="191F28"/>
-                </a:solidFill>
-                <a:latin typeface="Arial" pitchFamily="34" charset="0"/>
-                <a:ea typeface="Arial" pitchFamily="34" charset="-122"/>
-                <a:cs typeface="Arial" pitchFamily="34" charset="-120"/>
-              </a:rPr>
-              <a:t>6역할 · 3사 모델(현재)</a:t>
-            </a:r>
-            <a:endParaRPr lang="en-US" sz="1400" dirty="0"/>
-          </a:p>
-        </p:txBody>
-      </p:sp>
-      <p:sp>
-        <p:nvSpPr>
-          <p:cNvPr id="15" name="Text 13"/>
-          <p:cNvSpPr/>
-          <p:nvPr/>
-        </p:nvSpPr>
-        <p:spPr>
-          <a:xfrm>
-            <a:off x="8263128" y="3657600"/>
-            <a:ext cx="2874264" cy="731520"/>
-          </a:xfrm>
-          <a:prstGeom prst="rect">
-            <a:avLst/>
-          </a:prstGeom>
-          <a:noFill/>
-          <a:ln/>
-        </p:spPr>
-        <p:txBody>
-          <a:bodyPr wrap="square" lIns="0" tIns="0" rIns="0" bIns="0" rtlCol="0" anchor="t"/>
-          <a:lstStyle/>
-          <a:p>
-            <a:pPr indent="0" marL="0">
-              <a:buNone/>
-            </a:pPr>
-            <a:r>
-              <a:rPr lang="en-US" sz="4000" b="1" dirty="0">
-                <a:solidFill>
-                  <a:srgbClr val="1B64DA"/>
-                </a:solidFill>
-                <a:latin typeface="Arial" pitchFamily="34" charset="0"/>
-                <a:ea typeface="Arial" pitchFamily="34" charset="-122"/>
-                <a:cs typeface="Arial" pitchFamily="34" charset="-120"/>
-              </a:rPr>
-              <a:t>오탐 0</a:t>
-            </a:r>
-            <a:endParaRPr lang="en-US" sz="4000" dirty="0"/>
-          </a:p>
-        </p:txBody>
-      </p:sp>
-      <p:sp>
-        <p:nvSpPr>
-          <p:cNvPr id="16" name="Text 14"/>
-          <p:cNvSpPr/>
-          <p:nvPr/>
-        </p:nvSpPr>
-        <p:spPr>
-          <a:xfrm>
-            <a:off x="8263128" y="4526280"/>
-            <a:ext cx="2874264" cy="320040"/>
-          </a:xfrm>
-          <a:prstGeom prst="rect">
-            <a:avLst/>
-          </a:prstGeom>
-          <a:noFill/>
-          <a:ln/>
-        </p:spPr>
-        <p:txBody>
-          <a:bodyPr wrap="square" lIns="0" tIns="0" rIns="0" bIns="0" rtlCol="0" anchor="t"/>
-          <a:lstStyle/>
-          <a:p>
-            <a:pPr indent="0" marL="0">
-              <a:buNone/>
-            </a:pPr>
-            <a:r>
-              <a:rPr lang="en-US" sz="1300" dirty="0">
-                <a:solidFill>
-                  <a:srgbClr val="4E5968"/>
-                </a:solidFill>
-                <a:latin typeface="Arial" pitchFamily="34" charset="0"/>
-                <a:ea typeface="Arial" pitchFamily="34" charset="-122"/>
-                <a:cs typeface="Arial" pitchFamily="34" charset="-120"/>
-              </a:rPr>
-              <a:t>짚은 수 4/5 · 정확도 100%</a:t>
-            </a:r>
-            <a:endParaRPr lang="en-US" sz="1300" dirty="0"/>
-          </a:p>
-        </p:txBody>
-      </p:sp>
-      <p:sp>
-        <p:nvSpPr>
-          <p:cNvPr id="17" name="Shape 15"/>
-          <p:cNvSpPr/>
-          <p:nvPr/>
-        </p:nvSpPr>
-        <p:spPr>
-          <a:xfrm>
-            <a:off x="822960" y="5486400"/>
+              <a:t>모든 항목에 쪽·원문 인용</a:t>
+            </a:r>
+            <a:endParaRPr lang="en-US" sz="1200" dirty="0"/>
+          </a:p>
+        </p:txBody>
+      </p:sp>
+      <p:sp>
+        <p:nvSpPr>
+          <p:cNvPr id="11" name="Shape 9"/>
+          <p:cNvSpPr/>
+          <p:nvPr/>
+        </p:nvSpPr>
+        <p:spPr>
+          <a:xfrm>
+            <a:off x="822960" y="3355848"/>
             <a:ext cx="10543032" cy="0"/>
           </a:xfrm>
           <a:prstGeom prst="line">
@@ -2802,33 +2588,310 @@
       </p:sp>
       <p:sp>
         <p:nvSpPr>
+          <p:cNvPr id="12" name="Text 10"/>
+          <p:cNvSpPr/>
+          <p:nvPr/>
+        </p:nvSpPr>
+        <p:spPr>
+          <a:xfrm>
+            <a:off x="822960" y="3392424"/>
+            <a:ext cx="5669280" cy="310896"/>
+          </a:xfrm>
+          <a:prstGeom prst="rect">
+            <a:avLst/>
+          </a:prstGeom>
+          <a:noFill/>
+          <a:ln/>
+        </p:spPr>
+        <p:txBody>
+          <a:bodyPr wrap="square" lIns="0" tIns="0" rIns="0" bIns="0" rtlCol="0" anchor="t"/>
+          <a:lstStyle/>
+          <a:p>
+            <a:pPr indent="0" marL="0">
+              <a:buNone/>
+            </a:pPr>
+            <a:r>
+              <a:rPr lang="en-US" sz="1350" b="1" dirty="0">
+                <a:solidFill>
+                  <a:srgbClr val="191F28"/>
+                </a:solidFill>
+                <a:latin typeface="Arial" pitchFamily="34" charset="0"/>
+                <a:ea typeface="Arial" pitchFamily="34" charset="-122"/>
+                <a:cs typeface="Arial" pitchFamily="34" charset="-120"/>
+              </a:rPr>
+              <a:t>가상 평가위원 독립 채점 → 합의/논쟁/확인 불가</a:t>
+            </a:r>
+            <a:endParaRPr lang="en-US" sz="1350" dirty="0"/>
+          </a:p>
+        </p:txBody>
+      </p:sp>
+      <p:sp>
+        <p:nvSpPr>
+          <p:cNvPr id="13" name="Text 11"/>
+          <p:cNvSpPr/>
+          <p:nvPr/>
+        </p:nvSpPr>
+        <p:spPr>
+          <a:xfrm>
+            <a:off x="6583680" y="3392424"/>
+            <a:ext cx="457200" cy="310896"/>
+          </a:xfrm>
+          <a:prstGeom prst="rect">
+            <a:avLst/>
+          </a:prstGeom>
+          <a:noFill/>
+          <a:ln/>
+        </p:spPr>
+        <p:txBody>
+          <a:bodyPr wrap="square" lIns="0" tIns="0" rIns="0" bIns="0" rtlCol="0" anchor="t"/>
+          <a:lstStyle/>
+          <a:p>
+            <a:pPr algn="ctr" indent="0" marL="0">
+              <a:buNone/>
+            </a:pPr>
+            <a:r>
+              <a:rPr lang="en-US" sz="1600" b="1" dirty="0">
+                <a:solidFill>
+                  <a:srgbClr val="1B64DA"/>
+                </a:solidFill>
+                <a:latin typeface="Arial" pitchFamily="34" charset="0"/>
+                <a:ea typeface="Arial" pitchFamily="34" charset="-122"/>
+                <a:cs typeface="Arial" pitchFamily="34" charset="-120"/>
+              </a:rPr>
+              <a:t>✓</a:t>
+            </a:r>
+            <a:endParaRPr lang="en-US" sz="1600" dirty="0"/>
+          </a:p>
+        </p:txBody>
+      </p:sp>
+      <p:sp>
+        <p:nvSpPr>
+          <p:cNvPr id="14" name="Text 12"/>
+          <p:cNvSpPr/>
+          <p:nvPr/>
+        </p:nvSpPr>
+        <p:spPr>
+          <a:xfrm>
+            <a:off x="7223760" y="3410712"/>
+            <a:ext cx="4142232" cy="292608"/>
+          </a:xfrm>
+          <a:prstGeom prst="rect">
+            <a:avLst/>
+          </a:prstGeom>
+          <a:noFill/>
+          <a:ln/>
+        </p:spPr>
+        <p:txBody>
+          <a:bodyPr wrap="square" lIns="0" tIns="0" rIns="0" bIns="0" rtlCol="0" anchor="t"/>
+          <a:lstStyle/>
+          <a:p>
+            <a:pPr indent="0" marL="0">
+              <a:buNone/>
+            </a:pPr>
+            <a:r>
+              <a:rPr lang="en-US" sz="1200" dirty="0">
+                <a:solidFill>
+                  <a:srgbClr val="4E5968"/>
+                </a:solidFill>
+                <a:latin typeface="Arial" pitchFamily="34" charset="0"/>
+                <a:ea typeface="Arial" pitchFamily="34" charset="-122"/>
+                <a:cs typeface="Arial" pitchFamily="34" charset="-120"/>
+              </a:rPr>
+              <a:t>관점 6개(현장 멘토링 반영)</a:t>
+            </a:r>
+            <a:endParaRPr lang="en-US" sz="1200" dirty="0"/>
+          </a:p>
+        </p:txBody>
+      </p:sp>
+      <p:sp>
+        <p:nvSpPr>
+          <p:cNvPr id="15" name="Shape 13"/>
+          <p:cNvSpPr/>
+          <p:nvPr/>
+        </p:nvSpPr>
+        <p:spPr>
+          <a:xfrm>
+            <a:off x="822960" y="3749040"/>
+            <a:ext cx="10543032" cy="0"/>
+          </a:xfrm>
+          <a:prstGeom prst="line">
+            <a:avLst/>
+          </a:prstGeom>
+          <a:noFill/>
+          <a:ln w="12700">
+            <a:solidFill>
+              <a:srgbClr val="E5E8EB"/>
+            </a:solidFill>
+            <a:prstDash val="solid"/>
+          </a:ln>
+        </p:spPr>
+      </p:sp>
+      <p:sp>
+        <p:nvSpPr>
+          <p:cNvPr id="16" name="Text 14"/>
+          <p:cNvSpPr/>
+          <p:nvPr/>
+        </p:nvSpPr>
+        <p:spPr>
+          <a:xfrm>
+            <a:off x="822960" y="3785616"/>
+            <a:ext cx="5669280" cy="310896"/>
+          </a:xfrm>
+          <a:prstGeom prst="rect">
+            <a:avLst/>
+          </a:prstGeom>
+          <a:noFill/>
+          <a:ln/>
+        </p:spPr>
+        <p:txBody>
+          <a:bodyPr wrap="square" lIns="0" tIns="0" rIns="0" bIns="0" rtlCol="0" anchor="t"/>
+          <a:lstStyle/>
+          <a:p>
+            <a:pPr indent="0" marL="0">
+              <a:buNone/>
+            </a:pPr>
+            <a:r>
+              <a:rPr lang="en-US" sz="1350" b="1" dirty="0">
+                <a:solidFill>
+                  <a:srgbClr val="191F28"/>
+                </a:solidFill>
+                <a:latin typeface="Arial" pitchFamily="34" charset="0"/>
+                <a:ea typeface="Arial" pitchFamily="34" charset="-122"/>
+                <a:cs typeface="Arial" pitchFamily="34" charset="-120"/>
+              </a:rPr>
+              <a:t>보완 지정 — 문장은 쓰지 않음</a:t>
+            </a:r>
+            <a:endParaRPr lang="en-US" sz="1350" dirty="0"/>
+          </a:p>
+        </p:txBody>
+      </p:sp>
+      <p:sp>
+        <p:nvSpPr>
+          <p:cNvPr id="17" name="Text 15"/>
+          <p:cNvSpPr/>
+          <p:nvPr/>
+        </p:nvSpPr>
+        <p:spPr>
+          <a:xfrm>
+            <a:off x="6583680" y="3785616"/>
+            <a:ext cx="457200" cy="310896"/>
+          </a:xfrm>
+          <a:prstGeom prst="rect">
+            <a:avLst/>
+          </a:prstGeom>
+          <a:noFill/>
+          <a:ln/>
+        </p:spPr>
+        <p:txBody>
+          <a:bodyPr wrap="square" lIns="0" tIns="0" rIns="0" bIns="0" rtlCol="0" anchor="t"/>
+          <a:lstStyle/>
+          <a:p>
+            <a:pPr algn="ctr" indent="0" marL="0">
+              <a:buNone/>
+            </a:pPr>
+            <a:r>
+              <a:rPr lang="en-US" sz="1600" b="1" dirty="0">
+                <a:solidFill>
+                  <a:srgbClr val="1B64DA"/>
+                </a:solidFill>
+                <a:latin typeface="Arial" pitchFamily="34" charset="0"/>
+                <a:ea typeface="Arial" pitchFamily="34" charset="-122"/>
+                <a:cs typeface="Arial" pitchFamily="34" charset="-120"/>
+              </a:rPr>
+              <a:t>✓</a:t>
+            </a:r>
+            <a:endParaRPr lang="en-US" sz="1600" dirty="0"/>
+          </a:p>
+        </p:txBody>
+      </p:sp>
+      <p:sp>
+        <p:nvSpPr>
           <p:cNvPr id="18" name="Text 16"/>
           <p:cNvSpPr/>
           <p:nvPr/>
         </p:nvSpPr>
         <p:spPr>
           <a:xfrm>
-            <a:off x="822960" y="5623560"/>
-            <a:ext cx="10543032" cy="640080"/>
-          </a:xfrm>
-          <a:prstGeom prst="rect">
-            <a:avLst/>
-          </a:prstGeom>
-          <a:noFill/>
-          <a:ln/>
-        </p:spPr>
-        <p:txBody>
-          <a:bodyPr wrap="square" lIns="0" tIns="0" rIns="0" bIns="0" rtlCol="0" anchor="t"/>
-          <a:lstStyle/>
-          <a:p>
-            <a:pPr indent="0" marL="0">
-              <a:lnSpc>
-                <a:spcPct val="120000"/>
-              </a:lnSpc>
-              <a:buNone/>
-            </a:pPr>
-            <a:r>
-              <a:rPr lang="en-US" sz="1400" b="1" dirty="0">
+            <a:off x="7223760" y="3803904"/>
+            <a:ext cx="4142232" cy="292608"/>
+          </a:xfrm>
+          <a:prstGeom prst="rect">
+            <a:avLst/>
+          </a:prstGeom>
+          <a:noFill/>
+          <a:ln/>
+        </p:spPr>
+        <p:txBody>
+          <a:bodyPr wrap="square" lIns="0" tIns="0" rIns="0" bIns="0" rtlCol="0" anchor="t"/>
+          <a:lstStyle/>
+          <a:p>
+            <a:pPr indent="0" marL="0">
+              <a:buNone/>
+            </a:pPr>
+            <a:r>
+              <a:rPr lang="en-US" sz="1200" dirty="0">
+                <a:solidFill>
+                  <a:srgbClr val="4E5968"/>
+                </a:solidFill>
+                <a:latin typeface="Arial" pitchFamily="34" charset="0"/>
+                <a:ea typeface="Arial" pitchFamily="34" charset="-122"/>
+                <a:cs typeface="Arial" pitchFamily="34" charset="-120"/>
+              </a:rPr>
+              <a:t>근거 종류·넣을 위치만</a:t>
+            </a:r>
+            <a:endParaRPr lang="en-US" sz="1200" dirty="0"/>
+          </a:p>
+        </p:txBody>
+      </p:sp>
+      <p:sp>
+        <p:nvSpPr>
+          <p:cNvPr id="19" name="Shape 17"/>
+          <p:cNvSpPr/>
+          <p:nvPr/>
+        </p:nvSpPr>
+        <p:spPr>
+          <a:xfrm>
+            <a:off x="822960" y="4142232"/>
+            <a:ext cx="10543032" cy="0"/>
+          </a:xfrm>
+          <a:prstGeom prst="line">
+            <a:avLst/>
+          </a:prstGeom>
+          <a:noFill/>
+          <a:ln w="12700">
+            <a:solidFill>
+              <a:srgbClr val="E5E8EB"/>
+            </a:solidFill>
+            <a:prstDash val="solid"/>
+          </a:ln>
+        </p:spPr>
+      </p:sp>
+      <p:sp>
+        <p:nvSpPr>
+          <p:cNvPr id="20" name="Text 18"/>
+          <p:cNvSpPr/>
+          <p:nvPr/>
+        </p:nvSpPr>
+        <p:spPr>
+          <a:xfrm>
+            <a:off x="822960" y="4178808"/>
+            <a:ext cx="5669280" cy="310896"/>
+          </a:xfrm>
+          <a:prstGeom prst="rect">
+            <a:avLst/>
+          </a:prstGeom>
+          <a:noFill/>
+          <a:ln/>
+        </p:spPr>
+        <p:txBody>
+          <a:bodyPr wrap="square" lIns="0" tIns="0" rIns="0" bIns="0" rtlCol="0" anchor="t"/>
+          <a:lstStyle/>
+          <a:p>
+            <a:pPr indent="0" marL="0">
+              <a:buNone/>
+            </a:pPr>
+            <a:r>
+              <a:rPr lang="en-US" sz="1350" b="1" dirty="0">
                 <a:solidFill>
                   <a:srgbClr val="191F28"/>
                 </a:solidFill>
@@ -2836,9 +2899,686 @@
                 <a:ea typeface="Arial" pitchFamily="34" charset="-122"/>
                 <a:cs typeface="Arial" pitchFamily="34" charset="-120"/>
               </a:rPr>
-              <a:t>역할 6개가 오탐을 없앴습니다. 세 회사 모델을 섞는 효과는 이 표본(5개·각 1회)에서 확인되지 않았고 — 섞는 이유는 한도·장애에도 멈추지 않는 가용성과 국산 모델 선택지입니다.</a:t>
-            </a:r>
-            <a:endParaRPr lang="en-US" sz="1400" dirty="0"/>
+              <a:t>선행 탐색(논문·NTIS 과제·KIPRIS 특허, MCP)</a:t>
+            </a:r>
+            <a:endParaRPr lang="en-US" sz="1350" dirty="0"/>
+          </a:p>
+        </p:txBody>
+      </p:sp>
+      <p:sp>
+        <p:nvSpPr>
+          <p:cNvPr id="21" name="Text 19"/>
+          <p:cNvSpPr/>
+          <p:nvPr/>
+        </p:nvSpPr>
+        <p:spPr>
+          <a:xfrm>
+            <a:off x="6583680" y="4178808"/>
+            <a:ext cx="457200" cy="310896"/>
+          </a:xfrm>
+          <a:prstGeom prst="rect">
+            <a:avLst/>
+          </a:prstGeom>
+          <a:noFill/>
+          <a:ln/>
+        </p:spPr>
+        <p:txBody>
+          <a:bodyPr wrap="square" lIns="0" tIns="0" rIns="0" bIns="0" rtlCol="0" anchor="t"/>
+          <a:lstStyle/>
+          <a:p>
+            <a:pPr algn="ctr" indent="0" marL="0">
+              <a:buNone/>
+            </a:pPr>
+            <a:r>
+              <a:rPr lang="en-US" sz="1600" b="1" dirty="0">
+                <a:solidFill>
+                  <a:srgbClr val="B7791F"/>
+                </a:solidFill>
+                <a:latin typeface="Arial" pitchFamily="34" charset="0"/>
+                <a:ea typeface="Arial" pitchFamily="34" charset="-122"/>
+                <a:cs typeface="Arial" pitchFamily="34" charset="-120"/>
+              </a:rPr>
+              <a:t>△</a:t>
+            </a:r>
+            <a:endParaRPr lang="en-US" sz="1600" dirty="0"/>
+          </a:p>
+        </p:txBody>
+      </p:sp>
+      <p:sp>
+        <p:nvSpPr>
+          <p:cNvPr id="22" name="Text 20"/>
+          <p:cNvSpPr/>
+          <p:nvPr/>
+        </p:nvSpPr>
+        <p:spPr>
+          <a:xfrm>
+            <a:off x="7223760" y="4197096"/>
+            <a:ext cx="4142232" cy="292608"/>
+          </a:xfrm>
+          <a:prstGeom prst="rect">
+            <a:avLst/>
+          </a:prstGeom>
+          <a:noFill/>
+          <a:ln/>
+        </p:spPr>
+        <p:txBody>
+          <a:bodyPr wrap="square" lIns="0" tIns="0" rIns="0" bIns="0" rtlCol="0" anchor="t"/>
+          <a:lstStyle/>
+          <a:p>
+            <a:pPr indent="0" marL="0">
+              <a:buNone/>
+            </a:pPr>
+            <a:r>
+              <a:rPr lang="en-US" sz="1200" dirty="0">
+                <a:solidFill>
+                  <a:srgbClr val="4E5968"/>
+                </a:solidFill>
+                <a:latin typeface="Arial" pitchFamily="34" charset="0"/>
+                <a:ea typeface="Arial" pitchFamily="34" charset="-122"/>
+                <a:cs typeface="Arial" pitchFamily="34" charset="-120"/>
+              </a:rPr>
+              <a:t>논문만 — 축소 규칙 적용, NTIS·KIPRIS는 키 미확보</a:t>
+            </a:r>
+            <a:endParaRPr lang="en-US" sz="1200" dirty="0"/>
+          </a:p>
+        </p:txBody>
+      </p:sp>
+      <p:sp>
+        <p:nvSpPr>
+          <p:cNvPr id="23" name="Shape 21"/>
+          <p:cNvSpPr/>
+          <p:nvPr/>
+        </p:nvSpPr>
+        <p:spPr>
+          <a:xfrm>
+            <a:off x="822960" y="4535424"/>
+            <a:ext cx="10543032" cy="0"/>
+          </a:xfrm>
+          <a:prstGeom prst="line">
+            <a:avLst/>
+          </a:prstGeom>
+          <a:noFill/>
+          <a:ln w="12700">
+            <a:solidFill>
+              <a:srgbClr val="E5E8EB"/>
+            </a:solidFill>
+            <a:prstDash val="solid"/>
+          </a:ln>
+        </p:spPr>
+      </p:sp>
+      <p:sp>
+        <p:nvSpPr>
+          <p:cNvPr id="24" name="Text 22"/>
+          <p:cNvSpPr/>
+          <p:nvPr/>
+        </p:nvSpPr>
+        <p:spPr>
+          <a:xfrm>
+            <a:off x="822960" y="4572000"/>
+            <a:ext cx="5669280" cy="310896"/>
+          </a:xfrm>
+          <a:prstGeom prst="rect">
+            <a:avLst/>
+          </a:prstGeom>
+          <a:noFill/>
+          <a:ln/>
+        </p:spPr>
+        <p:txBody>
+          <a:bodyPr wrap="square" lIns="0" tIns="0" rIns="0" bIns="0" rtlCol="0" anchor="t"/>
+          <a:lstStyle/>
+          <a:p>
+            <a:pPr indent="0" marL="0">
+              <a:buNone/>
+            </a:pPr>
+            <a:r>
+              <a:rPr lang="en-US" sz="1350" b="1" dirty="0">
+                <a:solidFill>
+                  <a:srgbClr val="191F28"/>
+                </a:solidFill>
+                <a:latin typeface="Arial" pitchFamily="34" charset="0"/>
+                <a:ea typeface="Arial" pitchFamily="34" charset="-122"/>
+                <a:cs typeface="Arial" pitchFamily="34" charset="-120"/>
+              </a:rPr>
+              <a:t>RAG(bge-m3 + FAISS)</a:t>
+            </a:r>
+            <a:endParaRPr lang="en-US" sz="1350" dirty="0"/>
+          </a:p>
+        </p:txBody>
+      </p:sp>
+      <p:sp>
+        <p:nvSpPr>
+          <p:cNvPr id="25" name="Text 23"/>
+          <p:cNvSpPr/>
+          <p:nvPr/>
+        </p:nvSpPr>
+        <p:spPr>
+          <a:xfrm>
+            <a:off x="6583680" y="4572000"/>
+            <a:ext cx="457200" cy="310896"/>
+          </a:xfrm>
+          <a:prstGeom prst="rect">
+            <a:avLst/>
+          </a:prstGeom>
+          <a:noFill/>
+          <a:ln/>
+        </p:spPr>
+        <p:txBody>
+          <a:bodyPr wrap="square" lIns="0" tIns="0" rIns="0" bIns="0" rtlCol="0" anchor="t"/>
+          <a:lstStyle/>
+          <a:p>
+            <a:pPr algn="ctr" indent="0" marL="0">
+              <a:buNone/>
+            </a:pPr>
+            <a:r>
+              <a:rPr lang="en-US" sz="1600" b="1" dirty="0">
+                <a:solidFill>
+                  <a:srgbClr val="C0392B"/>
+                </a:solidFill>
+                <a:latin typeface="Arial" pitchFamily="34" charset="0"/>
+                <a:ea typeface="Arial" pitchFamily="34" charset="-122"/>
+                <a:cs typeface="Arial" pitchFamily="34" charset="-120"/>
+              </a:rPr>
+              <a:t>✕</a:t>
+            </a:r>
+            <a:endParaRPr lang="en-US" sz="1600" dirty="0"/>
+          </a:p>
+        </p:txBody>
+      </p:sp>
+      <p:sp>
+        <p:nvSpPr>
+          <p:cNvPr id="26" name="Text 24"/>
+          <p:cNvSpPr/>
+          <p:nvPr/>
+        </p:nvSpPr>
+        <p:spPr>
+          <a:xfrm>
+            <a:off x="7223760" y="4590288"/>
+            <a:ext cx="4142232" cy="292608"/>
+          </a:xfrm>
+          <a:prstGeom prst="rect">
+            <a:avLst/>
+          </a:prstGeom>
+          <a:noFill/>
+          <a:ln/>
+        </p:spPr>
+        <p:txBody>
+          <a:bodyPr wrap="square" lIns="0" tIns="0" rIns="0" bIns="0" rtlCol="0" anchor="t"/>
+          <a:lstStyle/>
+          <a:p>
+            <a:pPr indent="0" marL="0">
+              <a:buNone/>
+            </a:pPr>
+            <a:r>
+              <a:rPr lang="en-US" sz="1200" dirty="0">
+                <a:solidFill>
+                  <a:srgbClr val="4E5968"/>
+                </a:solidFill>
+                <a:latin typeface="Arial" pitchFamily="34" charset="0"/>
+                <a:ea typeface="Arial" pitchFamily="34" charset="-122"/>
+                <a:cs typeface="Arial" pitchFamily="34" charset="-120"/>
+              </a:rPr>
+              <a:t>원문 전체 + 인용 대조로 교체 — 판정 근거 추적이 더 직접적</a:t>
+            </a:r>
+            <a:endParaRPr lang="en-US" sz="1200" dirty="0"/>
+          </a:p>
+        </p:txBody>
+      </p:sp>
+      <p:sp>
+        <p:nvSpPr>
+          <p:cNvPr id="27" name="Shape 25"/>
+          <p:cNvSpPr/>
+          <p:nvPr/>
+        </p:nvSpPr>
+        <p:spPr>
+          <a:xfrm>
+            <a:off x="822960" y="4928616"/>
+            <a:ext cx="10543032" cy="0"/>
+          </a:xfrm>
+          <a:prstGeom prst="line">
+            <a:avLst/>
+          </a:prstGeom>
+          <a:noFill/>
+          <a:ln w="12700">
+            <a:solidFill>
+              <a:srgbClr val="E5E8EB"/>
+            </a:solidFill>
+            <a:prstDash val="solid"/>
+          </a:ln>
+        </p:spPr>
+      </p:sp>
+      <p:sp>
+        <p:nvSpPr>
+          <p:cNvPr id="28" name="Text 26"/>
+          <p:cNvSpPr/>
+          <p:nvPr/>
+        </p:nvSpPr>
+        <p:spPr>
+          <a:xfrm>
+            <a:off x="822960" y="4965192"/>
+            <a:ext cx="5669280" cy="310896"/>
+          </a:xfrm>
+          <a:prstGeom prst="rect">
+            <a:avLst/>
+          </a:prstGeom>
+          <a:noFill/>
+          <a:ln/>
+        </p:spPr>
+        <p:txBody>
+          <a:bodyPr wrap="square" lIns="0" tIns="0" rIns="0" bIns="0" rtlCol="0" anchor="t"/>
+          <a:lstStyle/>
+          <a:p>
+            <a:pPr indent="0" marL="0">
+              <a:buNone/>
+            </a:pPr>
+            <a:r>
+              <a:rPr lang="en-US" sz="1350" b="1" dirty="0">
+                <a:solidFill>
+                  <a:srgbClr val="191F28"/>
+                </a:solidFill>
+                <a:latin typeface="Arial" pitchFamily="34" charset="0"/>
+                <a:ea typeface="Arial" pitchFamily="34" charset="-122"/>
+                <a:cs typeface="Arial" pitchFamily="34" charset="-120"/>
+              </a:rPr>
+              <a:t>요건 재현율 ≥ 90%</a:t>
+            </a:r>
+            <a:endParaRPr lang="en-US" sz="1350" dirty="0"/>
+          </a:p>
+        </p:txBody>
+      </p:sp>
+      <p:sp>
+        <p:nvSpPr>
+          <p:cNvPr id="29" name="Text 27"/>
+          <p:cNvSpPr/>
+          <p:nvPr/>
+        </p:nvSpPr>
+        <p:spPr>
+          <a:xfrm>
+            <a:off x="6583680" y="4965192"/>
+            <a:ext cx="457200" cy="310896"/>
+          </a:xfrm>
+          <a:prstGeom prst="rect">
+            <a:avLst/>
+          </a:prstGeom>
+          <a:noFill/>
+          <a:ln/>
+        </p:spPr>
+        <p:txBody>
+          <a:bodyPr wrap="square" lIns="0" tIns="0" rIns="0" bIns="0" rtlCol="0" anchor="t"/>
+          <a:lstStyle/>
+          <a:p>
+            <a:pPr algn="ctr" indent="0" marL="0">
+              <a:buNone/>
+            </a:pPr>
+            <a:r>
+              <a:rPr lang="en-US" sz="1600" b="1" dirty="0">
+                <a:solidFill>
+                  <a:srgbClr val="B7791F"/>
+                </a:solidFill>
+                <a:latin typeface="Arial" pitchFamily="34" charset="0"/>
+                <a:ea typeface="Arial" pitchFamily="34" charset="-122"/>
+                <a:cs typeface="Arial" pitchFamily="34" charset="-120"/>
+              </a:rPr>
+              <a:t>△</a:t>
+            </a:r>
+            <a:endParaRPr lang="en-US" sz="1600" dirty="0"/>
+          </a:p>
+        </p:txBody>
+      </p:sp>
+      <p:sp>
+        <p:nvSpPr>
+          <p:cNvPr id="30" name="Text 28"/>
+          <p:cNvSpPr/>
+          <p:nvPr/>
+        </p:nvSpPr>
+        <p:spPr>
+          <a:xfrm>
+            <a:off x="7223760" y="4983480"/>
+            <a:ext cx="4142232" cy="292608"/>
+          </a:xfrm>
+          <a:prstGeom prst="rect">
+            <a:avLst/>
+          </a:prstGeom>
+          <a:noFill/>
+          <a:ln/>
+        </p:spPr>
+        <p:txBody>
+          <a:bodyPr wrap="square" lIns="0" tIns="0" rIns="0" bIns="0" rtlCol="0" anchor="t"/>
+          <a:lstStyle/>
+          <a:p>
+            <a:pPr indent="0" marL="0">
+              <a:buNone/>
+            </a:pPr>
+            <a:r>
+              <a:rPr lang="en-US" sz="1200" dirty="0">
+                <a:solidFill>
+                  <a:srgbClr val="4E5968"/>
+                </a:solidFill>
+                <a:latin typeface="Arial" pitchFamily="34" charset="0"/>
+                <a:ea typeface="Arial" pitchFamily="34" charset="-122"/>
+                <a:cs typeface="Arial" pitchFamily="34" charset="-120"/>
+              </a:rPr>
+              <a:t>개발 85~93% · 처음 본 공고 77~94%</a:t>
+            </a:r>
+            <a:endParaRPr lang="en-US" sz="1200" dirty="0"/>
+          </a:p>
+        </p:txBody>
+      </p:sp>
+      <p:sp>
+        <p:nvSpPr>
+          <p:cNvPr id="31" name="Shape 29"/>
+          <p:cNvSpPr/>
+          <p:nvPr/>
+        </p:nvSpPr>
+        <p:spPr>
+          <a:xfrm>
+            <a:off x="822960" y="5321808"/>
+            <a:ext cx="10543032" cy="0"/>
+          </a:xfrm>
+          <a:prstGeom prst="line">
+            <a:avLst/>
+          </a:prstGeom>
+          <a:noFill/>
+          <a:ln w="12700">
+            <a:solidFill>
+              <a:srgbClr val="E5E8EB"/>
+            </a:solidFill>
+            <a:prstDash val="solid"/>
+          </a:ln>
+        </p:spPr>
+      </p:sp>
+      <p:sp>
+        <p:nvSpPr>
+          <p:cNvPr id="32" name="Text 30"/>
+          <p:cNvSpPr/>
+          <p:nvPr/>
+        </p:nvSpPr>
+        <p:spPr>
+          <a:xfrm>
+            <a:off x="822960" y="5358384"/>
+            <a:ext cx="5669280" cy="310896"/>
+          </a:xfrm>
+          <a:prstGeom prst="rect">
+            <a:avLst/>
+          </a:prstGeom>
+          <a:noFill/>
+          <a:ln/>
+        </p:spPr>
+        <p:txBody>
+          <a:bodyPr wrap="square" lIns="0" tIns="0" rIns="0" bIns="0" rtlCol="0" anchor="t"/>
+          <a:lstStyle/>
+          <a:p>
+            <a:pPr indent="0" marL="0">
+              <a:buNone/>
+            </a:pPr>
+            <a:r>
+              <a:rPr lang="en-US" sz="1350" b="1" dirty="0">
+                <a:solidFill>
+                  <a:srgbClr val="191F28"/>
+                </a:solidFill>
+                <a:latin typeface="Arial" pitchFamily="34" charset="0"/>
+                <a:ea typeface="Arial" pitchFamily="34" charset="-122"/>
+                <a:cs typeface="Arial" pitchFamily="34" charset="-120"/>
+              </a:rPr>
+              <a:t>결핍 탐지 정밀도 ≥ 80%</a:t>
+            </a:r>
+            <a:endParaRPr lang="en-US" sz="1350" dirty="0"/>
+          </a:p>
+        </p:txBody>
+      </p:sp>
+      <p:sp>
+        <p:nvSpPr>
+          <p:cNvPr id="33" name="Text 31"/>
+          <p:cNvSpPr/>
+          <p:nvPr/>
+        </p:nvSpPr>
+        <p:spPr>
+          <a:xfrm>
+            <a:off x="6583680" y="5358384"/>
+            <a:ext cx="457200" cy="310896"/>
+          </a:xfrm>
+          <a:prstGeom prst="rect">
+            <a:avLst/>
+          </a:prstGeom>
+          <a:noFill/>
+          <a:ln/>
+        </p:spPr>
+        <p:txBody>
+          <a:bodyPr wrap="square" lIns="0" tIns="0" rIns="0" bIns="0" rtlCol="0" anchor="t"/>
+          <a:lstStyle/>
+          <a:p>
+            <a:pPr algn="ctr" indent="0" marL="0">
+              <a:buNone/>
+            </a:pPr>
+            <a:r>
+              <a:rPr lang="en-US" sz="1600" b="1" dirty="0">
+                <a:solidFill>
+                  <a:srgbClr val="1B64DA"/>
+                </a:solidFill>
+                <a:latin typeface="Arial" pitchFamily="34" charset="0"/>
+                <a:ea typeface="Arial" pitchFamily="34" charset="-122"/>
+                <a:cs typeface="Arial" pitchFamily="34" charset="-120"/>
+              </a:rPr>
+              <a:t>✓</a:t>
+            </a:r>
+            <a:endParaRPr lang="en-US" sz="1600" dirty="0"/>
+          </a:p>
+        </p:txBody>
+      </p:sp>
+      <p:sp>
+        <p:nvSpPr>
+          <p:cNvPr id="34" name="Text 32"/>
+          <p:cNvSpPr/>
+          <p:nvPr/>
+        </p:nvSpPr>
+        <p:spPr>
+          <a:xfrm>
+            <a:off x="7223760" y="5376672"/>
+            <a:ext cx="4142232" cy="292608"/>
+          </a:xfrm>
+          <a:prstGeom prst="rect">
+            <a:avLst/>
+          </a:prstGeom>
+          <a:noFill/>
+          <a:ln/>
+        </p:spPr>
+        <p:txBody>
+          <a:bodyPr wrap="square" lIns="0" tIns="0" rIns="0" bIns="0" rtlCol="0" anchor="t"/>
+          <a:lstStyle/>
+          <a:p>
+            <a:pPr indent="0" marL="0">
+              <a:buNone/>
+            </a:pPr>
+            <a:r>
+              <a:rPr lang="en-US" sz="1200" dirty="0">
+                <a:solidFill>
+                  <a:srgbClr val="4E5968"/>
+                </a:solidFill>
+                <a:latin typeface="Arial" pitchFamily="34" charset="0"/>
+                <a:ea typeface="Arial" pitchFamily="34" charset="-122"/>
+                <a:cs typeface="Arial" pitchFamily="34" charset="-120"/>
+              </a:rPr>
+              <a:t>오탐 0(100%) · 탐지 4/5, 표본 5</a:t>
+            </a:r>
+            <a:endParaRPr lang="en-US" sz="1200" dirty="0"/>
+          </a:p>
+        </p:txBody>
+      </p:sp>
+      <p:sp>
+        <p:nvSpPr>
+          <p:cNvPr id="35" name="Shape 33"/>
+          <p:cNvSpPr/>
+          <p:nvPr/>
+        </p:nvSpPr>
+        <p:spPr>
+          <a:xfrm>
+            <a:off x="822960" y="5715000"/>
+            <a:ext cx="10543032" cy="0"/>
+          </a:xfrm>
+          <a:prstGeom prst="line">
+            <a:avLst/>
+          </a:prstGeom>
+          <a:noFill/>
+          <a:ln w="12700">
+            <a:solidFill>
+              <a:srgbClr val="E5E8EB"/>
+            </a:solidFill>
+            <a:prstDash val="solid"/>
+          </a:ln>
+        </p:spPr>
+      </p:sp>
+      <p:sp>
+        <p:nvSpPr>
+          <p:cNvPr id="36" name="Text 34"/>
+          <p:cNvSpPr/>
+          <p:nvPr/>
+        </p:nvSpPr>
+        <p:spPr>
+          <a:xfrm>
+            <a:off x="822960" y="5751576"/>
+            <a:ext cx="5669280" cy="310896"/>
+          </a:xfrm>
+          <a:prstGeom prst="rect">
+            <a:avLst/>
+          </a:prstGeom>
+          <a:noFill/>
+          <a:ln/>
+        </p:spPr>
+        <p:txBody>
+          <a:bodyPr wrap="square" lIns="0" tIns="0" rIns="0" bIns="0" rtlCol="0" anchor="t"/>
+          <a:lstStyle/>
+          <a:p>
+            <a:pPr indent="0" marL="0">
+              <a:buNone/>
+            </a:pPr>
+            <a:r>
+              <a:rPr lang="en-US" sz="1350" b="1" dirty="0">
+                <a:solidFill>
+                  <a:srgbClr val="191F28"/>
+                </a:solidFill>
+                <a:latin typeface="Arial" pitchFamily="34" charset="0"/>
+                <a:ea typeface="Arial" pitchFamily="34" charset="-122"/>
+                <a:cs typeface="Arial" pitchFamily="34" charset="-120"/>
+              </a:rPr>
+              <a:t>초안 비저장 · 오픈소스(MIT)</a:t>
+            </a:r>
+            <a:endParaRPr lang="en-US" sz="1350" dirty="0"/>
+          </a:p>
+        </p:txBody>
+      </p:sp>
+      <p:sp>
+        <p:nvSpPr>
+          <p:cNvPr id="37" name="Text 35"/>
+          <p:cNvSpPr/>
+          <p:nvPr/>
+        </p:nvSpPr>
+        <p:spPr>
+          <a:xfrm>
+            <a:off x="6583680" y="5751576"/>
+            <a:ext cx="457200" cy="310896"/>
+          </a:xfrm>
+          <a:prstGeom prst="rect">
+            <a:avLst/>
+          </a:prstGeom>
+          <a:noFill/>
+          <a:ln/>
+        </p:spPr>
+        <p:txBody>
+          <a:bodyPr wrap="square" lIns="0" tIns="0" rIns="0" bIns="0" rtlCol="0" anchor="t"/>
+          <a:lstStyle/>
+          <a:p>
+            <a:pPr algn="ctr" indent="0" marL="0">
+              <a:buNone/>
+            </a:pPr>
+            <a:r>
+              <a:rPr lang="en-US" sz="1600" b="1" dirty="0">
+                <a:solidFill>
+                  <a:srgbClr val="1B64DA"/>
+                </a:solidFill>
+                <a:latin typeface="Arial" pitchFamily="34" charset="0"/>
+                <a:ea typeface="Arial" pitchFamily="34" charset="-122"/>
+                <a:cs typeface="Arial" pitchFamily="34" charset="-120"/>
+              </a:rPr>
+              <a:t>✓</a:t>
+            </a:r>
+            <a:endParaRPr lang="en-US" sz="1600" dirty="0"/>
+          </a:p>
+        </p:txBody>
+      </p:sp>
+      <p:sp>
+        <p:nvSpPr>
+          <p:cNvPr id="38" name="Text 36"/>
+          <p:cNvSpPr/>
+          <p:nvPr/>
+        </p:nvSpPr>
+        <p:spPr>
+          <a:xfrm>
+            <a:off x="7223760" y="5769864"/>
+            <a:ext cx="4142232" cy="292608"/>
+          </a:xfrm>
+          <a:prstGeom prst="rect">
+            <a:avLst/>
+          </a:prstGeom>
+          <a:noFill/>
+          <a:ln/>
+        </p:spPr>
+        <p:txBody>
+          <a:bodyPr wrap="square" lIns="0" tIns="0" rIns="0" bIns="0" rtlCol="0" anchor="t"/>
+          <a:lstStyle/>
+          <a:p>
+            <a:pPr indent="0" marL="0">
+              <a:buNone/>
+            </a:pPr>
+            <a:r>
+              <a:rPr lang="en-US" sz="1200" dirty="0">
+                <a:solidFill>
+                  <a:srgbClr val="4E5968"/>
+                </a:solidFill>
+                <a:latin typeface="Arial" pitchFamily="34" charset="0"/>
+                <a:ea typeface="Arial" pitchFamily="34" charset="-122"/>
+                <a:cs typeface="Arial" pitchFamily="34" charset="-120"/>
+              </a:rPr>
+              <a:t>+개인정보 가림 · LICENSE 공개</a:t>
+            </a:r>
+            <a:endParaRPr lang="en-US" sz="1200" dirty="0"/>
+          </a:p>
+        </p:txBody>
+      </p:sp>
+      <p:sp>
+        <p:nvSpPr>
+          <p:cNvPr id="39" name="Text 37"/>
+          <p:cNvSpPr/>
+          <p:nvPr/>
+        </p:nvSpPr>
+        <p:spPr>
+          <a:xfrm>
+            <a:off x="822960" y="6355080"/>
+            <a:ext cx="10543032" cy="274320"/>
+          </a:xfrm>
+          <a:prstGeom prst="rect">
+            <a:avLst/>
+          </a:prstGeom>
+          <a:noFill/>
+          <a:ln/>
+        </p:spPr>
+        <p:txBody>
+          <a:bodyPr wrap="square" lIns="0" tIns="0" rIns="0" bIns="0" rtlCol="0" anchor="t"/>
+          <a:lstStyle/>
+          <a:p>
+            <a:pPr indent="0" marL="0">
+              <a:buNone/>
+            </a:pPr>
+            <a:r>
+              <a:rPr lang="en-US" sz="1000" dirty="0">
+                <a:solidFill>
+                  <a:srgbClr val="8B95A1"/>
+                </a:solidFill>
+                <a:latin typeface="Arial" pitchFamily="34" charset="0"/>
+                <a:ea typeface="Arial" pitchFamily="34" charset="-122"/>
+                <a:cs typeface="Arial" pitchFamily="34" charset="-120"/>
+              </a:rPr>
+              <a:t>기획서 v2(9/5 제출)·아이디어 포스터(9/15 제출) 대비 — 못 한 것도 지우지 않았습니다 · 전체 표는 저장소 README</a:t>
+            </a:r>
+            <a:endParaRPr lang="en-US" sz="1000" dirty="0"/>
           </a:p>
         </p:txBody>
       </p:sp>
@@ -3211,7 +3951,7 @@
                 <a:ea typeface="Arial" pitchFamily="34" charset="-122"/>
                 <a:cs typeface="Arial" pitchFamily="34" charset="-120"/>
               </a:rPr>
-              <a:t>목표치 대신 실측치 — 처음 보는 공고 재현율·제거 실험(9·10장)</a:t>
+              <a:t>목표치 대신 실측치 — 처음 보는 공고 재현율·제거 실험(9장)</a:t>
             </a:r>
             <a:endParaRPr lang="en-US" sz="1300" dirty="0"/>
           </a:p>
@@ -3505,7 +4245,7 @@
                 <a:ea typeface="Arial" pitchFamily="34" charset="-122"/>
                 <a:cs typeface="Arial" pitchFamily="34" charset="-120"/>
               </a:rPr>
-              <a:t>검증 가능한 과정 — 커밋 22개·테스트 34개·측정 스크립트 공개</a:t>
+              <a:t>검증 가능한 과정 — 커밋 26개·테스트 34개·측정 스크립트 공개</a:t>
             </a:r>
             <a:endParaRPr lang="en-US" sz="1300" dirty="0"/>
           </a:p>
@@ -4337,8 +5077,8 @@
         </p:nvSpPr>
         <p:spPr>
           <a:xfrm>
-            <a:off x="822960" y="5166360"/>
-            <a:ext cx="10543032" cy="1005840"/>
+            <a:off x="822960" y="5074920"/>
+            <a:ext cx="10543032" cy="1280160"/>
           </a:xfrm>
           <a:prstGeom prst="rect">
             <a:avLst/>
@@ -4352,12 +5092,12 @@
           <a:p>
             <a:pPr indent="0" marL="0">
               <a:lnSpc>
-                <a:spcPct val="130000"/>
+                <a:spcPct val="125000"/>
               </a:lnSpc>
               <a:buNone/>
             </a:pPr>
             <a:r>
-              <a:rPr lang="en-US" sz="1250" b="1" dirty="0">
+              <a:rPr lang="en-US" sz="1150" b="1" dirty="0">
                 <a:solidFill>
                   <a:srgbClr val="4E5968"/>
                 </a:solidFill>
@@ -4365,16 +5105,53 @@
                 <a:ea typeface="Arial" pitchFamily="34" charset="-122"/>
                 <a:cs typeface="Arial" pitchFamily="34" charset="-120"/>
               </a:rPr>
+              <a:t>NAIS 비전과의 연결 — </a:t>
+            </a:r>
+            <a:pPr indent="0" marL="0">
+              <a:lnSpc>
+                <a:spcPct val="125000"/>
+              </a:lnSpc>
+              <a:buNone/>
+            </a:pPr>
+            <a:r>
+              <a:rPr lang="en-US" sz="1150" dirty="0">
+                <a:solidFill>
+                  <a:srgbClr val="4E5968"/>
+                </a:solidFill>
+                <a:latin typeface="Arial" pitchFamily="34" charset="0"/>
+                <a:ea typeface="Arial" pitchFamily="34" charset="-122"/>
+                <a:cs typeface="Arial" pitchFamily="34" charset="-120"/>
+              </a:rPr>
+              <a:t>「가설부터 실험·분석까지 스스로 하는 AI 사이언티스트, 1인 1연구소」에서 빠진 순간이 과제 신청입니다 — 그 자리를 채우는 도구입니다.</a:t>
+            </a:r>
+            <a:endParaRPr lang="en-US" sz="1150" dirty="0"/>
+          </a:p>
+          <a:p>
+            <a:pPr indent="0" marL="0">
+              <a:lnSpc>
+                <a:spcPct val="125000"/>
+              </a:lnSpc>
+              <a:buNone/>
+            </a:pPr>
+            <a:r>
+              <a:rPr lang="en-US" sz="1150" b="1" dirty="0">
+                <a:solidFill>
+                  <a:srgbClr val="4E5968"/>
+                </a:solidFill>
+                <a:latin typeface="Arial" pitchFamily="34" charset="0"/>
+                <a:ea typeface="Arial" pitchFamily="34" charset="-122"/>
+                <a:cs typeface="Arial" pitchFamily="34" charset="-120"/>
+              </a:rPr>
               <a:t>데이터가 쌓이는 방향 — </a:t>
             </a:r>
             <a:pPr indent="0" marL="0">
               <a:lnSpc>
-                <a:spcPct val="130000"/>
+                <a:spcPct val="125000"/>
               </a:lnSpc>
               <a:buNone/>
             </a:pPr>
             <a:r>
-              <a:rPr lang="en-US" sz="1250" dirty="0">
+              <a:rPr lang="en-US" sz="1150" dirty="0">
                 <a:solidFill>
                   <a:srgbClr val="4E5968"/>
                 </a:solidFill>
@@ -4384,17 +5161,17 @@
               </a:rPr>
               <a:t>실제 심사 의견은 평가기관에 있습니다(멘토링). 전문기관과 연계하면 가상 평가위원을 실제 심사 의견 유형으로 보정합니다.</a:t>
             </a:r>
-            <a:endParaRPr lang="en-US" sz="1250" dirty="0"/>
+            <a:endParaRPr lang="en-US" sz="1150" dirty="0"/>
           </a:p>
           <a:p>
             <a:pPr indent="0" marL="0">
               <a:lnSpc>
-                <a:spcPct val="130000"/>
+                <a:spcPct val="125000"/>
               </a:lnSpc>
               <a:buNone/>
             </a:pPr>
             <a:r>
-              <a:rPr lang="en-US" sz="1250" b="1" dirty="0">
+              <a:rPr lang="en-US" sz="1150" b="1" dirty="0">
                 <a:solidFill>
                   <a:srgbClr val="4E5968"/>
                 </a:solidFill>
@@ -4406,12 +5183,12 @@
             </a:r>
             <a:pPr indent="0" marL="0">
               <a:lnSpc>
-                <a:spcPct val="130000"/>
+                <a:spcPct val="125000"/>
               </a:lnSpc>
               <a:buNone/>
             </a:pPr>
             <a:r>
-              <a:rPr lang="en-US" sz="1250" dirty="0">
+              <a:rPr lang="en-US" sz="1150" dirty="0">
                 <a:solidFill>
                   <a:srgbClr val="4E5968"/>
                 </a:solidFill>
@@ -4421,7 +5198,7 @@
               </a:rPr>
               <a:t>MCP 도구로 NAIS 플랫폼·연구자 AI 비서에 그대로 꽂히고, 같은 엔진이 연차·성과보고서(지표 대비 실적)와 연구비 정산(증빙 대비 항목)으로 넓어집니다.</a:t>
             </a:r>
-            <a:endParaRPr lang="en-US" sz="1250" dirty="0"/>
+            <a:endParaRPr lang="en-US" sz="1150" dirty="0"/>
           </a:p>
         </p:txBody>
       </p:sp>
@@ -4611,7 +5388,7 @@
                 <a:ea typeface="Arial" pitchFamily="34" charset="-122"/>
                 <a:cs typeface="Arial" pitchFamily="34" charset="-120"/>
               </a:rPr>
-              <a:t>커밋 22개 · 코드는 전부 본선 중 커밋(첫 코드 커밋 09/30 19:19, 그 전엔 문서뿐) · 테스트 34개</a:t>
+              <a:t>커밋 26개 · 코드는 전부 본선 중 커밋(첫 코드 커밋 09/30 19:19, 그 전엔 문서뿐) · 테스트 34개</a:t>
             </a:r>
             <a:endParaRPr lang="en-US" sz="1400" dirty="0"/>
           </a:p>
@@ -11669,7 +12446,7 @@
                 <a:ea typeface="Arial" pitchFamily="34" charset="-122"/>
                 <a:cs typeface="Arial" pitchFamily="34" charset="-120"/>
               </a:rPr>
-              <a:t>검증 — 예시 공고에만 맞춘 게 아닌지</a:t>
+              <a:t>측정 — 잴 수 있는 것만 숫자로</a:t>
             </a:r>
             <a:endParaRPr lang="en-US" sz="1400" dirty="0"/>
           </a:p>
@@ -11748,7 +12525,7 @@
                 <a:ea typeface="Arial" pitchFamily="34" charset="-122"/>
                 <a:cs typeface="Arial" pitchFamily="34" charset="-120"/>
               </a:rPr>
-              <a:t>로 쟀습니다</a:t>
+              <a:t>와 제거 실험으로 쟀습니다</a:t>
             </a:r>
             <a:endParaRPr lang="en-US" sz="3400" dirty="0"/>
           </a:p>
@@ -11763,7 +12540,397 @@
         <p:spPr>
           <a:xfrm>
             <a:off x="822960" y="2606040"/>
-            <a:ext cx="4937760" cy="292608"/>
+            <a:ext cx="5669280" cy="274320"/>
+          </a:xfrm>
+          <a:prstGeom prst="rect">
+            <a:avLst/>
+          </a:prstGeom>
+          <a:noFill/>
+          <a:ln/>
+        </p:spPr>
+        <p:txBody>
+          <a:bodyPr wrap="square" lIns="0" tIns="0" rIns="0" bIns="0" rtlCol="0" anchor="t"/>
+          <a:lstStyle/>
+          <a:p>
+            <a:pPr indent="0" marL="0">
+              <a:buNone/>
+            </a:pPr>
+            <a:r>
+              <a:rPr lang="en-US" sz="1250" b="1" dirty="0">
+                <a:solidFill>
+                  <a:srgbClr val="4E5968"/>
+                </a:solidFill>
+                <a:latin typeface="Arial" pitchFamily="34" charset="0"/>
+                <a:ea typeface="Arial" pitchFamily="34" charset="-122"/>
+                <a:cs typeface="Arial" pitchFamily="34" charset="-120"/>
+              </a:rPr>
+              <a:t>① 공고 파싱 — 요건 재현율(심사표 배점은 5건 모두 100%)</a:t>
+            </a:r>
+            <a:endParaRPr lang="en-US" sz="1250" dirty="0"/>
+          </a:p>
+        </p:txBody>
+      </p:sp>
+      <p:sp>
+        <p:nvSpPr>
+          <p:cNvPr id="5" name="Text 3"/>
+          <p:cNvSpPr/>
+          <p:nvPr/>
+        </p:nvSpPr>
+        <p:spPr>
+          <a:xfrm>
+            <a:off x="822960" y="2971800"/>
+            <a:ext cx="3291840" cy="292608"/>
+          </a:xfrm>
+          <a:prstGeom prst="rect">
+            <a:avLst/>
+          </a:prstGeom>
+          <a:noFill/>
+          <a:ln/>
+        </p:spPr>
+        <p:txBody>
+          <a:bodyPr wrap="square" lIns="0" tIns="0" rIns="0" bIns="0" rtlCol="0" anchor="t"/>
+          <a:lstStyle/>
+          <a:p>
+            <a:pPr indent="0" marL="0">
+              <a:buNone/>
+            </a:pPr>
+            <a:r>
+              <a:rPr lang="en-US" sz="1300" dirty="0">
+                <a:solidFill>
+                  <a:srgbClr val="191F28"/>
+                </a:solidFill>
+                <a:latin typeface="Arial" pitchFamily="34" charset="0"/>
+                <a:ea typeface="Arial" pitchFamily="34" charset="-122"/>
+                <a:cs typeface="Arial" pitchFamily="34" charset="-120"/>
+              </a:rPr>
+              <a:t>우주항공청 · 개발용</a:t>
+            </a:r>
+            <a:endParaRPr lang="en-US" sz="1300" dirty="0"/>
+          </a:p>
+        </p:txBody>
+      </p:sp>
+      <p:sp>
+        <p:nvSpPr>
+          <p:cNvPr id="6" name="Text 4"/>
+          <p:cNvSpPr/>
+          <p:nvPr/>
+        </p:nvSpPr>
+        <p:spPr>
+          <a:xfrm>
+            <a:off x="4114800" y="2971800"/>
+            <a:ext cx="868680" cy="292608"/>
+          </a:xfrm>
+          <a:prstGeom prst="rect">
+            <a:avLst/>
+          </a:prstGeom>
+          <a:noFill/>
+          <a:ln/>
+        </p:spPr>
+        <p:txBody>
+          <a:bodyPr wrap="square" lIns="0" tIns="0" rIns="0" bIns="0" rtlCol="0" anchor="t"/>
+          <a:lstStyle/>
+          <a:p>
+            <a:pPr algn="r" indent="0" marL="0">
+              <a:buNone/>
+            </a:pPr>
+            <a:r>
+              <a:rPr lang="en-US" sz="1400" b="1" dirty="0">
+                <a:solidFill>
+                  <a:srgbClr val="191F28"/>
+                </a:solidFill>
+                <a:latin typeface="Arial" pitchFamily="34" charset="0"/>
+                <a:ea typeface="Arial" pitchFamily="34" charset="-122"/>
+                <a:cs typeface="Arial" pitchFamily="34" charset="-120"/>
+              </a:rPr>
+              <a:t>85%</a:t>
+            </a:r>
+            <a:endParaRPr lang="en-US" sz="1400" dirty="0"/>
+          </a:p>
+        </p:txBody>
+      </p:sp>
+      <p:sp>
+        <p:nvSpPr>
+          <p:cNvPr id="7" name="Text 5"/>
+          <p:cNvSpPr/>
+          <p:nvPr/>
+        </p:nvSpPr>
+        <p:spPr>
+          <a:xfrm>
+            <a:off x="5120640" y="2999232"/>
+            <a:ext cx="1188720" cy="256032"/>
+          </a:xfrm>
+          <a:prstGeom prst="rect">
+            <a:avLst/>
+          </a:prstGeom>
+          <a:noFill/>
+          <a:ln/>
+        </p:spPr>
+        <p:txBody>
+          <a:bodyPr wrap="square" lIns="0" tIns="0" rIns="0" bIns="0" rtlCol="0" anchor="t"/>
+          <a:lstStyle/>
+          <a:p>
+            <a:pPr indent="0" marL="0">
+              <a:buNone/>
+            </a:pPr>
+            <a:r>
+              <a:rPr lang="en-US" sz="1050" dirty="0">
+                <a:solidFill>
+                  <a:srgbClr val="8B95A1"/>
+                </a:solidFill>
+                <a:latin typeface="Arial" pitchFamily="34" charset="0"/>
+                <a:ea typeface="Arial" pitchFamily="34" charset="-122"/>
+                <a:cs typeface="Arial" pitchFamily="34" charset="-120"/>
+              </a:rPr>
+              <a:t>85~87</a:t>
+            </a:r>
+            <a:endParaRPr lang="en-US" sz="1050" dirty="0"/>
+          </a:p>
+        </p:txBody>
+      </p:sp>
+      <p:sp>
+        <p:nvSpPr>
+          <p:cNvPr id="8" name="Text 6"/>
+          <p:cNvSpPr/>
+          <p:nvPr/>
+        </p:nvSpPr>
+        <p:spPr>
+          <a:xfrm>
+            <a:off x="822960" y="3355848"/>
+            <a:ext cx="3291840" cy="292608"/>
+          </a:xfrm>
+          <a:prstGeom prst="rect">
+            <a:avLst/>
+          </a:prstGeom>
+          <a:noFill/>
+          <a:ln/>
+        </p:spPr>
+        <p:txBody>
+          <a:bodyPr wrap="square" lIns="0" tIns="0" rIns="0" bIns="0" rtlCol="0" anchor="t"/>
+          <a:lstStyle/>
+          <a:p>
+            <a:pPr indent="0" marL="0">
+              <a:buNone/>
+            </a:pPr>
+            <a:r>
+              <a:rPr lang="en-US" sz="1300" dirty="0">
+                <a:solidFill>
+                  <a:srgbClr val="191F28"/>
+                </a:solidFill>
+                <a:latin typeface="Arial" pitchFamily="34" charset="0"/>
+                <a:ea typeface="Arial" pitchFamily="34" charset="-122"/>
+                <a:cs typeface="Arial" pitchFamily="34" charset="-120"/>
+              </a:rPr>
+              <a:t>산업통상부 · 개발용</a:t>
+            </a:r>
+            <a:endParaRPr lang="en-US" sz="1300" dirty="0"/>
+          </a:p>
+        </p:txBody>
+      </p:sp>
+      <p:sp>
+        <p:nvSpPr>
+          <p:cNvPr id="9" name="Text 7"/>
+          <p:cNvSpPr/>
+          <p:nvPr/>
+        </p:nvSpPr>
+        <p:spPr>
+          <a:xfrm>
+            <a:off x="4114800" y="3355848"/>
+            <a:ext cx="868680" cy="292608"/>
+          </a:xfrm>
+          <a:prstGeom prst="rect">
+            <a:avLst/>
+          </a:prstGeom>
+          <a:noFill/>
+          <a:ln/>
+        </p:spPr>
+        <p:txBody>
+          <a:bodyPr wrap="square" lIns="0" tIns="0" rIns="0" bIns="0" rtlCol="0" anchor="t"/>
+          <a:lstStyle/>
+          <a:p>
+            <a:pPr algn="r" indent="0" marL="0">
+              <a:buNone/>
+            </a:pPr>
+            <a:r>
+              <a:rPr lang="en-US" sz="1400" b="1" dirty="0">
+                <a:solidFill>
+                  <a:srgbClr val="191F28"/>
+                </a:solidFill>
+                <a:latin typeface="Arial" pitchFamily="34" charset="0"/>
+                <a:ea typeface="Arial" pitchFamily="34" charset="-122"/>
+                <a:cs typeface="Arial" pitchFamily="34" charset="-120"/>
+              </a:rPr>
+              <a:t>93%</a:t>
+            </a:r>
+            <a:endParaRPr lang="en-US" sz="1400" dirty="0"/>
+          </a:p>
+        </p:txBody>
+      </p:sp>
+      <p:sp>
+        <p:nvSpPr>
+          <p:cNvPr id="10" name="Text 8"/>
+          <p:cNvSpPr/>
+          <p:nvPr/>
+        </p:nvSpPr>
+        <p:spPr>
+          <a:xfrm>
+            <a:off x="5120640" y="3383280"/>
+            <a:ext cx="1188720" cy="256032"/>
+          </a:xfrm>
+          <a:prstGeom prst="rect">
+            <a:avLst/>
+          </a:prstGeom>
+          <a:noFill/>
+          <a:ln/>
+        </p:spPr>
+        <p:txBody>
+          <a:bodyPr wrap="square" lIns="0" tIns="0" rIns="0" bIns="0" rtlCol="0" anchor="t"/>
+          <a:lstStyle/>
+          <a:p>
+            <a:pPr indent="0" marL="0">
+              <a:buNone/>
+            </a:pPr>
+            <a:r>
+              <a:rPr lang="en-US" sz="1050" dirty="0">
+                <a:solidFill>
+                  <a:srgbClr val="8B95A1"/>
+                </a:solidFill>
+                <a:latin typeface="Arial" pitchFamily="34" charset="0"/>
+                <a:ea typeface="Arial" pitchFamily="34" charset="-122"/>
+                <a:cs typeface="Arial" pitchFamily="34" charset="-120"/>
+              </a:rPr>
+              <a:t>91~95</a:t>
+            </a:r>
+            <a:endParaRPr lang="en-US" sz="1050" dirty="0"/>
+          </a:p>
+        </p:txBody>
+      </p:sp>
+      <p:sp>
+        <p:nvSpPr>
+          <p:cNvPr id="11" name="Text 9"/>
+          <p:cNvSpPr/>
+          <p:nvPr/>
+        </p:nvSpPr>
+        <p:spPr>
+          <a:xfrm>
+            <a:off x="822960" y="3739896"/>
+            <a:ext cx="3291840" cy="292608"/>
+          </a:xfrm>
+          <a:prstGeom prst="rect">
+            <a:avLst/>
+          </a:prstGeom>
+          <a:noFill/>
+          <a:ln/>
+        </p:spPr>
+        <p:txBody>
+          <a:bodyPr wrap="square" lIns="0" tIns="0" rIns="0" bIns="0" rtlCol="0" anchor="t"/>
+          <a:lstStyle/>
+          <a:p>
+            <a:pPr indent="0" marL="0">
+              <a:buNone/>
+            </a:pPr>
+            <a:r>
+              <a:rPr lang="en-US" sz="1300" dirty="0">
+                <a:solidFill>
+                  <a:srgbClr val="191F28"/>
+                </a:solidFill>
+                <a:latin typeface="Arial" pitchFamily="34" charset="0"/>
+                <a:ea typeface="Arial" pitchFamily="34" charset="-122"/>
+                <a:cs typeface="Arial" pitchFamily="34" charset="-120"/>
+              </a:rPr>
+              <a:t>NAIS 해커톤 · 개발용</a:t>
+            </a:r>
+            <a:endParaRPr lang="en-US" sz="1300" dirty="0"/>
+          </a:p>
+        </p:txBody>
+      </p:sp>
+      <p:sp>
+        <p:nvSpPr>
+          <p:cNvPr id="12" name="Text 10"/>
+          <p:cNvSpPr/>
+          <p:nvPr/>
+        </p:nvSpPr>
+        <p:spPr>
+          <a:xfrm>
+            <a:off x="4114800" y="3739896"/>
+            <a:ext cx="868680" cy="292608"/>
+          </a:xfrm>
+          <a:prstGeom prst="rect">
+            <a:avLst/>
+          </a:prstGeom>
+          <a:noFill/>
+          <a:ln/>
+        </p:spPr>
+        <p:txBody>
+          <a:bodyPr wrap="square" lIns="0" tIns="0" rIns="0" bIns="0" rtlCol="0" anchor="t"/>
+          <a:lstStyle/>
+          <a:p>
+            <a:pPr algn="r" indent="0" marL="0">
+              <a:buNone/>
+            </a:pPr>
+            <a:r>
+              <a:rPr lang="en-US" sz="1400" b="1" dirty="0">
+                <a:solidFill>
+                  <a:srgbClr val="191F28"/>
+                </a:solidFill>
+                <a:latin typeface="Arial" pitchFamily="34" charset="0"/>
+                <a:ea typeface="Arial" pitchFamily="34" charset="-122"/>
+                <a:cs typeface="Arial" pitchFamily="34" charset="-120"/>
+              </a:rPr>
+              <a:t>87%</a:t>
+            </a:r>
+            <a:endParaRPr lang="en-US" sz="1400" dirty="0"/>
+          </a:p>
+        </p:txBody>
+      </p:sp>
+      <p:sp>
+        <p:nvSpPr>
+          <p:cNvPr id="13" name="Text 11"/>
+          <p:cNvSpPr/>
+          <p:nvPr/>
+        </p:nvSpPr>
+        <p:spPr>
+          <a:xfrm>
+            <a:off x="5120640" y="3767328"/>
+            <a:ext cx="1188720" cy="256032"/>
+          </a:xfrm>
+          <a:prstGeom prst="rect">
+            <a:avLst/>
+          </a:prstGeom>
+          <a:noFill/>
+          <a:ln/>
+        </p:spPr>
+        <p:txBody>
+          <a:bodyPr wrap="square" lIns="0" tIns="0" rIns="0" bIns="0" rtlCol="0" anchor="t"/>
+          <a:lstStyle/>
+          <a:p>
+            <a:pPr indent="0" marL="0">
+              <a:buNone/>
+            </a:pPr>
+            <a:r>
+              <a:rPr lang="en-US" sz="1050" dirty="0">
+                <a:solidFill>
+                  <a:srgbClr val="8B95A1"/>
+                </a:solidFill>
+                <a:latin typeface="Arial" pitchFamily="34" charset="0"/>
+                <a:ea typeface="Arial" pitchFamily="34" charset="-122"/>
+                <a:cs typeface="Arial" pitchFamily="34" charset="-120"/>
+              </a:rPr>
+              <a:t>85~88</a:t>
+            </a:r>
+            <a:endParaRPr lang="en-US" sz="1050" dirty="0"/>
+          </a:p>
+        </p:txBody>
+      </p:sp>
+      <p:sp>
+        <p:nvSpPr>
+          <p:cNvPr id="14" name="Text 12"/>
+          <p:cNvSpPr/>
+          <p:nvPr/>
+        </p:nvSpPr>
+        <p:spPr>
+          <a:xfrm>
+            <a:off x="822960" y="4123944"/>
+            <a:ext cx="3291840" cy="292608"/>
           </a:xfrm>
           <a:prstGeom prst="rect">
             <a:avLst/>
@@ -11781,639 +12948,252 @@
             <a:r>
               <a:rPr lang="en-US" sz="1300" b="1" dirty="0">
                 <a:solidFill>
+                  <a:srgbClr val="1B64DA"/>
+                </a:solidFill>
+                <a:latin typeface="Arial" pitchFamily="34" charset="0"/>
+                <a:ea typeface="Arial" pitchFamily="34" charset="-122"/>
+                <a:cs typeface="Arial" pitchFamily="34" charset="-120"/>
+              </a:rPr>
+              <a:t>과기정통부 국가과학자 · 처음 봄</a:t>
+            </a:r>
+            <a:endParaRPr lang="en-US" sz="1300" dirty="0"/>
+          </a:p>
+        </p:txBody>
+      </p:sp>
+      <p:sp>
+        <p:nvSpPr>
+          <p:cNvPr id="15" name="Text 13"/>
+          <p:cNvSpPr/>
+          <p:nvPr/>
+        </p:nvSpPr>
+        <p:spPr>
+          <a:xfrm>
+            <a:off x="4114800" y="4123944"/>
+            <a:ext cx="868680" cy="292608"/>
+          </a:xfrm>
+          <a:prstGeom prst="rect">
+            <a:avLst/>
+          </a:prstGeom>
+          <a:noFill/>
+          <a:ln/>
+        </p:spPr>
+        <p:txBody>
+          <a:bodyPr wrap="square" lIns="0" tIns="0" rIns="0" bIns="0" rtlCol="0" anchor="t"/>
+          <a:lstStyle/>
+          <a:p>
+            <a:pPr algn="r" indent="0" marL="0">
+              <a:buNone/>
+            </a:pPr>
+            <a:r>
+              <a:rPr lang="en-US" sz="1400" b="1" dirty="0">
+                <a:solidFill>
+                  <a:srgbClr val="1B64DA"/>
+                </a:solidFill>
+                <a:latin typeface="Arial" pitchFamily="34" charset="0"/>
+                <a:ea typeface="Arial" pitchFamily="34" charset="-122"/>
+                <a:cs typeface="Arial" pitchFamily="34" charset="-120"/>
+              </a:rPr>
+              <a:t>94%</a:t>
+            </a:r>
+            <a:endParaRPr lang="en-US" sz="1400" dirty="0"/>
+          </a:p>
+        </p:txBody>
+      </p:sp>
+      <p:sp>
+        <p:nvSpPr>
+          <p:cNvPr id="16" name="Text 14"/>
+          <p:cNvSpPr/>
+          <p:nvPr/>
+        </p:nvSpPr>
+        <p:spPr>
+          <a:xfrm>
+            <a:off x="5120640" y="4151376"/>
+            <a:ext cx="1188720" cy="256032"/>
+          </a:xfrm>
+          <a:prstGeom prst="rect">
+            <a:avLst/>
+          </a:prstGeom>
+          <a:noFill/>
+          <a:ln/>
+        </p:spPr>
+        <p:txBody>
+          <a:bodyPr wrap="square" lIns="0" tIns="0" rIns="0" bIns="0" rtlCol="0" anchor="t"/>
+          <a:lstStyle/>
+          <a:p>
+            <a:pPr indent="0" marL="0">
+              <a:buNone/>
+            </a:pPr>
+            <a:r>
+              <a:rPr lang="en-US" sz="1050" dirty="0">
+                <a:solidFill>
+                  <a:srgbClr val="8B95A1"/>
+                </a:solidFill>
+                <a:latin typeface="Arial" pitchFamily="34" charset="0"/>
+                <a:ea typeface="Arial" pitchFamily="34" charset="-122"/>
+                <a:cs typeface="Arial" pitchFamily="34" charset="-120"/>
+              </a:rPr>
+              <a:t>92~97</a:t>
+            </a:r>
+            <a:endParaRPr lang="en-US" sz="1050" dirty="0"/>
+          </a:p>
+        </p:txBody>
+      </p:sp>
+      <p:sp>
+        <p:nvSpPr>
+          <p:cNvPr id="17" name="Text 15"/>
+          <p:cNvSpPr/>
+          <p:nvPr/>
+        </p:nvSpPr>
+        <p:spPr>
+          <a:xfrm>
+            <a:off x="822960" y="4507992"/>
+            <a:ext cx="3291840" cy="292608"/>
+          </a:xfrm>
+          <a:prstGeom prst="rect">
+            <a:avLst/>
+          </a:prstGeom>
+          <a:noFill/>
+          <a:ln/>
+        </p:spPr>
+        <p:txBody>
+          <a:bodyPr wrap="square" lIns="0" tIns="0" rIns="0" bIns="0" rtlCol="0" anchor="t"/>
+          <a:lstStyle/>
+          <a:p>
+            <a:pPr indent="0" marL="0">
+              <a:buNone/>
+            </a:pPr>
+            <a:r>
+              <a:rPr lang="en-US" sz="1300" b="1" dirty="0">
+                <a:solidFill>
+                  <a:srgbClr val="1B64DA"/>
+                </a:solidFill>
+                <a:latin typeface="Arial" pitchFamily="34" charset="0"/>
+                <a:ea typeface="Arial" pitchFamily="34" charset="-122"/>
+                <a:cs typeface="Arial" pitchFamily="34" charset="-120"/>
+              </a:rPr>
+              <a:t>과기정통부 라이징스타 · 처음 봄</a:t>
+            </a:r>
+            <a:endParaRPr lang="en-US" sz="1300" dirty="0"/>
+          </a:p>
+        </p:txBody>
+      </p:sp>
+      <p:sp>
+        <p:nvSpPr>
+          <p:cNvPr id="18" name="Text 16"/>
+          <p:cNvSpPr/>
+          <p:nvPr/>
+        </p:nvSpPr>
+        <p:spPr>
+          <a:xfrm>
+            <a:off x="4114800" y="4507992"/>
+            <a:ext cx="868680" cy="292608"/>
+          </a:xfrm>
+          <a:prstGeom prst="rect">
+            <a:avLst/>
+          </a:prstGeom>
+          <a:noFill/>
+          <a:ln/>
+        </p:spPr>
+        <p:txBody>
+          <a:bodyPr wrap="square" lIns="0" tIns="0" rIns="0" bIns="0" rtlCol="0" anchor="t"/>
+          <a:lstStyle/>
+          <a:p>
+            <a:pPr algn="r" indent="0" marL="0">
+              <a:buNone/>
+            </a:pPr>
+            <a:r>
+              <a:rPr lang="en-US" sz="1400" b="1" dirty="0">
+                <a:solidFill>
+                  <a:srgbClr val="1B64DA"/>
+                </a:solidFill>
+                <a:latin typeface="Arial" pitchFamily="34" charset="0"/>
+                <a:ea typeface="Arial" pitchFamily="34" charset="-122"/>
+                <a:cs typeface="Arial" pitchFamily="34" charset="-120"/>
+              </a:rPr>
+              <a:t>78%</a:t>
+            </a:r>
+            <a:endParaRPr lang="en-US" sz="1400" dirty="0"/>
+          </a:p>
+        </p:txBody>
+      </p:sp>
+      <p:sp>
+        <p:nvSpPr>
+          <p:cNvPr id="19" name="Text 17"/>
+          <p:cNvSpPr/>
+          <p:nvPr/>
+        </p:nvSpPr>
+        <p:spPr>
+          <a:xfrm>
+            <a:off x="5120640" y="4535424"/>
+            <a:ext cx="1188720" cy="256032"/>
+          </a:xfrm>
+          <a:prstGeom prst="rect">
+            <a:avLst/>
+          </a:prstGeom>
+          <a:noFill/>
+          <a:ln/>
+        </p:spPr>
+        <p:txBody>
+          <a:bodyPr wrap="square" lIns="0" tIns="0" rIns="0" bIns="0" rtlCol="0" anchor="t"/>
+          <a:lstStyle/>
+          <a:p>
+            <a:pPr indent="0" marL="0">
+              <a:buNone/>
+            </a:pPr>
+            <a:r>
+              <a:rPr lang="en-US" sz="1050" dirty="0">
+                <a:solidFill>
+                  <a:srgbClr val="8B95A1"/>
+                </a:solidFill>
+                <a:latin typeface="Arial" pitchFamily="34" charset="0"/>
+                <a:ea typeface="Arial" pitchFamily="34" charset="-122"/>
+                <a:cs typeface="Arial" pitchFamily="34" charset="-120"/>
+              </a:rPr>
+              <a:t>76~78</a:t>
+            </a:r>
+            <a:endParaRPr lang="en-US" sz="1050" dirty="0"/>
+          </a:p>
+        </p:txBody>
+      </p:sp>
+      <p:sp>
+        <p:nvSpPr>
+          <p:cNvPr id="20" name="Text 18"/>
+          <p:cNvSpPr/>
+          <p:nvPr/>
+        </p:nvSpPr>
+        <p:spPr>
+          <a:xfrm>
+            <a:off x="822960" y="4937760"/>
+            <a:ext cx="5577840" cy="566928"/>
+          </a:xfrm>
+          <a:prstGeom prst="rect">
+            <a:avLst/>
+          </a:prstGeom>
+          <a:noFill/>
+          <a:ln/>
+        </p:spPr>
+        <p:txBody>
+          <a:bodyPr wrap="square" lIns="0" tIns="0" rIns="0" bIns="0" rtlCol="0" anchor="t"/>
+          <a:lstStyle/>
+          <a:p>
+            <a:pPr indent="0" marL="0">
+              <a:lnSpc>
+                <a:spcPct val="115000"/>
+              </a:lnSpc>
+              <a:buNone/>
+            </a:pPr>
+            <a:r>
+              <a:rPr lang="en-US" sz="1050" dirty="0">
+                <a:solidFill>
                   <a:srgbClr val="4E5968"/>
                 </a:solidFill>
                 <a:latin typeface="Arial" pitchFamily="34" charset="0"/>
                 <a:ea typeface="Arial" pitchFamily="34" charset="-122"/>
                 <a:cs typeface="Arial" pitchFamily="34" charset="-120"/>
               </a:rPr>
-              <a:t>① 개발에 쓴 공고 3건 — 요건 재현율(3회 평균)</a:t>
-            </a:r>
-            <a:endParaRPr lang="en-US" sz="1300" dirty="0"/>
-          </a:p>
-        </p:txBody>
-      </p:sp>
-      <p:sp>
-        <p:nvSpPr>
-          <p:cNvPr id="5" name="Text 3"/>
-          <p:cNvSpPr/>
-          <p:nvPr/>
-        </p:nvSpPr>
-        <p:spPr>
-          <a:xfrm>
-            <a:off x="822960" y="3017520"/>
-            <a:ext cx="2926080" cy="329184"/>
-          </a:xfrm>
-          <a:prstGeom prst="rect">
-            <a:avLst/>
-          </a:prstGeom>
-          <a:noFill/>
-          <a:ln/>
-        </p:spPr>
-        <p:txBody>
-          <a:bodyPr wrap="square" lIns="0" tIns="0" rIns="0" bIns="0" rtlCol="0" anchor="t"/>
-          <a:lstStyle/>
-          <a:p>
-            <a:pPr indent="0" marL="0">
-              <a:buNone/>
-            </a:pPr>
-            <a:r>
-              <a:rPr lang="en-US" sz="1350" b="1" dirty="0">
-                <a:solidFill>
-                  <a:srgbClr val="191F28"/>
-                </a:solidFill>
-                <a:latin typeface="Arial" pitchFamily="34" charset="0"/>
-                <a:ea typeface="Arial" pitchFamily="34" charset="-122"/>
-                <a:cs typeface="Arial" pitchFamily="34" charset="-120"/>
-              </a:rPr>
-              <a:t>우주항공청 · 19쪽</a:t>
-            </a:r>
-            <a:endParaRPr lang="en-US" sz="1350" dirty="0"/>
-          </a:p>
-        </p:txBody>
-      </p:sp>
-      <p:sp>
-        <p:nvSpPr>
-          <p:cNvPr id="6" name="Text 4"/>
-          <p:cNvSpPr/>
-          <p:nvPr/>
-        </p:nvSpPr>
-        <p:spPr>
-          <a:xfrm>
-            <a:off x="3749040" y="3017520"/>
-            <a:ext cx="914400" cy="329184"/>
-          </a:xfrm>
-          <a:prstGeom prst="rect">
-            <a:avLst/>
-          </a:prstGeom>
-          <a:noFill/>
-          <a:ln/>
-        </p:spPr>
-        <p:txBody>
-          <a:bodyPr wrap="square" lIns="0" tIns="0" rIns="0" bIns="0" rtlCol="0" anchor="t"/>
-          <a:lstStyle/>
-          <a:p>
-            <a:pPr algn="r" indent="0" marL="0">
-              <a:buNone/>
-            </a:pPr>
-            <a:r>
-              <a:rPr lang="en-US" sz="1600" b="1" dirty="0">
-                <a:solidFill>
-                  <a:srgbClr val="191F28"/>
-                </a:solidFill>
-                <a:latin typeface="Arial" pitchFamily="34" charset="0"/>
-                <a:ea typeface="Arial" pitchFamily="34" charset="-122"/>
-                <a:cs typeface="Arial" pitchFamily="34" charset="-120"/>
-              </a:rPr>
-              <a:t>85%</a:t>
-            </a:r>
-            <a:endParaRPr lang="en-US" sz="1600" dirty="0"/>
-          </a:p>
-        </p:txBody>
-      </p:sp>
-      <p:sp>
-        <p:nvSpPr>
-          <p:cNvPr id="7" name="Text 5"/>
-          <p:cNvSpPr/>
-          <p:nvPr/>
-        </p:nvSpPr>
-        <p:spPr>
-          <a:xfrm>
-            <a:off x="4754880" y="3063240"/>
-            <a:ext cx="1005840" cy="274320"/>
-          </a:xfrm>
-          <a:prstGeom prst="rect">
-            <a:avLst/>
-          </a:prstGeom>
-          <a:noFill/>
-          <a:ln/>
-        </p:spPr>
-        <p:txBody>
-          <a:bodyPr wrap="square" lIns="0" tIns="0" rIns="0" bIns="0" rtlCol="0" anchor="t"/>
-          <a:lstStyle/>
-          <a:p>
-            <a:pPr indent="0" marL="0">
-              <a:buNone/>
-            </a:pPr>
-            <a:r>
-              <a:rPr lang="en-US" sz="1100" dirty="0">
-                <a:solidFill>
-                  <a:srgbClr val="8B95A1"/>
-                </a:solidFill>
-                <a:latin typeface="Arial" pitchFamily="34" charset="0"/>
-                <a:ea typeface="Arial" pitchFamily="34" charset="-122"/>
-                <a:cs typeface="Arial" pitchFamily="34" charset="-120"/>
-              </a:rPr>
-              <a:t>85~87</a:t>
-            </a:r>
-            <a:endParaRPr lang="en-US" sz="1100" dirty="0"/>
-          </a:p>
-        </p:txBody>
-      </p:sp>
-      <p:sp>
-        <p:nvSpPr>
-          <p:cNvPr id="8" name="Text 6"/>
-          <p:cNvSpPr/>
-          <p:nvPr/>
-        </p:nvSpPr>
-        <p:spPr>
-          <a:xfrm>
-            <a:off x="822960" y="3493008"/>
-            <a:ext cx="2926080" cy="329184"/>
-          </a:xfrm>
-          <a:prstGeom prst="rect">
-            <a:avLst/>
-          </a:prstGeom>
-          <a:noFill/>
-          <a:ln/>
-        </p:spPr>
-        <p:txBody>
-          <a:bodyPr wrap="square" lIns="0" tIns="0" rIns="0" bIns="0" rtlCol="0" anchor="t"/>
-          <a:lstStyle/>
-          <a:p>
-            <a:pPr indent="0" marL="0">
-              <a:buNone/>
-            </a:pPr>
-            <a:r>
-              <a:rPr lang="en-US" sz="1350" b="1" dirty="0">
-                <a:solidFill>
-                  <a:srgbClr val="191F28"/>
-                </a:solidFill>
-                <a:latin typeface="Arial" pitchFamily="34" charset="0"/>
-                <a:ea typeface="Arial" pitchFamily="34" charset="-122"/>
-                <a:cs typeface="Arial" pitchFamily="34" charset="-120"/>
-              </a:rPr>
-              <a:t>산업통상부 · 37쪽</a:t>
-            </a:r>
-            <a:endParaRPr lang="en-US" sz="1350" dirty="0"/>
-          </a:p>
-        </p:txBody>
-      </p:sp>
-      <p:sp>
-        <p:nvSpPr>
-          <p:cNvPr id="9" name="Text 7"/>
-          <p:cNvSpPr/>
-          <p:nvPr/>
-        </p:nvSpPr>
-        <p:spPr>
-          <a:xfrm>
-            <a:off x="3749040" y="3493008"/>
-            <a:ext cx="914400" cy="329184"/>
-          </a:xfrm>
-          <a:prstGeom prst="rect">
-            <a:avLst/>
-          </a:prstGeom>
-          <a:noFill/>
-          <a:ln/>
-        </p:spPr>
-        <p:txBody>
-          <a:bodyPr wrap="square" lIns="0" tIns="0" rIns="0" bIns="0" rtlCol="0" anchor="t"/>
-          <a:lstStyle/>
-          <a:p>
-            <a:pPr algn="r" indent="0" marL="0">
-              <a:buNone/>
-            </a:pPr>
-            <a:r>
-              <a:rPr lang="en-US" sz="1600" b="1" dirty="0">
-                <a:solidFill>
-                  <a:srgbClr val="191F28"/>
-                </a:solidFill>
-                <a:latin typeface="Arial" pitchFamily="34" charset="0"/>
-                <a:ea typeface="Arial" pitchFamily="34" charset="-122"/>
-                <a:cs typeface="Arial" pitchFamily="34" charset="-120"/>
-              </a:rPr>
-              <a:t>93%</a:t>
-            </a:r>
-            <a:endParaRPr lang="en-US" sz="1600" dirty="0"/>
-          </a:p>
-        </p:txBody>
-      </p:sp>
-      <p:sp>
-        <p:nvSpPr>
-          <p:cNvPr id="10" name="Text 8"/>
-          <p:cNvSpPr/>
-          <p:nvPr/>
-        </p:nvSpPr>
-        <p:spPr>
-          <a:xfrm>
-            <a:off x="4754880" y="3538728"/>
-            <a:ext cx="1005840" cy="274320"/>
-          </a:xfrm>
-          <a:prstGeom prst="rect">
-            <a:avLst/>
-          </a:prstGeom>
-          <a:noFill/>
-          <a:ln/>
-        </p:spPr>
-        <p:txBody>
-          <a:bodyPr wrap="square" lIns="0" tIns="0" rIns="0" bIns="0" rtlCol="0" anchor="t"/>
-          <a:lstStyle/>
-          <a:p>
-            <a:pPr indent="0" marL="0">
-              <a:buNone/>
-            </a:pPr>
-            <a:r>
-              <a:rPr lang="en-US" sz="1100" dirty="0">
-                <a:solidFill>
-                  <a:srgbClr val="8B95A1"/>
-                </a:solidFill>
-                <a:latin typeface="Arial" pitchFamily="34" charset="0"/>
-                <a:ea typeface="Arial" pitchFamily="34" charset="-122"/>
-                <a:cs typeface="Arial" pitchFamily="34" charset="-120"/>
-              </a:rPr>
-              <a:t>91~95</a:t>
-            </a:r>
-            <a:endParaRPr lang="en-US" sz="1100" dirty="0"/>
-          </a:p>
-        </p:txBody>
-      </p:sp>
-      <p:sp>
-        <p:nvSpPr>
-          <p:cNvPr id="11" name="Text 9"/>
-          <p:cNvSpPr/>
-          <p:nvPr/>
-        </p:nvSpPr>
-        <p:spPr>
-          <a:xfrm>
-            <a:off x="822960" y="3968496"/>
-            <a:ext cx="2926080" cy="329184"/>
-          </a:xfrm>
-          <a:prstGeom prst="rect">
-            <a:avLst/>
-          </a:prstGeom>
-          <a:noFill/>
-          <a:ln/>
-        </p:spPr>
-        <p:txBody>
-          <a:bodyPr wrap="square" lIns="0" tIns="0" rIns="0" bIns="0" rtlCol="0" anchor="t"/>
-          <a:lstStyle/>
-          <a:p>
-            <a:pPr indent="0" marL="0">
-              <a:buNone/>
-            </a:pPr>
-            <a:r>
-              <a:rPr lang="en-US" sz="1350" b="1" dirty="0">
-                <a:solidFill>
-                  <a:srgbClr val="191F28"/>
-                </a:solidFill>
-                <a:latin typeface="Arial" pitchFamily="34" charset="0"/>
-                <a:ea typeface="Arial" pitchFamily="34" charset="-122"/>
-                <a:cs typeface="Arial" pitchFamily="34" charset="-120"/>
-              </a:rPr>
-              <a:t>NAIS 해커톤 · 5쪽</a:t>
-            </a:r>
-            <a:endParaRPr lang="en-US" sz="1350" dirty="0"/>
-          </a:p>
-        </p:txBody>
-      </p:sp>
-      <p:sp>
-        <p:nvSpPr>
-          <p:cNvPr id="12" name="Text 10"/>
-          <p:cNvSpPr/>
-          <p:nvPr/>
-        </p:nvSpPr>
-        <p:spPr>
-          <a:xfrm>
-            <a:off x="3749040" y="3968496"/>
-            <a:ext cx="914400" cy="329184"/>
-          </a:xfrm>
-          <a:prstGeom prst="rect">
-            <a:avLst/>
-          </a:prstGeom>
-          <a:noFill/>
-          <a:ln/>
-        </p:spPr>
-        <p:txBody>
-          <a:bodyPr wrap="square" lIns="0" tIns="0" rIns="0" bIns="0" rtlCol="0" anchor="t"/>
-          <a:lstStyle/>
-          <a:p>
-            <a:pPr algn="r" indent="0" marL="0">
-              <a:buNone/>
-            </a:pPr>
-            <a:r>
-              <a:rPr lang="en-US" sz="1600" b="1" dirty="0">
-                <a:solidFill>
-                  <a:srgbClr val="191F28"/>
-                </a:solidFill>
-                <a:latin typeface="Arial" pitchFamily="34" charset="0"/>
-                <a:ea typeface="Arial" pitchFamily="34" charset="-122"/>
-                <a:cs typeface="Arial" pitchFamily="34" charset="-120"/>
-              </a:rPr>
-              <a:t>87%</a:t>
-            </a:r>
-            <a:endParaRPr lang="en-US" sz="1600" dirty="0"/>
-          </a:p>
-        </p:txBody>
-      </p:sp>
-      <p:sp>
-        <p:nvSpPr>
-          <p:cNvPr id="13" name="Text 11"/>
-          <p:cNvSpPr/>
-          <p:nvPr/>
-        </p:nvSpPr>
-        <p:spPr>
-          <a:xfrm>
-            <a:off x="4754880" y="4014216"/>
-            <a:ext cx="1005840" cy="274320"/>
-          </a:xfrm>
-          <a:prstGeom prst="rect">
-            <a:avLst/>
-          </a:prstGeom>
-          <a:noFill/>
-          <a:ln/>
-        </p:spPr>
-        <p:txBody>
-          <a:bodyPr wrap="square" lIns="0" tIns="0" rIns="0" bIns="0" rtlCol="0" anchor="t"/>
-          <a:lstStyle/>
-          <a:p>
-            <a:pPr indent="0" marL="0">
-              <a:buNone/>
-            </a:pPr>
-            <a:r>
-              <a:rPr lang="en-US" sz="1100" dirty="0">
-                <a:solidFill>
-                  <a:srgbClr val="8B95A1"/>
-                </a:solidFill>
-                <a:latin typeface="Arial" pitchFamily="34" charset="0"/>
-                <a:ea typeface="Arial" pitchFamily="34" charset="-122"/>
-                <a:cs typeface="Arial" pitchFamily="34" charset="-120"/>
-              </a:rPr>
-              <a:t>85~88</a:t>
-            </a:r>
-            <a:endParaRPr lang="en-US" sz="1100" dirty="0"/>
-          </a:p>
-        </p:txBody>
-      </p:sp>
-      <p:sp>
-        <p:nvSpPr>
-          <p:cNvPr id="14" name="Text 12"/>
-          <p:cNvSpPr/>
-          <p:nvPr/>
-        </p:nvSpPr>
-        <p:spPr>
-          <a:xfrm>
-            <a:off x="822960" y="4526280"/>
-            <a:ext cx="4937760" cy="274320"/>
-          </a:xfrm>
-          <a:prstGeom prst="rect">
-            <a:avLst/>
-          </a:prstGeom>
-          <a:noFill/>
-          <a:ln/>
-        </p:spPr>
-        <p:txBody>
-          <a:bodyPr wrap="square" lIns="0" tIns="0" rIns="0" bIns="0" rtlCol="0" anchor="t"/>
-          <a:lstStyle/>
-          <a:p>
-            <a:pPr indent="0" marL="0">
-              <a:buNone/>
-            </a:pPr>
-            <a:r>
-              <a:rPr lang="en-US" sz="1150" dirty="0">
-                <a:solidFill>
-                  <a:srgbClr val="8B95A1"/>
-                </a:solidFill>
-                <a:latin typeface="Arial" pitchFamily="34" charset="0"/>
-                <a:ea typeface="Arial" pitchFamily="34" charset="-122"/>
-                <a:cs typeface="Arial" pitchFamily="34" charset="-120"/>
-              </a:rPr>
-              <a:t>심사표 배점 일치 3건 모두 100% · 1건 11~15초</a:t>
-            </a:r>
-            <a:endParaRPr lang="en-US" sz="1150" dirty="0"/>
-          </a:p>
-        </p:txBody>
-      </p:sp>
-      <p:sp>
-        <p:nvSpPr>
-          <p:cNvPr id="15" name="Text 13"/>
-          <p:cNvSpPr/>
-          <p:nvPr/>
-        </p:nvSpPr>
-        <p:spPr>
-          <a:xfrm>
-            <a:off x="6309360" y="2606040"/>
-            <a:ext cx="5056632" cy="292608"/>
-          </a:xfrm>
-          <a:prstGeom prst="rect">
-            <a:avLst/>
-          </a:prstGeom>
-          <a:noFill/>
-          <a:ln/>
-        </p:spPr>
-        <p:txBody>
-          <a:bodyPr wrap="square" lIns="0" tIns="0" rIns="0" bIns="0" rtlCol="0" anchor="t"/>
-          <a:lstStyle/>
-          <a:p>
-            <a:pPr indent="0" marL="0">
-              <a:buNone/>
-            </a:pPr>
-            <a:r>
-              <a:rPr lang="en-US" sz="1300" b="1" dirty="0">
-                <a:solidFill>
-                  <a:srgbClr val="3182F6"/>
-                </a:solidFill>
-                <a:latin typeface="Arial" pitchFamily="34" charset="0"/>
-                <a:ea typeface="Arial" pitchFamily="34" charset="-122"/>
-                <a:cs typeface="Arial" pitchFamily="34" charset="-120"/>
-              </a:rPr>
-              <a:t>② 처음 보는 공고 2건 — 링크로 새로 가져와, 정답표를 측정 전에 커밋</a:t>
-            </a:r>
-            <a:endParaRPr lang="en-US" sz="1300" dirty="0"/>
-          </a:p>
-        </p:txBody>
-      </p:sp>
-      <p:sp>
-        <p:nvSpPr>
-          <p:cNvPr id="16" name="Text 14"/>
-          <p:cNvSpPr/>
-          <p:nvPr/>
-        </p:nvSpPr>
-        <p:spPr>
-          <a:xfrm>
-            <a:off x="6309360" y="3017520"/>
-            <a:ext cx="3108960" cy="329184"/>
-          </a:xfrm>
-          <a:prstGeom prst="rect">
-            <a:avLst/>
-          </a:prstGeom>
-          <a:noFill/>
-          <a:ln/>
-        </p:spPr>
-        <p:txBody>
-          <a:bodyPr wrap="square" lIns="0" tIns="0" rIns="0" bIns="0" rtlCol="0" anchor="t"/>
-          <a:lstStyle/>
-          <a:p>
-            <a:pPr indent="0" marL="0">
-              <a:buNone/>
-            </a:pPr>
-            <a:r>
-              <a:rPr lang="en-US" sz="1350" b="1" dirty="0">
-                <a:solidFill>
-                  <a:srgbClr val="191F28"/>
-                </a:solidFill>
-                <a:latin typeface="Arial" pitchFamily="34" charset="0"/>
-                <a:ea typeface="Arial" pitchFamily="34" charset="-122"/>
-                <a:cs typeface="Arial" pitchFamily="34" charset="-120"/>
-              </a:rPr>
-              <a:t>과기정통부 국가과학자 공모</a:t>
-            </a:r>
-            <a:endParaRPr lang="en-US" sz="1350" dirty="0"/>
-          </a:p>
-        </p:txBody>
-      </p:sp>
-      <p:sp>
-        <p:nvSpPr>
-          <p:cNvPr id="17" name="Text 15"/>
-          <p:cNvSpPr/>
-          <p:nvPr/>
-        </p:nvSpPr>
-        <p:spPr>
-          <a:xfrm>
-            <a:off x="9418320" y="3017520"/>
-            <a:ext cx="914400" cy="329184"/>
-          </a:xfrm>
-          <a:prstGeom prst="rect">
-            <a:avLst/>
-          </a:prstGeom>
-          <a:noFill/>
-          <a:ln/>
-        </p:spPr>
-        <p:txBody>
-          <a:bodyPr wrap="square" lIns="0" tIns="0" rIns="0" bIns="0" rtlCol="0" anchor="t"/>
-          <a:lstStyle/>
-          <a:p>
-            <a:pPr algn="r" indent="0" marL="0">
-              <a:buNone/>
-            </a:pPr>
-            <a:r>
-              <a:rPr lang="en-US" sz="1600" b="1" dirty="0">
-                <a:solidFill>
-                  <a:srgbClr val="1B64DA"/>
-                </a:solidFill>
-                <a:latin typeface="Arial" pitchFamily="34" charset="0"/>
-                <a:ea typeface="Arial" pitchFamily="34" charset="-122"/>
-                <a:cs typeface="Arial" pitchFamily="34" charset="-120"/>
-              </a:rPr>
-              <a:t>94%</a:t>
-            </a:r>
-            <a:endParaRPr lang="en-US" sz="1600" dirty="0"/>
-          </a:p>
-        </p:txBody>
-      </p:sp>
-      <p:sp>
-        <p:nvSpPr>
-          <p:cNvPr id="18" name="Text 16"/>
-          <p:cNvSpPr/>
-          <p:nvPr/>
-        </p:nvSpPr>
-        <p:spPr>
-          <a:xfrm>
-            <a:off x="10424160" y="3063240"/>
-            <a:ext cx="941832" cy="274320"/>
-          </a:xfrm>
-          <a:prstGeom prst="rect">
-            <a:avLst/>
-          </a:prstGeom>
-          <a:noFill/>
-          <a:ln/>
-        </p:spPr>
-        <p:txBody>
-          <a:bodyPr wrap="square" lIns="0" tIns="0" rIns="0" bIns="0" rtlCol="0" anchor="t"/>
-          <a:lstStyle/>
-          <a:p>
-            <a:pPr indent="0" marL="0">
-              <a:buNone/>
-            </a:pPr>
-            <a:r>
-              <a:rPr lang="en-US" sz="1100" dirty="0">
-                <a:solidFill>
-                  <a:srgbClr val="8B95A1"/>
-                </a:solidFill>
-                <a:latin typeface="Arial" pitchFamily="34" charset="0"/>
-                <a:ea typeface="Arial" pitchFamily="34" charset="-122"/>
-                <a:cs typeface="Arial" pitchFamily="34" charset="-120"/>
-              </a:rPr>
-              <a:t>92~97 · 심사표 100%</a:t>
-            </a:r>
-            <a:endParaRPr lang="en-US" sz="1100" dirty="0"/>
-          </a:p>
-        </p:txBody>
-      </p:sp>
-      <p:sp>
-        <p:nvSpPr>
-          <p:cNvPr id="19" name="Text 17"/>
-          <p:cNvSpPr/>
-          <p:nvPr/>
-        </p:nvSpPr>
-        <p:spPr>
-          <a:xfrm>
-            <a:off x="6309360" y="3493008"/>
-            <a:ext cx="3108960" cy="329184"/>
-          </a:xfrm>
-          <a:prstGeom prst="rect">
-            <a:avLst/>
-          </a:prstGeom>
-          <a:noFill/>
-          <a:ln/>
-        </p:spPr>
-        <p:txBody>
-          <a:bodyPr wrap="square" lIns="0" tIns="0" rIns="0" bIns="0" rtlCol="0" anchor="t"/>
-          <a:lstStyle/>
-          <a:p>
-            <a:pPr indent="0" marL="0">
-              <a:buNone/>
-            </a:pPr>
-            <a:r>
-              <a:rPr lang="en-US" sz="1350" b="1" dirty="0">
-                <a:solidFill>
-                  <a:srgbClr val="191F28"/>
-                </a:solidFill>
-                <a:latin typeface="Arial" pitchFamily="34" charset="0"/>
-                <a:ea typeface="Arial" pitchFamily="34" charset="-122"/>
-                <a:cs typeface="Arial" pitchFamily="34" charset="-120"/>
-              </a:rPr>
-              <a:t>과기정통부 라이징스타 지정</a:t>
-            </a:r>
-            <a:endParaRPr lang="en-US" sz="1350" dirty="0"/>
-          </a:p>
-        </p:txBody>
-      </p:sp>
-      <p:sp>
-        <p:nvSpPr>
-          <p:cNvPr id="20" name="Text 18"/>
-          <p:cNvSpPr/>
-          <p:nvPr/>
-        </p:nvSpPr>
-        <p:spPr>
-          <a:xfrm>
-            <a:off x="9418320" y="3493008"/>
-            <a:ext cx="914400" cy="329184"/>
-          </a:xfrm>
-          <a:prstGeom prst="rect">
-            <a:avLst/>
-          </a:prstGeom>
-          <a:noFill/>
-          <a:ln/>
-        </p:spPr>
-        <p:txBody>
-          <a:bodyPr wrap="square" lIns="0" tIns="0" rIns="0" bIns="0" rtlCol="0" anchor="t"/>
-          <a:lstStyle/>
-          <a:p>
-            <a:pPr algn="r" indent="0" marL="0">
-              <a:buNone/>
-            </a:pPr>
-            <a:r>
-              <a:rPr lang="en-US" sz="1600" b="1" dirty="0">
-                <a:solidFill>
-                  <a:srgbClr val="1B64DA"/>
-                </a:solidFill>
-                <a:latin typeface="Arial" pitchFamily="34" charset="0"/>
-                <a:ea typeface="Arial" pitchFamily="34" charset="-122"/>
-                <a:cs typeface="Arial" pitchFamily="34" charset="-120"/>
-              </a:rPr>
-              <a:t>78%</a:t>
-            </a:r>
-            <a:endParaRPr lang="en-US" sz="1600" dirty="0"/>
+              <a:t>「처음 봄」= 개발에 안 쓴 공고를 링크로 새로 가져와 정답표를 측정 전에 커밋(3회). 라이징스타에서 놓친 9개 중 6개가 ※주석 조건 → 규칙 1줄 후 89~95%(따로 표기)</a:t>
+            </a:r>
+            <a:endParaRPr lang="en-US" sz="1050" dirty="0"/>
           </a:p>
         </p:txBody>
       </p:sp>
@@ -12425,66 +13205,24 @@
         </p:nvSpPr>
         <p:spPr>
           <a:xfrm>
-            <a:off x="10424160" y="3538728"/>
-            <a:ext cx="941832" cy="274320"/>
-          </a:xfrm>
-          <a:prstGeom prst="rect">
-            <a:avLst/>
-          </a:prstGeom>
-          <a:noFill/>
-          <a:ln/>
-        </p:spPr>
-        <p:txBody>
-          <a:bodyPr wrap="square" lIns="0" tIns="0" rIns="0" bIns="0" rtlCol="0" anchor="t"/>
-          <a:lstStyle/>
-          <a:p>
-            <a:pPr indent="0" marL="0">
-              <a:buNone/>
-            </a:pPr>
-            <a:r>
-              <a:rPr lang="en-US" sz="1100" dirty="0">
-                <a:solidFill>
-                  <a:srgbClr val="8B95A1"/>
-                </a:solidFill>
-                <a:latin typeface="Arial" pitchFamily="34" charset="0"/>
-                <a:ea typeface="Arial" pitchFamily="34" charset="-122"/>
-                <a:cs typeface="Arial" pitchFamily="34" charset="-120"/>
-              </a:rPr>
-              <a:t>76~78 · 심사표 100%</a:t>
-            </a:r>
-            <a:endParaRPr lang="en-US" sz="1100" dirty="0"/>
-          </a:p>
-        </p:txBody>
-      </p:sp>
-      <p:sp>
-        <p:nvSpPr>
-          <p:cNvPr id="22" name="Text 20"/>
-          <p:cNvSpPr/>
-          <p:nvPr/>
-        </p:nvSpPr>
-        <p:spPr>
-          <a:xfrm>
-            <a:off x="6309360" y="4069080"/>
-            <a:ext cx="5056632" cy="685800"/>
-          </a:xfrm>
-          <a:prstGeom prst="rect">
-            <a:avLst/>
-          </a:prstGeom>
-          <a:noFill/>
-          <a:ln/>
-        </p:spPr>
-        <p:txBody>
-          <a:bodyPr wrap="square" lIns="0" tIns="0" rIns="0" bIns="0" rtlCol="0" anchor="t"/>
-          <a:lstStyle/>
-          <a:p>
-            <a:pPr indent="0" marL="0">
-              <a:lnSpc>
-                <a:spcPct val="120000"/>
-              </a:lnSpc>
-              <a:buNone/>
-            </a:pPr>
-            <a:r>
-              <a:rPr lang="en-US" sz="1150" dirty="0">
+            <a:off x="6720840" y="2606040"/>
+            <a:ext cx="4645152" cy="274320"/>
+          </a:xfrm>
+          <a:prstGeom prst="rect">
+            <a:avLst/>
+          </a:prstGeom>
+          <a:noFill/>
+          <a:ln/>
+        </p:spPr>
+        <p:txBody>
+          <a:bodyPr wrap="square" lIns="0" tIns="0" rIns="0" bIns="0" rtlCol="0" anchor="t"/>
+          <a:lstStyle/>
+          <a:p>
+            <a:pPr indent="0" marL="0">
+              <a:buNone/>
+            </a:pPr>
+            <a:r>
+              <a:rPr lang="en-US" sz="1250" b="1" dirty="0">
                 <a:solidFill>
                   <a:srgbClr val="4E5968"/>
                 </a:solidFill>
@@ -12492,47 +13230,31 @@
                 <a:ea typeface="Arial" pitchFamily="34" charset="-122"/>
                 <a:cs typeface="Arial" pitchFamily="34" charset="-120"/>
               </a:rPr>
-              <a:t>라이징스타에서 놓친 9개 중 6개가 ※주석 속 조건(「증빙 시에만 인정」 등) → 일반 규칙 1줄 추가 후 89~95%</a:t>
-            </a:r>
-            <a:endParaRPr lang="en-US" sz="1150" dirty="0"/>
-          </a:p>
-          <a:p>
-            <a:pPr indent="0" marL="0">
-              <a:lnSpc>
-                <a:spcPct val="120000"/>
-              </a:lnSpc>
-              <a:buNone/>
-            </a:pPr>
-            <a:r>
-              <a:rPr lang="en-US" sz="1150" dirty="0">
-                <a:solidFill>
-                  <a:srgbClr val="4E5968"/>
-                </a:solidFill>
-                <a:latin typeface="Arial" pitchFamily="34" charset="0"/>
-                <a:ea typeface="Arial" pitchFamily="34" charset="-122"/>
-                <a:cs typeface="Arial" pitchFamily="34" charset="-120"/>
-              </a:rPr>
-              <a:t>(검증 공고를 본 뒤의 수정이라 위 블라인드 숫자와 따로 표기)</a:t>
-            </a:r>
-            <a:endParaRPr lang="en-US" sz="1150" dirty="0"/>
-          </a:p>
-        </p:txBody>
-      </p:sp>
-      <p:sp>
-        <p:nvSpPr>
-          <p:cNvPr id="23" name="Shape 21"/>
-          <p:cNvSpPr/>
-          <p:nvPr/>
-        </p:nvSpPr>
-        <p:spPr>
-          <a:xfrm>
-            <a:off x="822960" y="5074920"/>
-            <a:ext cx="10543032" cy="0"/>
-          </a:xfrm>
-          <a:prstGeom prst="line">
-            <a:avLst/>
-          </a:prstGeom>
-          <a:noFill/>
+              <a:t>② 제거 실험 — 근거를 지운 초안 5개에서 오탐(안 지운 곳을 짚음)</a:t>
+            </a:r>
+            <a:endParaRPr lang="en-US" sz="1250" dirty="0"/>
+          </a:p>
+        </p:txBody>
+      </p:sp>
+      <p:sp>
+        <p:nvSpPr>
+          <p:cNvPr id="22" name="Shape 20"/>
+          <p:cNvSpPr/>
+          <p:nvPr/>
+        </p:nvSpPr>
+        <p:spPr>
+          <a:xfrm>
+            <a:off x="6720840" y="2971800"/>
+            <a:ext cx="1456944" cy="1783080"/>
+          </a:xfrm>
+          <a:prstGeom prst="roundRect">
+            <a:avLst>
+              <a:gd name="adj" fmla="val 5021"/>
+            </a:avLst>
+          </a:prstGeom>
+          <a:solidFill>
+            <a:srgbClr val="FFFFFF"/>
+          </a:solidFill>
           <a:ln w="12700">
             <a:solidFill>
               <a:srgbClr val="E5E8EB"/>
@@ -12543,30 +13265,72 @@
       </p:sp>
       <p:sp>
         <p:nvSpPr>
+          <p:cNvPr id="23" name="Text 21"/>
+          <p:cNvSpPr/>
+          <p:nvPr/>
+        </p:nvSpPr>
+        <p:spPr>
+          <a:xfrm>
+            <a:off x="6858000" y="3063240"/>
+            <a:ext cx="1182624" cy="457200"/>
+          </a:xfrm>
+          <a:prstGeom prst="rect">
+            <a:avLst/>
+          </a:prstGeom>
+          <a:noFill/>
+          <a:ln/>
+        </p:spPr>
+        <p:txBody>
+          <a:bodyPr wrap="square" lIns="0" tIns="0" rIns="0" bIns="0" rtlCol="0" anchor="t"/>
+          <a:lstStyle/>
+          <a:p>
+            <a:pPr indent="0" marL="0">
+              <a:lnSpc>
+                <a:spcPct val="105000"/>
+              </a:lnSpc>
+              <a:buNone/>
+            </a:pPr>
+            <a:r>
+              <a:rPr lang="en-US" sz="1100" b="1" dirty="0">
+                <a:solidFill>
+                  <a:srgbClr val="191F28"/>
+                </a:solidFill>
+                <a:latin typeface="Arial" pitchFamily="34" charset="0"/>
+                <a:ea typeface="Arial" pitchFamily="34" charset="-122"/>
+                <a:cs typeface="Arial" pitchFamily="34" charset="-120"/>
+              </a:rPr>
+              <a:t>관점 1개</a:t>
+            </a:r>
+            <a:endParaRPr lang="en-US" sz="1100" dirty="0"/>
+          </a:p>
+        </p:txBody>
+      </p:sp>
+      <p:sp>
+        <p:nvSpPr>
           <p:cNvPr id="24" name="Text 22"/>
           <p:cNvSpPr/>
           <p:nvPr/>
         </p:nvSpPr>
         <p:spPr>
           <a:xfrm>
-            <a:off x="822960" y="5257800"/>
-            <a:ext cx="10543032" cy="320040"/>
-          </a:xfrm>
-          <a:prstGeom prst="rect">
-            <a:avLst/>
-          </a:prstGeom>
-          <a:noFill/>
-          <a:ln/>
-        </p:spPr>
-        <p:txBody>
-          <a:bodyPr wrap="square" lIns="0" tIns="0" rIns="0" bIns="0" rtlCol="0" anchor="t"/>
-          <a:lstStyle/>
-          <a:p>
-            <a:pPr indent="0" marL="0">
-              <a:buNone/>
-            </a:pPr>
-            <a:r>
-              <a:rPr lang="en-US" sz="1300" b="1" dirty="0">
+            <a:off x="6858000" y="3520440"/>
+            <a:ext cx="1182624" cy="685800"/>
+          </a:xfrm>
+          <a:prstGeom prst="rect">
+            <a:avLst/>
+          </a:prstGeom>
+          <a:noFill/>
+          <a:ln/>
+        </p:spPr>
+        <p:txBody>
+          <a:bodyPr wrap="square" lIns="0" tIns="0" rIns="0" bIns="0" rtlCol="0" anchor="t"/>
+          <a:lstStyle/>
+          <a:p>
+            <a:pPr indent="0" marL="0">
+              <a:buNone/>
+            </a:pPr>
+            <a:r>
+              <a:rPr lang="en-US" sz="4000" b="1" dirty="0">
                 <a:solidFill>
                   <a:srgbClr val="191F28"/>
                 </a:solidFill>
@@ -12574,15 +13338,452 @@
                 <a:ea typeface="Arial" pitchFamily="34" charset="-122"/>
                 <a:cs typeface="Arial" pitchFamily="34" charset="-120"/>
               </a:rPr>
-              <a:t>링크 입력 실측: 실제 공지 주소 13건 중 13건에서 공고문을 골라 읽음(HWP 첨부·스크립트 다운로드·공고문 2개 합치기 포함) · IRIS 상세 페이지는 미실측</a:t>
-            </a:r>
-            <a:endParaRPr lang="en-US" sz="1300" dirty="0"/>
+              <a:t>3</a:t>
+            </a:r>
+            <a:endParaRPr lang="en-US" sz="4000" dirty="0"/>
           </a:p>
         </p:txBody>
       </p:sp>
       <p:sp>
         <p:nvSpPr>
           <p:cNvPr id="25" name="Text 23"/>
+          <p:cNvSpPr/>
+          <p:nvPr/>
+        </p:nvSpPr>
+        <p:spPr>
+          <a:xfrm>
+            <a:off x="6858000" y="4315968"/>
+            <a:ext cx="1182624" cy="274320"/>
+          </a:xfrm>
+          <a:prstGeom prst="rect">
+            <a:avLst/>
+          </a:prstGeom>
+          <a:noFill/>
+          <a:ln/>
+        </p:spPr>
+        <p:txBody>
+          <a:bodyPr wrap="square" lIns="0" tIns="0" rIns="0" bIns="0" rtlCol="0" anchor="t"/>
+          <a:lstStyle/>
+          <a:p>
+            <a:pPr indent="0" marL="0">
+              <a:buNone/>
+            </a:pPr>
+            <a:r>
+              <a:rPr lang="en-US" sz="1100" dirty="0">
+                <a:solidFill>
+                  <a:srgbClr val="4E5968"/>
+                </a:solidFill>
+                <a:latin typeface="Arial" pitchFamily="34" charset="0"/>
+                <a:ea typeface="Arial" pitchFamily="34" charset="-122"/>
+                <a:cs typeface="Arial" pitchFamily="34" charset="-120"/>
+              </a:rPr>
+              <a:t>짚은 5/5</a:t>
+            </a:r>
+            <a:endParaRPr lang="en-US" sz="1100" dirty="0"/>
+          </a:p>
+        </p:txBody>
+      </p:sp>
+      <p:sp>
+        <p:nvSpPr>
+          <p:cNvPr id="26" name="Shape 24"/>
+          <p:cNvSpPr/>
+          <p:nvPr/>
+        </p:nvSpPr>
+        <p:spPr>
+          <a:xfrm>
+            <a:off x="8314944" y="2971800"/>
+            <a:ext cx="1456944" cy="1783080"/>
+          </a:xfrm>
+          <a:prstGeom prst="roundRect">
+            <a:avLst>
+              <a:gd name="adj" fmla="val 5021"/>
+            </a:avLst>
+          </a:prstGeom>
+          <a:solidFill>
+            <a:srgbClr val="EAF3FF"/>
+          </a:solidFill>
+          <a:ln w="12700">
+            <a:solidFill>
+              <a:srgbClr val="3182F6"/>
+            </a:solidFill>
+            <a:prstDash val="solid"/>
+          </a:ln>
+        </p:spPr>
+      </p:sp>
+      <p:sp>
+        <p:nvSpPr>
+          <p:cNvPr id="27" name="Text 25"/>
+          <p:cNvSpPr/>
+          <p:nvPr/>
+        </p:nvSpPr>
+        <p:spPr>
+          <a:xfrm>
+            <a:off x="8452104" y="3063240"/>
+            <a:ext cx="1182624" cy="457200"/>
+          </a:xfrm>
+          <a:prstGeom prst="rect">
+            <a:avLst/>
+          </a:prstGeom>
+          <a:noFill/>
+          <a:ln/>
+        </p:spPr>
+        <p:txBody>
+          <a:bodyPr wrap="square" lIns="0" tIns="0" rIns="0" bIns="0" rtlCol="0" anchor="t"/>
+          <a:lstStyle/>
+          <a:p>
+            <a:pPr indent="0" marL="0">
+              <a:lnSpc>
+                <a:spcPct val="105000"/>
+              </a:lnSpc>
+              <a:buNone/>
+            </a:pPr>
+            <a:r>
+              <a:rPr lang="en-US" sz="1100" b="1" dirty="0">
+                <a:solidFill>
+                  <a:srgbClr val="191F28"/>
+                </a:solidFill>
+                <a:latin typeface="Arial" pitchFamily="34" charset="0"/>
+                <a:ea typeface="Arial" pitchFamily="34" charset="-122"/>
+                <a:cs typeface="Arial" pitchFamily="34" charset="-120"/>
+              </a:rPr>
+              <a:t>6역할 · 한 회사 모델</a:t>
+            </a:r>
+            <a:endParaRPr lang="en-US" sz="1100" dirty="0"/>
+          </a:p>
+        </p:txBody>
+      </p:sp>
+      <p:sp>
+        <p:nvSpPr>
+          <p:cNvPr id="28" name="Text 26"/>
+          <p:cNvSpPr/>
+          <p:nvPr/>
+        </p:nvSpPr>
+        <p:spPr>
+          <a:xfrm>
+            <a:off x="8452104" y="3520440"/>
+            <a:ext cx="1182624" cy="685800"/>
+          </a:xfrm>
+          <a:prstGeom prst="rect">
+            <a:avLst/>
+          </a:prstGeom>
+          <a:noFill/>
+          <a:ln/>
+        </p:spPr>
+        <p:txBody>
+          <a:bodyPr wrap="square" lIns="0" tIns="0" rIns="0" bIns="0" rtlCol="0" anchor="t"/>
+          <a:lstStyle/>
+          <a:p>
+            <a:pPr indent="0" marL="0">
+              <a:buNone/>
+            </a:pPr>
+            <a:r>
+              <a:rPr lang="en-US" sz="4000" b="1" dirty="0">
+                <a:solidFill>
+                  <a:srgbClr val="1B64DA"/>
+                </a:solidFill>
+                <a:latin typeface="Arial" pitchFamily="34" charset="0"/>
+                <a:ea typeface="Arial" pitchFamily="34" charset="-122"/>
+                <a:cs typeface="Arial" pitchFamily="34" charset="-120"/>
+              </a:rPr>
+              <a:t>0</a:t>
+            </a:r>
+            <a:endParaRPr lang="en-US" sz="4000" dirty="0"/>
+          </a:p>
+        </p:txBody>
+      </p:sp>
+      <p:sp>
+        <p:nvSpPr>
+          <p:cNvPr id="29" name="Text 27"/>
+          <p:cNvSpPr/>
+          <p:nvPr/>
+        </p:nvSpPr>
+        <p:spPr>
+          <a:xfrm>
+            <a:off x="8452104" y="4315968"/>
+            <a:ext cx="1182624" cy="274320"/>
+          </a:xfrm>
+          <a:prstGeom prst="rect">
+            <a:avLst/>
+          </a:prstGeom>
+          <a:noFill/>
+          <a:ln/>
+        </p:spPr>
+        <p:txBody>
+          <a:bodyPr wrap="square" lIns="0" tIns="0" rIns="0" bIns="0" rtlCol="0" anchor="t"/>
+          <a:lstStyle/>
+          <a:p>
+            <a:pPr indent="0" marL="0">
+              <a:buNone/>
+            </a:pPr>
+            <a:r>
+              <a:rPr lang="en-US" sz="1100" dirty="0">
+                <a:solidFill>
+                  <a:srgbClr val="4E5968"/>
+                </a:solidFill>
+                <a:latin typeface="Arial" pitchFamily="34" charset="0"/>
+                <a:ea typeface="Arial" pitchFamily="34" charset="-122"/>
+                <a:cs typeface="Arial" pitchFamily="34" charset="-120"/>
+              </a:rPr>
+              <a:t>짚은 5/5</a:t>
+            </a:r>
+            <a:endParaRPr lang="en-US" sz="1100" dirty="0"/>
+          </a:p>
+        </p:txBody>
+      </p:sp>
+      <p:sp>
+        <p:nvSpPr>
+          <p:cNvPr id="30" name="Shape 28"/>
+          <p:cNvSpPr/>
+          <p:nvPr/>
+        </p:nvSpPr>
+        <p:spPr>
+          <a:xfrm>
+            <a:off x="9909048" y="2971800"/>
+            <a:ext cx="1456944" cy="1783080"/>
+          </a:xfrm>
+          <a:prstGeom prst="roundRect">
+            <a:avLst>
+              <a:gd name="adj" fmla="val 5021"/>
+            </a:avLst>
+          </a:prstGeom>
+          <a:solidFill>
+            <a:srgbClr val="EAF3FF"/>
+          </a:solidFill>
+          <a:ln w="12700">
+            <a:solidFill>
+              <a:srgbClr val="3182F6"/>
+            </a:solidFill>
+            <a:prstDash val="solid"/>
+          </a:ln>
+        </p:spPr>
+      </p:sp>
+      <p:sp>
+        <p:nvSpPr>
+          <p:cNvPr id="31" name="Text 29"/>
+          <p:cNvSpPr/>
+          <p:nvPr/>
+        </p:nvSpPr>
+        <p:spPr>
+          <a:xfrm>
+            <a:off x="10046208" y="3063240"/>
+            <a:ext cx="1182624" cy="457200"/>
+          </a:xfrm>
+          <a:prstGeom prst="rect">
+            <a:avLst/>
+          </a:prstGeom>
+          <a:noFill/>
+          <a:ln/>
+        </p:spPr>
+        <p:txBody>
+          <a:bodyPr wrap="square" lIns="0" tIns="0" rIns="0" bIns="0" rtlCol="0" anchor="t"/>
+          <a:lstStyle/>
+          <a:p>
+            <a:pPr indent="0" marL="0">
+              <a:lnSpc>
+                <a:spcPct val="105000"/>
+              </a:lnSpc>
+              <a:buNone/>
+            </a:pPr>
+            <a:r>
+              <a:rPr lang="en-US" sz="1100" b="1" dirty="0">
+                <a:solidFill>
+                  <a:srgbClr val="191F28"/>
+                </a:solidFill>
+                <a:latin typeface="Arial" pitchFamily="34" charset="0"/>
+                <a:ea typeface="Arial" pitchFamily="34" charset="-122"/>
+                <a:cs typeface="Arial" pitchFamily="34" charset="-120"/>
+              </a:rPr>
+              <a:t>6역할 · 3사 모델</a:t>
+            </a:r>
+            <a:endParaRPr lang="en-US" sz="1100" dirty="0"/>
+          </a:p>
+        </p:txBody>
+      </p:sp>
+      <p:sp>
+        <p:nvSpPr>
+          <p:cNvPr id="32" name="Text 30"/>
+          <p:cNvSpPr/>
+          <p:nvPr/>
+        </p:nvSpPr>
+        <p:spPr>
+          <a:xfrm>
+            <a:off x="10046208" y="3520440"/>
+            <a:ext cx="1182624" cy="685800"/>
+          </a:xfrm>
+          <a:prstGeom prst="rect">
+            <a:avLst/>
+          </a:prstGeom>
+          <a:noFill/>
+          <a:ln/>
+        </p:spPr>
+        <p:txBody>
+          <a:bodyPr wrap="square" lIns="0" tIns="0" rIns="0" bIns="0" rtlCol="0" anchor="t"/>
+          <a:lstStyle/>
+          <a:p>
+            <a:pPr indent="0" marL="0">
+              <a:buNone/>
+            </a:pPr>
+            <a:r>
+              <a:rPr lang="en-US" sz="4000" b="1" dirty="0">
+                <a:solidFill>
+                  <a:srgbClr val="1B64DA"/>
+                </a:solidFill>
+                <a:latin typeface="Arial" pitchFamily="34" charset="0"/>
+                <a:ea typeface="Arial" pitchFamily="34" charset="-122"/>
+                <a:cs typeface="Arial" pitchFamily="34" charset="-120"/>
+              </a:rPr>
+              <a:t>0</a:t>
+            </a:r>
+            <a:endParaRPr lang="en-US" sz="4000" dirty="0"/>
+          </a:p>
+        </p:txBody>
+      </p:sp>
+      <p:sp>
+        <p:nvSpPr>
+          <p:cNvPr id="33" name="Text 31"/>
+          <p:cNvSpPr/>
+          <p:nvPr/>
+        </p:nvSpPr>
+        <p:spPr>
+          <a:xfrm>
+            <a:off x="10046208" y="4315968"/>
+            <a:ext cx="1182624" cy="274320"/>
+          </a:xfrm>
+          <a:prstGeom prst="rect">
+            <a:avLst/>
+          </a:prstGeom>
+          <a:noFill/>
+          <a:ln/>
+        </p:spPr>
+        <p:txBody>
+          <a:bodyPr wrap="square" lIns="0" tIns="0" rIns="0" bIns="0" rtlCol="0" anchor="t"/>
+          <a:lstStyle/>
+          <a:p>
+            <a:pPr indent="0" marL="0">
+              <a:buNone/>
+            </a:pPr>
+            <a:r>
+              <a:rPr lang="en-US" sz="1100" dirty="0">
+                <a:solidFill>
+                  <a:srgbClr val="4E5968"/>
+                </a:solidFill>
+                <a:latin typeface="Arial" pitchFamily="34" charset="0"/>
+                <a:ea typeface="Arial" pitchFamily="34" charset="-122"/>
+                <a:cs typeface="Arial" pitchFamily="34" charset="-120"/>
+              </a:rPr>
+              <a:t>짚은 4/5</a:t>
+            </a:r>
+            <a:endParaRPr lang="en-US" sz="1100" dirty="0"/>
+          </a:p>
+        </p:txBody>
+      </p:sp>
+      <p:sp>
+        <p:nvSpPr>
+          <p:cNvPr id="34" name="Text 32"/>
+          <p:cNvSpPr/>
+          <p:nvPr/>
+        </p:nvSpPr>
+        <p:spPr>
+          <a:xfrm>
+            <a:off x="6720840" y="4937760"/>
+            <a:ext cx="4645152" cy="566928"/>
+          </a:xfrm>
+          <a:prstGeom prst="rect">
+            <a:avLst/>
+          </a:prstGeom>
+          <a:noFill/>
+          <a:ln/>
+        </p:spPr>
+        <p:txBody>
+          <a:bodyPr wrap="square" lIns="0" tIns="0" rIns="0" bIns="0" rtlCol="0" anchor="t"/>
+          <a:lstStyle/>
+          <a:p>
+            <a:pPr indent="0" marL="0">
+              <a:lnSpc>
+                <a:spcPct val="115000"/>
+              </a:lnSpc>
+              <a:buNone/>
+            </a:pPr>
+            <a:r>
+              <a:rPr lang="en-US" sz="1050" dirty="0">
+                <a:solidFill>
+                  <a:srgbClr val="4E5968"/>
+                </a:solidFill>
+                <a:latin typeface="Arial" pitchFamily="34" charset="0"/>
+                <a:ea typeface="Arial" pitchFamily="34" charset="-122"/>
+                <a:cs typeface="Arial" pitchFamily="34" charset="-120"/>
+              </a:rPr>
+              <a:t>관점을 나누자 오탐이 0 — 세 회사 모델을 섞는 효과는 이 표본(5개·각 1회)에선 확인 안 됨(섞는 이유는 가용성)</a:t>
+            </a:r>
+            <a:endParaRPr lang="en-US" sz="1050" dirty="0"/>
+          </a:p>
+        </p:txBody>
+      </p:sp>
+      <p:sp>
+        <p:nvSpPr>
+          <p:cNvPr id="35" name="Shape 33"/>
+          <p:cNvSpPr/>
+          <p:nvPr/>
+        </p:nvSpPr>
+        <p:spPr>
+          <a:xfrm>
+            <a:off x="822960" y="5669280"/>
+            <a:ext cx="10543032" cy="0"/>
+          </a:xfrm>
+          <a:prstGeom prst="line">
+            <a:avLst/>
+          </a:prstGeom>
+          <a:noFill/>
+          <a:ln w="12700">
+            <a:solidFill>
+              <a:srgbClr val="E5E8EB"/>
+            </a:solidFill>
+            <a:prstDash val="solid"/>
+          </a:ln>
+        </p:spPr>
+      </p:sp>
+      <p:sp>
+        <p:nvSpPr>
+          <p:cNvPr id="36" name="Text 34"/>
+          <p:cNvSpPr/>
+          <p:nvPr/>
+        </p:nvSpPr>
+        <p:spPr>
+          <a:xfrm>
+            <a:off x="822960" y="5806440"/>
+            <a:ext cx="10543032" cy="292608"/>
+          </a:xfrm>
+          <a:prstGeom prst="rect">
+            <a:avLst/>
+          </a:prstGeom>
+          <a:noFill/>
+          <a:ln/>
+        </p:spPr>
+        <p:txBody>
+          <a:bodyPr wrap="square" lIns="0" tIns="0" rIns="0" bIns="0" rtlCol="0" anchor="t"/>
+          <a:lstStyle/>
+          <a:p>
+            <a:pPr indent="0" marL="0">
+              <a:buNone/>
+            </a:pPr>
+            <a:r>
+              <a:rPr lang="en-US" sz="1250" b="1" dirty="0">
+                <a:solidFill>
+                  <a:srgbClr val="191F28"/>
+                </a:solidFill>
+                <a:latin typeface="Arial" pitchFamily="34" charset="0"/>
+                <a:ea typeface="Arial" pitchFamily="34" charset="-122"/>
+                <a:cs typeface="Arial" pitchFamily="34" charset="-120"/>
+              </a:rPr>
+              <a:t>링크 입력: 실제 공지 주소 13건 중 13건에서 공고문을 골라 읽음(HWP 첨부·스크립트 다운로드·공고문 2개 합치기) · IRIS 상세는 미실측</a:t>
+            </a:r>
+            <a:endParaRPr lang="en-US" sz="1250" dirty="0"/>
+          </a:p>
+        </p:txBody>
+      </p:sp>
+      <p:sp>
+        <p:nvSpPr>
+          <p:cNvPr id="37" name="Text 35"/>
           <p:cNvSpPr/>
           <p:nvPr/>
         </p:nvSpPr>
@@ -12613,7 +13814,7 @@
                 <a:ea typeface="Arial" pitchFamily="34" charset="-122"/>
                 <a:cs typeface="Arial" pitchFamily="34" charset="-120"/>
               </a:rPr>
-              <a:t>정답표: 파이프라인(OpenAI)과 다른 회사 모델(Claude)이 원문을 읽어 작성 · 검증 정답표 커밋 430ea7d(21:37) 뒤에 측정 · 정밀도(추출 중 정답 비율) 45~84%는 다음 개선 대상</a:t>
+              <a:t>정답표: 파이프라인(OpenAI)과 다른 회사 모델(Claude)이 원문을 읽어 작성 · 검증 정답표 커밋 430ea7d(21:37) 뒤 측정 · 추출 정밀도 45~84%는 다음 개선 대상</a:t>
             </a:r>
             <a:endParaRPr lang="en-US" sz="1000" dirty="0"/>
           </a:p>

--- a/deliver/deck/RFP-to-Fit_루미아.pptx
+++ b/deliver/deck/RFP-to-Fit_루미아.pptx
@@ -4245,7 +4245,7 @@
                 <a:ea typeface="Arial" pitchFamily="34" charset="-122"/>
                 <a:cs typeface="Arial" pitchFamily="34" charset="-120"/>
               </a:rPr>
-              <a:t>검증 가능한 과정 — 커밋 26개·테스트 34개·측정 스크립트 공개</a:t>
+              <a:t>검증 가능한 과정 — 커밋 28개·테스트 34개·측정 스크립트 공개</a:t>
             </a:r>
             <a:endParaRPr lang="en-US" sz="1300" dirty="0"/>
           </a:p>
@@ -5388,7 +5388,7 @@
                 <a:ea typeface="Arial" pitchFamily="34" charset="-122"/>
                 <a:cs typeface="Arial" pitchFamily="34" charset="-120"/>
               </a:rPr>
-              <a:t>커밋 26개 · 코드는 전부 본선 중 커밋(첫 코드 커밋 09/30 19:19, 그 전엔 문서뿐) · 테스트 34개</a:t>
+              <a:t>커밋 28개 · 코드는 전부 본선 중 커밋(첫 코드 커밋 09/30 19:19, 그 전엔 문서뿐) · 테스트 34개</a:t>
             </a:r>
             <a:endParaRPr lang="en-US" sz="1400" dirty="0"/>
           </a:p>
@@ -5621,7 +5621,7 @@
                 <a:ea typeface="Arial" pitchFamily="34" charset="-122"/>
                 <a:cs typeface="Arial" pitchFamily="34" charset="-120"/>
               </a:rPr>
-              <a:t>invisible-sail-shame-preliminary.trycloudflare.com</a:t>
+              <a:t>ryugi62.github.io/rfp-to-fit/</a:t>
             </a:r>
             <a:endParaRPr lang="en-US" sz="950" dirty="0"/>
           </a:p>

--- a/deliver/deck/RFP-to-Fit_루미아.pptx
+++ b/deliver/deck/RFP-to-Fit_루미아.pptx
@@ -1394,7 +1394,7 @@
           <a:p>
             <a:r>
               <a:rPr lang="en-US" dirty="0"/>
-              <a:t>[25초] 심사위원의 판단엔 정답이 없습니다. 그래서 저희는 심사 결과를 맞힌다고 주장하지 않습니다. 대신 신뢰를 네 가지로 정의했습니다. 모든 지적은 공고 원문과 초안 원문 두 끝에 묶여 바로 확인할 수 있고, 원문에 없는 인용은 코드가 걸러내고, 관점이 갈리면 판정하지 않고 사람에게 넘기고, 잴 수 있는 것만 숫자로 말합니다.</a:t>
+              <a:t>[25초] 심사위원의 판단엔 정답이 없습니다. 그래서 저희는 심사 결과를 맞힌다고 주장하지 않습니다. 대신 신뢰를 네 가지로 정의했습니다. 모든 지적은 공고 원문과 초안 원문 두 끝에 묶여 바로 확인할 수 있고, 원문에 없는 인용은 코드가 걸러내고, 관점이 갈리면 판정하지 않고 사람에게 넘기고, 잴 수 있는 것만 숫자로 말합니다. 그리고 확인은 여러분이 직접 하실 수 있습니다. 지적마다 원문 보기를 누르면 공고 쪽과 초안 위치가 강조되고, 맞음·틀림을 누르면 사람이 확인한 정밀도가 쌓입니다.</a:t>
             </a:r>
             <a:endParaRPr lang="en-US" dirty="0"/>
           </a:p>
@@ -4245,7 +4245,7 @@
                 <a:ea typeface="Arial" pitchFamily="34" charset="-122"/>
                 <a:cs typeface="Arial" pitchFamily="34" charset="-120"/>
               </a:rPr>
-              <a:t>검증 가능한 과정 — 커밋 28개·테스트 34개·측정 스크립트 공개</a:t>
+              <a:t>검증 가능한 과정 — 커밋 30개·테스트 35개·측정 스크립트 공개</a:t>
             </a:r>
             <a:endParaRPr lang="en-US" sz="1300" dirty="0"/>
           </a:p>
@@ -5388,7 +5388,7 @@
                 <a:ea typeface="Arial" pitchFamily="34" charset="-122"/>
                 <a:cs typeface="Arial" pitchFamily="34" charset="-120"/>
               </a:rPr>
-              <a:t>커밋 28개 · 코드는 전부 본선 중 커밋(첫 코드 커밋 09/30 19:19, 그 전엔 문서뿐) · 테스트 34개</a:t>
+              <a:t>커밋 30개 · 코드는 전부 본선 중 커밋(첫 코드 커밋 09/30 19:19, 그 전엔 문서뿐) · 테스트 35개</a:t>
             </a:r>
             <a:endParaRPr lang="en-US" sz="1400" dirty="0"/>
           </a:p>
@@ -7579,7 +7579,7 @@
                 <a:ea typeface="Arial" pitchFamily="34" charset="-122"/>
                 <a:cs typeface="Arial" pitchFamily="34" charset="-120"/>
               </a:rPr>
-              <a:t>고칠 곳 · 판단할 곳 · 관점별로 걸리는 점</a:t>
+              <a:t>고칠 곳 · 판단할 곳 → 원문으로 직접 확인</a:t>
             </a:r>
             <a:endParaRPr lang="en-US" sz="1700" dirty="0"/>
           </a:p>
@@ -7618,7 +7618,7 @@
                 <a:ea typeface="Arial" pitchFamily="34" charset="-122"/>
                 <a:cs typeface="Arial" pitchFamily="34" charset="-120"/>
               </a:rPr>
-              <a:t>모든 관점이 근거를 못 찾은 곳, 의견이 갈린 곳, 관점마다 가장 걸리는 점 + 「어떤 근거를 어느 절에」</a:t>
+              <a:t>모든 관점이 근거를 못 찾은 곳, 갈린 곳 + 「어떤 근거를 어느 절에」 — 「원문 보기」로 공고 쪽·초안 위치를 강조해 보고 ✓/✗</a:t>
             </a:r>
             <a:endParaRPr lang="en-US" sz="1150" dirty="0"/>
           </a:p>
@@ -11564,34 +11564,76 @@
         </p:nvSpPr>
         <p:spPr>
           <a:xfrm>
-            <a:off x="822960" y="6126480"/>
-            <a:ext cx="10543032" cy="274320"/>
-          </a:xfrm>
-          <a:prstGeom prst="rect">
-            <a:avLst/>
-          </a:prstGeom>
-          <a:noFill/>
-          <a:ln/>
-        </p:spPr>
-        <p:txBody>
-          <a:bodyPr wrap="square" lIns="0" tIns="0" rIns="0" bIns="0" rtlCol="0" anchor="t"/>
-          <a:lstStyle/>
-          <a:p>
-            <a:pPr indent="0" marL="0">
-              <a:buNone/>
-            </a:pPr>
-            <a:r>
-              <a:rPr lang="en-US" sz="1150" dirty="0">
-                <a:solidFill>
-                  <a:srgbClr val="8B95A1"/>
-                </a:solidFill>
-                <a:latin typeface="Arial" pitchFamily="34" charset="0"/>
-                <a:ea typeface="Arial" pitchFamily="34" charset="-122"/>
-                <a:cs typeface="Arial" pitchFamily="34" charset="-120"/>
-              </a:rPr>
-              <a:t>이 기준은 현장 심사위원 멘토링의 조언(주장 범위를 좁히고, 신뢰의 논리를 스스로 세울 것)을 그대로 따른 것입니다.</a:t>
-            </a:r>
-            <a:endParaRPr lang="en-US" sz="1150" dirty="0"/>
+            <a:off x="822960" y="6108192"/>
+            <a:ext cx="10543032" cy="320040"/>
+          </a:xfrm>
+          <a:prstGeom prst="rect">
+            <a:avLst/>
+          </a:prstGeom>
+          <a:noFill/>
+          <a:ln/>
+        </p:spPr>
+        <p:txBody>
+          <a:bodyPr wrap="square" lIns="0" tIns="0" rIns="0" bIns="0" rtlCol="0" anchor="t"/>
+          <a:lstStyle/>
+          <a:p>
+            <a:pPr indent="0" marL="0">
+              <a:buNone/>
+            </a:pPr>
+            <a:r>
+              <a:rPr lang="en-US" sz="1200" b="1" dirty="0">
+                <a:solidFill>
+                  <a:srgbClr val="1B64DA"/>
+                </a:solidFill>
+                <a:latin typeface="Arial" pitchFamily="34" charset="0"/>
+                <a:ea typeface="Arial" pitchFamily="34" charset="-122"/>
+                <a:cs typeface="Arial" pitchFamily="34" charset="-120"/>
+              </a:rPr>
+              <a:t>현장 검증 — </a:t>
+            </a:r>
+            <a:pPr indent="0" marL="0">
+              <a:buNone/>
+            </a:pPr>
+            <a:r>
+              <a:rPr lang="en-US" sz="1200" dirty="0">
+                <a:solidFill>
+                  <a:srgbClr val="4E5968"/>
+                </a:solidFill>
+                <a:latin typeface="Arial" pitchFamily="34" charset="0"/>
+                <a:ea typeface="Arial" pitchFamily="34" charset="-122"/>
+                <a:cs typeface="Arial" pitchFamily="34" charset="-120"/>
+              </a:rPr>
+              <a:t>지적마다 「원문 보기」(공고 쪽·초안 위치 강조)와 ✓/✗ → 사람이 확인한 정밀도가 화면에 쌓입니다. </a:t>
+            </a:r>
+            <a:pPr indent="0" marL="0">
+              <a:buNone/>
+            </a:pPr>
+            <a:r>
+              <a:rPr lang="en-US" sz="1200" b="1" dirty="0">
+                <a:solidFill>
+                  <a:srgbClr val="1B64DA"/>
+                </a:solidFill>
+                <a:latin typeface="Arial" pitchFamily="34" charset="0"/>
+                <a:ea typeface="Arial" pitchFamily="34" charset="-122"/>
+                <a:cs typeface="Arial" pitchFamily="34" charset="-120"/>
+              </a:rPr>
+              <a:t>보안 모드 — </a:t>
+            </a:r>
+            <a:pPr indent="0" marL="0">
+              <a:buNone/>
+            </a:pPr>
+            <a:r>
+              <a:rPr lang="en-US" sz="1200" dirty="0">
+                <a:solidFill>
+                  <a:srgbClr val="4E5968"/>
+                </a:solidFill>
+                <a:latin typeface="Arial" pitchFamily="34" charset="0"/>
+                <a:ea typeface="Arial" pitchFamily="34" charset="-122"/>
+                <a:cs typeface="Arial" pitchFamily="34" charset="-120"/>
+              </a:rPr>
+              <a:t>초안은 국산 모델에만, 해외 검색 끔.</a:t>
+            </a:r>
+            <a:endParaRPr lang="en-US" sz="1200" dirty="0"/>
           </a:p>
         </p:txBody>
       </p:sp>

--- a/deliver/deck/RFP-to-Fit_루미아.pptx
+++ b/deliver/deck/RFP-to-Fit_루미아.pptx
@@ -1306,7 +1306,7 @@
           <a:p>
             <a:r>
               <a:rPr lang="en-US" dirty="0"/>
-              <a:t>[25초] 저희 구조의 핵심은 LLM을 판사로 쓰지 않는다는 겁니다. LLM은 증인처럼 증거, 즉 원문 인용만 냅니다. 채택할지, 몇 관점이 동의했는지, 판정을 보류할지는 결정론 코드가 정합니다. 흐름은 LangGraph 상태 그래프 한 장입니다. 점검 질문, 선행 탐색, 여섯 명 병렬 채점까지 가고, 인용 검사에서 원문에 없는 판정이 있으면 그 평가위원에게만 한 번 되돌아가 다시 묻습니다. 없으면 바로 집계로 갑니다. 한 회사 모델이 한도에 걸리거나 멈추면 다음 모델로 자동으로 넘어가고, 실제로 판정한 모델은 기록에 남깁니다.</a:t>
+              <a:t>[25초] 저희 구조의 핵심은 LLM을 판사로 쓰지 않는다는 겁니다. LLM은 증인처럼 증거, 즉 원문 인용만 냅니다. 인용이 원문에 있는지는 코드가 보고, 그 인용이 정말 근거가 되는지는 다른 회사 모델이 반대 심문합니다. 채택·집계·보류는 결정론 코드가 정합니다. 흐름은 LangGraph 상태 그래프 한 장입니다. 점검 질문, 선행 탐색, 여섯 명 병렬 채점까지 가고, 인용 검사에서 원문에 없는 판정이 있으면 그 평가위원에게만 한 번 되돌아가 다시 묻습니다. 없으면 바로 집계로 갑니다. 한 회사 모델이 한도에 걸리거나 멈추면 다음 모델로 자동으로 넘어가고, 실제로 판정한 모델은 기록에 남깁니다.</a:t>
             </a:r>
             <a:endParaRPr lang="en-US" dirty="0"/>
           </a:p>
@@ -4245,7 +4245,7 @@
                 <a:ea typeface="Arial" pitchFamily="34" charset="-122"/>
                 <a:cs typeface="Arial" pitchFamily="34" charset="-120"/>
               </a:rPr>
-              <a:t>검증 가능한 과정 — 커밋 30개·테스트 35개·측정 스크립트 공개</a:t>
+              <a:t>검증 가능한 과정 — 커밋 33개·테스트 37개·측정 스크립트 공개</a:t>
             </a:r>
             <a:endParaRPr lang="en-US" sz="1300" dirty="0"/>
           </a:p>
@@ -5388,7 +5388,7 @@
                 <a:ea typeface="Arial" pitchFamily="34" charset="-122"/>
                 <a:cs typeface="Arial" pitchFamily="34" charset="-120"/>
               </a:rPr>
-              <a:t>커밋 30개 · 코드는 전부 본선 중 커밋(첫 코드 커밋 09/30 19:19, 그 전엔 문서뿐) · 테스트 35개</a:t>
+              <a:t>커밋 33개 · 코드는 전부 본선 중 커밋(첫 코드 커밋 09/30 19:19, 그 전엔 문서뿐) · 테스트 37개</a:t>
             </a:r>
             <a:endParaRPr lang="en-US" sz="1400" dirty="0"/>
           </a:p>
@@ -9041,7 +9041,7 @@
         <p:spPr>
           <a:xfrm>
             <a:off x="822960" y="2880360"/>
-            <a:ext cx="1389888" cy="1051560"/>
+            <a:ext cx="1207008" cy="1051560"/>
           </a:xfrm>
           <a:prstGeom prst="roundRect">
             <a:avLst>
@@ -9068,7 +9068,7 @@
         <p:spPr>
           <a:xfrm>
             <a:off x="914400" y="2971800"/>
-            <a:ext cx="1207008" cy="201168"/>
+            <a:ext cx="1024128" cy="201168"/>
           </a:xfrm>
           <a:prstGeom prst="rect">
             <a:avLst/>
@@ -9107,7 +9107,7 @@
         <p:spPr>
           <a:xfrm>
             <a:off x="914400" y="3191256"/>
-            <a:ext cx="1207008" cy="384048"/>
+            <a:ext cx="1024128" cy="384048"/>
           </a:xfrm>
           <a:prstGeom prst="rect">
             <a:avLst/>
@@ -9146,7 +9146,7 @@
         <p:spPr>
           <a:xfrm>
             <a:off x="914400" y="3593592"/>
-            <a:ext cx="1207008" cy="292608"/>
+            <a:ext cx="1024128" cy="292608"/>
           </a:xfrm>
           <a:prstGeom prst="rect">
             <a:avLst/>
@@ -9184,8 +9184,8 @@
         </p:nvSpPr>
         <p:spPr>
           <a:xfrm>
-            <a:off x="2231136" y="3406140"/>
-            <a:ext cx="99060" cy="0"/>
+            <a:off x="2048256" y="3406140"/>
+            <a:ext cx="90134" cy="0"/>
           </a:xfrm>
           <a:prstGeom prst="line">
             <a:avLst/>
@@ -9208,8 +9208,8 @@
         </p:nvSpPr>
         <p:spPr>
           <a:xfrm>
-            <a:off x="2348484" y="2880360"/>
-            <a:ext cx="1389888" cy="1051560"/>
+            <a:off x="2156678" y="2880360"/>
+            <a:ext cx="1207008" cy="1051560"/>
           </a:xfrm>
           <a:prstGeom prst="roundRect">
             <a:avLst>
@@ -9235,8 +9235,8 @@
         </p:nvSpPr>
         <p:spPr>
           <a:xfrm>
-            <a:off x="2439924" y="2971800"/>
-            <a:ext cx="1207008" cy="201168"/>
+            <a:off x="2248118" y="2971800"/>
+            <a:ext cx="1024128" cy="201168"/>
           </a:xfrm>
           <a:prstGeom prst="rect">
             <a:avLst/>
@@ -9274,8 +9274,8 @@
         </p:nvSpPr>
         <p:spPr>
           <a:xfrm>
-            <a:off x="2439924" y="3191256"/>
-            <a:ext cx="1207008" cy="384048"/>
+            <a:off x="2248118" y="3191256"/>
+            <a:ext cx="1024128" cy="384048"/>
           </a:xfrm>
           <a:prstGeom prst="rect">
             <a:avLst/>
@@ -9313,8 +9313,8 @@
         </p:nvSpPr>
         <p:spPr>
           <a:xfrm>
-            <a:off x="2439924" y="3593592"/>
-            <a:ext cx="1207008" cy="292608"/>
+            <a:off x="2248118" y="3593592"/>
+            <a:ext cx="1024128" cy="292608"/>
           </a:xfrm>
           <a:prstGeom prst="rect">
             <a:avLst/>
@@ -9352,8 +9352,8 @@
         </p:nvSpPr>
         <p:spPr>
           <a:xfrm>
-            <a:off x="3756660" y="3406140"/>
-            <a:ext cx="99060" cy="0"/>
+            <a:off x="3381974" y="3406140"/>
+            <a:ext cx="90134" cy="0"/>
           </a:xfrm>
           <a:prstGeom prst="line">
             <a:avLst/>
@@ -9376,8 +9376,8 @@
         </p:nvSpPr>
         <p:spPr>
           <a:xfrm>
-            <a:off x="3874008" y="2880360"/>
-            <a:ext cx="1389888" cy="1051560"/>
+            <a:off x="3490395" y="2880360"/>
+            <a:ext cx="1207008" cy="1051560"/>
           </a:xfrm>
           <a:prstGeom prst="roundRect">
             <a:avLst>
@@ -9403,8 +9403,8 @@
         </p:nvSpPr>
         <p:spPr>
           <a:xfrm>
-            <a:off x="3965448" y="2971800"/>
-            <a:ext cx="1207008" cy="201168"/>
+            <a:off x="3581835" y="2971800"/>
+            <a:ext cx="1024128" cy="201168"/>
           </a:xfrm>
           <a:prstGeom prst="rect">
             <a:avLst/>
@@ -9442,8 +9442,8 @@
         </p:nvSpPr>
         <p:spPr>
           <a:xfrm>
-            <a:off x="3965448" y="3191256"/>
-            <a:ext cx="1207008" cy="384048"/>
+            <a:off x="3581835" y="3191256"/>
+            <a:ext cx="1024128" cy="384048"/>
           </a:xfrm>
           <a:prstGeom prst="rect">
             <a:avLst/>
@@ -9467,7 +9467,7 @@
                 <a:ea typeface="Arial" pitchFamily="34" charset="-122"/>
                 <a:cs typeface="Arial" pitchFamily="34" charset="-120"/>
               </a:rPr>
-              <a:t>6명 독립 채점</a:t>
+              <a:t>관점 6개 채점</a:t>
             </a:r>
             <a:endParaRPr lang="en-US" sz="1300" dirty="0"/>
           </a:p>
@@ -9481,8 +9481,8 @@
         </p:nvSpPr>
         <p:spPr>
           <a:xfrm>
-            <a:off x="3965448" y="3593592"/>
-            <a:ext cx="1207008" cy="292608"/>
+            <a:off x="3581835" y="3593592"/>
+            <a:ext cx="1024128" cy="292608"/>
           </a:xfrm>
           <a:prstGeom prst="rect">
             <a:avLst/>
@@ -9520,8 +9520,8 @@
         </p:nvSpPr>
         <p:spPr>
           <a:xfrm>
-            <a:off x="5282184" y="3406140"/>
-            <a:ext cx="99060" cy="0"/>
+            <a:off x="4715691" y="3406140"/>
+            <a:ext cx="90134" cy="0"/>
           </a:xfrm>
           <a:prstGeom prst="line">
             <a:avLst/>
@@ -9544,8 +9544,8 @@
         </p:nvSpPr>
         <p:spPr>
           <a:xfrm>
-            <a:off x="5399532" y="2880360"/>
-            <a:ext cx="1389888" cy="1051560"/>
+            <a:off x="4824113" y="2880360"/>
+            <a:ext cx="1207008" cy="1051560"/>
           </a:xfrm>
           <a:prstGeom prst="roundRect">
             <a:avLst>
@@ -9571,8 +9571,8 @@
         </p:nvSpPr>
         <p:spPr>
           <a:xfrm>
-            <a:off x="5490972" y="2971800"/>
-            <a:ext cx="1207008" cy="201168"/>
+            <a:off x="4915553" y="2971800"/>
+            <a:ext cx="1024128" cy="201168"/>
           </a:xfrm>
           <a:prstGeom prst="rect">
             <a:avLst/>
@@ -9610,8 +9610,8 @@
         </p:nvSpPr>
         <p:spPr>
           <a:xfrm>
-            <a:off x="5490972" y="3191256"/>
-            <a:ext cx="1207008" cy="384048"/>
+            <a:off x="4915553" y="3191256"/>
+            <a:ext cx="1024128" cy="384048"/>
           </a:xfrm>
           <a:prstGeom prst="rect">
             <a:avLst/>
@@ -9649,8 +9649,8 @@
         </p:nvSpPr>
         <p:spPr>
           <a:xfrm>
-            <a:off x="5490972" y="3593592"/>
-            <a:ext cx="1207008" cy="292608"/>
+            <a:off x="4915553" y="3593592"/>
+            <a:ext cx="1024128" cy="292608"/>
           </a:xfrm>
           <a:prstGeom prst="rect">
             <a:avLst/>
@@ -9688,8 +9688,8 @@
         </p:nvSpPr>
         <p:spPr>
           <a:xfrm>
-            <a:off x="6925056" y="2880360"/>
-            <a:ext cx="1389888" cy="1051560"/>
+            <a:off x="6157831" y="2880360"/>
+            <a:ext cx="1207008" cy="1051560"/>
           </a:xfrm>
           <a:prstGeom prst="roundRect">
             <a:avLst>
@@ -9715,8 +9715,8 @@
         </p:nvSpPr>
         <p:spPr>
           <a:xfrm>
-            <a:off x="7016496" y="2971800"/>
-            <a:ext cx="1207008" cy="201168"/>
+            <a:off x="6249271" y="2971800"/>
+            <a:ext cx="1024128" cy="201168"/>
           </a:xfrm>
           <a:prstGeom prst="rect">
             <a:avLst/>
@@ -9754,8 +9754,8 @@
         </p:nvSpPr>
         <p:spPr>
           <a:xfrm>
-            <a:off x="7016496" y="3191256"/>
-            <a:ext cx="1207008" cy="384048"/>
+            <a:off x="6249271" y="3191256"/>
+            <a:ext cx="1024128" cy="384048"/>
           </a:xfrm>
           <a:prstGeom prst="rect">
             <a:avLst/>
@@ -9779,7 +9779,7 @@
                 <a:ea typeface="Arial" pitchFamily="34" charset="-122"/>
                 <a:cs typeface="Arial" pitchFamily="34" charset="-120"/>
               </a:rPr>
-              <a:t>재질의(최대 1회)</a:t>
+              <a:t>재질의 1회</a:t>
             </a:r>
             <a:endParaRPr lang="en-US" sz="1300" dirty="0"/>
           </a:p>
@@ -9793,8 +9793,8 @@
         </p:nvSpPr>
         <p:spPr>
           <a:xfrm>
-            <a:off x="7016496" y="3593592"/>
-            <a:ext cx="1207008" cy="292608"/>
+            <a:off x="6249271" y="3593592"/>
+            <a:ext cx="1024128" cy="292608"/>
           </a:xfrm>
           <a:prstGeom prst="rect">
             <a:avLst/>
@@ -9832,8 +9832,8 @@
         </p:nvSpPr>
         <p:spPr>
           <a:xfrm>
-            <a:off x="8333232" y="3406140"/>
-            <a:ext cx="99060" cy="0"/>
+            <a:off x="7383127" y="3406140"/>
+            <a:ext cx="90134" cy="0"/>
           </a:xfrm>
           <a:prstGeom prst="line">
             <a:avLst/>
@@ -9856,8 +9856,176 @@
         </p:nvSpPr>
         <p:spPr>
           <a:xfrm>
-            <a:off x="8450580" y="2880360"/>
-            <a:ext cx="1389888" cy="1051560"/>
+            <a:off x="7491549" y="2880360"/>
+            <a:ext cx="1207008" cy="1051560"/>
+          </a:xfrm>
+          <a:prstGeom prst="roundRect">
+            <a:avLst>
+              <a:gd name="adj" fmla="val 6957"/>
+            </a:avLst>
+          </a:prstGeom>
+          <a:solidFill>
+            <a:srgbClr val="EAF3FF"/>
+          </a:solidFill>
+          <a:ln w="15875">
+            <a:solidFill>
+              <a:srgbClr val="3182F6"/>
+            </a:solidFill>
+            <a:prstDash val="solid"/>
+          </a:ln>
+        </p:spPr>
+      </p:sp>
+      <p:sp>
+        <p:nvSpPr>
+          <p:cNvPr id="29" name="Text 27"/>
+          <p:cNvSpPr/>
+          <p:nvPr/>
+        </p:nvSpPr>
+        <p:spPr>
+          <a:xfrm>
+            <a:off x="7582989" y="2971800"/>
+            <a:ext cx="1024128" cy="201168"/>
+          </a:xfrm>
+          <a:prstGeom prst="rect">
+            <a:avLst/>
+          </a:prstGeom>
+          <a:noFill/>
+          <a:ln/>
+        </p:spPr>
+        <p:txBody>
+          <a:bodyPr wrap="square" lIns="0" tIns="0" rIns="0" bIns="0" rtlCol="0" anchor="t"/>
+          <a:lstStyle/>
+          <a:p>
+            <a:pPr indent="0" marL="0">
+              <a:buNone/>
+            </a:pPr>
+            <a:r>
+              <a:rPr lang="en-US" sz="900" dirty="0">
+                <a:solidFill>
+                  <a:srgbClr val="8B95A1"/>
+                </a:solidFill>
+                <a:latin typeface="Arial" pitchFamily="34" charset="0"/>
+                <a:ea typeface="Arial" pitchFamily="34" charset="-122"/>
+                <a:cs typeface="Arial" pitchFamily="34" charset="-120"/>
+              </a:rPr>
+              <a:t>cross</a:t>
+            </a:r>
+            <a:endParaRPr lang="en-US" sz="900" dirty="0"/>
+          </a:p>
+        </p:txBody>
+      </p:sp>
+      <p:sp>
+        <p:nvSpPr>
+          <p:cNvPr id="30" name="Text 28"/>
+          <p:cNvSpPr/>
+          <p:nvPr/>
+        </p:nvSpPr>
+        <p:spPr>
+          <a:xfrm>
+            <a:off x="7582989" y="3191256"/>
+            <a:ext cx="1024128" cy="384048"/>
+          </a:xfrm>
+          <a:prstGeom prst="rect">
+            <a:avLst/>
+          </a:prstGeom>
+          <a:noFill/>
+          <a:ln/>
+        </p:spPr>
+        <p:txBody>
+          <a:bodyPr wrap="square" lIns="0" tIns="0" rIns="0" bIns="0" rtlCol="0" anchor="t"/>
+          <a:lstStyle/>
+          <a:p>
+            <a:pPr indent="0" marL="0">
+              <a:buNone/>
+            </a:pPr>
+            <a:r>
+              <a:rPr lang="en-US" sz="1300" b="1" dirty="0">
+                <a:solidFill>
+                  <a:srgbClr val="1B64DA"/>
+                </a:solidFill>
+                <a:latin typeface="Arial" pitchFamily="34" charset="0"/>
+                <a:ea typeface="Arial" pitchFamily="34" charset="-122"/>
+                <a:cs typeface="Arial" pitchFamily="34" charset="-120"/>
+              </a:rPr>
+              <a:t>교차 신문</a:t>
+            </a:r>
+            <a:endParaRPr lang="en-US" sz="1300" dirty="0"/>
+          </a:p>
+        </p:txBody>
+      </p:sp>
+      <p:sp>
+        <p:nvSpPr>
+          <p:cNvPr id="31" name="Text 29"/>
+          <p:cNvSpPr/>
+          <p:nvPr/>
+        </p:nvSpPr>
+        <p:spPr>
+          <a:xfrm>
+            <a:off x="7582989" y="3593592"/>
+            <a:ext cx="1024128" cy="292608"/>
+          </a:xfrm>
+          <a:prstGeom prst="rect">
+            <a:avLst/>
+          </a:prstGeom>
+          <a:noFill/>
+          <a:ln/>
+        </p:spPr>
+        <p:txBody>
+          <a:bodyPr wrap="square" lIns="0" tIns="0" rIns="0" bIns="0" rtlCol="0" anchor="t"/>
+          <a:lstStyle/>
+          <a:p>
+            <a:pPr indent="0" marL="0">
+              <a:buNone/>
+            </a:pPr>
+            <a:r>
+              <a:rPr lang="en-US" sz="950" dirty="0">
+                <a:solidFill>
+                  <a:srgbClr val="4E5968"/>
+                </a:solidFill>
+                <a:latin typeface="Arial" pitchFamily="34" charset="0"/>
+                <a:ea typeface="Arial" pitchFamily="34" charset="-122"/>
+                <a:cs typeface="Arial" pitchFamily="34" charset="-120"/>
+              </a:rPr>
+              <a:t>다른 회사 모델</a:t>
+            </a:r>
+            <a:endParaRPr lang="en-US" sz="950" dirty="0"/>
+          </a:p>
+        </p:txBody>
+      </p:sp>
+      <p:sp>
+        <p:nvSpPr>
+          <p:cNvPr id="32" name="Shape 30"/>
+          <p:cNvSpPr/>
+          <p:nvPr/>
+        </p:nvSpPr>
+        <p:spPr>
+          <a:xfrm>
+            <a:off x="8716845" y="3406140"/>
+            <a:ext cx="90134" cy="0"/>
+          </a:xfrm>
+          <a:prstGeom prst="line">
+            <a:avLst/>
+          </a:prstGeom>
+          <a:noFill/>
+          <a:ln w="15875">
+            <a:solidFill>
+              <a:srgbClr val="8B95A1"/>
+            </a:solidFill>
+            <a:prstDash val="solid"/>
+            <a:tailEnd type="triangle"/>
+          </a:ln>
+        </p:spPr>
+      </p:sp>
+      <p:sp>
+        <p:nvSpPr>
+          <p:cNvPr id="33" name="Shape 31"/>
+          <p:cNvSpPr/>
+          <p:nvPr/>
+        </p:nvSpPr>
+        <p:spPr>
+          <a:xfrm>
+            <a:off x="8825266" y="2880360"/>
+            <a:ext cx="1207008" cy="1051560"/>
           </a:xfrm>
           <a:prstGeom prst="roundRect">
             <a:avLst>
@@ -9877,14 +10045,14 @@
       </p:sp>
       <p:sp>
         <p:nvSpPr>
-          <p:cNvPr id="29" name="Text 27"/>
-          <p:cNvSpPr/>
-          <p:nvPr/>
-        </p:nvSpPr>
-        <p:spPr>
-          <a:xfrm>
-            <a:off x="8542020" y="2971800"/>
-            <a:ext cx="1207008" cy="201168"/>
+          <p:cNvPr id="34" name="Text 32"/>
+          <p:cNvSpPr/>
+          <p:nvPr/>
+        </p:nvSpPr>
+        <p:spPr>
+          <a:xfrm>
+            <a:off x="8916706" y="2971800"/>
+            <a:ext cx="1024128" cy="201168"/>
           </a:xfrm>
           <a:prstGeom prst="rect">
             <a:avLst/>
@@ -9916,14 +10084,14 @@
       </p:sp>
       <p:sp>
         <p:nvSpPr>
-          <p:cNvPr id="30" name="Text 28"/>
-          <p:cNvSpPr/>
-          <p:nvPr/>
-        </p:nvSpPr>
-        <p:spPr>
-          <a:xfrm>
-            <a:off x="8542020" y="3191256"/>
-            <a:ext cx="1207008" cy="384048"/>
+          <p:cNvPr id="35" name="Text 33"/>
+          <p:cNvSpPr/>
+          <p:nvPr/>
+        </p:nvSpPr>
+        <p:spPr>
+          <a:xfrm>
+            <a:off x="8916706" y="3191256"/>
+            <a:ext cx="1024128" cy="384048"/>
           </a:xfrm>
           <a:prstGeom prst="rect">
             <a:avLst/>
@@ -9955,14 +10123,14 @@
       </p:sp>
       <p:sp>
         <p:nvSpPr>
-          <p:cNvPr id="31" name="Text 29"/>
-          <p:cNvSpPr/>
-          <p:nvPr/>
-        </p:nvSpPr>
-        <p:spPr>
-          <a:xfrm>
-            <a:off x="8542020" y="3593592"/>
-            <a:ext cx="1207008" cy="292608"/>
+          <p:cNvPr id="36" name="Text 34"/>
+          <p:cNvSpPr/>
+          <p:nvPr/>
+        </p:nvSpPr>
+        <p:spPr>
+          <a:xfrm>
+            <a:off x="8916706" y="3593592"/>
+            <a:ext cx="1024128" cy="292608"/>
           </a:xfrm>
           <a:prstGeom prst="rect">
             <a:avLst/>
@@ -9994,14 +10162,14 @@
       </p:sp>
       <p:sp>
         <p:nvSpPr>
-          <p:cNvPr id="32" name="Shape 30"/>
-          <p:cNvSpPr/>
-          <p:nvPr/>
-        </p:nvSpPr>
-        <p:spPr>
-          <a:xfrm>
-            <a:off x="9858756" y="3406140"/>
-            <a:ext cx="99060" cy="0"/>
+          <p:cNvPr id="37" name="Shape 35"/>
+          <p:cNvSpPr/>
+          <p:nvPr/>
+        </p:nvSpPr>
+        <p:spPr>
+          <a:xfrm>
+            <a:off x="10050562" y="3406140"/>
+            <a:ext cx="90134" cy="0"/>
           </a:xfrm>
           <a:prstGeom prst="line">
             <a:avLst/>
@@ -10018,14 +10186,14 @@
       </p:sp>
       <p:sp>
         <p:nvSpPr>
-          <p:cNvPr id="33" name="Shape 31"/>
-          <p:cNvSpPr/>
-          <p:nvPr/>
-        </p:nvSpPr>
-        <p:spPr>
-          <a:xfrm>
-            <a:off x="9976104" y="2880360"/>
-            <a:ext cx="1389888" cy="1051560"/>
+          <p:cNvPr id="38" name="Shape 36"/>
+          <p:cNvSpPr/>
+          <p:nvPr/>
+        </p:nvSpPr>
+        <p:spPr>
+          <a:xfrm>
+            <a:off x="10158984" y="2880360"/>
+            <a:ext cx="1207008" cy="1051560"/>
           </a:xfrm>
           <a:prstGeom prst="roundRect">
             <a:avLst>
@@ -10045,14 +10213,14 @@
       </p:sp>
       <p:sp>
         <p:nvSpPr>
-          <p:cNvPr id="34" name="Text 32"/>
-          <p:cNvSpPr/>
-          <p:nvPr/>
-        </p:nvSpPr>
-        <p:spPr>
-          <a:xfrm>
-            <a:off x="10067544" y="2971800"/>
-            <a:ext cx="1207008" cy="201168"/>
+          <p:cNvPr id="39" name="Text 37"/>
+          <p:cNvSpPr/>
+          <p:nvPr/>
+        </p:nvSpPr>
+        <p:spPr>
+          <a:xfrm>
+            <a:off x="10250424" y="2971800"/>
+            <a:ext cx="1024128" cy="201168"/>
           </a:xfrm>
           <a:prstGeom prst="rect">
             <a:avLst/>
@@ -10084,14 +10252,14 @@
       </p:sp>
       <p:sp>
         <p:nvSpPr>
-          <p:cNvPr id="35" name="Text 33"/>
-          <p:cNvSpPr/>
-          <p:nvPr/>
-        </p:nvSpPr>
-        <p:spPr>
-          <a:xfrm>
-            <a:off x="10067544" y="3191256"/>
-            <a:ext cx="1207008" cy="384048"/>
+          <p:cNvPr id="40" name="Text 38"/>
+          <p:cNvSpPr/>
+          <p:nvPr/>
+        </p:nvSpPr>
+        <p:spPr>
+          <a:xfrm>
+            <a:off x="10250424" y="3191256"/>
+            <a:ext cx="1024128" cy="384048"/>
           </a:xfrm>
           <a:prstGeom prst="rect">
             <a:avLst/>
@@ -10123,14 +10291,14 @@
       </p:sp>
       <p:sp>
         <p:nvSpPr>
-          <p:cNvPr id="36" name="Text 34"/>
-          <p:cNvSpPr/>
-          <p:nvPr/>
-        </p:nvSpPr>
-        <p:spPr>
-          <a:xfrm>
-            <a:off x="10067544" y="3593592"/>
-            <a:ext cx="1207008" cy="292608"/>
+          <p:cNvPr id="41" name="Text 39"/>
+          <p:cNvSpPr/>
+          <p:nvPr/>
+        </p:nvSpPr>
+        <p:spPr>
+          <a:xfrm>
+            <a:off x="10250424" y="3593592"/>
+            <a:ext cx="1024128" cy="292608"/>
           </a:xfrm>
           <a:prstGeom prst="rect">
             <a:avLst/>
@@ -10162,14 +10330,14 @@
       </p:sp>
       <p:sp>
         <p:nvSpPr>
-          <p:cNvPr id="37" name="Shape 35"/>
-          <p:cNvSpPr/>
-          <p:nvPr/>
-        </p:nvSpPr>
-        <p:spPr>
-          <a:xfrm>
-            <a:off x="6807708" y="3406140"/>
-            <a:ext cx="99060" cy="0"/>
+          <p:cNvPr id="42" name="Shape 40"/>
+          <p:cNvSpPr/>
+          <p:nvPr/>
+        </p:nvSpPr>
+        <p:spPr>
+          <a:xfrm>
+            <a:off x="6049409" y="3406140"/>
+            <a:ext cx="90134" cy="0"/>
           </a:xfrm>
           <a:prstGeom prst="line">
             <a:avLst/>
@@ -10186,13 +10354,13 @@
       </p:sp>
       <p:sp>
         <p:nvSpPr>
-          <p:cNvPr id="38" name="Text 36"/>
-          <p:cNvSpPr/>
-          <p:nvPr/>
-        </p:nvSpPr>
-        <p:spPr>
-          <a:xfrm>
-            <a:off x="6697980" y="2587752"/>
+          <p:cNvPr id="43" name="Text 41"/>
+          <p:cNvSpPr/>
+          <p:nvPr/>
+        </p:nvSpPr>
+        <p:spPr>
+          <a:xfrm>
+            <a:off x="5939681" y="2587752"/>
             <a:ext cx="1097280" cy="228600"/>
           </a:xfrm>
           <a:prstGeom prst="rect">
@@ -10225,13 +10393,13 @@
       </p:sp>
       <p:sp>
         <p:nvSpPr>
-          <p:cNvPr id="39" name="Shape 37"/>
-          <p:cNvSpPr/>
-          <p:nvPr/>
-        </p:nvSpPr>
-        <p:spPr>
-          <a:xfrm>
-            <a:off x="6094476" y="3977640"/>
+          <p:cNvPr id="44" name="Shape 42"/>
+          <p:cNvSpPr/>
+          <p:nvPr/>
+        </p:nvSpPr>
+        <p:spPr>
+          <a:xfrm>
+            <a:off x="5427617" y="3977640"/>
             <a:ext cx="0" cy="320040"/>
           </a:xfrm>
           <a:prstGeom prst="line">
@@ -10248,14 +10416,14 @@
       </p:sp>
       <p:sp>
         <p:nvSpPr>
-          <p:cNvPr id="40" name="Shape 38"/>
-          <p:cNvSpPr/>
-          <p:nvPr/>
-        </p:nvSpPr>
-        <p:spPr>
-          <a:xfrm>
-            <a:off x="6094476" y="4297680"/>
-            <a:ext cx="3051048" cy="0"/>
+          <p:cNvPr id="45" name="Shape 43"/>
+          <p:cNvSpPr/>
+          <p:nvPr/>
+        </p:nvSpPr>
+        <p:spPr>
+          <a:xfrm>
+            <a:off x="5427617" y="4297680"/>
+            <a:ext cx="2667435" cy="0"/>
           </a:xfrm>
           <a:prstGeom prst="line">
             <a:avLst/>
@@ -10271,13 +10439,13 @@
       </p:sp>
       <p:sp>
         <p:nvSpPr>
-          <p:cNvPr id="41" name="Shape 39"/>
+          <p:cNvPr id="46" name="Shape 44"/>
           <p:cNvSpPr/>
           <p:nvPr/>
         </p:nvSpPr>
         <p:spPr>
           <a:xfrm flipV="1">
-            <a:off x="9145524" y="3977640"/>
+            <a:off x="8095053" y="3977640"/>
             <a:ext cx="0" cy="320040"/>
           </a:xfrm>
           <a:prstGeom prst="line">
@@ -10295,13 +10463,13 @@
       </p:sp>
       <p:sp>
         <p:nvSpPr>
-          <p:cNvPr id="42" name="Text 40"/>
-          <p:cNvSpPr/>
-          <p:nvPr/>
-        </p:nvSpPr>
-        <p:spPr>
-          <a:xfrm>
-            <a:off x="6185916" y="4343400"/>
+          <p:cNvPr id="47" name="Text 45"/>
+          <p:cNvSpPr/>
+          <p:nvPr/>
+        </p:nvSpPr>
+        <p:spPr>
+          <a:xfrm>
+            <a:off x="5519057" y="4343400"/>
             <a:ext cx="2743200" cy="228600"/>
           </a:xfrm>
           <a:prstGeom prst="rect">
@@ -10326,7 +10494,7 @@
                 <a:ea typeface="Arial" pitchFamily="34" charset="-122"/>
                 <a:cs typeface="Arial" pitchFamily="34" charset="-120"/>
               </a:rPr>
-              <a:t>무효 없음 → 바로 집계</a:t>
+              <a:t>무효 없음 → 바로 교차 신문</a:t>
             </a:r>
             <a:endParaRPr lang="en-US" sz="950" dirty="0"/>
           </a:p>
@@ -10334,7 +10502,7 @@
       </p:sp>
       <p:sp>
         <p:nvSpPr>
-          <p:cNvPr id="43" name="Text 41"/>
+          <p:cNvPr id="48" name="Text 46"/>
           <p:cNvSpPr/>
           <p:nvPr/>
         </p:nvSpPr>
@@ -10373,7 +10541,7 @@
       </p:sp>
       <p:sp>
         <p:nvSpPr>
-          <p:cNvPr id="44" name="Text 42"/>
+          <p:cNvPr id="49" name="Text 47"/>
           <p:cNvSpPr/>
           <p:nvPr/>
         </p:nvSpPr>
@@ -10412,7 +10580,7 @@
       </p:sp>
       <p:sp>
         <p:nvSpPr>
-          <p:cNvPr id="45" name="Text 43"/>
+          <p:cNvPr id="50" name="Text 48"/>
           <p:cNvSpPr/>
           <p:nvPr/>
         </p:nvSpPr>
@@ -10451,7 +10619,7 @@
       </p:sp>
       <p:sp>
         <p:nvSpPr>
-          <p:cNvPr id="46" name="Text 44"/>
+          <p:cNvPr id="51" name="Text 49"/>
           <p:cNvSpPr/>
           <p:nvPr/>
         </p:nvSpPr>
@@ -10490,7 +10658,7 @@
       </p:sp>
       <p:sp>
         <p:nvSpPr>
-          <p:cNvPr id="47" name="Text 45"/>
+          <p:cNvPr id="52" name="Text 50"/>
           <p:cNvSpPr/>
           <p:nvPr/>
         </p:nvSpPr>
@@ -10529,7 +10697,7 @@
       </p:sp>
       <p:sp>
         <p:nvSpPr>
-          <p:cNvPr id="48" name="Text 46"/>
+          <p:cNvPr id="53" name="Text 51"/>
           <p:cNvSpPr/>
           <p:nvPr/>
         </p:nvSpPr>
@@ -10568,7 +10736,7 @@
       </p:sp>
       <p:sp>
         <p:nvSpPr>
-          <p:cNvPr id="49" name="Text 47"/>
+          <p:cNvPr id="54" name="Text 52"/>
           <p:cNvSpPr/>
           <p:nvPr/>
         </p:nvSpPr>
@@ -10599,7 +10767,7 @@
                 <a:ea typeface="Arial" pitchFamily="34" charset="-122"/>
                 <a:cs typeface="Arial" pitchFamily="34" charset="-120"/>
               </a:rPr>
-              <a:t>RAG 대신</a:t>
+              <a:t>교차 신문</a:t>
             </a:r>
             <a:endParaRPr lang="en-US" sz="1250" dirty="0"/>
           </a:p>
@@ -10607,7 +10775,7 @@
       </p:sp>
       <p:sp>
         <p:nvSpPr>
-          <p:cNvPr id="50" name="Text 48"/>
+          <p:cNvPr id="55" name="Text 53"/>
           <p:cNvSpPr/>
           <p:nvPr/>
         </p:nvSpPr>
@@ -10638,7 +10806,7 @@
                 <a:ea typeface="Arial" pitchFamily="34" charset="-122"/>
                 <a:cs typeface="Arial" pitchFamily="34" charset="-120"/>
               </a:rPr>
-              <a:t>공고·초안 원문을 통째로 넣고 인용으로 대조 — 조각 검색으로 문맥을 잃지 않게</a:t>
+              <a:t>「충족」 인용을 다른 회사 모델이 반대 심문 — 무관·부정문·빈말이면 코드가 「부족」으로 내림(존재 ≠ 충족)</a:t>
             </a:r>
             <a:endParaRPr lang="en-US" sz="1200" dirty="0"/>
           </a:p>

--- a/deliver/deck/RFP-to-Fit_루미아.pptx
+++ b/deliver/deck/RFP-to-Fit_루미아.pptx
@@ -3709,7 +3709,7 @@
                 <a:ea typeface="Arial" pitchFamily="34" charset="-122"/>
                 <a:cs typeface="Arial" pitchFamily="34" charset="-120"/>
               </a:rPr>
-              <a:t>3개 관점</a:t>
+              <a:t>4개 관점</a:t>
             </a:r>
             <a:pPr indent="0" marL="0">
               <a:lnSpc>
@@ -3843,7 +3843,7 @@
                 <a:ea typeface="Arial" pitchFamily="34" charset="-122"/>
                 <a:cs typeface="Arial" pitchFamily="34" charset="-120"/>
               </a:rPr>
-              <a:t>세부 전문형</a:t>
+              <a:t>기술 타당성 검증형</a:t>
             </a:r>
             <a:endParaRPr lang="en-US" sz="1300" dirty="0"/>
           </a:p>
@@ -3885,7 +3885,7 @@
                 <a:ea typeface="Arial" pitchFamily="34" charset="-122"/>
                 <a:cs typeface="Arial" pitchFamily="34" charset="-120"/>
               </a:rPr>
-              <a:t>“정확도 목표(90% 재현율, 80% 정밀도)가 실제 구현 없이 목표치만 제시되어 구체성 부족”</a:t>
+              <a:t>“실행 계획은 구체적이나 성능 검증 근거가 아직 약하다”</a:t>
             </a:r>
             <a:endParaRPr lang="en-US" sz="1150" dirty="0"/>
           </a:p>
@@ -3951,7 +3951,7 @@
                 <a:ea typeface="Arial" pitchFamily="34" charset="-122"/>
                 <a:cs typeface="Arial" pitchFamily="34" charset="-120"/>
               </a:rPr>
-              <a:t>목표치 대신 실측치 — 처음 보는 공고 재현율·제거 실험(9장)</a:t>
+              <a:t>—</a:t>
             </a:r>
             <a:endParaRPr lang="en-US" sz="1300" dirty="0"/>
           </a:p>
@@ -3990,7 +3990,7 @@
                 <a:ea typeface="Arial" pitchFamily="34" charset="-122"/>
                 <a:cs typeface="Arial" pitchFamily="34" charset="-120"/>
               </a:rPr>
-              <a:t>사업성·시장형</a:t>
+              <a:t>세부 전문형</a:t>
             </a:r>
             <a:endParaRPr lang="en-US" sz="1300" dirty="0"/>
           </a:p>
@@ -4032,7 +4032,7 @@
                 <a:ea typeface="Arial" pitchFamily="34" charset="-122"/>
                 <a:cs typeface="Arial" pitchFamily="34" charset="-120"/>
               </a:rPr>
-              <a:t>“시장성은 있으나 실증·구매주체가 아직 약함”</a:t>
+              <a:t>“정확도 목표(90% 재현율, 80% 정밀도)가 구체적이지만, 실제 구현 및 검증 데이터가 제시되지 않아 실현 가능성 의문”</a:t>
             </a:r>
             <a:endParaRPr lang="en-US" sz="1150" dirty="0"/>
           </a:p>
@@ -4098,7 +4098,7 @@
                 <a:ea typeface="Arial" pitchFamily="34" charset="-122"/>
                 <a:cs typeface="Arial" pitchFamily="34" charset="-120"/>
               </a:rPr>
-              <a:t>첫 실증 대상 — 전문기관 접수 후 요건 사전검토(12장)</a:t>
+              <a:t>목표치 대신 실측치 — 처음 보는 공고 재현율·제거 실험(9장)</a:t>
             </a:r>
             <a:endParaRPr lang="en-US" sz="1300" dirty="0"/>
           </a:p>
@@ -4137,7 +4137,7 @@
                 <a:ea typeface="Arial" pitchFamily="34" charset="-122"/>
                 <a:cs typeface="Arial" pitchFamily="34" charset="-120"/>
               </a:rPr>
-              <a:t>행정·관리형</a:t>
+              <a:t>사업성·시장형</a:t>
             </a:r>
             <a:endParaRPr lang="en-US" sz="1300" dirty="0"/>
           </a:p>
@@ -4179,7 +4179,7 @@
                 <a:ea typeface="Arial" pitchFamily="34" charset="-122"/>
                 <a:cs typeface="Arial" pitchFamily="34" charset="-120"/>
               </a:rPr>
-              <a:t>“AI 윤리·보안 대책은 있으나, 실제 구현 및 검증 계획이 해커톤 기간 내 2일만에 과도하게 압축되어 실현 가능성에 의문.”</a:t>
+              <a:t>“실용성은 높지만 실증 수요처가 아직 약함”</a:t>
             </a:r>
             <a:endParaRPr lang="en-US" sz="1150" dirty="0"/>
           </a:p>
@@ -4245,7 +4245,7 @@
                 <a:ea typeface="Arial" pitchFamily="34" charset="-122"/>
                 <a:cs typeface="Arial" pitchFamily="34" charset="-120"/>
               </a:rPr>
-              <a:t>검증 가능한 과정 — 커밋 33개·테스트 37개·측정 스크립트 공개</a:t>
+              <a:t>첫 실증 대상 — 전문기관 접수 후 요건 사전검토(12장)</a:t>
             </a:r>
             <a:endParaRPr lang="en-US" sz="1300" dirty="0"/>
           </a:p>
@@ -4307,7 +4307,7 @@
                 <a:ea typeface="Arial" pitchFamily="34" charset="-122"/>
                 <a:cs typeface="Arial" pitchFamily="34" charset="-120"/>
               </a:rPr>
-              <a:t>항목 근거는 거의 다 있었지만 3개 관점이 전체 인상을 「보류」로 적었습니다 — 결과 예측이 아니라, 발표 전에 대비할 질문을 먼저 받은 것</a:t>
+              <a:t>항목 근거는 거의 다 있었지만 4개 관점이 전체 인상을 「보류」로 적었습니다 — 결과 예측이 아니라, 발표 전에 대비할 질문을 먼저 받은 것</a:t>
             </a:r>
             <a:endParaRPr lang="en-US" sz="1150" dirty="0"/>
           </a:p>
@@ -5388,7 +5388,7 @@
                 <a:ea typeface="Arial" pitchFamily="34" charset="-122"/>
                 <a:cs typeface="Arial" pitchFamily="34" charset="-120"/>
               </a:rPr>
-              <a:t>커밋 33개 · 코드는 전부 본선 중 커밋(첫 코드 커밋 09/30 19:19, 그 전엔 문서뿐) · 테스트 37개</a:t>
+              <a:t>커밋 35개 · 코드는 전부 본선 중 커밋(첫 코드 커밋 09/30 19:19, 그 전엔 문서뿐) · 테스트 37개</a:t>
             </a:r>
             <a:endParaRPr lang="en-US" sz="1400" dirty="0"/>
           </a:p>
@@ -7058,7 +7058,7 @@
                 <a:ea typeface="Arial" pitchFamily="34" charset="-122"/>
                 <a:cs typeface="Arial" pitchFamily="34" charset="-120"/>
               </a:rPr>
-              <a:t>판정 90개 중 12건 적발</a:t>
+              <a:t>판정 90개 중 15건 적발</a:t>
             </a:r>
             <a:endParaRPr lang="en-US" sz="1250" dirty="0"/>
           </a:p>
@@ -7078,7 +7078,7 @@
                 <a:ea typeface="Arial" pitchFamily="34" charset="-122"/>
                 <a:cs typeface="Arial" pitchFamily="34" charset="-120"/>
               </a:rPr>
-              <a:t>→ 11건 원문 확인 · 1건 무효 처리</a:t>
+              <a:t>→ 12건 원문 확인 · 3건 무효 처리</a:t>
             </a:r>
             <a:endParaRPr lang="en-US" sz="1250" dirty="0"/>
           </a:p>
@@ -11409,7 +11409,7 @@
                 <a:ea typeface="Arial" pitchFamily="34" charset="-122"/>
                 <a:cs typeface="Arial" pitchFamily="34" charset="-120"/>
               </a:rPr>
-              <a:t>원문에 없는 인용은 코드가 걸러 판정에서 뺍니다 — 이번 실행 90개 중 12건 적발 → 11건 원문 확인 · 1건 무효.</a:t>
+              <a:t>원문에 없는 인용은 코드가 걸러 판정에서 뺍니다 — 이번 실행 90개 중 15건 적발 → 12건 원문 확인 · 3건 무효.</a:t>
             </a:r>
             <a:endParaRPr lang="en-US" sz="1150" dirty="0"/>
           </a:p>
@@ -13977,7 +13977,7 @@
               <a:buNone/>
             </a:pPr>
             <a:r>
-              <a:rPr lang="en-US" sz="1250" b="1" dirty="0">
+              <a:rPr lang="en-US" sz="1200" b="1" dirty="0">
                 <a:solidFill>
                   <a:srgbClr val="191F28"/>
                 </a:solidFill>
@@ -13985,9 +13985,9 @@
                 <a:ea typeface="Arial" pitchFamily="34" charset="-122"/>
                 <a:cs typeface="Arial" pitchFamily="34" charset="-120"/>
               </a:rPr>
-              <a:t>링크 입력: 실제 공지 주소 13건 중 13건에서 공고문을 골라 읽음(HWP 첨부·스크립트 다운로드·공고문 2개 합치기) · IRIS 상세는 미실측</a:t>
-            </a:r>
-            <a:endParaRPr lang="en-US" sz="1250" dirty="0"/>
+              <a:t>링크 입력 13/13건(HWP·스크립트 다운로드·공고문 2개 합치기) · 처음 본 공고 추출 51개 원문 대조 감사: 지어낸 요건 0 · 신청 요건 맞음 44(86%) · 안내·사후 의무 7</a:t>
+            </a:r>
+            <a:endParaRPr lang="en-US" sz="1200" dirty="0"/>
           </a:p>
         </p:txBody>
       </p:sp>
@@ -14024,7 +14024,7 @@
                 <a:ea typeface="Arial" pitchFamily="34" charset="-122"/>
                 <a:cs typeface="Arial" pitchFamily="34" charset="-120"/>
               </a:rPr>
-              <a:t>정답표: 파이프라인(OpenAI)과 다른 회사 모델(Claude)이 원문을 읽어 작성 · 검증 정답표 커밋 430ea7d(21:37) 뒤 측정 · 추출 정밀도 45~84%는 다음 개선 대상</a:t>
+              <a:t>정답표·감사: 파이프라인(OpenAI)과 다른 회사 모델(Claude) — 사람 검수 아님 · 검증 정답표 커밋 430ea7d(21:37) 뒤 측정 · 감사 data/eval/audit-national-scientist.json</a:t>
             </a:r>
             <a:endParaRPr lang="en-US" sz="1000" dirty="0"/>
           </a:p>

--- a/deliver/deck/RFP-to-Fit_루미아.pptx
+++ b/deliver/deck/RFP-to-Fit_루미아.pptx
@@ -690,7 +690,7 @@
           <a:p>
             <a:r>
               <a:rPr lang="en-US" dirty="0"/>
-              <a:t>[20초] 이 대회 본선 심사표로 저희 예선 기획서를 먼저 검사했습니다. 결과를 예측한 게 아니라, 세 관점에서 걸리는 점을 받았습니다. 목표치만 있고 실측이 없다, 구매 주체가 약하다, 검증 계획이 빠듯하다. 그래서 오늘 실측치와 첫 실증 대상과 검증 가능한 과정을 가져왔습니다.</a:t>
+              <a:t>[20초] 이 대회 본선 심사표로 저희 예선 기획서를 먼저 검사했습니다. 결과를 예측한 게 아니라, 세 관점에서 걸리는 점을 받았습니다. 차별성의 근거가 약하다, 구매 주체가 약하다, 구현 계획이 구체적이지 않다. 그래서 오늘 구조의 차별점과 제거 실험, 첫 실증 대상, 그리고 계획 대신 구현 결과를 가져왔습니다.</a:t>
             </a:r>
             <a:endParaRPr lang="en-US" dirty="0"/>
           </a:p>
@@ -3709,7 +3709,7 @@
                 <a:ea typeface="Arial" pitchFamily="34" charset="-122"/>
                 <a:cs typeface="Arial" pitchFamily="34" charset="-120"/>
               </a:rPr>
-              <a:t>4개 관점</a:t>
+              <a:t>3개 관점</a:t>
             </a:r>
             <a:pPr indent="0" marL="0">
               <a:lnSpc>
@@ -3843,7 +3843,7 @@
                 <a:ea typeface="Arial" pitchFamily="34" charset="-122"/>
                 <a:cs typeface="Arial" pitchFamily="34" charset="-120"/>
               </a:rPr>
-              <a:t>기술 타당성 검증형</a:t>
+              <a:t>세부 전문형</a:t>
             </a:r>
             <a:endParaRPr lang="en-US" sz="1300" dirty="0"/>
           </a:p>
@@ -3885,7 +3885,7 @@
                 <a:ea typeface="Arial" pitchFamily="34" charset="-122"/>
                 <a:cs typeface="Arial" pitchFamily="34" charset="-120"/>
               </a:rPr>
-              <a:t>“실행 계획은 구체적이나 성능 검증 근거가 아직 약하다”</a:t>
+              <a:t>“혁신성 차별성 구체성 부족”</a:t>
             </a:r>
             <a:endParaRPr lang="en-US" sz="1150" dirty="0"/>
           </a:p>
@@ -3951,7 +3951,7 @@
                 <a:ea typeface="Arial" pitchFamily="34" charset="-122"/>
                 <a:cs typeface="Arial" pitchFamily="34" charset="-120"/>
               </a:rPr>
-              <a:t>—</a:t>
+              <a:t>차별성의 근거 — LLM은 증인·판정은 코드(6장), 관점 1개 대 6개 제거 실험(9장)</a:t>
             </a:r>
             <a:endParaRPr lang="en-US" sz="1300" dirty="0"/>
           </a:p>
@@ -3990,7 +3990,7 @@
                 <a:ea typeface="Arial" pitchFamily="34" charset="-122"/>
                 <a:cs typeface="Arial" pitchFamily="34" charset="-120"/>
               </a:rPr>
-              <a:t>세부 전문형</a:t>
+              <a:t>사업성·시장형</a:t>
             </a:r>
             <a:endParaRPr lang="en-US" sz="1300" dirty="0"/>
           </a:p>
@@ -4032,7 +4032,7 @@
                 <a:ea typeface="Arial" pitchFamily="34" charset="-122"/>
                 <a:cs typeface="Arial" pitchFamily="34" charset="-120"/>
               </a:rPr>
-              <a:t>“정확도 목표(90% 재현율, 80% 정밀도)가 구체적이지만, 실제 구현 및 검증 데이터가 제시되지 않아 실현 가능성 의문”</a:t>
+              <a:t>“시장수요는 보이나 실증·구매주체가 약함”</a:t>
             </a:r>
             <a:endParaRPr lang="en-US" sz="1150" dirty="0"/>
           </a:p>
@@ -4098,7 +4098,7 @@
                 <a:ea typeface="Arial" pitchFamily="34" charset="-122"/>
                 <a:cs typeface="Arial" pitchFamily="34" charset="-120"/>
               </a:rPr>
-              <a:t>목표치 대신 실측치 — 처음 보는 공고 재현율·제거 실험(9장)</a:t>
+              <a:t>첫 실증 대상 — 전문기관 접수 후 요건 사전검토(12장)</a:t>
             </a:r>
             <a:endParaRPr lang="en-US" sz="1300" dirty="0"/>
           </a:p>
@@ -4137,7 +4137,7 @@
                 <a:ea typeface="Arial" pitchFamily="34" charset="-122"/>
                 <a:cs typeface="Arial" pitchFamily="34" charset="-120"/>
               </a:rPr>
-              <a:t>사업성·시장형</a:t>
+              <a:t>행정·관리형</a:t>
             </a:r>
             <a:endParaRPr lang="en-US" sz="1300" dirty="0"/>
           </a:p>
@@ -4179,7 +4179,7 @@
                 <a:ea typeface="Arial" pitchFamily="34" charset="-122"/>
                 <a:cs typeface="Arial" pitchFamily="34" charset="-120"/>
               </a:rPr>
-              <a:t>“실용성은 높지만 실증 수요처가 아직 약함”</a:t>
+              <a:t>“해커톤 기간 내 구현 계획의 구체성 부족”</a:t>
             </a:r>
             <a:endParaRPr lang="en-US" sz="1150" dirty="0"/>
           </a:p>
@@ -4245,7 +4245,7 @@
                 <a:ea typeface="Arial" pitchFamily="34" charset="-122"/>
                 <a:cs typeface="Arial" pitchFamily="34" charset="-120"/>
               </a:rPr>
-              <a:t>첫 실증 대상 — 전문기관 접수 후 요건 사전검토(12장)</a:t>
+              <a:t>구현 계획 대신 구현 결과 — 커밋 36개·테스트 37개·예선 약속 대조(10장)</a:t>
             </a:r>
             <a:endParaRPr lang="en-US" sz="1300" dirty="0"/>
           </a:p>
@@ -4307,7 +4307,7 @@
                 <a:ea typeface="Arial" pitchFamily="34" charset="-122"/>
                 <a:cs typeface="Arial" pitchFamily="34" charset="-120"/>
               </a:rPr>
-              <a:t>항목 근거는 거의 다 있었지만 4개 관점이 전체 인상을 「보류」로 적었습니다 — 결과 예측이 아니라, 발표 전에 대비할 질문을 먼저 받은 것</a:t>
+              <a:t>항목 근거는 거의 다 있었지만 3개 관점이 전체 인상을 「보류」로 적었습니다 — 결과 예측이 아니라, 발표 전에 대비할 질문을 먼저 받은 것</a:t>
             </a:r>
             <a:endParaRPr lang="en-US" sz="1150" dirty="0"/>
           </a:p>
@@ -5388,7 +5388,7 @@
                 <a:ea typeface="Arial" pitchFamily="34" charset="-122"/>
                 <a:cs typeface="Arial" pitchFamily="34" charset="-120"/>
               </a:rPr>
-              <a:t>커밋 35개 · 코드는 전부 본선 중 커밋(첫 코드 커밋 09/30 19:19, 그 전엔 문서뿐) · 테스트 37개</a:t>
+              <a:t>커밋 36개 · 코드는 전부 본선 중 커밋(첫 코드 커밋 09/30 19:19, 그 전엔 문서뿐) · 테스트 37개</a:t>
             </a:r>
             <a:endParaRPr lang="en-US" sz="1400" dirty="0"/>
           </a:p>
@@ -7058,7 +7058,7 @@
                 <a:ea typeface="Arial" pitchFamily="34" charset="-122"/>
                 <a:cs typeface="Arial" pitchFamily="34" charset="-120"/>
               </a:rPr>
-              <a:t>판정 90개 중 15건 적발</a:t>
+              <a:t>판정 90개 중 9건 적발</a:t>
             </a:r>
             <a:endParaRPr lang="en-US" sz="1250" dirty="0"/>
           </a:p>
@@ -7078,7 +7078,7 @@
                 <a:ea typeface="Arial" pitchFamily="34" charset="-122"/>
                 <a:cs typeface="Arial" pitchFamily="34" charset="-120"/>
               </a:rPr>
-              <a:t>→ 12건 원문 확인 · 3건 무효 처리</a:t>
+              <a:t>→ 5건 원문 확인 · 2건 무효 처리</a:t>
             </a:r>
             <a:endParaRPr lang="en-US" sz="1250" dirty="0"/>
           </a:p>
@@ -7633,7 +7633,7 @@
         <p:spPr>
           <a:xfrm>
             <a:off x="5715000" y="2697480"/>
-            <a:ext cx="4768504" cy="1783080"/>
+            <a:ext cx="3706477" cy="1783080"/>
           </a:xfrm>
           <a:prstGeom prst="roundRect">
             <a:avLst>
@@ -7668,7 +7668,7 @@
         <p:spPr>
           <a:xfrm>
             <a:off x="5806440" y="2788920"/>
-            <a:ext cx="4585624" cy="1538830"/>
+            <a:ext cx="3523597" cy="1521245"/>
           </a:xfrm>
           <a:prstGeom prst="rect">
             <a:avLst/>
@@ -7684,7 +7684,7 @@
         <p:spPr>
           <a:xfrm>
             <a:off x="5715000" y="4663440"/>
-            <a:ext cx="4087289" cy="1554480"/>
+            <a:ext cx="1620982" cy="1554480"/>
           </a:xfrm>
           <a:prstGeom prst="roundRect">
             <a:avLst>
@@ -7719,7 +7719,7 @@
         <p:spPr>
           <a:xfrm>
             <a:off x="5806440" y="4754880"/>
-            <a:ext cx="3904409" cy="1310230"/>
+            <a:ext cx="1438102" cy="1216855"/>
           </a:xfrm>
           <a:prstGeom prst="rect">
             <a:avLst/>
@@ -10806,7 +10806,7 @@
                 <a:ea typeface="Arial" pitchFamily="34" charset="-122"/>
                 <a:cs typeface="Arial" pitchFamily="34" charset="-120"/>
               </a:rPr>
-              <a:t>「충족」 인용을 다른 회사 모델이 반대 심문 — 무관·부정문·빈말이면 코드가 「부족」으로 내림(존재 ≠ 충족)</a:t>
+              <a:t>엄격 모드 — 「충족」 인용을 다른 회사 모델이 반대 심문, 무관·부정·빈말이면 「부족」으로(존재 ≠ 충족). 켜면 오탐 0→2라 기본은 끔</a:t>
             </a:r>
             <a:endParaRPr lang="en-US" sz="1200" dirty="0"/>
           </a:p>
@@ -11409,7 +11409,7 @@
                 <a:ea typeface="Arial" pitchFamily="34" charset="-122"/>
                 <a:cs typeface="Arial" pitchFamily="34" charset="-120"/>
               </a:rPr>
-              <a:t>원문에 없는 인용은 코드가 걸러 판정에서 뺍니다 — 이번 실행 90개 중 15건 적발 → 12건 원문 확인 · 3건 무효.</a:t>
+              <a:t>원문에 없는 인용은 코드가 걸러 판정에서 뺍니다 — 이번 실행 90개 중 9건 적발 → 5건 원문 확인 · 2건 무효.</a:t>
             </a:r>
             <a:endParaRPr lang="en-US" sz="1150" dirty="0"/>
           </a:p>

--- a/deliver/deck/RFP-to-Fit_루미아.pptx
+++ b/deliver/deck/RFP-to-Fit_루미아.pptx
@@ -4245,7 +4245,7 @@
                 <a:ea typeface="Arial" pitchFamily="34" charset="-122"/>
                 <a:cs typeface="Arial" pitchFamily="34" charset="-120"/>
               </a:rPr>
-              <a:t>구현 계획 대신 구현 결과 — 커밋 36개·테스트 37개·예선 약속 대조(10장)</a:t>
+              <a:t>구현 계획 대신 구현 결과 — 커밋 37개·테스트 37개·예선 약속 대조(10장)</a:t>
             </a:r>
             <a:endParaRPr lang="en-US" sz="1300" dirty="0"/>
           </a:p>
@@ -5388,7 +5388,7 @@
                 <a:ea typeface="Arial" pitchFamily="34" charset="-122"/>
                 <a:cs typeface="Arial" pitchFamily="34" charset="-120"/>
               </a:rPr>
-              <a:t>커밋 36개 · 코드는 전부 본선 중 커밋(첫 코드 커밋 09/30 19:19, 그 전엔 문서뿐) · 테스트 37개</a:t>
+              <a:t>커밋 37개 · 코드는 전부 본선 중 커밋(첫 코드 커밋 09/30 19:19, 그 전엔 문서뿐) · 테스트 37개</a:t>
             </a:r>
             <a:endParaRPr lang="en-US" sz="1400" dirty="0"/>
           </a:p>

--- a/deliver/deck/RFP-to-Fit_루미아.pptx
+++ b/deliver/deck/RFP-to-Fit_루미아.pptx
@@ -18,9 +18,10 @@
     <p:sldId id="266" r:id="rId12"/>
     <p:sldId id="267" r:id="rId13"/>
     <p:sldId id="268" r:id="rId14"/>
+    <p:sldId id="269" r:id="rId15"/>
   </p:sldIdLst>
   <p:notesMasterIdLst>
-    <p:notesMasterId r:id="rId15"/>
+    <p:notesMasterId r:id="rId16"/>
   </p:notesMasterIdLst>
   <p:sldSz cx="12192000" cy="6858000"/>
   <p:notesSz cx="6858000" cy="12192000"/>
@@ -602,7 +603,7 @@
           <a:p>
             <a:r>
               <a:rPr lang="en-US" dirty="0"/>
-              <a:t>[20초] 이 대회 심사표로 저희 기획서부터 검사했습니다. 세 관점이 걸리는 점을 냈습니다. 차별성의 근거, 구매 주체, 구현 계획. 그래서 오늘은 구조의 차별점과 실험, 첫 실증 대상, 그리고 계획 대신 구현 결과를 가져왔습니다.</a:t>
+              <a:t>[30초] 예시에만 맞춘 게 아닌지 보려고, 개발에 안 쓴 과기정통부 공고 두 건을 링크로 가져와 정답표를 먼저 고정하고 쟀습니다. 94%와 78%였고 심사표 배점은 다섯 건 모두 맞혔습니다. 오른쪽은 관점을 나눈 효과입니다. 관점 하나는 안 지운 곳을 3곳 잘못 짚었고, 여섯으로 나누니 0이었습니다. 회사 모델을 섞는 효과는 이번엔 보이지 않았다고 그대로 말씀드립니다.</a:t>
             </a:r>
             <a:endParaRPr lang="en-US" dirty="0"/>
           </a:p>
@@ -690,7 +691,7 @@
           <a:p>
             <a:r>
               <a:rPr lang="en-US" dirty="0"/>
-              <a:t>[15초] 같은 엔진이 세 시점으로 이어집니다. 지금은 연구자의 제출 전 점검이고, 첫 실증 목표는 전문기관의 접수 후 요건 검토, 그다음은 심사 보조입니다. 실제 심사 의견은 평가기관에 있으니, 연계하면 관점을 실제 유형에 맞출 수 있습니다.</a:t>
+              <a:t>[20초] 이 대회 심사표로 저희 기획서부터 검사했습니다. 세 관점이 걸리는 점을 냈습니다. 차별성의 근거, 구매 주체, 구현 계획. 그래서 오늘은 구조의 차별점과 실험, 첫 실증 대상, 그리고 계획 대신 구현 결과를 가져왔습니다.</a:t>
             </a:r>
             <a:endParaRPr lang="en-US" dirty="0"/>
           </a:p>
@@ -778,7 +779,7 @@
           <a:p>
             <a:r>
               <a:rPr lang="en-US" dirty="0"/>
-              <a:t>[10초] 제출 전에, 빈칸부터. 화면의 주소에서 지금 직접 해 보실 수 있습니다. 감사합니다.</a:t>
+              <a:t>[15초] 같은 엔진이 세 시점으로 이어집니다. 지금은 연구자의 제출 전 점검이고, 첫 실증 목표는 전문기관의 접수 후 요건 검토, 그다음은 심사 보조입니다. 실제 심사 의견은 평가기관에 있으니, 연계하면 관점을 실제 유형에 맞출 수 있습니다.</a:t>
             </a:r>
             <a:endParaRPr lang="en-US" dirty="0"/>
           </a:p>
@@ -866,7 +867,7 @@
           <a:p>
             <a:r>
               <a:rPr lang="en-US" dirty="0"/>
-              <a:t>[0초] 부록 — 발표하지 않음. 공고 규정(사용 모델·라이브러리·데이터 출처 기재) 충족용.</a:t>
+              <a:t>[10초] 제출 전에, 빈칸부터. 화면의 주소에서 지금 직접 해 보실 수 있습니다. 감사합니다.</a:t>
             </a:r>
             <a:endParaRPr lang="en-US" dirty="0"/>
           </a:p>
@@ -890,6 +891,94 @@
             <a:fld id="{F7021451-1387-4CA6-816F-3879F97B5CBC}" type="slidenum">
               <a:rPr lang="en-US"/>
               <a:t>13</a:t>
+            </a:fld>
+            <a:endParaRPr lang="en-US"/>
+          </a:p>
+        </p:txBody>
+      </p:sp>
+    </p:spTree>
+    <p:extLst>
+      <p:ext uri="{BB962C8B-B14F-4D97-AF65-F5344CB8AC3E}">
+        <p14:creationId xmlns:p14="http://schemas.microsoft.com/office/powerpoint/2010/main" val="1024086991"/>
+      </p:ext>
+    </p:extLst>
+  </p:cSld>
+  <p:clrMapOvr>
+    <a:masterClrMapping/>
+  </p:clrMapOvr>
+</p:notes>
+</file>
+
+<file path=ppt/notesSlides/notesSlide14.xml><?xml version="1.0" encoding="utf-8"?>
+<p:notes xmlns:a="http://schemas.openxmlformats.org/drawingml/2006/main" xmlns:r="http://schemas.openxmlformats.org/officeDocument/2006/relationships" xmlns:p="http://schemas.openxmlformats.org/presentationml/2006/main">
+  <p:cSld>
+    <p:spTree>
+      <p:nvGrpSpPr>
+        <p:cNvPr id="1" name=""/>
+        <p:cNvGrpSpPr/>
+        <p:nvPr/>
+      </p:nvGrpSpPr>
+      <p:grpSpPr>
+        <a:xfrm>
+          <a:off x="0" y="0"/>
+          <a:ext cx="0" cy="0"/>
+          <a:chOff x="0" y="0"/>
+          <a:chExt cx="0" cy="0"/>
+        </a:xfrm>
+      </p:grpSpPr>
+      <p:sp>
+        <p:nvSpPr>
+          <p:cNvPr id="2" name="Slide Image Placeholder 1"/>
+          <p:cNvSpPr>
+            <a:spLocks noGrp="1" noRot="1" noChangeAspect="1"/>
+          </p:cNvSpPr>
+          <p:nvPr>
+            <p:ph type="sldImg"/>
+          </p:nvPr>
+        </p:nvSpPr>
+        <p:spPr/>
+      </p:sp>
+      <p:sp>
+        <p:nvSpPr>
+          <p:cNvPr id="3" name="Notes Placeholder 2"/>
+          <p:cNvSpPr>
+            <a:spLocks noGrp="1"/>
+          </p:cNvSpPr>
+          <p:nvPr>
+            <p:ph type="body" idx="1"/>
+          </p:nvPr>
+        </p:nvSpPr>
+        <p:spPr/>
+        <p:txBody>
+          <a:bodyPr/>
+          <a:lstStyle/>
+          <a:p>
+            <a:r>
+              <a:rPr lang="en-US" dirty="0"/>
+              <a:t>[0초] 부록 — 발표하지 않음. 공고 규정(사용 모델·라이브러리·데이터 출처 기재) 충족용.</a:t>
+            </a:r>
+            <a:endParaRPr lang="en-US" dirty="0"/>
+          </a:p>
+        </p:txBody>
+      </p:sp>
+      <p:sp>
+        <p:nvSpPr>
+          <p:cNvPr id="4" name="Slide Number Placeholder 3"/>
+          <p:cNvSpPr>
+            <a:spLocks noGrp="1"/>
+          </p:cNvSpPr>
+          <p:nvPr>
+            <p:ph type="sldNum" sz="quarter" idx="10"/>
+          </p:nvPr>
+        </p:nvSpPr>
+        <p:spPr/>
+        <p:txBody>
+          <a:bodyPr/>
+          <a:lstStyle/>
+          <a:p>
+            <a:fld id="{F7021451-1387-4CA6-816F-3879F97B5CBC}" type="slidenum">
+              <a:rPr lang="en-US"/>
+              <a:t>14</a:t>
             </a:fld>
             <a:endParaRPr lang="en-US"/>
           </a:p>
@@ -1218,7 +1307,7 @@
           <a:p>
             <a:r>
               <a:rPr lang="en-US" dirty="0"/>
-              <a:t>[25초] 역할은 이렇게 나눴습니다. 사람은 판단만 합니다. 어디에 낼지, 갈린 곳을 고칠지, 그리고 문장은 직접 씁니다. AI는 공고를 정리하고 관점별로 근거를 찾습니다. 코드는 확인합니다. 근거 문장이 초안에 정말 있는지, 몇 관점이 동의했는지, 개인정보를 가렸는지.</a:t>
+              <a:t>[15초] 역할은 이렇게 나눴습니다. 사람은 판단하고 문장은 직접 씁니다. AI는 공고를 정리하고 근거를 찾습니다. 코드는 그 근거가 초안에 정말 있는지, 몇 관점이 동의했는지 확인합니다.</a:t>
             </a:r>
             <a:endParaRPr lang="en-US" dirty="0"/>
           </a:p>
@@ -1306,7 +1395,7 @@
           <a:p>
             <a:r>
               <a:rPr lang="en-US" dirty="0"/>
-              <a:t>[25초] 핵심은 AI를 판사로 쓰지 않는다는 겁니다. AI는 증인처럼 근거 문장만 냅니다. 그 문장이 초안에 정말 있는지, 몇 관점이 동의했는지는 코드가 판정합니다. 없는 문장을 댄 판정은 그 관점에게만 한 번 다시 묻습니다. 한 회사 모델이 막히면 다른 모델로 넘어가고, 실패는 숨기지 않고 화면에 띄웁니다.</a:t>
+              <a:t>[20초] 핵심은 AI를 판사로 쓰지 않는다는 겁니다. AI는 증인처럼 근거 문장만 내고, 판정은 코드가 합니다. 한 회사 모델이 막히면 다른 모델로 넘어가고, 실패는 숨기지 않고 화면에 띄웁니다.</a:t>
             </a:r>
             <a:endParaRPr lang="en-US" dirty="0"/>
           </a:p>
@@ -1394,7 +1483,7 @@
           <a:p>
             <a:r>
               <a:rPr lang="en-US" dirty="0"/>
-              <a:t>[25초] 심사에는 정답이 없어서, 저희는 맞힌다고 말하지 않습니다. 대신 확인할 수 있게 했습니다. 모든 지적에 출처가 붙고, 초안에 없는 문장은 버리고, 관점이 갈리면 사람에게 넘기고, 잰 것만 숫자로 말합니다. 지적마다 원문 보기와 맞음·틀림 버튼이 있어서 여러분이 직접 확인하실 수 있습니다.</a:t>
+              <a:t>[30초] 관점 여섯 개는 어제 멘토링에서 들은 실제 심사위원 유형입니다. 기술을 꼼꼼히 따지는 사람, 큰 그림을 보는 사람, 자기 전문 하나를 파는 사람, 시장을 보는 사람, 행정, 사업 취지. 실존 인물이 아니라 역할만 줍니다. 여섯 관점은 같은 질문을 서로 모른 채 받고, 충족이라고 하려면 초안 문장을 그대로 인용해야 합니다. 그다음은 코드입니다. 인용이 초안에 없으면 버리고, 여섯 중 다섯 이상이 부족이면 고칠 곳, 둘에서 넷이면 판단할 곳입니다. 실제로 활용 시나리오 항목은 넷이 충족, 둘이 부족이라 판단할 곳으로 넘어갔습니다.</a:t>
             </a:r>
             <a:endParaRPr lang="en-US" dirty="0"/>
           </a:p>
@@ -1482,7 +1571,7 @@
           <a:p>
             <a:r>
               <a:rPr lang="en-US" dirty="0"/>
-              <a:t>[20초] 검사 도구 두 개를 MCP로 감쌌습니다. 다른 AI 비서인 Codex에 붙여서 실제로 불러 봤고, 원문에 있는 인용은 참, 없는 인용은 거짓이 나왔습니다. 도구로 감싼 이유는 어젯밤 실험 도중에 OpenAlex가 멈췄을 때 뒤에서 Crossref로 자동으로 바뀌었기 때문입니다.</a:t>
+              <a:t>[25초] 심사에는 정답이 없어서, 저희는 맞힌다고 말하지 않습니다. 대신 확인할 수 있게 했습니다. 모든 지적에 출처가 붙고, 초안에 없는 문장은 버리고, 관점이 갈리면 사람에게 넘기고, 잰 것만 숫자로 말합니다. 지적마다 원문 보기와 맞음·틀림 버튼이 있어서 여러분이 직접 확인하실 수 있습니다.</a:t>
             </a:r>
             <a:endParaRPr lang="en-US" dirty="0"/>
           </a:p>
@@ -1570,7 +1659,7 @@
           <a:p>
             <a:r>
               <a:rPr lang="en-US" dirty="0"/>
-              <a:t>[30초] 예시에만 맞춘 게 아닌지 보려고, 개발에 안 쓴 과기정통부 공고 두 건을 링크로 가져와 정답표를 먼저 고정하고 쟀습니다. 94%와 78%였고 심사표 배점은 다섯 건 모두 맞혔습니다. 오른쪽은 관점을 나눈 효과입니다. 관점 하나는 안 지운 곳을 3곳 잘못 짚었고, 여섯으로 나누니 0이었습니다. 회사 모델을 섞는 효과는 이번엔 보이지 않았다고 그대로 말씀드립니다.</a:t>
+              <a:t>[15초] 검사 도구 두 개를 MCP로 감쌌습니다. 다른 AI 비서인 Codex에 붙여 실제로 불러 보니, 원문에 있는 인용은 참, 없는 인용은 거짓이 나왔습니다. 학술 DB가 멈추면 도구 뒤에서 다른 DB로 넘어갑니다.</a:t>
             </a:r>
             <a:endParaRPr lang="en-US" dirty="0"/>
           </a:p>
@@ -2204,7 +2293,7 @@
                 <a:ea typeface="Arial" pitchFamily="34" charset="-122"/>
                 <a:cs typeface="Arial" pitchFamily="34" charset="-120"/>
               </a:rPr>
-              <a:t>우리 먼저</a:t>
+              <a:t>측정</a:t>
             </a:r>
             <a:endParaRPr lang="en-US" sz="1400" dirty="0"/>
           </a:p>
@@ -2246,7 +2335,7 @@
                 <a:ea typeface="Arial" pitchFamily="34" charset="-122"/>
                 <a:cs typeface="Arial" pitchFamily="34" charset="-120"/>
               </a:rPr>
-              <a:t>이 대회 심사표로,</a:t>
+              <a:t>처음 보는 공고로도,</a:t>
             </a:r>
             <a:endParaRPr lang="en-US" sz="3400" dirty="0"/>
           </a:p>
@@ -2266,7 +2355,7 @@
                 <a:ea typeface="Arial" pitchFamily="34" charset="-122"/>
                 <a:cs typeface="Arial" pitchFamily="34" charset="-120"/>
               </a:rPr>
-              <a:t>저희 기획서</a:t>
+              <a:t>직접</a:t>
             </a:r>
             <a:pPr indent="0" marL="0">
               <a:lnSpc>
@@ -2283,7 +2372,7 @@
                 <a:ea typeface="Arial" pitchFamily="34" charset="-122"/>
                 <a:cs typeface="Arial" pitchFamily="34" charset="-120"/>
               </a:rPr>
-              <a:t>부터 검사했습니다</a:t>
+              <a:t> 쟀습니다</a:t>
             </a:r>
             <a:endParaRPr lang="en-US" sz="3400" dirty="0"/>
           </a:p>
@@ -2298,7 +2387,7 @@
         <p:spPr>
           <a:xfrm>
             <a:off x="822960" y="2606040"/>
-            <a:ext cx="5303520" cy="274320"/>
+            <a:ext cx="5486400" cy="274320"/>
           </a:xfrm>
           <a:prstGeom prst="rect">
             <a:avLst/>
@@ -2316,13 +2405,676 @@
             <a:r>
               <a:rPr lang="en-US" sz="1300" b="1" dirty="0">
                 <a:solidFill>
+                  <a:srgbClr val="4E5968"/>
+                </a:solidFill>
+                <a:latin typeface="Arial" pitchFamily="34" charset="0"/>
+                <a:ea typeface="Arial" pitchFamily="34" charset="-122"/>
+                <a:cs typeface="Arial" pitchFamily="34" charset="-120"/>
+              </a:rPr>
+              <a:t>요건을 놓치지 않은 비율</a:t>
+            </a:r>
+            <a:endParaRPr lang="en-US" sz="1300" dirty="0"/>
+          </a:p>
+        </p:txBody>
+      </p:sp>
+      <p:sp>
+        <p:nvSpPr>
+          <p:cNvPr id="5" name="Text 3"/>
+          <p:cNvSpPr/>
+          <p:nvPr/>
+        </p:nvSpPr>
+        <p:spPr>
+          <a:xfrm>
+            <a:off x="822960" y="2971800"/>
+            <a:ext cx="3108960" cy="310896"/>
+          </a:xfrm>
+          <a:prstGeom prst="rect">
+            <a:avLst/>
+          </a:prstGeom>
+          <a:noFill/>
+          <a:ln/>
+        </p:spPr>
+        <p:txBody>
+          <a:bodyPr wrap="square" lIns="0" tIns="0" rIns="0" bIns="0" rtlCol="0" anchor="t"/>
+          <a:lstStyle/>
+          <a:p>
+            <a:pPr indent="0" marL="0">
+              <a:buNone/>
+            </a:pPr>
+            <a:r>
+              <a:rPr lang="en-US" sz="1400" dirty="0">
+                <a:solidFill>
+                  <a:srgbClr val="191F28"/>
+                </a:solidFill>
+                <a:latin typeface="Arial" pitchFamily="34" charset="0"/>
+                <a:ea typeface="Arial" pitchFamily="34" charset="-122"/>
+                <a:cs typeface="Arial" pitchFamily="34" charset="-120"/>
+              </a:rPr>
+              <a:t>우주항공청</a:t>
+            </a:r>
+            <a:endParaRPr lang="en-US" sz="1400" dirty="0"/>
+          </a:p>
+        </p:txBody>
+      </p:sp>
+      <p:sp>
+        <p:nvSpPr>
+          <p:cNvPr id="6" name="Text 4"/>
+          <p:cNvSpPr/>
+          <p:nvPr/>
+        </p:nvSpPr>
+        <p:spPr>
+          <a:xfrm>
+            <a:off x="3931920" y="2999232"/>
+            <a:ext cx="1463040" cy="274320"/>
+          </a:xfrm>
+          <a:prstGeom prst="rect">
+            <a:avLst/>
+          </a:prstGeom>
+          <a:noFill/>
+          <a:ln/>
+        </p:spPr>
+        <p:txBody>
+          <a:bodyPr wrap="square" lIns="0" tIns="0" rIns="0" bIns="0" rtlCol="0" anchor="t"/>
+          <a:lstStyle/>
+          <a:p>
+            <a:pPr indent="0" marL="0">
+              <a:buNone/>
+            </a:pPr>
+            <a:r>
+              <a:rPr lang="en-US" sz="1100" dirty="0">
+                <a:solidFill>
                   <a:srgbClr val="8B95A1"/>
                 </a:solidFill>
                 <a:latin typeface="Arial" pitchFamily="34" charset="0"/>
                 <a:ea typeface="Arial" pitchFamily="34" charset="-122"/>
                 <a:cs typeface="Arial" pitchFamily="34" charset="-120"/>
               </a:rPr>
-              <a:t>관점별로 가장 걸린 점</a:t>
+              <a:t>개발에 쓴 공고</a:t>
+            </a:r>
+            <a:endParaRPr lang="en-US" sz="1100" dirty="0"/>
+          </a:p>
+        </p:txBody>
+      </p:sp>
+      <p:sp>
+        <p:nvSpPr>
+          <p:cNvPr id="7" name="Text 5"/>
+          <p:cNvSpPr/>
+          <p:nvPr/>
+        </p:nvSpPr>
+        <p:spPr>
+          <a:xfrm>
+            <a:off x="5394960" y="2971800"/>
+            <a:ext cx="914400" cy="310896"/>
+          </a:xfrm>
+          <a:prstGeom prst="rect">
+            <a:avLst/>
+          </a:prstGeom>
+          <a:noFill/>
+          <a:ln/>
+        </p:spPr>
+        <p:txBody>
+          <a:bodyPr wrap="square" lIns="0" tIns="0" rIns="0" bIns="0" rtlCol="0" anchor="t"/>
+          <a:lstStyle/>
+          <a:p>
+            <a:pPr algn="r" indent="0" marL="0">
+              <a:buNone/>
+            </a:pPr>
+            <a:r>
+              <a:rPr lang="en-US" sz="1600" b="1" dirty="0">
+                <a:solidFill>
+                  <a:srgbClr val="191F28"/>
+                </a:solidFill>
+                <a:latin typeface="Arial" pitchFamily="34" charset="0"/>
+                <a:ea typeface="Arial" pitchFamily="34" charset="-122"/>
+                <a:cs typeface="Arial" pitchFamily="34" charset="-120"/>
+              </a:rPr>
+              <a:t>85%</a:t>
+            </a:r>
+            <a:endParaRPr lang="en-US" sz="1600" dirty="0"/>
+          </a:p>
+        </p:txBody>
+      </p:sp>
+      <p:sp>
+        <p:nvSpPr>
+          <p:cNvPr id="8" name="Text 6"/>
+          <p:cNvSpPr/>
+          <p:nvPr/>
+        </p:nvSpPr>
+        <p:spPr>
+          <a:xfrm>
+            <a:off x="822960" y="3392424"/>
+            <a:ext cx="3108960" cy="310896"/>
+          </a:xfrm>
+          <a:prstGeom prst="rect">
+            <a:avLst/>
+          </a:prstGeom>
+          <a:noFill/>
+          <a:ln/>
+        </p:spPr>
+        <p:txBody>
+          <a:bodyPr wrap="square" lIns="0" tIns="0" rIns="0" bIns="0" rtlCol="0" anchor="t"/>
+          <a:lstStyle/>
+          <a:p>
+            <a:pPr indent="0" marL="0">
+              <a:buNone/>
+            </a:pPr>
+            <a:r>
+              <a:rPr lang="en-US" sz="1400" dirty="0">
+                <a:solidFill>
+                  <a:srgbClr val="191F28"/>
+                </a:solidFill>
+                <a:latin typeface="Arial" pitchFamily="34" charset="0"/>
+                <a:ea typeface="Arial" pitchFamily="34" charset="-122"/>
+                <a:cs typeface="Arial" pitchFamily="34" charset="-120"/>
+              </a:rPr>
+              <a:t>산업통상부</a:t>
+            </a:r>
+            <a:endParaRPr lang="en-US" sz="1400" dirty="0"/>
+          </a:p>
+        </p:txBody>
+      </p:sp>
+      <p:sp>
+        <p:nvSpPr>
+          <p:cNvPr id="9" name="Text 7"/>
+          <p:cNvSpPr/>
+          <p:nvPr/>
+        </p:nvSpPr>
+        <p:spPr>
+          <a:xfrm>
+            <a:off x="3931920" y="3419856"/>
+            <a:ext cx="1463040" cy="274320"/>
+          </a:xfrm>
+          <a:prstGeom prst="rect">
+            <a:avLst/>
+          </a:prstGeom>
+          <a:noFill/>
+          <a:ln/>
+        </p:spPr>
+        <p:txBody>
+          <a:bodyPr wrap="square" lIns="0" tIns="0" rIns="0" bIns="0" rtlCol="0" anchor="t"/>
+          <a:lstStyle/>
+          <a:p>
+            <a:pPr indent="0" marL="0">
+              <a:buNone/>
+            </a:pPr>
+            <a:r>
+              <a:rPr lang="en-US" sz="1100" dirty="0">
+                <a:solidFill>
+                  <a:srgbClr val="8B95A1"/>
+                </a:solidFill>
+                <a:latin typeface="Arial" pitchFamily="34" charset="0"/>
+                <a:ea typeface="Arial" pitchFamily="34" charset="-122"/>
+                <a:cs typeface="Arial" pitchFamily="34" charset="-120"/>
+              </a:rPr>
+              <a:t>개발에 쓴 공고</a:t>
+            </a:r>
+            <a:endParaRPr lang="en-US" sz="1100" dirty="0"/>
+          </a:p>
+        </p:txBody>
+      </p:sp>
+      <p:sp>
+        <p:nvSpPr>
+          <p:cNvPr id="10" name="Text 8"/>
+          <p:cNvSpPr/>
+          <p:nvPr/>
+        </p:nvSpPr>
+        <p:spPr>
+          <a:xfrm>
+            <a:off x="5394960" y="3392424"/>
+            <a:ext cx="914400" cy="310896"/>
+          </a:xfrm>
+          <a:prstGeom prst="rect">
+            <a:avLst/>
+          </a:prstGeom>
+          <a:noFill/>
+          <a:ln/>
+        </p:spPr>
+        <p:txBody>
+          <a:bodyPr wrap="square" lIns="0" tIns="0" rIns="0" bIns="0" rtlCol="0" anchor="t"/>
+          <a:lstStyle/>
+          <a:p>
+            <a:pPr algn="r" indent="0" marL="0">
+              <a:buNone/>
+            </a:pPr>
+            <a:r>
+              <a:rPr lang="en-US" sz="1600" b="1" dirty="0">
+                <a:solidFill>
+                  <a:srgbClr val="191F28"/>
+                </a:solidFill>
+                <a:latin typeface="Arial" pitchFamily="34" charset="0"/>
+                <a:ea typeface="Arial" pitchFamily="34" charset="-122"/>
+                <a:cs typeface="Arial" pitchFamily="34" charset="-120"/>
+              </a:rPr>
+              <a:t>93%</a:t>
+            </a:r>
+            <a:endParaRPr lang="en-US" sz="1600" dirty="0"/>
+          </a:p>
+        </p:txBody>
+      </p:sp>
+      <p:sp>
+        <p:nvSpPr>
+          <p:cNvPr id="11" name="Text 9"/>
+          <p:cNvSpPr/>
+          <p:nvPr/>
+        </p:nvSpPr>
+        <p:spPr>
+          <a:xfrm>
+            <a:off x="822960" y="3813048"/>
+            <a:ext cx="3108960" cy="310896"/>
+          </a:xfrm>
+          <a:prstGeom prst="rect">
+            <a:avLst/>
+          </a:prstGeom>
+          <a:noFill/>
+          <a:ln/>
+        </p:spPr>
+        <p:txBody>
+          <a:bodyPr wrap="square" lIns="0" tIns="0" rIns="0" bIns="0" rtlCol="0" anchor="t"/>
+          <a:lstStyle/>
+          <a:p>
+            <a:pPr indent="0" marL="0">
+              <a:buNone/>
+            </a:pPr>
+            <a:r>
+              <a:rPr lang="en-US" sz="1400" dirty="0">
+                <a:solidFill>
+                  <a:srgbClr val="191F28"/>
+                </a:solidFill>
+                <a:latin typeface="Arial" pitchFamily="34" charset="0"/>
+                <a:ea typeface="Arial" pitchFamily="34" charset="-122"/>
+                <a:cs typeface="Arial" pitchFamily="34" charset="-120"/>
+              </a:rPr>
+              <a:t>NAIS 해커톤</a:t>
+            </a:r>
+            <a:endParaRPr lang="en-US" sz="1400" dirty="0"/>
+          </a:p>
+        </p:txBody>
+      </p:sp>
+      <p:sp>
+        <p:nvSpPr>
+          <p:cNvPr id="12" name="Text 10"/>
+          <p:cNvSpPr/>
+          <p:nvPr/>
+        </p:nvSpPr>
+        <p:spPr>
+          <a:xfrm>
+            <a:off x="3931920" y="3840480"/>
+            <a:ext cx="1463040" cy="274320"/>
+          </a:xfrm>
+          <a:prstGeom prst="rect">
+            <a:avLst/>
+          </a:prstGeom>
+          <a:noFill/>
+          <a:ln/>
+        </p:spPr>
+        <p:txBody>
+          <a:bodyPr wrap="square" lIns="0" tIns="0" rIns="0" bIns="0" rtlCol="0" anchor="t"/>
+          <a:lstStyle/>
+          <a:p>
+            <a:pPr indent="0" marL="0">
+              <a:buNone/>
+            </a:pPr>
+            <a:r>
+              <a:rPr lang="en-US" sz="1100" dirty="0">
+                <a:solidFill>
+                  <a:srgbClr val="8B95A1"/>
+                </a:solidFill>
+                <a:latin typeface="Arial" pitchFamily="34" charset="0"/>
+                <a:ea typeface="Arial" pitchFamily="34" charset="-122"/>
+                <a:cs typeface="Arial" pitchFamily="34" charset="-120"/>
+              </a:rPr>
+              <a:t>개발에 쓴 공고</a:t>
+            </a:r>
+            <a:endParaRPr lang="en-US" sz="1100" dirty="0"/>
+          </a:p>
+        </p:txBody>
+      </p:sp>
+      <p:sp>
+        <p:nvSpPr>
+          <p:cNvPr id="13" name="Text 11"/>
+          <p:cNvSpPr/>
+          <p:nvPr/>
+        </p:nvSpPr>
+        <p:spPr>
+          <a:xfrm>
+            <a:off x="5394960" y="3813048"/>
+            <a:ext cx="914400" cy="310896"/>
+          </a:xfrm>
+          <a:prstGeom prst="rect">
+            <a:avLst/>
+          </a:prstGeom>
+          <a:noFill/>
+          <a:ln/>
+        </p:spPr>
+        <p:txBody>
+          <a:bodyPr wrap="square" lIns="0" tIns="0" rIns="0" bIns="0" rtlCol="0" anchor="t"/>
+          <a:lstStyle/>
+          <a:p>
+            <a:pPr algn="r" indent="0" marL="0">
+              <a:buNone/>
+            </a:pPr>
+            <a:r>
+              <a:rPr lang="en-US" sz="1600" b="1" dirty="0">
+                <a:solidFill>
+                  <a:srgbClr val="191F28"/>
+                </a:solidFill>
+                <a:latin typeface="Arial" pitchFamily="34" charset="0"/>
+                <a:ea typeface="Arial" pitchFamily="34" charset="-122"/>
+                <a:cs typeface="Arial" pitchFamily="34" charset="-120"/>
+              </a:rPr>
+              <a:t>87%</a:t>
+            </a:r>
+            <a:endParaRPr lang="en-US" sz="1600" dirty="0"/>
+          </a:p>
+        </p:txBody>
+      </p:sp>
+      <p:sp>
+        <p:nvSpPr>
+          <p:cNvPr id="14" name="Text 12"/>
+          <p:cNvSpPr/>
+          <p:nvPr/>
+        </p:nvSpPr>
+        <p:spPr>
+          <a:xfrm>
+            <a:off x="822960" y="4233672"/>
+            <a:ext cx="3108960" cy="310896"/>
+          </a:xfrm>
+          <a:prstGeom prst="rect">
+            <a:avLst/>
+          </a:prstGeom>
+          <a:noFill/>
+          <a:ln/>
+        </p:spPr>
+        <p:txBody>
+          <a:bodyPr wrap="square" lIns="0" tIns="0" rIns="0" bIns="0" rtlCol="0" anchor="t"/>
+          <a:lstStyle/>
+          <a:p>
+            <a:pPr indent="0" marL="0">
+              <a:buNone/>
+            </a:pPr>
+            <a:r>
+              <a:rPr lang="en-US" sz="1400" b="1" dirty="0">
+                <a:solidFill>
+                  <a:srgbClr val="1B64DA"/>
+                </a:solidFill>
+                <a:latin typeface="Arial" pitchFamily="34" charset="0"/>
+                <a:ea typeface="Arial" pitchFamily="34" charset="-122"/>
+                <a:cs typeface="Arial" pitchFamily="34" charset="-120"/>
+              </a:rPr>
+              <a:t>과기정통부 국가과학자</a:t>
+            </a:r>
+            <a:endParaRPr lang="en-US" sz="1400" dirty="0"/>
+          </a:p>
+        </p:txBody>
+      </p:sp>
+      <p:sp>
+        <p:nvSpPr>
+          <p:cNvPr id="15" name="Text 13"/>
+          <p:cNvSpPr/>
+          <p:nvPr/>
+        </p:nvSpPr>
+        <p:spPr>
+          <a:xfrm>
+            <a:off x="3931920" y="4261104"/>
+            <a:ext cx="1463040" cy="274320"/>
+          </a:xfrm>
+          <a:prstGeom prst="rect">
+            <a:avLst/>
+          </a:prstGeom>
+          <a:noFill/>
+          <a:ln/>
+        </p:spPr>
+        <p:txBody>
+          <a:bodyPr wrap="square" lIns="0" tIns="0" rIns="0" bIns="0" rtlCol="0" anchor="t"/>
+          <a:lstStyle/>
+          <a:p>
+            <a:pPr indent="0" marL="0">
+              <a:buNone/>
+            </a:pPr>
+            <a:r>
+              <a:rPr lang="en-US" sz="1100" dirty="0">
+                <a:solidFill>
+                  <a:srgbClr val="8B95A1"/>
+                </a:solidFill>
+                <a:latin typeface="Arial" pitchFamily="34" charset="0"/>
+                <a:ea typeface="Arial" pitchFamily="34" charset="-122"/>
+                <a:cs typeface="Arial" pitchFamily="34" charset="-120"/>
+              </a:rPr>
+              <a:t>처음 보는 공고</a:t>
+            </a:r>
+            <a:endParaRPr lang="en-US" sz="1100" dirty="0"/>
+          </a:p>
+        </p:txBody>
+      </p:sp>
+      <p:sp>
+        <p:nvSpPr>
+          <p:cNvPr id="16" name="Text 14"/>
+          <p:cNvSpPr/>
+          <p:nvPr/>
+        </p:nvSpPr>
+        <p:spPr>
+          <a:xfrm>
+            <a:off x="5394960" y="4233672"/>
+            <a:ext cx="914400" cy="310896"/>
+          </a:xfrm>
+          <a:prstGeom prst="rect">
+            <a:avLst/>
+          </a:prstGeom>
+          <a:noFill/>
+          <a:ln/>
+        </p:spPr>
+        <p:txBody>
+          <a:bodyPr wrap="square" lIns="0" tIns="0" rIns="0" bIns="0" rtlCol="0" anchor="t"/>
+          <a:lstStyle/>
+          <a:p>
+            <a:pPr algn="r" indent="0" marL="0">
+              <a:buNone/>
+            </a:pPr>
+            <a:r>
+              <a:rPr lang="en-US" sz="1600" b="1" dirty="0">
+                <a:solidFill>
+                  <a:srgbClr val="1B64DA"/>
+                </a:solidFill>
+                <a:latin typeface="Arial" pitchFamily="34" charset="0"/>
+                <a:ea typeface="Arial" pitchFamily="34" charset="-122"/>
+                <a:cs typeface="Arial" pitchFamily="34" charset="-120"/>
+              </a:rPr>
+              <a:t>94%</a:t>
+            </a:r>
+            <a:endParaRPr lang="en-US" sz="1600" dirty="0"/>
+          </a:p>
+        </p:txBody>
+      </p:sp>
+      <p:sp>
+        <p:nvSpPr>
+          <p:cNvPr id="17" name="Text 15"/>
+          <p:cNvSpPr/>
+          <p:nvPr/>
+        </p:nvSpPr>
+        <p:spPr>
+          <a:xfrm>
+            <a:off x="822960" y="4654296"/>
+            <a:ext cx="3108960" cy="310896"/>
+          </a:xfrm>
+          <a:prstGeom prst="rect">
+            <a:avLst/>
+          </a:prstGeom>
+          <a:noFill/>
+          <a:ln/>
+        </p:spPr>
+        <p:txBody>
+          <a:bodyPr wrap="square" lIns="0" tIns="0" rIns="0" bIns="0" rtlCol="0" anchor="t"/>
+          <a:lstStyle/>
+          <a:p>
+            <a:pPr indent="0" marL="0">
+              <a:buNone/>
+            </a:pPr>
+            <a:r>
+              <a:rPr lang="en-US" sz="1400" b="1" dirty="0">
+                <a:solidFill>
+                  <a:srgbClr val="1B64DA"/>
+                </a:solidFill>
+                <a:latin typeface="Arial" pitchFamily="34" charset="0"/>
+                <a:ea typeface="Arial" pitchFamily="34" charset="-122"/>
+                <a:cs typeface="Arial" pitchFamily="34" charset="-120"/>
+              </a:rPr>
+              <a:t>과기정통부 라이징스타</a:t>
+            </a:r>
+            <a:endParaRPr lang="en-US" sz="1400" dirty="0"/>
+          </a:p>
+        </p:txBody>
+      </p:sp>
+      <p:sp>
+        <p:nvSpPr>
+          <p:cNvPr id="18" name="Text 16"/>
+          <p:cNvSpPr/>
+          <p:nvPr/>
+        </p:nvSpPr>
+        <p:spPr>
+          <a:xfrm>
+            <a:off x="3931920" y="4681728"/>
+            <a:ext cx="1463040" cy="274320"/>
+          </a:xfrm>
+          <a:prstGeom prst="rect">
+            <a:avLst/>
+          </a:prstGeom>
+          <a:noFill/>
+          <a:ln/>
+        </p:spPr>
+        <p:txBody>
+          <a:bodyPr wrap="square" lIns="0" tIns="0" rIns="0" bIns="0" rtlCol="0" anchor="t"/>
+          <a:lstStyle/>
+          <a:p>
+            <a:pPr indent="0" marL="0">
+              <a:buNone/>
+            </a:pPr>
+            <a:r>
+              <a:rPr lang="en-US" sz="1100" dirty="0">
+                <a:solidFill>
+                  <a:srgbClr val="8B95A1"/>
+                </a:solidFill>
+                <a:latin typeface="Arial" pitchFamily="34" charset="0"/>
+                <a:ea typeface="Arial" pitchFamily="34" charset="-122"/>
+                <a:cs typeface="Arial" pitchFamily="34" charset="-120"/>
+              </a:rPr>
+              <a:t>처음 보는 공고</a:t>
+            </a:r>
+            <a:endParaRPr lang="en-US" sz="1100" dirty="0"/>
+          </a:p>
+        </p:txBody>
+      </p:sp>
+      <p:sp>
+        <p:nvSpPr>
+          <p:cNvPr id="19" name="Text 17"/>
+          <p:cNvSpPr/>
+          <p:nvPr/>
+        </p:nvSpPr>
+        <p:spPr>
+          <a:xfrm>
+            <a:off x="5394960" y="4654296"/>
+            <a:ext cx="914400" cy="310896"/>
+          </a:xfrm>
+          <a:prstGeom prst="rect">
+            <a:avLst/>
+          </a:prstGeom>
+          <a:noFill/>
+          <a:ln/>
+        </p:spPr>
+        <p:txBody>
+          <a:bodyPr wrap="square" lIns="0" tIns="0" rIns="0" bIns="0" rtlCol="0" anchor="t"/>
+          <a:lstStyle/>
+          <a:p>
+            <a:pPr algn="r" indent="0" marL="0">
+              <a:buNone/>
+            </a:pPr>
+            <a:r>
+              <a:rPr lang="en-US" sz="1600" b="1" dirty="0">
+                <a:solidFill>
+                  <a:srgbClr val="1B64DA"/>
+                </a:solidFill>
+                <a:latin typeface="Arial" pitchFamily="34" charset="0"/>
+                <a:ea typeface="Arial" pitchFamily="34" charset="-122"/>
+                <a:cs typeface="Arial" pitchFamily="34" charset="-120"/>
+              </a:rPr>
+              <a:t>78%</a:t>
+            </a:r>
+            <a:endParaRPr lang="en-US" sz="1600" dirty="0"/>
+          </a:p>
+        </p:txBody>
+      </p:sp>
+      <p:sp>
+        <p:nvSpPr>
+          <p:cNvPr id="20" name="Text 18"/>
+          <p:cNvSpPr/>
+          <p:nvPr/>
+        </p:nvSpPr>
+        <p:spPr>
+          <a:xfrm>
+            <a:off x="822960" y="5120640"/>
+            <a:ext cx="5486400" cy="274320"/>
+          </a:xfrm>
+          <a:prstGeom prst="rect">
+            <a:avLst/>
+          </a:prstGeom>
+          <a:noFill/>
+          <a:ln/>
+        </p:spPr>
+        <p:txBody>
+          <a:bodyPr wrap="square" lIns="0" tIns="0" rIns="0" bIns="0" rtlCol="0" anchor="t"/>
+          <a:lstStyle/>
+          <a:p>
+            <a:pPr indent="0" marL="0">
+              <a:buNone/>
+            </a:pPr>
+            <a:r>
+              <a:rPr lang="en-US" sz="1200" dirty="0">
+                <a:solidFill>
+                  <a:srgbClr val="4E5968"/>
+                </a:solidFill>
+                <a:latin typeface="Arial" pitchFamily="34" charset="0"/>
+                <a:ea typeface="Arial" pitchFamily="34" charset="-122"/>
+                <a:cs typeface="Arial" pitchFamily="34" charset="-120"/>
+              </a:rPr>
+              <a:t>심사표 배점은 다섯 건 모두 정확히 뽑았습니다</a:t>
+            </a:r>
+            <a:endParaRPr lang="en-US" sz="1200" dirty="0"/>
+          </a:p>
+        </p:txBody>
+      </p:sp>
+      <p:sp>
+        <p:nvSpPr>
+          <p:cNvPr id="21" name="Text 19"/>
+          <p:cNvSpPr/>
+          <p:nvPr/>
+        </p:nvSpPr>
+        <p:spPr>
+          <a:xfrm>
+            <a:off x="6675120" y="2606040"/>
+            <a:ext cx="4690872" cy="274320"/>
+          </a:xfrm>
+          <a:prstGeom prst="rect">
+            <a:avLst/>
+          </a:prstGeom>
+          <a:noFill/>
+          <a:ln/>
+        </p:spPr>
+        <p:txBody>
+          <a:bodyPr wrap="square" lIns="0" tIns="0" rIns="0" bIns="0" rtlCol="0" anchor="t"/>
+          <a:lstStyle/>
+          <a:p>
+            <a:pPr indent="0" marL="0">
+              <a:buNone/>
+            </a:pPr>
+            <a:r>
+              <a:rPr lang="en-US" sz="1300" b="1" dirty="0">
+                <a:solidFill>
+                  <a:srgbClr val="4E5968"/>
+                </a:solidFill>
+                <a:latin typeface="Arial" pitchFamily="34" charset="0"/>
+                <a:ea typeface="Arial" pitchFamily="34" charset="-122"/>
+                <a:cs typeface="Arial" pitchFamily="34" charset="-120"/>
+              </a:rPr>
+              <a:t>근거를 일부러 지운 초안 5개, 잘못 짚은 곳</a:t>
             </a:r>
             <a:endParaRPr lang="en-US" sz="1300" dirty="0"/>
           </a:p>
@@ -2330,199 +3082,23 @@
       </p:sp>
       <p:sp>
         <p:nvSpPr>
-          <p:cNvPr id="5" name="Text 3"/>
-          <p:cNvSpPr/>
-          <p:nvPr/>
-        </p:nvSpPr>
-        <p:spPr>
-          <a:xfrm>
-            <a:off x="6720840" y="2606040"/>
-            <a:ext cx="4572000" cy="274320"/>
-          </a:xfrm>
-          <a:prstGeom prst="rect">
-            <a:avLst/>
-          </a:prstGeom>
-          <a:noFill/>
-          <a:ln/>
-        </p:spPr>
-        <p:txBody>
-          <a:bodyPr wrap="square" lIns="0" tIns="0" rIns="0" bIns="0" rtlCol="0" anchor="t"/>
-          <a:lstStyle/>
-          <a:p>
-            <a:pPr indent="0" marL="0">
-              <a:buNone/>
-            </a:pPr>
-            <a:r>
-              <a:rPr lang="en-US" sz="1300" b="1" dirty="0">
-                <a:solidFill>
-                  <a:srgbClr val="8B95A1"/>
-                </a:solidFill>
-                <a:latin typeface="Arial" pitchFamily="34" charset="0"/>
-                <a:ea typeface="Arial" pitchFamily="34" charset="-122"/>
-                <a:cs typeface="Arial" pitchFamily="34" charset="-120"/>
-              </a:rPr>
-              <a:t>그래서 오늘</a:t>
-            </a:r>
-            <a:endParaRPr lang="en-US" sz="1300" dirty="0"/>
-          </a:p>
-        </p:txBody>
-      </p:sp>
-      <p:sp>
-        <p:nvSpPr>
-          <p:cNvPr id="6" name="Text 4"/>
-          <p:cNvSpPr/>
-          <p:nvPr/>
-        </p:nvSpPr>
-        <p:spPr>
-          <a:xfrm>
-            <a:off x="822960" y="3017520"/>
-            <a:ext cx="5303520" cy="274320"/>
-          </a:xfrm>
-          <a:prstGeom prst="rect">
-            <a:avLst/>
-          </a:prstGeom>
-          <a:noFill/>
-          <a:ln/>
-        </p:spPr>
-        <p:txBody>
-          <a:bodyPr wrap="square" lIns="0" tIns="0" rIns="0" bIns="0" rtlCol="0" anchor="t"/>
-          <a:lstStyle/>
-          <a:p>
-            <a:pPr indent="0" marL="0">
-              <a:buNone/>
-            </a:pPr>
-            <a:r>
-              <a:rPr lang="en-US" sz="1200" b="1" dirty="0">
-                <a:solidFill>
-                  <a:srgbClr val="3182F6"/>
-                </a:solidFill>
-                <a:latin typeface="Arial" pitchFamily="34" charset="0"/>
-                <a:ea typeface="Arial" pitchFamily="34" charset="-122"/>
-                <a:cs typeface="Arial" pitchFamily="34" charset="-120"/>
-              </a:rPr>
-              <a:t>세부 전문형</a:t>
-            </a:r>
-            <a:endParaRPr lang="en-US" sz="1200" dirty="0"/>
-          </a:p>
-        </p:txBody>
-      </p:sp>
-      <p:sp>
-        <p:nvSpPr>
-          <p:cNvPr id="7" name="Text 5"/>
-          <p:cNvSpPr/>
-          <p:nvPr/>
-        </p:nvSpPr>
-        <p:spPr>
-          <a:xfrm>
-            <a:off x="822960" y="3310128"/>
-            <a:ext cx="5303520" cy="365760"/>
-          </a:xfrm>
-          <a:prstGeom prst="rect">
-            <a:avLst/>
-          </a:prstGeom>
-          <a:noFill/>
-          <a:ln/>
-        </p:spPr>
-        <p:txBody>
-          <a:bodyPr wrap="square" lIns="0" tIns="0" rIns="0" bIns="0" rtlCol="0" anchor="t"/>
-          <a:lstStyle/>
-          <a:p>
-            <a:pPr indent="0" marL="0">
-              <a:buNone/>
-            </a:pPr>
-            <a:r>
-              <a:rPr lang="en-US" sz="1500" b="1" dirty="0">
-                <a:solidFill>
-                  <a:srgbClr val="191F28"/>
-                </a:solidFill>
-                <a:latin typeface="Arial" pitchFamily="34" charset="0"/>
-                <a:ea typeface="Arial" pitchFamily="34" charset="-122"/>
-                <a:cs typeface="Arial" pitchFamily="34" charset="-120"/>
-              </a:rPr>
-              <a:t>혁신성 차별성 구체성 부족</a:t>
-            </a:r>
-            <a:endParaRPr lang="en-US" sz="1500" dirty="0"/>
-          </a:p>
-        </p:txBody>
-      </p:sp>
-      <p:sp>
-        <p:nvSpPr>
-          <p:cNvPr id="8" name="Shape 6"/>
-          <p:cNvSpPr/>
-          <p:nvPr/>
-        </p:nvSpPr>
-        <p:spPr>
-          <a:xfrm>
-            <a:off x="6309360" y="3474720"/>
-            <a:ext cx="274320" cy="0"/>
-          </a:xfrm>
-          <a:prstGeom prst="line">
-            <a:avLst/>
-          </a:prstGeom>
-          <a:noFill/>
-          <a:ln w="15875">
-            <a:solidFill>
-              <a:srgbClr val="8B95A1"/>
-            </a:solidFill>
-            <a:prstDash val="solid"/>
-            <a:tailEnd type="triangle"/>
-          </a:ln>
-        </p:spPr>
-      </p:sp>
-      <p:sp>
-        <p:nvSpPr>
-          <p:cNvPr id="9" name="Text 7"/>
-          <p:cNvSpPr/>
-          <p:nvPr/>
-        </p:nvSpPr>
-        <p:spPr>
-          <a:xfrm>
-            <a:off x="6720840" y="3310128"/>
-            <a:ext cx="4645152" cy="365760"/>
-          </a:xfrm>
-          <a:prstGeom prst="rect">
-            <a:avLst/>
-          </a:prstGeom>
-          <a:noFill/>
-          <a:ln/>
-        </p:spPr>
-        <p:txBody>
-          <a:bodyPr wrap="square" lIns="0" tIns="0" rIns="0" bIns="0" rtlCol="0" anchor="t"/>
-          <a:lstStyle/>
-          <a:p>
-            <a:pPr indent="0" marL="0">
-              <a:buNone/>
-            </a:pPr>
-            <a:r>
-              <a:rPr lang="en-US" sz="1500" dirty="0">
-                <a:solidFill>
-                  <a:srgbClr val="191F28"/>
-                </a:solidFill>
-                <a:latin typeface="Arial" pitchFamily="34" charset="0"/>
-                <a:ea typeface="Arial" pitchFamily="34" charset="-122"/>
-                <a:cs typeface="Arial" pitchFamily="34" charset="-120"/>
-              </a:rPr>
-              <a:t>구조의 차별점과 관점 수 실험을 준비했습니다</a:t>
-            </a:r>
-            <a:endParaRPr lang="en-US" sz="1500" dirty="0"/>
-          </a:p>
-        </p:txBody>
-      </p:sp>
-      <p:sp>
-        <p:nvSpPr>
-          <p:cNvPr id="10" name="Shape 8"/>
-          <p:cNvSpPr/>
-          <p:nvPr/>
-        </p:nvSpPr>
-        <p:spPr>
-          <a:xfrm>
-            <a:off x="822960" y="3822192"/>
-            <a:ext cx="10543032" cy="0"/>
-          </a:xfrm>
-          <a:prstGeom prst="line">
-            <a:avLst/>
-          </a:prstGeom>
-          <a:noFill/>
+          <p:cNvPr id="22" name="Shape 20"/>
+          <p:cNvSpPr/>
+          <p:nvPr/>
+        </p:nvSpPr>
+        <p:spPr>
+          <a:xfrm>
+            <a:off x="6675120" y="2971800"/>
+            <a:ext cx="1472184" cy="1828800"/>
+          </a:xfrm>
+          <a:prstGeom prst="roundRect">
+            <a:avLst>
+              <a:gd name="adj" fmla="val 4969"/>
+            </a:avLst>
+          </a:prstGeom>
+          <a:solidFill>
+            <a:srgbClr val="FFFFFF"/>
+          </a:solidFill>
           <a:ln w="12700">
             <a:solidFill>
               <a:srgbClr val="E5E8EB"/>
@@ -2533,14 +3109,14 @@
       </p:sp>
       <p:sp>
         <p:nvSpPr>
-          <p:cNvPr id="11" name="Text 9"/>
-          <p:cNvSpPr/>
-          <p:nvPr/>
-        </p:nvSpPr>
-        <p:spPr>
-          <a:xfrm>
-            <a:off x="822960" y="3931920"/>
-            <a:ext cx="5303520" cy="274320"/>
+          <p:cNvPr id="23" name="Text 21"/>
+          <p:cNvSpPr/>
+          <p:nvPr/>
+        </p:nvSpPr>
+        <p:spPr>
+          <a:xfrm>
+            <a:off x="6812280" y="3108960"/>
+            <a:ext cx="1197864" cy="274320"/>
           </a:xfrm>
           <a:prstGeom prst="rect">
             <a:avLst/>
@@ -2558,13 +3134,13 @@
             <a:r>
               <a:rPr lang="en-US" sz="1200" b="1" dirty="0">
                 <a:solidFill>
-                  <a:srgbClr val="3182F6"/>
-                </a:solidFill>
-                <a:latin typeface="Arial" pitchFamily="34" charset="0"/>
-                <a:ea typeface="Arial" pitchFamily="34" charset="-122"/>
-                <a:cs typeface="Arial" pitchFamily="34" charset="-120"/>
-              </a:rPr>
-              <a:t>사업성·시장형</a:t>
+                  <a:srgbClr val="191F28"/>
+                </a:solidFill>
+                <a:latin typeface="Arial" pitchFamily="34" charset="0"/>
+                <a:ea typeface="Arial" pitchFamily="34" charset="-122"/>
+                <a:cs typeface="Arial" pitchFamily="34" charset="-120"/>
+              </a:rPr>
+              <a:t>관점 1개</a:t>
             </a:r>
             <a:endParaRPr lang="en-US" sz="1200" dirty="0"/>
           </a:p>
@@ -2572,30 +3148,30 @@
       </p:sp>
       <p:sp>
         <p:nvSpPr>
-          <p:cNvPr id="12" name="Text 10"/>
-          <p:cNvSpPr/>
-          <p:nvPr/>
-        </p:nvSpPr>
-        <p:spPr>
-          <a:xfrm>
-            <a:off x="822960" y="4224528"/>
-            <a:ext cx="5303520" cy="365760"/>
-          </a:xfrm>
-          <a:prstGeom prst="rect">
-            <a:avLst/>
-          </a:prstGeom>
-          <a:noFill/>
-          <a:ln/>
-        </p:spPr>
-        <p:txBody>
-          <a:bodyPr wrap="square" lIns="0" tIns="0" rIns="0" bIns="0" rtlCol="0" anchor="t"/>
-          <a:lstStyle/>
-          <a:p>
-            <a:pPr indent="0" marL="0">
-              <a:buNone/>
-            </a:pPr>
-            <a:r>
-              <a:rPr lang="en-US" sz="1500" b="1" dirty="0">
+          <p:cNvPr id="24" name="Text 22"/>
+          <p:cNvSpPr/>
+          <p:nvPr/>
+        </p:nvSpPr>
+        <p:spPr>
+          <a:xfrm>
+            <a:off x="6812280" y="3474720"/>
+            <a:ext cx="1197864" cy="731520"/>
+          </a:xfrm>
+          <a:prstGeom prst="rect">
+            <a:avLst/>
+          </a:prstGeom>
+          <a:noFill/>
+          <a:ln/>
+        </p:spPr>
+        <p:txBody>
+          <a:bodyPr wrap="square" lIns="0" tIns="0" rIns="0" bIns="0" rtlCol="0" anchor="t"/>
+          <a:lstStyle/>
+          <a:p>
+            <a:pPr indent="0" marL="0">
+              <a:buNone/>
+            </a:pPr>
+            <a:r>
+              <a:rPr lang="en-US" sz="4200" b="1" dirty="0">
                 <a:solidFill>
                   <a:srgbClr val="191F28"/>
                 </a:solidFill>
@@ -2603,62 +3179,104 @@
                 <a:ea typeface="Arial" pitchFamily="34" charset="-122"/>
                 <a:cs typeface="Arial" pitchFamily="34" charset="-120"/>
               </a:rPr>
-              <a:t>시장수요는 보이나 실증·구매주체가 약함</a:t>
-            </a:r>
-            <a:endParaRPr lang="en-US" sz="1500" dirty="0"/>
-          </a:p>
-        </p:txBody>
-      </p:sp>
-      <p:sp>
-        <p:nvSpPr>
-          <p:cNvPr id="13" name="Shape 11"/>
-          <p:cNvSpPr/>
-          <p:nvPr/>
-        </p:nvSpPr>
-        <p:spPr>
-          <a:xfrm>
-            <a:off x="6309360" y="4389120"/>
-            <a:ext cx="274320" cy="0"/>
-          </a:xfrm>
-          <a:prstGeom prst="line">
-            <a:avLst/>
-          </a:prstGeom>
-          <a:noFill/>
-          <a:ln w="15875">
+              <a:t>3</a:t>
+            </a:r>
+            <a:endParaRPr lang="en-US" sz="4200" dirty="0"/>
+          </a:p>
+        </p:txBody>
+      </p:sp>
+      <p:sp>
+        <p:nvSpPr>
+          <p:cNvPr id="25" name="Text 23"/>
+          <p:cNvSpPr/>
+          <p:nvPr/>
+        </p:nvSpPr>
+        <p:spPr>
+          <a:xfrm>
+            <a:off x="6812280" y="4343400"/>
+            <a:ext cx="1197864" cy="274320"/>
+          </a:xfrm>
+          <a:prstGeom prst="rect">
+            <a:avLst/>
+          </a:prstGeom>
+          <a:noFill/>
+          <a:ln/>
+        </p:spPr>
+        <p:txBody>
+          <a:bodyPr wrap="square" lIns="0" tIns="0" rIns="0" bIns="0" rtlCol="0" anchor="t"/>
+          <a:lstStyle/>
+          <a:p>
+            <a:pPr indent="0" marL="0">
+              <a:buNone/>
+            </a:pPr>
+            <a:r>
+              <a:rPr lang="en-US" sz="1100" dirty="0">
+                <a:solidFill>
+                  <a:srgbClr val="4E5968"/>
+                </a:solidFill>
+                <a:latin typeface="Arial" pitchFamily="34" charset="0"/>
+                <a:ea typeface="Arial" pitchFamily="34" charset="-122"/>
+                <a:cs typeface="Arial" pitchFamily="34" charset="-120"/>
+              </a:rPr>
+              <a:t>찾은 곳 5/5</a:t>
+            </a:r>
+            <a:endParaRPr lang="en-US" sz="1100" dirty="0"/>
+          </a:p>
+        </p:txBody>
+      </p:sp>
+      <p:sp>
+        <p:nvSpPr>
+          <p:cNvPr id="26" name="Shape 24"/>
+          <p:cNvSpPr/>
+          <p:nvPr/>
+        </p:nvSpPr>
+        <p:spPr>
+          <a:xfrm>
+            <a:off x="8284464" y="2971800"/>
+            <a:ext cx="1472184" cy="1828800"/>
+          </a:xfrm>
+          <a:prstGeom prst="roundRect">
+            <a:avLst>
+              <a:gd name="adj" fmla="val 4969"/>
+            </a:avLst>
+          </a:prstGeom>
+          <a:solidFill>
+            <a:srgbClr val="EAF3FF"/>
+          </a:solidFill>
+          <a:ln w="12700">
             <a:solidFill>
-              <a:srgbClr val="8B95A1"/>
+              <a:srgbClr val="3182F6"/>
             </a:solidFill>
             <a:prstDash val="solid"/>
-            <a:tailEnd type="triangle"/>
           </a:ln>
         </p:spPr>
       </p:sp>
       <p:sp>
         <p:nvSpPr>
-          <p:cNvPr id="14" name="Text 12"/>
-          <p:cNvSpPr/>
-          <p:nvPr/>
-        </p:nvSpPr>
-        <p:spPr>
-          <a:xfrm>
-            <a:off x="6720840" y="4224528"/>
-            <a:ext cx="4645152" cy="365760"/>
-          </a:xfrm>
-          <a:prstGeom prst="rect">
-            <a:avLst/>
-          </a:prstGeom>
-          <a:noFill/>
-          <a:ln/>
-        </p:spPr>
-        <p:txBody>
-          <a:bodyPr wrap="square" lIns="0" tIns="0" rIns="0" bIns="0" rtlCol="0" anchor="t"/>
-          <a:lstStyle/>
-          <a:p>
-            <a:pPr indent="0" marL="0">
-              <a:buNone/>
-            </a:pPr>
-            <a:r>
-              <a:rPr lang="en-US" sz="1500" dirty="0">
+          <p:cNvPr id="27" name="Text 25"/>
+          <p:cNvSpPr/>
+          <p:nvPr/>
+        </p:nvSpPr>
+        <p:spPr>
+          <a:xfrm>
+            <a:off x="8421624" y="3108960"/>
+            <a:ext cx="1197864" cy="274320"/>
+          </a:xfrm>
+          <a:prstGeom prst="rect">
+            <a:avLst/>
+          </a:prstGeom>
+          <a:noFill/>
+          <a:ln/>
+        </p:spPr>
+        <p:txBody>
+          <a:bodyPr wrap="square" lIns="0" tIns="0" rIns="0" bIns="0" rtlCol="0" anchor="t"/>
+          <a:lstStyle/>
+          <a:p>
+            <a:pPr indent="0" marL="0">
+              <a:buNone/>
+            </a:pPr>
+            <a:r>
+              <a:rPr lang="en-US" sz="1200" b="1" dirty="0">
                 <a:solidFill>
                   <a:srgbClr val="191F28"/>
                 </a:solidFill>
@@ -2666,21 +3284,282 @@
                 <a:ea typeface="Arial" pitchFamily="34" charset="-122"/>
                 <a:cs typeface="Arial" pitchFamily="34" charset="-120"/>
               </a:rPr>
-              <a:t>첫 실증 대상을 전문기관 사전검토로 정했습니다</a:t>
-            </a:r>
-            <a:endParaRPr lang="en-US" sz="1500" dirty="0"/>
-          </a:p>
-        </p:txBody>
-      </p:sp>
-      <p:sp>
-        <p:nvSpPr>
-          <p:cNvPr id="15" name="Shape 13"/>
-          <p:cNvSpPr/>
-          <p:nvPr/>
-        </p:nvSpPr>
-        <p:spPr>
-          <a:xfrm>
-            <a:off x="822960" y="4736592"/>
+              <a:t>관점 6개</a:t>
+            </a:r>
+            <a:endParaRPr lang="en-US" sz="1200" dirty="0"/>
+          </a:p>
+        </p:txBody>
+      </p:sp>
+      <p:sp>
+        <p:nvSpPr>
+          <p:cNvPr id="28" name="Text 26"/>
+          <p:cNvSpPr/>
+          <p:nvPr/>
+        </p:nvSpPr>
+        <p:spPr>
+          <a:xfrm>
+            <a:off x="8421624" y="3474720"/>
+            <a:ext cx="1197864" cy="731520"/>
+          </a:xfrm>
+          <a:prstGeom prst="rect">
+            <a:avLst/>
+          </a:prstGeom>
+          <a:noFill/>
+          <a:ln/>
+        </p:spPr>
+        <p:txBody>
+          <a:bodyPr wrap="square" lIns="0" tIns="0" rIns="0" bIns="0" rtlCol="0" anchor="t"/>
+          <a:lstStyle/>
+          <a:p>
+            <a:pPr indent="0" marL="0">
+              <a:buNone/>
+            </a:pPr>
+            <a:r>
+              <a:rPr lang="en-US" sz="4200" b="1" dirty="0">
+                <a:solidFill>
+                  <a:srgbClr val="1B64DA"/>
+                </a:solidFill>
+                <a:latin typeface="Arial" pitchFamily="34" charset="0"/>
+                <a:ea typeface="Arial" pitchFamily="34" charset="-122"/>
+                <a:cs typeface="Arial" pitchFamily="34" charset="-120"/>
+              </a:rPr>
+              <a:t>0</a:t>
+            </a:r>
+            <a:endParaRPr lang="en-US" sz="4200" dirty="0"/>
+          </a:p>
+        </p:txBody>
+      </p:sp>
+      <p:sp>
+        <p:nvSpPr>
+          <p:cNvPr id="29" name="Text 27"/>
+          <p:cNvSpPr/>
+          <p:nvPr/>
+        </p:nvSpPr>
+        <p:spPr>
+          <a:xfrm>
+            <a:off x="8421624" y="4343400"/>
+            <a:ext cx="1197864" cy="274320"/>
+          </a:xfrm>
+          <a:prstGeom prst="rect">
+            <a:avLst/>
+          </a:prstGeom>
+          <a:noFill/>
+          <a:ln/>
+        </p:spPr>
+        <p:txBody>
+          <a:bodyPr wrap="square" lIns="0" tIns="0" rIns="0" bIns="0" rtlCol="0" anchor="t"/>
+          <a:lstStyle/>
+          <a:p>
+            <a:pPr indent="0" marL="0">
+              <a:buNone/>
+            </a:pPr>
+            <a:r>
+              <a:rPr lang="en-US" sz="1100" dirty="0">
+                <a:solidFill>
+                  <a:srgbClr val="4E5968"/>
+                </a:solidFill>
+                <a:latin typeface="Arial" pitchFamily="34" charset="0"/>
+                <a:ea typeface="Arial" pitchFamily="34" charset="-122"/>
+                <a:cs typeface="Arial" pitchFamily="34" charset="-120"/>
+              </a:rPr>
+              <a:t>찾은 곳 5/5</a:t>
+            </a:r>
+            <a:endParaRPr lang="en-US" sz="1100" dirty="0"/>
+          </a:p>
+        </p:txBody>
+      </p:sp>
+      <p:sp>
+        <p:nvSpPr>
+          <p:cNvPr id="30" name="Shape 28"/>
+          <p:cNvSpPr/>
+          <p:nvPr/>
+        </p:nvSpPr>
+        <p:spPr>
+          <a:xfrm>
+            <a:off x="9893808" y="2971800"/>
+            <a:ext cx="1472184" cy="1828800"/>
+          </a:xfrm>
+          <a:prstGeom prst="roundRect">
+            <a:avLst>
+              <a:gd name="adj" fmla="val 4969"/>
+            </a:avLst>
+          </a:prstGeom>
+          <a:solidFill>
+            <a:srgbClr val="EAF3FF"/>
+          </a:solidFill>
+          <a:ln w="12700">
+            <a:solidFill>
+              <a:srgbClr val="3182F6"/>
+            </a:solidFill>
+            <a:prstDash val="solid"/>
+          </a:ln>
+        </p:spPr>
+      </p:sp>
+      <p:sp>
+        <p:nvSpPr>
+          <p:cNvPr id="31" name="Text 29"/>
+          <p:cNvSpPr/>
+          <p:nvPr/>
+        </p:nvSpPr>
+        <p:spPr>
+          <a:xfrm>
+            <a:off x="10030968" y="3108960"/>
+            <a:ext cx="1197864" cy="274320"/>
+          </a:xfrm>
+          <a:prstGeom prst="rect">
+            <a:avLst/>
+          </a:prstGeom>
+          <a:noFill/>
+          <a:ln/>
+        </p:spPr>
+        <p:txBody>
+          <a:bodyPr wrap="square" lIns="0" tIns="0" rIns="0" bIns="0" rtlCol="0" anchor="t"/>
+          <a:lstStyle/>
+          <a:p>
+            <a:pPr indent="0" marL="0">
+              <a:buNone/>
+            </a:pPr>
+            <a:r>
+              <a:rPr lang="en-US" sz="1200" b="1" dirty="0">
+                <a:solidFill>
+                  <a:srgbClr val="191F28"/>
+                </a:solidFill>
+                <a:latin typeface="Arial" pitchFamily="34" charset="0"/>
+                <a:ea typeface="Arial" pitchFamily="34" charset="-122"/>
+                <a:cs typeface="Arial" pitchFamily="34" charset="-120"/>
+              </a:rPr>
+              <a:t>6개·3사</a:t>
+            </a:r>
+            <a:endParaRPr lang="en-US" sz="1200" dirty="0"/>
+          </a:p>
+        </p:txBody>
+      </p:sp>
+      <p:sp>
+        <p:nvSpPr>
+          <p:cNvPr id="32" name="Text 30"/>
+          <p:cNvSpPr/>
+          <p:nvPr/>
+        </p:nvSpPr>
+        <p:spPr>
+          <a:xfrm>
+            <a:off x="10030968" y="3474720"/>
+            <a:ext cx="1197864" cy="731520"/>
+          </a:xfrm>
+          <a:prstGeom prst="rect">
+            <a:avLst/>
+          </a:prstGeom>
+          <a:noFill/>
+          <a:ln/>
+        </p:spPr>
+        <p:txBody>
+          <a:bodyPr wrap="square" lIns="0" tIns="0" rIns="0" bIns="0" rtlCol="0" anchor="t"/>
+          <a:lstStyle/>
+          <a:p>
+            <a:pPr indent="0" marL="0">
+              <a:buNone/>
+            </a:pPr>
+            <a:r>
+              <a:rPr lang="en-US" sz="4200" b="1" dirty="0">
+                <a:solidFill>
+                  <a:srgbClr val="1B64DA"/>
+                </a:solidFill>
+                <a:latin typeface="Arial" pitchFamily="34" charset="0"/>
+                <a:ea typeface="Arial" pitchFamily="34" charset="-122"/>
+                <a:cs typeface="Arial" pitchFamily="34" charset="-120"/>
+              </a:rPr>
+              <a:t>0</a:t>
+            </a:r>
+            <a:endParaRPr lang="en-US" sz="4200" dirty="0"/>
+          </a:p>
+        </p:txBody>
+      </p:sp>
+      <p:sp>
+        <p:nvSpPr>
+          <p:cNvPr id="33" name="Text 31"/>
+          <p:cNvSpPr/>
+          <p:nvPr/>
+        </p:nvSpPr>
+        <p:spPr>
+          <a:xfrm>
+            <a:off x="10030968" y="4343400"/>
+            <a:ext cx="1197864" cy="274320"/>
+          </a:xfrm>
+          <a:prstGeom prst="rect">
+            <a:avLst/>
+          </a:prstGeom>
+          <a:noFill/>
+          <a:ln/>
+        </p:spPr>
+        <p:txBody>
+          <a:bodyPr wrap="square" lIns="0" tIns="0" rIns="0" bIns="0" rtlCol="0" anchor="t"/>
+          <a:lstStyle/>
+          <a:p>
+            <a:pPr indent="0" marL="0">
+              <a:buNone/>
+            </a:pPr>
+            <a:r>
+              <a:rPr lang="en-US" sz="1100" dirty="0">
+                <a:solidFill>
+                  <a:srgbClr val="4E5968"/>
+                </a:solidFill>
+                <a:latin typeface="Arial" pitchFamily="34" charset="0"/>
+                <a:ea typeface="Arial" pitchFamily="34" charset="-122"/>
+                <a:cs typeface="Arial" pitchFamily="34" charset="-120"/>
+              </a:rPr>
+              <a:t>찾은 곳 4/5</a:t>
+            </a:r>
+            <a:endParaRPr lang="en-US" sz="1100" dirty="0"/>
+          </a:p>
+        </p:txBody>
+      </p:sp>
+      <p:sp>
+        <p:nvSpPr>
+          <p:cNvPr id="34" name="Text 32"/>
+          <p:cNvSpPr/>
+          <p:nvPr/>
+        </p:nvSpPr>
+        <p:spPr>
+          <a:xfrm>
+            <a:off x="6675120" y="5120640"/>
+            <a:ext cx="4690872" cy="274320"/>
+          </a:xfrm>
+          <a:prstGeom prst="rect">
+            <a:avLst/>
+          </a:prstGeom>
+          <a:noFill/>
+          <a:ln/>
+        </p:spPr>
+        <p:txBody>
+          <a:bodyPr wrap="square" lIns="0" tIns="0" rIns="0" bIns="0" rtlCol="0" anchor="t"/>
+          <a:lstStyle/>
+          <a:p>
+            <a:pPr indent="0" marL="0">
+              <a:buNone/>
+            </a:pPr>
+            <a:r>
+              <a:rPr lang="en-US" sz="1200" dirty="0">
+                <a:solidFill>
+                  <a:srgbClr val="4E5968"/>
+                </a:solidFill>
+                <a:latin typeface="Arial" pitchFamily="34" charset="0"/>
+                <a:ea typeface="Arial" pitchFamily="34" charset="-122"/>
+                <a:cs typeface="Arial" pitchFamily="34" charset="-120"/>
+              </a:rPr>
+              <a:t>회사 모델을 섞는 효과는 이번 표본에선 보이지 않았습니다</a:t>
+            </a:r>
+            <a:endParaRPr lang="en-US" sz="1200" dirty="0"/>
+          </a:p>
+        </p:txBody>
+      </p:sp>
+      <p:sp>
+        <p:nvSpPr>
+          <p:cNvPr id="35" name="Shape 33"/>
+          <p:cNvSpPr/>
+          <p:nvPr/>
+        </p:nvSpPr>
+        <p:spPr>
+          <a:xfrm>
+            <a:off x="822960" y="5623560"/>
             <a:ext cx="10543032" cy="0"/>
           </a:xfrm>
           <a:prstGeom prst="line">
@@ -2697,69 +3576,30 @@
       </p:sp>
       <p:sp>
         <p:nvSpPr>
-          <p:cNvPr id="16" name="Text 14"/>
-          <p:cNvSpPr/>
-          <p:nvPr/>
-        </p:nvSpPr>
-        <p:spPr>
-          <a:xfrm>
-            <a:off x="822960" y="4846320"/>
-            <a:ext cx="5303520" cy="274320"/>
-          </a:xfrm>
-          <a:prstGeom prst="rect">
-            <a:avLst/>
-          </a:prstGeom>
-          <a:noFill/>
-          <a:ln/>
-        </p:spPr>
-        <p:txBody>
-          <a:bodyPr wrap="square" lIns="0" tIns="0" rIns="0" bIns="0" rtlCol="0" anchor="t"/>
-          <a:lstStyle/>
-          <a:p>
-            <a:pPr indent="0" marL="0">
-              <a:buNone/>
-            </a:pPr>
-            <a:r>
-              <a:rPr lang="en-US" sz="1200" b="1" dirty="0">
-                <a:solidFill>
-                  <a:srgbClr val="3182F6"/>
-                </a:solidFill>
-                <a:latin typeface="Arial" pitchFamily="34" charset="0"/>
-                <a:ea typeface="Arial" pitchFamily="34" charset="-122"/>
-                <a:cs typeface="Arial" pitchFamily="34" charset="-120"/>
-              </a:rPr>
-              <a:t>행정·관리형</a:t>
-            </a:r>
-            <a:endParaRPr lang="en-US" sz="1200" dirty="0"/>
-          </a:p>
-        </p:txBody>
-      </p:sp>
-      <p:sp>
-        <p:nvSpPr>
-          <p:cNvPr id="17" name="Text 15"/>
-          <p:cNvSpPr/>
-          <p:nvPr/>
-        </p:nvSpPr>
-        <p:spPr>
-          <a:xfrm>
-            <a:off x="822960" y="5138928"/>
-            <a:ext cx="5303520" cy="365760"/>
-          </a:xfrm>
-          <a:prstGeom prst="rect">
-            <a:avLst/>
-          </a:prstGeom>
-          <a:noFill/>
-          <a:ln/>
-        </p:spPr>
-        <p:txBody>
-          <a:bodyPr wrap="square" lIns="0" tIns="0" rIns="0" bIns="0" rtlCol="0" anchor="t"/>
-          <a:lstStyle/>
-          <a:p>
-            <a:pPr indent="0" marL="0">
-              <a:buNone/>
-            </a:pPr>
-            <a:r>
-              <a:rPr lang="en-US" sz="1500" b="1" dirty="0">
+          <p:cNvPr id="36" name="Text 34"/>
+          <p:cNvSpPr/>
+          <p:nvPr/>
+        </p:nvSpPr>
+        <p:spPr>
+          <a:xfrm>
+            <a:off x="822960" y="5760720"/>
+            <a:ext cx="10543032" cy="320040"/>
+          </a:xfrm>
+          <a:prstGeom prst="rect">
+            <a:avLst/>
+          </a:prstGeom>
+          <a:noFill/>
+          <a:ln/>
+        </p:spPr>
+        <p:txBody>
+          <a:bodyPr wrap="square" lIns="0" tIns="0" rIns="0" bIns="0" rtlCol="0" anchor="t"/>
+          <a:lstStyle/>
+          <a:p>
+            <a:pPr indent="0" marL="0">
+              <a:buNone/>
+            </a:pPr>
+            <a:r>
+              <a:rPr lang="en-US" sz="1400" b="1" dirty="0">
                 <a:solidFill>
                   <a:srgbClr val="191F28"/>
                 </a:solidFill>
@@ -2767,111 +3607,48 @@
                 <a:ea typeface="Arial" pitchFamily="34" charset="-122"/>
                 <a:cs typeface="Arial" pitchFamily="34" charset="-120"/>
               </a:rPr>
-              <a:t>해커톤 기간 내 구현 계획의 구체성 부족</a:t>
-            </a:r>
-            <a:endParaRPr lang="en-US" sz="1500" dirty="0"/>
-          </a:p>
-        </p:txBody>
-      </p:sp>
-      <p:sp>
-        <p:nvSpPr>
-          <p:cNvPr id="18" name="Shape 16"/>
-          <p:cNvSpPr/>
-          <p:nvPr/>
-        </p:nvSpPr>
-        <p:spPr>
-          <a:xfrm>
-            <a:off x="6309360" y="5303520"/>
-            <a:ext cx="274320" cy="0"/>
-          </a:xfrm>
-          <a:prstGeom prst="line">
-            <a:avLst/>
-          </a:prstGeom>
-          <a:noFill/>
-          <a:ln w="15875">
-            <a:solidFill>
-              <a:srgbClr val="8B95A1"/>
-            </a:solidFill>
-            <a:prstDash val="solid"/>
-            <a:tailEnd type="triangle"/>
-          </a:ln>
-        </p:spPr>
-      </p:sp>
-      <p:sp>
-        <p:nvSpPr>
-          <p:cNvPr id="19" name="Text 17"/>
-          <p:cNvSpPr/>
-          <p:nvPr/>
-        </p:nvSpPr>
-        <p:spPr>
-          <a:xfrm>
-            <a:off x="6720840" y="5138928"/>
-            <a:ext cx="4645152" cy="365760"/>
-          </a:xfrm>
-          <a:prstGeom prst="rect">
-            <a:avLst/>
-          </a:prstGeom>
-          <a:noFill/>
-          <a:ln/>
-        </p:spPr>
-        <p:txBody>
-          <a:bodyPr wrap="square" lIns="0" tIns="0" rIns="0" bIns="0" rtlCol="0" anchor="t"/>
-          <a:lstStyle/>
-          <a:p>
-            <a:pPr indent="0" marL="0">
-              <a:buNone/>
-            </a:pPr>
-            <a:r>
-              <a:rPr lang="en-US" sz="1500" dirty="0">
-                <a:solidFill>
-                  <a:srgbClr val="191F28"/>
-                </a:solidFill>
-                <a:latin typeface="Arial" pitchFamily="34" charset="0"/>
-                <a:ea typeface="Arial" pitchFamily="34" charset="-122"/>
-                <a:cs typeface="Arial" pitchFamily="34" charset="-120"/>
-              </a:rPr>
-              <a:t>계획 대신 구현 결과와 커밋 기록을 가져왔습니다</a:t>
-            </a:r>
-            <a:endParaRPr lang="en-US" sz="1500" dirty="0"/>
-          </a:p>
-        </p:txBody>
-      </p:sp>
-      <p:sp>
-        <p:nvSpPr>
-          <p:cNvPr id="20" name="Text 18"/>
-          <p:cNvSpPr/>
-          <p:nvPr/>
-        </p:nvSpPr>
-        <p:spPr>
-          <a:xfrm>
-            <a:off x="822960" y="5897880"/>
-            <a:ext cx="10543032" cy="320040"/>
-          </a:xfrm>
-          <a:prstGeom prst="rect">
-            <a:avLst/>
-          </a:prstGeom>
-          <a:noFill/>
-          <a:ln/>
-        </p:spPr>
-        <p:txBody>
-          <a:bodyPr wrap="square" lIns="0" tIns="0" rIns="0" bIns="0" rtlCol="0" anchor="t"/>
-          <a:lstStyle/>
-          <a:p>
-            <a:pPr indent="0" marL="0">
-              <a:buNone/>
-            </a:pPr>
-            <a:r>
-              <a:rPr lang="en-US" sz="1300" dirty="0">
-                <a:solidFill>
-                  <a:srgbClr val="4E5968"/>
-                </a:solidFill>
-                <a:latin typeface="Arial" pitchFamily="34" charset="0"/>
-                <a:ea typeface="Arial" pitchFamily="34" charset="-122"/>
-                <a:cs typeface="Arial" pitchFamily="34" charset="-120"/>
-              </a:rPr>
-              <a:t>결과를 맞히려던 게 아니라, 발표 전에 받을 질문을 먼저 받아 본 것입니다.</a:t>
-            </a:r>
-            <a:endParaRPr lang="en-US" sz="1300" dirty="0"/>
+              <a:t>처음 보는 공고에서 뽑은 요건 51개를 원문과 대조해 보니, 지어낸 요건은 0개였습니다</a:t>
+            </a:r>
+            <a:endParaRPr lang="en-US" sz="1400" dirty="0"/>
+          </a:p>
+        </p:txBody>
+      </p:sp>
+      <p:sp>
+        <p:nvSpPr>
+          <p:cNvPr id="37" name="Text 35"/>
+          <p:cNvSpPr/>
+          <p:nvPr/>
+        </p:nvSpPr>
+        <p:spPr>
+          <a:xfrm>
+            <a:off x="822960" y="6355080"/>
+            <a:ext cx="10543032" cy="274320"/>
+          </a:xfrm>
+          <a:prstGeom prst="rect">
+            <a:avLst/>
+          </a:prstGeom>
+          <a:noFill/>
+          <a:ln/>
+        </p:spPr>
+        <p:txBody>
+          <a:bodyPr wrap="square" lIns="0" tIns="0" rIns="0" bIns="0" rtlCol="0" anchor="t"/>
+          <a:lstStyle/>
+          <a:p>
+            <a:pPr indent="0" marL="0">
+              <a:buNone/>
+            </a:pPr>
+            <a:r>
+              <a:rPr lang="en-US" sz="1000" dirty="0">
+                <a:solidFill>
+                  <a:srgbClr val="8B95A1"/>
+                </a:solidFill>
+                <a:latin typeface="Arial" pitchFamily="34" charset="0"/>
+                <a:ea typeface="Arial" pitchFamily="34" charset="-122"/>
+                <a:cs typeface="Arial" pitchFamily="34" charset="-120"/>
+              </a:rPr>
+              <a:t>정답표와 대조 감사는 파이프라인과 다른 회사 모델(Claude)이 작성, 사람 검수는 아님  ·  data/eval, data/holdout 공개</a:t>
+            </a:r>
+            <a:endParaRPr lang="en-US" sz="1000" dirty="0"/>
           </a:p>
         </p:txBody>
       </p:sp>
@@ -2940,7 +3717,7 @@
                 <a:ea typeface="Arial" pitchFamily="34" charset="-122"/>
                 <a:cs typeface="Arial" pitchFamily="34" charset="-120"/>
               </a:rPr>
-              <a:t>확장</a:t>
+              <a:t>우리 먼저</a:t>
             </a:r>
             <a:endParaRPr lang="en-US" sz="1400" dirty="0"/>
           </a:p>
@@ -2982,7 +3759,7 @@
                 <a:ea typeface="Arial" pitchFamily="34" charset="-122"/>
                 <a:cs typeface="Arial" pitchFamily="34" charset="-120"/>
               </a:rPr>
-              <a:t>제출 전에서 심사까지,</a:t>
+              <a:t>이 대회 심사표로,</a:t>
             </a:r>
             <a:endParaRPr lang="en-US" sz="3400" dirty="0"/>
           </a:p>
@@ -3002,7 +3779,7 @@
                 <a:ea typeface="Arial" pitchFamily="34" charset="-122"/>
                 <a:cs typeface="Arial" pitchFamily="34" charset="-120"/>
               </a:rPr>
-              <a:t>같은 엔진</a:t>
+              <a:t>저희 기획서</a:t>
             </a:r>
             <a:pPr indent="0" marL="0">
               <a:lnSpc>
@@ -3019,7 +3796,7 @@
                 <a:ea typeface="Arial" pitchFamily="34" charset="-122"/>
                 <a:cs typeface="Arial" pitchFamily="34" charset="-120"/>
               </a:rPr>
-              <a:t>으로 갑니다</a:t>
+              <a:t>부터 검사했습니다</a:t>
             </a:r>
             <a:endParaRPr lang="en-US" sz="3400" dirty="0"/>
           </a:p>
@@ -3027,30 +3804,42 @@
       </p:sp>
       <p:sp>
         <p:nvSpPr>
-          <p:cNvPr id="4" name="Shape 2"/>
+          <p:cNvPr id="4" name="Text 2"/>
           <p:cNvSpPr/>
           <p:nvPr/>
         </p:nvSpPr>
         <p:spPr>
           <a:xfrm>
             <a:off x="822960" y="2606040"/>
-            <a:ext cx="3331464" cy="2194560"/>
-          </a:xfrm>
-          <a:prstGeom prst="roundRect">
-            <a:avLst>
-              <a:gd name="adj" fmla="val 3333"/>
-            </a:avLst>
-          </a:prstGeom>
-          <a:solidFill>
-            <a:srgbClr val="EAF3FF"/>
-          </a:solidFill>
-          <a:ln w="12700">
-            <a:solidFill>
-              <a:srgbClr val="3182F6"/>
-            </a:solidFill>
-            <a:prstDash val="solid"/>
-          </a:ln>
-        </p:spPr>
+            <a:ext cx="5303520" cy="274320"/>
+          </a:xfrm>
+          <a:prstGeom prst="rect">
+            <a:avLst/>
+          </a:prstGeom>
+          <a:noFill/>
+          <a:ln/>
+        </p:spPr>
+        <p:txBody>
+          <a:bodyPr wrap="square" lIns="0" tIns="0" rIns="0" bIns="0" rtlCol="0" anchor="t"/>
+          <a:lstStyle/>
+          <a:p>
+            <a:pPr indent="0" marL="0">
+              <a:buNone/>
+            </a:pPr>
+            <a:r>
+              <a:rPr lang="en-US" sz="1300" b="1" dirty="0">
+                <a:solidFill>
+                  <a:srgbClr val="8B95A1"/>
+                </a:solidFill>
+                <a:latin typeface="Arial" pitchFamily="34" charset="0"/>
+                <a:ea typeface="Arial" pitchFamily="34" charset="-122"/>
+                <a:cs typeface="Arial" pitchFamily="34" charset="-120"/>
+              </a:rPr>
+              <a:t>관점별로 가장 걸린 점</a:t>
+            </a:r>
+            <a:endParaRPr lang="en-US" sz="1300" dirty="0"/>
+          </a:p>
+        </p:txBody>
       </p:sp>
       <p:sp>
         <p:nvSpPr>
@@ -3060,8 +3849,8 @@
         </p:nvSpPr>
         <p:spPr>
           <a:xfrm>
-            <a:off x="1097280" y="2788920"/>
-            <a:ext cx="2782824" cy="274320"/>
+            <a:off x="6720840" y="2606040"/>
+            <a:ext cx="4572000" cy="274320"/>
           </a:xfrm>
           <a:prstGeom prst="rect">
             <a:avLst/>
@@ -3079,44 +3868,83 @@
             <a:r>
               <a:rPr lang="en-US" sz="1300" b="1" dirty="0">
                 <a:solidFill>
+                  <a:srgbClr val="8B95A1"/>
+                </a:solidFill>
+                <a:latin typeface="Arial" pitchFamily="34" charset="0"/>
+                <a:ea typeface="Arial" pitchFamily="34" charset="-122"/>
+                <a:cs typeface="Arial" pitchFamily="34" charset="-120"/>
+              </a:rPr>
+              <a:t>그래서 오늘</a:t>
+            </a:r>
+            <a:endParaRPr lang="en-US" sz="1300" dirty="0"/>
+          </a:p>
+        </p:txBody>
+      </p:sp>
+      <p:sp>
+        <p:nvSpPr>
+          <p:cNvPr id="6" name="Text 4"/>
+          <p:cNvSpPr/>
+          <p:nvPr/>
+        </p:nvSpPr>
+        <p:spPr>
+          <a:xfrm>
+            <a:off x="822960" y="3017520"/>
+            <a:ext cx="5303520" cy="274320"/>
+          </a:xfrm>
+          <a:prstGeom prst="rect">
+            <a:avLst/>
+          </a:prstGeom>
+          <a:noFill/>
+          <a:ln/>
+        </p:spPr>
+        <p:txBody>
+          <a:bodyPr wrap="square" lIns="0" tIns="0" rIns="0" bIns="0" rtlCol="0" anchor="t"/>
+          <a:lstStyle/>
+          <a:p>
+            <a:pPr indent="0" marL="0">
+              <a:buNone/>
+            </a:pPr>
+            <a:r>
+              <a:rPr lang="en-US" sz="1200" b="1" dirty="0">
+                <a:solidFill>
                   <a:srgbClr val="3182F6"/>
                 </a:solidFill>
                 <a:latin typeface="Arial" pitchFamily="34" charset="0"/>
                 <a:ea typeface="Arial" pitchFamily="34" charset="-122"/>
                 <a:cs typeface="Arial" pitchFamily="34" charset="-120"/>
               </a:rPr>
-              <a:t>제출 전 · 연구자</a:t>
-            </a:r>
-            <a:endParaRPr lang="en-US" sz="1300" dirty="0"/>
-          </a:p>
-        </p:txBody>
-      </p:sp>
-      <p:sp>
-        <p:nvSpPr>
-          <p:cNvPr id="6" name="Text 4"/>
-          <p:cNvSpPr/>
-          <p:nvPr/>
-        </p:nvSpPr>
-        <p:spPr>
-          <a:xfrm>
-            <a:off x="1097280" y="3154680"/>
-            <a:ext cx="2782824" cy="457200"/>
-          </a:xfrm>
-          <a:prstGeom prst="rect">
-            <a:avLst/>
-          </a:prstGeom>
-          <a:noFill/>
-          <a:ln/>
-        </p:spPr>
-        <p:txBody>
-          <a:bodyPr wrap="square" lIns="0" tIns="0" rIns="0" bIns="0" rtlCol="0" anchor="t"/>
-          <a:lstStyle/>
-          <a:p>
-            <a:pPr indent="0" marL="0">
-              <a:buNone/>
-            </a:pPr>
-            <a:r>
-              <a:rPr lang="en-US" sz="2200" b="1" dirty="0">
+              <a:t>세부 전문형</a:t>
+            </a:r>
+            <a:endParaRPr lang="en-US" sz="1200" dirty="0"/>
+          </a:p>
+        </p:txBody>
+      </p:sp>
+      <p:sp>
+        <p:nvSpPr>
+          <p:cNvPr id="7" name="Text 5"/>
+          <p:cNvSpPr/>
+          <p:nvPr/>
+        </p:nvSpPr>
+        <p:spPr>
+          <a:xfrm>
+            <a:off x="822960" y="3310128"/>
+            <a:ext cx="5303520" cy="365760"/>
+          </a:xfrm>
+          <a:prstGeom prst="rect">
+            <a:avLst/>
+          </a:prstGeom>
+          <a:noFill/>
+          <a:ln/>
+        </p:spPr>
+        <p:txBody>
+          <a:bodyPr wrap="square" lIns="0" tIns="0" rIns="0" bIns="0" rtlCol="0" anchor="t"/>
+          <a:lstStyle/>
+          <a:p>
+            <a:pPr indent="0" marL="0">
+              <a:buNone/>
+            </a:pPr>
+            <a:r>
+              <a:rPr lang="en-US" sz="1500" b="1" dirty="0">
                 <a:solidFill>
                   <a:srgbClr val="191F28"/>
                 </a:solidFill>
@@ -3124,51 +3952,9 @@
                 <a:ea typeface="Arial" pitchFamily="34" charset="-122"/>
                 <a:cs typeface="Arial" pitchFamily="34" charset="-120"/>
               </a:rPr>
-              <a:t>셀프 점검</a:t>
-            </a:r>
-            <a:endParaRPr lang="en-US" sz="2200" dirty="0"/>
-          </a:p>
-        </p:txBody>
-      </p:sp>
-      <p:sp>
-        <p:nvSpPr>
-          <p:cNvPr id="7" name="Text 5"/>
-          <p:cNvSpPr/>
-          <p:nvPr/>
-        </p:nvSpPr>
-        <p:spPr>
-          <a:xfrm>
-            <a:off x="1097280" y="3749040"/>
-            <a:ext cx="2782824" cy="822960"/>
-          </a:xfrm>
-          <a:prstGeom prst="rect">
-            <a:avLst/>
-          </a:prstGeom>
-          <a:noFill/>
-          <a:ln/>
-        </p:spPr>
-        <p:txBody>
-          <a:bodyPr wrap="square" lIns="0" tIns="0" rIns="0" bIns="0" rtlCol="0" anchor="t"/>
-          <a:lstStyle/>
-          <a:p>
-            <a:pPr indent="0" marL="0">
-              <a:lnSpc>
-                <a:spcPct val="120000"/>
-              </a:lnSpc>
-              <a:buNone/>
-            </a:pPr>
-            <a:r>
-              <a:rPr lang="en-US" sz="1300" dirty="0">
-                <a:solidFill>
-                  <a:srgbClr val="4E5968"/>
-                </a:solidFill>
-                <a:latin typeface="Arial" pitchFamily="34" charset="0"/>
-                <a:ea typeface="Arial" pitchFamily="34" charset="-122"/>
-                <a:cs typeface="Arial" pitchFamily="34" charset="-120"/>
-              </a:rPr>
-              <a:t>고칠 곳과 판단할 곳을 원문과 함께 봅니다. 지금 이 앱으로 됩니다</a:t>
-            </a:r>
-            <a:endParaRPr lang="en-US" sz="1300" dirty="0"/>
+              <a:t>혁신성 차별성 구체성 부족</a:t>
+            </a:r>
+            <a:endParaRPr lang="en-US" sz="1500" dirty="0"/>
           </a:p>
         </p:txBody>
       </p:sp>
@@ -3180,8 +3966,8 @@
         </p:nvSpPr>
         <p:spPr>
           <a:xfrm>
-            <a:off x="4181856" y="3703320"/>
-            <a:ext cx="219456" cy="0"/>
+            <a:off x="6309360" y="3474720"/>
+            <a:ext cx="274320" cy="0"/>
           </a:xfrm>
           <a:prstGeom prst="line">
             <a:avLst/>
@@ -3189,7 +3975,7 @@
           <a:noFill/>
           <a:ln w="15875">
             <a:solidFill>
-              <a:srgbClr val="3182F6"/>
+              <a:srgbClr val="8B95A1"/>
             </a:solidFill>
             <a:prstDash val="solid"/>
             <a:tailEnd type="triangle"/>
@@ -3198,23 +3984,58 @@
       </p:sp>
       <p:sp>
         <p:nvSpPr>
-          <p:cNvPr id="9" name="Shape 7"/>
-          <p:cNvSpPr/>
-          <p:nvPr/>
-        </p:nvSpPr>
-        <p:spPr>
-          <a:xfrm>
-            <a:off x="4428744" y="2606040"/>
-            <a:ext cx="3331464" cy="2194560"/>
-          </a:xfrm>
-          <a:prstGeom prst="roundRect">
-            <a:avLst>
-              <a:gd name="adj" fmla="val 3333"/>
-            </a:avLst>
-          </a:prstGeom>
-          <a:solidFill>
-            <a:srgbClr val="FFFFFF"/>
-          </a:solidFill>
+          <p:cNvPr id="9" name="Text 7"/>
+          <p:cNvSpPr/>
+          <p:nvPr/>
+        </p:nvSpPr>
+        <p:spPr>
+          <a:xfrm>
+            <a:off x="6720840" y="3310128"/>
+            <a:ext cx="4645152" cy="365760"/>
+          </a:xfrm>
+          <a:prstGeom prst="rect">
+            <a:avLst/>
+          </a:prstGeom>
+          <a:noFill/>
+          <a:ln/>
+        </p:spPr>
+        <p:txBody>
+          <a:bodyPr wrap="square" lIns="0" tIns="0" rIns="0" bIns="0" rtlCol="0" anchor="t"/>
+          <a:lstStyle/>
+          <a:p>
+            <a:pPr indent="0" marL="0">
+              <a:buNone/>
+            </a:pPr>
+            <a:r>
+              <a:rPr lang="en-US" sz="1500" dirty="0">
+                <a:solidFill>
+                  <a:srgbClr val="191F28"/>
+                </a:solidFill>
+                <a:latin typeface="Arial" pitchFamily="34" charset="0"/>
+                <a:ea typeface="Arial" pitchFamily="34" charset="-122"/>
+                <a:cs typeface="Arial" pitchFamily="34" charset="-120"/>
+              </a:rPr>
+              <a:t>구조의 차별점과 관점 수 실험을 준비했습니다</a:t>
+            </a:r>
+            <a:endParaRPr lang="en-US" sz="1500" dirty="0"/>
+          </a:p>
+        </p:txBody>
+      </p:sp>
+      <p:sp>
+        <p:nvSpPr>
+          <p:cNvPr id="10" name="Shape 8"/>
+          <p:cNvSpPr/>
+          <p:nvPr/>
+        </p:nvSpPr>
+        <p:spPr>
+          <a:xfrm>
+            <a:off x="822960" y="3822192"/>
+            <a:ext cx="10543032" cy="0"/>
+          </a:xfrm>
+          <a:prstGeom prst="line">
+            <a:avLst/>
+          </a:prstGeom>
+          <a:noFill/>
           <a:ln w="12700">
             <a:solidFill>
               <a:srgbClr val="E5E8EB"/>
@@ -3225,30 +4046,30 @@
       </p:sp>
       <p:sp>
         <p:nvSpPr>
-          <p:cNvPr id="10" name="Text 8"/>
-          <p:cNvSpPr/>
-          <p:nvPr/>
-        </p:nvSpPr>
-        <p:spPr>
-          <a:xfrm>
-            <a:off x="4703064" y="2788920"/>
-            <a:ext cx="2782824" cy="274320"/>
-          </a:xfrm>
-          <a:prstGeom prst="rect">
-            <a:avLst/>
-          </a:prstGeom>
-          <a:noFill/>
-          <a:ln/>
-        </p:spPr>
-        <p:txBody>
-          <a:bodyPr wrap="square" lIns="0" tIns="0" rIns="0" bIns="0" rtlCol="0" anchor="t"/>
-          <a:lstStyle/>
-          <a:p>
-            <a:pPr indent="0" marL="0">
-              <a:buNone/>
-            </a:pPr>
-            <a:r>
-              <a:rPr lang="en-US" sz="1300" b="1" dirty="0">
+          <p:cNvPr id="11" name="Text 9"/>
+          <p:cNvSpPr/>
+          <p:nvPr/>
+        </p:nvSpPr>
+        <p:spPr>
+          <a:xfrm>
+            <a:off x="822960" y="3931920"/>
+            <a:ext cx="5303520" cy="274320"/>
+          </a:xfrm>
+          <a:prstGeom prst="rect">
+            <a:avLst/>
+          </a:prstGeom>
+          <a:noFill/>
+          <a:ln/>
+        </p:spPr>
+        <p:txBody>
+          <a:bodyPr wrap="square" lIns="0" tIns="0" rIns="0" bIns="0" rtlCol="0" anchor="t"/>
+          <a:lstStyle/>
+          <a:p>
+            <a:pPr indent="0" marL="0">
+              <a:buNone/>
+            </a:pPr>
+            <a:r>
+              <a:rPr lang="en-US" sz="1200" b="1" dirty="0">
                 <a:solidFill>
                   <a:srgbClr val="3182F6"/>
                 </a:solidFill>
@@ -3256,38 +4077,38 @@
                 <a:ea typeface="Arial" pitchFamily="34" charset="-122"/>
                 <a:cs typeface="Arial" pitchFamily="34" charset="-120"/>
               </a:rPr>
-              <a:t>접수 후 · 전문기관</a:t>
-            </a:r>
-            <a:endParaRPr lang="en-US" sz="1300" dirty="0"/>
-          </a:p>
-        </p:txBody>
-      </p:sp>
-      <p:sp>
-        <p:nvSpPr>
-          <p:cNvPr id="11" name="Text 9"/>
-          <p:cNvSpPr/>
-          <p:nvPr/>
-        </p:nvSpPr>
-        <p:spPr>
-          <a:xfrm>
-            <a:off x="4703064" y="3154680"/>
-            <a:ext cx="2782824" cy="457200"/>
-          </a:xfrm>
-          <a:prstGeom prst="rect">
-            <a:avLst/>
-          </a:prstGeom>
-          <a:noFill/>
-          <a:ln/>
-        </p:spPr>
-        <p:txBody>
-          <a:bodyPr wrap="square" lIns="0" tIns="0" rIns="0" bIns="0" rtlCol="0" anchor="t"/>
-          <a:lstStyle/>
-          <a:p>
-            <a:pPr indent="0" marL="0">
-              <a:buNone/>
-            </a:pPr>
-            <a:r>
-              <a:rPr lang="en-US" sz="2200" b="1" dirty="0">
+              <a:t>사업성·시장형</a:t>
+            </a:r>
+            <a:endParaRPr lang="en-US" sz="1200" dirty="0"/>
+          </a:p>
+        </p:txBody>
+      </p:sp>
+      <p:sp>
+        <p:nvSpPr>
+          <p:cNvPr id="12" name="Text 10"/>
+          <p:cNvSpPr/>
+          <p:nvPr/>
+        </p:nvSpPr>
+        <p:spPr>
+          <a:xfrm>
+            <a:off x="822960" y="4224528"/>
+            <a:ext cx="5303520" cy="365760"/>
+          </a:xfrm>
+          <a:prstGeom prst="rect">
+            <a:avLst/>
+          </a:prstGeom>
+          <a:noFill/>
+          <a:ln/>
+        </p:spPr>
+        <p:txBody>
+          <a:bodyPr wrap="square" lIns="0" tIns="0" rIns="0" bIns="0" rtlCol="0" anchor="t"/>
+          <a:lstStyle/>
+          <a:p>
+            <a:pPr indent="0" marL="0">
+              <a:buNone/>
+            </a:pPr>
+            <a:r>
+              <a:rPr lang="en-US" sz="1500" b="1" dirty="0">
                 <a:solidFill>
                   <a:srgbClr val="191F28"/>
                 </a:solidFill>
@@ -3295,51 +4116,9 @@
                 <a:ea typeface="Arial" pitchFamily="34" charset="-122"/>
                 <a:cs typeface="Arial" pitchFamily="34" charset="-120"/>
               </a:rPr>
-              <a:t>요건 사전검토</a:t>
-            </a:r>
-            <a:endParaRPr lang="en-US" sz="2200" dirty="0"/>
-          </a:p>
-        </p:txBody>
-      </p:sp>
-      <p:sp>
-        <p:nvSpPr>
-          <p:cNvPr id="12" name="Text 10"/>
-          <p:cNvSpPr/>
-          <p:nvPr/>
-        </p:nvSpPr>
-        <p:spPr>
-          <a:xfrm>
-            <a:off x="4703064" y="3749040"/>
-            <a:ext cx="2782824" cy="822960"/>
-          </a:xfrm>
-          <a:prstGeom prst="rect">
-            <a:avLst/>
-          </a:prstGeom>
-          <a:noFill/>
-          <a:ln/>
-        </p:spPr>
-        <p:txBody>
-          <a:bodyPr wrap="square" lIns="0" tIns="0" rIns="0" bIns="0" rtlCol="0" anchor="t"/>
-          <a:lstStyle/>
-          <a:p>
-            <a:pPr indent="0" marL="0">
-              <a:lnSpc>
-                <a:spcPct val="120000"/>
-              </a:lnSpc>
-              <a:buNone/>
-            </a:pPr>
-            <a:r>
-              <a:rPr lang="en-US" sz="1300" dirty="0">
-                <a:solidFill>
-                  <a:srgbClr val="4E5968"/>
-                </a:solidFill>
-                <a:latin typeface="Arial" pitchFamily="34" charset="0"/>
-                <a:ea typeface="Arial" pitchFamily="34" charset="-122"/>
-                <a:cs typeface="Arial" pitchFamily="34" charset="-120"/>
-              </a:rPr>
-              <a:t>형식 미비와 서류 누락을 먼저 거릅니다. 첫 실증 목표</a:t>
-            </a:r>
-            <a:endParaRPr lang="en-US" sz="1300" dirty="0"/>
+              <a:t>시장수요는 보이나 실증·구매주체가 약함</a:t>
+            </a:r>
+            <a:endParaRPr lang="en-US" sz="1500" dirty="0"/>
           </a:p>
         </p:txBody>
       </p:sp>
@@ -3351,8 +4130,8 @@
         </p:nvSpPr>
         <p:spPr>
           <a:xfrm>
-            <a:off x="7787640" y="3703320"/>
-            <a:ext cx="219456" cy="0"/>
+            <a:off x="6309360" y="4389120"/>
+            <a:ext cx="274320" cy="0"/>
           </a:xfrm>
           <a:prstGeom prst="line">
             <a:avLst/>
@@ -3360,7 +4139,7 @@
           <a:noFill/>
           <a:ln w="15875">
             <a:solidFill>
-              <a:srgbClr val="3182F6"/>
+              <a:srgbClr val="8B95A1"/>
             </a:solidFill>
             <a:prstDash val="solid"/>
             <a:tailEnd type="triangle"/>
@@ -3369,23 +4148,58 @@
       </p:sp>
       <p:sp>
         <p:nvSpPr>
-          <p:cNvPr id="14" name="Shape 12"/>
-          <p:cNvSpPr/>
-          <p:nvPr/>
-        </p:nvSpPr>
-        <p:spPr>
-          <a:xfrm>
-            <a:off x="8034528" y="2606040"/>
-            <a:ext cx="3331464" cy="2194560"/>
-          </a:xfrm>
-          <a:prstGeom prst="roundRect">
-            <a:avLst>
-              <a:gd name="adj" fmla="val 3333"/>
-            </a:avLst>
-          </a:prstGeom>
-          <a:solidFill>
-            <a:srgbClr val="FFFFFF"/>
-          </a:solidFill>
+          <p:cNvPr id="14" name="Text 12"/>
+          <p:cNvSpPr/>
+          <p:nvPr/>
+        </p:nvSpPr>
+        <p:spPr>
+          <a:xfrm>
+            <a:off x="6720840" y="4224528"/>
+            <a:ext cx="4645152" cy="365760"/>
+          </a:xfrm>
+          <a:prstGeom prst="rect">
+            <a:avLst/>
+          </a:prstGeom>
+          <a:noFill/>
+          <a:ln/>
+        </p:spPr>
+        <p:txBody>
+          <a:bodyPr wrap="square" lIns="0" tIns="0" rIns="0" bIns="0" rtlCol="0" anchor="t"/>
+          <a:lstStyle/>
+          <a:p>
+            <a:pPr indent="0" marL="0">
+              <a:buNone/>
+            </a:pPr>
+            <a:r>
+              <a:rPr lang="en-US" sz="1500" dirty="0">
+                <a:solidFill>
+                  <a:srgbClr val="191F28"/>
+                </a:solidFill>
+                <a:latin typeface="Arial" pitchFamily="34" charset="0"/>
+                <a:ea typeface="Arial" pitchFamily="34" charset="-122"/>
+                <a:cs typeface="Arial" pitchFamily="34" charset="-120"/>
+              </a:rPr>
+              <a:t>첫 실증 대상을 전문기관 사전검토로 정했습니다</a:t>
+            </a:r>
+            <a:endParaRPr lang="en-US" sz="1500" dirty="0"/>
+          </a:p>
+        </p:txBody>
+      </p:sp>
+      <p:sp>
+        <p:nvSpPr>
+          <p:cNvPr id="15" name="Shape 13"/>
+          <p:cNvSpPr/>
+          <p:nvPr/>
+        </p:nvSpPr>
+        <p:spPr>
+          <a:xfrm>
+            <a:off x="822960" y="4736592"/>
+            <a:ext cx="10543032" cy="0"/>
+          </a:xfrm>
+          <a:prstGeom prst="line">
+            <a:avLst/>
+          </a:prstGeom>
+          <a:noFill/>
           <a:ln w="12700">
             <a:solidFill>
               <a:srgbClr val="E5E8EB"/>
@@ -3396,30 +4210,30 @@
       </p:sp>
       <p:sp>
         <p:nvSpPr>
-          <p:cNvPr id="15" name="Text 13"/>
-          <p:cNvSpPr/>
-          <p:nvPr/>
-        </p:nvSpPr>
-        <p:spPr>
-          <a:xfrm>
-            <a:off x="8308848" y="2788920"/>
-            <a:ext cx="2782824" cy="274320"/>
-          </a:xfrm>
-          <a:prstGeom prst="rect">
-            <a:avLst/>
-          </a:prstGeom>
-          <a:noFill/>
-          <a:ln/>
-        </p:spPr>
-        <p:txBody>
-          <a:bodyPr wrap="square" lIns="0" tIns="0" rIns="0" bIns="0" rtlCol="0" anchor="t"/>
-          <a:lstStyle/>
-          <a:p>
-            <a:pPr indent="0" marL="0">
-              <a:buNone/>
-            </a:pPr>
-            <a:r>
-              <a:rPr lang="en-US" sz="1300" b="1" dirty="0">
+          <p:cNvPr id="16" name="Text 14"/>
+          <p:cNvSpPr/>
+          <p:nvPr/>
+        </p:nvSpPr>
+        <p:spPr>
+          <a:xfrm>
+            <a:off x="822960" y="4846320"/>
+            <a:ext cx="5303520" cy="274320"/>
+          </a:xfrm>
+          <a:prstGeom prst="rect">
+            <a:avLst/>
+          </a:prstGeom>
+          <a:noFill/>
+          <a:ln/>
+        </p:spPr>
+        <p:txBody>
+          <a:bodyPr wrap="square" lIns="0" tIns="0" rIns="0" bIns="0" rtlCol="0" anchor="t"/>
+          <a:lstStyle/>
+          <a:p>
+            <a:pPr indent="0" marL="0">
+              <a:buNone/>
+            </a:pPr>
+            <a:r>
+              <a:rPr lang="en-US" sz="1200" b="1" dirty="0">
                 <a:solidFill>
                   <a:srgbClr val="3182F6"/>
                 </a:solidFill>
@@ -3427,302 +4241,150 @@
                 <a:ea typeface="Arial" pitchFamily="34" charset="-122"/>
                 <a:cs typeface="Arial" pitchFamily="34" charset="-120"/>
               </a:rPr>
-              <a:t>심사 중 · 평가위원</a:t>
+              <a:t>행정·관리형</a:t>
+            </a:r>
+            <a:endParaRPr lang="en-US" sz="1200" dirty="0"/>
+          </a:p>
+        </p:txBody>
+      </p:sp>
+      <p:sp>
+        <p:nvSpPr>
+          <p:cNvPr id="17" name="Text 15"/>
+          <p:cNvSpPr/>
+          <p:nvPr/>
+        </p:nvSpPr>
+        <p:spPr>
+          <a:xfrm>
+            <a:off x="822960" y="5138928"/>
+            <a:ext cx="5303520" cy="365760"/>
+          </a:xfrm>
+          <a:prstGeom prst="rect">
+            <a:avLst/>
+          </a:prstGeom>
+          <a:noFill/>
+          <a:ln/>
+        </p:spPr>
+        <p:txBody>
+          <a:bodyPr wrap="square" lIns="0" tIns="0" rIns="0" bIns="0" rtlCol="0" anchor="t"/>
+          <a:lstStyle/>
+          <a:p>
+            <a:pPr indent="0" marL="0">
+              <a:buNone/>
+            </a:pPr>
+            <a:r>
+              <a:rPr lang="en-US" sz="1500" b="1" dirty="0">
+                <a:solidFill>
+                  <a:srgbClr val="191F28"/>
+                </a:solidFill>
+                <a:latin typeface="Arial" pitchFamily="34" charset="0"/>
+                <a:ea typeface="Arial" pitchFamily="34" charset="-122"/>
+                <a:cs typeface="Arial" pitchFamily="34" charset="-120"/>
+              </a:rPr>
+              <a:t>해커톤 기간 내 구현 계획의 구체성 부족</a:t>
+            </a:r>
+            <a:endParaRPr lang="en-US" sz="1500" dirty="0"/>
+          </a:p>
+        </p:txBody>
+      </p:sp>
+      <p:sp>
+        <p:nvSpPr>
+          <p:cNvPr id="18" name="Shape 16"/>
+          <p:cNvSpPr/>
+          <p:nvPr/>
+        </p:nvSpPr>
+        <p:spPr>
+          <a:xfrm>
+            <a:off x="6309360" y="5303520"/>
+            <a:ext cx="274320" cy="0"/>
+          </a:xfrm>
+          <a:prstGeom prst="line">
+            <a:avLst/>
+          </a:prstGeom>
+          <a:noFill/>
+          <a:ln w="15875">
+            <a:solidFill>
+              <a:srgbClr val="8B95A1"/>
+            </a:solidFill>
+            <a:prstDash val="solid"/>
+            <a:tailEnd type="triangle"/>
+          </a:ln>
+        </p:spPr>
+      </p:sp>
+      <p:sp>
+        <p:nvSpPr>
+          <p:cNvPr id="19" name="Text 17"/>
+          <p:cNvSpPr/>
+          <p:nvPr/>
+        </p:nvSpPr>
+        <p:spPr>
+          <a:xfrm>
+            <a:off x="6720840" y="5138928"/>
+            <a:ext cx="4645152" cy="365760"/>
+          </a:xfrm>
+          <a:prstGeom prst="rect">
+            <a:avLst/>
+          </a:prstGeom>
+          <a:noFill/>
+          <a:ln/>
+        </p:spPr>
+        <p:txBody>
+          <a:bodyPr wrap="square" lIns="0" tIns="0" rIns="0" bIns="0" rtlCol="0" anchor="t"/>
+          <a:lstStyle/>
+          <a:p>
+            <a:pPr indent="0" marL="0">
+              <a:buNone/>
+            </a:pPr>
+            <a:r>
+              <a:rPr lang="en-US" sz="1500" dirty="0">
+                <a:solidFill>
+                  <a:srgbClr val="191F28"/>
+                </a:solidFill>
+                <a:latin typeface="Arial" pitchFamily="34" charset="0"/>
+                <a:ea typeface="Arial" pitchFamily="34" charset="-122"/>
+                <a:cs typeface="Arial" pitchFamily="34" charset="-120"/>
+              </a:rPr>
+              <a:t>계획 대신 구현 결과와 커밋 기록을 가져왔습니다</a:t>
+            </a:r>
+            <a:endParaRPr lang="en-US" sz="1500" dirty="0"/>
+          </a:p>
+        </p:txBody>
+      </p:sp>
+      <p:sp>
+        <p:nvSpPr>
+          <p:cNvPr id="20" name="Text 18"/>
+          <p:cNvSpPr/>
+          <p:nvPr/>
+        </p:nvSpPr>
+        <p:spPr>
+          <a:xfrm>
+            <a:off x="822960" y="5897880"/>
+            <a:ext cx="10543032" cy="320040"/>
+          </a:xfrm>
+          <a:prstGeom prst="rect">
+            <a:avLst/>
+          </a:prstGeom>
+          <a:noFill/>
+          <a:ln/>
+        </p:spPr>
+        <p:txBody>
+          <a:bodyPr wrap="square" lIns="0" tIns="0" rIns="0" bIns="0" rtlCol="0" anchor="t"/>
+          <a:lstStyle/>
+          <a:p>
+            <a:pPr indent="0" marL="0">
+              <a:buNone/>
+            </a:pPr>
+            <a:r>
+              <a:rPr lang="en-US" sz="1300" dirty="0">
+                <a:solidFill>
+                  <a:srgbClr val="4E5968"/>
+                </a:solidFill>
+                <a:latin typeface="Arial" pitchFamily="34" charset="0"/>
+                <a:ea typeface="Arial" pitchFamily="34" charset="-122"/>
+                <a:cs typeface="Arial" pitchFamily="34" charset="-120"/>
+              </a:rPr>
+              <a:t>결과를 맞히려던 게 아니라, 발표 전에 받을 질문을 먼저 받아 본 것입니다.</a:t>
             </a:r>
             <a:endParaRPr lang="en-US" sz="1300" dirty="0"/>
-          </a:p>
-        </p:txBody>
-      </p:sp>
-      <p:sp>
-        <p:nvSpPr>
-          <p:cNvPr id="16" name="Text 14"/>
-          <p:cNvSpPr/>
-          <p:nvPr/>
-        </p:nvSpPr>
-        <p:spPr>
-          <a:xfrm>
-            <a:off x="8308848" y="3154680"/>
-            <a:ext cx="2782824" cy="457200"/>
-          </a:xfrm>
-          <a:prstGeom prst="rect">
-            <a:avLst/>
-          </a:prstGeom>
-          <a:noFill/>
-          <a:ln/>
-        </p:spPr>
-        <p:txBody>
-          <a:bodyPr wrap="square" lIns="0" tIns="0" rIns="0" bIns="0" rtlCol="0" anchor="t"/>
-          <a:lstStyle/>
-          <a:p>
-            <a:pPr indent="0" marL="0">
-              <a:buNone/>
-            </a:pPr>
-            <a:r>
-              <a:rPr lang="en-US" sz="2200" b="1" dirty="0">
-                <a:solidFill>
-                  <a:srgbClr val="191F28"/>
-                </a:solidFill>
-                <a:latin typeface="Arial" pitchFamily="34" charset="0"/>
-                <a:ea typeface="Arial" pitchFamily="34" charset="-122"/>
-                <a:cs typeface="Arial" pitchFamily="34" charset="-120"/>
-              </a:rPr>
-              <a:t>근거 위치 표시</a:t>
-            </a:r>
-            <a:endParaRPr lang="en-US" sz="2200" dirty="0"/>
-          </a:p>
-        </p:txBody>
-      </p:sp>
-      <p:sp>
-        <p:nvSpPr>
-          <p:cNvPr id="17" name="Text 15"/>
-          <p:cNvSpPr/>
-          <p:nvPr/>
-        </p:nvSpPr>
-        <p:spPr>
-          <a:xfrm>
-            <a:off x="8308848" y="3749040"/>
-            <a:ext cx="2782824" cy="822960"/>
-          </a:xfrm>
-          <a:prstGeom prst="rect">
-            <a:avLst/>
-          </a:prstGeom>
-          <a:noFill/>
-          <a:ln/>
-        </p:spPr>
-        <p:txBody>
-          <a:bodyPr wrap="square" lIns="0" tIns="0" rIns="0" bIns="0" rtlCol="0" anchor="t"/>
-          <a:lstStyle/>
-          <a:p>
-            <a:pPr indent="0" marL="0">
-              <a:lnSpc>
-                <a:spcPct val="120000"/>
-              </a:lnSpc>
-              <a:buNone/>
-            </a:pPr>
-            <a:r>
-              <a:rPr lang="en-US" sz="1300" dirty="0">
-                <a:solidFill>
-                  <a:srgbClr val="4E5968"/>
-                </a:solidFill>
-                <a:latin typeface="Arial" pitchFamily="34" charset="0"/>
-                <a:ea typeface="Arial" pitchFamily="34" charset="-122"/>
-                <a:cs typeface="Arial" pitchFamily="34" charset="-120"/>
-              </a:rPr>
-              <a:t>지표마다 제안서의 근거 문장을 옆에 띄웁니다. 판정은 사람</a:t>
-            </a:r>
-            <a:endParaRPr lang="en-US" sz="1300" dirty="0"/>
-          </a:p>
-        </p:txBody>
-      </p:sp>
-      <p:sp>
-        <p:nvSpPr>
-          <p:cNvPr id="18" name="Text 16"/>
-          <p:cNvSpPr/>
-          <p:nvPr/>
-        </p:nvSpPr>
-        <p:spPr>
-          <a:xfrm>
-            <a:off x="822960" y="5093208"/>
-            <a:ext cx="548640" cy="365760"/>
-          </a:xfrm>
-          <a:prstGeom prst="rect">
-            <a:avLst/>
-          </a:prstGeom>
-          <a:noFill/>
-          <a:ln/>
-        </p:spPr>
-        <p:txBody>
-          <a:bodyPr wrap="square" lIns="0" tIns="0" rIns="0" bIns="0" rtlCol="0" anchor="t"/>
-          <a:lstStyle/>
-          <a:p>
-            <a:pPr indent="0" marL="0">
-              <a:buNone/>
-            </a:pPr>
-            <a:endParaRPr lang="en-US" sz="1800" dirty="0"/>
-          </a:p>
-        </p:txBody>
-      </p:sp>
-      <p:sp>
-        <p:nvSpPr>
-          <p:cNvPr id="19" name="Text 17"/>
-          <p:cNvSpPr/>
-          <p:nvPr/>
-        </p:nvSpPr>
-        <p:spPr>
-          <a:xfrm>
-            <a:off x="1463040" y="5074920"/>
-            <a:ext cx="4448556" cy="384048"/>
-          </a:xfrm>
-          <a:prstGeom prst="rect">
-            <a:avLst/>
-          </a:prstGeom>
-          <a:noFill/>
-          <a:ln/>
-        </p:spPr>
-        <p:txBody>
-          <a:bodyPr wrap="square" lIns="0" tIns="0" rIns="0" bIns="0" rtlCol="0" anchor="t"/>
-          <a:lstStyle/>
-          <a:p>
-            <a:pPr indent="0" marL="0">
-              <a:buNone/>
-            </a:pPr>
-            <a:r>
-              <a:rPr lang="en-US" sz="1500" b="1" dirty="0">
-                <a:solidFill>
-                  <a:srgbClr val="191F28"/>
-                </a:solidFill>
-                <a:latin typeface="Arial" pitchFamily="34" charset="0"/>
-                <a:ea typeface="Arial" pitchFamily="34" charset="-122"/>
-                <a:cs typeface="Arial" pitchFamily="34" charset="-120"/>
-              </a:rPr>
-              <a:t>실제 심사 의견은 평가기관에 있습니다</a:t>
-            </a:r>
-            <a:endParaRPr lang="en-US" sz="1500" dirty="0"/>
-          </a:p>
-        </p:txBody>
-      </p:sp>
-      <p:sp>
-        <p:nvSpPr>
-          <p:cNvPr id="20" name="Text 18"/>
-          <p:cNvSpPr/>
-          <p:nvPr/>
-        </p:nvSpPr>
-        <p:spPr>
-          <a:xfrm>
-            <a:off x="1463040" y="5486400"/>
-            <a:ext cx="4448556" cy="365760"/>
-          </a:xfrm>
-          <a:prstGeom prst="rect">
-            <a:avLst/>
-          </a:prstGeom>
-          <a:noFill/>
-          <a:ln/>
-        </p:spPr>
-        <p:txBody>
-          <a:bodyPr wrap="square" lIns="0" tIns="0" rIns="0" bIns="0" rtlCol="0" anchor="t"/>
-          <a:lstStyle/>
-          <a:p>
-            <a:pPr indent="0" marL="0">
-              <a:buNone/>
-            </a:pPr>
-            <a:r>
-              <a:rPr lang="en-US" sz="1200" dirty="0">
-                <a:solidFill>
-                  <a:srgbClr val="8B95A1"/>
-                </a:solidFill>
-                <a:latin typeface="Arial" pitchFamily="34" charset="0"/>
-                <a:ea typeface="Arial" pitchFamily="34" charset="-122"/>
-                <a:cs typeface="Arial" pitchFamily="34" charset="-120"/>
-              </a:rPr>
-              <a:t>기관과 연계하면 관점을 실제 심사 의견 유형으로 맞출 수 있습니다</a:t>
-            </a:r>
-            <a:endParaRPr lang="en-US" sz="1200" dirty="0"/>
-          </a:p>
-        </p:txBody>
-      </p:sp>
-      <p:sp>
-        <p:nvSpPr>
-          <p:cNvPr id="21" name="Text 19"/>
-          <p:cNvSpPr/>
-          <p:nvPr/>
-        </p:nvSpPr>
-        <p:spPr>
-          <a:xfrm>
-            <a:off x="6094476" y="5093208"/>
-            <a:ext cx="548640" cy="365760"/>
-          </a:xfrm>
-          <a:prstGeom prst="rect">
-            <a:avLst/>
-          </a:prstGeom>
-          <a:noFill/>
-          <a:ln/>
-        </p:spPr>
-        <p:txBody>
-          <a:bodyPr wrap="square" lIns="0" tIns="0" rIns="0" bIns="0" rtlCol="0" anchor="t"/>
-          <a:lstStyle/>
-          <a:p>
-            <a:pPr indent="0" marL="0">
-              <a:buNone/>
-            </a:pPr>
-            <a:endParaRPr lang="en-US" sz="1800" dirty="0"/>
-          </a:p>
-        </p:txBody>
-      </p:sp>
-      <p:sp>
-        <p:nvSpPr>
-          <p:cNvPr id="22" name="Text 20"/>
-          <p:cNvSpPr/>
-          <p:nvPr/>
-        </p:nvSpPr>
-        <p:spPr>
-          <a:xfrm>
-            <a:off x="6734556" y="5074920"/>
-            <a:ext cx="4631436" cy="384048"/>
-          </a:xfrm>
-          <a:prstGeom prst="rect">
-            <a:avLst/>
-          </a:prstGeom>
-          <a:noFill/>
-          <a:ln/>
-        </p:spPr>
-        <p:txBody>
-          <a:bodyPr wrap="square" lIns="0" tIns="0" rIns="0" bIns="0" rtlCol="0" anchor="t"/>
-          <a:lstStyle/>
-          <a:p>
-            <a:pPr indent="0" marL="0">
-              <a:buNone/>
-            </a:pPr>
-            <a:r>
-              <a:rPr lang="en-US" sz="1500" b="1" dirty="0">
-                <a:solidFill>
-                  <a:srgbClr val="191F28"/>
-                </a:solidFill>
-                <a:latin typeface="Arial" pitchFamily="34" charset="0"/>
-                <a:ea typeface="Arial" pitchFamily="34" charset="-122"/>
-                <a:cs typeface="Arial" pitchFamily="34" charset="-120"/>
-              </a:rPr>
-              <a:t>NAIS 플랫폼에 도구로 꽂힙니다</a:t>
-            </a:r>
-            <a:endParaRPr lang="en-US" sz="1500" dirty="0"/>
-          </a:p>
-        </p:txBody>
-      </p:sp>
-      <p:sp>
-        <p:nvSpPr>
-          <p:cNvPr id="23" name="Text 21"/>
-          <p:cNvSpPr/>
-          <p:nvPr/>
-        </p:nvSpPr>
-        <p:spPr>
-          <a:xfrm>
-            <a:off x="6734556" y="5486400"/>
-            <a:ext cx="4631436" cy="365760"/>
-          </a:xfrm>
-          <a:prstGeom prst="rect">
-            <a:avLst/>
-          </a:prstGeom>
-          <a:noFill/>
-          <a:ln/>
-        </p:spPr>
-        <p:txBody>
-          <a:bodyPr wrap="square" lIns="0" tIns="0" rIns="0" bIns="0" rtlCol="0" anchor="t"/>
-          <a:lstStyle/>
-          <a:p>
-            <a:pPr indent="0" marL="0">
-              <a:buNone/>
-            </a:pPr>
-            <a:r>
-              <a:rPr lang="en-US" sz="1200" dirty="0">
-                <a:solidFill>
-                  <a:srgbClr val="8B95A1"/>
-                </a:solidFill>
-                <a:latin typeface="Arial" pitchFamily="34" charset="0"/>
-                <a:ea typeface="Arial" pitchFamily="34" charset="-122"/>
-                <a:cs typeface="Arial" pitchFamily="34" charset="-120"/>
-              </a:rPr>
-              <a:t>AI 사이언티스트가 과제 신청까지 하는 날, 그 마지막 점검</a:t>
-            </a:r>
-            <a:endParaRPr lang="en-US" sz="1200" dirty="0"/>
           </a:p>
         </p:txBody>
       </p:sp>
@@ -3766,7 +4428,7 @@
         </p:nvSpPr>
         <p:spPr>
           <a:xfrm>
-            <a:off x="822960" y="1051560"/>
+            <a:off x="822960" y="548640"/>
             <a:ext cx="7315200" cy="365760"/>
           </a:xfrm>
           <a:prstGeom prst="rect">
@@ -3791,7 +4453,7 @@
                 <a:ea typeface="Arial" pitchFamily="34" charset="-122"/>
                 <a:cs typeface="Arial" pitchFamily="34" charset="-120"/>
               </a:rPr>
-              <a:t>지금 직접 해 보세요</a:t>
+              <a:t>확장</a:t>
             </a:r>
             <a:endParaRPr lang="en-US" sz="1400" dirty="0"/>
           </a:p>
@@ -3805,8 +4467,8 @@
         </p:nvSpPr>
         <p:spPr>
           <a:xfrm>
-            <a:off x="795528" y="1645920"/>
-            <a:ext cx="10543032" cy="2103120"/>
+            <a:off x="795528" y="960120"/>
+            <a:ext cx="10543032" cy="1371600"/>
           </a:xfrm>
           <a:prstGeom prst="rect">
             <a:avLst/>
@@ -3825,7 +4487,7 @@
               <a:buNone/>
             </a:pPr>
             <a:r>
-              <a:rPr lang="en-US" sz="5400" b="1" dirty="0">
+              <a:rPr lang="en-US" sz="3400" b="1" dirty="0">
                 <a:solidFill>
                   <a:srgbClr val="191F28"/>
                 </a:solidFill>
@@ -3833,9 +4495,9 @@
                 <a:ea typeface="Arial" pitchFamily="34" charset="-122"/>
                 <a:cs typeface="Arial" pitchFamily="34" charset="-120"/>
               </a:rPr>
-              <a:t>제출 전에,</a:t>
-            </a:r>
-            <a:endParaRPr lang="en-US" sz="5400" dirty="0"/>
+              <a:t>제출 전에서 심사까지,</a:t>
+            </a:r>
+            <a:endParaRPr lang="en-US" sz="3400" dirty="0"/>
           </a:p>
           <a:p>
             <a:pPr indent="0" marL="0">
@@ -3845,7 +4507,7 @@
               <a:buNone/>
             </a:pPr>
             <a:r>
-              <a:rPr lang="en-US" sz="5400" b="1" dirty="0">
+              <a:rPr lang="en-US" sz="3400" b="1" dirty="0">
                 <a:solidFill>
                   <a:srgbClr val="3182F6"/>
                 </a:solidFill>
@@ -3853,7 +4515,7 @@
                 <a:ea typeface="Arial" pitchFamily="34" charset="-122"/>
                 <a:cs typeface="Arial" pitchFamily="34" charset="-120"/>
               </a:rPr>
-              <a:t>빈칸</a:t>
+              <a:t>같은 엔진</a:t>
             </a:r>
             <a:pPr indent="0" marL="0">
               <a:lnSpc>
@@ -3862,7 +4524,7 @@
               <a:buNone/>
             </a:pPr>
             <a:r>
-              <a:rPr lang="en-US" sz="5400" b="1" dirty="0">
+              <a:rPr lang="en-US" sz="3400" b="1" dirty="0">
                 <a:solidFill>
                   <a:srgbClr val="191F28"/>
                 </a:solidFill>
@@ -3870,127 +4532,197 @@
                 <a:ea typeface="Arial" pitchFamily="34" charset="-122"/>
                 <a:cs typeface="Arial" pitchFamily="34" charset="-120"/>
               </a:rPr>
-              <a:t>부터.</a:t>
-            </a:r>
-            <a:endParaRPr lang="en-US" sz="5400" dirty="0"/>
-          </a:p>
-        </p:txBody>
-      </p:sp>
-      <p:sp>
-        <p:nvSpPr>
-          <p:cNvPr id="4" name="Text 2"/>
-          <p:cNvSpPr/>
-          <p:nvPr/>
-        </p:nvSpPr>
-        <p:spPr>
-          <a:xfrm>
-            <a:off x="822960" y="4114800"/>
-            <a:ext cx="6035040" cy="822960"/>
-          </a:xfrm>
-          <a:prstGeom prst="rect">
-            <a:avLst/>
-          </a:prstGeom>
-          <a:noFill/>
-          <a:ln/>
-        </p:spPr>
-        <p:txBody>
-          <a:bodyPr wrap="square" lIns="0" tIns="0" rIns="0" bIns="0" rtlCol="0" anchor="t"/>
-          <a:lstStyle/>
-          <a:p>
-            <a:pPr indent="0" marL="0">
-              <a:lnSpc>
-                <a:spcPct val="135000"/>
-              </a:lnSpc>
-              <a:buNone/>
-            </a:pPr>
-            <a:r>
-              <a:rPr lang="en-US" sz="1500" dirty="0">
-                <a:solidFill>
-                  <a:srgbClr val="4E5968"/>
-                </a:solidFill>
-                <a:latin typeface="Arial" pitchFamily="34" charset="0"/>
-                <a:ea typeface="Arial" pitchFamily="34" charset="-122"/>
-                <a:cs typeface="Arial" pitchFamily="34" charset="-120"/>
-              </a:rPr>
-              <a:t>공고 링크 하나, 초안 하나면 됩니다.</a:t>
-            </a:r>
-            <a:endParaRPr lang="en-US" sz="1500" dirty="0"/>
-          </a:p>
-          <a:p>
-            <a:pPr indent="0" marL="0">
-              <a:lnSpc>
-                <a:spcPct val="135000"/>
-              </a:lnSpc>
-              <a:buNone/>
-            </a:pPr>
-            <a:r>
-              <a:rPr lang="en-US" sz="1500" dirty="0">
-                <a:solidFill>
-                  <a:srgbClr val="4E5968"/>
-                </a:solidFill>
-                <a:latin typeface="Arial" pitchFamily="34" charset="0"/>
-                <a:ea typeface="Arial" pitchFamily="34" charset="-122"/>
-                <a:cs typeface="Arial" pitchFamily="34" charset="-120"/>
-              </a:rPr>
-              <a:t>커밋 44개, 테스트 98개, 첫 코드 커밋 09/30 19:19</a:t>
-            </a:r>
-            <a:endParaRPr lang="en-US" sz="1500" dirty="0"/>
-          </a:p>
-        </p:txBody>
-      </p:sp>
-      <p:sp>
-        <p:nvSpPr>
-          <p:cNvPr id="5" name="Text 3"/>
-          <p:cNvSpPr/>
-          <p:nvPr/>
-        </p:nvSpPr>
-        <p:spPr>
-          <a:xfrm>
-            <a:off x="822960" y="5852160"/>
-            <a:ext cx="5486400" cy="411480"/>
-          </a:xfrm>
-          <a:prstGeom prst="rect">
-            <a:avLst/>
-          </a:prstGeom>
-          <a:noFill/>
-          <a:ln/>
-        </p:spPr>
-        <p:txBody>
-          <a:bodyPr wrap="square" lIns="0" tIns="0" rIns="0" bIns="0" rtlCol="0" anchor="t"/>
-          <a:lstStyle/>
-          <a:p>
-            <a:pPr indent="0" marL="0">
-              <a:buNone/>
-            </a:pPr>
-            <a:r>
-              <a:rPr lang="en-US" sz="1600" b="1" dirty="0">
-                <a:solidFill>
-                  <a:srgbClr val="191F28"/>
-                </a:solidFill>
-                <a:latin typeface="Arial" pitchFamily="34" charset="0"/>
-                <a:ea typeface="Arial" pitchFamily="34" charset="-122"/>
-                <a:cs typeface="Arial" pitchFamily="34" charset="-120"/>
-              </a:rPr>
-              <a:t>팀 루미아 · 김태걸 · 박세훈</a:t>
-            </a:r>
-            <a:endParaRPr lang="en-US" sz="1600" dirty="0"/>
-          </a:p>
-        </p:txBody>
-      </p:sp>
-      <p:sp>
-        <p:nvSpPr>
-          <p:cNvPr id="6" name="Shape 4"/>
-          <p:cNvSpPr/>
-          <p:nvPr/>
-        </p:nvSpPr>
-        <p:spPr>
-          <a:xfrm>
-            <a:off x="7269480" y="1828800"/>
-            <a:ext cx="1874520" cy="2788920"/>
+              <a:t>으로 갑니다</a:t>
+            </a:r>
+            <a:endParaRPr lang="en-US" sz="3400" dirty="0"/>
+          </a:p>
+        </p:txBody>
+      </p:sp>
+      <p:sp>
+        <p:nvSpPr>
+          <p:cNvPr id="4" name="Shape 2"/>
+          <p:cNvSpPr/>
+          <p:nvPr/>
+        </p:nvSpPr>
+        <p:spPr>
+          <a:xfrm>
+            <a:off x="822960" y="2606040"/>
+            <a:ext cx="3331464" cy="2194560"/>
           </a:xfrm>
           <a:prstGeom prst="roundRect">
             <a:avLst>
-              <a:gd name="adj" fmla="val 3902"/>
+              <a:gd name="adj" fmla="val 3333"/>
+            </a:avLst>
+          </a:prstGeom>
+          <a:solidFill>
+            <a:srgbClr val="EAF3FF"/>
+          </a:solidFill>
+          <a:ln w="12700">
+            <a:solidFill>
+              <a:srgbClr val="3182F6"/>
+            </a:solidFill>
+            <a:prstDash val="solid"/>
+          </a:ln>
+        </p:spPr>
+      </p:sp>
+      <p:sp>
+        <p:nvSpPr>
+          <p:cNvPr id="5" name="Text 3"/>
+          <p:cNvSpPr/>
+          <p:nvPr/>
+        </p:nvSpPr>
+        <p:spPr>
+          <a:xfrm>
+            <a:off x="1097280" y="2788920"/>
+            <a:ext cx="2782824" cy="274320"/>
+          </a:xfrm>
+          <a:prstGeom prst="rect">
+            <a:avLst/>
+          </a:prstGeom>
+          <a:noFill/>
+          <a:ln/>
+        </p:spPr>
+        <p:txBody>
+          <a:bodyPr wrap="square" lIns="0" tIns="0" rIns="0" bIns="0" rtlCol="0" anchor="t"/>
+          <a:lstStyle/>
+          <a:p>
+            <a:pPr indent="0" marL="0">
+              <a:buNone/>
+            </a:pPr>
+            <a:r>
+              <a:rPr lang="en-US" sz="1300" b="1" dirty="0">
+                <a:solidFill>
+                  <a:srgbClr val="3182F6"/>
+                </a:solidFill>
+                <a:latin typeface="Arial" pitchFamily="34" charset="0"/>
+                <a:ea typeface="Arial" pitchFamily="34" charset="-122"/>
+                <a:cs typeface="Arial" pitchFamily="34" charset="-120"/>
+              </a:rPr>
+              <a:t>제출 전 · 연구자</a:t>
+            </a:r>
+            <a:endParaRPr lang="en-US" sz="1300" dirty="0"/>
+          </a:p>
+        </p:txBody>
+      </p:sp>
+      <p:sp>
+        <p:nvSpPr>
+          <p:cNvPr id="6" name="Text 4"/>
+          <p:cNvSpPr/>
+          <p:nvPr/>
+        </p:nvSpPr>
+        <p:spPr>
+          <a:xfrm>
+            <a:off x="1097280" y="3154680"/>
+            <a:ext cx="2782824" cy="457200"/>
+          </a:xfrm>
+          <a:prstGeom prst="rect">
+            <a:avLst/>
+          </a:prstGeom>
+          <a:noFill/>
+          <a:ln/>
+        </p:spPr>
+        <p:txBody>
+          <a:bodyPr wrap="square" lIns="0" tIns="0" rIns="0" bIns="0" rtlCol="0" anchor="t"/>
+          <a:lstStyle/>
+          <a:p>
+            <a:pPr indent="0" marL="0">
+              <a:buNone/>
+            </a:pPr>
+            <a:r>
+              <a:rPr lang="en-US" sz="2200" b="1" dirty="0">
+                <a:solidFill>
+                  <a:srgbClr val="191F28"/>
+                </a:solidFill>
+                <a:latin typeface="Arial" pitchFamily="34" charset="0"/>
+                <a:ea typeface="Arial" pitchFamily="34" charset="-122"/>
+                <a:cs typeface="Arial" pitchFamily="34" charset="-120"/>
+              </a:rPr>
+              <a:t>셀프 점검</a:t>
+            </a:r>
+            <a:endParaRPr lang="en-US" sz="2200" dirty="0"/>
+          </a:p>
+        </p:txBody>
+      </p:sp>
+      <p:sp>
+        <p:nvSpPr>
+          <p:cNvPr id="7" name="Text 5"/>
+          <p:cNvSpPr/>
+          <p:nvPr/>
+        </p:nvSpPr>
+        <p:spPr>
+          <a:xfrm>
+            <a:off x="1097280" y="3749040"/>
+            <a:ext cx="2782824" cy="822960"/>
+          </a:xfrm>
+          <a:prstGeom prst="rect">
+            <a:avLst/>
+          </a:prstGeom>
+          <a:noFill/>
+          <a:ln/>
+        </p:spPr>
+        <p:txBody>
+          <a:bodyPr wrap="square" lIns="0" tIns="0" rIns="0" bIns="0" rtlCol="0" anchor="t"/>
+          <a:lstStyle/>
+          <a:p>
+            <a:pPr indent="0" marL="0">
+              <a:lnSpc>
+                <a:spcPct val="120000"/>
+              </a:lnSpc>
+              <a:buNone/>
+            </a:pPr>
+            <a:r>
+              <a:rPr lang="en-US" sz="1300" dirty="0">
+                <a:solidFill>
+                  <a:srgbClr val="4E5968"/>
+                </a:solidFill>
+                <a:latin typeface="Arial" pitchFamily="34" charset="0"/>
+                <a:ea typeface="Arial" pitchFamily="34" charset="-122"/>
+                <a:cs typeface="Arial" pitchFamily="34" charset="-120"/>
+              </a:rPr>
+              <a:t>고칠 곳과 판단할 곳을 원문과 함께 봅니다. 지금 이 앱으로 됩니다</a:t>
+            </a:r>
+            <a:endParaRPr lang="en-US" sz="1300" dirty="0"/>
+          </a:p>
+        </p:txBody>
+      </p:sp>
+      <p:sp>
+        <p:nvSpPr>
+          <p:cNvPr id="8" name="Shape 6"/>
+          <p:cNvSpPr/>
+          <p:nvPr/>
+        </p:nvSpPr>
+        <p:spPr>
+          <a:xfrm>
+            <a:off x="4181856" y="3703320"/>
+            <a:ext cx="219456" cy="0"/>
+          </a:xfrm>
+          <a:prstGeom prst="line">
+            <a:avLst/>
+          </a:prstGeom>
+          <a:noFill/>
+          <a:ln w="15875">
+            <a:solidFill>
+              <a:srgbClr val="3182F6"/>
+            </a:solidFill>
+            <a:prstDash val="solid"/>
+            <a:tailEnd type="triangle"/>
+          </a:ln>
+        </p:spPr>
+      </p:sp>
+      <p:sp>
+        <p:nvSpPr>
+          <p:cNvPr id="9" name="Shape 7"/>
+          <p:cNvSpPr/>
+          <p:nvPr/>
+        </p:nvSpPr>
+        <p:spPr>
+          <a:xfrm>
+            <a:off x="4428744" y="2606040"/>
+            <a:ext cx="3331464" cy="2194560"/>
+          </a:xfrm>
+          <a:prstGeom prst="roundRect">
+            <a:avLst>
+              <a:gd name="adj" fmla="val 3333"/>
             </a:avLst>
           </a:prstGeom>
           <a:solidFill>
@@ -4004,56 +4736,71 @@
           </a:ln>
         </p:spPr>
       </p:sp>
-      <p:pic>
-        <p:nvPicPr>
-          <p:cNvPr id="7" name="Image 0" descr="/Users/ryugi62/dev/rfp-to-fit/deliver/deck/build/img/qr-live.png">    </p:cNvPr>
-          <p:cNvPicPr>
-            <a:picLocks noChangeAspect="1"/>
-          </p:cNvPicPr>
-          <p:nvPr/>
-        </p:nvPicPr>
-        <p:blipFill>
-          <a:blip r:embed="rId1"/>
-          <a:stretch>
-            <a:fillRect/>
-          </a:stretch>
-        </p:blipFill>
-        <p:spPr>
-          <a:xfrm>
-            <a:off x="7525512" y="2084832"/>
-            <a:ext cx="1371600" cy="1371600"/>
-          </a:xfrm>
-          <a:prstGeom prst="rect">
-            <a:avLst/>
-          </a:prstGeom>
-        </p:spPr>
-      </p:pic>
-      <p:sp>
-        <p:nvSpPr>
-          <p:cNvPr id="8" name="Text 5"/>
-          <p:cNvSpPr/>
-          <p:nvPr/>
-        </p:nvSpPr>
-        <p:spPr>
-          <a:xfrm>
-            <a:off x="7452360" y="3639312"/>
-            <a:ext cx="1508760" cy="320040"/>
-          </a:xfrm>
-          <a:prstGeom prst="rect">
-            <a:avLst/>
-          </a:prstGeom>
-          <a:noFill/>
-          <a:ln/>
-        </p:spPr>
-        <p:txBody>
-          <a:bodyPr wrap="square" lIns="0" tIns="0" rIns="0" bIns="0" rtlCol="0" anchor="t"/>
-          <a:lstStyle/>
-          <a:p>
-            <a:pPr indent="0" marL="0">
-              <a:buNone/>
-            </a:pPr>
-            <a:r>
-              <a:rPr lang="en-US" sz="1400" b="1" dirty="0">
+      <p:sp>
+        <p:nvSpPr>
+          <p:cNvPr id="10" name="Text 8"/>
+          <p:cNvSpPr/>
+          <p:nvPr/>
+        </p:nvSpPr>
+        <p:spPr>
+          <a:xfrm>
+            <a:off x="4703064" y="2788920"/>
+            <a:ext cx="2782824" cy="274320"/>
+          </a:xfrm>
+          <a:prstGeom prst="rect">
+            <a:avLst/>
+          </a:prstGeom>
+          <a:noFill/>
+          <a:ln/>
+        </p:spPr>
+        <p:txBody>
+          <a:bodyPr wrap="square" lIns="0" tIns="0" rIns="0" bIns="0" rtlCol="0" anchor="t"/>
+          <a:lstStyle/>
+          <a:p>
+            <a:pPr indent="0" marL="0">
+              <a:buNone/>
+            </a:pPr>
+            <a:r>
+              <a:rPr lang="en-US" sz="1300" b="1" dirty="0">
+                <a:solidFill>
+                  <a:srgbClr val="3182F6"/>
+                </a:solidFill>
+                <a:latin typeface="Arial" pitchFamily="34" charset="0"/>
+                <a:ea typeface="Arial" pitchFamily="34" charset="-122"/>
+                <a:cs typeface="Arial" pitchFamily="34" charset="-120"/>
+              </a:rPr>
+              <a:t>접수 후 · 전문기관</a:t>
+            </a:r>
+            <a:endParaRPr lang="en-US" sz="1300" dirty="0"/>
+          </a:p>
+        </p:txBody>
+      </p:sp>
+      <p:sp>
+        <p:nvSpPr>
+          <p:cNvPr id="11" name="Text 9"/>
+          <p:cNvSpPr/>
+          <p:nvPr/>
+        </p:nvSpPr>
+        <p:spPr>
+          <a:xfrm>
+            <a:off x="4703064" y="3154680"/>
+            <a:ext cx="2782824" cy="457200"/>
+          </a:xfrm>
+          <a:prstGeom prst="rect">
+            <a:avLst/>
+          </a:prstGeom>
+          <a:noFill/>
+          <a:ln/>
+        </p:spPr>
+        <p:txBody>
+          <a:bodyPr wrap="square" lIns="0" tIns="0" rIns="0" bIns="0" rtlCol="0" anchor="t"/>
+          <a:lstStyle/>
+          <a:p>
+            <a:pPr indent="0" marL="0">
+              <a:buNone/>
+            </a:pPr>
+            <a:r>
+              <a:rPr lang="en-US" sz="2200" b="1" dirty="0">
                 <a:solidFill>
                   <a:srgbClr val="191F28"/>
                 </a:solidFill>
@@ -4061,22 +4808,22 @@
                 <a:ea typeface="Arial" pitchFamily="34" charset="-122"/>
                 <a:cs typeface="Arial" pitchFamily="34" charset="-120"/>
               </a:rPr>
-              <a:t>라이브 앱</a:t>
-            </a:r>
-            <a:endParaRPr lang="en-US" sz="1400" dirty="0"/>
-          </a:p>
-        </p:txBody>
-      </p:sp>
-      <p:sp>
-        <p:nvSpPr>
-          <p:cNvPr id="9" name="Text 6"/>
-          <p:cNvSpPr/>
-          <p:nvPr/>
-        </p:nvSpPr>
-        <p:spPr>
-          <a:xfrm>
-            <a:off x="7452360" y="4005072"/>
-            <a:ext cx="1554480" cy="914400"/>
+              <a:t>요건 사전검토</a:t>
+            </a:r>
+            <a:endParaRPr lang="en-US" sz="2200" dirty="0"/>
+          </a:p>
+        </p:txBody>
+      </p:sp>
+      <p:sp>
+        <p:nvSpPr>
+          <p:cNvPr id="12" name="Text 10"/>
+          <p:cNvSpPr/>
+          <p:nvPr/>
+        </p:nvSpPr>
+        <p:spPr>
+          <a:xfrm>
+            <a:off x="4703064" y="3749040"/>
+            <a:ext cx="2782824" cy="822960"/>
           </a:xfrm>
           <a:prstGeom prst="rect">
             <a:avLst/>
@@ -4090,39 +4837,63 @@
           <a:p>
             <a:pPr indent="0" marL="0">
               <a:lnSpc>
-                <a:spcPct val="115000"/>
+                <a:spcPct val="120000"/>
               </a:lnSpc>
               <a:buNone/>
             </a:pPr>
             <a:r>
-              <a:rPr lang="en-US" sz="950" dirty="0">
-                <a:solidFill>
-                  <a:srgbClr val="8B95A1"/>
-                </a:solidFill>
-                <a:latin typeface="Arial" pitchFamily="34" charset="0"/>
-                <a:ea typeface="Arial" pitchFamily="34" charset="-122"/>
-                <a:cs typeface="Arial" pitchFamily="34" charset="-120"/>
-              </a:rPr>
-              <a:t>ryugi62.github.io/rfp-to-fit/</a:t>
-            </a:r>
-            <a:endParaRPr lang="en-US" sz="950" dirty="0"/>
-          </a:p>
-        </p:txBody>
-      </p:sp>
-      <p:sp>
-        <p:nvSpPr>
-          <p:cNvPr id="10" name="Shape 7"/>
-          <p:cNvSpPr/>
-          <p:nvPr/>
-        </p:nvSpPr>
-        <p:spPr>
-          <a:xfrm>
-            <a:off x="9372600" y="1828800"/>
-            <a:ext cx="1874520" cy="2788920"/>
+              <a:rPr lang="en-US" sz="1300" dirty="0">
+                <a:solidFill>
+                  <a:srgbClr val="4E5968"/>
+                </a:solidFill>
+                <a:latin typeface="Arial" pitchFamily="34" charset="0"/>
+                <a:ea typeface="Arial" pitchFamily="34" charset="-122"/>
+                <a:cs typeface="Arial" pitchFamily="34" charset="-120"/>
+              </a:rPr>
+              <a:t>형식 미비와 서류 누락을 먼저 거릅니다. 첫 실증 목표</a:t>
+            </a:r>
+            <a:endParaRPr lang="en-US" sz="1300" dirty="0"/>
+          </a:p>
+        </p:txBody>
+      </p:sp>
+      <p:sp>
+        <p:nvSpPr>
+          <p:cNvPr id="13" name="Shape 11"/>
+          <p:cNvSpPr/>
+          <p:nvPr/>
+        </p:nvSpPr>
+        <p:spPr>
+          <a:xfrm>
+            <a:off x="7787640" y="3703320"/>
+            <a:ext cx="219456" cy="0"/>
+          </a:xfrm>
+          <a:prstGeom prst="line">
+            <a:avLst/>
+          </a:prstGeom>
+          <a:noFill/>
+          <a:ln w="15875">
+            <a:solidFill>
+              <a:srgbClr val="3182F6"/>
+            </a:solidFill>
+            <a:prstDash val="solid"/>
+            <a:tailEnd type="triangle"/>
+          </a:ln>
+        </p:spPr>
+      </p:sp>
+      <p:sp>
+        <p:nvSpPr>
+          <p:cNvPr id="14" name="Shape 12"/>
+          <p:cNvSpPr/>
+          <p:nvPr/>
+        </p:nvSpPr>
+        <p:spPr>
+          <a:xfrm>
+            <a:off x="8034528" y="2606040"/>
+            <a:ext cx="3331464" cy="2194560"/>
           </a:xfrm>
           <a:prstGeom prst="roundRect">
             <a:avLst>
-              <a:gd name="adj" fmla="val 3902"/>
+              <a:gd name="adj" fmla="val 3333"/>
             </a:avLst>
           </a:prstGeom>
           <a:solidFill>
@@ -4136,56 +4907,71 @@
           </a:ln>
         </p:spPr>
       </p:sp>
-      <p:pic>
-        <p:nvPicPr>
-          <p:cNvPr id="11" name="Image 1" descr="/Users/ryugi62/dev/rfp-to-fit/deliver/deck/build/img/qr-repo.png">    </p:cNvPr>
-          <p:cNvPicPr>
-            <a:picLocks noChangeAspect="1"/>
-          </p:cNvPicPr>
-          <p:nvPr/>
-        </p:nvPicPr>
-        <p:blipFill>
-          <a:blip r:embed="rId2"/>
-          <a:stretch>
-            <a:fillRect/>
-          </a:stretch>
-        </p:blipFill>
-        <p:spPr>
-          <a:xfrm>
-            <a:off x="9628632" y="2084832"/>
-            <a:ext cx="1371600" cy="1371600"/>
-          </a:xfrm>
-          <a:prstGeom prst="rect">
-            <a:avLst/>
-          </a:prstGeom>
-        </p:spPr>
-      </p:pic>
-      <p:sp>
-        <p:nvSpPr>
-          <p:cNvPr id="12" name="Text 8"/>
-          <p:cNvSpPr/>
-          <p:nvPr/>
-        </p:nvSpPr>
-        <p:spPr>
-          <a:xfrm>
-            <a:off x="9555480" y="3639312"/>
-            <a:ext cx="1508760" cy="320040"/>
-          </a:xfrm>
-          <a:prstGeom prst="rect">
-            <a:avLst/>
-          </a:prstGeom>
-          <a:noFill/>
-          <a:ln/>
-        </p:spPr>
-        <p:txBody>
-          <a:bodyPr wrap="square" lIns="0" tIns="0" rIns="0" bIns="0" rtlCol="0" anchor="t"/>
-          <a:lstStyle/>
-          <a:p>
-            <a:pPr indent="0" marL="0">
-              <a:buNone/>
-            </a:pPr>
-            <a:r>
-              <a:rPr lang="en-US" sz="1400" b="1" dirty="0">
+      <p:sp>
+        <p:nvSpPr>
+          <p:cNvPr id="15" name="Text 13"/>
+          <p:cNvSpPr/>
+          <p:nvPr/>
+        </p:nvSpPr>
+        <p:spPr>
+          <a:xfrm>
+            <a:off x="8308848" y="2788920"/>
+            <a:ext cx="2782824" cy="274320"/>
+          </a:xfrm>
+          <a:prstGeom prst="rect">
+            <a:avLst/>
+          </a:prstGeom>
+          <a:noFill/>
+          <a:ln/>
+        </p:spPr>
+        <p:txBody>
+          <a:bodyPr wrap="square" lIns="0" tIns="0" rIns="0" bIns="0" rtlCol="0" anchor="t"/>
+          <a:lstStyle/>
+          <a:p>
+            <a:pPr indent="0" marL="0">
+              <a:buNone/>
+            </a:pPr>
+            <a:r>
+              <a:rPr lang="en-US" sz="1300" b="1" dirty="0">
+                <a:solidFill>
+                  <a:srgbClr val="3182F6"/>
+                </a:solidFill>
+                <a:latin typeface="Arial" pitchFamily="34" charset="0"/>
+                <a:ea typeface="Arial" pitchFamily="34" charset="-122"/>
+                <a:cs typeface="Arial" pitchFamily="34" charset="-120"/>
+              </a:rPr>
+              <a:t>심사 중 · 평가위원</a:t>
+            </a:r>
+            <a:endParaRPr lang="en-US" sz="1300" dirty="0"/>
+          </a:p>
+        </p:txBody>
+      </p:sp>
+      <p:sp>
+        <p:nvSpPr>
+          <p:cNvPr id="16" name="Text 14"/>
+          <p:cNvSpPr/>
+          <p:nvPr/>
+        </p:nvSpPr>
+        <p:spPr>
+          <a:xfrm>
+            <a:off x="8308848" y="3154680"/>
+            <a:ext cx="2782824" cy="457200"/>
+          </a:xfrm>
+          <a:prstGeom prst="rect">
+            <a:avLst/>
+          </a:prstGeom>
+          <a:noFill/>
+          <a:ln/>
+        </p:spPr>
+        <p:txBody>
+          <a:bodyPr wrap="square" lIns="0" tIns="0" rIns="0" bIns="0" rtlCol="0" anchor="t"/>
+          <a:lstStyle/>
+          <a:p>
+            <a:pPr indent="0" marL="0">
+              <a:buNone/>
+            </a:pPr>
+            <a:r>
+              <a:rPr lang="en-US" sz="2200" b="1" dirty="0">
                 <a:solidFill>
                   <a:srgbClr val="191F28"/>
                 </a:solidFill>
@@ -4193,22 +4979,22 @@
                 <a:ea typeface="Arial" pitchFamily="34" charset="-122"/>
                 <a:cs typeface="Arial" pitchFamily="34" charset="-120"/>
               </a:rPr>
-              <a:t>GitHub</a:t>
-            </a:r>
-            <a:endParaRPr lang="en-US" sz="1400" dirty="0"/>
-          </a:p>
-        </p:txBody>
-      </p:sp>
-      <p:sp>
-        <p:nvSpPr>
-          <p:cNvPr id="13" name="Text 9"/>
-          <p:cNvSpPr/>
-          <p:nvPr/>
-        </p:nvSpPr>
-        <p:spPr>
-          <a:xfrm>
-            <a:off x="9555480" y="4005072"/>
-            <a:ext cx="1554480" cy="914400"/>
+              <a:t>근거 위치 표시</a:t>
+            </a:r>
+            <a:endParaRPr lang="en-US" sz="2200" dirty="0"/>
+          </a:p>
+        </p:txBody>
+      </p:sp>
+      <p:sp>
+        <p:nvSpPr>
+          <p:cNvPr id="17" name="Text 15"/>
+          <p:cNvSpPr/>
+          <p:nvPr/>
+        </p:nvSpPr>
+        <p:spPr>
+          <a:xfrm>
+            <a:off x="8308848" y="3749040"/>
+            <a:ext cx="2782824" cy="822960"/>
           </a:xfrm>
           <a:prstGeom prst="rect">
             <a:avLst/>
@@ -4222,12 +5008,118 @@
           <a:p>
             <a:pPr indent="0" marL="0">
               <a:lnSpc>
-                <a:spcPct val="115000"/>
+                <a:spcPct val="120000"/>
               </a:lnSpc>
               <a:buNone/>
             </a:pPr>
             <a:r>
-              <a:rPr lang="en-US" sz="950" dirty="0">
+              <a:rPr lang="en-US" sz="1300" dirty="0">
+                <a:solidFill>
+                  <a:srgbClr val="4E5968"/>
+                </a:solidFill>
+                <a:latin typeface="Arial" pitchFamily="34" charset="0"/>
+                <a:ea typeface="Arial" pitchFamily="34" charset="-122"/>
+                <a:cs typeface="Arial" pitchFamily="34" charset="-120"/>
+              </a:rPr>
+              <a:t>지표마다 제안서의 근거 문장을 옆에 띄웁니다. 판정은 사람</a:t>
+            </a:r>
+            <a:endParaRPr lang="en-US" sz="1300" dirty="0"/>
+          </a:p>
+        </p:txBody>
+      </p:sp>
+      <p:sp>
+        <p:nvSpPr>
+          <p:cNvPr id="18" name="Text 16"/>
+          <p:cNvSpPr/>
+          <p:nvPr/>
+        </p:nvSpPr>
+        <p:spPr>
+          <a:xfrm>
+            <a:off x="822960" y="5093208"/>
+            <a:ext cx="548640" cy="365760"/>
+          </a:xfrm>
+          <a:prstGeom prst="rect">
+            <a:avLst/>
+          </a:prstGeom>
+          <a:noFill/>
+          <a:ln/>
+        </p:spPr>
+        <p:txBody>
+          <a:bodyPr wrap="square" lIns="0" tIns="0" rIns="0" bIns="0" rtlCol="0" anchor="t"/>
+          <a:lstStyle/>
+          <a:p>
+            <a:pPr indent="0" marL="0">
+              <a:buNone/>
+            </a:pPr>
+            <a:endParaRPr lang="en-US" sz="1800" dirty="0"/>
+          </a:p>
+        </p:txBody>
+      </p:sp>
+      <p:sp>
+        <p:nvSpPr>
+          <p:cNvPr id="19" name="Text 17"/>
+          <p:cNvSpPr/>
+          <p:nvPr/>
+        </p:nvSpPr>
+        <p:spPr>
+          <a:xfrm>
+            <a:off x="1463040" y="5074920"/>
+            <a:ext cx="4448556" cy="384048"/>
+          </a:xfrm>
+          <a:prstGeom prst="rect">
+            <a:avLst/>
+          </a:prstGeom>
+          <a:noFill/>
+          <a:ln/>
+        </p:spPr>
+        <p:txBody>
+          <a:bodyPr wrap="square" lIns="0" tIns="0" rIns="0" bIns="0" rtlCol="0" anchor="t"/>
+          <a:lstStyle/>
+          <a:p>
+            <a:pPr indent="0" marL="0">
+              <a:buNone/>
+            </a:pPr>
+            <a:r>
+              <a:rPr lang="en-US" sz="1500" b="1" dirty="0">
+                <a:solidFill>
+                  <a:srgbClr val="191F28"/>
+                </a:solidFill>
+                <a:latin typeface="Arial" pitchFamily="34" charset="0"/>
+                <a:ea typeface="Arial" pitchFamily="34" charset="-122"/>
+                <a:cs typeface="Arial" pitchFamily="34" charset="-120"/>
+              </a:rPr>
+              <a:t>실제 심사 의견은 평가기관에 있습니다</a:t>
+            </a:r>
+            <a:endParaRPr lang="en-US" sz="1500" dirty="0"/>
+          </a:p>
+        </p:txBody>
+      </p:sp>
+      <p:sp>
+        <p:nvSpPr>
+          <p:cNvPr id="20" name="Text 18"/>
+          <p:cNvSpPr/>
+          <p:nvPr/>
+        </p:nvSpPr>
+        <p:spPr>
+          <a:xfrm>
+            <a:off x="1463040" y="5486400"/>
+            <a:ext cx="4448556" cy="365760"/>
+          </a:xfrm>
+          <a:prstGeom prst="rect">
+            <a:avLst/>
+          </a:prstGeom>
+          <a:noFill/>
+          <a:ln/>
+        </p:spPr>
+        <p:txBody>
+          <a:bodyPr wrap="square" lIns="0" tIns="0" rIns="0" bIns="0" rtlCol="0" anchor="t"/>
+          <a:lstStyle/>
+          <a:p>
+            <a:pPr indent="0" marL="0">
+              <a:buNone/>
+            </a:pPr>
+            <a:r>
+              <a:rPr lang="en-US" sz="1200" dirty="0">
                 <a:solidFill>
                   <a:srgbClr val="8B95A1"/>
                 </a:solidFill>
@@ -4235,9 +5127,115 @@
                 <a:ea typeface="Arial" pitchFamily="34" charset="-122"/>
                 <a:cs typeface="Arial" pitchFamily="34" charset="-120"/>
               </a:rPr>
-              <a:t>github.com/Ryugi62/rfp-to-fit</a:t>
-            </a:r>
-            <a:endParaRPr lang="en-US" sz="950" dirty="0"/>
+              <a:t>기관과 연계하면 관점을 실제 심사 의견 유형으로 맞출 수 있습니다</a:t>
+            </a:r>
+            <a:endParaRPr lang="en-US" sz="1200" dirty="0"/>
+          </a:p>
+        </p:txBody>
+      </p:sp>
+      <p:sp>
+        <p:nvSpPr>
+          <p:cNvPr id="21" name="Text 19"/>
+          <p:cNvSpPr/>
+          <p:nvPr/>
+        </p:nvSpPr>
+        <p:spPr>
+          <a:xfrm>
+            <a:off x="6094476" y="5093208"/>
+            <a:ext cx="548640" cy="365760"/>
+          </a:xfrm>
+          <a:prstGeom prst="rect">
+            <a:avLst/>
+          </a:prstGeom>
+          <a:noFill/>
+          <a:ln/>
+        </p:spPr>
+        <p:txBody>
+          <a:bodyPr wrap="square" lIns="0" tIns="0" rIns="0" bIns="0" rtlCol="0" anchor="t"/>
+          <a:lstStyle/>
+          <a:p>
+            <a:pPr indent="0" marL="0">
+              <a:buNone/>
+            </a:pPr>
+            <a:endParaRPr lang="en-US" sz="1800" dirty="0"/>
+          </a:p>
+        </p:txBody>
+      </p:sp>
+      <p:sp>
+        <p:nvSpPr>
+          <p:cNvPr id="22" name="Text 20"/>
+          <p:cNvSpPr/>
+          <p:nvPr/>
+        </p:nvSpPr>
+        <p:spPr>
+          <a:xfrm>
+            <a:off x="6734556" y="5074920"/>
+            <a:ext cx="4631436" cy="384048"/>
+          </a:xfrm>
+          <a:prstGeom prst="rect">
+            <a:avLst/>
+          </a:prstGeom>
+          <a:noFill/>
+          <a:ln/>
+        </p:spPr>
+        <p:txBody>
+          <a:bodyPr wrap="square" lIns="0" tIns="0" rIns="0" bIns="0" rtlCol="0" anchor="t"/>
+          <a:lstStyle/>
+          <a:p>
+            <a:pPr indent="0" marL="0">
+              <a:buNone/>
+            </a:pPr>
+            <a:r>
+              <a:rPr lang="en-US" sz="1500" b="1" dirty="0">
+                <a:solidFill>
+                  <a:srgbClr val="191F28"/>
+                </a:solidFill>
+                <a:latin typeface="Arial" pitchFamily="34" charset="0"/>
+                <a:ea typeface="Arial" pitchFamily="34" charset="-122"/>
+                <a:cs typeface="Arial" pitchFamily="34" charset="-120"/>
+              </a:rPr>
+              <a:t>NAIS 플랫폼에 도구로 꽂힙니다</a:t>
+            </a:r>
+            <a:endParaRPr lang="en-US" sz="1500" dirty="0"/>
+          </a:p>
+        </p:txBody>
+      </p:sp>
+      <p:sp>
+        <p:nvSpPr>
+          <p:cNvPr id="23" name="Text 21"/>
+          <p:cNvSpPr/>
+          <p:nvPr/>
+        </p:nvSpPr>
+        <p:spPr>
+          <a:xfrm>
+            <a:off x="6734556" y="5486400"/>
+            <a:ext cx="4631436" cy="365760"/>
+          </a:xfrm>
+          <a:prstGeom prst="rect">
+            <a:avLst/>
+          </a:prstGeom>
+          <a:noFill/>
+          <a:ln/>
+        </p:spPr>
+        <p:txBody>
+          <a:bodyPr wrap="square" lIns="0" tIns="0" rIns="0" bIns="0" rtlCol="0" anchor="t"/>
+          <a:lstStyle/>
+          <a:p>
+            <a:pPr indent="0" marL="0">
+              <a:buNone/>
+            </a:pPr>
+            <a:r>
+              <a:rPr lang="en-US" sz="1200" dirty="0">
+                <a:solidFill>
+                  <a:srgbClr val="8B95A1"/>
+                </a:solidFill>
+                <a:latin typeface="Arial" pitchFamily="34" charset="0"/>
+                <a:ea typeface="Arial" pitchFamily="34" charset="-122"/>
+                <a:cs typeface="Arial" pitchFamily="34" charset="-120"/>
+              </a:rPr>
+              <a:t>AI 사이언티스트가 과제 신청까지 하는 날, 그 마지막 점검</a:t>
+            </a:r>
+            <a:endParaRPr lang="en-US" sz="1200" dirty="0"/>
           </a:p>
         </p:txBody>
       </p:sp>
@@ -4281,6 +5279,521 @@
         </p:nvSpPr>
         <p:spPr>
           <a:xfrm>
+            <a:off x="822960" y="1051560"/>
+            <a:ext cx="7315200" cy="365760"/>
+          </a:xfrm>
+          <a:prstGeom prst="rect">
+            <a:avLst/>
+          </a:prstGeom>
+          <a:noFill/>
+          <a:ln/>
+        </p:spPr>
+        <p:txBody>
+          <a:bodyPr wrap="square" lIns="0" tIns="0" rIns="0" bIns="0" rtlCol="0" anchor="t"/>
+          <a:lstStyle/>
+          <a:p>
+            <a:pPr indent="0" marL="0">
+              <a:buNone/>
+            </a:pPr>
+            <a:r>
+              <a:rPr lang="en-US" sz="1400" b="1" dirty="0">
+                <a:solidFill>
+                  <a:srgbClr val="3182F6"/>
+                </a:solidFill>
+                <a:latin typeface="Arial" pitchFamily="34" charset="0"/>
+                <a:ea typeface="Arial" pitchFamily="34" charset="-122"/>
+                <a:cs typeface="Arial" pitchFamily="34" charset="-120"/>
+              </a:rPr>
+              <a:t>지금 직접 해 보세요</a:t>
+            </a:r>
+            <a:endParaRPr lang="en-US" sz="1400" dirty="0"/>
+          </a:p>
+        </p:txBody>
+      </p:sp>
+      <p:sp>
+        <p:nvSpPr>
+          <p:cNvPr id="3" name="Text 1"/>
+          <p:cNvSpPr/>
+          <p:nvPr/>
+        </p:nvSpPr>
+        <p:spPr>
+          <a:xfrm>
+            <a:off x="795528" y="1645920"/>
+            <a:ext cx="10543032" cy="2103120"/>
+          </a:xfrm>
+          <a:prstGeom prst="rect">
+            <a:avLst/>
+          </a:prstGeom>
+          <a:noFill/>
+          <a:ln/>
+        </p:spPr>
+        <p:txBody>
+          <a:bodyPr wrap="square" lIns="0" tIns="0" rIns="0" bIns="0" rtlCol="0" anchor="t"/>
+          <a:lstStyle/>
+          <a:p>
+            <a:pPr indent="0" marL="0">
+              <a:lnSpc>
+                <a:spcPct val="112000"/>
+              </a:lnSpc>
+              <a:buNone/>
+            </a:pPr>
+            <a:r>
+              <a:rPr lang="en-US" sz="5400" b="1" dirty="0">
+                <a:solidFill>
+                  <a:srgbClr val="191F28"/>
+                </a:solidFill>
+                <a:latin typeface="Arial" pitchFamily="34" charset="0"/>
+                <a:ea typeface="Arial" pitchFamily="34" charset="-122"/>
+                <a:cs typeface="Arial" pitchFamily="34" charset="-120"/>
+              </a:rPr>
+              <a:t>제출 전에,</a:t>
+            </a:r>
+            <a:endParaRPr lang="en-US" sz="5400" dirty="0"/>
+          </a:p>
+          <a:p>
+            <a:pPr indent="0" marL="0">
+              <a:lnSpc>
+                <a:spcPct val="112000"/>
+              </a:lnSpc>
+              <a:buNone/>
+            </a:pPr>
+            <a:r>
+              <a:rPr lang="en-US" sz="5400" b="1" dirty="0">
+                <a:solidFill>
+                  <a:srgbClr val="3182F6"/>
+                </a:solidFill>
+                <a:latin typeface="Arial" pitchFamily="34" charset="0"/>
+                <a:ea typeface="Arial" pitchFamily="34" charset="-122"/>
+                <a:cs typeface="Arial" pitchFamily="34" charset="-120"/>
+              </a:rPr>
+              <a:t>빈칸</a:t>
+            </a:r>
+            <a:pPr indent="0" marL="0">
+              <a:lnSpc>
+                <a:spcPct val="112000"/>
+              </a:lnSpc>
+              <a:buNone/>
+            </a:pPr>
+            <a:r>
+              <a:rPr lang="en-US" sz="5400" b="1" dirty="0">
+                <a:solidFill>
+                  <a:srgbClr val="191F28"/>
+                </a:solidFill>
+                <a:latin typeface="Arial" pitchFamily="34" charset="0"/>
+                <a:ea typeface="Arial" pitchFamily="34" charset="-122"/>
+                <a:cs typeface="Arial" pitchFamily="34" charset="-120"/>
+              </a:rPr>
+              <a:t>부터.</a:t>
+            </a:r>
+            <a:endParaRPr lang="en-US" sz="5400" dirty="0"/>
+          </a:p>
+        </p:txBody>
+      </p:sp>
+      <p:sp>
+        <p:nvSpPr>
+          <p:cNvPr id="4" name="Text 2"/>
+          <p:cNvSpPr/>
+          <p:nvPr/>
+        </p:nvSpPr>
+        <p:spPr>
+          <a:xfrm>
+            <a:off x="822960" y="4114800"/>
+            <a:ext cx="6035040" cy="822960"/>
+          </a:xfrm>
+          <a:prstGeom prst="rect">
+            <a:avLst/>
+          </a:prstGeom>
+          <a:noFill/>
+          <a:ln/>
+        </p:spPr>
+        <p:txBody>
+          <a:bodyPr wrap="square" lIns="0" tIns="0" rIns="0" bIns="0" rtlCol="0" anchor="t"/>
+          <a:lstStyle/>
+          <a:p>
+            <a:pPr indent="0" marL="0">
+              <a:lnSpc>
+                <a:spcPct val="135000"/>
+              </a:lnSpc>
+              <a:buNone/>
+            </a:pPr>
+            <a:r>
+              <a:rPr lang="en-US" sz="1500" dirty="0">
+                <a:solidFill>
+                  <a:srgbClr val="4E5968"/>
+                </a:solidFill>
+                <a:latin typeface="Arial" pitchFamily="34" charset="0"/>
+                <a:ea typeface="Arial" pitchFamily="34" charset="-122"/>
+                <a:cs typeface="Arial" pitchFamily="34" charset="-120"/>
+              </a:rPr>
+              <a:t>공고 링크 하나, 초안 하나면 됩니다.</a:t>
+            </a:r>
+            <a:endParaRPr lang="en-US" sz="1500" dirty="0"/>
+          </a:p>
+          <a:p>
+            <a:pPr indent="0" marL="0">
+              <a:lnSpc>
+                <a:spcPct val="135000"/>
+              </a:lnSpc>
+              <a:buNone/>
+            </a:pPr>
+            <a:r>
+              <a:rPr lang="en-US" sz="1500" dirty="0">
+                <a:solidFill>
+                  <a:srgbClr val="4E5968"/>
+                </a:solidFill>
+                <a:latin typeface="Arial" pitchFamily="34" charset="0"/>
+                <a:ea typeface="Arial" pitchFamily="34" charset="-122"/>
+                <a:cs typeface="Arial" pitchFamily="34" charset="-120"/>
+              </a:rPr>
+              <a:t>커밋 46개, 테스트 99개, 첫 코드 커밋 09/30 19:19</a:t>
+            </a:r>
+            <a:endParaRPr lang="en-US" sz="1500" dirty="0"/>
+          </a:p>
+        </p:txBody>
+      </p:sp>
+      <p:sp>
+        <p:nvSpPr>
+          <p:cNvPr id="5" name="Text 3"/>
+          <p:cNvSpPr/>
+          <p:nvPr/>
+        </p:nvSpPr>
+        <p:spPr>
+          <a:xfrm>
+            <a:off x="822960" y="5852160"/>
+            <a:ext cx="5486400" cy="411480"/>
+          </a:xfrm>
+          <a:prstGeom prst="rect">
+            <a:avLst/>
+          </a:prstGeom>
+          <a:noFill/>
+          <a:ln/>
+        </p:spPr>
+        <p:txBody>
+          <a:bodyPr wrap="square" lIns="0" tIns="0" rIns="0" bIns="0" rtlCol="0" anchor="t"/>
+          <a:lstStyle/>
+          <a:p>
+            <a:pPr indent="0" marL="0">
+              <a:buNone/>
+            </a:pPr>
+            <a:r>
+              <a:rPr lang="en-US" sz="1600" b="1" dirty="0">
+                <a:solidFill>
+                  <a:srgbClr val="191F28"/>
+                </a:solidFill>
+                <a:latin typeface="Arial" pitchFamily="34" charset="0"/>
+                <a:ea typeface="Arial" pitchFamily="34" charset="-122"/>
+                <a:cs typeface="Arial" pitchFamily="34" charset="-120"/>
+              </a:rPr>
+              <a:t>팀 루미아 · 김태걸 · 박세훈</a:t>
+            </a:r>
+            <a:endParaRPr lang="en-US" sz="1600" dirty="0"/>
+          </a:p>
+        </p:txBody>
+      </p:sp>
+      <p:sp>
+        <p:nvSpPr>
+          <p:cNvPr id="6" name="Shape 4"/>
+          <p:cNvSpPr/>
+          <p:nvPr/>
+        </p:nvSpPr>
+        <p:spPr>
+          <a:xfrm>
+            <a:off x="7269480" y="1828800"/>
+            <a:ext cx="1874520" cy="2788920"/>
+          </a:xfrm>
+          <a:prstGeom prst="roundRect">
+            <a:avLst>
+              <a:gd name="adj" fmla="val 3902"/>
+            </a:avLst>
+          </a:prstGeom>
+          <a:solidFill>
+            <a:srgbClr val="FFFFFF"/>
+          </a:solidFill>
+          <a:ln w="12700">
+            <a:solidFill>
+              <a:srgbClr val="E5E8EB"/>
+            </a:solidFill>
+            <a:prstDash val="solid"/>
+          </a:ln>
+        </p:spPr>
+      </p:sp>
+      <p:pic>
+        <p:nvPicPr>
+          <p:cNvPr id="7" name="Image 0" descr="/Users/ryugi62/dev/rfp-to-fit/deliver/deck/build/img/qr-live.png">    </p:cNvPr>
+          <p:cNvPicPr>
+            <a:picLocks noChangeAspect="1"/>
+          </p:cNvPicPr>
+          <p:nvPr/>
+        </p:nvPicPr>
+        <p:blipFill>
+          <a:blip r:embed="rId1"/>
+          <a:stretch>
+            <a:fillRect/>
+          </a:stretch>
+        </p:blipFill>
+        <p:spPr>
+          <a:xfrm>
+            <a:off x="7525512" y="2084832"/>
+            <a:ext cx="1371600" cy="1371600"/>
+          </a:xfrm>
+          <a:prstGeom prst="rect">
+            <a:avLst/>
+          </a:prstGeom>
+        </p:spPr>
+      </p:pic>
+      <p:sp>
+        <p:nvSpPr>
+          <p:cNvPr id="8" name="Text 5"/>
+          <p:cNvSpPr/>
+          <p:nvPr/>
+        </p:nvSpPr>
+        <p:spPr>
+          <a:xfrm>
+            <a:off x="7452360" y="3639312"/>
+            <a:ext cx="1508760" cy="320040"/>
+          </a:xfrm>
+          <a:prstGeom prst="rect">
+            <a:avLst/>
+          </a:prstGeom>
+          <a:noFill/>
+          <a:ln/>
+        </p:spPr>
+        <p:txBody>
+          <a:bodyPr wrap="square" lIns="0" tIns="0" rIns="0" bIns="0" rtlCol="0" anchor="t"/>
+          <a:lstStyle/>
+          <a:p>
+            <a:pPr indent="0" marL="0">
+              <a:buNone/>
+            </a:pPr>
+            <a:r>
+              <a:rPr lang="en-US" sz="1400" b="1" dirty="0">
+                <a:solidFill>
+                  <a:srgbClr val="191F28"/>
+                </a:solidFill>
+                <a:latin typeface="Arial" pitchFamily="34" charset="0"/>
+                <a:ea typeface="Arial" pitchFamily="34" charset="-122"/>
+                <a:cs typeface="Arial" pitchFamily="34" charset="-120"/>
+              </a:rPr>
+              <a:t>라이브 앱</a:t>
+            </a:r>
+            <a:endParaRPr lang="en-US" sz="1400" dirty="0"/>
+          </a:p>
+        </p:txBody>
+      </p:sp>
+      <p:sp>
+        <p:nvSpPr>
+          <p:cNvPr id="9" name="Text 6"/>
+          <p:cNvSpPr/>
+          <p:nvPr/>
+        </p:nvSpPr>
+        <p:spPr>
+          <a:xfrm>
+            <a:off x="7452360" y="4005072"/>
+            <a:ext cx="1554480" cy="914400"/>
+          </a:xfrm>
+          <a:prstGeom prst="rect">
+            <a:avLst/>
+          </a:prstGeom>
+          <a:noFill/>
+          <a:ln/>
+        </p:spPr>
+        <p:txBody>
+          <a:bodyPr wrap="square" lIns="0" tIns="0" rIns="0" bIns="0" rtlCol="0" anchor="t"/>
+          <a:lstStyle/>
+          <a:p>
+            <a:pPr indent="0" marL="0">
+              <a:lnSpc>
+                <a:spcPct val="115000"/>
+              </a:lnSpc>
+              <a:buNone/>
+            </a:pPr>
+            <a:r>
+              <a:rPr lang="en-US" sz="950" dirty="0">
+                <a:solidFill>
+                  <a:srgbClr val="8B95A1"/>
+                </a:solidFill>
+                <a:latin typeface="Arial" pitchFamily="34" charset="0"/>
+                <a:ea typeface="Arial" pitchFamily="34" charset="-122"/>
+                <a:cs typeface="Arial" pitchFamily="34" charset="-120"/>
+              </a:rPr>
+              <a:t>ryugi62.github.io/rfp-to-fit/</a:t>
+            </a:r>
+            <a:endParaRPr lang="en-US" sz="950" dirty="0"/>
+          </a:p>
+        </p:txBody>
+      </p:sp>
+      <p:sp>
+        <p:nvSpPr>
+          <p:cNvPr id="10" name="Shape 7"/>
+          <p:cNvSpPr/>
+          <p:nvPr/>
+        </p:nvSpPr>
+        <p:spPr>
+          <a:xfrm>
+            <a:off x="9372600" y="1828800"/>
+            <a:ext cx="1874520" cy="2788920"/>
+          </a:xfrm>
+          <a:prstGeom prst="roundRect">
+            <a:avLst>
+              <a:gd name="adj" fmla="val 3902"/>
+            </a:avLst>
+          </a:prstGeom>
+          <a:solidFill>
+            <a:srgbClr val="FFFFFF"/>
+          </a:solidFill>
+          <a:ln w="12700">
+            <a:solidFill>
+              <a:srgbClr val="E5E8EB"/>
+            </a:solidFill>
+            <a:prstDash val="solid"/>
+          </a:ln>
+        </p:spPr>
+      </p:sp>
+      <p:pic>
+        <p:nvPicPr>
+          <p:cNvPr id="11" name="Image 1" descr="/Users/ryugi62/dev/rfp-to-fit/deliver/deck/build/img/qr-repo.png">    </p:cNvPr>
+          <p:cNvPicPr>
+            <a:picLocks noChangeAspect="1"/>
+          </p:cNvPicPr>
+          <p:nvPr/>
+        </p:nvPicPr>
+        <p:blipFill>
+          <a:blip r:embed="rId2"/>
+          <a:stretch>
+            <a:fillRect/>
+          </a:stretch>
+        </p:blipFill>
+        <p:spPr>
+          <a:xfrm>
+            <a:off x="9628632" y="2084832"/>
+            <a:ext cx="1371600" cy="1371600"/>
+          </a:xfrm>
+          <a:prstGeom prst="rect">
+            <a:avLst/>
+          </a:prstGeom>
+        </p:spPr>
+      </p:pic>
+      <p:sp>
+        <p:nvSpPr>
+          <p:cNvPr id="12" name="Text 8"/>
+          <p:cNvSpPr/>
+          <p:nvPr/>
+        </p:nvSpPr>
+        <p:spPr>
+          <a:xfrm>
+            <a:off x="9555480" y="3639312"/>
+            <a:ext cx="1508760" cy="320040"/>
+          </a:xfrm>
+          <a:prstGeom prst="rect">
+            <a:avLst/>
+          </a:prstGeom>
+          <a:noFill/>
+          <a:ln/>
+        </p:spPr>
+        <p:txBody>
+          <a:bodyPr wrap="square" lIns="0" tIns="0" rIns="0" bIns="0" rtlCol="0" anchor="t"/>
+          <a:lstStyle/>
+          <a:p>
+            <a:pPr indent="0" marL="0">
+              <a:buNone/>
+            </a:pPr>
+            <a:r>
+              <a:rPr lang="en-US" sz="1400" b="1" dirty="0">
+                <a:solidFill>
+                  <a:srgbClr val="191F28"/>
+                </a:solidFill>
+                <a:latin typeface="Arial" pitchFamily="34" charset="0"/>
+                <a:ea typeface="Arial" pitchFamily="34" charset="-122"/>
+                <a:cs typeface="Arial" pitchFamily="34" charset="-120"/>
+              </a:rPr>
+              <a:t>GitHub</a:t>
+            </a:r>
+            <a:endParaRPr lang="en-US" sz="1400" dirty="0"/>
+          </a:p>
+        </p:txBody>
+      </p:sp>
+      <p:sp>
+        <p:nvSpPr>
+          <p:cNvPr id="13" name="Text 9"/>
+          <p:cNvSpPr/>
+          <p:nvPr/>
+        </p:nvSpPr>
+        <p:spPr>
+          <a:xfrm>
+            <a:off x="9555480" y="4005072"/>
+            <a:ext cx="1554480" cy="914400"/>
+          </a:xfrm>
+          <a:prstGeom prst="rect">
+            <a:avLst/>
+          </a:prstGeom>
+          <a:noFill/>
+          <a:ln/>
+        </p:spPr>
+        <p:txBody>
+          <a:bodyPr wrap="square" lIns="0" tIns="0" rIns="0" bIns="0" rtlCol="0" anchor="t"/>
+          <a:lstStyle/>
+          <a:p>
+            <a:pPr indent="0" marL="0">
+              <a:lnSpc>
+                <a:spcPct val="115000"/>
+              </a:lnSpc>
+              <a:buNone/>
+            </a:pPr>
+            <a:r>
+              <a:rPr lang="en-US" sz="950" dirty="0">
+                <a:solidFill>
+                  <a:srgbClr val="8B95A1"/>
+                </a:solidFill>
+                <a:latin typeface="Arial" pitchFamily="34" charset="0"/>
+                <a:ea typeface="Arial" pitchFamily="34" charset="-122"/>
+                <a:cs typeface="Arial" pitchFamily="34" charset="-120"/>
+              </a:rPr>
+              <a:t>github.com/Ryugi62/rfp-to-fit</a:t>
+            </a:r>
+            <a:endParaRPr lang="en-US" sz="950" dirty="0"/>
+          </a:p>
+        </p:txBody>
+      </p:sp>
+    </p:spTree>
+  </p:cSld>
+  <p:clrMapOvr>
+    <a:masterClrMapping/>
+  </p:clrMapOvr>
+</p:sld>
+</file>
+
+<file path=ppt/slides/slide14.xml><?xml version="1.0" encoding="utf-8"?>
+<p:sld xmlns:a="http://schemas.openxmlformats.org/drawingml/2006/main" xmlns:r="http://schemas.openxmlformats.org/officeDocument/2006/relationships" xmlns:p="http://schemas.openxmlformats.org/presentationml/2006/main">
+  <p:cSld name="Slide 14">
+    <p:bg>
+      <p:bgPr>
+        <a:solidFill>
+          <a:srgbClr val="FFFFFF"/>
+        </a:solidFill>
+      </p:bgPr>
+    </p:bg>
+    <p:spTree>
+      <p:nvGrpSpPr>
+        <p:cNvPr id="1" name=""/>
+        <p:cNvGrpSpPr/>
+        <p:nvPr/>
+      </p:nvGrpSpPr>
+      <p:grpSpPr>
+        <a:xfrm>
+          <a:off x="0" y="0"/>
+          <a:ext cx="0" cy="0"/>
+          <a:chOff x="0" y="0"/>
+          <a:chExt cx="0" cy="0"/>
+        </a:xfrm>
+      </p:grpSpPr>
+      <p:sp>
+        <p:nvSpPr>
+          <p:cNvPr id="2" name="Text 0"/>
+          <p:cNvSpPr/>
+          <p:nvPr/>
+        </p:nvSpPr>
+        <p:spPr>
+          <a:xfrm>
             <a:off x="822960" y="548640"/>
             <a:ext cx="7315200" cy="365760"/>
           </a:xfrm>
@@ -9406,7 +10919,7 @@
                 <a:ea typeface="Arial" pitchFamily="34" charset="-122"/>
                 <a:cs typeface="Arial" pitchFamily="34" charset="-120"/>
               </a:rPr>
-              <a:t>신뢰</a:t>
+              <a:t>관점 6개</a:t>
             </a:r>
             <a:endParaRPr lang="en-US" sz="1400" dirty="0"/>
           </a:p>
@@ -9448,7 +10961,7 @@
                 <a:ea typeface="Arial" pitchFamily="34" charset="-122"/>
                 <a:cs typeface="Arial" pitchFamily="34" charset="-120"/>
               </a:rPr>
-              <a:t>맞힌다고 하지 않고,</a:t>
+              <a:t>여섯 관점은,</a:t>
             </a:r>
             <a:endParaRPr lang="en-US" sz="3400" dirty="0"/>
           </a:p>
@@ -9468,7 +10981,7 @@
                 <a:ea typeface="Arial" pitchFamily="34" charset="-122"/>
                 <a:cs typeface="Arial" pitchFamily="34" charset="-120"/>
               </a:rPr>
-              <a:t>확인할 수 있게</a:t>
+              <a:t>같은 질문</a:t>
             </a:r>
             <a:pPr indent="0" marL="0">
               <a:lnSpc>
@@ -9485,7 +10998,7 @@
                 <a:ea typeface="Arial" pitchFamily="34" charset="-122"/>
                 <a:cs typeface="Arial" pitchFamily="34" charset="-120"/>
               </a:rPr>
-              <a:t> 했습니다</a:t>
+              <a:t>에 따로 답합니다</a:t>
             </a:r>
             <a:endParaRPr lang="en-US" sz="3400" dirty="0"/>
           </a:p>
@@ -9493,18 +11006,1377 @@
       </p:sp>
       <p:sp>
         <p:nvSpPr>
-          <p:cNvPr id="4" name="Shape 2"/>
-          <p:cNvSpPr/>
-          <p:nvPr/>
-        </p:nvSpPr>
-        <p:spPr>
-          <a:xfrm>
-            <a:off x="822960" y="2606040"/>
-            <a:ext cx="3383280" cy="3017520"/>
+          <p:cNvPr id="4" name="Text 2"/>
+          <p:cNvSpPr/>
+          <p:nvPr/>
+        </p:nvSpPr>
+        <p:spPr>
+          <a:xfrm>
+            <a:off x="822960" y="2514600"/>
+            <a:ext cx="4846320" cy="274320"/>
+          </a:xfrm>
+          <a:prstGeom prst="rect">
+            <a:avLst/>
+          </a:prstGeom>
+          <a:noFill/>
+          <a:ln/>
+        </p:spPr>
+        <p:txBody>
+          <a:bodyPr wrap="square" lIns="0" tIns="0" rIns="0" bIns="0" rtlCol="0" anchor="t"/>
+          <a:lstStyle/>
+          <a:p>
+            <a:pPr indent="0" marL="0">
+              <a:buNone/>
+            </a:pPr>
+            <a:r>
+              <a:rPr lang="en-US" sz="1300" b="1" dirty="0">
+                <a:solidFill>
+                  <a:srgbClr val="8B95A1"/>
+                </a:solidFill>
+                <a:latin typeface="Arial" pitchFamily="34" charset="0"/>
+                <a:ea typeface="Arial" pitchFamily="34" charset="-122"/>
+                <a:cs typeface="Arial" pitchFamily="34" charset="-120"/>
+              </a:rPr>
+              <a:t>누가 보나 · 먼저 보는 것</a:t>
+            </a:r>
+            <a:endParaRPr lang="en-US" sz="1300" dirty="0"/>
+          </a:p>
+        </p:txBody>
+      </p:sp>
+      <p:sp>
+        <p:nvSpPr>
+          <p:cNvPr id="5" name="Text 3"/>
+          <p:cNvSpPr/>
+          <p:nvPr/>
+        </p:nvSpPr>
+        <p:spPr>
+          <a:xfrm>
+            <a:off x="822960" y="2880360"/>
+            <a:ext cx="1874520" cy="310896"/>
+          </a:xfrm>
+          <a:prstGeom prst="rect">
+            <a:avLst/>
+          </a:prstGeom>
+          <a:noFill/>
+          <a:ln/>
+        </p:spPr>
+        <p:txBody>
+          <a:bodyPr wrap="square" lIns="0" tIns="0" rIns="0" bIns="0" rtlCol="0" anchor="t"/>
+          <a:lstStyle/>
+          <a:p>
+            <a:pPr indent="0" marL="0">
+              <a:buNone/>
+            </a:pPr>
+            <a:r>
+              <a:rPr lang="en-US" sz="1350" b="1" dirty="0">
+                <a:solidFill>
+                  <a:srgbClr val="191F28"/>
+                </a:solidFill>
+                <a:latin typeface="Arial" pitchFamily="34" charset="0"/>
+                <a:ea typeface="Arial" pitchFamily="34" charset="-122"/>
+                <a:cs typeface="Arial" pitchFamily="34" charset="-120"/>
+              </a:rPr>
+              <a:t>기술 타당성 검증형</a:t>
+            </a:r>
+            <a:endParaRPr lang="en-US" sz="1350" dirty="0"/>
+          </a:p>
+        </p:txBody>
+      </p:sp>
+      <p:sp>
+        <p:nvSpPr>
+          <p:cNvPr id="6" name="Text 4"/>
+          <p:cNvSpPr/>
+          <p:nvPr/>
+        </p:nvSpPr>
+        <p:spPr>
+          <a:xfrm>
+            <a:off x="2743200" y="2898648"/>
+            <a:ext cx="2926080" cy="310896"/>
+          </a:xfrm>
+          <a:prstGeom prst="rect">
+            <a:avLst/>
+          </a:prstGeom>
+          <a:noFill/>
+          <a:ln/>
+        </p:spPr>
+        <p:txBody>
+          <a:bodyPr wrap="square" lIns="0" tIns="0" rIns="0" bIns="0" rtlCol="0" anchor="t"/>
+          <a:lstStyle/>
+          <a:p>
+            <a:pPr indent="0" marL="0">
+              <a:buNone/>
+            </a:pPr>
+            <a:r>
+              <a:rPr lang="en-US" sz="1200" dirty="0">
+                <a:solidFill>
+                  <a:srgbClr val="4E5968"/>
+                </a:solidFill>
+                <a:latin typeface="Arial" pitchFamily="34" charset="0"/>
+                <a:ea typeface="Arial" pitchFamily="34" charset="-122"/>
+                <a:cs typeface="Arial" pitchFamily="34" charset="-120"/>
+              </a:rPr>
+              <a:t>방법·수치·검증이 실제로 성립하는가</a:t>
+            </a:r>
+            <a:endParaRPr lang="en-US" sz="1200" dirty="0"/>
+          </a:p>
+        </p:txBody>
+      </p:sp>
+      <p:sp>
+        <p:nvSpPr>
+          <p:cNvPr id="7" name="Shape 5"/>
+          <p:cNvSpPr/>
+          <p:nvPr/>
+        </p:nvSpPr>
+        <p:spPr>
+          <a:xfrm>
+            <a:off x="822960" y="3264408"/>
+            <a:ext cx="4846320" cy="0"/>
+          </a:xfrm>
+          <a:prstGeom prst="line">
+            <a:avLst/>
+          </a:prstGeom>
+          <a:noFill/>
+          <a:ln w="12700">
+            <a:solidFill>
+              <a:srgbClr val="E5E8EB"/>
+            </a:solidFill>
+            <a:prstDash val="solid"/>
+          </a:ln>
+        </p:spPr>
+      </p:sp>
+      <p:sp>
+        <p:nvSpPr>
+          <p:cNvPr id="8" name="Text 6"/>
+          <p:cNvSpPr/>
+          <p:nvPr/>
+        </p:nvSpPr>
+        <p:spPr>
+          <a:xfrm>
+            <a:off x="822960" y="3310128"/>
+            <a:ext cx="1874520" cy="310896"/>
+          </a:xfrm>
+          <a:prstGeom prst="rect">
+            <a:avLst/>
+          </a:prstGeom>
+          <a:noFill/>
+          <a:ln/>
+        </p:spPr>
+        <p:txBody>
+          <a:bodyPr wrap="square" lIns="0" tIns="0" rIns="0" bIns="0" rtlCol="0" anchor="t"/>
+          <a:lstStyle/>
+          <a:p>
+            <a:pPr indent="0" marL="0">
+              <a:buNone/>
+            </a:pPr>
+            <a:r>
+              <a:rPr lang="en-US" sz="1350" b="1" dirty="0">
+                <a:solidFill>
+                  <a:srgbClr val="191F28"/>
+                </a:solidFill>
+                <a:latin typeface="Arial" pitchFamily="34" charset="0"/>
+                <a:ea typeface="Arial" pitchFamily="34" charset="-122"/>
+                <a:cs typeface="Arial" pitchFamily="34" charset="-120"/>
+              </a:rPr>
+              <a:t>기술 큰그림형</a:t>
+            </a:r>
+            <a:endParaRPr lang="en-US" sz="1350" dirty="0"/>
+          </a:p>
+        </p:txBody>
+      </p:sp>
+      <p:sp>
+        <p:nvSpPr>
+          <p:cNvPr id="9" name="Text 7"/>
+          <p:cNvSpPr/>
+          <p:nvPr/>
+        </p:nvSpPr>
+        <p:spPr>
+          <a:xfrm>
+            <a:off x="2743200" y="3328416"/>
+            <a:ext cx="2926080" cy="310896"/>
+          </a:xfrm>
+          <a:prstGeom prst="rect">
+            <a:avLst/>
+          </a:prstGeom>
+          <a:noFill/>
+          <a:ln/>
+        </p:spPr>
+        <p:txBody>
+          <a:bodyPr wrap="square" lIns="0" tIns="0" rIns="0" bIns="0" rtlCol="0" anchor="t"/>
+          <a:lstStyle/>
+          <a:p>
+            <a:pPr indent="0" marL="0">
+              <a:buNone/>
+            </a:pPr>
+            <a:r>
+              <a:rPr lang="en-US" sz="1200" dirty="0">
+                <a:solidFill>
+                  <a:srgbClr val="4E5968"/>
+                </a:solidFill>
+                <a:latin typeface="Arial" pitchFamily="34" charset="0"/>
+                <a:ea typeface="Arial" pitchFamily="34" charset="-122"/>
+                <a:cs typeface="Arial" pitchFamily="34" charset="-120"/>
+              </a:rPr>
+              <a:t>기존 방법과 비교해 무엇이 새로운가</a:t>
+            </a:r>
+            <a:endParaRPr lang="en-US" sz="1200" dirty="0"/>
+          </a:p>
+        </p:txBody>
+      </p:sp>
+      <p:sp>
+        <p:nvSpPr>
+          <p:cNvPr id="10" name="Shape 8"/>
+          <p:cNvSpPr/>
+          <p:nvPr/>
+        </p:nvSpPr>
+        <p:spPr>
+          <a:xfrm>
+            <a:off x="822960" y="3694176"/>
+            <a:ext cx="4846320" cy="0"/>
+          </a:xfrm>
+          <a:prstGeom prst="line">
+            <a:avLst/>
+          </a:prstGeom>
+          <a:noFill/>
+          <a:ln w="12700">
+            <a:solidFill>
+              <a:srgbClr val="E5E8EB"/>
+            </a:solidFill>
+            <a:prstDash val="solid"/>
+          </a:ln>
+        </p:spPr>
+      </p:sp>
+      <p:sp>
+        <p:nvSpPr>
+          <p:cNvPr id="11" name="Text 9"/>
+          <p:cNvSpPr/>
+          <p:nvPr/>
+        </p:nvSpPr>
+        <p:spPr>
+          <a:xfrm>
+            <a:off x="822960" y="3739896"/>
+            <a:ext cx="1874520" cy="310896"/>
+          </a:xfrm>
+          <a:prstGeom prst="rect">
+            <a:avLst/>
+          </a:prstGeom>
+          <a:noFill/>
+          <a:ln/>
+        </p:spPr>
+        <p:txBody>
+          <a:bodyPr wrap="square" lIns="0" tIns="0" rIns="0" bIns="0" rtlCol="0" anchor="t"/>
+          <a:lstStyle/>
+          <a:p>
+            <a:pPr indent="0" marL="0">
+              <a:buNone/>
+            </a:pPr>
+            <a:r>
+              <a:rPr lang="en-US" sz="1350" b="1" dirty="0">
+                <a:solidFill>
+                  <a:srgbClr val="191F28"/>
+                </a:solidFill>
+                <a:latin typeface="Arial" pitchFamily="34" charset="0"/>
+                <a:ea typeface="Arial" pitchFamily="34" charset="-122"/>
+                <a:cs typeface="Arial" pitchFamily="34" charset="-120"/>
+              </a:rPr>
+              <a:t>세부 전문형</a:t>
+            </a:r>
+            <a:endParaRPr lang="en-US" sz="1350" dirty="0"/>
+          </a:p>
+        </p:txBody>
+      </p:sp>
+      <p:sp>
+        <p:nvSpPr>
+          <p:cNvPr id="12" name="Text 10"/>
+          <p:cNvSpPr/>
+          <p:nvPr/>
+        </p:nvSpPr>
+        <p:spPr>
+          <a:xfrm>
+            <a:off x="2743200" y="3758184"/>
+            <a:ext cx="2926080" cy="310896"/>
+          </a:xfrm>
+          <a:prstGeom prst="rect">
+            <a:avLst/>
+          </a:prstGeom>
+          <a:noFill/>
+          <a:ln/>
+        </p:spPr>
+        <p:txBody>
+          <a:bodyPr wrap="square" lIns="0" tIns="0" rIns="0" bIns="0" rtlCol="0" anchor="t"/>
+          <a:lstStyle/>
+          <a:p>
+            <a:pPr indent="0" marL="0">
+              <a:buNone/>
+            </a:pPr>
+            <a:r>
+              <a:rPr lang="en-US" sz="1200" dirty="0">
+                <a:solidFill>
+                  <a:srgbClr val="4E5968"/>
+                </a:solidFill>
+                <a:latin typeface="Arial" pitchFamily="34" charset="0"/>
+                <a:ea typeface="Arial" pitchFamily="34" charset="-122"/>
+                <a:cs typeface="Arial" pitchFamily="34" charset="-120"/>
+              </a:rPr>
+              <a:t>핵심 기술 하나가 설계·구현·측정됐는가</a:t>
+            </a:r>
+            <a:endParaRPr lang="en-US" sz="1200" dirty="0"/>
+          </a:p>
+        </p:txBody>
+      </p:sp>
+      <p:sp>
+        <p:nvSpPr>
+          <p:cNvPr id="13" name="Shape 11"/>
+          <p:cNvSpPr/>
+          <p:nvPr/>
+        </p:nvSpPr>
+        <p:spPr>
+          <a:xfrm>
+            <a:off x="822960" y="4123944"/>
+            <a:ext cx="4846320" cy="0"/>
+          </a:xfrm>
+          <a:prstGeom prst="line">
+            <a:avLst/>
+          </a:prstGeom>
+          <a:noFill/>
+          <a:ln w="12700">
+            <a:solidFill>
+              <a:srgbClr val="E5E8EB"/>
+            </a:solidFill>
+            <a:prstDash val="solid"/>
+          </a:ln>
+        </p:spPr>
+      </p:sp>
+      <p:sp>
+        <p:nvSpPr>
+          <p:cNvPr id="14" name="Text 12"/>
+          <p:cNvSpPr/>
+          <p:nvPr/>
+        </p:nvSpPr>
+        <p:spPr>
+          <a:xfrm>
+            <a:off x="822960" y="4169664"/>
+            <a:ext cx="1874520" cy="310896"/>
+          </a:xfrm>
+          <a:prstGeom prst="rect">
+            <a:avLst/>
+          </a:prstGeom>
+          <a:noFill/>
+          <a:ln/>
+        </p:spPr>
+        <p:txBody>
+          <a:bodyPr wrap="square" lIns="0" tIns="0" rIns="0" bIns="0" rtlCol="0" anchor="t"/>
+          <a:lstStyle/>
+          <a:p>
+            <a:pPr indent="0" marL="0">
+              <a:buNone/>
+            </a:pPr>
+            <a:r>
+              <a:rPr lang="en-US" sz="1350" b="1" dirty="0">
+                <a:solidFill>
+                  <a:srgbClr val="191F28"/>
+                </a:solidFill>
+                <a:latin typeface="Arial" pitchFamily="34" charset="0"/>
+                <a:ea typeface="Arial" pitchFamily="34" charset="-122"/>
+                <a:cs typeface="Arial" pitchFamily="34" charset="-120"/>
+              </a:rPr>
+              <a:t>사업성·시장형</a:t>
+            </a:r>
+            <a:endParaRPr lang="en-US" sz="1350" dirty="0"/>
+          </a:p>
+        </p:txBody>
+      </p:sp>
+      <p:sp>
+        <p:nvSpPr>
+          <p:cNvPr id="15" name="Text 13"/>
+          <p:cNvSpPr/>
+          <p:nvPr/>
+        </p:nvSpPr>
+        <p:spPr>
+          <a:xfrm>
+            <a:off x="2743200" y="4187952"/>
+            <a:ext cx="2926080" cy="310896"/>
+          </a:xfrm>
+          <a:prstGeom prst="rect">
+            <a:avLst/>
+          </a:prstGeom>
+          <a:noFill/>
+          <a:ln/>
+        </p:spPr>
+        <p:txBody>
+          <a:bodyPr wrap="square" lIns="0" tIns="0" rIns="0" bIns="0" rtlCol="0" anchor="t"/>
+          <a:lstStyle/>
+          <a:p>
+            <a:pPr indent="0" marL="0">
+              <a:buNone/>
+            </a:pPr>
+            <a:r>
+              <a:rPr lang="en-US" sz="1200" dirty="0">
+                <a:solidFill>
+                  <a:srgbClr val="4E5968"/>
+                </a:solidFill>
+                <a:latin typeface="Arial" pitchFamily="34" charset="0"/>
+                <a:ea typeface="Arial" pitchFamily="34" charset="-122"/>
+                <a:cs typeface="Arial" pitchFamily="34" charset="-120"/>
+              </a:rPr>
+              <a:t>누가 쓰고, 누가 돈을 내는가</a:t>
+            </a:r>
+            <a:endParaRPr lang="en-US" sz="1200" dirty="0"/>
+          </a:p>
+        </p:txBody>
+      </p:sp>
+      <p:sp>
+        <p:nvSpPr>
+          <p:cNvPr id="16" name="Shape 14"/>
+          <p:cNvSpPr/>
+          <p:nvPr/>
+        </p:nvSpPr>
+        <p:spPr>
+          <a:xfrm>
+            <a:off x="822960" y="4553712"/>
+            <a:ext cx="4846320" cy="0"/>
+          </a:xfrm>
+          <a:prstGeom prst="line">
+            <a:avLst/>
+          </a:prstGeom>
+          <a:noFill/>
+          <a:ln w="12700">
+            <a:solidFill>
+              <a:srgbClr val="E5E8EB"/>
+            </a:solidFill>
+            <a:prstDash val="solid"/>
+          </a:ln>
+        </p:spPr>
+      </p:sp>
+      <p:sp>
+        <p:nvSpPr>
+          <p:cNvPr id="17" name="Text 15"/>
+          <p:cNvSpPr/>
+          <p:nvPr/>
+        </p:nvSpPr>
+        <p:spPr>
+          <a:xfrm>
+            <a:off x="822960" y="4599432"/>
+            <a:ext cx="1874520" cy="310896"/>
+          </a:xfrm>
+          <a:prstGeom prst="rect">
+            <a:avLst/>
+          </a:prstGeom>
+          <a:noFill/>
+          <a:ln/>
+        </p:spPr>
+        <p:txBody>
+          <a:bodyPr wrap="square" lIns="0" tIns="0" rIns="0" bIns="0" rtlCol="0" anchor="t"/>
+          <a:lstStyle/>
+          <a:p>
+            <a:pPr indent="0" marL="0">
+              <a:buNone/>
+            </a:pPr>
+            <a:r>
+              <a:rPr lang="en-US" sz="1350" b="1" dirty="0">
+                <a:solidFill>
+                  <a:srgbClr val="191F28"/>
+                </a:solidFill>
+                <a:latin typeface="Arial" pitchFamily="34" charset="0"/>
+                <a:ea typeface="Arial" pitchFamily="34" charset="-122"/>
+                <a:cs typeface="Arial" pitchFamily="34" charset="-120"/>
+              </a:rPr>
+              <a:t>행정·관리형</a:t>
+            </a:r>
+            <a:endParaRPr lang="en-US" sz="1350" dirty="0"/>
+          </a:p>
+        </p:txBody>
+      </p:sp>
+      <p:sp>
+        <p:nvSpPr>
+          <p:cNvPr id="18" name="Text 16"/>
+          <p:cNvSpPr/>
+          <p:nvPr/>
+        </p:nvSpPr>
+        <p:spPr>
+          <a:xfrm>
+            <a:off x="2743200" y="4617720"/>
+            <a:ext cx="2926080" cy="310896"/>
+          </a:xfrm>
+          <a:prstGeom prst="rect">
+            <a:avLst/>
+          </a:prstGeom>
+          <a:noFill/>
+          <a:ln/>
+        </p:spPr>
+        <p:txBody>
+          <a:bodyPr wrap="square" lIns="0" tIns="0" rIns="0" bIns="0" rtlCol="0" anchor="t"/>
+          <a:lstStyle/>
+          <a:p>
+            <a:pPr indent="0" marL="0">
+              <a:buNone/>
+            </a:pPr>
+            <a:r>
+              <a:rPr lang="en-US" sz="1200" dirty="0">
+                <a:solidFill>
+                  <a:srgbClr val="4E5968"/>
+                </a:solidFill>
+                <a:latin typeface="Arial" pitchFamily="34" charset="0"/>
+                <a:ea typeface="Arial" pitchFamily="34" charset="-122"/>
+                <a:cs typeface="Arial" pitchFamily="34" charset="-120"/>
+              </a:rPr>
+              <a:t>예산·인력·일정·위험 관리가 채워졌는가</a:t>
+            </a:r>
+            <a:endParaRPr lang="en-US" sz="1200" dirty="0"/>
+          </a:p>
+        </p:txBody>
+      </p:sp>
+      <p:sp>
+        <p:nvSpPr>
+          <p:cNvPr id="19" name="Shape 17"/>
+          <p:cNvSpPr/>
+          <p:nvPr/>
+        </p:nvSpPr>
+        <p:spPr>
+          <a:xfrm>
+            <a:off x="822960" y="4983480"/>
+            <a:ext cx="4846320" cy="0"/>
+          </a:xfrm>
+          <a:prstGeom prst="line">
+            <a:avLst/>
+          </a:prstGeom>
+          <a:noFill/>
+          <a:ln w="12700">
+            <a:solidFill>
+              <a:srgbClr val="E5E8EB"/>
+            </a:solidFill>
+            <a:prstDash val="solid"/>
+          </a:ln>
+        </p:spPr>
+      </p:sp>
+      <p:sp>
+        <p:nvSpPr>
+          <p:cNvPr id="20" name="Text 18"/>
+          <p:cNvSpPr/>
+          <p:nvPr/>
+        </p:nvSpPr>
+        <p:spPr>
+          <a:xfrm>
+            <a:off x="822960" y="5029200"/>
+            <a:ext cx="1874520" cy="310896"/>
+          </a:xfrm>
+          <a:prstGeom prst="rect">
+            <a:avLst/>
+          </a:prstGeom>
+          <a:noFill/>
+          <a:ln/>
+        </p:spPr>
+        <p:txBody>
+          <a:bodyPr wrap="square" lIns="0" tIns="0" rIns="0" bIns="0" rtlCol="0" anchor="t"/>
+          <a:lstStyle/>
+          <a:p>
+            <a:pPr indent="0" marL="0">
+              <a:buNone/>
+            </a:pPr>
+            <a:r>
+              <a:rPr lang="en-US" sz="1350" b="1" dirty="0">
+                <a:solidFill>
+                  <a:srgbClr val="191F28"/>
+                </a:solidFill>
+                <a:latin typeface="Arial" pitchFamily="34" charset="0"/>
+                <a:ea typeface="Arial" pitchFamily="34" charset="-122"/>
+                <a:cs typeface="Arial" pitchFamily="34" charset="-120"/>
+              </a:rPr>
+              <a:t>사업 취지형</a:t>
+            </a:r>
+            <a:endParaRPr lang="en-US" sz="1350" dirty="0"/>
+          </a:p>
+        </p:txBody>
+      </p:sp>
+      <p:sp>
+        <p:nvSpPr>
+          <p:cNvPr id="21" name="Text 19"/>
+          <p:cNvSpPr/>
+          <p:nvPr/>
+        </p:nvSpPr>
+        <p:spPr>
+          <a:xfrm>
+            <a:off x="2743200" y="5047488"/>
+            <a:ext cx="2926080" cy="310896"/>
+          </a:xfrm>
+          <a:prstGeom prst="rect">
+            <a:avLst/>
+          </a:prstGeom>
+          <a:noFill/>
+          <a:ln/>
+        </p:spPr>
+        <p:txBody>
+          <a:bodyPr wrap="square" lIns="0" tIns="0" rIns="0" bIns="0" rtlCol="0" anchor="t"/>
+          <a:lstStyle/>
+          <a:p>
+            <a:pPr indent="0" marL="0">
+              <a:buNone/>
+            </a:pPr>
+            <a:r>
+              <a:rPr lang="en-US" sz="1200" dirty="0">
+                <a:solidFill>
+                  <a:srgbClr val="4E5968"/>
+                </a:solidFill>
+                <a:latin typeface="Arial" pitchFamily="34" charset="0"/>
+                <a:ea typeface="Arial" pitchFamily="34" charset="-122"/>
+                <a:cs typeface="Arial" pitchFamily="34" charset="-120"/>
+              </a:rPr>
+              <a:t>공고의 취지와 제안의 목표가 이어지는가</a:t>
+            </a:r>
+            <a:endParaRPr lang="en-US" sz="1200" dirty="0"/>
+          </a:p>
+        </p:txBody>
+      </p:sp>
+      <p:sp>
+        <p:nvSpPr>
+          <p:cNvPr id="22" name="Text 20"/>
+          <p:cNvSpPr/>
+          <p:nvPr/>
+        </p:nvSpPr>
+        <p:spPr>
+          <a:xfrm>
+            <a:off x="822960" y="5486400"/>
+            <a:ext cx="4846320" cy="457200"/>
+          </a:xfrm>
+          <a:prstGeom prst="rect">
+            <a:avLst/>
+          </a:prstGeom>
+          <a:noFill/>
+          <a:ln/>
+        </p:spPr>
+        <p:txBody>
+          <a:bodyPr wrap="square" lIns="0" tIns="0" rIns="0" bIns="0" rtlCol="0" anchor="t"/>
+          <a:lstStyle/>
+          <a:p>
+            <a:pPr indent="0" marL="0">
+              <a:lnSpc>
+                <a:spcPct val="115000"/>
+              </a:lnSpc>
+              <a:buNone/>
+            </a:pPr>
+            <a:r>
+              <a:rPr lang="en-US" sz="1100" dirty="0">
+                <a:solidFill>
+                  <a:srgbClr val="8B95A1"/>
+                </a:solidFill>
+                <a:latin typeface="Arial" pitchFamily="34" charset="0"/>
+                <a:ea typeface="Arial" pitchFamily="34" charset="-122"/>
+                <a:cs typeface="Arial" pitchFamily="34" charset="-120"/>
+              </a:rPr>
+              <a:t>9/30 멘토링에서 들은 실제 심사위원 유형입니다. 실존 인물을 흉내 내지 않고 역할만 줍니다. 3개 회사 모델에 두 관점씩.</a:t>
+            </a:r>
+            <a:endParaRPr lang="en-US" sz="1100" dirty="0"/>
+          </a:p>
+        </p:txBody>
+      </p:sp>
+      <p:sp>
+        <p:nvSpPr>
+          <p:cNvPr id="23" name="Text 21"/>
+          <p:cNvSpPr/>
+          <p:nvPr/>
+        </p:nvSpPr>
+        <p:spPr>
+          <a:xfrm>
+            <a:off x="6172200" y="2514600"/>
+            <a:ext cx="5193792" cy="274320"/>
+          </a:xfrm>
+          <a:prstGeom prst="rect">
+            <a:avLst/>
+          </a:prstGeom>
+          <a:noFill/>
+          <a:ln/>
+        </p:spPr>
+        <p:txBody>
+          <a:bodyPr wrap="square" lIns="0" tIns="0" rIns="0" bIns="0" rtlCol="0" anchor="t"/>
+          <a:lstStyle/>
+          <a:p>
+            <a:pPr indent="0" marL="0">
+              <a:buNone/>
+            </a:pPr>
+            <a:r>
+              <a:rPr lang="en-US" sz="1300" b="1" dirty="0">
+                <a:solidFill>
+                  <a:srgbClr val="8B95A1"/>
+                </a:solidFill>
+                <a:latin typeface="Arial" pitchFamily="34" charset="0"/>
+                <a:ea typeface="Arial" pitchFamily="34" charset="-122"/>
+                <a:cs typeface="Arial" pitchFamily="34" charset="-120"/>
+              </a:rPr>
+              <a:t>어떻게 심사하나</a:t>
+            </a:r>
+            <a:endParaRPr lang="en-US" sz="1300" dirty="0"/>
+          </a:p>
+        </p:txBody>
+      </p:sp>
+      <p:sp>
+        <p:nvSpPr>
+          <p:cNvPr id="24" name="Text 22"/>
+          <p:cNvSpPr/>
+          <p:nvPr/>
+        </p:nvSpPr>
+        <p:spPr>
+          <a:xfrm>
+            <a:off x="6172200" y="2852928"/>
+            <a:ext cx="457200" cy="274320"/>
+          </a:xfrm>
+          <a:prstGeom prst="rect">
+            <a:avLst/>
+          </a:prstGeom>
+          <a:noFill/>
+          <a:ln/>
+        </p:spPr>
+        <p:txBody>
+          <a:bodyPr wrap="square" lIns="0" tIns="0" rIns="0" bIns="0" rtlCol="0" anchor="t"/>
+          <a:lstStyle/>
+          <a:p>
+            <a:pPr indent="0" marL="0">
+              <a:buNone/>
+            </a:pPr>
+            <a:r>
+              <a:rPr lang="en-US" sz="1500" b="1" dirty="0">
+                <a:solidFill>
+                  <a:srgbClr val="3182F6"/>
+                </a:solidFill>
+                <a:latin typeface="Arial" pitchFamily="34" charset="0"/>
+                <a:ea typeface="Arial" pitchFamily="34" charset="-122"/>
+                <a:cs typeface="Arial" pitchFamily="34" charset="-120"/>
+              </a:rPr>
+              <a:t>01</a:t>
+            </a:r>
+            <a:endParaRPr lang="en-US" sz="1500" dirty="0"/>
+          </a:p>
+        </p:txBody>
+      </p:sp>
+      <p:sp>
+        <p:nvSpPr>
+          <p:cNvPr id="25" name="Text 23"/>
+          <p:cNvSpPr/>
+          <p:nvPr/>
+        </p:nvSpPr>
+        <p:spPr>
+          <a:xfrm>
+            <a:off x="6675120" y="2852928"/>
+            <a:ext cx="1188720" cy="274320"/>
+          </a:xfrm>
+          <a:prstGeom prst="rect">
+            <a:avLst/>
+          </a:prstGeom>
+          <a:noFill/>
+          <a:ln/>
+        </p:spPr>
+        <p:txBody>
+          <a:bodyPr wrap="square" lIns="0" tIns="0" rIns="0" bIns="0" rtlCol="0" anchor="t"/>
+          <a:lstStyle/>
+          <a:p>
+            <a:pPr indent="0" marL="0">
+              <a:buNone/>
+            </a:pPr>
+            <a:r>
+              <a:rPr lang="en-US" sz="1400" b="1" dirty="0">
+                <a:solidFill>
+                  <a:srgbClr val="191F28"/>
+                </a:solidFill>
+                <a:latin typeface="Arial" pitchFamily="34" charset="0"/>
+                <a:ea typeface="Arial" pitchFamily="34" charset="-122"/>
+                <a:cs typeface="Arial" pitchFamily="34" charset="-120"/>
+              </a:rPr>
+              <a:t>같은 질문</a:t>
+            </a:r>
+            <a:endParaRPr lang="en-US" sz="1400" dirty="0"/>
+          </a:p>
+        </p:txBody>
+      </p:sp>
+      <p:sp>
+        <p:nvSpPr>
+          <p:cNvPr id="26" name="Text 24"/>
+          <p:cNvSpPr/>
+          <p:nvPr/>
+        </p:nvSpPr>
+        <p:spPr>
+          <a:xfrm>
+            <a:off x="7863840" y="2880360"/>
+            <a:ext cx="548640" cy="237744"/>
+          </a:xfrm>
+          <a:prstGeom prst="rect">
+            <a:avLst/>
+          </a:prstGeom>
+          <a:noFill/>
+          <a:ln/>
+        </p:spPr>
+        <p:txBody>
+          <a:bodyPr wrap="square" lIns="0" tIns="0" rIns="0" bIns="0" rtlCol="0" anchor="t"/>
+          <a:lstStyle/>
+          <a:p>
+            <a:pPr indent="0" marL="0">
+              <a:buNone/>
+            </a:pPr>
+            <a:r>
+              <a:rPr lang="en-US" sz="1050" b="1" dirty="0">
+                <a:solidFill>
+                  <a:srgbClr val="1B64DA"/>
+                </a:solidFill>
+                <a:latin typeface="Arial" pitchFamily="34" charset="0"/>
+                <a:ea typeface="Arial" pitchFamily="34" charset="-122"/>
+                <a:cs typeface="Arial" pitchFamily="34" charset="-120"/>
+              </a:rPr>
+              <a:t>AI</a:t>
+            </a:r>
+            <a:endParaRPr lang="en-US" sz="1050" dirty="0"/>
+          </a:p>
+        </p:txBody>
+      </p:sp>
+      <p:sp>
+        <p:nvSpPr>
+          <p:cNvPr id="27" name="Text 25"/>
+          <p:cNvSpPr/>
+          <p:nvPr/>
+        </p:nvSpPr>
+        <p:spPr>
+          <a:xfrm>
+            <a:off x="6675120" y="3154680"/>
+            <a:ext cx="4690872" cy="256032"/>
+          </a:xfrm>
+          <a:prstGeom prst="rect">
+            <a:avLst/>
+          </a:prstGeom>
+          <a:noFill/>
+          <a:ln/>
+        </p:spPr>
+        <p:txBody>
+          <a:bodyPr wrap="square" lIns="0" tIns="0" rIns="0" bIns="0" rtlCol="0" anchor="t"/>
+          <a:lstStyle/>
+          <a:p>
+            <a:pPr indent="0" marL="0">
+              <a:lnSpc>
+                <a:spcPct val="110000"/>
+              </a:lnSpc>
+              <a:buNone/>
+            </a:pPr>
+            <a:r>
+              <a:rPr lang="en-US" sz="1150" dirty="0">
+                <a:solidFill>
+                  <a:srgbClr val="4E5968"/>
+                </a:solidFill>
+                <a:latin typeface="Arial" pitchFamily="34" charset="0"/>
+                <a:ea typeface="Arial" pitchFamily="34" charset="-122"/>
+                <a:cs typeface="Arial" pitchFamily="34" charset="-120"/>
+              </a:rPr>
+              <a:t>지표마다 점검 질문을 3개까지 만들어 여섯 관점에 똑같이 줍니다</a:t>
+            </a:r>
+            <a:endParaRPr lang="en-US" sz="1150" dirty="0"/>
+          </a:p>
+        </p:txBody>
+      </p:sp>
+      <p:sp>
+        <p:nvSpPr>
+          <p:cNvPr id="28" name="Text 26"/>
+          <p:cNvSpPr/>
+          <p:nvPr/>
+        </p:nvSpPr>
+        <p:spPr>
+          <a:xfrm>
+            <a:off x="6172200" y="3493008"/>
+            <a:ext cx="457200" cy="274320"/>
+          </a:xfrm>
+          <a:prstGeom prst="rect">
+            <a:avLst/>
+          </a:prstGeom>
+          <a:noFill/>
+          <a:ln/>
+        </p:spPr>
+        <p:txBody>
+          <a:bodyPr wrap="square" lIns="0" tIns="0" rIns="0" bIns="0" rtlCol="0" anchor="t"/>
+          <a:lstStyle/>
+          <a:p>
+            <a:pPr indent="0" marL="0">
+              <a:buNone/>
+            </a:pPr>
+            <a:r>
+              <a:rPr lang="en-US" sz="1500" b="1" dirty="0">
+                <a:solidFill>
+                  <a:srgbClr val="3182F6"/>
+                </a:solidFill>
+                <a:latin typeface="Arial" pitchFamily="34" charset="0"/>
+                <a:ea typeface="Arial" pitchFamily="34" charset="-122"/>
+                <a:cs typeface="Arial" pitchFamily="34" charset="-120"/>
+              </a:rPr>
+              <a:t>02</a:t>
+            </a:r>
+            <a:endParaRPr lang="en-US" sz="1500" dirty="0"/>
+          </a:p>
+        </p:txBody>
+      </p:sp>
+      <p:sp>
+        <p:nvSpPr>
+          <p:cNvPr id="29" name="Text 27"/>
+          <p:cNvSpPr/>
+          <p:nvPr/>
+        </p:nvSpPr>
+        <p:spPr>
+          <a:xfrm>
+            <a:off x="6675120" y="3493008"/>
+            <a:ext cx="1188720" cy="274320"/>
+          </a:xfrm>
+          <a:prstGeom prst="rect">
+            <a:avLst/>
+          </a:prstGeom>
+          <a:noFill/>
+          <a:ln/>
+        </p:spPr>
+        <p:txBody>
+          <a:bodyPr wrap="square" lIns="0" tIns="0" rIns="0" bIns="0" rtlCol="0" anchor="t"/>
+          <a:lstStyle/>
+          <a:p>
+            <a:pPr indent="0" marL="0">
+              <a:buNone/>
+            </a:pPr>
+            <a:r>
+              <a:rPr lang="en-US" sz="1400" b="1" dirty="0">
+                <a:solidFill>
+                  <a:srgbClr val="191F28"/>
+                </a:solidFill>
+                <a:latin typeface="Arial" pitchFamily="34" charset="0"/>
+                <a:ea typeface="Arial" pitchFamily="34" charset="-122"/>
+                <a:cs typeface="Arial" pitchFamily="34" charset="-120"/>
+              </a:rPr>
+              <a:t>따로 판정</a:t>
+            </a:r>
+            <a:endParaRPr lang="en-US" sz="1400" dirty="0"/>
+          </a:p>
+        </p:txBody>
+      </p:sp>
+      <p:sp>
+        <p:nvSpPr>
+          <p:cNvPr id="30" name="Text 28"/>
+          <p:cNvSpPr/>
+          <p:nvPr/>
+        </p:nvSpPr>
+        <p:spPr>
+          <a:xfrm>
+            <a:off x="7863840" y="3520440"/>
+            <a:ext cx="548640" cy="237744"/>
+          </a:xfrm>
+          <a:prstGeom prst="rect">
+            <a:avLst/>
+          </a:prstGeom>
+          <a:noFill/>
+          <a:ln/>
+        </p:spPr>
+        <p:txBody>
+          <a:bodyPr wrap="square" lIns="0" tIns="0" rIns="0" bIns="0" rtlCol="0" anchor="t"/>
+          <a:lstStyle/>
+          <a:p>
+            <a:pPr indent="0" marL="0">
+              <a:buNone/>
+            </a:pPr>
+            <a:r>
+              <a:rPr lang="en-US" sz="1050" b="1" dirty="0">
+                <a:solidFill>
+                  <a:srgbClr val="1B64DA"/>
+                </a:solidFill>
+                <a:latin typeface="Arial" pitchFamily="34" charset="0"/>
+                <a:ea typeface="Arial" pitchFamily="34" charset="-122"/>
+                <a:cs typeface="Arial" pitchFamily="34" charset="-120"/>
+              </a:rPr>
+              <a:t>AI</a:t>
+            </a:r>
+            <a:endParaRPr lang="en-US" sz="1050" dirty="0"/>
+          </a:p>
+        </p:txBody>
+      </p:sp>
+      <p:sp>
+        <p:nvSpPr>
+          <p:cNvPr id="31" name="Text 29"/>
+          <p:cNvSpPr/>
+          <p:nvPr/>
+        </p:nvSpPr>
+        <p:spPr>
+          <a:xfrm>
+            <a:off x="6675120" y="3794760"/>
+            <a:ext cx="4690872" cy="256032"/>
+          </a:xfrm>
+          <a:prstGeom prst="rect">
+            <a:avLst/>
+          </a:prstGeom>
+          <a:noFill/>
+          <a:ln/>
+        </p:spPr>
+        <p:txBody>
+          <a:bodyPr wrap="square" lIns="0" tIns="0" rIns="0" bIns="0" rtlCol="0" anchor="t"/>
+          <a:lstStyle/>
+          <a:p>
+            <a:pPr indent="0" marL="0">
+              <a:lnSpc>
+                <a:spcPct val="110000"/>
+              </a:lnSpc>
+              <a:buNone/>
+            </a:pPr>
+            <a:r>
+              <a:rPr lang="en-US" sz="1150" dirty="0">
+                <a:solidFill>
+                  <a:srgbClr val="4E5968"/>
+                </a:solidFill>
+                <a:latin typeface="Arial" pitchFamily="34" charset="0"/>
+                <a:ea typeface="Arial" pitchFamily="34" charset="-122"/>
+                <a:cs typeface="Arial" pitchFamily="34" charset="-120"/>
+              </a:rPr>
+              <a:t>서로 모른 채 충족·부족·누락을 고르고, 초안 문장을 그대로 인용합니다</a:t>
+            </a:r>
+            <a:endParaRPr lang="en-US" sz="1150" dirty="0"/>
+          </a:p>
+        </p:txBody>
+      </p:sp>
+      <p:sp>
+        <p:nvSpPr>
+          <p:cNvPr id="32" name="Text 30"/>
+          <p:cNvSpPr/>
+          <p:nvPr/>
+        </p:nvSpPr>
+        <p:spPr>
+          <a:xfrm>
+            <a:off x="6172200" y="4133088"/>
+            <a:ext cx="457200" cy="274320"/>
+          </a:xfrm>
+          <a:prstGeom prst="rect">
+            <a:avLst/>
+          </a:prstGeom>
+          <a:noFill/>
+          <a:ln/>
+        </p:spPr>
+        <p:txBody>
+          <a:bodyPr wrap="square" lIns="0" tIns="0" rIns="0" bIns="0" rtlCol="0" anchor="t"/>
+          <a:lstStyle/>
+          <a:p>
+            <a:pPr indent="0" marL="0">
+              <a:buNone/>
+            </a:pPr>
+            <a:r>
+              <a:rPr lang="en-US" sz="1500" b="1" dirty="0">
+                <a:solidFill>
+                  <a:srgbClr val="3182F6"/>
+                </a:solidFill>
+                <a:latin typeface="Arial" pitchFamily="34" charset="0"/>
+                <a:ea typeface="Arial" pitchFamily="34" charset="-122"/>
+                <a:cs typeface="Arial" pitchFamily="34" charset="-120"/>
+              </a:rPr>
+              <a:t>03</a:t>
+            </a:r>
+            <a:endParaRPr lang="en-US" sz="1500" dirty="0"/>
+          </a:p>
+        </p:txBody>
+      </p:sp>
+      <p:sp>
+        <p:nvSpPr>
+          <p:cNvPr id="33" name="Text 31"/>
+          <p:cNvSpPr/>
+          <p:nvPr/>
+        </p:nvSpPr>
+        <p:spPr>
+          <a:xfrm>
+            <a:off x="6675120" y="4133088"/>
+            <a:ext cx="1188720" cy="274320"/>
+          </a:xfrm>
+          <a:prstGeom prst="rect">
+            <a:avLst/>
+          </a:prstGeom>
+          <a:noFill/>
+          <a:ln/>
+        </p:spPr>
+        <p:txBody>
+          <a:bodyPr wrap="square" lIns="0" tIns="0" rIns="0" bIns="0" rtlCol="0" anchor="t"/>
+          <a:lstStyle/>
+          <a:p>
+            <a:pPr indent="0" marL="0">
+              <a:buNone/>
+            </a:pPr>
+            <a:r>
+              <a:rPr lang="en-US" sz="1400" b="1" dirty="0">
+                <a:solidFill>
+                  <a:srgbClr val="191F28"/>
+                </a:solidFill>
+                <a:latin typeface="Arial" pitchFamily="34" charset="0"/>
+                <a:ea typeface="Arial" pitchFamily="34" charset="-122"/>
+                <a:cs typeface="Arial" pitchFamily="34" charset="-120"/>
+              </a:rPr>
+              <a:t>걸러 내기</a:t>
+            </a:r>
+            <a:endParaRPr lang="en-US" sz="1400" dirty="0"/>
+          </a:p>
+        </p:txBody>
+      </p:sp>
+      <p:sp>
+        <p:nvSpPr>
+          <p:cNvPr id="34" name="Text 32"/>
+          <p:cNvSpPr/>
+          <p:nvPr/>
+        </p:nvSpPr>
+        <p:spPr>
+          <a:xfrm>
+            <a:off x="7863840" y="4160520"/>
+            <a:ext cx="548640" cy="237744"/>
+          </a:xfrm>
+          <a:prstGeom prst="rect">
+            <a:avLst/>
+          </a:prstGeom>
+          <a:noFill/>
+          <a:ln/>
+        </p:spPr>
+        <p:txBody>
+          <a:bodyPr wrap="square" lIns="0" tIns="0" rIns="0" bIns="0" rtlCol="0" anchor="t"/>
+          <a:lstStyle/>
+          <a:p>
+            <a:pPr indent="0" marL="0">
+              <a:buNone/>
+            </a:pPr>
+            <a:r>
+              <a:rPr lang="en-US" sz="1050" b="1" dirty="0">
+                <a:solidFill>
+                  <a:srgbClr val="191F28"/>
+                </a:solidFill>
+                <a:latin typeface="Arial" pitchFamily="34" charset="0"/>
+                <a:ea typeface="Arial" pitchFamily="34" charset="-122"/>
+                <a:cs typeface="Arial" pitchFamily="34" charset="-120"/>
+              </a:rPr>
+              <a:t>코드</a:t>
+            </a:r>
+            <a:endParaRPr lang="en-US" sz="1050" dirty="0"/>
+          </a:p>
+        </p:txBody>
+      </p:sp>
+      <p:sp>
+        <p:nvSpPr>
+          <p:cNvPr id="35" name="Text 33"/>
+          <p:cNvSpPr/>
+          <p:nvPr/>
+        </p:nvSpPr>
+        <p:spPr>
+          <a:xfrm>
+            <a:off x="6675120" y="4434840"/>
+            <a:ext cx="4690872" cy="256032"/>
+          </a:xfrm>
+          <a:prstGeom prst="rect">
+            <a:avLst/>
+          </a:prstGeom>
+          <a:noFill/>
+          <a:ln/>
+        </p:spPr>
+        <p:txBody>
+          <a:bodyPr wrap="square" lIns="0" tIns="0" rIns="0" bIns="0" rtlCol="0" anchor="t"/>
+          <a:lstStyle/>
+          <a:p>
+            <a:pPr indent="0" marL="0">
+              <a:lnSpc>
+                <a:spcPct val="110000"/>
+              </a:lnSpc>
+              <a:buNone/>
+            </a:pPr>
+            <a:r>
+              <a:rPr lang="en-US" sz="1150" dirty="0">
+                <a:solidFill>
+                  <a:srgbClr val="4E5968"/>
+                </a:solidFill>
+                <a:latin typeface="Arial" pitchFamily="34" charset="0"/>
+                <a:ea typeface="Arial" pitchFamily="34" charset="-122"/>
+                <a:cs typeface="Arial" pitchFamily="34" charset="-120"/>
+              </a:rPr>
+              <a:t>초안에 없는 인용은 버리고, 그 관점에만 한 번 다시 묻습니다</a:t>
+            </a:r>
+            <a:endParaRPr lang="en-US" sz="1150" dirty="0"/>
+          </a:p>
+        </p:txBody>
+      </p:sp>
+      <p:sp>
+        <p:nvSpPr>
+          <p:cNvPr id="36" name="Text 34"/>
+          <p:cNvSpPr/>
+          <p:nvPr/>
+        </p:nvSpPr>
+        <p:spPr>
+          <a:xfrm>
+            <a:off x="6172200" y="4773168"/>
+            <a:ext cx="457200" cy="274320"/>
+          </a:xfrm>
+          <a:prstGeom prst="rect">
+            <a:avLst/>
+          </a:prstGeom>
+          <a:noFill/>
+          <a:ln/>
+        </p:spPr>
+        <p:txBody>
+          <a:bodyPr wrap="square" lIns="0" tIns="0" rIns="0" bIns="0" rtlCol="0" anchor="t"/>
+          <a:lstStyle/>
+          <a:p>
+            <a:pPr indent="0" marL="0">
+              <a:buNone/>
+            </a:pPr>
+            <a:r>
+              <a:rPr lang="en-US" sz="1500" b="1" dirty="0">
+                <a:solidFill>
+                  <a:srgbClr val="3182F6"/>
+                </a:solidFill>
+                <a:latin typeface="Arial" pitchFamily="34" charset="0"/>
+                <a:ea typeface="Arial" pitchFamily="34" charset="-122"/>
+                <a:cs typeface="Arial" pitchFamily="34" charset="-120"/>
+              </a:rPr>
+              <a:t>04</a:t>
+            </a:r>
+            <a:endParaRPr lang="en-US" sz="1500" dirty="0"/>
+          </a:p>
+        </p:txBody>
+      </p:sp>
+      <p:sp>
+        <p:nvSpPr>
+          <p:cNvPr id="37" name="Text 35"/>
+          <p:cNvSpPr/>
+          <p:nvPr/>
+        </p:nvSpPr>
+        <p:spPr>
+          <a:xfrm>
+            <a:off x="6675120" y="4773168"/>
+            <a:ext cx="1188720" cy="274320"/>
+          </a:xfrm>
+          <a:prstGeom prst="rect">
+            <a:avLst/>
+          </a:prstGeom>
+          <a:noFill/>
+          <a:ln/>
+        </p:spPr>
+        <p:txBody>
+          <a:bodyPr wrap="square" lIns="0" tIns="0" rIns="0" bIns="0" rtlCol="0" anchor="t"/>
+          <a:lstStyle/>
+          <a:p>
+            <a:pPr indent="0" marL="0">
+              <a:buNone/>
+            </a:pPr>
+            <a:r>
+              <a:rPr lang="en-US" sz="1400" b="1" dirty="0">
+                <a:solidFill>
+                  <a:srgbClr val="191F28"/>
+                </a:solidFill>
+                <a:latin typeface="Arial" pitchFamily="34" charset="0"/>
+                <a:ea typeface="Arial" pitchFamily="34" charset="-122"/>
+                <a:cs typeface="Arial" pitchFamily="34" charset="-120"/>
+              </a:rPr>
+              <a:t>세기</a:t>
+            </a:r>
+            <a:endParaRPr lang="en-US" sz="1400" dirty="0"/>
+          </a:p>
+        </p:txBody>
+      </p:sp>
+      <p:sp>
+        <p:nvSpPr>
+          <p:cNvPr id="38" name="Text 36"/>
+          <p:cNvSpPr/>
+          <p:nvPr/>
+        </p:nvSpPr>
+        <p:spPr>
+          <a:xfrm>
+            <a:off x="7863840" y="4800600"/>
+            <a:ext cx="548640" cy="237744"/>
+          </a:xfrm>
+          <a:prstGeom prst="rect">
+            <a:avLst/>
+          </a:prstGeom>
+          <a:noFill/>
+          <a:ln/>
+        </p:spPr>
+        <p:txBody>
+          <a:bodyPr wrap="square" lIns="0" tIns="0" rIns="0" bIns="0" rtlCol="0" anchor="t"/>
+          <a:lstStyle/>
+          <a:p>
+            <a:pPr indent="0" marL="0">
+              <a:buNone/>
+            </a:pPr>
+            <a:r>
+              <a:rPr lang="en-US" sz="1050" b="1" dirty="0">
+                <a:solidFill>
+                  <a:srgbClr val="191F28"/>
+                </a:solidFill>
+                <a:latin typeface="Arial" pitchFamily="34" charset="0"/>
+                <a:ea typeface="Arial" pitchFamily="34" charset="-122"/>
+                <a:cs typeface="Arial" pitchFamily="34" charset="-120"/>
+              </a:rPr>
+              <a:t>코드</a:t>
+            </a:r>
+            <a:endParaRPr lang="en-US" sz="1050" dirty="0"/>
+          </a:p>
+        </p:txBody>
+      </p:sp>
+      <p:sp>
+        <p:nvSpPr>
+          <p:cNvPr id="39" name="Text 37"/>
+          <p:cNvSpPr/>
+          <p:nvPr/>
+        </p:nvSpPr>
+        <p:spPr>
+          <a:xfrm>
+            <a:off x="6675120" y="5074920"/>
+            <a:ext cx="4690872" cy="457200"/>
+          </a:xfrm>
+          <a:prstGeom prst="rect">
+            <a:avLst/>
+          </a:prstGeom>
+          <a:noFill/>
+          <a:ln/>
+        </p:spPr>
+        <p:txBody>
+          <a:bodyPr wrap="square" lIns="0" tIns="0" rIns="0" bIns="0" rtlCol="0" anchor="t"/>
+          <a:lstStyle/>
+          <a:p>
+            <a:pPr indent="0" marL="0">
+              <a:lnSpc>
+                <a:spcPct val="110000"/>
+              </a:lnSpc>
+              <a:buNone/>
+            </a:pPr>
+            <a:r>
+              <a:rPr lang="en-US" sz="1150" dirty="0">
+                <a:solidFill>
+                  <a:srgbClr val="4E5968"/>
+                </a:solidFill>
+                <a:latin typeface="Arial" pitchFamily="34" charset="0"/>
+                <a:ea typeface="Arial" pitchFamily="34" charset="-122"/>
+                <a:cs typeface="Arial" pitchFamily="34" charset="-120"/>
+              </a:rPr>
+              <a:t>여섯 중 5명 이상 부족·누락이면 고칠 곳, 2~4명이면 판단할 곳</a:t>
+            </a:r>
+            <a:endParaRPr lang="en-US" sz="1150" dirty="0"/>
+          </a:p>
+          <a:p>
+            <a:pPr indent="0" marL="0">
+              <a:lnSpc>
+                <a:spcPct val="110000"/>
+              </a:lnSpc>
+              <a:buNone/>
+            </a:pPr>
+            <a:r>
+              <a:rPr lang="en-US" sz="1150" dirty="0">
+                <a:solidFill>
+                  <a:srgbClr val="4E5968"/>
+                </a:solidFill>
+                <a:latin typeface="Arial" pitchFamily="34" charset="0"/>
+                <a:ea typeface="Arial" pitchFamily="34" charset="-122"/>
+                <a:cs typeface="Arial" pitchFamily="34" charset="-120"/>
+              </a:rPr>
+              <a:t>점수는 충족 1·부족 0.5·누락 0 × 배점, 최고·최저를 빼고 평균</a:t>
+            </a:r>
+            <a:endParaRPr lang="en-US" sz="1150" dirty="0"/>
+          </a:p>
+        </p:txBody>
+      </p:sp>
+      <p:sp>
+        <p:nvSpPr>
+          <p:cNvPr id="40" name="Shape 38"/>
+          <p:cNvSpPr/>
+          <p:nvPr/>
+        </p:nvSpPr>
+        <p:spPr>
+          <a:xfrm>
+            <a:off x="6172200" y="5687568"/>
+            <a:ext cx="5193792" cy="548640"/>
           </a:xfrm>
           <a:prstGeom prst="roundRect">
             <a:avLst>
-              <a:gd name="adj" fmla="val 2424"/>
+              <a:gd name="adj" fmla="val 13333"/>
             </a:avLst>
           </a:prstGeom>
           <a:solidFill>
@@ -9520,72 +12392,50 @@
       </p:sp>
       <p:sp>
         <p:nvSpPr>
-          <p:cNvPr id="5" name="Text 3"/>
-          <p:cNvSpPr/>
-          <p:nvPr/>
-        </p:nvSpPr>
-        <p:spPr>
-          <a:xfrm>
-            <a:off x="1097280" y="2788920"/>
-            <a:ext cx="2834640" cy="274320"/>
-          </a:xfrm>
-          <a:prstGeom prst="rect">
-            <a:avLst/>
-          </a:prstGeom>
-          <a:noFill/>
-          <a:ln/>
-        </p:spPr>
-        <p:txBody>
-          <a:bodyPr wrap="square" lIns="0" tIns="0" rIns="0" bIns="0" rtlCol="0" anchor="t"/>
-          <a:lstStyle/>
-          <a:p>
-            <a:pPr indent="0" marL="0">
-              <a:buNone/>
-            </a:pPr>
-            <a:r>
-              <a:rPr lang="en-US" sz="1300" b="1" dirty="0">
-                <a:solidFill>
-                  <a:srgbClr val="8B95A1"/>
-                </a:solidFill>
-                <a:latin typeface="Arial" pitchFamily="34" charset="0"/>
-                <a:ea typeface="Arial" pitchFamily="34" charset="-122"/>
-                <a:cs typeface="Arial" pitchFamily="34" charset="-120"/>
-              </a:rPr>
-              <a:t>하지 않는 말</a:t>
-            </a:r>
-            <a:endParaRPr lang="en-US" sz="1300" dirty="0"/>
-          </a:p>
-        </p:txBody>
-      </p:sp>
-      <p:sp>
-        <p:nvSpPr>
-          <p:cNvPr id="6" name="Text 4"/>
-          <p:cNvSpPr/>
-          <p:nvPr/>
-        </p:nvSpPr>
-        <p:spPr>
-          <a:xfrm>
-            <a:off x="1097280" y="3200400"/>
-            <a:ext cx="2834640" cy="1645920"/>
-          </a:xfrm>
-          <a:prstGeom prst="rect">
-            <a:avLst/>
-          </a:prstGeom>
-          <a:noFill/>
-          <a:ln/>
-        </p:spPr>
-        <p:txBody>
-          <a:bodyPr wrap="square" lIns="0" tIns="0" rIns="0" bIns="0" rtlCol="0" anchor="t"/>
+          <p:cNvPr id="41" name="Text 39"/>
+          <p:cNvSpPr/>
+          <p:nvPr/>
+        </p:nvSpPr>
+        <p:spPr>
+          <a:xfrm>
+            <a:off x="6336792" y="5733288"/>
+            <a:ext cx="4864608" cy="457200"/>
+          </a:xfrm>
+          <a:prstGeom prst="rect">
+            <a:avLst/>
+          </a:prstGeom>
+          <a:noFill/>
+          <a:ln/>
+        </p:spPr>
+        <p:txBody>
+          <a:bodyPr wrap="square" lIns="0" tIns="0" rIns="0" bIns="0" rtlCol="0" anchor="ctr"/>
           <a:lstStyle/>
           <a:p>
             <a:pPr indent="0" marL="0">
               <a:lnSpc>
-                <a:spcPct val="170000"/>
+                <a:spcPct val="110000"/>
               </a:lnSpc>
               <a:buNone/>
             </a:pPr>
             <a:r>
-              <a:rPr lang="en-US" sz="1700" b="1" strike="sngStrike" dirty="0">
+              <a:rPr lang="en-US" sz="1150" b="1" dirty="0">
+                <a:solidFill>
+                  <a:srgbClr val="1B64DA"/>
+                </a:solidFill>
+                <a:latin typeface="Arial" pitchFamily="34" charset="0"/>
+                <a:ea typeface="Arial" pitchFamily="34" charset="-122"/>
+                <a:cs typeface="Arial" pitchFamily="34" charset="-120"/>
+              </a:rPr>
+              <a:t>실제 예  </a:t>
+            </a:r>
+            <a:pPr indent="0" marL="0">
+              <a:lnSpc>
+                <a:spcPct val="110000"/>
+              </a:lnSpc>
+              <a:buNone/>
+            </a:pPr>
+            <a:r>
+              <a:rPr lang="en-US" sz="1150" dirty="0">
                 <a:solidFill>
                   <a:srgbClr val="191F28"/>
                 </a:solidFill>
@@ -9593,462 +12443,9 @@
                 <a:ea typeface="Arial" pitchFamily="34" charset="-122"/>
                 <a:cs typeface="Arial" pitchFamily="34" charset="-120"/>
               </a:rPr>
-              <a:t>심사 결과를 맞힙니다</a:t>
-            </a:r>
-            <a:endParaRPr lang="en-US" sz="1700" dirty="0"/>
-          </a:p>
-          <a:p>
-            <a:pPr indent="0" marL="0">
-              <a:lnSpc>
-                <a:spcPct val="170000"/>
-              </a:lnSpc>
-              <a:buNone/>
-            </a:pPr>
-            <a:r>
-              <a:rPr lang="en-US" sz="1700" b="1" strike="sngStrike" dirty="0">
-                <a:solidFill>
-                  <a:srgbClr val="191F28"/>
-                </a:solidFill>
-                <a:latin typeface="Arial" pitchFamily="34" charset="0"/>
-                <a:ea typeface="Arial" pitchFamily="34" charset="-122"/>
-                <a:cs typeface="Arial" pitchFamily="34" charset="-120"/>
-              </a:rPr>
-              <a:t>실제 심사위원과 같습니다</a:t>
-            </a:r>
-            <a:endParaRPr lang="en-US" sz="1700" dirty="0"/>
-          </a:p>
-          <a:p>
-            <a:pPr indent="0" marL="0">
-              <a:lnSpc>
-                <a:spcPct val="170000"/>
-              </a:lnSpc>
-              <a:buNone/>
-            </a:pPr>
-            <a:r>
-              <a:rPr lang="en-US" sz="1700" b="1" strike="sngStrike" dirty="0">
-                <a:solidFill>
-                  <a:srgbClr val="191F28"/>
-                </a:solidFill>
-                <a:latin typeface="Arial" pitchFamily="34" charset="0"/>
-                <a:ea typeface="Arial" pitchFamily="34" charset="-122"/>
-                <a:cs typeface="Arial" pitchFamily="34" charset="-120"/>
-              </a:rPr>
-              <a:t>제안서를 대신 씁니다</a:t>
-            </a:r>
-            <a:endParaRPr lang="en-US" sz="1700" dirty="0"/>
-          </a:p>
-        </p:txBody>
-      </p:sp>
-      <p:sp>
-        <p:nvSpPr>
-          <p:cNvPr id="7" name="Text 5"/>
-          <p:cNvSpPr/>
-          <p:nvPr/>
-        </p:nvSpPr>
-        <p:spPr>
-          <a:xfrm>
-            <a:off x="1097280" y="4983480"/>
-            <a:ext cx="2834640" cy="457200"/>
-          </a:xfrm>
-          <a:prstGeom prst="rect">
-            <a:avLst/>
-          </a:prstGeom>
-          <a:noFill/>
-          <a:ln/>
-        </p:spPr>
-        <p:txBody>
-          <a:bodyPr wrap="square" lIns="0" tIns="0" rIns="0" bIns="0" rtlCol="0" anchor="t"/>
-          <a:lstStyle/>
-          <a:p>
-            <a:pPr indent="0" marL="0">
-              <a:buNone/>
-            </a:pPr>
-            <a:r>
-              <a:rPr lang="en-US" sz="1200" dirty="0">
-                <a:solidFill>
-                  <a:srgbClr val="4E5968"/>
-                </a:solidFill>
-                <a:latin typeface="Arial" pitchFamily="34" charset="0"/>
-                <a:ea typeface="Arial" pitchFamily="34" charset="-122"/>
-                <a:cs typeface="Arial" pitchFamily="34" charset="-120"/>
-              </a:rPr>
-              <a:t>심사는 사람의 판단이라 정답이 없습니다.</a:t>
-            </a:r>
-            <a:endParaRPr lang="en-US" sz="1200" dirty="0"/>
-          </a:p>
-        </p:txBody>
-      </p:sp>
-      <p:sp>
-        <p:nvSpPr>
-          <p:cNvPr id="8" name="Text 6"/>
-          <p:cNvSpPr/>
-          <p:nvPr/>
-        </p:nvSpPr>
-        <p:spPr>
-          <a:xfrm>
-            <a:off x="4663440" y="2697480"/>
-            <a:ext cx="6702552" cy="329184"/>
-          </a:xfrm>
-          <a:prstGeom prst="rect">
-            <a:avLst/>
-          </a:prstGeom>
-          <a:noFill/>
-          <a:ln/>
-        </p:spPr>
-        <p:txBody>
-          <a:bodyPr wrap="square" lIns="0" tIns="0" rIns="0" bIns="0" rtlCol="0" anchor="t"/>
-          <a:lstStyle/>
-          <a:p>
-            <a:pPr indent="0" marL="0">
-              <a:buNone/>
-            </a:pPr>
-            <a:r>
-              <a:rPr lang="en-US" sz="1700" b="1" dirty="0">
-                <a:solidFill>
-                  <a:srgbClr val="191F28"/>
-                </a:solidFill>
-                <a:latin typeface="Arial" pitchFamily="34" charset="0"/>
-                <a:ea typeface="Arial" pitchFamily="34" charset="-122"/>
-                <a:cs typeface="Arial" pitchFamily="34" charset="-120"/>
-              </a:rPr>
-              <a:t>출처가 붙습니다</a:t>
-            </a:r>
-            <a:endParaRPr lang="en-US" sz="1700" dirty="0"/>
-          </a:p>
-        </p:txBody>
-      </p:sp>
-      <p:sp>
-        <p:nvSpPr>
-          <p:cNvPr id="9" name="Text 7"/>
-          <p:cNvSpPr/>
-          <p:nvPr/>
-        </p:nvSpPr>
-        <p:spPr>
-          <a:xfrm>
-            <a:off x="4663440" y="3044952"/>
-            <a:ext cx="6702552" cy="310896"/>
-          </a:xfrm>
-          <a:prstGeom prst="rect">
-            <a:avLst/>
-          </a:prstGeom>
-          <a:noFill/>
-          <a:ln/>
-        </p:spPr>
-        <p:txBody>
-          <a:bodyPr wrap="square" lIns="0" tIns="0" rIns="0" bIns="0" rtlCol="0" anchor="t"/>
-          <a:lstStyle/>
-          <a:p>
-            <a:pPr indent="0" marL="0">
-              <a:buNone/>
-            </a:pPr>
-            <a:r>
-              <a:rPr lang="en-US" sz="1250" dirty="0">
-                <a:solidFill>
-                  <a:srgbClr val="4E5968"/>
-                </a:solidFill>
-                <a:latin typeface="Arial" pitchFamily="34" charset="0"/>
-                <a:ea typeface="Arial" pitchFamily="34" charset="-122"/>
-                <a:cs typeface="Arial" pitchFamily="34" charset="-120"/>
-              </a:rPr>
-              <a:t>모든 지적에 공고의 쪽과 초안의 문장이 함께 나옵니다</a:t>
-            </a:r>
-            <a:endParaRPr lang="en-US" sz="1250" dirty="0"/>
-          </a:p>
-        </p:txBody>
-      </p:sp>
-      <p:sp>
-        <p:nvSpPr>
-          <p:cNvPr id="10" name="Text 8"/>
-          <p:cNvSpPr/>
-          <p:nvPr/>
-        </p:nvSpPr>
-        <p:spPr>
-          <a:xfrm>
-            <a:off x="4663440" y="3447288"/>
-            <a:ext cx="6702552" cy="329184"/>
-          </a:xfrm>
-          <a:prstGeom prst="rect">
-            <a:avLst/>
-          </a:prstGeom>
-          <a:noFill/>
-          <a:ln/>
-        </p:spPr>
-        <p:txBody>
-          <a:bodyPr wrap="square" lIns="0" tIns="0" rIns="0" bIns="0" rtlCol="0" anchor="t"/>
-          <a:lstStyle/>
-          <a:p>
-            <a:pPr indent="0" marL="0">
-              <a:buNone/>
-            </a:pPr>
-            <a:r>
-              <a:rPr lang="en-US" sz="1700" b="1" dirty="0">
-                <a:solidFill>
-                  <a:srgbClr val="191F28"/>
-                </a:solidFill>
-                <a:latin typeface="Arial" pitchFamily="34" charset="0"/>
-                <a:ea typeface="Arial" pitchFamily="34" charset="-122"/>
-                <a:cs typeface="Arial" pitchFamily="34" charset="-120"/>
-              </a:rPr>
-              <a:t>없는 문장은 버립니다</a:t>
-            </a:r>
-            <a:endParaRPr lang="en-US" sz="1700" dirty="0"/>
-          </a:p>
-        </p:txBody>
-      </p:sp>
-      <p:sp>
-        <p:nvSpPr>
-          <p:cNvPr id="11" name="Text 9"/>
-          <p:cNvSpPr/>
-          <p:nvPr/>
-        </p:nvSpPr>
-        <p:spPr>
-          <a:xfrm>
-            <a:off x="4663440" y="3794760"/>
-            <a:ext cx="6702552" cy="310896"/>
-          </a:xfrm>
-          <a:prstGeom prst="rect">
-            <a:avLst/>
-          </a:prstGeom>
-          <a:noFill/>
-          <a:ln/>
-        </p:spPr>
-        <p:txBody>
-          <a:bodyPr wrap="square" lIns="0" tIns="0" rIns="0" bIns="0" rtlCol="0" anchor="t"/>
-          <a:lstStyle/>
-          <a:p>
-            <a:pPr indent="0" marL="0">
-              <a:buNone/>
-            </a:pPr>
-            <a:r>
-              <a:rPr lang="en-US" sz="1250" dirty="0">
-                <a:solidFill>
-                  <a:srgbClr val="4E5968"/>
-                </a:solidFill>
-                <a:latin typeface="Arial" pitchFamily="34" charset="0"/>
-                <a:ea typeface="Arial" pitchFamily="34" charset="-122"/>
-                <a:cs typeface="Arial" pitchFamily="34" charset="-120"/>
-              </a:rPr>
-              <a:t>초안에 없는 인용은 판정에서 뺍니다. 이번 실행 9건 적발</a:t>
-            </a:r>
-            <a:endParaRPr lang="en-US" sz="1250" dirty="0"/>
-          </a:p>
-        </p:txBody>
-      </p:sp>
-      <p:sp>
-        <p:nvSpPr>
-          <p:cNvPr id="12" name="Text 10"/>
-          <p:cNvSpPr/>
-          <p:nvPr/>
-        </p:nvSpPr>
-        <p:spPr>
-          <a:xfrm>
-            <a:off x="4663440" y="4197096"/>
-            <a:ext cx="6702552" cy="329184"/>
-          </a:xfrm>
-          <a:prstGeom prst="rect">
-            <a:avLst/>
-          </a:prstGeom>
-          <a:noFill/>
-          <a:ln/>
-        </p:spPr>
-        <p:txBody>
-          <a:bodyPr wrap="square" lIns="0" tIns="0" rIns="0" bIns="0" rtlCol="0" anchor="t"/>
-          <a:lstStyle/>
-          <a:p>
-            <a:pPr indent="0" marL="0">
-              <a:buNone/>
-            </a:pPr>
-            <a:r>
-              <a:rPr lang="en-US" sz="1700" b="1" dirty="0">
-                <a:solidFill>
-                  <a:srgbClr val="191F28"/>
-                </a:solidFill>
-                <a:latin typeface="Arial" pitchFamily="34" charset="0"/>
-                <a:ea typeface="Arial" pitchFamily="34" charset="-122"/>
-                <a:cs typeface="Arial" pitchFamily="34" charset="-120"/>
-              </a:rPr>
-              <a:t>갈리면 사람에게 넘깁니다</a:t>
-            </a:r>
-            <a:endParaRPr lang="en-US" sz="1700" dirty="0"/>
-          </a:p>
-        </p:txBody>
-      </p:sp>
-      <p:sp>
-        <p:nvSpPr>
-          <p:cNvPr id="13" name="Text 11"/>
-          <p:cNvSpPr/>
-          <p:nvPr/>
-        </p:nvSpPr>
-        <p:spPr>
-          <a:xfrm>
-            <a:off x="4663440" y="4544568"/>
-            <a:ext cx="6702552" cy="310896"/>
-          </a:xfrm>
-          <a:prstGeom prst="rect">
-            <a:avLst/>
-          </a:prstGeom>
-          <a:noFill/>
-          <a:ln/>
-        </p:spPr>
-        <p:txBody>
-          <a:bodyPr wrap="square" lIns="0" tIns="0" rIns="0" bIns="0" rtlCol="0" anchor="t"/>
-          <a:lstStyle/>
-          <a:p>
-            <a:pPr indent="0" marL="0">
-              <a:buNone/>
-            </a:pPr>
-            <a:r>
-              <a:rPr lang="en-US" sz="1250" dirty="0">
-                <a:solidFill>
-                  <a:srgbClr val="4E5968"/>
-                </a:solidFill>
-                <a:latin typeface="Arial" pitchFamily="34" charset="0"/>
-                <a:ea typeface="Arial" pitchFamily="34" charset="-122"/>
-                <a:cs typeface="Arial" pitchFamily="34" charset="-120"/>
-              </a:rPr>
-              <a:t>관점이 엇갈리면 판정하지 않고 「판단할 곳」으로 보냅니다</a:t>
-            </a:r>
-            <a:endParaRPr lang="en-US" sz="1250" dirty="0"/>
-          </a:p>
-        </p:txBody>
-      </p:sp>
-      <p:sp>
-        <p:nvSpPr>
-          <p:cNvPr id="14" name="Text 12"/>
-          <p:cNvSpPr/>
-          <p:nvPr/>
-        </p:nvSpPr>
-        <p:spPr>
-          <a:xfrm>
-            <a:off x="4663440" y="4946904"/>
-            <a:ext cx="6702552" cy="329184"/>
-          </a:xfrm>
-          <a:prstGeom prst="rect">
-            <a:avLst/>
-          </a:prstGeom>
-          <a:noFill/>
-          <a:ln/>
-        </p:spPr>
-        <p:txBody>
-          <a:bodyPr wrap="square" lIns="0" tIns="0" rIns="0" bIns="0" rtlCol="0" anchor="t"/>
-          <a:lstStyle/>
-          <a:p>
-            <a:pPr indent="0" marL="0">
-              <a:buNone/>
-            </a:pPr>
-            <a:r>
-              <a:rPr lang="en-US" sz="1700" b="1" dirty="0">
-                <a:solidFill>
-                  <a:srgbClr val="191F28"/>
-                </a:solidFill>
-                <a:latin typeface="Arial" pitchFamily="34" charset="0"/>
-                <a:ea typeface="Arial" pitchFamily="34" charset="-122"/>
-                <a:cs typeface="Arial" pitchFamily="34" charset="-120"/>
-              </a:rPr>
-              <a:t>잰 것만 숫자로 말합니다</a:t>
-            </a:r>
-            <a:endParaRPr lang="en-US" sz="1700" dirty="0"/>
-          </a:p>
-        </p:txBody>
-      </p:sp>
-      <p:sp>
-        <p:nvSpPr>
-          <p:cNvPr id="15" name="Text 13"/>
-          <p:cNvSpPr/>
-          <p:nvPr/>
-        </p:nvSpPr>
-        <p:spPr>
-          <a:xfrm>
-            <a:off x="4663440" y="5294376"/>
-            <a:ext cx="6702552" cy="310896"/>
-          </a:xfrm>
-          <a:prstGeom prst="rect">
-            <a:avLst/>
-          </a:prstGeom>
-          <a:noFill/>
-          <a:ln/>
-        </p:spPr>
-        <p:txBody>
-          <a:bodyPr wrap="square" lIns="0" tIns="0" rIns="0" bIns="0" rtlCol="0" anchor="t"/>
-          <a:lstStyle/>
-          <a:p>
-            <a:pPr indent="0" marL="0">
-              <a:buNone/>
-            </a:pPr>
-            <a:r>
-              <a:rPr lang="en-US" sz="1250" dirty="0">
-                <a:solidFill>
-                  <a:srgbClr val="4E5968"/>
-                </a:solidFill>
-                <a:latin typeface="Arial" pitchFamily="34" charset="0"/>
-                <a:ea typeface="Arial" pitchFamily="34" charset="-122"/>
-                <a:cs typeface="Arial" pitchFamily="34" charset="-120"/>
-              </a:rPr>
-              <a:t>요건 찾기와 오탐만 숫자로 말하고, 합격 예측은 말하지 않습니다</a:t>
-            </a:r>
-            <a:endParaRPr lang="en-US" sz="1250" dirty="0"/>
-          </a:p>
-        </p:txBody>
-      </p:sp>
-      <p:sp>
-        <p:nvSpPr>
-          <p:cNvPr id="16" name="Shape 14"/>
-          <p:cNvSpPr/>
-          <p:nvPr/>
-        </p:nvSpPr>
-        <p:spPr>
-          <a:xfrm>
-            <a:off x="822960" y="5897880"/>
-            <a:ext cx="10543032" cy="0"/>
-          </a:xfrm>
-          <a:prstGeom prst="line">
-            <a:avLst/>
-          </a:prstGeom>
-          <a:noFill/>
-          <a:ln w="12700">
-            <a:solidFill>
-              <a:srgbClr val="E5E8EB"/>
-            </a:solidFill>
-            <a:prstDash val="solid"/>
-          </a:ln>
-        </p:spPr>
-      </p:sp>
-      <p:sp>
-        <p:nvSpPr>
-          <p:cNvPr id="17" name="Text 15"/>
-          <p:cNvSpPr/>
-          <p:nvPr/>
-        </p:nvSpPr>
-        <p:spPr>
-          <a:xfrm>
-            <a:off x="822960" y="6016752"/>
-            <a:ext cx="10543032" cy="320040"/>
-          </a:xfrm>
-          <a:prstGeom prst="rect">
-            <a:avLst/>
-          </a:prstGeom>
-          <a:noFill/>
-          <a:ln/>
-        </p:spPr>
-        <p:txBody>
-          <a:bodyPr wrap="square" lIns="0" tIns="0" rIns="0" bIns="0" rtlCol="0" anchor="t"/>
-          <a:lstStyle/>
-          <a:p>
-            <a:pPr indent="0" marL="0">
-              <a:buNone/>
-            </a:pPr>
-            <a:r>
-              <a:rPr lang="en-US" sz="1300" b="1" dirty="0">
-                <a:solidFill>
-                  <a:srgbClr val="1B64DA"/>
-                </a:solidFill>
-                <a:latin typeface="Arial" pitchFamily="34" charset="0"/>
-                <a:ea typeface="Arial" pitchFamily="34" charset="-122"/>
-                <a:cs typeface="Arial" pitchFamily="34" charset="-120"/>
-              </a:rPr>
-              <a:t>직접 확인도 됩니다. 지적마다 원문 보기와 맞음·틀림 버튼이 있고, 보안 모드를 켜면 초안은 국산 모델에만 갑니다.</a:t>
-            </a:r>
-            <a:endParaRPr lang="en-US" sz="1300" dirty="0"/>
+              <a:t>「AI 활용 계획이 연구 과정 시나리오로 제시됐는가」 충족 4 · 부족 2(세부 전문형, 행정·관리형) → 판단할 곳</a:t>
+            </a:r>
+            <a:endParaRPr lang="en-US" sz="1150" dirty="0"/>
           </a:p>
         </p:txBody>
       </p:sp>
@@ -10117,7 +12514,7 @@
                 <a:ea typeface="Arial" pitchFamily="34" charset="-122"/>
                 <a:cs typeface="Arial" pitchFamily="34" charset="-120"/>
               </a:rPr>
-              <a:t>MCP 도구</a:t>
+              <a:t>신뢰</a:t>
             </a:r>
             <a:endParaRPr lang="en-US" sz="1400" dirty="0"/>
           </a:p>
@@ -10159,7 +12556,7 @@
                 <a:ea typeface="Arial" pitchFamily="34" charset="-122"/>
                 <a:cs typeface="Arial" pitchFamily="34" charset="-120"/>
               </a:rPr>
-              <a:t>같은 검사 도구를,</a:t>
+              <a:t>맞힌다고 하지 않고,</a:t>
             </a:r>
             <a:endParaRPr lang="en-US" sz="3400" dirty="0"/>
           </a:p>
@@ -10179,7 +12576,7 @@
                 <a:ea typeface="Arial" pitchFamily="34" charset="-122"/>
                 <a:cs typeface="Arial" pitchFamily="34" charset="-120"/>
               </a:rPr>
-              <a:t>다른 AI 비서</a:t>
+              <a:t>확인할 수 있게</a:t>
             </a:r>
             <a:pPr indent="0" marL="0">
               <a:lnSpc>
@@ -10196,7 +12593,7 @@
                 <a:ea typeface="Arial" pitchFamily="34" charset="-122"/>
                 <a:cs typeface="Arial" pitchFamily="34" charset="-120"/>
               </a:rPr>
-              <a:t>도 씁니다</a:t>
+              <a:t> 했습니다</a:t>
             </a:r>
             <a:endParaRPr lang="en-US" sz="3400" dirty="0"/>
           </a:p>
@@ -10204,369 +12601,18 @@
       </p:sp>
       <p:sp>
         <p:nvSpPr>
-          <p:cNvPr id="4" name="Text 2"/>
-          <p:cNvSpPr/>
-          <p:nvPr/>
-        </p:nvSpPr>
-        <p:spPr>
-          <a:xfrm>
-            <a:off x="822960" y="2715768"/>
-            <a:ext cx="548640" cy="365760"/>
-          </a:xfrm>
-          <a:prstGeom prst="rect">
-            <a:avLst/>
-          </a:prstGeom>
-          <a:noFill/>
-          <a:ln/>
-        </p:spPr>
-        <p:txBody>
-          <a:bodyPr wrap="square" lIns="0" tIns="0" rIns="0" bIns="0" rtlCol="0" anchor="t"/>
-          <a:lstStyle/>
-          <a:p>
-            <a:pPr indent="0" marL="0">
-              <a:buNone/>
-            </a:pPr>
-            <a:r>
-              <a:rPr lang="en-US" sz="1800" b="1" dirty="0">
-                <a:solidFill>
-                  <a:srgbClr val="3182F6"/>
-                </a:solidFill>
-                <a:latin typeface="Arial" pitchFamily="34" charset="0"/>
-                <a:ea typeface="Arial" pitchFamily="34" charset="-122"/>
-                <a:cs typeface="Arial" pitchFamily="34" charset="-120"/>
-              </a:rPr>
-              <a:t>01</a:t>
-            </a:r>
-            <a:endParaRPr lang="en-US" sz="1800" dirty="0"/>
-          </a:p>
-        </p:txBody>
-      </p:sp>
-      <p:sp>
-        <p:nvSpPr>
-          <p:cNvPr id="5" name="Text 3"/>
-          <p:cNvSpPr/>
-          <p:nvPr/>
-        </p:nvSpPr>
-        <p:spPr>
-          <a:xfrm>
-            <a:off x="1463040" y="2697480"/>
-            <a:ext cx="5029200" cy="384048"/>
-          </a:xfrm>
-          <a:prstGeom prst="rect">
-            <a:avLst/>
-          </a:prstGeom>
-          <a:noFill/>
-          <a:ln/>
-        </p:spPr>
-        <p:txBody>
-          <a:bodyPr wrap="square" lIns="0" tIns="0" rIns="0" bIns="0" rtlCol="0" anchor="t"/>
-          <a:lstStyle/>
-          <a:p>
-            <a:pPr indent="0" marL="0">
-              <a:buNone/>
-            </a:pPr>
-            <a:r>
-              <a:rPr lang="en-US" sz="1800" b="1" dirty="0">
-                <a:solidFill>
-                  <a:srgbClr val="191F28"/>
-                </a:solidFill>
-                <a:latin typeface="Arial" pitchFamily="34" charset="0"/>
-                <a:ea typeface="Arial" pitchFamily="34" charset="-122"/>
-                <a:cs typeface="Arial" pitchFamily="34" charset="-120"/>
-              </a:rPr>
-              <a:t>search_prior_art</a:t>
-            </a:r>
-            <a:endParaRPr lang="en-US" sz="1800" dirty="0"/>
-          </a:p>
-        </p:txBody>
-      </p:sp>
-      <p:sp>
-        <p:nvSpPr>
-          <p:cNvPr id="6" name="Text 4"/>
-          <p:cNvSpPr/>
-          <p:nvPr/>
-        </p:nvSpPr>
-        <p:spPr>
-          <a:xfrm>
-            <a:off x="1463040" y="3108960"/>
-            <a:ext cx="5029200" cy="365760"/>
-          </a:xfrm>
-          <a:prstGeom prst="rect">
-            <a:avLst/>
-          </a:prstGeom>
-          <a:noFill/>
-          <a:ln/>
-        </p:spPr>
-        <p:txBody>
-          <a:bodyPr wrap="square" lIns="0" tIns="0" rIns="0" bIns="0" rtlCol="0" anchor="t"/>
-          <a:lstStyle/>
-          <a:p>
-            <a:pPr indent="0" marL="0">
-              <a:buNone/>
-            </a:pPr>
-            <a:r>
-              <a:rPr lang="en-US" sz="1250" dirty="0">
-                <a:solidFill>
-                  <a:srgbClr val="8B95A1"/>
-                </a:solidFill>
-                <a:latin typeface="Arial" pitchFamily="34" charset="0"/>
-                <a:ea typeface="Arial" pitchFamily="34" charset="-122"/>
-                <a:cs typeface="Arial" pitchFamily="34" charset="-120"/>
-              </a:rPr>
-              <a:t>학술 DB에서 선행연구를 찾습니다. OpenAlex가 막히면 Crossref로 넘어갑니다</a:t>
-            </a:r>
-            <a:endParaRPr lang="en-US" sz="1250" dirty="0"/>
-          </a:p>
-        </p:txBody>
-      </p:sp>
-      <p:sp>
-        <p:nvSpPr>
-          <p:cNvPr id="7" name="Text 5"/>
-          <p:cNvSpPr/>
-          <p:nvPr/>
-        </p:nvSpPr>
-        <p:spPr>
-          <a:xfrm>
-            <a:off x="822960" y="3721608"/>
-            <a:ext cx="548640" cy="365760"/>
-          </a:xfrm>
-          <a:prstGeom prst="rect">
-            <a:avLst/>
-          </a:prstGeom>
-          <a:noFill/>
-          <a:ln/>
-        </p:spPr>
-        <p:txBody>
-          <a:bodyPr wrap="square" lIns="0" tIns="0" rIns="0" bIns="0" rtlCol="0" anchor="t"/>
-          <a:lstStyle/>
-          <a:p>
-            <a:pPr indent="0" marL="0">
-              <a:buNone/>
-            </a:pPr>
-            <a:r>
-              <a:rPr lang="en-US" sz="1800" b="1" dirty="0">
-                <a:solidFill>
-                  <a:srgbClr val="3182F6"/>
-                </a:solidFill>
-                <a:latin typeface="Arial" pitchFamily="34" charset="0"/>
-                <a:ea typeface="Arial" pitchFamily="34" charset="-122"/>
-                <a:cs typeface="Arial" pitchFamily="34" charset="-120"/>
-              </a:rPr>
-              <a:t>02</a:t>
-            </a:r>
-            <a:endParaRPr lang="en-US" sz="1800" dirty="0"/>
-          </a:p>
-        </p:txBody>
-      </p:sp>
-      <p:sp>
-        <p:nvSpPr>
-          <p:cNvPr id="8" name="Text 6"/>
-          <p:cNvSpPr/>
-          <p:nvPr/>
-        </p:nvSpPr>
-        <p:spPr>
-          <a:xfrm>
-            <a:off x="1463040" y="3703320"/>
-            <a:ext cx="5029200" cy="384048"/>
-          </a:xfrm>
-          <a:prstGeom prst="rect">
-            <a:avLst/>
-          </a:prstGeom>
-          <a:noFill/>
-          <a:ln/>
-        </p:spPr>
-        <p:txBody>
-          <a:bodyPr wrap="square" lIns="0" tIns="0" rIns="0" bIns="0" rtlCol="0" anchor="t"/>
-          <a:lstStyle/>
-          <a:p>
-            <a:pPr indent="0" marL="0">
-              <a:buNone/>
-            </a:pPr>
-            <a:r>
-              <a:rPr lang="en-US" sz="1800" b="1" dirty="0">
-                <a:solidFill>
-                  <a:srgbClr val="191F28"/>
-                </a:solidFill>
-                <a:latin typeface="Arial" pitchFamily="34" charset="0"/>
-                <a:ea typeface="Arial" pitchFamily="34" charset="-122"/>
-                <a:cs typeface="Arial" pitchFamily="34" charset="-120"/>
-              </a:rPr>
-              <a:t>check_quote</a:t>
-            </a:r>
-            <a:endParaRPr lang="en-US" sz="1800" dirty="0"/>
-          </a:p>
-        </p:txBody>
-      </p:sp>
-      <p:sp>
-        <p:nvSpPr>
-          <p:cNvPr id="9" name="Text 7"/>
-          <p:cNvSpPr/>
-          <p:nvPr/>
-        </p:nvSpPr>
-        <p:spPr>
-          <a:xfrm>
-            <a:off x="1463040" y="4114800"/>
-            <a:ext cx="5029200" cy="365760"/>
-          </a:xfrm>
-          <a:prstGeom prst="rect">
-            <a:avLst/>
-          </a:prstGeom>
-          <a:noFill/>
-          <a:ln/>
-        </p:spPr>
-        <p:txBody>
-          <a:bodyPr wrap="square" lIns="0" tIns="0" rIns="0" bIns="0" rtlCol="0" anchor="t"/>
-          <a:lstStyle/>
-          <a:p>
-            <a:pPr indent="0" marL="0">
-              <a:buNone/>
-            </a:pPr>
-            <a:r>
-              <a:rPr lang="en-US" sz="1250" dirty="0">
-                <a:solidFill>
-                  <a:srgbClr val="8B95A1"/>
-                </a:solidFill>
-                <a:latin typeface="Arial" pitchFamily="34" charset="0"/>
-                <a:ea typeface="Arial" pitchFamily="34" charset="-122"/>
-                <a:cs typeface="Arial" pitchFamily="34" charset="-120"/>
-              </a:rPr>
-              <a:t>인용이 원문에 있는지 참, 거짓으로 답합니다</a:t>
-            </a:r>
-            <a:endParaRPr lang="en-US" sz="1250" dirty="0"/>
-          </a:p>
-        </p:txBody>
-      </p:sp>
-      <p:sp>
-        <p:nvSpPr>
-          <p:cNvPr id="10" name="Text 8"/>
-          <p:cNvSpPr/>
-          <p:nvPr/>
-        </p:nvSpPr>
-        <p:spPr>
-          <a:xfrm>
-            <a:off x="822960" y="4727448"/>
-            <a:ext cx="548640" cy="365760"/>
-          </a:xfrm>
-          <a:prstGeom prst="rect">
-            <a:avLst/>
-          </a:prstGeom>
-          <a:noFill/>
-          <a:ln/>
-        </p:spPr>
-        <p:txBody>
-          <a:bodyPr wrap="square" lIns="0" tIns="0" rIns="0" bIns="0" rtlCol="0" anchor="t"/>
-          <a:lstStyle/>
-          <a:p>
-            <a:pPr indent="0" marL="0">
-              <a:buNone/>
-            </a:pPr>
-            <a:r>
-              <a:rPr lang="en-US" sz="1800" b="1" dirty="0">
-                <a:solidFill>
-                  <a:srgbClr val="3182F6"/>
-                </a:solidFill>
-                <a:latin typeface="Arial" pitchFamily="34" charset="0"/>
-                <a:ea typeface="Arial" pitchFamily="34" charset="-122"/>
-                <a:cs typeface="Arial" pitchFamily="34" charset="-120"/>
-              </a:rPr>
-              <a:t>03</a:t>
-            </a:r>
-            <a:endParaRPr lang="en-US" sz="1800" dirty="0"/>
-          </a:p>
-        </p:txBody>
-      </p:sp>
-      <p:sp>
-        <p:nvSpPr>
-          <p:cNvPr id="11" name="Text 9"/>
-          <p:cNvSpPr/>
-          <p:nvPr/>
-        </p:nvSpPr>
-        <p:spPr>
-          <a:xfrm>
-            <a:off x="1463040" y="4709160"/>
-            <a:ext cx="5029200" cy="384048"/>
-          </a:xfrm>
-          <a:prstGeom prst="rect">
-            <a:avLst/>
-          </a:prstGeom>
-          <a:noFill/>
-          <a:ln/>
-        </p:spPr>
-        <p:txBody>
-          <a:bodyPr wrap="square" lIns="0" tIns="0" rIns="0" bIns="0" rtlCol="0" anchor="t"/>
-          <a:lstStyle/>
-          <a:p>
-            <a:pPr indent="0" marL="0">
-              <a:buNone/>
-            </a:pPr>
-            <a:r>
-              <a:rPr lang="en-US" sz="1800" b="1" dirty="0">
-                <a:solidFill>
-                  <a:srgbClr val="191F28"/>
-                </a:solidFill>
-                <a:latin typeface="Arial" pitchFamily="34" charset="0"/>
-                <a:ea typeface="Arial" pitchFamily="34" charset="-122"/>
-                <a:cs typeface="Arial" pitchFamily="34" charset="-120"/>
-              </a:rPr>
-              <a:t>왜 도구로 감쌌나</a:t>
-            </a:r>
-            <a:endParaRPr lang="en-US" sz="1800" dirty="0"/>
-          </a:p>
-        </p:txBody>
-      </p:sp>
-      <p:sp>
-        <p:nvSpPr>
-          <p:cNvPr id="12" name="Text 10"/>
-          <p:cNvSpPr/>
-          <p:nvPr/>
-        </p:nvSpPr>
-        <p:spPr>
-          <a:xfrm>
-            <a:off x="1463040" y="5120640"/>
-            <a:ext cx="5029200" cy="365760"/>
-          </a:xfrm>
-          <a:prstGeom prst="rect">
-            <a:avLst/>
-          </a:prstGeom>
-          <a:noFill/>
-          <a:ln/>
-        </p:spPr>
-        <p:txBody>
-          <a:bodyPr wrap="square" lIns="0" tIns="0" rIns="0" bIns="0" rtlCol="0" anchor="t"/>
-          <a:lstStyle/>
-          <a:p>
-            <a:pPr indent="0" marL="0">
-              <a:buNone/>
-            </a:pPr>
-            <a:r>
-              <a:rPr lang="en-US" sz="1250" dirty="0">
-                <a:solidFill>
-                  <a:srgbClr val="8B95A1"/>
-                </a:solidFill>
-                <a:latin typeface="Arial" pitchFamily="34" charset="0"/>
-                <a:ea typeface="Arial" pitchFamily="34" charset="-122"/>
-                <a:cs typeface="Arial" pitchFamily="34" charset="-120"/>
-              </a:rPr>
-              <a:t>어젯밤 실험 도중 OpenAlex가 멈췄을 때, 도구 뒤에서 자동으로 바뀌었습니다. 국내 DB도 같은 자리에 꽂으면 됩니다</a:t>
-            </a:r>
-            <a:endParaRPr lang="en-US" sz="1250" dirty="0"/>
-          </a:p>
-        </p:txBody>
-      </p:sp>
-      <p:sp>
-        <p:nvSpPr>
-          <p:cNvPr id="13" name="Shape 11"/>
-          <p:cNvSpPr/>
-          <p:nvPr/>
-        </p:nvSpPr>
-        <p:spPr>
-          <a:xfrm>
-            <a:off x="6903720" y="2606040"/>
-            <a:ext cx="4462272" cy="3291840"/>
+          <p:cNvPr id="4" name="Shape 2"/>
+          <p:cNvSpPr/>
+          <p:nvPr/>
+        </p:nvSpPr>
+        <p:spPr>
+          <a:xfrm>
+            <a:off x="822960" y="2606040"/>
+            <a:ext cx="3383280" cy="3017520"/>
           </a:xfrm>
           <a:prstGeom prst="roundRect">
             <a:avLst>
-              <a:gd name="adj" fmla="val 2222"/>
+              <a:gd name="adj" fmla="val 2424"/>
             </a:avLst>
           </a:prstGeom>
           <a:solidFill>
@@ -10582,14 +12628,509 @@
       </p:sp>
       <p:sp>
         <p:nvSpPr>
+          <p:cNvPr id="5" name="Text 3"/>
+          <p:cNvSpPr/>
+          <p:nvPr/>
+        </p:nvSpPr>
+        <p:spPr>
+          <a:xfrm>
+            <a:off x="1097280" y="2788920"/>
+            <a:ext cx="2834640" cy="274320"/>
+          </a:xfrm>
+          <a:prstGeom prst="rect">
+            <a:avLst/>
+          </a:prstGeom>
+          <a:noFill/>
+          <a:ln/>
+        </p:spPr>
+        <p:txBody>
+          <a:bodyPr wrap="square" lIns="0" tIns="0" rIns="0" bIns="0" rtlCol="0" anchor="t"/>
+          <a:lstStyle/>
+          <a:p>
+            <a:pPr indent="0" marL="0">
+              <a:buNone/>
+            </a:pPr>
+            <a:r>
+              <a:rPr lang="en-US" sz="1300" b="1" dirty="0">
+                <a:solidFill>
+                  <a:srgbClr val="8B95A1"/>
+                </a:solidFill>
+                <a:latin typeface="Arial" pitchFamily="34" charset="0"/>
+                <a:ea typeface="Arial" pitchFamily="34" charset="-122"/>
+                <a:cs typeface="Arial" pitchFamily="34" charset="-120"/>
+              </a:rPr>
+              <a:t>하지 않는 말</a:t>
+            </a:r>
+            <a:endParaRPr lang="en-US" sz="1300" dirty="0"/>
+          </a:p>
+        </p:txBody>
+      </p:sp>
+      <p:sp>
+        <p:nvSpPr>
+          <p:cNvPr id="6" name="Text 4"/>
+          <p:cNvSpPr/>
+          <p:nvPr/>
+        </p:nvSpPr>
+        <p:spPr>
+          <a:xfrm>
+            <a:off x="1097280" y="3200400"/>
+            <a:ext cx="2834640" cy="1645920"/>
+          </a:xfrm>
+          <a:prstGeom prst="rect">
+            <a:avLst/>
+          </a:prstGeom>
+          <a:noFill/>
+          <a:ln/>
+        </p:spPr>
+        <p:txBody>
+          <a:bodyPr wrap="square" lIns="0" tIns="0" rIns="0" bIns="0" rtlCol="0" anchor="t"/>
+          <a:lstStyle/>
+          <a:p>
+            <a:pPr indent="0" marL="0">
+              <a:lnSpc>
+                <a:spcPct val="170000"/>
+              </a:lnSpc>
+              <a:buNone/>
+            </a:pPr>
+            <a:r>
+              <a:rPr lang="en-US" sz="1700" b="1" strike="sngStrike" dirty="0">
+                <a:solidFill>
+                  <a:srgbClr val="191F28"/>
+                </a:solidFill>
+                <a:latin typeface="Arial" pitchFamily="34" charset="0"/>
+                <a:ea typeface="Arial" pitchFamily="34" charset="-122"/>
+                <a:cs typeface="Arial" pitchFamily="34" charset="-120"/>
+              </a:rPr>
+              <a:t>심사 결과를 맞힙니다</a:t>
+            </a:r>
+            <a:endParaRPr lang="en-US" sz="1700" dirty="0"/>
+          </a:p>
+          <a:p>
+            <a:pPr indent="0" marL="0">
+              <a:lnSpc>
+                <a:spcPct val="170000"/>
+              </a:lnSpc>
+              <a:buNone/>
+            </a:pPr>
+            <a:r>
+              <a:rPr lang="en-US" sz="1700" b="1" strike="sngStrike" dirty="0">
+                <a:solidFill>
+                  <a:srgbClr val="191F28"/>
+                </a:solidFill>
+                <a:latin typeface="Arial" pitchFamily="34" charset="0"/>
+                <a:ea typeface="Arial" pitchFamily="34" charset="-122"/>
+                <a:cs typeface="Arial" pitchFamily="34" charset="-120"/>
+              </a:rPr>
+              <a:t>실제 심사위원과 같습니다</a:t>
+            </a:r>
+            <a:endParaRPr lang="en-US" sz="1700" dirty="0"/>
+          </a:p>
+          <a:p>
+            <a:pPr indent="0" marL="0">
+              <a:lnSpc>
+                <a:spcPct val="170000"/>
+              </a:lnSpc>
+              <a:buNone/>
+            </a:pPr>
+            <a:r>
+              <a:rPr lang="en-US" sz="1700" b="1" strike="sngStrike" dirty="0">
+                <a:solidFill>
+                  <a:srgbClr val="191F28"/>
+                </a:solidFill>
+                <a:latin typeface="Arial" pitchFamily="34" charset="0"/>
+                <a:ea typeface="Arial" pitchFamily="34" charset="-122"/>
+                <a:cs typeface="Arial" pitchFamily="34" charset="-120"/>
+              </a:rPr>
+              <a:t>제안서를 대신 씁니다</a:t>
+            </a:r>
+            <a:endParaRPr lang="en-US" sz="1700" dirty="0"/>
+          </a:p>
+        </p:txBody>
+      </p:sp>
+      <p:sp>
+        <p:nvSpPr>
+          <p:cNvPr id="7" name="Text 5"/>
+          <p:cNvSpPr/>
+          <p:nvPr/>
+        </p:nvSpPr>
+        <p:spPr>
+          <a:xfrm>
+            <a:off x="1097280" y="4983480"/>
+            <a:ext cx="2834640" cy="457200"/>
+          </a:xfrm>
+          <a:prstGeom prst="rect">
+            <a:avLst/>
+          </a:prstGeom>
+          <a:noFill/>
+          <a:ln/>
+        </p:spPr>
+        <p:txBody>
+          <a:bodyPr wrap="square" lIns="0" tIns="0" rIns="0" bIns="0" rtlCol="0" anchor="t"/>
+          <a:lstStyle/>
+          <a:p>
+            <a:pPr indent="0" marL="0">
+              <a:buNone/>
+            </a:pPr>
+            <a:r>
+              <a:rPr lang="en-US" sz="1200" dirty="0">
+                <a:solidFill>
+                  <a:srgbClr val="4E5968"/>
+                </a:solidFill>
+                <a:latin typeface="Arial" pitchFamily="34" charset="0"/>
+                <a:ea typeface="Arial" pitchFamily="34" charset="-122"/>
+                <a:cs typeface="Arial" pitchFamily="34" charset="-120"/>
+              </a:rPr>
+              <a:t>심사는 사람의 판단이라 정답이 없습니다.</a:t>
+            </a:r>
+            <a:endParaRPr lang="en-US" sz="1200" dirty="0"/>
+          </a:p>
+        </p:txBody>
+      </p:sp>
+      <p:sp>
+        <p:nvSpPr>
+          <p:cNvPr id="8" name="Text 6"/>
+          <p:cNvSpPr/>
+          <p:nvPr/>
+        </p:nvSpPr>
+        <p:spPr>
+          <a:xfrm>
+            <a:off x="4663440" y="2697480"/>
+            <a:ext cx="6702552" cy="329184"/>
+          </a:xfrm>
+          <a:prstGeom prst="rect">
+            <a:avLst/>
+          </a:prstGeom>
+          <a:noFill/>
+          <a:ln/>
+        </p:spPr>
+        <p:txBody>
+          <a:bodyPr wrap="square" lIns="0" tIns="0" rIns="0" bIns="0" rtlCol="0" anchor="t"/>
+          <a:lstStyle/>
+          <a:p>
+            <a:pPr indent="0" marL="0">
+              <a:buNone/>
+            </a:pPr>
+            <a:r>
+              <a:rPr lang="en-US" sz="1700" b="1" dirty="0">
+                <a:solidFill>
+                  <a:srgbClr val="191F28"/>
+                </a:solidFill>
+                <a:latin typeface="Arial" pitchFamily="34" charset="0"/>
+                <a:ea typeface="Arial" pitchFamily="34" charset="-122"/>
+                <a:cs typeface="Arial" pitchFamily="34" charset="-120"/>
+              </a:rPr>
+              <a:t>출처가 붙습니다</a:t>
+            </a:r>
+            <a:endParaRPr lang="en-US" sz="1700" dirty="0"/>
+          </a:p>
+        </p:txBody>
+      </p:sp>
+      <p:sp>
+        <p:nvSpPr>
+          <p:cNvPr id="9" name="Text 7"/>
+          <p:cNvSpPr/>
+          <p:nvPr/>
+        </p:nvSpPr>
+        <p:spPr>
+          <a:xfrm>
+            <a:off x="4663440" y="3044952"/>
+            <a:ext cx="6702552" cy="310896"/>
+          </a:xfrm>
+          <a:prstGeom prst="rect">
+            <a:avLst/>
+          </a:prstGeom>
+          <a:noFill/>
+          <a:ln/>
+        </p:spPr>
+        <p:txBody>
+          <a:bodyPr wrap="square" lIns="0" tIns="0" rIns="0" bIns="0" rtlCol="0" anchor="t"/>
+          <a:lstStyle/>
+          <a:p>
+            <a:pPr indent="0" marL="0">
+              <a:buNone/>
+            </a:pPr>
+            <a:r>
+              <a:rPr lang="en-US" sz="1250" dirty="0">
+                <a:solidFill>
+                  <a:srgbClr val="4E5968"/>
+                </a:solidFill>
+                <a:latin typeface="Arial" pitchFamily="34" charset="0"/>
+                <a:ea typeface="Arial" pitchFamily="34" charset="-122"/>
+                <a:cs typeface="Arial" pitchFamily="34" charset="-120"/>
+              </a:rPr>
+              <a:t>모든 지적에 공고의 쪽과 초안의 문장이 함께 나옵니다</a:t>
+            </a:r>
+            <a:endParaRPr lang="en-US" sz="1250" dirty="0"/>
+          </a:p>
+        </p:txBody>
+      </p:sp>
+      <p:sp>
+        <p:nvSpPr>
+          <p:cNvPr id="10" name="Text 8"/>
+          <p:cNvSpPr/>
+          <p:nvPr/>
+        </p:nvSpPr>
+        <p:spPr>
+          <a:xfrm>
+            <a:off x="4663440" y="3447288"/>
+            <a:ext cx="6702552" cy="329184"/>
+          </a:xfrm>
+          <a:prstGeom prst="rect">
+            <a:avLst/>
+          </a:prstGeom>
+          <a:noFill/>
+          <a:ln/>
+        </p:spPr>
+        <p:txBody>
+          <a:bodyPr wrap="square" lIns="0" tIns="0" rIns="0" bIns="0" rtlCol="0" anchor="t"/>
+          <a:lstStyle/>
+          <a:p>
+            <a:pPr indent="0" marL="0">
+              <a:buNone/>
+            </a:pPr>
+            <a:r>
+              <a:rPr lang="en-US" sz="1700" b="1" dirty="0">
+                <a:solidFill>
+                  <a:srgbClr val="191F28"/>
+                </a:solidFill>
+                <a:latin typeface="Arial" pitchFamily="34" charset="0"/>
+                <a:ea typeface="Arial" pitchFamily="34" charset="-122"/>
+                <a:cs typeface="Arial" pitchFamily="34" charset="-120"/>
+              </a:rPr>
+              <a:t>없는 문장은 버립니다</a:t>
+            </a:r>
+            <a:endParaRPr lang="en-US" sz="1700" dirty="0"/>
+          </a:p>
+        </p:txBody>
+      </p:sp>
+      <p:sp>
+        <p:nvSpPr>
+          <p:cNvPr id="11" name="Text 9"/>
+          <p:cNvSpPr/>
+          <p:nvPr/>
+        </p:nvSpPr>
+        <p:spPr>
+          <a:xfrm>
+            <a:off x="4663440" y="3794760"/>
+            <a:ext cx="6702552" cy="310896"/>
+          </a:xfrm>
+          <a:prstGeom prst="rect">
+            <a:avLst/>
+          </a:prstGeom>
+          <a:noFill/>
+          <a:ln/>
+        </p:spPr>
+        <p:txBody>
+          <a:bodyPr wrap="square" lIns="0" tIns="0" rIns="0" bIns="0" rtlCol="0" anchor="t"/>
+          <a:lstStyle/>
+          <a:p>
+            <a:pPr indent="0" marL="0">
+              <a:buNone/>
+            </a:pPr>
+            <a:r>
+              <a:rPr lang="en-US" sz="1250" dirty="0">
+                <a:solidFill>
+                  <a:srgbClr val="4E5968"/>
+                </a:solidFill>
+                <a:latin typeface="Arial" pitchFamily="34" charset="0"/>
+                <a:ea typeface="Arial" pitchFamily="34" charset="-122"/>
+                <a:cs typeface="Arial" pitchFamily="34" charset="-120"/>
+              </a:rPr>
+              <a:t>초안에 없는 인용은 판정에서 뺍니다. 이번 실행 9건 적발</a:t>
+            </a:r>
+            <a:endParaRPr lang="en-US" sz="1250" dirty="0"/>
+          </a:p>
+        </p:txBody>
+      </p:sp>
+      <p:sp>
+        <p:nvSpPr>
+          <p:cNvPr id="12" name="Text 10"/>
+          <p:cNvSpPr/>
+          <p:nvPr/>
+        </p:nvSpPr>
+        <p:spPr>
+          <a:xfrm>
+            <a:off x="4663440" y="4197096"/>
+            <a:ext cx="6702552" cy="329184"/>
+          </a:xfrm>
+          <a:prstGeom prst="rect">
+            <a:avLst/>
+          </a:prstGeom>
+          <a:noFill/>
+          <a:ln/>
+        </p:spPr>
+        <p:txBody>
+          <a:bodyPr wrap="square" lIns="0" tIns="0" rIns="0" bIns="0" rtlCol="0" anchor="t"/>
+          <a:lstStyle/>
+          <a:p>
+            <a:pPr indent="0" marL="0">
+              <a:buNone/>
+            </a:pPr>
+            <a:r>
+              <a:rPr lang="en-US" sz="1700" b="1" dirty="0">
+                <a:solidFill>
+                  <a:srgbClr val="191F28"/>
+                </a:solidFill>
+                <a:latin typeface="Arial" pitchFamily="34" charset="0"/>
+                <a:ea typeface="Arial" pitchFamily="34" charset="-122"/>
+                <a:cs typeface="Arial" pitchFamily="34" charset="-120"/>
+              </a:rPr>
+              <a:t>갈리면 사람에게 넘깁니다</a:t>
+            </a:r>
+            <a:endParaRPr lang="en-US" sz="1700" dirty="0"/>
+          </a:p>
+        </p:txBody>
+      </p:sp>
+      <p:sp>
+        <p:nvSpPr>
+          <p:cNvPr id="13" name="Text 11"/>
+          <p:cNvSpPr/>
+          <p:nvPr/>
+        </p:nvSpPr>
+        <p:spPr>
+          <a:xfrm>
+            <a:off x="4663440" y="4544568"/>
+            <a:ext cx="6702552" cy="310896"/>
+          </a:xfrm>
+          <a:prstGeom prst="rect">
+            <a:avLst/>
+          </a:prstGeom>
+          <a:noFill/>
+          <a:ln/>
+        </p:spPr>
+        <p:txBody>
+          <a:bodyPr wrap="square" lIns="0" tIns="0" rIns="0" bIns="0" rtlCol="0" anchor="t"/>
+          <a:lstStyle/>
+          <a:p>
+            <a:pPr indent="0" marL="0">
+              <a:buNone/>
+            </a:pPr>
+            <a:r>
+              <a:rPr lang="en-US" sz="1250" dirty="0">
+                <a:solidFill>
+                  <a:srgbClr val="4E5968"/>
+                </a:solidFill>
+                <a:latin typeface="Arial" pitchFamily="34" charset="0"/>
+                <a:ea typeface="Arial" pitchFamily="34" charset="-122"/>
+                <a:cs typeface="Arial" pitchFamily="34" charset="-120"/>
+              </a:rPr>
+              <a:t>관점이 엇갈리면 판정하지 않고 「판단할 곳」으로 보냅니다</a:t>
+            </a:r>
+            <a:endParaRPr lang="en-US" sz="1250" dirty="0"/>
+          </a:p>
+        </p:txBody>
+      </p:sp>
+      <p:sp>
+        <p:nvSpPr>
           <p:cNvPr id="14" name="Text 12"/>
           <p:cNvSpPr/>
           <p:nvPr/>
         </p:nvSpPr>
         <p:spPr>
           <a:xfrm>
-            <a:off x="7178040" y="2788920"/>
-            <a:ext cx="3913632" cy="274320"/>
+            <a:off x="4663440" y="4946904"/>
+            <a:ext cx="6702552" cy="329184"/>
+          </a:xfrm>
+          <a:prstGeom prst="rect">
+            <a:avLst/>
+          </a:prstGeom>
+          <a:noFill/>
+          <a:ln/>
+        </p:spPr>
+        <p:txBody>
+          <a:bodyPr wrap="square" lIns="0" tIns="0" rIns="0" bIns="0" rtlCol="0" anchor="t"/>
+          <a:lstStyle/>
+          <a:p>
+            <a:pPr indent="0" marL="0">
+              <a:buNone/>
+            </a:pPr>
+            <a:r>
+              <a:rPr lang="en-US" sz="1700" b="1" dirty="0">
+                <a:solidFill>
+                  <a:srgbClr val="191F28"/>
+                </a:solidFill>
+                <a:latin typeface="Arial" pitchFamily="34" charset="0"/>
+                <a:ea typeface="Arial" pitchFamily="34" charset="-122"/>
+                <a:cs typeface="Arial" pitchFamily="34" charset="-120"/>
+              </a:rPr>
+              <a:t>잰 것만 숫자로 말합니다</a:t>
+            </a:r>
+            <a:endParaRPr lang="en-US" sz="1700" dirty="0"/>
+          </a:p>
+        </p:txBody>
+      </p:sp>
+      <p:sp>
+        <p:nvSpPr>
+          <p:cNvPr id="15" name="Text 13"/>
+          <p:cNvSpPr/>
+          <p:nvPr/>
+        </p:nvSpPr>
+        <p:spPr>
+          <a:xfrm>
+            <a:off x="4663440" y="5294376"/>
+            <a:ext cx="6702552" cy="310896"/>
+          </a:xfrm>
+          <a:prstGeom prst="rect">
+            <a:avLst/>
+          </a:prstGeom>
+          <a:noFill/>
+          <a:ln/>
+        </p:spPr>
+        <p:txBody>
+          <a:bodyPr wrap="square" lIns="0" tIns="0" rIns="0" bIns="0" rtlCol="0" anchor="t"/>
+          <a:lstStyle/>
+          <a:p>
+            <a:pPr indent="0" marL="0">
+              <a:buNone/>
+            </a:pPr>
+            <a:r>
+              <a:rPr lang="en-US" sz="1250" dirty="0">
+                <a:solidFill>
+                  <a:srgbClr val="4E5968"/>
+                </a:solidFill>
+                <a:latin typeface="Arial" pitchFamily="34" charset="0"/>
+                <a:ea typeface="Arial" pitchFamily="34" charset="-122"/>
+                <a:cs typeface="Arial" pitchFamily="34" charset="-120"/>
+              </a:rPr>
+              <a:t>요건 찾기와 오탐만 숫자로 말하고, 합격 예측은 말하지 않습니다</a:t>
+            </a:r>
+            <a:endParaRPr lang="en-US" sz="1250" dirty="0"/>
+          </a:p>
+        </p:txBody>
+      </p:sp>
+      <p:sp>
+        <p:nvSpPr>
+          <p:cNvPr id="16" name="Shape 14"/>
+          <p:cNvSpPr/>
+          <p:nvPr/>
+        </p:nvSpPr>
+        <p:spPr>
+          <a:xfrm>
+            <a:off x="822960" y="5897880"/>
+            <a:ext cx="10543032" cy="0"/>
+          </a:xfrm>
+          <a:prstGeom prst="line">
+            <a:avLst/>
+          </a:prstGeom>
+          <a:noFill/>
+          <a:ln w="12700">
+            <a:solidFill>
+              <a:srgbClr val="E5E8EB"/>
+            </a:solidFill>
+            <a:prstDash val="solid"/>
+          </a:ln>
+        </p:spPr>
+      </p:sp>
+      <p:sp>
+        <p:nvSpPr>
+          <p:cNvPr id="17" name="Text 15"/>
+          <p:cNvSpPr/>
+          <p:nvPr/>
+        </p:nvSpPr>
+        <p:spPr>
+          <a:xfrm>
+            <a:off x="822960" y="6016752"/>
+            <a:ext cx="10543032" cy="320040"/>
           </a:xfrm>
           <a:prstGeom prst="rect">
             <a:avLst/>
@@ -10607,157 +13148,15 @@
             <a:r>
               <a:rPr lang="en-US" sz="1300" b="1" dirty="0">
                 <a:solidFill>
-                  <a:srgbClr val="3182F6"/>
-                </a:solidFill>
-                <a:latin typeface="Arial" pitchFamily="34" charset="0"/>
-                <a:ea typeface="Arial" pitchFamily="34" charset="-122"/>
-                <a:cs typeface="Arial" pitchFamily="34" charset="-120"/>
-              </a:rPr>
-              <a:t>Codex에 붙여서 실제로 호출해 봤습니다</a:t>
+                  <a:srgbClr val="1B64DA"/>
+                </a:solidFill>
+                <a:latin typeface="Arial" pitchFamily="34" charset="0"/>
+                <a:ea typeface="Arial" pitchFamily="34" charset="-122"/>
+                <a:cs typeface="Arial" pitchFamily="34" charset="-120"/>
+              </a:rPr>
+              <a:t>직접 확인도 됩니다. 지적마다 원문 보기와 맞음·틀림 버튼이 있고, 보안 모드를 켜면 초안은 국산 모델에만 갑니다.</a:t>
             </a:r>
             <a:endParaRPr lang="en-US" sz="1300" dirty="0"/>
-          </a:p>
-        </p:txBody>
-      </p:sp>
-      <p:sp>
-        <p:nvSpPr>
-          <p:cNvPr id="15" name="Text 13"/>
-          <p:cNvSpPr/>
-          <p:nvPr/>
-        </p:nvSpPr>
-        <p:spPr>
-          <a:xfrm>
-            <a:off x="7178040" y="3200400"/>
-            <a:ext cx="3913632" cy="2560320"/>
-          </a:xfrm>
-          <a:prstGeom prst="rect">
-            <a:avLst/>
-          </a:prstGeom>
-          <a:noFill/>
-          <a:ln/>
-        </p:spPr>
-        <p:txBody>
-          <a:bodyPr wrap="square" lIns="0" tIns="0" rIns="0" bIns="0" rtlCol="0" anchor="t"/>
-          <a:lstStyle/>
-          <a:p>
-            <a:pPr indent="0" marL="0">
-              <a:lnSpc>
-                <a:spcPct val="135000"/>
-              </a:lnSpc>
-              <a:buNone/>
-            </a:pPr>
-            <a:r>
-              <a:rPr lang="en-US" sz="1350" b="1" dirty="0">
-                <a:solidFill>
-                  <a:srgbClr val="191F28"/>
-                </a:solidFill>
-                <a:latin typeface="Arial" pitchFamily="34" charset="0"/>
-                <a:ea typeface="Arial" pitchFamily="34" charset="-122"/>
-                <a:cs typeface="Arial" pitchFamily="34" charset="-120"/>
-              </a:rPr>
-              <a:t>check_quote(재현율 90% 이상)</a:t>
-            </a:r>
-            <a:endParaRPr lang="en-US" sz="1350" dirty="0"/>
-          </a:p>
-          <a:p>
-            <a:pPr indent="0" marL="0">
-              <a:lnSpc>
-                <a:spcPct val="135000"/>
-              </a:lnSpc>
-              <a:buNone/>
-            </a:pPr>
-            <a:r>
-              <a:rPr lang="en-US" sz="1350" b="1" dirty="0">
-                <a:solidFill>
-                  <a:srgbClr val="1B64DA"/>
-                </a:solidFill>
-                <a:latin typeface="Arial" pitchFamily="34" charset="0"/>
-                <a:ea typeface="Arial" pitchFamily="34" charset="-122"/>
-                <a:cs typeface="Arial" pitchFamily="34" charset="-120"/>
-              </a:rPr>
-              <a:t>→ 참</a:t>
-            </a:r>
-            <a:endParaRPr lang="en-US" sz="1350" dirty="0"/>
-          </a:p>
-          <a:p>
-            <a:pPr indent="0" marL="0">
-              <a:lnSpc>
-                <a:spcPct val="135000"/>
-              </a:lnSpc>
-              <a:buNone/>
-            </a:pPr>
-            <a:r>
-              <a:rPr lang="en-US" sz="1350" b="1" dirty="0">
-                <a:solidFill>
-                  <a:srgbClr val="191F28"/>
-                </a:solidFill>
-                <a:latin typeface="Arial" pitchFamily="34" charset="0"/>
-                <a:ea typeface="Arial" pitchFamily="34" charset="-122"/>
-                <a:cs typeface="Arial" pitchFamily="34" charset="-120"/>
-              </a:rPr>
-              <a:t>check_quote(정밀도 95% 달성)</a:t>
-            </a:r>
-            <a:endParaRPr lang="en-US" sz="1350" dirty="0"/>
-          </a:p>
-          <a:p>
-            <a:pPr indent="0" marL="0">
-              <a:lnSpc>
-                <a:spcPct val="135000"/>
-              </a:lnSpc>
-              <a:buNone/>
-            </a:pPr>
-            <a:r>
-              <a:rPr lang="en-US" sz="1350" b="1" dirty="0">
-                <a:solidFill>
-                  <a:srgbClr val="1B64DA"/>
-                </a:solidFill>
-                <a:latin typeface="Arial" pitchFamily="34" charset="0"/>
-                <a:ea typeface="Arial" pitchFamily="34" charset="-122"/>
-                <a:cs typeface="Arial" pitchFamily="34" charset="-120"/>
-              </a:rPr>
-              <a:t>→ 거짓(원문에 없음)</a:t>
-            </a:r>
-            <a:endParaRPr lang="en-US" sz="1350" dirty="0"/>
-          </a:p>
-          <a:p>
-            <a:pPr indent="0" marL="0">
-              <a:lnSpc>
-                <a:spcPct val="135000"/>
-              </a:lnSpc>
-              <a:buNone/>
-            </a:pPr>
-            <a:r>
-              <a:rPr lang="en-US" sz="1350" b="1" dirty="0">
-                <a:solidFill>
-                  <a:srgbClr val="191F28"/>
-                </a:solidFill>
-                <a:latin typeface="Arial" pitchFamily="34" charset="0"/>
-                <a:ea typeface="Arial" pitchFamily="34" charset="-122"/>
-                <a:cs typeface="Arial" pitchFamily="34" charset="-120"/>
-              </a:rPr>
-              <a:t>search_prior_art(grant proposal review)</a:t>
-            </a:r>
-            <a:endParaRPr lang="en-US" sz="1350" dirty="0"/>
-          </a:p>
-          <a:p>
-            <a:pPr indent="0" marL="0">
-              <a:lnSpc>
-                <a:spcPct val="135000"/>
-              </a:lnSpc>
-              <a:buNone/>
-            </a:pPr>
-            <a:r>
-              <a:rPr lang="en-US" sz="1350" b="1" dirty="0">
-                <a:solidFill>
-                  <a:srgbClr val="1B64DA"/>
-                </a:solidFill>
-                <a:latin typeface="Arial" pitchFamily="34" charset="0"/>
-                <a:ea typeface="Arial" pitchFamily="34" charset="-122"/>
-                <a:cs typeface="Arial" pitchFamily="34" charset="-120"/>
-              </a:rPr>
-              <a:t>→ 논문 3편</a:t>
-            </a:r>
-            <a:endParaRPr lang="en-US" sz="1350" dirty="0"/>
           </a:p>
         </p:txBody>
       </p:sp>
@@ -10826,7 +13225,7 @@
                 <a:ea typeface="Arial" pitchFamily="34" charset="-122"/>
                 <a:cs typeface="Arial" pitchFamily="34" charset="-120"/>
               </a:rPr>
-              <a:t>측정</a:t>
+              <a:t>MCP 도구</a:t>
             </a:r>
             <a:endParaRPr lang="en-US" sz="1400" dirty="0"/>
           </a:p>
@@ -10868,7 +13267,7 @@
                 <a:ea typeface="Arial" pitchFamily="34" charset="-122"/>
                 <a:cs typeface="Arial" pitchFamily="34" charset="-120"/>
               </a:rPr>
-              <a:t>처음 보는 공고로도,</a:t>
+              <a:t>같은 검사 도구를,</a:t>
             </a:r>
             <a:endParaRPr lang="en-US" sz="3400" dirty="0"/>
           </a:p>
@@ -10888,7 +13287,7 @@
                 <a:ea typeface="Arial" pitchFamily="34" charset="-122"/>
                 <a:cs typeface="Arial" pitchFamily="34" charset="-120"/>
               </a:rPr>
-              <a:t>직접</a:t>
+              <a:t>다른 AI 비서</a:t>
             </a:r>
             <a:pPr indent="0" marL="0">
               <a:lnSpc>
@@ -10905,7 +13304,7 @@
                 <a:ea typeface="Arial" pitchFamily="34" charset="-122"/>
                 <a:cs typeface="Arial" pitchFamily="34" charset="-120"/>
               </a:rPr>
-              <a:t> 쟀습니다</a:t>
+              <a:t>도 씁니다</a:t>
             </a:r>
             <a:endParaRPr lang="en-US" sz="3400" dirty="0"/>
           </a:p>
@@ -10919,34 +13318,34 @@
         </p:nvSpPr>
         <p:spPr>
           <a:xfrm>
-            <a:off x="822960" y="2606040"/>
-            <a:ext cx="5486400" cy="274320"/>
-          </a:xfrm>
-          <a:prstGeom prst="rect">
-            <a:avLst/>
-          </a:prstGeom>
-          <a:noFill/>
-          <a:ln/>
-        </p:spPr>
-        <p:txBody>
-          <a:bodyPr wrap="square" lIns="0" tIns="0" rIns="0" bIns="0" rtlCol="0" anchor="t"/>
-          <a:lstStyle/>
-          <a:p>
-            <a:pPr indent="0" marL="0">
-              <a:buNone/>
-            </a:pPr>
-            <a:r>
-              <a:rPr lang="en-US" sz="1300" b="1" dirty="0">
-                <a:solidFill>
-                  <a:srgbClr val="4E5968"/>
-                </a:solidFill>
-                <a:latin typeface="Arial" pitchFamily="34" charset="0"/>
-                <a:ea typeface="Arial" pitchFamily="34" charset="-122"/>
-                <a:cs typeface="Arial" pitchFamily="34" charset="-120"/>
-              </a:rPr>
-              <a:t>요건을 놓치지 않은 비율</a:t>
-            </a:r>
-            <a:endParaRPr lang="en-US" sz="1300" dirty="0"/>
+            <a:off x="822960" y="2715768"/>
+            <a:ext cx="548640" cy="365760"/>
+          </a:xfrm>
+          <a:prstGeom prst="rect">
+            <a:avLst/>
+          </a:prstGeom>
+          <a:noFill/>
+          <a:ln/>
+        </p:spPr>
+        <p:txBody>
+          <a:bodyPr wrap="square" lIns="0" tIns="0" rIns="0" bIns="0" rtlCol="0" anchor="t"/>
+          <a:lstStyle/>
+          <a:p>
+            <a:pPr indent="0" marL="0">
+              <a:buNone/>
+            </a:pPr>
+            <a:r>
+              <a:rPr lang="en-US" sz="1800" b="1" dirty="0">
+                <a:solidFill>
+                  <a:srgbClr val="3182F6"/>
+                </a:solidFill>
+                <a:latin typeface="Arial" pitchFamily="34" charset="0"/>
+                <a:ea typeface="Arial" pitchFamily="34" charset="-122"/>
+                <a:cs typeface="Arial" pitchFamily="34" charset="-120"/>
+              </a:rPr>
+              <a:t>01</a:t>
+            </a:r>
+            <a:endParaRPr lang="en-US" sz="1800" dirty="0"/>
           </a:p>
         </p:txBody>
       </p:sp>
@@ -10958,24 +13357,24 @@
         </p:nvSpPr>
         <p:spPr>
           <a:xfrm>
-            <a:off x="822960" y="2971800"/>
-            <a:ext cx="3108960" cy="310896"/>
-          </a:xfrm>
-          <a:prstGeom prst="rect">
-            <a:avLst/>
-          </a:prstGeom>
-          <a:noFill/>
-          <a:ln/>
-        </p:spPr>
-        <p:txBody>
-          <a:bodyPr wrap="square" lIns="0" tIns="0" rIns="0" bIns="0" rtlCol="0" anchor="t"/>
-          <a:lstStyle/>
-          <a:p>
-            <a:pPr indent="0" marL="0">
-              <a:buNone/>
-            </a:pPr>
-            <a:r>
-              <a:rPr lang="en-US" sz="1400" dirty="0">
+            <a:off x="1463040" y="2697480"/>
+            <a:ext cx="5029200" cy="384048"/>
+          </a:xfrm>
+          <a:prstGeom prst="rect">
+            <a:avLst/>
+          </a:prstGeom>
+          <a:noFill/>
+          <a:ln/>
+        </p:spPr>
+        <p:txBody>
+          <a:bodyPr wrap="square" lIns="0" tIns="0" rIns="0" bIns="0" rtlCol="0" anchor="t"/>
+          <a:lstStyle/>
+          <a:p>
+            <a:pPr indent="0" marL="0">
+              <a:buNone/>
+            </a:pPr>
+            <a:r>
+              <a:rPr lang="en-US" sz="1800" b="1" dirty="0">
                 <a:solidFill>
                   <a:srgbClr val="191F28"/>
                 </a:solidFill>
@@ -10983,9 +13382,9 @@
                 <a:ea typeface="Arial" pitchFamily="34" charset="-122"/>
                 <a:cs typeface="Arial" pitchFamily="34" charset="-120"/>
               </a:rPr>
-              <a:t>우주항공청</a:t>
-            </a:r>
-            <a:endParaRPr lang="en-US" sz="1400" dirty="0"/>
+              <a:t>search_prior_art</a:t>
+            </a:r>
+            <a:endParaRPr lang="en-US" sz="1800" dirty="0"/>
           </a:p>
         </p:txBody>
       </p:sp>
@@ -10997,24 +13396,24 @@
         </p:nvSpPr>
         <p:spPr>
           <a:xfrm>
-            <a:off x="3931920" y="2999232"/>
-            <a:ext cx="1463040" cy="274320"/>
-          </a:xfrm>
-          <a:prstGeom prst="rect">
-            <a:avLst/>
-          </a:prstGeom>
-          <a:noFill/>
-          <a:ln/>
-        </p:spPr>
-        <p:txBody>
-          <a:bodyPr wrap="square" lIns="0" tIns="0" rIns="0" bIns="0" rtlCol="0" anchor="t"/>
-          <a:lstStyle/>
-          <a:p>
-            <a:pPr indent="0" marL="0">
-              <a:buNone/>
-            </a:pPr>
-            <a:r>
-              <a:rPr lang="en-US" sz="1100" dirty="0">
+            <a:off x="1463040" y="3108960"/>
+            <a:ext cx="5029200" cy="365760"/>
+          </a:xfrm>
+          <a:prstGeom prst="rect">
+            <a:avLst/>
+          </a:prstGeom>
+          <a:noFill/>
+          <a:ln/>
+        </p:spPr>
+        <p:txBody>
+          <a:bodyPr wrap="square" lIns="0" tIns="0" rIns="0" bIns="0" rtlCol="0" anchor="t"/>
+          <a:lstStyle/>
+          <a:p>
+            <a:pPr indent="0" marL="0">
+              <a:buNone/>
+            </a:pPr>
+            <a:r>
+              <a:rPr lang="en-US" sz="1250" dirty="0">
                 <a:solidFill>
                   <a:srgbClr val="8B95A1"/>
                 </a:solidFill>
@@ -11022,9 +13421,9 @@
                 <a:ea typeface="Arial" pitchFamily="34" charset="-122"/>
                 <a:cs typeface="Arial" pitchFamily="34" charset="-120"/>
               </a:rPr>
-              <a:t>개발에 쓴 공고</a:t>
-            </a:r>
-            <a:endParaRPr lang="en-US" sz="1100" dirty="0"/>
+              <a:t>학술 DB에서 선행연구를 찾습니다. OpenAlex가 막히면 Crossref로 넘어갑니다</a:t>
+            </a:r>
+            <a:endParaRPr lang="en-US" sz="1250" dirty="0"/>
           </a:p>
         </p:txBody>
       </p:sp>
@@ -11036,24 +13435,63 @@
         </p:nvSpPr>
         <p:spPr>
           <a:xfrm>
-            <a:off x="5394960" y="2971800"/>
-            <a:ext cx="914400" cy="310896"/>
-          </a:xfrm>
-          <a:prstGeom prst="rect">
-            <a:avLst/>
-          </a:prstGeom>
-          <a:noFill/>
-          <a:ln/>
-        </p:spPr>
-        <p:txBody>
-          <a:bodyPr wrap="square" lIns="0" tIns="0" rIns="0" bIns="0" rtlCol="0" anchor="t"/>
-          <a:lstStyle/>
-          <a:p>
-            <a:pPr algn="r" indent="0" marL="0">
-              <a:buNone/>
-            </a:pPr>
-            <a:r>
-              <a:rPr lang="en-US" sz="1600" b="1" dirty="0">
+            <a:off x="822960" y="3721608"/>
+            <a:ext cx="548640" cy="365760"/>
+          </a:xfrm>
+          <a:prstGeom prst="rect">
+            <a:avLst/>
+          </a:prstGeom>
+          <a:noFill/>
+          <a:ln/>
+        </p:spPr>
+        <p:txBody>
+          <a:bodyPr wrap="square" lIns="0" tIns="0" rIns="0" bIns="0" rtlCol="0" anchor="t"/>
+          <a:lstStyle/>
+          <a:p>
+            <a:pPr indent="0" marL="0">
+              <a:buNone/>
+            </a:pPr>
+            <a:r>
+              <a:rPr lang="en-US" sz="1800" b="1" dirty="0">
+                <a:solidFill>
+                  <a:srgbClr val="3182F6"/>
+                </a:solidFill>
+                <a:latin typeface="Arial" pitchFamily="34" charset="0"/>
+                <a:ea typeface="Arial" pitchFamily="34" charset="-122"/>
+                <a:cs typeface="Arial" pitchFamily="34" charset="-120"/>
+              </a:rPr>
+              <a:t>02</a:t>
+            </a:r>
+            <a:endParaRPr lang="en-US" sz="1800" dirty="0"/>
+          </a:p>
+        </p:txBody>
+      </p:sp>
+      <p:sp>
+        <p:nvSpPr>
+          <p:cNvPr id="8" name="Text 6"/>
+          <p:cNvSpPr/>
+          <p:nvPr/>
+        </p:nvSpPr>
+        <p:spPr>
+          <a:xfrm>
+            <a:off x="1463040" y="3703320"/>
+            <a:ext cx="5029200" cy="384048"/>
+          </a:xfrm>
+          <a:prstGeom prst="rect">
+            <a:avLst/>
+          </a:prstGeom>
+          <a:noFill/>
+          <a:ln/>
+        </p:spPr>
+        <p:txBody>
+          <a:bodyPr wrap="square" lIns="0" tIns="0" rIns="0" bIns="0" rtlCol="0" anchor="t"/>
+          <a:lstStyle/>
+          <a:p>
+            <a:pPr indent="0" marL="0">
+              <a:buNone/>
+            </a:pPr>
+            <a:r>
+              <a:rPr lang="en-US" sz="1800" b="1" dirty="0">
                 <a:solidFill>
                   <a:srgbClr val="191F28"/>
                 </a:solidFill>
@@ -11061,38 +13499,116 @@
                 <a:ea typeface="Arial" pitchFamily="34" charset="-122"/>
                 <a:cs typeface="Arial" pitchFamily="34" charset="-120"/>
               </a:rPr>
-              <a:t>85%</a:t>
-            </a:r>
-            <a:endParaRPr lang="en-US" sz="1600" dirty="0"/>
-          </a:p>
-        </p:txBody>
-      </p:sp>
-      <p:sp>
-        <p:nvSpPr>
-          <p:cNvPr id="8" name="Text 6"/>
-          <p:cNvSpPr/>
-          <p:nvPr/>
-        </p:nvSpPr>
-        <p:spPr>
-          <a:xfrm>
-            <a:off x="822960" y="3392424"/>
-            <a:ext cx="3108960" cy="310896"/>
-          </a:xfrm>
-          <a:prstGeom prst="rect">
-            <a:avLst/>
-          </a:prstGeom>
-          <a:noFill/>
-          <a:ln/>
-        </p:spPr>
-        <p:txBody>
-          <a:bodyPr wrap="square" lIns="0" tIns="0" rIns="0" bIns="0" rtlCol="0" anchor="t"/>
-          <a:lstStyle/>
-          <a:p>
-            <a:pPr indent="0" marL="0">
-              <a:buNone/>
-            </a:pPr>
-            <a:r>
-              <a:rPr lang="en-US" sz="1400" dirty="0">
+              <a:t>check_quote</a:t>
+            </a:r>
+            <a:endParaRPr lang="en-US" sz="1800" dirty="0"/>
+          </a:p>
+        </p:txBody>
+      </p:sp>
+      <p:sp>
+        <p:nvSpPr>
+          <p:cNvPr id="9" name="Text 7"/>
+          <p:cNvSpPr/>
+          <p:nvPr/>
+        </p:nvSpPr>
+        <p:spPr>
+          <a:xfrm>
+            <a:off x="1463040" y="4114800"/>
+            <a:ext cx="5029200" cy="365760"/>
+          </a:xfrm>
+          <a:prstGeom prst="rect">
+            <a:avLst/>
+          </a:prstGeom>
+          <a:noFill/>
+          <a:ln/>
+        </p:spPr>
+        <p:txBody>
+          <a:bodyPr wrap="square" lIns="0" tIns="0" rIns="0" bIns="0" rtlCol="0" anchor="t"/>
+          <a:lstStyle/>
+          <a:p>
+            <a:pPr indent="0" marL="0">
+              <a:buNone/>
+            </a:pPr>
+            <a:r>
+              <a:rPr lang="en-US" sz="1250" dirty="0">
+                <a:solidFill>
+                  <a:srgbClr val="8B95A1"/>
+                </a:solidFill>
+                <a:latin typeface="Arial" pitchFamily="34" charset="0"/>
+                <a:ea typeface="Arial" pitchFamily="34" charset="-122"/>
+                <a:cs typeface="Arial" pitchFamily="34" charset="-120"/>
+              </a:rPr>
+              <a:t>인용이 원문에 있는지 참, 거짓으로 답합니다</a:t>
+            </a:r>
+            <a:endParaRPr lang="en-US" sz="1250" dirty="0"/>
+          </a:p>
+        </p:txBody>
+      </p:sp>
+      <p:sp>
+        <p:nvSpPr>
+          <p:cNvPr id="10" name="Text 8"/>
+          <p:cNvSpPr/>
+          <p:nvPr/>
+        </p:nvSpPr>
+        <p:spPr>
+          <a:xfrm>
+            <a:off x="822960" y="4727448"/>
+            <a:ext cx="548640" cy="365760"/>
+          </a:xfrm>
+          <a:prstGeom prst="rect">
+            <a:avLst/>
+          </a:prstGeom>
+          <a:noFill/>
+          <a:ln/>
+        </p:spPr>
+        <p:txBody>
+          <a:bodyPr wrap="square" lIns="0" tIns="0" rIns="0" bIns="0" rtlCol="0" anchor="t"/>
+          <a:lstStyle/>
+          <a:p>
+            <a:pPr indent="0" marL="0">
+              <a:buNone/>
+            </a:pPr>
+            <a:r>
+              <a:rPr lang="en-US" sz="1800" b="1" dirty="0">
+                <a:solidFill>
+                  <a:srgbClr val="3182F6"/>
+                </a:solidFill>
+                <a:latin typeface="Arial" pitchFamily="34" charset="0"/>
+                <a:ea typeface="Arial" pitchFamily="34" charset="-122"/>
+                <a:cs typeface="Arial" pitchFamily="34" charset="-120"/>
+              </a:rPr>
+              <a:t>03</a:t>
+            </a:r>
+            <a:endParaRPr lang="en-US" sz="1800" dirty="0"/>
+          </a:p>
+        </p:txBody>
+      </p:sp>
+      <p:sp>
+        <p:nvSpPr>
+          <p:cNvPr id="11" name="Text 9"/>
+          <p:cNvSpPr/>
+          <p:nvPr/>
+        </p:nvSpPr>
+        <p:spPr>
+          <a:xfrm>
+            <a:off x="1463040" y="4709160"/>
+            <a:ext cx="5029200" cy="384048"/>
+          </a:xfrm>
+          <a:prstGeom prst="rect">
+            <a:avLst/>
+          </a:prstGeom>
+          <a:noFill/>
+          <a:ln/>
+        </p:spPr>
+        <p:txBody>
+          <a:bodyPr wrap="square" lIns="0" tIns="0" rIns="0" bIns="0" rtlCol="0" anchor="t"/>
+          <a:lstStyle/>
+          <a:p>
+            <a:pPr indent="0" marL="0">
+              <a:buNone/>
+            </a:pPr>
+            <a:r>
+              <a:rPr lang="en-US" sz="1800" b="1" dirty="0">
                 <a:solidFill>
                   <a:srgbClr val="191F28"/>
                 </a:solidFill>
@@ -11100,38 +13616,38 @@
                 <a:ea typeface="Arial" pitchFamily="34" charset="-122"/>
                 <a:cs typeface="Arial" pitchFamily="34" charset="-120"/>
               </a:rPr>
-              <a:t>산업통상부</a:t>
-            </a:r>
-            <a:endParaRPr lang="en-US" sz="1400" dirty="0"/>
-          </a:p>
-        </p:txBody>
-      </p:sp>
-      <p:sp>
-        <p:nvSpPr>
-          <p:cNvPr id="9" name="Text 7"/>
-          <p:cNvSpPr/>
-          <p:nvPr/>
-        </p:nvSpPr>
-        <p:spPr>
-          <a:xfrm>
-            <a:off x="3931920" y="3419856"/>
-            <a:ext cx="1463040" cy="274320"/>
-          </a:xfrm>
-          <a:prstGeom prst="rect">
-            <a:avLst/>
-          </a:prstGeom>
-          <a:noFill/>
-          <a:ln/>
-        </p:spPr>
-        <p:txBody>
-          <a:bodyPr wrap="square" lIns="0" tIns="0" rIns="0" bIns="0" rtlCol="0" anchor="t"/>
-          <a:lstStyle/>
-          <a:p>
-            <a:pPr indent="0" marL="0">
-              <a:buNone/>
-            </a:pPr>
-            <a:r>
-              <a:rPr lang="en-US" sz="1100" dirty="0">
+              <a:t>왜 도구로 감쌌나</a:t>
+            </a:r>
+            <a:endParaRPr lang="en-US" sz="1800" dirty="0"/>
+          </a:p>
+        </p:txBody>
+      </p:sp>
+      <p:sp>
+        <p:nvSpPr>
+          <p:cNvPr id="12" name="Text 10"/>
+          <p:cNvSpPr/>
+          <p:nvPr/>
+        </p:nvSpPr>
+        <p:spPr>
+          <a:xfrm>
+            <a:off x="1463040" y="5120640"/>
+            <a:ext cx="5029200" cy="365760"/>
+          </a:xfrm>
+          <a:prstGeom prst="rect">
+            <a:avLst/>
+          </a:prstGeom>
+          <a:noFill/>
+          <a:ln/>
+        </p:spPr>
+        <p:txBody>
+          <a:bodyPr wrap="square" lIns="0" tIns="0" rIns="0" bIns="0" rtlCol="0" anchor="t"/>
+          <a:lstStyle/>
+          <a:p>
+            <a:pPr indent="0" marL="0">
+              <a:buNone/>
+            </a:pPr>
+            <a:r>
+              <a:rPr lang="en-US" sz="1250" dirty="0">
                 <a:solidFill>
                   <a:srgbClr val="8B95A1"/>
                 </a:solidFill>
@@ -11139,502 +13655,34 @@
                 <a:ea typeface="Arial" pitchFamily="34" charset="-122"/>
                 <a:cs typeface="Arial" pitchFamily="34" charset="-120"/>
               </a:rPr>
-              <a:t>개발에 쓴 공고</a:t>
-            </a:r>
-            <a:endParaRPr lang="en-US" sz="1100" dirty="0"/>
-          </a:p>
-        </p:txBody>
-      </p:sp>
-      <p:sp>
-        <p:nvSpPr>
-          <p:cNvPr id="10" name="Text 8"/>
-          <p:cNvSpPr/>
-          <p:nvPr/>
-        </p:nvSpPr>
-        <p:spPr>
-          <a:xfrm>
-            <a:off x="5394960" y="3392424"/>
-            <a:ext cx="914400" cy="310896"/>
-          </a:xfrm>
-          <a:prstGeom prst="rect">
-            <a:avLst/>
-          </a:prstGeom>
-          <a:noFill/>
-          <a:ln/>
-        </p:spPr>
-        <p:txBody>
-          <a:bodyPr wrap="square" lIns="0" tIns="0" rIns="0" bIns="0" rtlCol="0" anchor="t"/>
-          <a:lstStyle/>
-          <a:p>
-            <a:pPr algn="r" indent="0" marL="0">
-              <a:buNone/>
-            </a:pPr>
-            <a:r>
-              <a:rPr lang="en-US" sz="1600" b="1" dirty="0">
-                <a:solidFill>
-                  <a:srgbClr val="191F28"/>
-                </a:solidFill>
-                <a:latin typeface="Arial" pitchFamily="34" charset="0"/>
-                <a:ea typeface="Arial" pitchFamily="34" charset="-122"/>
-                <a:cs typeface="Arial" pitchFamily="34" charset="-120"/>
-              </a:rPr>
-              <a:t>93%</a:t>
-            </a:r>
-            <a:endParaRPr lang="en-US" sz="1600" dirty="0"/>
-          </a:p>
-        </p:txBody>
-      </p:sp>
-      <p:sp>
-        <p:nvSpPr>
-          <p:cNvPr id="11" name="Text 9"/>
-          <p:cNvSpPr/>
-          <p:nvPr/>
-        </p:nvSpPr>
-        <p:spPr>
-          <a:xfrm>
-            <a:off x="822960" y="3813048"/>
-            <a:ext cx="3108960" cy="310896"/>
-          </a:xfrm>
-          <a:prstGeom prst="rect">
-            <a:avLst/>
-          </a:prstGeom>
-          <a:noFill/>
-          <a:ln/>
-        </p:spPr>
-        <p:txBody>
-          <a:bodyPr wrap="square" lIns="0" tIns="0" rIns="0" bIns="0" rtlCol="0" anchor="t"/>
-          <a:lstStyle/>
-          <a:p>
-            <a:pPr indent="0" marL="0">
-              <a:buNone/>
-            </a:pPr>
-            <a:r>
-              <a:rPr lang="en-US" sz="1400" dirty="0">
-                <a:solidFill>
-                  <a:srgbClr val="191F28"/>
-                </a:solidFill>
-                <a:latin typeface="Arial" pitchFamily="34" charset="0"/>
-                <a:ea typeface="Arial" pitchFamily="34" charset="-122"/>
-                <a:cs typeface="Arial" pitchFamily="34" charset="-120"/>
-              </a:rPr>
-              <a:t>NAIS 해커톤</a:t>
-            </a:r>
-            <a:endParaRPr lang="en-US" sz="1400" dirty="0"/>
-          </a:p>
-        </p:txBody>
-      </p:sp>
-      <p:sp>
-        <p:nvSpPr>
-          <p:cNvPr id="12" name="Text 10"/>
-          <p:cNvSpPr/>
-          <p:nvPr/>
-        </p:nvSpPr>
-        <p:spPr>
-          <a:xfrm>
-            <a:off x="3931920" y="3840480"/>
-            <a:ext cx="1463040" cy="274320"/>
-          </a:xfrm>
-          <a:prstGeom prst="rect">
-            <a:avLst/>
-          </a:prstGeom>
-          <a:noFill/>
-          <a:ln/>
-        </p:spPr>
-        <p:txBody>
-          <a:bodyPr wrap="square" lIns="0" tIns="0" rIns="0" bIns="0" rtlCol="0" anchor="t"/>
-          <a:lstStyle/>
-          <a:p>
-            <a:pPr indent="0" marL="0">
-              <a:buNone/>
-            </a:pPr>
-            <a:r>
-              <a:rPr lang="en-US" sz="1100" dirty="0">
-                <a:solidFill>
-                  <a:srgbClr val="8B95A1"/>
-                </a:solidFill>
-                <a:latin typeface="Arial" pitchFamily="34" charset="0"/>
-                <a:ea typeface="Arial" pitchFamily="34" charset="-122"/>
-                <a:cs typeface="Arial" pitchFamily="34" charset="-120"/>
-              </a:rPr>
-              <a:t>개발에 쓴 공고</a:t>
-            </a:r>
-            <a:endParaRPr lang="en-US" sz="1100" dirty="0"/>
-          </a:p>
-        </p:txBody>
-      </p:sp>
-      <p:sp>
-        <p:nvSpPr>
-          <p:cNvPr id="13" name="Text 11"/>
-          <p:cNvSpPr/>
-          <p:nvPr/>
-        </p:nvSpPr>
-        <p:spPr>
-          <a:xfrm>
-            <a:off x="5394960" y="3813048"/>
-            <a:ext cx="914400" cy="310896"/>
-          </a:xfrm>
-          <a:prstGeom prst="rect">
-            <a:avLst/>
-          </a:prstGeom>
-          <a:noFill/>
-          <a:ln/>
-        </p:spPr>
-        <p:txBody>
-          <a:bodyPr wrap="square" lIns="0" tIns="0" rIns="0" bIns="0" rtlCol="0" anchor="t"/>
-          <a:lstStyle/>
-          <a:p>
-            <a:pPr algn="r" indent="0" marL="0">
-              <a:buNone/>
-            </a:pPr>
-            <a:r>
-              <a:rPr lang="en-US" sz="1600" b="1" dirty="0">
-                <a:solidFill>
-                  <a:srgbClr val="191F28"/>
-                </a:solidFill>
-                <a:latin typeface="Arial" pitchFamily="34" charset="0"/>
-                <a:ea typeface="Arial" pitchFamily="34" charset="-122"/>
-                <a:cs typeface="Arial" pitchFamily="34" charset="-120"/>
-              </a:rPr>
-              <a:t>87%</a:t>
-            </a:r>
-            <a:endParaRPr lang="en-US" sz="1600" dirty="0"/>
-          </a:p>
-        </p:txBody>
-      </p:sp>
-      <p:sp>
-        <p:nvSpPr>
-          <p:cNvPr id="14" name="Text 12"/>
-          <p:cNvSpPr/>
-          <p:nvPr/>
-        </p:nvSpPr>
-        <p:spPr>
-          <a:xfrm>
-            <a:off x="822960" y="4233672"/>
-            <a:ext cx="3108960" cy="310896"/>
-          </a:xfrm>
-          <a:prstGeom prst="rect">
-            <a:avLst/>
-          </a:prstGeom>
-          <a:noFill/>
-          <a:ln/>
-        </p:spPr>
-        <p:txBody>
-          <a:bodyPr wrap="square" lIns="0" tIns="0" rIns="0" bIns="0" rtlCol="0" anchor="t"/>
-          <a:lstStyle/>
-          <a:p>
-            <a:pPr indent="0" marL="0">
-              <a:buNone/>
-            </a:pPr>
-            <a:r>
-              <a:rPr lang="en-US" sz="1400" b="1" dirty="0">
-                <a:solidFill>
-                  <a:srgbClr val="1B64DA"/>
-                </a:solidFill>
-                <a:latin typeface="Arial" pitchFamily="34" charset="0"/>
-                <a:ea typeface="Arial" pitchFamily="34" charset="-122"/>
-                <a:cs typeface="Arial" pitchFamily="34" charset="-120"/>
-              </a:rPr>
-              <a:t>과기정통부 국가과학자</a:t>
-            </a:r>
-            <a:endParaRPr lang="en-US" sz="1400" dirty="0"/>
-          </a:p>
-        </p:txBody>
-      </p:sp>
-      <p:sp>
-        <p:nvSpPr>
-          <p:cNvPr id="15" name="Text 13"/>
-          <p:cNvSpPr/>
-          <p:nvPr/>
-        </p:nvSpPr>
-        <p:spPr>
-          <a:xfrm>
-            <a:off x="3931920" y="4261104"/>
-            <a:ext cx="1463040" cy="274320"/>
-          </a:xfrm>
-          <a:prstGeom prst="rect">
-            <a:avLst/>
-          </a:prstGeom>
-          <a:noFill/>
-          <a:ln/>
-        </p:spPr>
-        <p:txBody>
-          <a:bodyPr wrap="square" lIns="0" tIns="0" rIns="0" bIns="0" rtlCol="0" anchor="t"/>
-          <a:lstStyle/>
-          <a:p>
-            <a:pPr indent="0" marL="0">
-              <a:buNone/>
-            </a:pPr>
-            <a:r>
-              <a:rPr lang="en-US" sz="1100" dirty="0">
-                <a:solidFill>
-                  <a:srgbClr val="8B95A1"/>
-                </a:solidFill>
-                <a:latin typeface="Arial" pitchFamily="34" charset="0"/>
-                <a:ea typeface="Arial" pitchFamily="34" charset="-122"/>
-                <a:cs typeface="Arial" pitchFamily="34" charset="-120"/>
-              </a:rPr>
-              <a:t>처음 보는 공고</a:t>
-            </a:r>
-            <a:endParaRPr lang="en-US" sz="1100" dirty="0"/>
-          </a:p>
-        </p:txBody>
-      </p:sp>
-      <p:sp>
-        <p:nvSpPr>
-          <p:cNvPr id="16" name="Text 14"/>
-          <p:cNvSpPr/>
-          <p:nvPr/>
-        </p:nvSpPr>
-        <p:spPr>
-          <a:xfrm>
-            <a:off x="5394960" y="4233672"/>
-            <a:ext cx="914400" cy="310896"/>
-          </a:xfrm>
-          <a:prstGeom prst="rect">
-            <a:avLst/>
-          </a:prstGeom>
-          <a:noFill/>
-          <a:ln/>
-        </p:spPr>
-        <p:txBody>
-          <a:bodyPr wrap="square" lIns="0" tIns="0" rIns="0" bIns="0" rtlCol="0" anchor="t"/>
-          <a:lstStyle/>
-          <a:p>
-            <a:pPr algn="r" indent="0" marL="0">
-              <a:buNone/>
-            </a:pPr>
-            <a:r>
-              <a:rPr lang="en-US" sz="1600" b="1" dirty="0">
-                <a:solidFill>
-                  <a:srgbClr val="1B64DA"/>
-                </a:solidFill>
-                <a:latin typeface="Arial" pitchFamily="34" charset="0"/>
-                <a:ea typeface="Arial" pitchFamily="34" charset="-122"/>
-                <a:cs typeface="Arial" pitchFamily="34" charset="-120"/>
-              </a:rPr>
-              <a:t>94%</a:t>
-            </a:r>
-            <a:endParaRPr lang="en-US" sz="1600" dirty="0"/>
-          </a:p>
-        </p:txBody>
-      </p:sp>
-      <p:sp>
-        <p:nvSpPr>
-          <p:cNvPr id="17" name="Text 15"/>
-          <p:cNvSpPr/>
-          <p:nvPr/>
-        </p:nvSpPr>
-        <p:spPr>
-          <a:xfrm>
-            <a:off x="822960" y="4654296"/>
-            <a:ext cx="3108960" cy="310896"/>
-          </a:xfrm>
-          <a:prstGeom prst="rect">
-            <a:avLst/>
-          </a:prstGeom>
-          <a:noFill/>
-          <a:ln/>
-        </p:spPr>
-        <p:txBody>
-          <a:bodyPr wrap="square" lIns="0" tIns="0" rIns="0" bIns="0" rtlCol="0" anchor="t"/>
-          <a:lstStyle/>
-          <a:p>
-            <a:pPr indent="0" marL="0">
-              <a:buNone/>
-            </a:pPr>
-            <a:r>
-              <a:rPr lang="en-US" sz="1400" b="1" dirty="0">
-                <a:solidFill>
-                  <a:srgbClr val="1B64DA"/>
-                </a:solidFill>
-                <a:latin typeface="Arial" pitchFamily="34" charset="0"/>
-                <a:ea typeface="Arial" pitchFamily="34" charset="-122"/>
-                <a:cs typeface="Arial" pitchFamily="34" charset="-120"/>
-              </a:rPr>
-              <a:t>과기정통부 라이징스타</a:t>
-            </a:r>
-            <a:endParaRPr lang="en-US" sz="1400" dirty="0"/>
-          </a:p>
-        </p:txBody>
-      </p:sp>
-      <p:sp>
-        <p:nvSpPr>
-          <p:cNvPr id="18" name="Text 16"/>
-          <p:cNvSpPr/>
-          <p:nvPr/>
-        </p:nvSpPr>
-        <p:spPr>
-          <a:xfrm>
-            <a:off x="3931920" y="4681728"/>
-            <a:ext cx="1463040" cy="274320"/>
-          </a:xfrm>
-          <a:prstGeom prst="rect">
-            <a:avLst/>
-          </a:prstGeom>
-          <a:noFill/>
-          <a:ln/>
-        </p:spPr>
-        <p:txBody>
-          <a:bodyPr wrap="square" lIns="0" tIns="0" rIns="0" bIns="0" rtlCol="0" anchor="t"/>
-          <a:lstStyle/>
-          <a:p>
-            <a:pPr indent="0" marL="0">
-              <a:buNone/>
-            </a:pPr>
-            <a:r>
-              <a:rPr lang="en-US" sz="1100" dirty="0">
-                <a:solidFill>
-                  <a:srgbClr val="8B95A1"/>
-                </a:solidFill>
-                <a:latin typeface="Arial" pitchFamily="34" charset="0"/>
-                <a:ea typeface="Arial" pitchFamily="34" charset="-122"/>
-                <a:cs typeface="Arial" pitchFamily="34" charset="-120"/>
-              </a:rPr>
-              <a:t>처음 보는 공고</a:t>
-            </a:r>
-            <a:endParaRPr lang="en-US" sz="1100" dirty="0"/>
-          </a:p>
-        </p:txBody>
-      </p:sp>
-      <p:sp>
-        <p:nvSpPr>
-          <p:cNvPr id="19" name="Text 17"/>
-          <p:cNvSpPr/>
-          <p:nvPr/>
-        </p:nvSpPr>
-        <p:spPr>
-          <a:xfrm>
-            <a:off x="5394960" y="4654296"/>
-            <a:ext cx="914400" cy="310896"/>
-          </a:xfrm>
-          <a:prstGeom prst="rect">
-            <a:avLst/>
-          </a:prstGeom>
-          <a:noFill/>
-          <a:ln/>
-        </p:spPr>
-        <p:txBody>
-          <a:bodyPr wrap="square" lIns="0" tIns="0" rIns="0" bIns="0" rtlCol="0" anchor="t"/>
-          <a:lstStyle/>
-          <a:p>
-            <a:pPr algn="r" indent="0" marL="0">
-              <a:buNone/>
-            </a:pPr>
-            <a:r>
-              <a:rPr lang="en-US" sz="1600" b="1" dirty="0">
-                <a:solidFill>
-                  <a:srgbClr val="1B64DA"/>
-                </a:solidFill>
-                <a:latin typeface="Arial" pitchFamily="34" charset="0"/>
-                <a:ea typeface="Arial" pitchFamily="34" charset="-122"/>
-                <a:cs typeface="Arial" pitchFamily="34" charset="-120"/>
-              </a:rPr>
-              <a:t>78%</a:t>
-            </a:r>
-            <a:endParaRPr lang="en-US" sz="1600" dirty="0"/>
-          </a:p>
-        </p:txBody>
-      </p:sp>
-      <p:sp>
-        <p:nvSpPr>
-          <p:cNvPr id="20" name="Text 18"/>
-          <p:cNvSpPr/>
-          <p:nvPr/>
-        </p:nvSpPr>
-        <p:spPr>
-          <a:xfrm>
-            <a:off x="822960" y="5120640"/>
-            <a:ext cx="5486400" cy="274320"/>
-          </a:xfrm>
-          <a:prstGeom prst="rect">
-            <a:avLst/>
-          </a:prstGeom>
-          <a:noFill/>
-          <a:ln/>
-        </p:spPr>
-        <p:txBody>
-          <a:bodyPr wrap="square" lIns="0" tIns="0" rIns="0" bIns="0" rtlCol="0" anchor="t"/>
-          <a:lstStyle/>
-          <a:p>
-            <a:pPr indent="0" marL="0">
-              <a:buNone/>
-            </a:pPr>
-            <a:r>
-              <a:rPr lang="en-US" sz="1200" dirty="0">
-                <a:solidFill>
-                  <a:srgbClr val="4E5968"/>
-                </a:solidFill>
-                <a:latin typeface="Arial" pitchFamily="34" charset="0"/>
-                <a:ea typeface="Arial" pitchFamily="34" charset="-122"/>
-                <a:cs typeface="Arial" pitchFamily="34" charset="-120"/>
-              </a:rPr>
-              <a:t>심사표 배점은 다섯 건 모두 정확히 뽑았습니다</a:t>
-            </a:r>
-            <a:endParaRPr lang="en-US" sz="1200" dirty="0"/>
-          </a:p>
-        </p:txBody>
-      </p:sp>
-      <p:sp>
-        <p:nvSpPr>
-          <p:cNvPr id="21" name="Text 19"/>
-          <p:cNvSpPr/>
-          <p:nvPr/>
-        </p:nvSpPr>
-        <p:spPr>
-          <a:xfrm>
-            <a:off x="6675120" y="2606040"/>
-            <a:ext cx="4690872" cy="274320"/>
-          </a:xfrm>
-          <a:prstGeom prst="rect">
-            <a:avLst/>
-          </a:prstGeom>
-          <a:noFill/>
-          <a:ln/>
-        </p:spPr>
-        <p:txBody>
-          <a:bodyPr wrap="square" lIns="0" tIns="0" rIns="0" bIns="0" rtlCol="0" anchor="t"/>
-          <a:lstStyle/>
-          <a:p>
-            <a:pPr indent="0" marL="0">
-              <a:buNone/>
-            </a:pPr>
-            <a:r>
-              <a:rPr lang="en-US" sz="1300" b="1" dirty="0">
-                <a:solidFill>
-                  <a:srgbClr val="4E5968"/>
-                </a:solidFill>
-                <a:latin typeface="Arial" pitchFamily="34" charset="0"/>
-                <a:ea typeface="Arial" pitchFamily="34" charset="-122"/>
-                <a:cs typeface="Arial" pitchFamily="34" charset="-120"/>
-              </a:rPr>
-              <a:t>근거를 일부러 지운 초안 5개, 잘못 짚은 곳</a:t>
-            </a:r>
-            <a:endParaRPr lang="en-US" sz="1300" dirty="0"/>
-          </a:p>
-        </p:txBody>
-      </p:sp>
-      <p:sp>
-        <p:nvSpPr>
-          <p:cNvPr id="22" name="Shape 20"/>
-          <p:cNvSpPr/>
-          <p:nvPr/>
-        </p:nvSpPr>
-        <p:spPr>
-          <a:xfrm>
-            <a:off x="6675120" y="2971800"/>
-            <a:ext cx="1472184" cy="1828800"/>
+              <a:t>어젯밤 실험 도중 OpenAlex가 멈췄을 때, 도구 뒤에서 자동으로 바뀌었습니다. 국내 DB도 같은 자리에 꽂으면 됩니다</a:t>
+            </a:r>
+            <a:endParaRPr lang="en-US" sz="1250" dirty="0"/>
+          </a:p>
+        </p:txBody>
+      </p:sp>
+      <p:sp>
+        <p:nvSpPr>
+          <p:cNvPr id="13" name="Shape 11"/>
+          <p:cNvSpPr/>
+          <p:nvPr/>
+        </p:nvSpPr>
+        <p:spPr>
+          <a:xfrm>
+            <a:off x="6903720" y="2606040"/>
+            <a:ext cx="4462272" cy="3291840"/>
           </a:xfrm>
           <a:prstGeom prst="roundRect">
             <a:avLst>
-              <a:gd name="adj" fmla="val 4969"/>
+              <a:gd name="adj" fmla="val 2222"/>
             </a:avLst>
           </a:prstGeom>
           <a:solidFill>
-            <a:srgbClr val="FFFFFF"/>
+            <a:srgbClr val="F4F6F8"/>
           </a:solidFill>
           <a:ln w="12700">
             <a:solidFill>
-              <a:srgbClr val="E5E8EB"/>
+              <a:srgbClr val="F4F6F8"/>
             </a:solidFill>
             <a:prstDash val="solid"/>
           </a:ln>
@@ -11642,30 +13690,72 @@
       </p:sp>
       <p:sp>
         <p:nvSpPr>
-          <p:cNvPr id="23" name="Text 21"/>
-          <p:cNvSpPr/>
-          <p:nvPr/>
-        </p:nvSpPr>
-        <p:spPr>
-          <a:xfrm>
-            <a:off x="6812280" y="3108960"/>
-            <a:ext cx="1197864" cy="274320"/>
-          </a:xfrm>
-          <a:prstGeom prst="rect">
-            <a:avLst/>
-          </a:prstGeom>
-          <a:noFill/>
-          <a:ln/>
-        </p:spPr>
-        <p:txBody>
-          <a:bodyPr wrap="square" lIns="0" tIns="0" rIns="0" bIns="0" rtlCol="0" anchor="t"/>
-          <a:lstStyle/>
-          <a:p>
-            <a:pPr indent="0" marL="0">
-              <a:buNone/>
-            </a:pPr>
-            <a:r>
-              <a:rPr lang="en-US" sz="1200" b="1" dirty="0">
+          <p:cNvPr id="14" name="Text 12"/>
+          <p:cNvSpPr/>
+          <p:nvPr/>
+        </p:nvSpPr>
+        <p:spPr>
+          <a:xfrm>
+            <a:off x="7178040" y="2788920"/>
+            <a:ext cx="3913632" cy="274320"/>
+          </a:xfrm>
+          <a:prstGeom prst="rect">
+            <a:avLst/>
+          </a:prstGeom>
+          <a:noFill/>
+          <a:ln/>
+        </p:spPr>
+        <p:txBody>
+          <a:bodyPr wrap="square" lIns="0" tIns="0" rIns="0" bIns="0" rtlCol="0" anchor="t"/>
+          <a:lstStyle/>
+          <a:p>
+            <a:pPr indent="0" marL="0">
+              <a:buNone/>
+            </a:pPr>
+            <a:r>
+              <a:rPr lang="en-US" sz="1300" b="1" dirty="0">
+                <a:solidFill>
+                  <a:srgbClr val="3182F6"/>
+                </a:solidFill>
+                <a:latin typeface="Arial" pitchFamily="34" charset="0"/>
+                <a:ea typeface="Arial" pitchFamily="34" charset="-122"/>
+                <a:cs typeface="Arial" pitchFamily="34" charset="-120"/>
+              </a:rPr>
+              <a:t>Codex에 붙여서 실제로 호출해 봤습니다</a:t>
+            </a:r>
+            <a:endParaRPr lang="en-US" sz="1300" dirty="0"/>
+          </a:p>
+        </p:txBody>
+      </p:sp>
+      <p:sp>
+        <p:nvSpPr>
+          <p:cNvPr id="15" name="Text 13"/>
+          <p:cNvSpPr/>
+          <p:nvPr/>
+        </p:nvSpPr>
+        <p:spPr>
+          <a:xfrm>
+            <a:off x="7178040" y="3200400"/>
+            <a:ext cx="3913632" cy="2560320"/>
+          </a:xfrm>
+          <a:prstGeom prst="rect">
+            <a:avLst/>
+          </a:prstGeom>
+          <a:noFill/>
+          <a:ln/>
+        </p:spPr>
+        <p:txBody>
+          <a:bodyPr wrap="square" lIns="0" tIns="0" rIns="0" bIns="0" rtlCol="0" anchor="t"/>
+          <a:lstStyle/>
+          <a:p>
+            <a:pPr indent="0" marL="0">
+              <a:lnSpc>
+                <a:spcPct val="135000"/>
+              </a:lnSpc>
+              <a:buNone/>
+            </a:pPr>
+            <a:r>
+              <a:rPr lang="en-US" sz="1350" b="1" dirty="0">
                 <a:solidFill>
                   <a:srgbClr val="191F28"/>
                 </a:solidFill>
@@ -11673,38 +13763,39 @@
                 <a:ea typeface="Arial" pitchFamily="34" charset="-122"/>
                 <a:cs typeface="Arial" pitchFamily="34" charset="-120"/>
               </a:rPr>
-              <a:t>관점 1개</a:t>
-            </a:r>
-            <a:endParaRPr lang="en-US" sz="1200" dirty="0"/>
-          </a:p>
-        </p:txBody>
-      </p:sp>
-      <p:sp>
-        <p:nvSpPr>
-          <p:cNvPr id="24" name="Text 22"/>
-          <p:cNvSpPr/>
-          <p:nvPr/>
-        </p:nvSpPr>
-        <p:spPr>
-          <a:xfrm>
-            <a:off x="6812280" y="3474720"/>
-            <a:ext cx="1197864" cy="731520"/>
-          </a:xfrm>
-          <a:prstGeom prst="rect">
-            <a:avLst/>
-          </a:prstGeom>
-          <a:noFill/>
-          <a:ln/>
-        </p:spPr>
-        <p:txBody>
-          <a:bodyPr wrap="square" lIns="0" tIns="0" rIns="0" bIns="0" rtlCol="0" anchor="t"/>
-          <a:lstStyle/>
-          <a:p>
-            <a:pPr indent="0" marL="0">
-              <a:buNone/>
-            </a:pPr>
-            <a:r>
-              <a:rPr lang="en-US" sz="4200" b="1" dirty="0">
+              <a:t>check_quote(재현율 90% 이상)</a:t>
+            </a:r>
+            <a:endParaRPr lang="en-US" sz="1350" dirty="0"/>
+          </a:p>
+          <a:p>
+            <a:pPr indent="0" marL="0">
+              <a:lnSpc>
+                <a:spcPct val="135000"/>
+              </a:lnSpc>
+              <a:buNone/>
+            </a:pPr>
+            <a:r>
+              <a:rPr lang="en-US" sz="1350" b="1" dirty="0">
+                <a:solidFill>
+                  <a:srgbClr val="1B64DA"/>
+                </a:solidFill>
+                <a:latin typeface="Arial" pitchFamily="34" charset="0"/>
+                <a:ea typeface="Arial" pitchFamily="34" charset="-122"/>
+                <a:cs typeface="Arial" pitchFamily="34" charset="-120"/>
+              </a:rPr>
+              <a:t>→ 참</a:t>
+            </a:r>
+            <a:endParaRPr lang="en-US" sz="1350" dirty="0"/>
+          </a:p>
+          <a:p>
+            <a:pPr indent="0" marL="0">
+              <a:lnSpc>
+                <a:spcPct val="135000"/>
+              </a:lnSpc>
+              <a:buNone/>
+            </a:pPr>
+            <a:r>
+              <a:rPr lang="en-US" sz="1350" b="1" dirty="0">
                 <a:solidFill>
                   <a:srgbClr val="191F28"/>
                 </a:solidFill>
@@ -11712,104 +13803,39 @@
                 <a:ea typeface="Arial" pitchFamily="34" charset="-122"/>
                 <a:cs typeface="Arial" pitchFamily="34" charset="-120"/>
               </a:rPr>
-              <a:t>3</a:t>
-            </a:r>
-            <a:endParaRPr lang="en-US" sz="4200" dirty="0"/>
-          </a:p>
-        </p:txBody>
-      </p:sp>
-      <p:sp>
-        <p:nvSpPr>
-          <p:cNvPr id="25" name="Text 23"/>
-          <p:cNvSpPr/>
-          <p:nvPr/>
-        </p:nvSpPr>
-        <p:spPr>
-          <a:xfrm>
-            <a:off x="6812280" y="4343400"/>
-            <a:ext cx="1197864" cy="274320"/>
-          </a:xfrm>
-          <a:prstGeom prst="rect">
-            <a:avLst/>
-          </a:prstGeom>
-          <a:noFill/>
-          <a:ln/>
-        </p:spPr>
-        <p:txBody>
-          <a:bodyPr wrap="square" lIns="0" tIns="0" rIns="0" bIns="0" rtlCol="0" anchor="t"/>
-          <a:lstStyle/>
-          <a:p>
-            <a:pPr indent="0" marL="0">
-              <a:buNone/>
-            </a:pPr>
-            <a:r>
-              <a:rPr lang="en-US" sz="1100" dirty="0">
-                <a:solidFill>
-                  <a:srgbClr val="4E5968"/>
-                </a:solidFill>
-                <a:latin typeface="Arial" pitchFamily="34" charset="0"/>
-                <a:ea typeface="Arial" pitchFamily="34" charset="-122"/>
-                <a:cs typeface="Arial" pitchFamily="34" charset="-120"/>
-              </a:rPr>
-              <a:t>찾은 곳 5/5</a:t>
-            </a:r>
-            <a:endParaRPr lang="en-US" sz="1100" dirty="0"/>
-          </a:p>
-        </p:txBody>
-      </p:sp>
-      <p:sp>
-        <p:nvSpPr>
-          <p:cNvPr id="26" name="Shape 24"/>
-          <p:cNvSpPr/>
-          <p:nvPr/>
-        </p:nvSpPr>
-        <p:spPr>
-          <a:xfrm>
-            <a:off x="8284464" y="2971800"/>
-            <a:ext cx="1472184" cy="1828800"/>
-          </a:xfrm>
-          <a:prstGeom prst="roundRect">
-            <a:avLst>
-              <a:gd name="adj" fmla="val 4969"/>
-            </a:avLst>
-          </a:prstGeom>
-          <a:solidFill>
-            <a:srgbClr val="EAF3FF"/>
-          </a:solidFill>
-          <a:ln w="12700">
-            <a:solidFill>
-              <a:srgbClr val="3182F6"/>
-            </a:solidFill>
-            <a:prstDash val="solid"/>
-          </a:ln>
-        </p:spPr>
-      </p:sp>
-      <p:sp>
-        <p:nvSpPr>
-          <p:cNvPr id="27" name="Text 25"/>
-          <p:cNvSpPr/>
-          <p:nvPr/>
-        </p:nvSpPr>
-        <p:spPr>
-          <a:xfrm>
-            <a:off x="8421624" y="3108960"/>
-            <a:ext cx="1197864" cy="274320"/>
-          </a:xfrm>
-          <a:prstGeom prst="rect">
-            <a:avLst/>
-          </a:prstGeom>
-          <a:noFill/>
-          <a:ln/>
-        </p:spPr>
-        <p:txBody>
-          <a:bodyPr wrap="square" lIns="0" tIns="0" rIns="0" bIns="0" rtlCol="0" anchor="t"/>
-          <a:lstStyle/>
-          <a:p>
-            <a:pPr indent="0" marL="0">
-              <a:buNone/>
-            </a:pPr>
-            <a:r>
-              <a:rPr lang="en-US" sz="1200" b="1" dirty="0">
+              <a:t>check_quote(정밀도 95% 달성)</a:t>
+            </a:r>
+            <a:endParaRPr lang="en-US" sz="1350" dirty="0"/>
+          </a:p>
+          <a:p>
+            <a:pPr indent="0" marL="0">
+              <a:lnSpc>
+                <a:spcPct val="135000"/>
+              </a:lnSpc>
+              <a:buNone/>
+            </a:pPr>
+            <a:r>
+              <a:rPr lang="en-US" sz="1350" b="1" dirty="0">
+                <a:solidFill>
+                  <a:srgbClr val="1B64DA"/>
+                </a:solidFill>
+                <a:latin typeface="Arial" pitchFamily="34" charset="0"/>
+                <a:ea typeface="Arial" pitchFamily="34" charset="-122"/>
+                <a:cs typeface="Arial" pitchFamily="34" charset="-120"/>
+              </a:rPr>
+              <a:t>→ 거짓(원문에 없음)</a:t>
+            </a:r>
+            <a:endParaRPr lang="en-US" sz="1350" dirty="0"/>
+          </a:p>
+          <a:p>
+            <a:pPr indent="0" marL="0">
+              <a:lnSpc>
+                <a:spcPct val="135000"/>
+              </a:lnSpc>
+              <a:buNone/>
+            </a:pPr>
+            <a:r>
+              <a:rPr lang="en-US" sz="1350" b="1" dirty="0">
                 <a:solidFill>
                   <a:srgbClr val="191F28"/>
                 </a:solidFill>
@@ -11817,38 +13843,19 @@
                 <a:ea typeface="Arial" pitchFamily="34" charset="-122"/>
                 <a:cs typeface="Arial" pitchFamily="34" charset="-120"/>
               </a:rPr>
-              <a:t>관점 6개</a:t>
-            </a:r>
-            <a:endParaRPr lang="en-US" sz="1200" dirty="0"/>
-          </a:p>
-        </p:txBody>
-      </p:sp>
-      <p:sp>
-        <p:nvSpPr>
-          <p:cNvPr id="28" name="Text 26"/>
-          <p:cNvSpPr/>
-          <p:nvPr/>
-        </p:nvSpPr>
-        <p:spPr>
-          <a:xfrm>
-            <a:off x="8421624" y="3474720"/>
-            <a:ext cx="1197864" cy="731520"/>
-          </a:xfrm>
-          <a:prstGeom prst="rect">
-            <a:avLst/>
-          </a:prstGeom>
-          <a:noFill/>
-          <a:ln/>
-        </p:spPr>
-        <p:txBody>
-          <a:bodyPr wrap="square" lIns="0" tIns="0" rIns="0" bIns="0" rtlCol="0" anchor="t"/>
-          <a:lstStyle/>
-          <a:p>
-            <a:pPr indent="0" marL="0">
-              <a:buNone/>
-            </a:pPr>
-            <a:r>
-              <a:rPr lang="en-US" sz="4200" b="1" dirty="0">
+              <a:t>search_prior_art(grant proposal review)</a:t>
+            </a:r>
+            <a:endParaRPr lang="en-US" sz="1350" dirty="0"/>
+          </a:p>
+          <a:p>
+            <a:pPr indent="0" marL="0">
+              <a:lnSpc>
+                <a:spcPct val="135000"/>
+              </a:lnSpc>
+              <a:buNone/>
+            </a:pPr>
+            <a:r>
+              <a:rPr lang="en-US" sz="1350" b="1" dirty="0">
                 <a:solidFill>
                   <a:srgbClr val="1B64DA"/>
                 </a:solidFill>
@@ -11856,332 +13863,9 @@
                 <a:ea typeface="Arial" pitchFamily="34" charset="-122"/>
                 <a:cs typeface="Arial" pitchFamily="34" charset="-120"/>
               </a:rPr>
-              <a:t>0</a:t>
-            </a:r>
-            <a:endParaRPr lang="en-US" sz="4200" dirty="0"/>
-          </a:p>
-        </p:txBody>
-      </p:sp>
-      <p:sp>
-        <p:nvSpPr>
-          <p:cNvPr id="29" name="Text 27"/>
-          <p:cNvSpPr/>
-          <p:nvPr/>
-        </p:nvSpPr>
-        <p:spPr>
-          <a:xfrm>
-            <a:off x="8421624" y="4343400"/>
-            <a:ext cx="1197864" cy="274320"/>
-          </a:xfrm>
-          <a:prstGeom prst="rect">
-            <a:avLst/>
-          </a:prstGeom>
-          <a:noFill/>
-          <a:ln/>
-        </p:spPr>
-        <p:txBody>
-          <a:bodyPr wrap="square" lIns="0" tIns="0" rIns="0" bIns="0" rtlCol="0" anchor="t"/>
-          <a:lstStyle/>
-          <a:p>
-            <a:pPr indent="0" marL="0">
-              <a:buNone/>
-            </a:pPr>
-            <a:r>
-              <a:rPr lang="en-US" sz="1100" dirty="0">
-                <a:solidFill>
-                  <a:srgbClr val="4E5968"/>
-                </a:solidFill>
-                <a:latin typeface="Arial" pitchFamily="34" charset="0"/>
-                <a:ea typeface="Arial" pitchFamily="34" charset="-122"/>
-                <a:cs typeface="Arial" pitchFamily="34" charset="-120"/>
-              </a:rPr>
-              <a:t>찾은 곳 5/5</a:t>
-            </a:r>
-            <a:endParaRPr lang="en-US" sz="1100" dirty="0"/>
-          </a:p>
-        </p:txBody>
-      </p:sp>
-      <p:sp>
-        <p:nvSpPr>
-          <p:cNvPr id="30" name="Shape 28"/>
-          <p:cNvSpPr/>
-          <p:nvPr/>
-        </p:nvSpPr>
-        <p:spPr>
-          <a:xfrm>
-            <a:off x="9893808" y="2971800"/>
-            <a:ext cx="1472184" cy="1828800"/>
-          </a:xfrm>
-          <a:prstGeom prst="roundRect">
-            <a:avLst>
-              <a:gd name="adj" fmla="val 4969"/>
-            </a:avLst>
-          </a:prstGeom>
-          <a:solidFill>
-            <a:srgbClr val="EAF3FF"/>
-          </a:solidFill>
-          <a:ln w="12700">
-            <a:solidFill>
-              <a:srgbClr val="3182F6"/>
-            </a:solidFill>
-            <a:prstDash val="solid"/>
-          </a:ln>
-        </p:spPr>
-      </p:sp>
-      <p:sp>
-        <p:nvSpPr>
-          <p:cNvPr id="31" name="Text 29"/>
-          <p:cNvSpPr/>
-          <p:nvPr/>
-        </p:nvSpPr>
-        <p:spPr>
-          <a:xfrm>
-            <a:off x="10030968" y="3108960"/>
-            <a:ext cx="1197864" cy="274320"/>
-          </a:xfrm>
-          <a:prstGeom prst="rect">
-            <a:avLst/>
-          </a:prstGeom>
-          <a:noFill/>
-          <a:ln/>
-        </p:spPr>
-        <p:txBody>
-          <a:bodyPr wrap="square" lIns="0" tIns="0" rIns="0" bIns="0" rtlCol="0" anchor="t"/>
-          <a:lstStyle/>
-          <a:p>
-            <a:pPr indent="0" marL="0">
-              <a:buNone/>
-            </a:pPr>
-            <a:r>
-              <a:rPr lang="en-US" sz="1200" b="1" dirty="0">
-                <a:solidFill>
-                  <a:srgbClr val="191F28"/>
-                </a:solidFill>
-                <a:latin typeface="Arial" pitchFamily="34" charset="0"/>
-                <a:ea typeface="Arial" pitchFamily="34" charset="-122"/>
-                <a:cs typeface="Arial" pitchFamily="34" charset="-120"/>
-              </a:rPr>
-              <a:t>6개·3사</a:t>
-            </a:r>
-            <a:endParaRPr lang="en-US" sz="1200" dirty="0"/>
-          </a:p>
-        </p:txBody>
-      </p:sp>
-      <p:sp>
-        <p:nvSpPr>
-          <p:cNvPr id="32" name="Text 30"/>
-          <p:cNvSpPr/>
-          <p:nvPr/>
-        </p:nvSpPr>
-        <p:spPr>
-          <a:xfrm>
-            <a:off x="10030968" y="3474720"/>
-            <a:ext cx="1197864" cy="731520"/>
-          </a:xfrm>
-          <a:prstGeom prst="rect">
-            <a:avLst/>
-          </a:prstGeom>
-          <a:noFill/>
-          <a:ln/>
-        </p:spPr>
-        <p:txBody>
-          <a:bodyPr wrap="square" lIns="0" tIns="0" rIns="0" bIns="0" rtlCol="0" anchor="t"/>
-          <a:lstStyle/>
-          <a:p>
-            <a:pPr indent="0" marL="0">
-              <a:buNone/>
-            </a:pPr>
-            <a:r>
-              <a:rPr lang="en-US" sz="4200" b="1" dirty="0">
-                <a:solidFill>
-                  <a:srgbClr val="1B64DA"/>
-                </a:solidFill>
-                <a:latin typeface="Arial" pitchFamily="34" charset="0"/>
-                <a:ea typeface="Arial" pitchFamily="34" charset="-122"/>
-                <a:cs typeface="Arial" pitchFamily="34" charset="-120"/>
-              </a:rPr>
-              <a:t>0</a:t>
-            </a:r>
-            <a:endParaRPr lang="en-US" sz="4200" dirty="0"/>
-          </a:p>
-        </p:txBody>
-      </p:sp>
-      <p:sp>
-        <p:nvSpPr>
-          <p:cNvPr id="33" name="Text 31"/>
-          <p:cNvSpPr/>
-          <p:nvPr/>
-        </p:nvSpPr>
-        <p:spPr>
-          <a:xfrm>
-            <a:off x="10030968" y="4343400"/>
-            <a:ext cx="1197864" cy="274320"/>
-          </a:xfrm>
-          <a:prstGeom prst="rect">
-            <a:avLst/>
-          </a:prstGeom>
-          <a:noFill/>
-          <a:ln/>
-        </p:spPr>
-        <p:txBody>
-          <a:bodyPr wrap="square" lIns="0" tIns="0" rIns="0" bIns="0" rtlCol="0" anchor="t"/>
-          <a:lstStyle/>
-          <a:p>
-            <a:pPr indent="0" marL="0">
-              <a:buNone/>
-            </a:pPr>
-            <a:r>
-              <a:rPr lang="en-US" sz="1100" dirty="0">
-                <a:solidFill>
-                  <a:srgbClr val="4E5968"/>
-                </a:solidFill>
-                <a:latin typeface="Arial" pitchFamily="34" charset="0"/>
-                <a:ea typeface="Arial" pitchFamily="34" charset="-122"/>
-                <a:cs typeface="Arial" pitchFamily="34" charset="-120"/>
-              </a:rPr>
-              <a:t>찾은 곳 4/5</a:t>
-            </a:r>
-            <a:endParaRPr lang="en-US" sz="1100" dirty="0"/>
-          </a:p>
-        </p:txBody>
-      </p:sp>
-      <p:sp>
-        <p:nvSpPr>
-          <p:cNvPr id="34" name="Text 32"/>
-          <p:cNvSpPr/>
-          <p:nvPr/>
-        </p:nvSpPr>
-        <p:spPr>
-          <a:xfrm>
-            <a:off x="6675120" y="5120640"/>
-            <a:ext cx="4690872" cy="274320"/>
-          </a:xfrm>
-          <a:prstGeom prst="rect">
-            <a:avLst/>
-          </a:prstGeom>
-          <a:noFill/>
-          <a:ln/>
-        </p:spPr>
-        <p:txBody>
-          <a:bodyPr wrap="square" lIns="0" tIns="0" rIns="0" bIns="0" rtlCol="0" anchor="t"/>
-          <a:lstStyle/>
-          <a:p>
-            <a:pPr indent="0" marL="0">
-              <a:buNone/>
-            </a:pPr>
-            <a:r>
-              <a:rPr lang="en-US" sz="1200" dirty="0">
-                <a:solidFill>
-                  <a:srgbClr val="4E5968"/>
-                </a:solidFill>
-                <a:latin typeface="Arial" pitchFamily="34" charset="0"/>
-                <a:ea typeface="Arial" pitchFamily="34" charset="-122"/>
-                <a:cs typeface="Arial" pitchFamily="34" charset="-120"/>
-              </a:rPr>
-              <a:t>회사 모델을 섞는 효과는 이번 표본에선 보이지 않았습니다</a:t>
-            </a:r>
-            <a:endParaRPr lang="en-US" sz="1200" dirty="0"/>
-          </a:p>
-        </p:txBody>
-      </p:sp>
-      <p:sp>
-        <p:nvSpPr>
-          <p:cNvPr id="35" name="Shape 33"/>
-          <p:cNvSpPr/>
-          <p:nvPr/>
-        </p:nvSpPr>
-        <p:spPr>
-          <a:xfrm>
-            <a:off x="822960" y="5623560"/>
-            <a:ext cx="10543032" cy="0"/>
-          </a:xfrm>
-          <a:prstGeom prst="line">
-            <a:avLst/>
-          </a:prstGeom>
-          <a:noFill/>
-          <a:ln w="12700">
-            <a:solidFill>
-              <a:srgbClr val="E5E8EB"/>
-            </a:solidFill>
-            <a:prstDash val="solid"/>
-          </a:ln>
-        </p:spPr>
-      </p:sp>
-      <p:sp>
-        <p:nvSpPr>
-          <p:cNvPr id="36" name="Text 34"/>
-          <p:cNvSpPr/>
-          <p:nvPr/>
-        </p:nvSpPr>
-        <p:spPr>
-          <a:xfrm>
-            <a:off x="822960" y="5760720"/>
-            <a:ext cx="10543032" cy="320040"/>
-          </a:xfrm>
-          <a:prstGeom prst="rect">
-            <a:avLst/>
-          </a:prstGeom>
-          <a:noFill/>
-          <a:ln/>
-        </p:spPr>
-        <p:txBody>
-          <a:bodyPr wrap="square" lIns="0" tIns="0" rIns="0" bIns="0" rtlCol="0" anchor="t"/>
-          <a:lstStyle/>
-          <a:p>
-            <a:pPr indent="0" marL="0">
-              <a:buNone/>
-            </a:pPr>
-            <a:r>
-              <a:rPr lang="en-US" sz="1400" b="1" dirty="0">
-                <a:solidFill>
-                  <a:srgbClr val="191F28"/>
-                </a:solidFill>
-                <a:latin typeface="Arial" pitchFamily="34" charset="0"/>
-                <a:ea typeface="Arial" pitchFamily="34" charset="-122"/>
-                <a:cs typeface="Arial" pitchFamily="34" charset="-120"/>
-              </a:rPr>
-              <a:t>처음 보는 공고에서 뽑은 요건 51개를 원문과 대조해 보니, 지어낸 요건은 0개였습니다</a:t>
-            </a:r>
-            <a:endParaRPr lang="en-US" sz="1400" dirty="0"/>
-          </a:p>
-        </p:txBody>
-      </p:sp>
-      <p:sp>
-        <p:nvSpPr>
-          <p:cNvPr id="37" name="Text 35"/>
-          <p:cNvSpPr/>
-          <p:nvPr/>
-        </p:nvSpPr>
-        <p:spPr>
-          <a:xfrm>
-            <a:off x="822960" y="6355080"/>
-            <a:ext cx="10543032" cy="274320"/>
-          </a:xfrm>
-          <a:prstGeom prst="rect">
-            <a:avLst/>
-          </a:prstGeom>
-          <a:noFill/>
-          <a:ln/>
-        </p:spPr>
-        <p:txBody>
-          <a:bodyPr wrap="square" lIns="0" tIns="0" rIns="0" bIns="0" rtlCol="0" anchor="t"/>
-          <a:lstStyle/>
-          <a:p>
-            <a:pPr indent="0" marL="0">
-              <a:buNone/>
-            </a:pPr>
-            <a:r>
-              <a:rPr lang="en-US" sz="1000" dirty="0">
-                <a:solidFill>
-                  <a:srgbClr val="8B95A1"/>
-                </a:solidFill>
-                <a:latin typeface="Arial" pitchFamily="34" charset="0"/>
-                <a:ea typeface="Arial" pitchFamily="34" charset="-122"/>
-                <a:cs typeface="Arial" pitchFamily="34" charset="-120"/>
-              </a:rPr>
-              <a:t>정답표와 대조 감사는 파이프라인과 다른 회사 모델(Claude)이 작성, 사람 검수는 아님  ·  data/eval, data/holdout 공개</a:t>
-            </a:r>
-            <a:endParaRPr lang="en-US" sz="1000" dirty="0"/>
+              <a:t>→ 논문 3편</a:t>
+            </a:r>
+            <a:endParaRPr lang="en-US" sz="1350" dirty="0"/>
           </a:p>
         </p:txBody>
       </p:sp>

--- a/deliver/deck/RFP-to-Fit_루미아.pptx
+++ b/deliver/deck/RFP-to-Fit_루미아.pptx
@@ -1395,7 +1395,7 @@
           <a:p>
             <a:r>
               <a:rPr lang="en-US" dirty="0"/>
-              <a:t>[20초] 핵심은 AI를 판사로 쓰지 않는다는 겁니다. AI는 증인처럼 근거 문장만 내고, 판정은 코드가 합니다. 한 회사 모델이 막히면 다른 모델로 넘어가고, 실패는 숨기지 않고 화면에 띄웁니다.</a:t>
+              <a:t>[20초] AI의 말을 그대로 믿지 않습니다. 충족인지 부족인지는 AI가 판단하지만, 그 근거로 댄 문장이 초안에 글자 그대로 있는지는 코드가 대조하고, 없으면 그 판단을 버립니다. 여섯 판단을 세는 것도 코드입니다. 모델이 막히면 다른 모델로 넘어가고, 실패는 화면에 띄웁니다.</a:t>
             </a:r>
             <a:endParaRPr lang="en-US" dirty="0"/>
           </a:p>
@@ -5445,7 +5445,7 @@
                 <a:ea typeface="Arial" pitchFamily="34" charset="-122"/>
                 <a:cs typeface="Arial" pitchFamily="34" charset="-120"/>
               </a:rPr>
-              <a:t>커밋 46개, 테스트 99개, 첫 코드 커밋 09/30 19:19</a:t>
+              <a:t>커밋 48개, 테스트 99개, 첫 코드 커밋 09/30 19:19</a:t>
             </a:r>
             <a:endParaRPr lang="en-US" sz="1500" dirty="0"/>
           </a:p>
@@ -9613,7 +9613,7 @@
                 <a:ea typeface="Arial" pitchFamily="34" charset="-122"/>
                 <a:cs typeface="Arial" pitchFamily="34" charset="-120"/>
               </a:rPr>
-              <a:t>AI는 증거만 내고,</a:t>
+              <a:t>AI가 판단하면,</a:t>
             </a:r>
             <a:endParaRPr lang="en-US" sz="3400" dirty="0"/>
           </a:p>
@@ -9633,7 +9633,7 @@
                 <a:ea typeface="Arial" pitchFamily="34" charset="-122"/>
                 <a:cs typeface="Arial" pitchFamily="34" charset="-120"/>
               </a:rPr>
-              <a:t>판정은 코드</a:t>
+              <a:t>코드</a:t>
             </a:r>
             <a:pPr indent="0" marL="0">
               <a:lnSpc>
@@ -9650,7 +9650,7 @@
                 <a:ea typeface="Arial" pitchFamily="34" charset="-122"/>
                 <a:cs typeface="Arial" pitchFamily="34" charset="-120"/>
               </a:rPr>
-              <a:t>가 합니다</a:t>
+              <a:t>가 근거를 검사합니다</a:t>
             </a:r>
             <a:endParaRPr lang="en-US" sz="3400" dirty="0"/>
           </a:p>

--- a/deliver/deck/RFP-to-Fit_루미아.pptx
+++ b/deliver/deck/RFP-to-Fit_루미아.pptx
@@ -603,7 +603,7 @@
           <a:p>
             <a:r>
               <a:rPr lang="en-US" dirty="0"/>
-              <a:t>[30초] 예시에만 맞춘 게 아닌지 보려고, 개발에 안 쓴 과기정통부 공고 두 건을 링크로 가져와 정답표를 먼저 고정하고 쟀습니다. 94%와 78%였고 심사표 배점은 다섯 건 모두 맞혔습니다. 오른쪽은 관점을 나눈 효과입니다. 관점 하나는 안 지운 곳을 3곳 잘못 짚었고, 여섯으로 나누니 0이었습니다. 회사 모델을 섞는 효과는 이번엔 보이지 않았다고 그대로 말씀드립니다.</a:t>
+              <a:t>[15초] 같은 엔진이 세 시점으로 이어집니다. 지금은 연구자의 제출 전 점검이고, 첫 실증 목표는 전문기관의 접수 후 요건 검토, 그다음은 심사 보조입니다. 실제 심사 의견은 평가기관에 있으니, 연계하면 관점을 실제 유형에 맞출 수 있습니다.</a:t>
             </a:r>
             <a:endParaRPr lang="en-US" dirty="0"/>
           </a:p>
@@ -691,7 +691,7 @@
           <a:p>
             <a:r>
               <a:rPr lang="en-US" dirty="0"/>
-              <a:t>[20초] 이 대회 심사표로 저희 기획서부터 검사했습니다. 세 관점이 걸리는 점을 냈습니다. 차별성의 근거, 구매 주체, 구현 계획. 그래서 오늘은 구조의 차별점과 실험, 첫 실증 대상, 그리고 계획 대신 구현 결과를 가져왔습니다.</a:t>
+              <a:t>[10초] 제출 전에, 빈칸부터. 화면의 주소에서 지금 직접 해 보실 수 있습니다. 감사합니다.</a:t>
             </a:r>
             <a:endParaRPr lang="en-US" dirty="0"/>
           </a:p>
@@ -779,7 +779,7 @@
           <a:p>
             <a:r>
               <a:rPr lang="en-US" dirty="0"/>
-              <a:t>[15초] 같은 엔진이 세 시점으로 이어집니다. 지금은 연구자의 제출 전 점검이고, 첫 실증 목표는 전문기관의 접수 후 요건 검토, 그다음은 심사 보조입니다. 실제 심사 의견은 평가기관에 있으니, 연계하면 관점을 실제 유형에 맞출 수 있습니다.</a:t>
+              <a:t>[0초] 부록 — 발표하지 않음. 질문이 나오면 띄웁니다.</a:t>
             </a:r>
             <a:endParaRPr lang="en-US" dirty="0"/>
           </a:p>
@@ -867,7 +867,7 @@
           <a:p>
             <a:r>
               <a:rPr lang="en-US" dirty="0"/>
-              <a:t>[10초] 제출 전에, 빈칸부터. 화면의 주소에서 지금 직접 해 보실 수 있습니다. 감사합니다.</a:t>
+              <a:t>[0초] 부록 — 발표하지 않음. 질문이 나오면 띄웁니다.</a:t>
             </a:r>
             <a:endParaRPr lang="en-US" dirty="0"/>
           </a:p>
@@ -1395,7 +1395,7 @@
           <a:p>
             <a:r>
               <a:rPr lang="en-US" dirty="0"/>
-              <a:t>[20초] AI의 말을 그대로 믿지 않습니다. 충족인지 부족인지는 AI가 판단하지만, 그 근거로 댄 문장이 초안에 글자 그대로 있는지는 코드가 대조하고, 없으면 그 판단을 버립니다. 여섯 판단을 세는 것도 코드입니다. 모델이 막히면 다른 모델로 넘어가고, 실패는 화면에 띄웁니다.</a:t>
+              <a:t>[20초] AI의 말을 그대로 믿지 않습니다. 충족인지 부족인지는 AI가 판단하지만, 근거로 댄 문장이 초안에 글자 그대로 있는지는 코드가 대조하고, 없으면 그 판단을 버립니다. 판단을 세는 것도 코드입니다. 이 검사 도구는 MCP로 감싸 다른 AI에서도 불러 봤습니다.</a:t>
             </a:r>
             <a:endParaRPr lang="en-US" dirty="0"/>
           </a:p>
@@ -1659,7 +1659,7 @@
           <a:p>
             <a:r>
               <a:rPr lang="en-US" dirty="0"/>
-              <a:t>[15초] 검사 도구 두 개를 MCP로 감쌌습니다. 다른 AI 비서인 Codex에 붙여 실제로 불러 보니, 원문에 있는 인용은 참, 없는 인용은 거짓이 나왔습니다. 학술 DB가 멈추면 도구 뒤에서 다른 DB로 넘어갑니다.</a:t>
+              <a:t>[30초] 예시에만 맞춘 게 아닌지 보려고, 개발에 안 쓴 과기정통부 공고 두 건을 링크로 가져와 정답표를 먼저 고정하고 쟀습니다. 94%와 78%였고 심사표 배점은 다섯 건 모두 맞혔습니다. 오른쪽은 관점을 나눈 효과입니다. 관점 하나는 안 지운 곳을 3곳 잘못 짚었고, 여섯으로 나누니 0이었습니다. 회사 모델을 섞는 효과는 이번엔 보이지 않았다고 그대로 말씀드립니다.</a:t>
             </a:r>
             <a:endParaRPr lang="en-US" dirty="0"/>
           </a:p>
@@ -2293,7 +2293,7 @@
                 <a:ea typeface="Arial" pitchFamily="34" charset="-122"/>
                 <a:cs typeface="Arial" pitchFamily="34" charset="-120"/>
               </a:rPr>
-              <a:t>측정</a:t>
+              <a:t>확장</a:t>
             </a:r>
             <a:endParaRPr lang="en-US" sz="1400" dirty="0"/>
           </a:p>
@@ -2335,7 +2335,7 @@
                 <a:ea typeface="Arial" pitchFamily="34" charset="-122"/>
                 <a:cs typeface="Arial" pitchFamily="34" charset="-120"/>
               </a:rPr>
-              <a:t>처음 보는 공고로도,</a:t>
+              <a:t>제출 전에서 심사까지,</a:t>
             </a:r>
             <a:endParaRPr lang="en-US" sz="3400" dirty="0"/>
           </a:p>
@@ -2355,7 +2355,7 @@
                 <a:ea typeface="Arial" pitchFamily="34" charset="-122"/>
                 <a:cs typeface="Arial" pitchFamily="34" charset="-120"/>
               </a:rPr>
-              <a:t>직접</a:t>
+              <a:t>같은 엔진</a:t>
             </a:r>
             <a:pPr indent="0" marL="0">
               <a:lnSpc>
@@ -2372,7 +2372,7 @@
                 <a:ea typeface="Arial" pitchFamily="34" charset="-122"/>
                 <a:cs typeface="Arial" pitchFamily="34" charset="-120"/>
               </a:rPr>
-              <a:t> 쟀습니다</a:t>
+              <a:t>으로 갑니다</a:t>
             </a:r>
             <a:endParaRPr lang="en-US" sz="3400" dirty="0"/>
           </a:p>
@@ -2380,720 +2380,189 @@
       </p:sp>
       <p:sp>
         <p:nvSpPr>
-          <p:cNvPr id="4" name="Text 2"/>
+          <p:cNvPr id="4" name="Shape 2"/>
           <p:cNvSpPr/>
           <p:nvPr/>
         </p:nvSpPr>
         <p:spPr>
           <a:xfrm>
             <a:off x="822960" y="2606040"/>
-            <a:ext cx="5486400" cy="274320"/>
-          </a:xfrm>
-          <a:prstGeom prst="rect">
-            <a:avLst/>
-          </a:prstGeom>
-          <a:noFill/>
-          <a:ln/>
-        </p:spPr>
-        <p:txBody>
-          <a:bodyPr wrap="square" lIns="0" tIns="0" rIns="0" bIns="0" rtlCol="0" anchor="t"/>
-          <a:lstStyle/>
-          <a:p>
-            <a:pPr indent="0" marL="0">
-              <a:buNone/>
-            </a:pPr>
-            <a:r>
-              <a:rPr lang="en-US" sz="1300" b="1" dirty="0">
-                <a:solidFill>
-                  <a:srgbClr val="4E5968"/>
-                </a:solidFill>
-                <a:latin typeface="Arial" pitchFamily="34" charset="0"/>
-                <a:ea typeface="Arial" pitchFamily="34" charset="-122"/>
-                <a:cs typeface="Arial" pitchFamily="34" charset="-120"/>
-              </a:rPr>
-              <a:t>요건을 놓치지 않은 비율</a:t>
-            </a:r>
-            <a:endParaRPr lang="en-US" sz="1300" dirty="0"/>
-          </a:p>
-        </p:txBody>
-      </p:sp>
-      <p:sp>
-        <p:nvSpPr>
-          <p:cNvPr id="5" name="Text 3"/>
-          <p:cNvSpPr/>
-          <p:nvPr/>
-        </p:nvSpPr>
-        <p:spPr>
-          <a:xfrm>
-            <a:off x="822960" y="2971800"/>
-            <a:ext cx="3108960" cy="310896"/>
-          </a:xfrm>
-          <a:prstGeom prst="rect">
-            <a:avLst/>
-          </a:prstGeom>
-          <a:noFill/>
-          <a:ln/>
-        </p:spPr>
-        <p:txBody>
-          <a:bodyPr wrap="square" lIns="0" tIns="0" rIns="0" bIns="0" rtlCol="0" anchor="t"/>
-          <a:lstStyle/>
-          <a:p>
-            <a:pPr indent="0" marL="0">
-              <a:buNone/>
-            </a:pPr>
-            <a:r>
-              <a:rPr lang="en-US" sz="1400" dirty="0">
-                <a:solidFill>
-                  <a:srgbClr val="191F28"/>
-                </a:solidFill>
-                <a:latin typeface="Arial" pitchFamily="34" charset="0"/>
-                <a:ea typeface="Arial" pitchFamily="34" charset="-122"/>
-                <a:cs typeface="Arial" pitchFamily="34" charset="-120"/>
-              </a:rPr>
-              <a:t>우주항공청</a:t>
-            </a:r>
-            <a:endParaRPr lang="en-US" sz="1400" dirty="0"/>
-          </a:p>
-        </p:txBody>
-      </p:sp>
-      <p:sp>
-        <p:nvSpPr>
-          <p:cNvPr id="6" name="Text 4"/>
-          <p:cNvSpPr/>
-          <p:nvPr/>
-        </p:nvSpPr>
-        <p:spPr>
-          <a:xfrm>
-            <a:off x="3931920" y="2999232"/>
-            <a:ext cx="1463040" cy="274320"/>
-          </a:xfrm>
-          <a:prstGeom prst="rect">
-            <a:avLst/>
-          </a:prstGeom>
-          <a:noFill/>
-          <a:ln/>
-        </p:spPr>
-        <p:txBody>
-          <a:bodyPr wrap="square" lIns="0" tIns="0" rIns="0" bIns="0" rtlCol="0" anchor="t"/>
-          <a:lstStyle/>
-          <a:p>
-            <a:pPr indent="0" marL="0">
-              <a:buNone/>
-            </a:pPr>
-            <a:r>
-              <a:rPr lang="en-US" sz="1100" dirty="0">
-                <a:solidFill>
-                  <a:srgbClr val="8B95A1"/>
-                </a:solidFill>
-                <a:latin typeface="Arial" pitchFamily="34" charset="0"/>
-                <a:ea typeface="Arial" pitchFamily="34" charset="-122"/>
-                <a:cs typeface="Arial" pitchFamily="34" charset="-120"/>
-              </a:rPr>
-              <a:t>개발에 쓴 공고</a:t>
-            </a:r>
-            <a:endParaRPr lang="en-US" sz="1100" dirty="0"/>
-          </a:p>
-        </p:txBody>
-      </p:sp>
-      <p:sp>
-        <p:nvSpPr>
-          <p:cNvPr id="7" name="Text 5"/>
-          <p:cNvSpPr/>
-          <p:nvPr/>
-        </p:nvSpPr>
-        <p:spPr>
-          <a:xfrm>
-            <a:off x="5394960" y="2971800"/>
-            <a:ext cx="914400" cy="310896"/>
-          </a:xfrm>
-          <a:prstGeom prst="rect">
-            <a:avLst/>
-          </a:prstGeom>
-          <a:noFill/>
-          <a:ln/>
-        </p:spPr>
-        <p:txBody>
-          <a:bodyPr wrap="square" lIns="0" tIns="0" rIns="0" bIns="0" rtlCol="0" anchor="t"/>
-          <a:lstStyle/>
-          <a:p>
-            <a:pPr algn="r" indent="0" marL="0">
-              <a:buNone/>
-            </a:pPr>
-            <a:r>
-              <a:rPr lang="en-US" sz="1600" b="1" dirty="0">
-                <a:solidFill>
-                  <a:srgbClr val="191F28"/>
-                </a:solidFill>
-                <a:latin typeface="Arial" pitchFamily="34" charset="0"/>
-                <a:ea typeface="Arial" pitchFamily="34" charset="-122"/>
-                <a:cs typeface="Arial" pitchFamily="34" charset="-120"/>
-              </a:rPr>
-              <a:t>85%</a:t>
-            </a:r>
-            <a:endParaRPr lang="en-US" sz="1600" dirty="0"/>
-          </a:p>
-        </p:txBody>
-      </p:sp>
-      <p:sp>
-        <p:nvSpPr>
-          <p:cNvPr id="8" name="Text 6"/>
-          <p:cNvSpPr/>
-          <p:nvPr/>
-        </p:nvSpPr>
-        <p:spPr>
-          <a:xfrm>
-            <a:off x="822960" y="3392424"/>
-            <a:ext cx="3108960" cy="310896"/>
-          </a:xfrm>
-          <a:prstGeom prst="rect">
-            <a:avLst/>
-          </a:prstGeom>
-          <a:noFill/>
-          <a:ln/>
-        </p:spPr>
-        <p:txBody>
-          <a:bodyPr wrap="square" lIns="0" tIns="0" rIns="0" bIns="0" rtlCol="0" anchor="t"/>
-          <a:lstStyle/>
-          <a:p>
-            <a:pPr indent="0" marL="0">
-              <a:buNone/>
-            </a:pPr>
-            <a:r>
-              <a:rPr lang="en-US" sz="1400" dirty="0">
-                <a:solidFill>
-                  <a:srgbClr val="191F28"/>
-                </a:solidFill>
-                <a:latin typeface="Arial" pitchFamily="34" charset="0"/>
-                <a:ea typeface="Arial" pitchFamily="34" charset="-122"/>
-                <a:cs typeface="Arial" pitchFamily="34" charset="-120"/>
-              </a:rPr>
-              <a:t>산업통상부</a:t>
-            </a:r>
-            <a:endParaRPr lang="en-US" sz="1400" dirty="0"/>
-          </a:p>
-        </p:txBody>
-      </p:sp>
-      <p:sp>
-        <p:nvSpPr>
-          <p:cNvPr id="9" name="Text 7"/>
-          <p:cNvSpPr/>
-          <p:nvPr/>
-        </p:nvSpPr>
-        <p:spPr>
-          <a:xfrm>
-            <a:off x="3931920" y="3419856"/>
-            <a:ext cx="1463040" cy="274320"/>
-          </a:xfrm>
-          <a:prstGeom prst="rect">
-            <a:avLst/>
-          </a:prstGeom>
-          <a:noFill/>
-          <a:ln/>
-        </p:spPr>
-        <p:txBody>
-          <a:bodyPr wrap="square" lIns="0" tIns="0" rIns="0" bIns="0" rtlCol="0" anchor="t"/>
-          <a:lstStyle/>
-          <a:p>
-            <a:pPr indent="0" marL="0">
-              <a:buNone/>
-            </a:pPr>
-            <a:r>
-              <a:rPr lang="en-US" sz="1100" dirty="0">
-                <a:solidFill>
-                  <a:srgbClr val="8B95A1"/>
-                </a:solidFill>
-                <a:latin typeface="Arial" pitchFamily="34" charset="0"/>
-                <a:ea typeface="Arial" pitchFamily="34" charset="-122"/>
-                <a:cs typeface="Arial" pitchFamily="34" charset="-120"/>
-              </a:rPr>
-              <a:t>개발에 쓴 공고</a:t>
-            </a:r>
-            <a:endParaRPr lang="en-US" sz="1100" dirty="0"/>
-          </a:p>
-        </p:txBody>
-      </p:sp>
-      <p:sp>
-        <p:nvSpPr>
-          <p:cNvPr id="10" name="Text 8"/>
-          <p:cNvSpPr/>
-          <p:nvPr/>
-        </p:nvSpPr>
-        <p:spPr>
-          <a:xfrm>
-            <a:off x="5394960" y="3392424"/>
-            <a:ext cx="914400" cy="310896"/>
-          </a:xfrm>
-          <a:prstGeom prst="rect">
-            <a:avLst/>
-          </a:prstGeom>
-          <a:noFill/>
-          <a:ln/>
-        </p:spPr>
-        <p:txBody>
-          <a:bodyPr wrap="square" lIns="0" tIns="0" rIns="0" bIns="0" rtlCol="0" anchor="t"/>
-          <a:lstStyle/>
-          <a:p>
-            <a:pPr algn="r" indent="0" marL="0">
-              <a:buNone/>
-            </a:pPr>
-            <a:r>
-              <a:rPr lang="en-US" sz="1600" b="1" dirty="0">
-                <a:solidFill>
-                  <a:srgbClr val="191F28"/>
-                </a:solidFill>
-                <a:latin typeface="Arial" pitchFamily="34" charset="0"/>
-                <a:ea typeface="Arial" pitchFamily="34" charset="-122"/>
-                <a:cs typeface="Arial" pitchFamily="34" charset="-120"/>
-              </a:rPr>
-              <a:t>93%</a:t>
-            </a:r>
-            <a:endParaRPr lang="en-US" sz="1600" dirty="0"/>
-          </a:p>
-        </p:txBody>
-      </p:sp>
-      <p:sp>
-        <p:nvSpPr>
-          <p:cNvPr id="11" name="Text 9"/>
-          <p:cNvSpPr/>
-          <p:nvPr/>
-        </p:nvSpPr>
-        <p:spPr>
-          <a:xfrm>
-            <a:off x="822960" y="3813048"/>
-            <a:ext cx="3108960" cy="310896"/>
-          </a:xfrm>
-          <a:prstGeom prst="rect">
-            <a:avLst/>
-          </a:prstGeom>
-          <a:noFill/>
-          <a:ln/>
-        </p:spPr>
-        <p:txBody>
-          <a:bodyPr wrap="square" lIns="0" tIns="0" rIns="0" bIns="0" rtlCol="0" anchor="t"/>
-          <a:lstStyle/>
-          <a:p>
-            <a:pPr indent="0" marL="0">
-              <a:buNone/>
-            </a:pPr>
-            <a:r>
-              <a:rPr lang="en-US" sz="1400" dirty="0">
-                <a:solidFill>
-                  <a:srgbClr val="191F28"/>
-                </a:solidFill>
-                <a:latin typeface="Arial" pitchFamily="34" charset="0"/>
-                <a:ea typeface="Arial" pitchFamily="34" charset="-122"/>
-                <a:cs typeface="Arial" pitchFamily="34" charset="-120"/>
-              </a:rPr>
-              <a:t>NAIS 해커톤</a:t>
-            </a:r>
-            <a:endParaRPr lang="en-US" sz="1400" dirty="0"/>
-          </a:p>
-        </p:txBody>
-      </p:sp>
-      <p:sp>
-        <p:nvSpPr>
-          <p:cNvPr id="12" name="Text 10"/>
-          <p:cNvSpPr/>
-          <p:nvPr/>
-        </p:nvSpPr>
-        <p:spPr>
-          <a:xfrm>
-            <a:off x="3931920" y="3840480"/>
-            <a:ext cx="1463040" cy="274320"/>
-          </a:xfrm>
-          <a:prstGeom prst="rect">
-            <a:avLst/>
-          </a:prstGeom>
-          <a:noFill/>
-          <a:ln/>
-        </p:spPr>
-        <p:txBody>
-          <a:bodyPr wrap="square" lIns="0" tIns="0" rIns="0" bIns="0" rtlCol="0" anchor="t"/>
-          <a:lstStyle/>
-          <a:p>
-            <a:pPr indent="0" marL="0">
-              <a:buNone/>
-            </a:pPr>
-            <a:r>
-              <a:rPr lang="en-US" sz="1100" dirty="0">
-                <a:solidFill>
-                  <a:srgbClr val="8B95A1"/>
-                </a:solidFill>
-                <a:latin typeface="Arial" pitchFamily="34" charset="0"/>
-                <a:ea typeface="Arial" pitchFamily="34" charset="-122"/>
-                <a:cs typeface="Arial" pitchFamily="34" charset="-120"/>
-              </a:rPr>
-              <a:t>개발에 쓴 공고</a:t>
-            </a:r>
-            <a:endParaRPr lang="en-US" sz="1100" dirty="0"/>
-          </a:p>
-        </p:txBody>
-      </p:sp>
-      <p:sp>
-        <p:nvSpPr>
-          <p:cNvPr id="13" name="Text 11"/>
-          <p:cNvSpPr/>
-          <p:nvPr/>
-        </p:nvSpPr>
-        <p:spPr>
-          <a:xfrm>
-            <a:off x="5394960" y="3813048"/>
-            <a:ext cx="914400" cy="310896"/>
-          </a:xfrm>
-          <a:prstGeom prst="rect">
-            <a:avLst/>
-          </a:prstGeom>
-          <a:noFill/>
-          <a:ln/>
-        </p:spPr>
-        <p:txBody>
-          <a:bodyPr wrap="square" lIns="0" tIns="0" rIns="0" bIns="0" rtlCol="0" anchor="t"/>
-          <a:lstStyle/>
-          <a:p>
-            <a:pPr algn="r" indent="0" marL="0">
-              <a:buNone/>
-            </a:pPr>
-            <a:r>
-              <a:rPr lang="en-US" sz="1600" b="1" dirty="0">
-                <a:solidFill>
-                  <a:srgbClr val="191F28"/>
-                </a:solidFill>
-                <a:latin typeface="Arial" pitchFamily="34" charset="0"/>
-                <a:ea typeface="Arial" pitchFamily="34" charset="-122"/>
-                <a:cs typeface="Arial" pitchFamily="34" charset="-120"/>
-              </a:rPr>
-              <a:t>87%</a:t>
-            </a:r>
-            <a:endParaRPr lang="en-US" sz="1600" dirty="0"/>
-          </a:p>
-        </p:txBody>
-      </p:sp>
-      <p:sp>
-        <p:nvSpPr>
-          <p:cNvPr id="14" name="Text 12"/>
-          <p:cNvSpPr/>
-          <p:nvPr/>
-        </p:nvSpPr>
-        <p:spPr>
-          <a:xfrm>
-            <a:off x="822960" y="4233672"/>
-            <a:ext cx="3108960" cy="310896"/>
-          </a:xfrm>
-          <a:prstGeom prst="rect">
-            <a:avLst/>
-          </a:prstGeom>
-          <a:noFill/>
-          <a:ln/>
-        </p:spPr>
-        <p:txBody>
-          <a:bodyPr wrap="square" lIns="0" tIns="0" rIns="0" bIns="0" rtlCol="0" anchor="t"/>
-          <a:lstStyle/>
-          <a:p>
-            <a:pPr indent="0" marL="0">
-              <a:buNone/>
-            </a:pPr>
-            <a:r>
-              <a:rPr lang="en-US" sz="1400" b="1" dirty="0">
-                <a:solidFill>
-                  <a:srgbClr val="1B64DA"/>
-                </a:solidFill>
-                <a:latin typeface="Arial" pitchFamily="34" charset="0"/>
-                <a:ea typeface="Arial" pitchFamily="34" charset="-122"/>
-                <a:cs typeface="Arial" pitchFamily="34" charset="-120"/>
-              </a:rPr>
-              <a:t>과기정통부 국가과학자</a:t>
-            </a:r>
-            <a:endParaRPr lang="en-US" sz="1400" dirty="0"/>
-          </a:p>
-        </p:txBody>
-      </p:sp>
-      <p:sp>
-        <p:nvSpPr>
-          <p:cNvPr id="15" name="Text 13"/>
-          <p:cNvSpPr/>
-          <p:nvPr/>
-        </p:nvSpPr>
-        <p:spPr>
-          <a:xfrm>
-            <a:off x="3931920" y="4261104"/>
-            <a:ext cx="1463040" cy="274320"/>
-          </a:xfrm>
-          <a:prstGeom prst="rect">
-            <a:avLst/>
-          </a:prstGeom>
-          <a:noFill/>
-          <a:ln/>
-        </p:spPr>
-        <p:txBody>
-          <a:bodyPr wrap="square" lIns="0" tIns="0" rIns="0" bIns="0" rtlCol="0" anchor="t"/>
-          <a:lstStyle/>
-          <a:p>
-            <a:pPr indent="0" marL="0">
-              <a:buNone/>
-            </a:pPr>
-            <a:r>
-              <a:rPr lang="en-US" sz="1100" dirty="0">
-                <a:solidFill>
-                  <a:srgbClr val="8B95A1"/>
-                </a:solidFill>
-                <a:latin typeface="Arial" pitchFamily="34" charset="0"/>
-                <a:ea typeface="Arial" pitchFamily="34" charset="-122"/>
-                <a:cs typeface="Arial" pitchFamily="34" charset="-120"/>
-              </a:rPr>
-              <a:t>처음 보는 공고</a:t>
-            </a:r>
-            <a:endParaRPr lang="en-US" sz="1100" dirty="0"/>
-          </a:p>
-        </p:txBody>
-      </p:sp>
-      <p:sp>
-        <p:nvSpPr>
-          <p:cNvPr id="16" name="Text 14"/>
-          <p:cNvSpPr/>
-          <p:nvPr/>
-        </p:nvSpPr>
-        <p:spPr>
-          <a:xfrm>
-            <a:off x="5394960" y="4233672"/>
-            <a:ext cx="914400" cy="310896"/>
-          </a:xfrm>
-          <a:prstGeom prst="rect">
-            <a:avLst/>
-          </a:prstGeom>
-          <a:noFill/>
-          <a:ln/>
-        </p:spPr>
-        <p:txBody>
-          <a:bodyPr wrap="square" lIns="0" tIns="0" rIns="0" bIns="0" rtlCol="0" anchor="t"/>
-          <a:lstStyle/>
-          <a:p>
-            <a:pPr algn="r" indent="0" marL="0">
-              <a:buNone/>
-            </a:pPr>
-            <a:r>
-              <a:rPr lang="en-US" sz="1600" b="1" dirty="0">
-                <a:solidFill>
-                  <a:srgbClr val="1B64DA"/>
-                </a:solidFill>
-                <a:latin typeface="Arial" pitchFamily="34" charset="0"/>
-                <a:ea typeface="Arial" pitchFamily="34" charset="-122"/>
-                <a:cs typeface="Arial" pitchFamily="34" charset="-120"/>
-              </a:rPr>
-              <a:t>94%</a:t>
-            </a:r>
-            <a:endParaRPr lang="en-US" sz="1600" dirty="0"/>
-          </a:p>
-        </p:txBody>
-      </p:sp>
-      <p:sp>
-        <p:nvSpPr>
-          <p:cNvPr id="17" name="Text 15"/>
-          <p:cNvSpPr/>
-          <p:nvPr/>
-        </p:nvSpPr>
-        <p:spPr>
-          <a:xfrm>
-            <a:off x="822960" y="4654296"/>
-            <a:ext cx="3108960" cy="310896"/>
-          </a:xfrm>
-          <a:prstGeom prst="rect">
-            <a:avLst/>
-          </a:prstGeom>
-          <a:noFill/>
-          <a:ln/>
-        </p:spPr>
-        <p:txBody>
-          <a:bodyPr wrap="square" lIns="0" tIns="0" rIns="0" bIns="0" rtlCol="0" anchor="t"/>
-          <a:lstStyle/>
-          <a:p>
-            <a:pPr indent="0" marL="0">
-              <a:buNone/>
-            </a:pPr>
-            <a:r>
-              <a:rPr lang="en-US" sz="1400" b="1" dirty="0">
-                <a:solidFill>
-                  <a:srgbClr val="1B64DA"/>
-                </a:solidFill>
-                <a:latin typeface="Arial" pitchFamily="34" charset="0"/>
-                <a:ea typeface="Arial" pitchFamily="34" charset="-122"/>
-                <a:cs typeface="Arial" pitchFamily="34" charset="-120"/>
-              </a:rPr>
-              <a:t>과기정통부 라이징스타</a:t>
-            </a:r>
-            <a:endParaRPr lang="en-US" sz="1400" dirty="0"/>
-          </a:p>
-        </p:txBody>
-      </p:sp>
-      <p:sp>
-        <p:nvSpPr>
-          <p:cNvPr id="18" name="Text 16"/>
-          <p:cNvSpPr/>
-          <p:nvPr/>
-        </p:nvSpPr>
-        <p:spPr>
-          <a:xfrm>
-            <a:off x="3931920" y="4681728"/>
-            <a:ext cx="1463040" cy="274320"/>
-          </a:xfrm>
-          <a:prstGeom prst="rect">
-            <a:avLst/>
-          </a:prstGeom>
-          <a:noFill/>
-          <a:ln/>
-        </p:spPr>
-        <p:txBody>
-          <a:bodyPr wrap="square" lIns="0" tIns="0" rIns="0" bIns="0" rtlCol="0" anchor="t"/>
-          <a:lstStyle/>
-          <a:p>
-            <a:pPr indent="0" marL="0">
-              <a:buNone/>
-            </a:pPr>
-            <a:r>
-              <a:rPr lang="en-US" sz="1100" dirty="0">
-                <a:solidFill>
-                  <a:srgbClr val="8B95A1"/>
-                </a:solidFill>
-                <a:latin typeface="Arial" pitchFamily="34" charset="0"/>
-                <a:ea typeface="Arial" pitchFamily="34" charset="-122"/>
-                <a:cs typeface="Arial" pitchFamily="34" charset="-120"/>
-              </a:rPr>
-              <a:t>처음 보는 공고</a:t>
-            </a:r>
-            <a:endParaRPr lang="en-US" sz="1100" dirty="0"/>
-          </a:p>
-        </p:txBody>
-      </p:sp>
-      <p:sp>
-        <p:nvSpPr>
-          <p:cNvPr id="19" name="Text 17"/>
-          <p:cNvSpPr/>
-          <p:nvPr/>
-        </p:nvSpPr>
-        <p:spPr>
-          <a:xfrm>
-            <a:off x="5394960" y="4654296"/>
-            <a:ext cx="914400" cy="310896"/>
-          </a:xfrm>
-          <a:prstGeom prst="rect">
-            <a:avLst/>
-          </a:prstGeom>
-          <a:noFill/>
-          <a:ln/>
-        </p:spPr>
-        <p:txBody>
-          <a:bodyPr wrap="square" lIns="0" tIns="0" rIns="0" bIns="0" rtlCol="0" anchor="t"/>
-          <a:lstStyle/>
-          <a:p>
-            <a:pPr algn="r" indent="0" marL="0">
-              <a:buNone/>
-            </a:pPr>
-            <a:r>
-              <a:rPr lang="en-US" sz="1600" b="1" dirty="0">
-                <a:solidFill>
-                  <a:srgbClr val="1B64DA"/>
-                </a:solidFill>
-                <a:latin typeface="Arial" pitchFamily="34" charset="0"/>
-                <a:ea typeface="Arial" pitchFamily="34" charset="-122"/>
-                <a:cs typeface="Arial" pitchFamily="34" charset="-120"/>
-              </a:rPr>
-              <a:t>78%</a:t>
-            </a:r>
-            <a:endParaRPr lang="en-US" sz="1600" dirty="0"/>
-          </a:p>
-        </p:txBody>
-      </p:sp>
-      <p:sp>
-        <p:nvSpPr>
-          <p:cNvPr id="20" name="Text 18"/>
-          <p:cNvSpPr/>
-          <p:nvPr/>
-        </p:nvSpPr>
-        <p:spPr>
-          <a:xfrm>
-            <a:off x="822960" y="5120640"/>
-            <a:ext cx="5486400" cy="274320"/>
-          </a:xfrm>
-          <a:prstGeom prst="rect">
-            <a:avLst/>
-          </a:prstGeom>
-          <a:noFill/>
-          <a:ln/>
-        </p:spPr>
-        <p:txBody>
-          <a:bodyPr wrap="square" lIns="0" tIns="0" rIns="0" bIns="0" rtlCol="0" anchor="t"/>
-          <a:lstStyle/>
-          <a:p>
-            <a:pPr indent="0" marL="0">
-              <a:buNone/>
-            </a:pPr>
-            <a:r>
-              <a:rPr lang="en-US" sz="1200" dirty="0">
-                <a:solidFill>
-                  <a:srgbClr val="4E5968"/>
-                </a:solidFill>
-                <a:latin typeface="Arial" pitchFamily="34" charset="0"/>
-                <a:ea typeface="Arial" pitchFamily="34" charset="-122"/>
-                <a:cs typeface="Arial" pitchFamily="34" charset="-120"/>
-              </a:rPr>
-              <a:t>심사표 배점은 다섯 건 모두 정확히 뽑았습니다</a:t>
-            </a:r>
-            <a:endParaRPr lang="en-US" sz="1200" dirty="0"/>
-          </a:p>
-        </p:txBody>
-      </p:sp>
-      <p:sp>
-        <p:nvSpPr>
-          <p:cNvPr id="21" name="Text 19"/>
-          <p:cNvSpPr/>
-          <p:nvPr/>
-        </p:nvSpPr>
-        <p:spPr>
-          <a:xfrm>
-            <a:off x="6675120" y="2606040"/>
-            <a:ext cx="4690872" cy="274320"/>
-          </a:xfrm>
-          <a:prstGeom prst="rect">
-            <a:avLst/>
-          </a:prstGeom>
-          <a:noFill/>
-          <a:ln/>
-        </p:spPr>
-        <p:txBody>
-          <a:bodyPr wrap="square" lIns="0" tIns="0" rIns="0" bIns="0" rtlCol="0" anchor="t"/>
-          <a:lstStyle/>
-          <a:p>
-            <a:pPr indent="0" marL="0">
-              <a:buNone/>
-            </a:pPr>
-            <a:r>
-              <a:rPr lang="en-US" sz="1300" b="1" dirty="0">
-                <a:solidFill>
-                  <a:srgbClr val="4E5968"/>
-                </a:solidFill>
-                <a:latin typeface="Arial" pitchFamily="34" charset="0"/>
-                <a:ea typeface="Arial" pitchFamily="34" charset="-122"/>
-                <a:cs typeface="Arial" pitchFamily="34" charset="-120"/>
-              </a:rPr>
-              <a:t>근거를 일부러 지운 초안 5개, 잘못 짚은 곳</a:t>
-            </a:r>
-            <a:endParaRPr lang="en-US" sz="1300" dirty="0"/>
-          </a:p>
-        </p:txBody>
-      </p:sp>
-      <p:sp>
-        <p:nvSpPr>
-          <p:cNvPr id="22" name="Shape 20"/>
-          <p:cNvSpPr/>
-          <p:nvPr/>
-        </p:nvSpPr>
-        <p:spPr>
-          <a:xfrm>
-            <a:off x="6675120" y="2971800"/>
-            <a:ext cx="1472184" cy="1828800"/>
+            <a:ext cx="3331464" cy="2194560"/>
           </a:xfrm>
           <a:prstGeom prst="roundRect">
             <a:avLst>
-              <a:gd name="adj" fmla="val 4969"/>
+              <a:gd name="adj" fmla="val 3333"/>
+            </a:avLst>
+          </a:prstGeom>
+          <a:solidFill>
+            <a:srgbClr val="EAF3FF"/>
+          </a:solidFill>
+          <a:ln w="12700">
+            <a:solidFill>
+              <a:srgbClr val="3182F6"/>
+            </a:solidFill>
+            <a:prstDash val="solid"/>
+          </a:ln>
+        </p:spPr>
+      </p:sp>
+      <p:sp>
+        <p:nvSpPr>
+          <p:cNvPr id="5" name="Text 3"/>
+          <p:cNvSpPr/>
+          <p:nvPr/>
+        </p:nvSpPr>
+        <p:spPr>
+          <a:xfrm>
+            <a:off x="1097280" y="2788920"/>
+            <a:ext cx="2782824" cy="274320"/>
+          </a:xfrm>
+          <a:prstGeom prst="rect">
+            <a:avLst/>
+          </a:prstGeom>
+          <a:noFill/>
+          <a:ln/>
+        </p:spPr>
+        <p:txBody>
+          <a:bodyPr wrap="square" lIns="0" tIns="0" rIns="0" bIns="0" rtlCol="0" anchor="t"/>
+          <a:lstStyle/>
+          <a:p>
+            <a:pPr indent="0" marL="0">
+              <a:buNone/>
+            </a:pPr>
+            <a:r>
+              <a:rPr lang="en-US" sz="1300" b="1" dirty="0">
+                <a:solidFill>
+                  <a:srgbClr val="3182F6"/>
+                </a:solidFill>
+                <a:latin typeface="Arial" pitchFamily="34" charset="0"/>
+                <a:ea typeface="Arial" pitchFamily="34" charset="-122"/>
+                <a:cs typeface="Arial" pitchFamily="34" charset="-120"/>
+              </a:rPr>
+              <a:t>제출 전 · 연구자</a:t>
+            </a:r>
+            <a:endParaRPr lang="en-US" sz="1300" dirty="0"/>
+          </a:p>
+        </p:txBody>
+      </p:sp>
+      <p:sp>
+        <p:nvSpPr>
+          <p:cNvPr id="6" name="Text 4"/>
+          <p:cNvSpPr/>
+          <p:nvPr/>
+        </p:nvSpPr>
+        <p:spPr>
+          <a:xfrm>
+            <a:off x="1097280" y="3154680"/>
+            <a:ext cx="2782824" cy="457200"/>
+          </a:xfrm>
+          <a:prstGeom prst="rect">
+            <a:avLst/>
+          </a:prstGeom>
+          <a:noFill/>
+          <a:ln/>
+        </p:spPr>
+        <p:txBody>
+          <a:bodyPr wrap="square" lIns="0" tIns="0" rIns="0" bIns="0" rtlCol="0" anchor="t"/>
+          <a:lstStyle/>
+          <a:p>
+            <a:pPr indent="0" marL="0">
+              <a:buNone/>
+            </a:pPr>
+            <a:r>
+              <a:rPr lang="en-US" sz="2200" b="1" dirty="0">
+                <a:solidFill>
+                  <a:srgbClr val="191F28"/>
+                </a:solidFill>
+                <a:latin typeface="Arial" pitchFamily="34" charset="0"/>
+                <a:ea typeface="Arial" pitchFamily="34" charset="-122"/>
+                <a:cs typeface="Arial" pitchFamily="34" charset="-120"/>
+              </a:rPr>
+              <a:t>셀프 점검</a:t>
+            </a:r>
+            <a:endParaRPr lang="en-US" sz="2200" dirty="0"/>
+          </a:p>
+        </p:txBody>
+      </p:sp>
+      <p:sp>
+        <p:nvSpPr>
+          <p:cNvPr id="7" name="Text 5"/>
+          <p:cNvSpPr/>
+          <p:nvPr/>
+        </p:nvSpPr>
+        <p:spPr>
+          <a:xfrm>
+            <a:off x="1097280" y="3749040"/>
+            <a:ext cx="2782824" cy="822960"/>
+          </a:xfrm>
+          <a:prstGeom prst="rect">
+            <a:avLst/>
+          </a:prstGeom>
+          <a:noFill/>
+          <a:ln/>
+        </p:spPr>
+        <p:txBody>
+          <a:bodyPr wrap="square" lIns="0" tIns="0" rIns="0" bIns="0" rtlCol="0" anchor="t"/>
+          <a:lstStyle/>
+          <a:p>
+            <a:pPr indent="0" marL="0">
+              <a:lnSpc>
+                <a:spcPct val="120000"/>
+              </a:lnSpc>
+              <a:buNone/>
+            </a:pPr>
+            <a:r>
+              <a:rPr lang="en-US" sz="1300" dirty="0">
+                <a:solidFill>
+                  <a:srgbClr val="4E5968"/>
+                </a:solidFill>
+                <a:latin typeface="Arial" pitchFamily="34" charset="0"/>
+                <a:ea typeface="Arial" pitchFamily="34" charset="-122"/>
+                <a:cs typeface="Arial" pitchFamily="34" charset="-120"/>
+              </a:rPr>
+              <a:t>고칠 곳과 판단할 곳을 원문과 함께 봅니다. 지금 이 앱으로 됩니다</a:t>
+            </a:r>
+            <a:endParaRPr lang="en-US" sz="1300" dirty="0"/>
+          </a:p>
+        </p:txBody>
+      </p:sp>
+      <p:sp>
+        <p:nvSpPr>
+          <p:cNvPr id="8" name="Shape 6"/>
+          <p:cNvSpPr/>
+          <p:nvPr/>
+        </p:nvSpPr>
+        <p:spPr>
+          <a:xfrm>
+            <a:off x="4181856" y="3703320"/>
+            <a:ext cx="219456" cy="0"/>
+          </a:xfrm>
+          <a:prstGeom prst="line">
+            <a:avLst/>
+          </a:prstGeom>
+          <a:noFill/>
+          <a:ln w="15875">
+            <a:solidFill>
+              <a:srgbClr val="3182F6"/>
+            </a:solidFill>
+            <a:prstDash val="solid"/>
+            <a:tailEnd type="triangle"/>
+          </a:ln>
+        </p:spPr>
+      </p:sp>
+      <p:sp>
+        <p:nvSpPr>
+          <p:cNvPr id="9" name="Shape 7"/>
+          <p:cNvSpPr/>
+          <p:nvPr/>
+        </p:nvSpPr>
+        <p:spPr>
+          <a:xfrm>
+            <a:off x="4428744" y="2606040"/>
+            <a:ext cx="3331464" cy="2194560"/>
+          </a:xfrm>
+          <a:prstGeom prst="roundRect">
+            <a:avLst>
+              <a:gd name="adj" fmla="val 3333"/>
             </a:avLst>
           </a:prstGeom>
           <a:solidFill>
@@ -3109,30 +2578,69 @@
       </p:sp>
       <p:sp>
         <p:nvSpPr>
-          <p:cNvPr id="23" name="Text 21"/>
-          <p:cNvSpPr/>
-          <p:nvPr/>
-        </p:nvSpPr>
-        <p:spPr>
-          <a:xfrm>
-            <a:off x="6812280" y="3108960"/>
-            <a:ext cx="1197864" cy="274320"/>
-          </a:xfrm>
-          <a:prstGeom prst="rect">
-            <a:avLst/>
-          </a:prstGeom>
-          <a:noFill/>
-          <a:ln/>
-        </p:spPr>
-        <p:txBody>
-          <a:bodyPr wrap="square" lIns="0" tIns="0" rIns="0" bIns="0" rtlCol="0" anchor="t"/>
-          <a:lstStyle/>
-          <a:p>
-            <a:pPr indent="0" marL="0">
-              <a:buNone/>
-            </a:pPr>
-            <a:r>
-              <a:rPr lang="en-US" sz="1200" b="1" dirty="0">
+          <p:cNvPr id="10" name="Text 8"/>
+          <p:cNvSpPr/>
+          <p:nvPr/>
+        </p:nvSpPr>
+        <p:spPr>
+          <a:xfrm>
+            <a:off x="4703064" y="2788920"/>
+            <a:ext cx="2782824" cy="274320"/>
+          </a:xfrm>
+          <a:prstGeom prst="rect">
+            <a:avLst/>
+          </a:prstGeom>
+          <a:noFill/>
+          <a:ln/>
+        </p:spPr>
+        <p:txBody>
+          <a:bodyPr wrap="square" lIns="0" tIns="0" rIns="0" bIns="0" rtlCol="0" anchor="t"/>
+          <a:lstStyle/>
+          <a:p>
+            <a:pPr indent="0" marL="0">
+              <a:buNone/>
+            </a:pPr>
+            <a:r>
+              <a:rPr lang="en-US" sz="1300" b="1" dirty="0">
+                <a:solidFill>
+                  <a:srgbClr val="3182F6"/>
+                </a:solidFill>
+                <a:latin typeface="Arial" pitchFamily="34" charset="0"/>
+                <a:ea typeface="Arial" pitchFamily="34" charset="-122"/>
+                <a:cs typeface="Arial" pitchFamily="34" charset="-120"/>
+              </a:rPr>
+              <a:t>접수 후 · 전문기관</a:t>
+            </a:r>
+            <a:endParaRPr lang="en-US" sz="1300" dirty="0"/>
+          </a:p>
+        </p:txBody>
+      </p:sp>
+      <p:sp>
+        <p:nvSpPr>
+          <p:cNvPr id="11" name="Text 9"/>
+          <p:cNvSpPr/>
+          <p:nvPr/>
+        </p:nvSpPr>
+        <p:spPr>
+          <a:xfrm>
+            <a:off x="4703064" y="3154680"/>
+            <a:ext cx="2782824" cy="457200"/>
+          </a:xfrm>
+          <a:prstGeom prst="rect">
+            <a:avLst/>
+          </a:prstGeom>
+          <a:noFill/>
+          <a:ln/>
+        </p:spPr>
+        <p:txBody>
+          <a:bodyPr wrap="square" lIns="0" tIns="0" rIns="0" bIns="0" rtlCol="0" anchor="t"/>
+          <a:lstStyle/>
+          <a:p>
+            <a:pPr indent="0" marL="0">
+              <a:buNone/>
+            </a:pPr>
+            <a:r>
+              <a:rPr lang="en-US" sz="2200" b="1" dirty="0">
                 <a:solidFill>
                   <a:srgbClr val="191F28"/>
                 </a:solidFill>
@@ -3140,77 +2648,41 @@
                 <a:ea typeface="Arial" pitchFamily="34" charset="-122"/>
                 <a:cs typeface="Arial" pitchFamily="34" charset="-120"/>
               </a:rPr>
-              <a:t>관점 1개</a:t>
-            </a:r>
-            <a:endParaRPr lang="en-US" sz="1200" dirty="0"/>
-          </a:p>
-        </p:txBody>
-      </p:sp>
-      <p:sp>
-        <p:nvSpPr>
-          <p:cNvPr id="24" name="Text 22"/>
-          <p:cNvSpPr/>
-          <p:nvPr/>
-        </p:nvSpPr>
-        <p:spPr>
-          <a:xfrm>
-            <a:off x="6812280" y="3474720"/>
-            <a:ext cx="1197864" cy="731520"/>
-          </a:xfrm>
-          <a:prstGeom prst="rect">
-            <a:avLst/>
-          </a:prstGeom>
-          <a:noFill/>
-          <a:ln/>
-        </p:spPr>
-        <p:txBody>
-          <a:bodyPr wrap="square" lIns="0" tIns="0" rIns="0" bIns="0" rtlCol="0" anchor="t"/>
-          <a:lstStyle/>
-          <a:p>
-            <a:pPr indent="0" marL="0">
-              <a:buNone/>
-            </a:pPr>
-            <a:r>
-              <a:rPr lang="en-US" sz="4200" b="1" dirty="0">
-                <a:solidFill>
-                  <a:srgbClr val="191F28"/>
-                </a:solidFill>
-                <a:latin typeface="Arial" pitchFamily="34" charset="0"/>
-                <a:ea typeface="Arial" pitchFamily="34" charset="-122"/>
-                <a:cs typeface="Arial" pitchFamily="34" charset="-120"/>
-              </a:rPr>
-              <a:t>3</a:t>
-            </a:r>
-            <a:endParaRPr lang="en-US" sz="4200" dirty="0"/>
-          </a:p>
-        </p:txBody>
-      </p:sp>
-      <p:sp>
-        <p:nvSpPr>
-          <p:cNvPr id="25" name="Text 23"/>
-          <p:cNvSpPr/>
-          <p:nvPr/>
-        </p:nvSpPr>
-        <p:spPr>
-          <a:xfrm>
-            <a:off x="6812280" y="4343400"/>
-            <a:ext cx="1197864" cy="274320"/>
-          </a:xfrm>
-          <a:prstGeom prst="rect">
-            <a:avLst/>
-          </a:prstGeom>
-          <a:noFill/>
-          <a:ln/>
-        </p:spPr>
-        <p:txBody>
-          <a:bodyPr wrap="square" lIns="0" tIns="0" rIns="0" bIns="0" rtlCol="0" anchor="t"/>
-          <a:lstStyle/>
-          <a:p>
-            <a:pPr indent="0" marL="0">
-              <a:buNone/>
-            </a:pPr>
-            <a:r>
-              <a:rPr lang="en-US" sz="1100" dirty="0">
+              <a:t>요건 사전검토</a:t>
+            </a:r>
+            <a:endParaRPr lang="en-US" sz="2200" dirty="0"/>
+          </a:p>
+        </p:txBody>
+      </p:sp>
+      <p:sp>
+        <p:nvSpPr>
+          <p:cNvPr id="12" name="Text 10"/>
+          <p:cNvSpPr/>
+          <p:nvPr/>
+        </p:nvSpPr>
+        <p:spPr>
+          <a:xfrm>
+            <a:off x="4703064" y="3749040"/>
+            <a:ext cx="2782824" cy="822960"/>
+          </a:xfrm>
+          <a:prstGeom prst="rect">
+            <a:avLst/>
+          </a:prstGeom>
+          <a:noFill/>
+          <a:ln/>
+        </p:spPr>
+        <p:txBody>
+          <a:bodyPr wrap="square" lIns="0" tIns="0" rIns="0" bIns="0" rtlCol="0" anchor="t"/>
+          <a:lstStyle/>
+          <a:p>
+            <a:pPr indent="0" marL="0">
+              <a:lnSpc>
+                <a:spcPct val="120000"/>
+              </a:lnSpc>
+              <a:buNone/>
+            </a:pPr>
+            <a:r>
+              <a:rPr lang="en-US" sz="1300" dirty="0">
                 <a:solidFill>
                   <a:srgbClr val="4E5968"/>
                 </a:solidFill>
@@ -3218,354 +2690,55 @@
                 <a:ea typeface="Arial" pitchFamily="34" charset="-122"/>
                 <a:cs typeface="Arial" pitchFamily="34" charset="-120"/>
               </a:rPr>
-              <a:t>찾은 곳 5/5</a:t>
-            </a:r>
-            <a:endParaRPr lang="en-US" sz="1100" dirty="0"/>
-          </a:p>
-        </p:txBody>
-      </p:sp>
-      <p:sp>
-        <p:nvSpPr>
-          <p:cNvPr id="26" name="Shape 24"/>
-          <p:cNvSpPr/>
-          <p:nvPr/>
-        </p:nvSpPr>
-        <p:spPr>
-          <a:xfrm>
-            <a:off x="8284464" y="2971800"/>
-            <a:ext cx="1472184" cy="1828800"/>
-          </a:xfrm>
-          <a:prstGeom prst="roundRect">
-            <a:avLst>
-              <a:gd name="adj" fmla="val 4969"/>
-            </a:avLst>
-          </a:prstGeom>
-          <a:solidFill>
-            <a:srgbClr val="EAF3FF"/>
-          </a:solidFill>
-          <a:ln w="12700">
+              <a:t>형식 미비와 서류 누락을 먼저 거릅니다. 첫 실증 목표</a:t>
+            </a:r>
+            <a:endParaRPr lang="en-US" sz="1300" dirty="0"/>
+          </a:p>
+        </p:txBody>
+      </p:sp>
+      <p:sp>
+        <p:nvSpPr>
+          <p:cNvPr id="13" name="Shape 11"/>
+          <p:cNvSpPr/>
+          <p:nvPr/>
+        </p:nvSpPr>
+        <p:spPr>
+          <a:xfrm>
+            <a:off x="7787640" y="3703320"/>
+            <a:ext cx="219456" cy="0"/>
+          </a:xfrm>
+          <a:prstGeom prst="line">
+            <a:avLst/>
+          </a:prstGeom>
+          <a:noFill/>
+          <a:ln w="15875">
             <a:solidFill>
               <a:srgbClr val="3182F6"/>
             </a:solidFill>
             <a:prstDash val="solid"/>
+            <a:tailEnd type="triangle"/>
           </a:ln>
         </p:spPr>
       </p:sp>
       <p:sp>
         <p:nvSpPr>
-          <p:cNvPr id="27" name="Text 25"/>
-          <p:cNvSpPr/>
-          <p:nvPr/>
-        </p:nvSpPr>
-        <p:spPr>
-          <a:xfrm>
-            <a:off x="8421624" y="3108960"/>
-            <a:ext cx="1197864" cy="274320"/>
-          </a:xfrm>
-          <a:prstGeom prst="rect">
-            <a:avLst/>
-          </a:prstGeom>
-          <a:noFill/>
-          <a:ln/>
-        </p:spPr>
-        <p:txBody>
-          <a:bodyPr wrap="square" lIns="0" tIns="0" rIns="0" bIns="0" rtlCol="0" anchor="t"/>
-          <a:lstStyle/>
-          <a:p>
-            <a:pPr indent="0" marL="0">
-              <a:buNone/>
-            </a:pPr>
-            <a:r>
-              <a:rPr lang="en-US" sz="1200" b="1" dirty="0">
-                <a:solidFill>
-                  <a:srgbClr val="191F28"/>
-                </a:solidFill>
-                <a:latin typeface="Arial" pitchFamily="34" charset="0"/>
-                <a:ea typeface="Arial" pitchFamily="34" charset="-122"/>
-                <a:cs typeface="Arial" pitchFamily="34" charset="-120"/>
-              </a:rPr>
-              <a:t>관점 6개</a:t>
-            </a:r>
-            <a:endParaRPr lang="en-US" sz="1200" dirty="0"/>
-          </a:p>
-        </p:txBody>
-      </p:sp>
-      <p:sp>
-        <p:nvSpPr>
-          <p:cNvPr id="28" name="Text 26"/>
-          <p:cNvSpPr/>
-          <p:nvPr/>
-        </p:nvSpPr>
-        <p:spPr>
-          <a:xfrm>
-            <a:off x="8421624" y="3474720"/>
-            <a:ext cx="1197864" cy="731520"/>
-          </a:xfrm>
-          <a:prstGeom prst="rect">
-            <a:avLst/>
-          </a:prstGeom>
-          <a:noFill/>
-          <a:ln/>
-        </p:spPr>
-        <p:txBody>
-          <a:bodyPr wrap="square" lIns="0" tIns="0" rIns="0" bIns="0" rtlCol="0" anchor="t"/>
-          <a:lstStyle/>
-          <a:p>
-            <a:pPr indent="0" marL="0">
-              <a:buNone/>
-            </a:pPr>
-            <a:r>
-              <a:rPr lang="en-US" sz="4200" b="1" dirty="0">
-                <a:solidFill>
-                  <a:srgbClr val="1B64DA"/>
-                </a:solidFill>
-                <a:latin typeface="Arial" pitchFamily="34" charset="0"/>
-                <a:ea typeface="Arial" pitchFamily="34" charset="-122"/>
-                <a:cs typeface="Arial" pitchFamily="34" charset="-120"/>
-              </a:rPr>
-              <a:t>0</a:t>
-            </a:r>
-            <a:endParaRPr lang="en-US" sz="4200" dirty="0"/>
-          </a:p>
-        </p:txBody>
-      </p:sp>
-      <p:sp>
-        <p:nvSpPr>
-          <p:cNvPr id="29" name="Text 27"/>
-          <p:cNvSpPr/>
-          <p:nvPr/>
-        </p:nvSpPr>
-        <p:spPr>
-          <a:xfrm>
-            <a:off x="8421624" y="4343400"/>
-            <a:ext cx="1197864" cy="274320"/>
-          </a:xfrm>
-          <a:prstGeom prst="rect">
-            <a:avLst/>
-          </a:prstGeom>
-          <a:noFill/>
-          <a:ln/>
-        </p:spPr>
-        <p:txBody>
-          <a:bodyPr wrap="square" lIns="0" tIns="0" rIns="0" bIns="0" rtlCol="0" anchor="t"/>
-          <a:lstStyle/>
-          <a:p>
-            <a:pPr indent="0" marL="0">
-              <a:buNone/>
-            </a:pPr>
-            <a:r>
-              <a:rPr lang="en-US" sz="1100" dirty="0">
-                <a:solidFill>
-                  <a:srgbClr val="4E5968"/>
-                </a:solidFill>
-                <a:latin typeface="Arial" pitchFamily="34" charset="0"/>
-                <a:ea typeface="Arial" pitchFamily="34" charset="-122"/>
-                <a:cs typeface="Arial" pitchFamily="34" charset="-120"/>
-              </a:rPr>
-              <a:t>찾은 곳 5/5</a:t>
-            </a:r>
-            <a:endParaRPr lang="en-US" sz="1100" dirty="0"/>
-          </a:p>
-        </p:txBody>
-      </p:sp>
-      <p:sp>
-        <p:nvSpPr>
-          <p:cNvPr id="30" name="Shape 28"/>
-          <p:cNvSpPr/>
-          <p:nvPr/>
-        </p:nvSpPr>
-        <p:spPr>
-          <a:xfrm>
-            <a:off x="9893808" y="2971800"/>
-            <a:ext cx="1472184" cy="1828800"/>
+          <p:cNvPr id="14" name="Shape 12"/>
+          <p:cNvSpPr/>
+          <p:nvPr/>
+        </p:nvSpPr>
+        <p:spPr>
+          <a:xfrm>
+            <a:off x="8034528" y="2606040"/>
+            <a:ext cx="3331464" cy="2194560"/>
           </a:xfrm>
           <a:prstGeom prst="roundRect">
             <a:avLst>
-              <a:gd name="adj" fmla="val 4969"/>
+              <a:gd name="adj" fmla="val 3333"/>
             </a:avLst>
           </a:prstGeom>
           <a:solidFill>
-            <a:srgbClr val="EAF3FF"/>
+            <a:srgbClr val="FFFFFF"/>
           </a:solidFill>
-          <a:ln w="12700">
-            <a:solidFill>
-              <a:srgbClr val="3182F6"/>
-            </a:solidFill>
-            <a:prstDash val="solid"/>
-          </a:ln>
-        </p:spPr>
-      </p:sp>
-      <p:sp>
-        <p:nvSpPr>
-          <p:cNvPr id="31" name="Text 29"/>
-          <p:cNvSpPr/>
-          <p:nvPr/>
-        </p:nvSpPr>
-        <p:spPr>
-          <a:xfrm>
-            <a:off x="10030968" y="3108960"/>
-            <a:ext cx="1197864" cy="274320"/>
-          </a:xfrm>
-          <a:prstGeom prst="rect">
-            <a:avLst/>
-          </a:prstGeom>
-          <a:noFill/>
-          <a:ln/>
-        </p:spPr>
-        <p:txBody>
-          <a:bodyPr wrap="square" lIns="0" tIns="0" rIns="0" bIns="0" rtlCol="0" anchor="t"/>
-          <a:lstStyle/>
-          <a:p>
-            <a:pPr indent="0" marL="0">
-              <a:buNone/>
-            </a:pPr>
-            <a:r>
-              <a:rPr lang="en-US" sz="1200" b="1" dirty="0">
-                <a:solidFill>
-                  <a:srgbClr val="191F28"/>
-                </a:solidFill>
-                <a:latin typeface="Arial" pitchFamily="34" charset="0"/>
-                <a:ea typeface="Arial" pitchFamily="34" charset="-122"/>
-                <a:cs typeface="Arial" pitchFamily="34" charset="-120"/>
-              </a:rPr>
-              <a:t>6개·3사</a:t>
-            </a:r>
-            <a:endParaRPr lang="en-US" sz="1200" dirty="0"/>
-          </a:p>
-        </p:txBody>
-      </p:sp>
-      <p:sp>
-        <p:nvSpPr>
-          <p:cNvPr id="32" name="Text 30"/>
-          <p:cNvSpPr/>
-          <p:nvPr/>
-        </p:nvSpPr>
-        <p:spPr>
-          <a:xfrm>
-            <a:off x="10030968" y="3474720"/>
-            <a:ext cx="1197864" cy="731520"/>
-          </a:xfrm>
-          <a:prstGeom prst="rect">
-            <a:avLst/>
-          </a:prstGeom>
-          <a:noFill/>
-          <a:ln/>
-        </p:spPr>
-        <p:txBody>
-          <a:bodyPr wrap="square" lIns="0" tIns="0" rIns="0" bIns="0" rtlCol="0" anchor="t"/>
-          <a:lstStyle/>
-          <a:p>
-            <a:pPr indent="0" marL="0">
-              <a:buNone/>
-            </a:pPr>
-            <a:r>
-              <a:rPr lang="en-US" sz="4200" b="1" dirty="0">
-                <a:solidFill>
-                  <a:srgbClr val="1B64DA"/>
-                </a:solidFill>
-                <a:latin typeface="Arial" pitchFamily="34" charset="0"/>
-                <a:ea typeface="Arial" pitchFamily="34" charset="-122"/>
-                <a:cs typeface="Arial" pitchFamily="34" charset="-120"/>
-              </a:rPr>
-              <a:t>0</a:t>
-            </a:r>
-            <a:endParaRPr lang="en-US" sz="4200" dirty="0"/>
-          </a:p>
-        </p:txBody>
-      </p:sp>
-      <p:sp>
-        <p:nvSpPr>
-          <p:cNvPr id="33" name="Text 31"/>
-          <p:cNvSpPr/>
-          <p:nvPr/>
-        </p:nvSpPr>
-        <p:spPr>
-          <a:xfrm>
-            <a:off x="10030968" y="4343400"/>
-            <a:ext cx="1197864" cy="274320"/>
-          </a:xfrm>
-          <a:prstGeom prst="rect">
-            <a:avLst/>
-          </a:prstGeom>
-          <a:noFill/>
-          <a:ln/>
-        </p:spPr>
-        <p:txBody>
-          <a:bodyPr wrap="square" lIns="0" tIns="0" rIns="0" bIns="0" rtlCol="0" anchor="t"/>
-          <a:lstStyle/>
-          <a:p>
-            <a:pPr indent="0" marL="0">
-              <a:buNone/>
-            </a:pPr>
-            <a:r>
-              <a:rPr lang="en-US" sz="1100" dirty="0">
-                <a:solidFill>
-                  <a:srgbClr val="4E5968"/>
-                </a:solidFill>
-                <a:latin typeface="Arial" pitchFamily="34" charset="0"/>
-                <a:ea typeface="Arial" pitchFamily="34" charset="-122"/>
-                <a:cs typeface="Arial" pitchFamily="34" charset="-120"/>
-              </a:rPr>
-              <a:t>찾은 곳 4/5</a:t>
-            </a:r>
-            <a:endParaRPr lang="en-US" sz="1100" dirty="0"/>
-          </a:p>
-        </p:txBody>
-      </p:sp>
-      <p:sp>
-        <p:nvSpPr>
-          <p:cNvPr id="34" name="Text 32"/>
-          <p:cNvSpPr/>
-          <p:nvPr/>
-        </p:nvSpPr>
-        <p:spPr>
-          <a:xfrm>
-            <a:off x="6675120" y="5120640"/>
-            <a:ext cx="4690872" cy="274320"/>
-          </a:xfrm>
-          <a:prstGeom prst="rect">
-            <a:avLst/>
-          </a:prstGeom>
-          <a:noFill/>
-          <a:ln/>
-        </p:spPr>
-        <p:txBody>
-          <a:bodyPr wrap="square" lIns="0" tIns="0" rIns="0" bIns="0" rtlCol="0" anchor="t"/>
-          <a:lstStyle/>
-          <a:p>
-            <a:pPr indent="0" marL="0">
-              <a:buNone/>
-            </a:pPr>
-            <a:r>
-              <a:rPr lang="en-US" sz="1200" dirty="0">
-                <a:solidFill>
-                  <a:srgbClr val="4E5968"/>
-                </a:solidFill>
-                <a:latin typeface="Arial" pitchFamily="34" charset="0"/>
-                <a:ea typeface="Arial" pitchFamily="34" charset="-122"/>
-                <a:cs typeface="Arial" pitchFamily="34" charset="-120"/>
-              </a:rPr>
-              <a:t>회사 모델을 섞는 효과는 이번 표본에선 보이지 않았습니다</a:t>
-            </a:r>
-            <a:endParaRPr lang="en-US" sz="1200" dirty="0"/>
-          </a:p>
-        </p:txBody>
-      </p:sp>
-      <p:sp>
-        <p:nvSpPr>
-          <p:cNvPr id="35" name="Shape 33"/>
-          <p:cNvSpPr/>
-          <p:nvPr/>
-        </p:nvSpPr>
-        <p:spPr>
-          <a:xfrm>
-            <a:off x="822960" y="5623560"/>
-            <a:ext cx="10543032" cy="0"/>
-          </a:xfrm>
-          <a:prstGeom prst="line">
-            <a:avLst/>
-          </a:prstGeom>
-          <a:noFill/>
           <a:ln w="12700">
             <a:solidFill>
               <a:srgbClr val="E5E8EB"/>
@@ -3576,30 +2749,69 @@
       </p:sp>
       <p:sp>
         <p:nvSpPr>
-          <p:cNvPr id="36" name="Text 34"/>
-          <p:cNvSpPr/>
-          <p:nvPr/>
-        </p:nvSpPr>
-        <p:spPr>
-          <a:xfrm>
-            <a:off x="822960" y="5760720"/>
-            <a:ext cx="10543032" cy="320040"/>
-          </a:xfrm>
-          <a:prstGeom prst="rect">
-            <a:avLst/>
-          </a:prstGeom>
-          <a:noFill/>
-          <a:ln/>
-        </p:spPr>
-        <p:txBody>
-          <a:bodyPr wrap="square" lIns="0" tIns="0" rIns="0" bIns="0" rtlCol="0" anchor="t"/>
-          <a:lstStyle/>
-          <a:p>
-            <a:pPr indent="0" marL="0">
-              <a:buNone/>
-            </a:pPr>
-            <a:r>
-              <a:rPr lang="en-US" sz="1400" b="1" dirty="0">
+          <p:cNvPr id="15" name="Text 13"/>
+          <p:cNvSpPr/>
+          <p:nvPr/>
+        </p:nvSpPr>
+        <p:spPr>
+          <a:xfrm>
+            <a:off x="8308848" y="2788920"/>
+            <a:ext cx="2782824" cy="274320"/>
+          </a:xfrm>
+          <a:prstGeom prst="rect">
+            <a:avLst/>
+          </a:prstGeom>
+          <a:noFill/>
+          <a:ln/>
+        </p:spPr>
+        <p:txBody>
+          <a:bodyPr wrap="square" lIns="0" tIns="0" rIns="0" bIns="0" rtlCol="0" anchor="t"/>
+          <a:lstStyle/>
+          <a:p>
+            <a:pPr indent="0" marL="0">
+              <a:buNone/>
+            </a:pPr>
+            <a:r>
+              <a:rPr lang="en-US" sz="1300" b="1" dirty="0">
+                <a:solidFill>
+                  <a:srgbClr val="3182F6"/>
+                </a:solidFill>
+                <a:latin typeface="Arial" pitchFamily="34" charset="0"/>
+                <a:ea typeface="Arial" pitchFamily="34" charset="-122"/>
+                <a:cs typeface="Arial" pitchFamily="34" charset="-120"/>
+              </a:rPr>
+              <a:t>심사 중 · 평가위원</a:t>
+            </a:r>
+            <a:endParaRPr lang="en-US" sz="1300" dirty="0"/>
+          </a:p>
+        </p:txBody>
+      </p:sp>
+      <p:sp>
+        <p:nvSpPr>
+          <p:cNvPr id="16" name="Text 14"/>
+          <p:cNvSpPr/>
+          <p:nvPr/>
+        </p:nvSpPr>
+        <p:spPr>
+          <a:xfrm>
+            <a:off x="8308848" y="3154680"/>
+            <a:ext cx="2782824" cy="457200"/>
+          </a:xfrm>
+          <a:prstGeom prst="rect">
+            <a:avLst/>
+          </a:prstGeom>
+          <a:noFill/>
+          <a:ln/>
+        </p:spPr>
+        <p:txBody>
+          <a:bodyPr wrap="square" lIns="0" tIns="0" rIns="0" bIns="0" rtlCol="0" anchor="t"/>
+          <a:lstStyle/>
+          <a:p>
+            <a:pPr indent="0" marL="0">
+              <a:buNone/>
+            </a:pPr>
+            <a:r>
+              <a:rPr lang="en-US" sz="2200" b="1" dirty="0">
                 <a:solidFill>
                   <a:srgbClr val="191F28"/>
                 </a:solidFill>
@@ -3607,38 +2819,147 @@
                 <a:ea typeface="Arial" pitchFamily="34" charset="-122"/>
                 <a:cs typeface="Arial" pitchFamily="34" charset="-120"/>
               </a:rPr>
-              <a:t>처음 보는 공고에서 뽑은 요건 51개를 원문과 대조해 보니, 지어낸 요건은 0개였습니다</a:t>
-            </a:r>
-            <a:endParaRPr lang="en-US" sz="1400" dirty="0"/>
-          </a:p>
-        </p:txBody>
-      </p:sp>
-      <p:sp>
-        <p:nvSpPr>
-          <p:cNvPr id="37" name="Text 35"/>
-          <p:cNvSpPr/>
-          <p:nvPr/>
-        </p:nvSpPr>
-        <p:spPr>
-          <a:xfrm>
-            <a:off x="822960" y="6355080"/>
-            <a:ext cx="10543032" cy="274320"/>
-          </a:xfrm>
-          <a:prstGeom prst="rect">
-            <a:avLst/>
-          </a:prstGeom>
-          <a:noFill/>
-          <a:ln/>
-        </p:spPr>
-        <p:txBody>
-          <a:bodyPr wrap="square" lIns="0" tIns="0" rIns="0" bIns="0" rtlCol="0" anchor="t"/>
-          <a:lstStyle/>
-          <a:p>
-            <a:pPr indent="0" marL="0">
-              <a:buNone/>
-            </a:pPr>
-            <a:r>
-              <a:rPr lang="en-US" sz="1000" dirty="0">
+              <a:t>근거 위치 표시</a:t>
+            </a:r>
+            <a:endParaRPr lang="en-US" sz="2200" dirty="0"/>
+          </a:p>
+        </p:txBody>
+      </p:sp>
+      <p:sp>
+        <p:nvSpPr>
+          <p:cNvPr id="17" name="Text 15"/>
+          <p:cNvSpPr/>
+          <p:nvPr/>
+        </p:nvSpPr>
+        <p:spPr>
+          <a:xfrm>
+            <a:off x="8308848" y="3749040"/>
+            <a:ext cx="2782824" cy="822960"/>
+          </a:xfrm>
+          <a:prstGeom prst="rect">
+            <a:avLst/>
+          </a:prstGeom>
+          <a:noFill/>
+          <a:ln/>
+        </p:spPr>
+        <p:txBody>
+          <a:bodyPr wrap="square" lIns="0" tIns="0" rIns="0" bIns="0" rtlCol="0" anchor="t"/>
+          <a:lstStyle/>
+          <a:p>
+            <a:pPr indent="0" marL="0">
+              <a:lnSpc>
+                <a:spcPct val="120000"/>
+              </a:lnSpc>
+              <a:buNone/>
+            </a:pPr>
+            <a:r>
+              <a:rPr lang="en-US" sz="1300" dirty="0">
+                <a:solidFill>
+                  <a:srgbClr val="4E5968"/>
+                </a:solidFill>
+                <a:latin typeface="Arial" pitchFamily="34" charset="0"/>
+                <a:ea typeface="Arial" pitchFamily="34" charset="-122"/>
+                <a:cs typeface="Arial" pitchFamily="34" charset="-120"/>
+              </a:rPr>
+              <a:t>지표마다 제안서의 근거 문장을 옆에 띄웁니다. 판정은 사람</a:t>
+            </a:r>
+            <a:endParaRPr lang="en-US" sz="1300" dirty="0"/>
+          </a:p>
+        </p:txBody>
+      </p:sp>
+      <p:sp>
+        <p:nvSpPr>
+          <p:cNvPr id="18" name="Text 16"/>
+          <p:cNvSpPr/>
+          <p:nvPr/>
+        </p:nvSpPr>
+        <p:spPr>
+          <a:xfrm>
+            <a:off x="822960" y="5093208"/>
+            <a:ext cx="548640" cy="365760"/>
+          </a:xfrm>
+          <a:prstGeom prst="rect">
+            <a:avLst/>
+          </a:prstGeom>
+          <a:noFill/>
+          <a:ln/>
+        </p:spPr>
+        <p:txBody>
+          <a:bodyPr wrap="square" lIns="0" tIns="0" rIns="0" bIns="0" rtlCol="0" anchor="t"/>
+          <a:lstStyle/>
+          <a:p>
+            <a:pPr indent="0" marL="0">
+              <a:buNone/>
+            </a:pPr>
+            <a:endParaRPr lang="en-US" sz="1800" dirty="0"/>
+          </a:p>
+        </p:txBody>
+      </p:sp>
+      <p:sp>
+        <p:nvSpPr>
+          <p:cNvPr id="19" name="Text 17"/>
+          <p:cNvSpPr/>
+          <p:nvPr/>
+        </p:nvSpPr>
+        <p:spPr>
+          <a:xfrm>
+            <a:off x="1463040" y="5074920"/>
+            <a:ext cx="4448556" cy="384048"/>
+          </a:xfrm>
+          <a:prstGeom prst="rect">
+            <a:avLst/>
+          </a:prstGeom>
+          <a:noFill/>
+          <a:ln/>
+        </p:spPr>
+        <p:txBody>
+          <a:bodyPr wrap="square" lIns="0" tIns="0" rIns="0" bIns="0" rtlCol="0" anchor="t"/>
+          <a:lstStyle/>
+          <a:p>
+            <a:pPr indent="0" marL="0">
+              <a:buNone/>
+            </a:pPr>
+            <a:r>
+              <a:rPr lang="en-US" sz="1500" b="1" dirty="0">
+                <a:solidFill>
+                  <a:srgbClr val="191F28"/>
+                </a:solidFill>
+                <a:latin typeface="Arial" pitchFamily="34" charset="0"/>
+                <a:ea typeface="Arial" pitchFamily="34" charset="-122"/>
+                <a:cs typeface="Arial" pitchFamily="34" charset="-120"/>
+              </a:rPr>
+              <a:t>실제 심사 의견은 평가기관에 있습니다</a:t>
+            </a:r>
+            <a:endParaRPr lang="en-US" sz="1500" dirty="0"/>
+          </a:p>
+        </p:txBody>
+      </p:sp>
+      <p:sp>
+        <p:nvSpPr>
+          <p:cNvPr id="20" name="Text 18"/>
+          <p:cNvSpPr/>
+          <p:nvPr/>
+        </p:nvSpPr>
+        <p:spPr>
+          <a:xfrm>
+            <a:off x="1463040" y="5486400"/>
+            <a:ext cx="4448556" cy="365760"/>
+          </a:xfrm>
+          <a:prstGeom prst="rect">
+            <a:avLst/>
+          </a:prstGeom>
+          <a:noFill/>
+          <a:ln/>
+        </p:spPr>
+        <p:txBody>
+          <a:bodyPr wrap="square" lIns="0" tIns="0" rIns="0" bIns="0" rtlCol="0" anchor="t"/>
+          <a:lstStyle/>
+          <a:p>
+            <a:pPr indent="0" marL="0">
+              <a:buNone/>
+            </a:pPr>
+            <a:r>
+              <a:rPr lang="en-US" sz="1200" dirty="0">
                 <a:solidFill>
                   <a:srgbClr val="8B95A1"/>
                 </a:solidFill>
@@ -3646,9 +2967,115 @@
                 <a:ea typeface="Arial" pitchFamily="34" charset="-122"/>
                 <a:cs typeface="Arial" pitchFamily="34" charset="-120"/>
               </a:rPr>
-              <a:t>정답표와 대조 감사는 파이프라인과 다른 회사 모델(Claude)이 작성, 사람 검수는 아님  ·  data/eval, data/holdout 공개</a:t>
-            </a:r>
-            <a:endParaRPr lang="en-US" sz="1000" dirty="0"/>
+              <a:t>기관과 연계하면 관점을 실제 심사 의견 유형으로 맞출 수 있습니다</a:t>
+            </a:r>
+            <a:endParaRPr lang="en-US" sz="1200" dirty="0"/>
+          </a:p>
+        </p:txBody>
+      </p:sp>
+      <p:sp>
+        <p:nvSpPr>
+          <p:cNvPr id="21" name="Text 19"/>
+          <p:cNvSpPr/>
+          <p:nvPr/>
+        </p:nvSpPr>
+        <p:spPr>
+          <a:xfrm>
+            <a:off x="6094476" y="5093208"/>
+            <a:ext cx="548640" cy="365760"/>
+          </a:xfrm>
+          <a:prstGeom prst="rect">
+            <a:avLst/>
+          </a:prstGeom>
+          <a:noFill/>
+          <a:ln/>
+        </p:spPr>
+        <p:txBody>
+          <a:bodyPr wrap="square" lIns="0" tIns="0" rIns="0" bIns="0" rtlCol="0" anchor="t"/>
+          <a:lstStyle/>
+          <a:p>
+            <a:pPr indent="0" marL="0">
+              <a:buNone/>
+            </a:pPr>
+            <a:endParaRPr lang="en-US" sz="1800" dirty="0"/>
+          </a:p>
+        </p:txBody>
+      </p:sp>
+      <p:sp>
+        <p:nvSpPr>
+          <p:cNvPr id="22" name="Text 20"/>
+          <p:cNvSpPr/>
+          <p:nvPr/>
+        </p:nvSpPr>
+        <p:spPr>
+          <a:xfrm>
+            <a:off x="6734556" y="5074920"/>
+            <a:ext cx="4631436" cy="384048"/>
+          </a:xfrm>
+          <a:prstGeom prst="rect">
+            <a:avLst/>
+          </a:prstGeom>
+          <a:noFill/>
+          <a:ln/>
+        </p:spPr>
+        <p:txBody>
+          <a:bodyPr wrap="square" lIns="0" tIns="0" rIns="0" bIns="0" rtlCol="0" anchor="t"/>
+          <a:lstStyle/>
+          <a:p>
+            <a:pPr indent="0" marL="0">
+              <a:buNone/>
+            </a:pPr>
+            <a:r>
+              <a:rPr lang="en-US" sz="1500" b="1" dirty="0">
+                <a:solidFill>
+                  <a:srgbClr val="191F28"/>
+                </a:solidFill>
+                <a:latin typeface="Arial" pitchFamily="34" charset="0"/>
+                <a:ea typeface="Arial" pitchFamily="34" charset="-122"/>
+                <a:cs typeface="Arial" pitchFamily="34" charset="-120"/>
+              </a:rPr>
+              <a:t>NAIS 플랫폼에 도구로 꽂힙니다</a:t>
+            </a:r>
+            <a:endParaRPr lang="en-US" sz="1500" dirty="0"/>
+          </a:p>
+        </p:txBody>
+      </p:sp>
+      <p:sp>
+        <p:nvSpPr>
+          <p:cNvPr id="23" name="Text 21"/>
+          <p:cNvSpPr/>
+          <p:nvPr/>
+        </p:nvSpPr>
+        <p:spPr>
+          <a:xfrm>
+            <a:off x="6734556" y="5486400"/>
+            <a:ext cx="4631436" cy="365760"/>
+          </a:xfrm>
+          <a:prstGeom prst="rect">
+            <a:avLst/>
+          </a:prstGeom>
+          <a:noFill/>
+          <a:ln/>
+        </p:spPr>
+        <p:txBody>
+          <a:bodyPr wrap="square" lIns="0" tIns="0" rIns="0" bIns="0" rtlCol="0" anchor="t"/>
+          <a:lstStyle/>
+          <a:p>
+            <a:pPr indent="0" marL="0">
+              <a:buNone/>
+            </a:pPr>
+            <a:r>
+              <a:rPr lang="en-US" sz="1200" dirty="0">
+                <a:solidFill>
+                  <a:srgbClr val="8B95A1"/>
+                </a:solidFill>
+                <a:latin typeface="Arial" pitchFamily="34" charset="0"/>
+                <a:ea typeface="Arial" pitchFamily="34" charset="-122"/>
+                <a:cs typeface="Arial" pitchFamily="34" charset="-120"/>
+              </a:rPr>
+              <a:t>AI 사이언티스트가 과제 신청까지 하는 날, 그 마지막 점검</a:t>
+            </a:r>
+            <a:endParaRPr lang="en-US" sz="1200" dirty="0"/>
           </a:p>
         </p:txBody>
       </p:sp>
@@ -3692,7 +3119,7 @@
         </p:nvSpPr>
         <p:spPr>
           <a:xfrm>
-            <a:off x="822960" y="548640"/>
+            <a:off x="822960" y="1051560"/>
             <a:ext cx="7315200" cy="365760"/>
           </a:xfrm>
           <a:prstGeom prst="rect">
@@ -3717,7 +3144,7 @@
                 <a:ea typeface="Arial" pitchFamily="34" charset="-122"/>
                 <a:cs typeface="Arial" pitchFamily="34" charset="-120"/>
               </a:rPr>
-              <a:t>우리 먼저</a:t>
+              <a:t>지금 직접 해 보세요</a:t>
             </a:r>
             <a:endParaRPr lang="en-US" sz="1400" dirty="0"/>
           </a:p>
@@ -3731,8 +3158,8 @@
         </p:nvSpPr>
         <p:spPr>
           <a:xfrm>
-            <a:off x="795528" y="960120"/>
-            <a:ext cx="10543032" cy="1371600"/>
+            <a:off x="795528" y="1645920"/>
+            <a:ext cx="10543032" cy="2103120"/>
           </a:xfrm>
           <a:prstGeom prst="rect">
             <a:avLst/>
@@ -3751,7 +3178,7 @@
               <a:buNone/>
             </a:pPr>
             <a:r>
-              <a:rPr lang="en-US" sz="3400" b="1" dirty="0">
+              <a:rPr lang="en-US" sz="5400" b="1" dirty="0">
                 <a:solidFill>
                   <a:srgbClr val="191F28"/>
                 </a:solidFill>
@@ -3759,9 +3186,9 @@
                 <a:ea typeface="Arial" pitchFamily="34" charset="-122"/>
                 <a:cs typeface="Arial" pitchFamily="34" charset="-120"/>
               </a:rPr>
-              <a:t>이 대회 심사표로,</a:t>
-            </a:r>
-            <a:endParaRPr lang="en-US" sz="3400" dirty="0"/>
+              <a:t>제출 전에,</a:t>
+            </a:r>
+            <a:endParaRPr lang="en-US" sz="5400" dirty="0"/>
           </a:p>
           <a:p>
             <a:pPr indent="0" marL="0">
@@ -3771,7 +3198,7 @@
               <a:buNone/>
             </a:pPr>
             <a:r>
-              <a:rPr lang="en-US" sz="3400" b="1" dirty="0">
+              <a:rPr lang="en-US" sz="5400" b="1" dirty="0">
                 <a:solidFill>
                   <a:srgbClr val="3182F6"/>
                 </a:solidFill>
@@ -3779,7 +3206,7 @@
                 <a:ea typeface="Arial" pitchFamily="34" charset="-122"/>
                 <a:cs typeface="Arial" pitchFamily="34" charset="-120"/>
               </a:rPr>
-              <a:t>저희 기획서</a:t>
+              <a:t>빈칸</a:t>
             </a:r>
             <a:pPr indent="0" marL="0">
               <a:lnSpc>
@@ -3788,7 +3215,7 @@
               <a:buNone/>
             </a:pPr>
             <a:r>
-              <a:rPr lang="en-US" sz="3400" b="1" dirty="0">
+              <a:rPr lang="en-US" sz="5400" b="1" dirty="0">
                 <a:solidFill>
                   <a:srgbClr val="191F28"/>
                 </a:solidFill>
@@ -3796,9 +3223,9 @@
                 <a:ea typeface="Arial" pitchFamily="34" charset="-122"/>
                 <a:cs typeface="Arial" pitchFamily="34" charset="-120"/>
               </a:rPr>
-              <a:t>부터 검사했습니다</a:t>
-            </a:r>
-            <a:endParaRPr lang="en-US" sz="3400" dirty="0"/>
+              <a:t>부터.</a:t>
+            </a:r>
+            <a:endParaRPr lang="en-US" sz="5400" dirty="0"/>
           </a:p>
         </p:txBody>
       </p:sp>
@@ -3810,34 +3237,57 @@
         </p:nvSpPr>
         <p:spPr>
           <a:xfrm>
-            <a:off x="822960" y="2606040"/>
-            <a:ext cx="5303520" cy="274320"/>
-          </a:xfrm>
-          <a:prstGeom prst="rect">
-            <a:avLst/>
-          </a:prstGeom>
-          <a:noFill/>
-          <a:ln/>
-        </p:spPr>
-        <p:txBody>
-          <a:bodyPr wrap="square" lIns="0" tIns="0" rIns="0" bIns="0" rtlCol="0" anchor="t"/>
-          <a:lstStyle/>
-          <a:p>
-            <a:pPr indent="0" marL="0">
-              <a:buNone/>
-            </a:pPr>
-            <a:r>
-              <a:rPr lang="en-US" sz="1300" b="1" dirty="0">
-                <a:solidFill>
-                  <a:srgbClr val="8B95A1"/>
-                </a:solidFill>
-                <a:latin typeface="Arial" pitchFamily="34" charset="0"/>
-                <a:ea typeface="Arial" pitchFamily="34" charset="-122"/>
-                <a:cs typeface="Arial" pitchFamily="34" charset="-120"/>
-              </a:rPr>
-              <a:t>관점별로 가장 걸린 점</a:t>
-            </a:r>
-            <a:endParaRPr lang="en-US" sz="1300" dirty="0"/>
+            <a:off x="822960" y="4114800"/>
+            <a:ext cx="6035040" cy="822960"/>
+          </a:xfrm>
+          <a:prstGeom prst="rect">
+            <a:avLst/>
+          </a:prstGeom>
+          <a:noFill/>
+          <a:ln/>
+        </p:spPr>
+        <p:txBody>
+          <a:bodyPr wrap="square" lIns="0" tIns="0" rIns="0" bIns="0" rtlCol="0" anchor="t"/>
+          <a:lstStyle/>
+          <a:p>
+            <a:pPr indent="0" marL="0">
+              <a:lnSpc>
+                <a:spcPct val="135000"/>
+              </a:lnSpc>
+              <a:buNone/>
+            </a:pPr>
+            <a:r>
+              <a:rPr lang="en-US" sz="1500" dirty="0">
+                <a:solidFill>
+                  <a:srgbClr val="4E5968"/>
+                </a:solidFill>
+                <a:latin typeface="Arial" pitchFamily="34" charset="0"/>
+                <a:ea typeface="Arial" pitchFamily="34" charset="-122"/>
+                <a:cs typeface="Arial" pitchFamily="34" charset="-120"/>
+              </a:rPr>
+              <a:t>공고 링크 하나, 초안 하나면 됩니다.</a:t>
+            </a:r>
+            <a:endParaRPr lang="en-US" sz="1500" dirty="0"/>
+          </a:p>
+          <a:p>
+            <a:pPr indent="0" marL="0">
+              <a:lnSpc>
+                <a:spcPct val="135000"/>
+              </a:lnSpc>
+              <a:buNone/>
+            </a:pPr>
+            <a:r>
+              <a:rPr lang="en-US" sz="1500" dirty="0">
+                <a:solidFill>
+                  <a:srgbClr val="4E5968"/>
+                </a:solidFill>
+                <a:latin typeface="Arial" pitchFamily="34" charset="0"/>
+                <a:ea typeface="Arial" pitchFamily="34" charset="-122"/>
+                <a:cs typeface="Arial" pitchFamily="34" charset="-120"/>
+              </a:rPr>
+              <a:t>커밋 49개, 테스트 99개, 첫 코드 커밋 09/30 19:19</a:t>
+            </a:r>
+            <a:endParaRPr lang="en-US" sz="1500" dirty="0"/>
           </a:p>
         </p:txBody>
       </p:sp>
@@ -3849,102 +3299,24 @@
         </p:nvSpPr>
         <p:spPr>
           <a:xfrm>
-            <a:off x="6720840" y="2606040"/>
-            <a:ext cx="4572000" cy="274320"/>
-          </a:xfrm>
-          <a:prstGeom prst="rect">
-            <a:avLst/>
-          </a:prstGeom>
-          <a:noFill/>
-          <a:ln/>
-        </p:spPr>
-        <p:txBody>
-          <a:bodyPr wrap="square" lIns="0" tIns="0" rIns="0" bIns="0" rtlCol="0" anchor="t"/>
-          <a:lstStyle/>
-          <a:p>
-            <a:pPr indent="0" marL="0">
-              <a:buNone/>
-            </a:pPr>
-            <a:r>
-              <a:rPr lang="en-US" sz="1300" b="1" dirty="0">
-                <a:solidFill>
-                  <a:srgbClr val="8B95A1"/>
-                </a:solidFill>
-                <a:latin typeface="Arial" pitchFamily="34" charset="0"/>
-                <a:ea typeface="Arial" pitchFamily="34" charset="-122"/>
-                <a:cs typeface="Arial" pitchFamily="34" charset="-120"/>
-              </a:rPr>
-              <a:t>그래서 오늘</a:t>
-            </a:r>
-            <a:endParaRPr lang="en-US" sz="1300" dirty="0"/>
-          </a:p>
-        </p:txBody>
-      </p:sp>
-      <p:sp>
-        <p:nvSpPr>
-          <p:cNvPr id="6" name="Text 4"/>
-          <p:cNvSpPr/>
-          <p:nvPr/>
-        </p:nvSpPr>
-        <p:spPr>
-          <a:xfrm>
-            <a:off x="822960" y="3017520"/>
-            <a:ext cx="5303520" cy="274320"/>
-          </a:xfrm>
-          <a:prstGeom prst="rect">
-            <a:avLst/>
-          </a:prstGeom>
-          <a:noFill/>
-          <a:ln/>
-        </p:spPr>
-        <p:txBody>
-          <a:bodyPr wrap="square" lIns="0" tIns="0" rIns="0" bIns="0" rtlCol="0" anchor="t"/>
-          <a:lstStyle/>
-          <a:p>
-            <a:pPr indent="0" marL="0">
-              <a:buNone/>
-            </a:pPr>
-            <a:r>
-              <a:rPr lang="en-US" sz="1200" b="1" dirty="0">
-                <a:solidFill>
-                  <a:srgbClr val="3182F6"/>
-                </a:solidFill>
-                <a:latin typeface="Arial" pitchFamily="34" charset="0"/>
-                <a:ea typeface="Arial" pitchFamily="34" charset="-122"/>
-                <a:cs typeface="Arial" pitchFamily="34" charset="-120"/>
-              </a:rPr>
-              <a:t>세부 전문형</a:t>
-            </a:r>
-            <a:endParaRPr lang="en-US" sz="1200" dirty="0"/>
-          </a:p>
-        </p:txBody>
-      </p:sp>
-      <p:sp>
-        <p:nvSpPr>
-          <p:cNvPr id="7" name="Text 5"/>
-          <p:cNvSpPr/>
-          <p:nvPr/>
-        </p:nvSpPr>
-        <p:spPr>
-          <a:xfrm>
-            <a:off x="822960" y="3310128"/>
-            <a:ext cx="5303520" cy="365760"/>
-          </a:xfrm>
-          <a:prstGeom prst="rect">
-            <a:avLst/>
-          </a:prstGeom>
-          <a:noFill/>
-          <a:ln/>
-        </p:spPr>
-        <p:txBody>
-          <a:bodyPr wrap="square" lIns="0" tIns="0" rIns="0" bIns="0" rtlCol="0" anchor="t"/>
-          <a:lstStyle/>
-          <a:p>
-            <a:pPr indent="0" marL="0">
-              <a:buNone/>
-            </a:pPr>
-            <a:r>
-              <a:rPr lang="en-US" sz="1500" b="1" dirty="0">
+            <a:off x="822960" y="5852160"/>
+            <a:ext cx="5486400" cy="411480"/>
+          </a:xfrm>
+          <a:prstGeom prst="rect">
+            <a:avLst/>
+          </a:prstGeom>
+          <a:noFill/>
+          <a:ln/>
+        </p:spPr>
+        <p:txBody>
+          <a:bodyPr wrap="square" lIns="0" tIns="0" rIns="0" bIns="0" rtlCol="0" anchor="t"/>
+          <a:lstStyle/>
+          <a:p>
+            <a:pPr indent="0" marL="0">
+              <a:buNone/>
+            </a:pPr>
+            <a:r>
+              <a:rPr lang="en-US" sz="1600" b="1" dirty="0">
                 <a:solidFill>
                   <a:srgbClr val="191F28"/>
                 </a:solidFill>
@@ -3952,90 +3324,31 @@
                 <a:ea typeface="Arial" pitchFamily="34" charset="-122"/>
                 <a:cs typeface="Arial" pitchFamily="34" charset="-120"/>
               </a:rPr>
-              <a:t>혁신성 차별성 구체성 부족</a:t>
-            </a:r>
-            <a:endParaRPr lang="en-US" sz="1500" dirty="0"/>
-          </a:p>
-        </p:txBody>
-      </p:sp>
-      <p:sp>
-        <p:nvSpPr>
-          <p:cNvPr id="8" name="Shape 6"/>
-          <p:cNvSpPr/>
-          <p:nvPr/>
-        </p:nvSpPr>
-        <p:spPr>
-          <a:xfrm>
-            <a:off x="6309360" y="3474720"/>
-            <a:ext cx="274320" cy="0"/>
-          </a:xfrm>
-          <a:prstGeom prst="line">
-            <a:avLst/>
-          </a:prstGeom>
-          <a:noFill/>
-          <a:ln w="15875">
-            <a:solidFill>
-              <a:srgbClr val="8B95A1"/>
-            </a:solidFill>
-            <a:prstDash val="solid"/>
-            <a:tailEnd type="triangle"/>
-          </a:ln>
-        </p:spPr>
-      </p:sp>
-      <p:sp>
-        <p:nvSpPr>
-          <p:cNvPr id="9" name="Text 7"/>
-          <p:cNvSpPr/>
-          <p:nvPr/>
-        </p:nvSpPr>
-        <p:spPr>
-          <a:xfrm>
-            <a:off x="6720840" y="3310128"/>
-            <a:ext cx="4645152" cy="365760"/>
-          </a:xfrm>
-          <a:prstGeom prst="rect">
-            <a:avLst/>
-          </a:prstGeom>
-          <a:noFill/>
-          <a:ln/>
-        </p:spPr>
-        <p:txBody>
-          <a:bodyPr wrap="square" lIns="0" tIns="0" rIns="0" bIns="0" rtlCol="0" anchor="t"/>
-          <a:lstStyle/>
-          <a:p>
-            <a:pPr indent="0" marL="0">
-              <a:buNone/>
-            </a:pPr>
-            <a:r>
-              <a:rPr lang="en-US" sz="1500" dirty="0">
-                <a:solidFill>
-                  <a:srgbClr val="191F28"/>
-                </a:solidFill>
-                <a:latin typeface="Arial" pitchFamily="34" charset="0"/>
-                <a:ea typeface="Arial" pitchFamily="34" charset="-122"/>
-                <a:cs typeface="Arial" pitchFamily="34" charset="-120"/>
-              </a:rPr>
-              <a:t>구조의 차별점과 관점 수 실험을 준비했습니다</a:t>
-            </a:r>
-            <a:endParaRPr lang="en-US" sz="1500" dirty="0"/>
-          </a:p>
-        </p:txBody>
-      </p:sp>
-      <p:sp>
-        <p:nvSpPr>
-          <p:cNvPr id="10" name="Shape 8"/>
-          <p:cNvSpPr/>
-          <p:nvPr/>
-        </p:nvSpPr>
-        <p:spPr>
-          <a:xfrm>
-            <a:off x="822960" y="3822192"/>
-            <a:ext cx="10543032" cy="0"/>
-          </a:xfrm>
-          <a:prstGeom prst="line">
-            <a:avLst/>
-          </a:prstGeom>
-          <a:noFill/>
+              <a:t>팀 루미아 · 김태걸 · 박세훈</a:t>
+            </a:r>
+            <a:endParaRPr lang="en-US" sz="1600" dirty="0"/>
+          </a:p>
+        </p:txBody>
+      </p:sp>
+      <p:sp>
+        <p:nvSpPr>
+          <p:cNvPr id="6" name="Shape 4"/>
+          <p:cNvSpPr/>
+          <p:nvPr/>
+        </p:nvSpPr>
+        <p:spPr>
+          <a:xfrm>
+            <a:off x="7269480" y="1828800"/>
+            <a:ext cx="1874520" cy="2788920"/>
+          </a:xfrm>
+          <a:prstGeom prst="roundRect">
+            <a:avLst>
+              <a:gd name="adj" fmla="val 3902"/>
+            </a:avLst>
+          </a:prstGeom>
+          <a:solidFill>
+            <a:srgbClr val="FFFFFF"/>
+          </a:solidFill>
           <a:ln w="12700">
             <a:solidFill>
               <a:srgbClr val="E5E8EB"/>
@@ -4044,71 +3357,56 @@
           </a:ln>
         </p:spPr>
       </p:sp>
-      <p:sp>
-        <p:nvSpPr>
-          <p:cNvPr id="11" name="Text 9"/>
-          <p:cNvSpPr/>
-          <p:nvPr/>
-        </p:nvSpPr>
-        <p:spPr>
-          <a:xfrm>
-            <a:off x="822960" y="3931920"/>
-            <a:ext cx="5303520" cy="274320"/>
-          </a:xfrm>
-          <a:prstGeom prst="rect">
-            <a:avLst/>
-          </a:prstGeom>
-          <a:noFill/>
-          <a:ln/>
-        </p:spPr>
-        <p:txBody>
-          <a:bodyPr wrap="square" lIns="0" tIns="0" rIns="0" bIns="0" rtlCol="0" anchor="t"/>
-          <a:lstStyle/>
-          <a:p>
-            <a:pPr indent="0" marL="0">
-              <a:buNone/>
-            </a:pPr>
-            <a:r>
-              <a:rPr lang="en-US" sz="1200" b="1" dirty="0">
-                <a:solidFill>
-                  <a:srgbClr val="3182F6"/>
-                </a:solidFill>
-                <a:latin typeface="Arial" pitchFamily="34" charset="0"/>
-                <a:ea typeface="Arial" pitchFamily="34" charset="-122"/>
-                <a:cs typeface="Arial" pitchFamily="34" charset="-120"/>
-              </a:rPr>
-              <a:t>사업성·시장형</a:t>
-            </a:r>
-            <a:endParaRPr lang="en-US" sz="1200" dirty="0"/>
-          </a:p>
-        </p:txBody>
-      </p:sp>
-      <p:sp>
-        <p:nvSpPr>
-          <p:cNvPr id="12" name="Text 10"/>
-          <p:cNvSpPr/>
-          <p:nvPr/>
-        </p:nvSpPr>
-        <p:spPr>
-          <a:xfrm>
-            <a:off x="822960" y="4224528"/>
-            <a:ext cx="5303520" cy="365760"/>
-          </a:xfrm>
-          <a:prstGeom prst="rect">
-            <a:avLst/>
-          </a:prstGeom>
-          <a:noFill/>
-          <a:ln/>
-        </p:spPr>
-        <p:txBody>
-          <a:bodyPr wrap="square" lIns="0" tIns="0" rIns="0" bIns="0" rtlCol="0" anchor="t"/>
-          <a:lstStyle/>
-          <a:p>
-            <a:pPr indent="0" marL="0">
-              <a:buNone/>
-            </a:pPr>
-            <a:r>
-              <a:rPr lang="en-US" sz="1500" b="1" dirty="0">
+      <p:pic>
+        <p:nvPicPr>
+          <p:cNvPr id="7" name="Image 0" descr="/Users/ryugi62/dev/rfp-to-fit/deliver/deck/build/img/qr-live.png">    </p:cNvPr>
+          <p:cNvPicPr>
+            <a:picLocks noChangeAspect="1"/>
+          </p:cNvPicPr>
+          <p:nvPr/>
+        </p:nvPicPr>
+        <p:blipFill>
+          <a:blip r:embed="rId1"/>
+          <a:stretch>
+            <a:fillRect/>
+          </a:stretch>
+        </p:blipFill>
+        <p:spPr>
+          <a:xfrm>
+            <a:off x="7525512" y="2084832"/>
+            <a:ext cx="1371600" cy="1371600"/>
+          </a:xfrm>
+          <a:prstGeom prst="rect">
+            <a:avLst/>
+          </a:prstGeom>
+        </p:spPr>
+      </p:pic>
+      <p:sp>
+        <p:nvSpPr>
+          <p:cNvPr id="8" name="Text 5"/>
+          <p:cNvSpPr/>
+          <p:nvPr/>
+        </p:nvSpPr>
+        <p:spPr>
+          <a:xfrm>
+            <a:off x="7452360" y="3639312"/>
+            <a:ext cx="1508760" cy="320040"/>
+          </a:xfrm>
+          <a:prstGeom prst="rect">
+            <a:avLst/>
+          </a:prstGeom>
+          <a:noFill/>
+          <a:ln/>
+        </p:spPr>
+        <p:txBody>
+          <a:bodyPr wrap="square" lIns="0" tIns="0" rIns="0" bIns="0" rtlCol="0" anchor="t"/>
+          <a:lstStyle/>
+          <a:p>
+            <a:pPr indent="0" marL="0">
+              <a:buNone/>
+            </a:pPr>
+            <a:r>
+              <a:rPr lang="en-US" sz="1400" b="1" dirty="0">
                 <a:solidFill>
                   <a:srgbClr val="191F28"/>
                 </a:solidFill>
@@ -4116,90 +3414,73 @@
                 <a:ea typeface="Arial" pitchFamily="34" charset="-122"/>
                 <a:cs typeface="Arial" pitchFamily="34" charset="-120"/>
               </a:rPr>
-              <a:t>시장수요는 보이나 실증·구매주체가 약함</a:t>
-            </a:r>
-            <a:endParaRPr lang="en-US" sz="1500" dirty="0"/>
-          </a:p>
-        </p:txBody>
-      </p:sp>
-      <p:sp>
-        <p:nvSpPr>
-          <p:cNvPr id="13" name="Shape 11"/>
-          <p:cNvSpPr/>
-          <p:nvPr/>
-        </p:nvSpPr>
-        <p:spPr>
-          <a:xfrm>
-            <a:off x="6309360" y="4389120"/>
-            <a:ext cx="274320" cy="0"/>
-          </a:xfrm>
-          <a:prstGeom prst="line">
-            <a:avLst/>
-          </a:prstGeom>
-          <a:noFill/>
-          <a:ln w="15875">
-            <a:solidFill>
-              <a:srgbClr val="8B95A1"/>
-            </a:solidFill>
-            <a:prstDash val="solid"/>
-            <a:tailEnd type="triangle"/>
-          </a:ln>
-        </p:spPr>
-      </p:sp>
-      <p:sp>
-        <p:nvSpPr>
-          <p:cNvPr id="14" name="Text 12"/>
-          <p:cNvSpPr/>
-          <p:nvPr/>
-        </p:nvSpPr>
-        <p:spPr>
-          <a:xfrm>
-            <a:off x="6720840" y="4224528"/>
-            <a:ext cx="4645152" cy="365760"/>
-          </a:xfrm>
-          <a:prstGeom prst="rect">
-            <a:avLst/>
-          </a:prstGeom>
-          <a:noFill/>
-          <a:ln/>
-        </p:spPr>
-        <p:txBody>
-          <a:bodyPr wrap="square" lIns="0" tIns="0" rIns="0" bIns="0" rtlCol="0" anchor="t"/>
-          <a:lstStyle/>
-          <a:p>
-            <a:pPr indent="0" marL="0">
-              <a:buNone/>
-            </a:pPr>
-            <a:r>
-              <a:rPr lang="en-US" sz="1500" dirty="0">
-                <a:solidFill>
-                  <a:srgbClr val="191F28"/>
-                </a:solidFill>
-                <a:latin typeface="Arial" pitchFamily="34" charset="0"/>
-                <a:ea typeface="Arial" pitchFamily="34" charset="-122"/>
-                <a:cs typeface="Arial" pitchFamily="34" charset="-120"/>
-              </a:rPr>
-              <a:t>첫 실증 대상을 전문기관 사전검토로 정했습니다</a:t>
-            </a:r>
-            <a:endParaRPr lang="en-US" sz="1500" dirty="0"/>
-          </a:p>
-        </p:txBody>
-      </p:sp>
-      <p:sp>
-        <p:nvSpPr>
-          <p:cNvPr id="15" name="Shape 13"/>
-          <p:cNvSpPr/>
-          <p:nvPr/>
-        </p:nvSpPr>
-        <p:spPr>
-          <a:xfrm>
-            <a:off x="822960" y="4736592"/>
-            <a:ext cx="10543032" cy="0"/>
-          </a:xfrm>
-          <a:prstGeom prst="line">
-            <a:avLst/>
-          </a:prstGeom>
-          <a:noFill/>
+              <a:t>라이브 앱</a:t>
+            </a:r>
+            <a:endParaRPr lang="en-US" sz="1400" dirty="0"/>
+          </a:p>
+        </p:txBody>
+      </p:sp>
+      <p:sp>
+        <p:nvSpPr>
+          <p:cNvPr id="9" name="Text 6"/>
+          <p:cNvSpPr/>
+          <p:nvPr/>
+        </p:nvSpPr>
+        <p:spPr>
+          <a:xfrm>
+            <a:off x="7452360" y="4005072"/>
+            <a:ext cx="1554480" cy="914400"/>
+          </a:xfrm>
+          <a:prstGeom prst="rect">
+            <a:avLst/>
+          </a:prstGeom>
+          <a:noFill/>
+          <a:ln/>
+        </p:spPr>
+        <p:txBody>
+          <a:bodyPr wrap="square" lIns="0" tIns="0" rIns="0" bIns="0" rtlCol="0" anchor="t"/>
+          <a:lstStyle/>
+          <a:p>
+            <a:pPr indent="0" marL="0">
+              <a:lnSpc>
+                <a:spcPct val="115000"/>
+              </a:lnSpc>
+              <a:buNone/>
+            </a:pPr>
+            <a:r>
+              <a:rPr lang="en-US" sz="950" dirty="0">
+                <a:solidFill>
+                  <a:srgbClr val="8B95A1"/>
+                </a:solidFill>
+                <a:latin typeface="Arial" pitchFamily="34" charset="0"/>
+                <a:ea typeface="Arial" pitchFamily="34" charset="-122"/>
+                <a:cs typeface="Arial" pitchFamily="34" charset="-120"/>
+              </a:rPr>
+              <a:t>ryugi62.github.io/rfp-to-fit/</a:t>
+            </a:r>
+            <a:endParaRPr lang="en-US" sz="950" dirty="0"/>
+          </a:p>
+        </p:txBody>
+      </p:sp>
+      <p:sp>
+        <p:nvSpPr>
+          <p:cNvPr id="10" name="Shape 7"/>
+          <p:cNvSpPr/>
+          <p:nvPr/>
+        </p:nvSpPr>
+        <p:spPr>
+          <a:xfrm>
+            <a:off x="9372600" y="1828800"/>
+            <a:ext cx="1874520" cy="2788920"/>
+          </a:xfrm>
+          <a:prstGeom prst="roundRect">
+            <a:avLst>
+              <a:gd name="adj" fmla="val 3902"/>
+            </a:avLst>
+          </a:prstGeom>
+          <a:solidFill>
+            <a:srgbClr val="FFFFFF"/>
+          </a:solidFill>
           <a:ln w="12700">
             <a:solidFill>
               <a:srgbClr val="E5E8EB"/>
@@ -4208,71 +3489,56 @@
           </a:ln>
         </p:spPr>
       </p:sp>
-      <p:sp>
-        <p:nvSpPr>
-          <p:cNvPr id="16" name="Text 14"/>
-          <p:cNvSpPr/>
-          <p:nvPr/>
-        </p:nvSpPr>
-        <p:spPr>
-          <a:xfrm>
-            <a:off x="822960" y="4846320"/>
-            <a:ext cx="5303520" cy="274320"/>
-          </a:xfrm>
-          <a:prstGeom prst="rect">
-            <a:avLst/>
-          </a:prstGeom>
-          <a:noFill/>
-          <a:ln/>
-        </p:spPr>
-        <p:txBody>
-          <a:bodyPr wrap="square" lIns="0" tIns="0" rIns="0" bIns="0" rtlCol="0" anchor="t"/>
-          <a:lstStyle/>
-          <a:p>
-            <a:pPr indent="0" marL="0">
-              <a:buNone/>
-            </a:pPr>
-            <a:r>
-              <a:rPr lang="en-US" sz="1200" b="1" dirty="0">
-                <a:solidFill>
-                  <a:srgbClr val="3182F6"/>
-                </a:solidFill>
-                <a:latin typeface="Arial" pitchFamily="34" charset="0"/>
-                <a:ea typeface="Arial" pitchFamily="34" charset="-122"/>
-                <a:cs typeface="Arial" pitchFamily="34" charset="-120"/>
-              </a:rPr>
-              <a:t>행정·관리형</a:t>
-            </a:r>
-            <a:endParaRPr lang="en-US" sz="1200" dirty="0"/>
-          </a:p>
-        </p:txBody>
-      </p:sp>
-      <p:sp>
-        <p:nvSpPr>
-          <p:cNvPr id="17" name="Text 15"/>
-          <p:cNvSpPr/>
-          <p:nvPr/>
-        </p:nvSpPr>
-        <p:spPr>
-          <a:xfrm>
-            <a:off x="822960" y="5138928"/>
-            <a:ext cx="5303520" cy="365760"/>
-          </a:xfrm>
-          <a:prstGeom prst="rect">
-            <a:avLst/>
-          </a:prstGeom>
-          <a:noFill/>
-          <a:ln/>
-        </p:spPr>
-        <p:txBody>
-          <a:bodyPr wrap="square" lIns="0" tIns="0" rIns="0" bIns="0" rtlCol="0" anchor="t"/>
-          <a:lstStyle/>
-          <a:p>
-            <a:pPr indent="0" marL="0">
-              <a:buNone/>
-            </a:pPr>
-            <a:r>
-              <a:rPr lang="en-US" sz="1500" b="1" dirty="0">
+      <p:pic>
+        <p:nvPicPr>
+          <p:cNvPr id="11" name="Image 1" descr="/Users/ryugi62/dev/rfp-to-fit/deliver/deck/build/img/qr-repo.png">    </p:cNvPr>
+          <p:cNvPicPr>
+            <a:picLocks noChangeAspect="1"/>
+          </p:cNvPicPr>
+          <p:nvPr/>
+        </p:nvPicPr>
+        <p:blipFill>
+          <a:blip r:embed="rId2"/>
+          <a:stretch>
+            <a:fillRect/>
+          </a:stretch>
+        </p:blipFill>
+        <p:spPr>
+          <a:xfrm>
+            <a:off x="9628632" y="2084832"/>
+            <a:ext cx="1371600" cy="1371600"/>
+          </a:xfrm>
+          <a:prstGeom prst="rect">
+            <a:avLst/>
+          </a:prstGeom>
+        </p:spPr>
+      </p:pic>
+      <p:sp>
+        <p:nvSpPr>
+          <p:cNvPr id="12" name="Text 8"/>
+          <p:cNvSpPr/>
+          <p:nvPr/>
+        </p:nvSpPr>
+        <p:spPr>
+          <a:xfrm>
+            <a:off x="9555480" y="3639312"/>
+            <a:ext cx="1508760" cy="320040"/>
+          </a:xfrm>
+          <a:prstGeom prst="rect">
+            <a:avLst/>
+          </a:prstGeom>
+          <a:noFill/>
+          <a:ln/>
+        </p:spPr>
+        <p:txBody>
+          <a:bodyPr wrap="square" lIns="0" tIns="0" rIns="0" bIns="0" rtlCol="0" anchor="t"/>
+          <a:lstStyle/>
+          <a:p>
+            <a:pPr indent="0" marL="0">
+              <a:buNone/>
+            </a:pPr>
+            <a:r>
+              <a:rPr lang="en-US" sz="1400" b="1" dirty="0">
                 <a:solidFill>
                   <a:srgbClr val="191F28"/>
                 </a:solidFill>
@@ -4280,111 +3546,51 @@
                 <a:ea typeface="Arial" pitchFamily="34" charset="-122"/>
                 <a:cs typeface="Arial" pitchFamily="34" charset="-120"/>
               </a:rPr>
-              <a:t>해커톤 기간 내 구현 계획의 구체성 부족</a:t>
-            </a:r>
-            <a:endParaRPr lang="en-US" sz="1500" dirty="0"/>
-          </a:p>
-        </p:txBody>
-      </p:sp>
-      <p:sp>
-        <p:nvSpPr>
-          <p:cNvPr id="18" name="Shape 16"/>
-          <p:cNvSpPr/>
-          <p:nvPr/>
-        </p:nvSpPr>
-        <p:spPr>
-          <a:xfrm>
-            <a:off x="6309360" y="5303520"/>
-            <a:ext cx="274320" cy="0"/>
-          </a:xfrm>
-          <a:prstGeom prst="line">
-            <a:avLst/>
-          </a:prstGeom>
-          <a:noFill/>
-          <a:ln w="15875">
-            <a:solidFill>
-              <a:srgbClr val="8B95A1"/>
-            </a:solidFill>
-            <a:prstDash val="solid"/>
-            <a:tailEnd type="triangle"/>
-          </a:ln>
-        </p:spPr>
-      </p:sp>
-      <p:sp>
-        <p:nvSpPr>
-          <p:cNvPr id="19" name="Text 17"/>
-          <p:cNvSpPr/>
-          <p:nvPr/>
-        </p:nvSpPr>
-        <p:spPr>
-          <a:xfrm>
-            <a:off x="6720840" y="5138928"/>
-            <a:ext cx="4645152" cy="365760"/>
-          </a:xfrm>
-          <a:prstGeom prst="rect">
-            <a:avLst/>
-          </a:prstGeom>
-          <a:noFill/>
-          <a:ln/>
-        </p:spPr>
-        <p:txBody>
-          <a:bodyPr wrap="square" lIns="0" tIns="0" rIns="0" bIns="0" rtlCol="0" anchor="t"/>
-          <a:lstStyle/>
-          <a:p>
-            <a:pPr indent="0" marL="0">
-              <a:buNone/>
-            </a:pPr>
-            <a:r>
-              <a:rPr lang="en-US" sz="1500" dirty="0">
-                <a:solidFill>
-                  <a:srgbClr val="191F28"/>
-                </a:solidFill>
-                <a:latin typeface="Arial" pitchFamily="34" charset="0"/>
-                <a:ea typeface="Arial" pitchFamily="34" charset="-122"/>
-                <a:cs typeface="Arial" pitchFamily="34" charset="-120"/>
-              </a:rPr>
-              <a:t>계획 대신 구현 결과와 커밋 기록을 가져왔습니다</a:t>
-            </a:r>
-            <a:endParaRPr lang="en-US" sz="1500" dirty="0"/>
-          </a:p>
-        </p:txBody>
-      </p:sp>
-      <p:sp>
-        <p:nvSpPr>
-          <p:cNvPr id="20" name="Text 18"/>
-          <p:cNvSpPr/>
-          <p:nvPr/>
-        </p:nvSpPr>
-        <p:spPr>
-          <a:xfrm>
-            <a:off x="822960" y="5897880"/>
-            <a:ext cx="10543032" cy="320040"/>
-          </a:xfrm>
-          <a:prstGeom prst="rect">
-            <a:avLst/>
-          </a:prstGeom>
-          <a:noFill/>
-          <a:ln/>
-        </p:spPr>
-        <p:txBody>
-          <a:bodyPr wrap="square" lIns="0" tIns="0" rIns="0" bIns="0" rtlCol="0" anchor="t"/>
-          <a:lstStyle/>
-          <a:p>
-            <a:pPr indent="0" marL="0">
-              <a:buNone/>
-            </a:pPr>
-            <a:r>
-              <a:rPr lang="en-US" sz="1300" dirty="0">
-                <a:solidFill>
-                  <a:srgbClr val="4E5968"/>
-                </a:solidFill>
-                <a:latin typeface="Arial" pitchFamily="34" charset="0"/>
-                <a:ea typeface="Arial" pitchFamily="34" charset="-122"/>
-                <a:cs typeface="Arial" pitchFamily="34" charset="-120"/>
-              </a:rPr>
-              <a:t>결과를 맞히려던 게 아니라, 발표 전에 받을 질문을 먼저 받아 본 것입니다.</a:t>
-            </a:r>
-            <a:endParaRPr lang="en-US" sz="1300" dirty="0"/>
+              <a:t>GitHub</a:t>
+            </a:r>
+            <a:endParaRPr lang="en-US" sz="1400" dirty="0"/>
+          </a:p>
+        </p:txBody>
+      </p:sp>
+      <p:sp>
+        <p:nvSpPr>
+          <p:cNvPr id="13" name="Text 9"/>
+          <p:cNvSpPr/>
+          <p:nvPr/>
+        </p:nvSpPr>
+        <p:spPr>
+          <a:xfrm>
+            <a:off x="9555480" y="4005072"/>
+            <a:ext cx="1554480" cy="914400"/>
+          </a:xfrm>
+          <a:prstGeom prst="rect">
+            <a:avLst/>
+          </a:prstGeom>
+          <a:noFill/>
+          <a:ln/>
+        </p:spPr>
+        <p:txBody>
+          <a:bodyPr wrap="square" lIns="0" tIns="0" rIns="0" bIns="0" rtlCol="0" anchor="t"/>
+          <a:lstStyle/>
+          <a:p>
+            <a:pPr indent="0" marL="0">
+              <a:lnSpc>
+                <a:spcPct val="115000"/>
+              </a:lnSpc>
+              <a:buNone/>
+            </a:pPr>
+            <a:r>
+              <a:rPr lang="en-US" sz="950" dirty="0">
+                <a:solidFill>
+                  <a:srgbClr val="8B95A1"/>
+                </a:solidFill>
+                <a:latin typeface="Arial" pitchFamily="34" charset="0"/>
+                <a:ea typeface="Arial" pitchFamily="34" charset="-122"/>
+                <a:cs typeface="Arial" pitchFamily="34" charset="-120"/>
+              </a:rPr>
+              <a:t>github.com/Ryugi62/rfp-to-fit</a:t>
+            </a:r>
+            <a:endParaRPr lang="en-US" sz="950" dirty="0"/>
           </a:p>
         </p:txBody>
       </p:sp>
@@ -4453,7 +3659,7 @@
                 <a:ea typeface="Arial" pitchFamily="34" charset="-122"/>
                 <a:cs typeface="Arial" pitchFamily="34" charset="-120"/>
               </a:rPr>
-              <a:t>확장</a:t>
+              <a:t>부록 · MCP 도구</a:t>
             </a:r>
             <a:endParaRPr lang="en-US" sz="1400" dirty="0"/>
           </a:p>
@@ -4495,7 +3701,7 @@
                 <a:ea typeface="Arial" pitchFamily="34" charset="-122"/>
                 <a:cs typeface="Arial" pitchFamily="34" charset="-120"/>
               </a:rPr>
-              <a:t>제출 전에서 심사까지,</a:t>
+              <a:t>같은 검사 도구를,</a:t>
             </a:r>
             <a:endParaRPr lang="en-US" sz="3400" dirty="0"/>
           </a:p>
@@ -4515,7 +3721,7 @@
                 <a:ea typeface="Arial" pitchFamily="34" charset="-122"/>
                 <a:cs typeface="Arial" pitchFamily="34" charset="-120"/>
               </a:rPr>
-              <a:t>같은 엔진</a:t>
+              <a:t>다른 AI 비서</a:t>
             </a:r>
             <a:pPr indent="0" marL="0">
               <a:lnSpc>
@@ -4532,7 +3738,7 @@
                 <a:ea typeface="Arial" pitchFamily="34" charset="-122"/>
                 <a:cs typeface="Arial" pitchFamily="34" charset="-120"/>
               </a:rPr>
-              <a:t>으로 갑니다</a:t>
+              <a:t>도 씁니다</a:t>
             </a:r>
             <a:endParaRPr lang="en-US" sz="3400" dirty="0"/>
           </a:p>
@@ -4540,26 +3746,377 @@
       </p:sp>
       <p:sp>
         <p:nvSpPr>
-          <p:cNvPr id="4" name="Shape 2"/>
-          <p:cNvSpPr/>
-          <p:nvPr/>
-        </p:nvSpPr>
-        <p:spPr>
-          <a:xfrm>
-            <a:off x="822960" y="2606040"/>
-            <a:ext cx="3331464" cy="2194560"/>
+          <p:cNvPr id="4" name="Text 2"/>
+          <p:cNvSpPr/>
+          <p:nvPr/>
+        </p:nvSpPr>
+        <p:spPr>
+          <a:xfrm>
+            <a:off x="822960" y="2715768"/>
+            <a:ext cx="548640" cy="365760"/>
+          </a:xfrm>
+          <a:prstGeom prst="rect">
+            <a:avLst/>
+          </a:prstGeom>
+          <a:noFill/>
+          <a:ln/>
+        </p:spPr>
+        <p:txBody>
+          <a:bodyPr wrap="square" lIns="0" tIns="0" rIns="0" bIns="0" rtlCol="0" anchor="t"/>
+          <a:lstStyle/>
+          <a:p>
+            <a:pPr indent="0" marL="0">
+              <a:buNone/>
+            </a:pPr>
+            <a:r>
+              <a:rPr lang="en-US" sz="1800" b="1" dirty="0">
+                <a:solidFill>
+                  <a:srgbClr val="3182F6"/>
+                </a:solidFill>
+                <a:latin typeface="Arial" pitchFamily="34" charset="0"/>
+                <a:ea typeface="Arial" pitchFamily="34" charset="-122"/>
+                <a:cs typeface="Arial" pitchFamily="34" charset="-120"/>
+              </a:rPr>
+              <a:t>01</a:t>
+            </a:r>
+            <a:endParaRPr lang="en-US" sz="1800" dirty="0"/>
+          </a:p>
+        </p:txBody>
+      </p:sp>
+      <p:sp>
+        <p:nvSpPr>
+          <p:cNvPr id="5" name="Text 3"/>
+          <p:cNvSpPr/>
+          <p:nvPr/>
+        </p:nvSpPr>
+        <p:spPr>
+          <a:xfrm>
+            <a:off x="1463040" y="2697480"/>
+            <a:ext cx="5029200" cy="384048"/>
+          </a:xfrm>
+          <a:prstGeom prst="rect">
+            <a:avLst/>
+          </a:prstGeom>
+          <a:noFill/>
+          <a:ln/>
+        </p:spPr>
+        <p:txBody>
+          <a:bodyPr wrap="square" lIns="0" tIns="0" rIns="0" bIns="0" rtlCol="0" anchor="t"/>
+          <a:lstStyle/>
+          <a:p>
+            <a:pPr indent="0" marL="0">
+              <a:buNone/>
+            </a:pPr>
+            <a:r>
+              <a:rPr lang="en-US" sz="1800" b="1" dirty="0">
+                <a:solidFill>
+                  <a:srgbClr val="191F28"/>
+                </a:solidFill>
+                <a:latin typeface="Arial" pitchFamily="34" charset="0"/>
+                <a:ea typeface="Arial" pitchFamily="34" charset="-122"/>
+                <a:cs typeface="Arial" pitchFamily="34" charset="-120"/>
+              </a:rPr>
+              <a:t>search_prior_art</a:t>
+            </a:r>
+            <a:endParaRPr lang="en-US" sz="1800" dirty="0"/>
+          </a:p>
+        </p:txBody>
+      </p:sp>
+      <p:sp>
+        <p:nvSpPr>
+          <p:cNvPr id="6" name="Text 4"/>
+          <p:cNvSpPr/>
+          <p:nvPr/>
+        </p:nvSpPr>
+        <p:spPr>
+          <a:xfrm>
+            <a:off x="1463040" y="3108960"/>
+            <a:ext cx="5029200" cy="365760"/>
+          </a:xfrm>
+          <a:prstGeom prst="rect">
+            <a:avLst/>
+          </a:prstGeom>
+          <a:noFill/>
+          <a:ln/>
+        </p:spPr>
+        <p:txBody>
+          <a:bodyPr wrap="square" lIns="0" tIns="0" rIns="0" bIns="0" rtlCol="0" anchor="t"/>
+          <a:lstStyle/>
+          <a:p>
+            <a:pPr indent="0" marL="0">
+              <a:buNone/>
+            </a:pPr>
+            <a:r>
+              <a:rPr lang="en-US" sz="1250" dirty="0">
+                <a:solidFill>
+                  <a:srgbClr val="8B95A1"/>
+                </a:solidFill>
+                <a:latin typeface="Arial" pitchFamily="34" charset="0"/>
+                <a:ea typeface="Arial" pitchFamily="34" charset="-122"/>
+                <a:cs typeface="Arial" pitchFamily="34" charset="-120"/>
+              </a:rPr>
+              <a:t>학술 DB에서 선행연구를 찾습니다. OpenAlex가 막히면 Crossref로 넘어갑니다</a:t>
+            </a:r>
+            <a:endParaRPr lang="en-US" sz="1250" dirty="0"/>
+          </a:p>
+        </p:txBody>
+      </p:sp>
+      <p:sp>
+        <p:nvSpPr>
+          <p:cNvPr id="7" name="Text 5"/>
+          <p:cNvSpPr/>
+          <p:nvPr/>
+        </p:nvSpPr>
+        <p:spPr>
+          <a:xfrm>
+            <a:off x="822960" y="3721608"/>
+            <a:ext cx="548640" cy="365760"/>
+          </a:xfrm>
+          <a:prstGeom prst="rect">
+            <a:avLst/>
+          </a:prstGeom>
+          <a:noFill/>
+          <a:ln/>
+        </p:spPr>
+        <p:txBody>
+          <a:bodyPr wrap="square" lIns="0" tIns="0" rIns="0" bIns="0" rtlCol="0" anchor="t"/>
+          <a:lstStyle/>
+          <a:p>
+            <a:pPr indent="0" marL="0">
+              <a:buNone/>
+            </a:pPr>
+            <a:r>
+              <a:rPr lang="en-US" sz="1800" b="1" dirty="0">
+                <a:solidFill>
+                  <a:srgbClr val="3182F6"/>
+                </a:solidFill>
+                <a:latin typeface="Arial" pitchFamily="34" charset="0"/>
+                <a:ea typeface="Arial" pitchFamily="34" charset="-122"/>
+                <a:cs typeface="Arial" pitchFamily="34" charset="-120"/>
+              </a:rPr>
+              <a:t>02</a:t>
+            </a:r>
+            <a:endParaRPr lang="en-US" sz="1800" dirty="0"/>
+          </a:p>
+        </p:txBody>
+      </p:sp>
+      <p:sp>
+        <p:nvSpPr>
+          <p:cNvPr id="8" name="Text 6"/>
+          <p:cNvSpPr/>
+          <p:nvPr/>
+        </p:nvSpPr>
+        <p:spPr>
+          <a:xfrm>
+            <a:off x="1463040" y="3703320"/>
+            <a:ext cx="5029200" cy="384048"/>
+          </a:xfrm>
+          <a:prstGeom prst="rect">
+            <a:avLst/>
+          </a:prstGeom>
+          <a:noFill/>
+          <a:ln/>
+        </p:spPr>
+        <p:txBody>
+          <a:bodyPr wrap="square" lIns="0" tIns="0" rIns="0" bIns="0" rtlCol="0" anchor="t"/>
+          <a:lstStyle/>
+          <a:p>
+            <a:pPr indent="0" marL="0">
+              <a:buNone/>
+            </a:pPr>
+            <a:r>
+              <a:rPr lang="en-US" sz="1800" b="1" dirty="0">
+                <a:solidFill>
+                  <a:srgbClr val="191F28"/>
+                </a:solidFill>
+                <a:latin typeface="Arial" pitchFamily="34" charset="0"/>
+                <a:ea typeface="Arial" pitchFamily="34" charset="-122"/>
+                <a:cs typeface="Arial" pitchFamily="34" charset="-120"/>
+              </a:rPr>
+              <a:t>check_quote</a:t>
+            </a:r>
+            <a:endParaRPr lang="en-US" sz="1800" dirty="0"/>
+          </a:p>
+        </p:txBody>
+      </p:sp>
+      <p:sp>
+        <p:nvSpPr>
+          <p:cNvPr id="9" name="Text 7"/>
+          <p:cNvSpPr/>
+          <p:nvPr/>
+        </p:nvSpPr>
+        <p:spPr>
+          <a:xfrm>
+            <a:off x="1463040" y="4114800"/>
+            <a:ext cx="5029200" cy="365760"/>
+          </a:xfrm>
+          <a:prstGeom prst="rect">
+            <a:avLst/>
+          </a:prstGeom>
+          <a:noFill/>
+          <a:ln/>
+        </p:spPr>
+        <p:txBody>
+          <a:bodyPr wrap="square" lIns="0" tIns="0" rIns="0" bIns="0" rtlCol="0" anchor="t"/>
+          <a:lstStyle/>
+          <a:p>
+            <a:pPr indent="0" marL="0">
+              <a:buNone/>
+            </a:pPr>
+            <a:r>
+              <a:rPr lang="en-US" sz="1250" dirty="0">
+                <a:solidFill>
+                  <a:srgbClr val="8B95A1"/>
+                </a:solidFill>
+                <a:latin typeface="Arial" pitchFamily="34" charset="0"/>
+                <a:ea typeface="Arial" pitchFamily="34" charset="-122"/>
+                <a:cs typeface="Arial" pitchFamily="34" charset="-120"/>
+              </a:rPr>
+              <a:t>인용이 원문에 있는지 참, 거짓으로 답합니다</a:t>
+            </a:r>
+            <a:endParaRPr lang="en-US" sz="1250" dirty="0"/>
+          </a:p>
+        </p:txBody>
+      </p:sp>
+      <p:sp>
+        <p:nvSpPr>
+          <p:cNvPr id="10" name="Text 8"/>
+          <p:cNvSpPr/>
+          <p:nvPr/>
+        </p:nvSpPr>
+        <p:spPr>
+          <a:xfrm>
+            <a:off x="822960" y="4727448"/>
+            <a:ext cx="548640" cy="365760"/>
+          </a:xfrm>
+          <a:prstGeom prst="rect">
+            <a:avLst/>
+          </a:prstGeom>
+          <a:noFill/>
+          <a:ln/>
+        </p:spPr>
+        <p:txBody>
+          <a:bodyPr wrap="square" lIns="0" tIns="0" rIns="0" bIns="0" rtlCol="0" anchor="t"/>
+          <a:lstStyle/>
+          <a:p>
+            <a:pPr indent="0" marL="0">
+              <a:buNone/>
+            </a:pPr>
+            <a:r>
+              <a:rPr lang="en-US" sz="1800" b="1" dirty="0">
+                <a:solidFill>
+                  <a:srgbClr val="3182F6"/>
+                </a:solidFill>
+                <a:latin typeface="Arial" pitchFamily="34" charset="0"/>
+                <a:ea typeface="Arial" pitchFamily="34" charset="-122"/>
+                <a:cs typeface="Arial" pitchFamily="34" charset="-120"/>
+              </a:rPr>
+              <a:t>03</a:t>
+            </a:r>
+            <a:endParaRPr lang="en-US" sz="1800" dirty="0"/>
+          </a:p>
+        </p:txBody>
+      </p:sp>
+      <p:sp>
+        <p:nvSpPr>
+          <p:cNvPr id="11" name="Text 9"/>
+          <p:cNvSpPr/>
+          <p:nvPr/>
+        </p:nvSpPr>
+        <p:spPr>
+          <a:xfrm>
+            <a:off x="1463040" y="4709160"/>
+            <a:ext cx="5029200" cy="384048"/>
+          </a:xfrm>
+          <a:prstGeom prst="rect">
+            <a:avLst/>
+          </a:prstGeom>
+          <a:noFill/>
+          <a:ln/>
+        </p:spPr>
+        <p:txBody>
+          <a:bodyPr wrap="square" lIns="0" tIns="0" rIns="0" bIns="0" rtlCol="0" anchor="t"/>
+          <a:lstStyle/>
+          <a:p>
+            <a:pPr indent="0" marL="0">
+              <a:buNone/>
+            </a:pPr>
+            <a:r>
+              <a:rPr lang="en-US" sz="1800" b="1" dirty="0">
+                <a:solidFill>
+                  <a:srgbClr val="191F28"/>
+                </a:solidFill>
+                <a:latin typeface="Arial" pitchFamily="34" charset="0"/>
+                <a:ea typeface="Arial" pitchFamily="34" charset="-122"/>
+                <a:cs typeface="Arial" pitchFamily="34" charset="-120"/>
+              </a:rPr>
+              <a:t>왜 도구로 감쌌나</a:t>
+            </a:r>
+            <a:endParaRPr lang="en-US" sz="1800" dirty="0"/>
+          </a:p>
+        </p:txBody>
+      </p:sp>
+      <p:sp>
+        <p:nvSpPr>
+          <p:cNvPr id="12" name="Text 10"/>
+          <p:cNvSpPr/>
+          <p:nvPr/>
+        </p:nvSpPr>
+        <p:spPr>
+          <a:xfrm>
+            <a:off x="1463040" y="5120640"/>
+            <a:ext cx="5029200" cy="365760"/>
+          </a:xfrm>
+          <a:prstGeom prst="rect">
+            <a:avLst/>
+          </a:prstGeom>
+          <a:noFill/>
+          <a:ln/>
+        </p:spPr>
+        <p:txBody>
+          <a:bodyPr wrap="square" lIns="0" tIns="0" rIns="0" bIns="0" rtlCol="0" anchor="t"/>
+          <a:lstStyle/>
+          <a:p>
+            <a:pPr indent="0" marL="0">
+              <a:buNone/>
+            </a:pPr>
+            <a:r>
+              <a:rPr lang="en-US" sz="1250" dirty="0">
+                <a:solidFill>
+                  <a:srgbClr val="8B95A1"/>
+                </a:solidFill>
+                <a:latin typeface="Arial" pitchFamily="34" charset="0"/>
+                <a:ea typeface="Arial" pitchFamily="34" charset="-122"/>
+                <a:cs typeface="Arial" pitchFamily="34" charset="-120"/>
+              </a:rPr>
+              <a:t>어젯밤 실험 도중 OpenAlex가 멈췄을 때, 도구 뒤에서 자동으로 바뀌었습니다. 국내 DB도 같은 자리에 꽂으면 됩니다</a:t>
+            </a:r>
+            <a:endParaRPr lang="en-US" sz="1250" dirty="0"/>
+          </a:p>
+        </p:txBody>
+      </p:sp>
+      <p:sp>
+        <p:nvSpPr>
+          <p:cNvPr id="13" name="Shape 11"/>
+          <p:cNvSpPr/>
+          <p:nvPr/>
+        </p:nvSpPr>
+        <p:spPr>
+          <a:xfrm>
+            <a:off x="6903720" y="2606040"/>
+            <a:ext cx="4462272" cy="3291840"/>
           </a:xfrm>
           <a:prstGeom prst="roundRect">
             <a:avLst>
-              <a:gd name="adj" fmla="val 3333"/>
+              <a:gd name="adj" fmla="val 2222"/>
             </a:avLst>
           </a:prstGeom>
           <a:solidFill>
-            <a:srgbClr val="EAF3FF"/>
+            <a:srgbClr val="F4F6F8"/>
           </a:solidFill>
           <a:ln w="12700">
             <a:solidFill>
-              <a:srgbClr val="3182F6"/>
+              <a:srgbClr val="F4F6F8"/>
             </a:solidFill>
             <a:prstDash val="solid"/>
           </a:ln>
@@ -4567,14 +4124,14 @@
       </p:sp>
       <p:sp>
         <p:nvSpPr>
-          <p:cNvPr id="5" name="Text 3"/>
-          <p:cNvSpPr/>
-          <p:nvPr/>
-        </p:nvSpPr>
-        <p:spPr>
-          <a:xfrm>
-            <a:off x="1097280" y="2788920"/>
-            <a:ext cx="2782824" cy="274320"/>
+          <p:cNvPr id="14" name="Text 12"/>
+          <p:cNvSpPr/>
+          <p:nvPr/>
+        </p:nvSpPr>
+        <p:spPr>
+          <a:xfrm>
+            <a:off x="7178040" y="2788920"/>
+            <a:ext cx="3913632" cy="274320"/>
           </a:xfrm>
           <a:prstGeom prst="rect">
             <a:avLst/>
@@ -4598,7 +4155,7 @@
                 <a:ea typeface="Arial" pitchFamily="34" charset="-122"/>
                 <a:cs typeface="Arial" pitchFamily="34" charset="-120"/>
               </a:rPr>
-              <a:t>제출 전 · 연구자</a:t>
+              <a:t>Codex에 붙여서 실제로 호출해 봤습니다</a:t>
             </a:r>
             <a:endParaRPr lang="en-US" sz="1300" dirty="0"/>
           </a:p>
@@ -4606,30 +4163,33 @@
       </p:sp>
       <p:sp>
         <p:nvSpPr>
-          <p:cNvPr id="6" name="Text 4"/>
-          <p:cNvSpPr/>
-          <p:nvPr/>
-        </p:nvSpPr>
-        <p:spPr>
-          <a:xfrm>
-            <a:off x="1097280" y="3154680"/>
-            <a:ext cx="2782824" cy="457200"/>
-          </a:xfrm>
-          <a:prstGeom prst="rect">
-            <a:avLst/>
-          </a:prstGeom>
-          <a:noFill/>
-          <a:ln/>
-        </p:spPr>
-        <p:txBody>
-          <a:bodyPr wrap="square" lIns="0" tIns="0" rIns="0" bIns="0" rtlCol="0" anchor="t"/>
-          <a:lstStyle/>
-          <a:p>
-            <a:pPr indent="0" marL="0">
-              <a:buNone/>
-            </a:pPr>
-            <a:r>
-              <a:rPr lang="en-US" sz="2200" b="1" dirty="0">
+          <p:cNvPr id="15" name="Text 13"/>
+          <p:cNvSpPr/>
+          <p:nvPr/>
+        </p:nvSpPr>
+        <p:spPr>
+          <a:xfrm>
+            <a:off x="7178040" y="3200400"/>
+            <a:ext cx="3913632" cy="2560320"/>
+          </a:xfrm>
+          <a:prstGeom prst="rect">
+            <a:avLst/>
+          </a:prstGeom>
+          <a:noFill/>
+          <a:ln/>
+        </p:spPr>
+        <p:txBody>
+          <a:bodyPr wrap="square" lIns="0" tIns="0" rIns="0" bIns="0" rtlCol="0" anchor="t"/>
+          <a:lstStyle/>
+          <a:p>
+            <a:pPr indent="0" marL="0">
+              <a:lnSpc>
+                <a:spcPct val="135000"/>
+              </a:lnSpc>
+              <a:buNone/>
+            </a:pPr>
+            <a:r>
+              <a:rPr lang="en-US" sz="1350" b="1" dirty="0">
                 <a:solidFill>
                   <a:srgbClr val="191F28"/>
                 </a:solidFill>
@@ -4637,170 +4197,39 @@
                 <a:ea typeface="Arial" pitchFamily="34" charset="-122"/>
                 <a:cs typeface="Arial" pitchFamily="34" charset="-120"/>
               </a:rPr>
-              <a:t>셀프 점검</a:t>
-            </a:r>
-            <a:endParaRPr lang="en-US" sz="2200" dirty="0"/>
-          </a:p>
-        </p:txBody>
-      </p:sp>
-      <p:sp>
-        <p:nvSpPr>
-          <p:cNvPr id="7" name="Text 5"/>
-          <p:cNvSpPr/>
-          <p:nvPr/>
-        </p:nvSpPr>
-        <p:spPr>
-          <a:xfrm>
-            <a:off x="1097280" y="3749040"/>
-            <a:ext cx="2782824" cy="822960"/>
-          </a:xfrm>
-          <a:prstGeom prst="rect">
-            <a:avLst/>
-          </a:prstGeom>
-          <a:noFill/>
-          <a:ln/>
-        </p:spPr>
-        <p:txBody>
-          <a:bodyPr wrap="square" lIns="0" tIns="0" rIns="0" bIns="0" rtlCol="0" anchor="t"/>
-          <a:lstStyle/>
+              <a:t>check_quote(재현율 90% 이상)</a:t>
+            </a:r>
+            <a:endParaRPr lang="en-US" sz="1350" dirty="0"/>
+          </a:p>
           <a:p>
             <a:pPr indent="0" marL="0">
               <a:lnSpc>
-                <a:spcPct val="120000"/>
+                <a:spcPct val="135000"/>
               </a:lnSpc>
               <a:buNone/>
             </a:pPr>
             <a:r>
-              <a:rPr lang="en-US" sz="1300" dirty="0">
-                <a:solidFill>
-                  <a:srgbClr val="4E5968"/>
-                </a:solidFill>
-                <a:latin typeface="Arial" pitchFamily="34" charset="0"/>
-                <a:ea typeface="Arial" pitchFamily="34" charset="-122"/>
-                <a:cs typeface="Arial" pitchFamily="34" charset="-120"/>
-              </a:rPr>
-              <a:t>고칠 곳과 판단할 곳을 원문과 함께 봅니다. 지금 이 앱으로 됩니다</a:t>
-            </a:r>
-            <a:endParaRPr lang="en-US" sz="1300" dirty="0"/>
-          </a:p>
-        </p:txBody>
-      </p:sp>
-      <p:sp>
-        <p:nvSpPr>
-          <p:cNvPr id="8" name="Shape 6"/>
-          <p:cNvSpPr/>
-          <p:nvPr/>
-        </p:nvSpPr>
-        <p:spPr>
-          <a:xfrm>
-            <a:off x="4181856" y="3703320"/>
-            <a:ext cx="219456" cy="0"/>
-          </a:xfrm>
-          <a:prstGeom prst="line">
-            <a:avLst/>
-          </a:prstGeom>
-          <a:noFill/>
-          <a:ln w="15875">
-            <a:solidFill>
-              <a:srgbClr val="3182F6"/>
-            </a:solidFill>
-            <a:prstDash val="solid"/>
-            <a:tailEnd type="triangle"/>
-          </a:ln>
-        </p:spPr>
-      </p:sp>
-      <p:sp>
-        <p:nvSpPr>
-          <p:cNvPr id="9" name="Shape 7"/>
-          <p:cNvSpPr/>
-          <p:nvPr/>
-        </p:nvSpPr>
-        <p:spPr>
-          <a:xfrm>
-            <a:off x="4428744" y="2606040"/>
-            <a:ext cx="3331464" cy="2194560"/>
-          </a:xfrm>
-          <a:prstGeom prst="roundRect">
-            <a:avLst>
-              <a:gd name="adj" fmla="val 3333"/>
-            </a:avLst>
-          </a:prstGeom>
-          <a:solidFill>
-            <a:srgbClr val="FFFFFF"/>
-          </a:solidFill>
-          <a:ln w="12700">
-            <a:solidFill>
-              <a:srgbClr val="E5E8EB"/>
-            </a:solidFill>
-            <a:prstDash val="solid"/>
-          </a:ln>
-        </p:spPr>
-      </p:sp>
-      <p:sp>
-        <p:nvSpPr>
-          <p:cNvPr id="10" name="Text 8"/>
-          <p:cNvSpPr/>
-          <p:nvPr/>
-        </p:nvSpPr>
-        <p:spPr>
-          <a:xfrm>
-            <a:off x="4703064" y="2788920"/>
-            <a:ext cx="2782824" cy="274320"/>
-          </a:xfrm>
-          <a:prstGeom prst="rect">
-            <a:avLst/>
-          </a:prstGeom>
-          <a:noFill/>
-          <a:ln/>
-        </p:spPr>
-        <p:txBody>
-          <a:bodyPr wrap="square" lIns="0" tIns="0" rIns="0" bIns="0" rtlCol="0" anchor="t"/>
-          <a:lstStyle/>
-          <a:p>
-            <a:pPr indent="0" marL="0">
-              <a:buNone/>
-            </a:pPr>
-            <a:r>
-              <a:rPr lang="en-US" sz="1300" b="1" dirty="0">
-                <a:solidFill>
-                  <a:srgbClr val="3182F6"/>
-                </a:solidFill>
-                <a:latin typeface="Arial" pitchFamily="34" charset="0"/>
-                <a:ea typeface="Arial" pitchFamily="34" charset="-122"/>
-                <a:cs typeface="Arial" pitchFamily="34" charset="-120"/>
-              </a:rPr>
-              <a:t>접수 후 · 전문기관</a:t>
-            </a:r>
-            <a:endParaRPr lang="en-US" sz="1300" dirty="0"/>
-          </a:p>
-        </p:txBody>
-      </p:sp>
-      <p:sp>
-        <p:nvSpPr>
-          <p:cNvPr id="11" name="Text 9"/>
-          <p:cNvSpPr/>
-          <p:nvPr/>
-        </p:nvSpPr>
-        <p:spPr>
-          <a:xfrm>
-            <a:off x="4703064" y="3154680"/>
-            <a:ext cx="2782824" cy="457200"/>
-          </a:xfrm>
-          <a:prstGeom prst="rect">
-            <a:avLst/>
-          </a:prstGeom>
-          <a:noFill/>
-          <a:ln/>
-        </p:spPr>
-        <p:txBody>
-          <a:bodyPr wrap="square" lIns="0" tIns="0" rIns="0" bIns="0" rtlCol="0" anchor="t"/>
-          <a:lstStyle/>
-          <a:p>
-            <a:pPr indent="0" marL="0">
-              <a:buNone/>
-            </a:pPr>
-            <a:r>
-              <a:rPr lang="en-US" sz="2200" b="1" dirty="0">
+              <a:rPr lang="en-US" sz="1350" b="1" dirty="0">
+                <a:solidFill>
+                  <a:srgbClr val="1B64DA"/>
+                </a:solidFill>
+                <a:latin typeface="Arial" pitchFamily="34" charset="0"/>
+                <a:ea typeface="Arial" pitchFamily="34" charset="-122"/>
+                <a:cs typeface="Arial" pitchFamily="34" charset="-120"/>
+              </a:rPr>
+              <a:t>→ 참</a:t>
+            </a:r>
+            <a:endParaRPr lang="en-US" sz="1350" dirty="0"/>
+          </a:p>
+          <a:p>
+            <a:pPr indent="0" marL="0">
+              <a:lnSpc>
+                <a:spcPct val="135000"/>
+              </a:lnSpc>
+              <a:buNone/>
+            </a:pPr>
+            <a:r>
+              <a:rPr lang="en-US" sz="1350" b="1" dirty="0">
                 <a:solidFill>
                   <a:srgbClr val="191F28"/>
                 </a:solidFill>
@@ -4808,170 +4237,39 @@
                 <a:ea typeface="Arial" pitchFamily="34" charset="-122"/>
                 <a:cs typeface="Arial" pitchFamily="34" charset="-120"/>
               </a:rPr>
-              <a:t>요건 사전검토</a:t>
-            </a:r>
-            <a:endParaRPr lang="en-US" sz="2200" dirty="0"/>
-          </a:p>
-        </p:txBody>
-      </p:sp>
-      <p:sp>
-        <p:nvSpPr>
-          <p:cNvPr id="12" name="Text 10"/>
-          <p:cNvSpPr/>
-          <p:nvPr/>
-        </p:nvSpPr>
-        <p:spPr>
-          <a:xfrm>
-            <a:off x="4703064" y="3749040"/>
-            <a:ext cx="2782824" cy="822960"/>
-          </a:xfrm>
-          <a:prstGeom prst="rect">
-            <a:avLst/>
-          </a:prstGeom>
-          <a:noFill/>
-          <a:ln/>
-        </p:spPr>
-        <p:txBody>
-          <a:bodyPr wrap="square" lIns="0" tIns="0" rIns="0" bIns="0" rtlCol="0" anchor="t"/>
-          <a:lstStyle/>
+              <a:t>check_quote(정밀도 95% 달성)</a:t>
+            </a:r>
+            <a:endParaRPr lang="en-US" sz="1350" dirty="0"/>
+          </a:p>
           <a:p>
             <a:pPr indent="0" marL="0">
               <a:lnSpc>
-                <a:spcPct val="120000"/>
+                <a:spcPct val="135000"/>
               </a:lnSpc>
               <a:buNone/>
             </a:pPr>
             <a:r>
-              <a:rPr lang="en-US" sz="1300" dirty="0">
-                <a:solidFill>
-                  <a:srgbClr val="4E5968"/>
-                </a:solidFill>
-                <a:latin typeface="Arial" pitchFamily="34" charset="0"/>
-                <a:ea typeface="Arial" pitchFamily="34" charset="-122"/>
-                <a:cs typeface="Arial" pitchFamily="34" charset="-120"/>
-              </a:rPr>
-              <a:t>형식 미비와 서류 누락을 먼저 거릅니다. 첫 실증 목표</a:t>
-            </a:r>
-            <a:endParaRPr lang="en-US" sz="1300" dirty="0"/>
-          </a:p>
-        </p:txBody>
-      </p:sp>
-      <p:sp>
-        <p:nvSpPr>
-          <p:cNvPr id="13" name="Shape 11"/>
-          <p:cNvSpPr/>
-          <p:nvPr/>
-        </p:nvSpPr>
-        <p:spPr>
-          <a:xfrm>
-            <a:off x="7787640" y="3703320"/>
-            <a:ext cx="219456" cy="0"/>
-          </a:xfrm>
-          <a:prstGeom prst="line">
-            <a:avLst/>
-          </a:prstGeom>
-          <a:noFill/>
-          <a:ln w="15875">
-            <a:solidFill>
-              <a:srgbClr val="3182F6"/>
-            </a:solidFill>
-            <a:prstDash val="solid"/>
-            <a:tailEnd type="triangle"/>
-          </a:ln>
-        </p:spPr>
-      </p:sp>
-      <p:sp>
-        <p:nvSpPr>
-          <p:cNvPr id="14" name="Shape 12"/>
-          <p:cNvSpPr/>
-          <p:nvPr/>
-        </p:nvSpPr>
-        <p:spPr>
-          <a:xfrm>
-            <a:off x="8034528" y="2606040"/>
-            <a:ext cx="3331464" cy="2194560"/>
-          </a:xfrm>
-          <a:prstGeom prst="roundRect">
-            <a:avLst>
-              <a:gd name="adj" fmla="val 3333"/>
-            </a:avLst>
-          </a:prstGeom>
-          <a:solidFill>
-            <a:srgbClr val="FFFFFF"/>
-          </a:solidFill>
-          <a:ln w="12700">
-            <a:solidFill>
-              <a:srgbClr val="E5E8EB"/>
-            </a:solidFill>
-            <a:prstDash val="solid"/>
-          </a:ln>
-        </p:spPr>
-      </p:sp>
-      <p:sp>
-        <p:nvSpPr>
-          <p:cNvPr id="15" name="Text 13"/>
-          <p:cNvSpPr/>
-          <p:nvPr/>
-        </p:nvSpPr>
-        <p:spPr>
-          <a:xfrm>
-            <a:off x="8308848" y="2788920"/>
-            <a:ext cx="2782824" cy="274320"/>
-          </a:xfrm>
-          <a:prstGeom prst="rect">
-            <a:avLst/>
-          </a:prstGeom>
-          <a:noFill/>
-          <a:ln/>
-        </p:spPr>
-        <p:txBody>
-          <a:bodyPr wrap="square" lIns="0" tIns="0" rIns="0" bIns="0" rtlCol="0" anchor="t"/>
-          <a:lstStyle/>
-          <a:p>
-            <a:pPr indent="0" marL="0">
-              <a:buNone/>
-            </a:pPr>
-            <a:r>
-              <a:rPr lang="en-US" sz="1300" b="1" dirty="0">
-                <a:solidFill>
-                  <a:srgbClr val="3182F6"/>
-                </a:solidFill>
-                <a:latin typeface="Arial" pitchFamily="34" charset="0"/>
-                <a:ea typeface="Arial" pitchFamily="34" charset="-122"/>
-                <a:cs typeface="Arial" pitchFamily="34" charset="-120"/>
-              </a:rPr>
-              <a:t>심사 중 · 평가위원</a:t>
-            </a:r>
-            <a:endParaRPr lang="en-US" sz="1300" dirty="0"/>
-          </a:p>
-        </p:txBody>
-      </p:sp>
-      <p:sp>
-        <p:nvSpPr>
-          <p:cNvPr id="16" name="Text 14"/>
-          <p:cNvSpPr/>
-          <p:nvPr/>
-        </p:nvSpPr>
-        <p:spPr>
-          <a:xfrm>
-            <a:off x="8308848" y="3154680"/>
-            <a:ext cx="2782824" cy="457200"/>
-          </a:xfrm>
-          <a:prstGeom prst="rect">
-            <a:avLst/>
-          </a:prstGeom>
-          <a:noFill/>
-          <a:ln/>
-        </p:spPr>
-        <p:txBody>
-          <a:bodyPr wrap="square" lIns="0" tIns="0" rIns="0" bIns="0" rtlCol="0" anchor="t"/>
-          <a:lstStyle/>
-          <a:p>
-            <a:pPr indent="0" marL="0">
-              <a:buNone/>
-            </a:pPr>
-            <a:r>
-              <a:rPr lang="en-US" sz="2200" b="1" dirty="0">
+              <a:rPr lang="en-US" sz="1350" b="1" dirty="0">
+                <a:solidFill>
+                  <a:srgbClr val="1B64DA"/>
+                </a:solidFill>
+                <a:latin typeface="Arial" pitchFamily="34" charset="0"/>
+                <a:ea typeface="Arial" pitchFamily="34" charset="-122"/>
+                <a:cs typeface="Arial" pitchFamily="34" charset="-120"/>
+              </a:rPr>
+              <a:t>→ 거짓(원문에 없음)</a:t>
+            </a:r>
+            <a:endParaRPr lang="en-US" sz="1350" dirty="0"/>
+          </a:p>
+          <a:p>
+            <a:pPr indent="0" marL="0">
+              <a:lnSpc>
+                <a:spcPct val="135000"/>
+              </a:lnSpc>
+              <a:buNone/>
+            </a:pPr>
+            <a:r>
+              <a:rPr lang="en-US" sz="1350" b="1" dirty="0">
                 <a:solidFill>
                   <a:srgbClr val="191F28"/>
                 </a:solidFill>
@@ -4979,263 +4277,29 @@
                 <a:ea typeface="Arial" pitchFamily="34" charset="-122"/>
                 <a:cs typeface="Arial" pitchFamily="34" charset="-120"/>
               </a:rPr>
-              <a:t>근거 위치 표시</a:t>
-            </a:r>
-            <a:endParaRPr lang="en-US" sz="2200" dirty="0"/>
-          </a:p>
-        </p:txBody>
-      </p:sp>
-      <p:sp>
-        <p:nvSpPr>
-          <p:cNvPr id="17" name="Text 15"/>
-          <p:cNvSpPr/>
-          <p:nvPr/>
-        </p:nvSpPr>
-        <p:spPr>
-          <a:xfrm>
-            <a:off x="8308848" y="3749040"/>
-            <a:ext cx="2782824" cy="822960"/>
-          </a:xfrm>
-          <a:prstGeom prst="rect">
-            <a:avLst/>
-          </a:prstGeom>
-          <a:noFill/>
-          <a:ln/>
-        </p:spPr>
-        <p:txBody>
-          <a:bodyPr wrap="square" lIns="0" tIns="0" rIns="0" bIns="0" rtlCol="0" anchor="t"/>
-          <a:lstStyle/>
+              <a:t>search_prior_art(grant proposal review)</a:t>
+            </a:r>
+            <a:endParaRPr lang="en-US" sz="1350" dirty="0"/>
+          </a:p>
           <a:p>
             <a:pPr indent="0" marL="0">
               <a:lnSpc>
-                <a:spcPct val="120000"/>
+                <a:spcPct val="135000"/>
               </a:lnSpc>
               <a:buNone/>
             </a:pPr>
             <a:r>
-              <a:rPr lang="en-US" sz="1300" dirty="0">
-                <a:solidFill>
-                  <a:srgbClr val="4E5968"/>
-                </a:solidFill>
-                <a:latin typeface="Arial" pitchFamily="34" charset="0"/>
-                <a:ea typeface="Arial" pitchFamily="34" charset="-122"/>
-                <a:cs typeface="Arial" pitchFamily="34" charset="-120"/>
-              </a:rPr>
-              <a:t>지표마다 제안서의 근거 문장을 옆에 띄웁니다. 판정은 사람</a:t>
-            </a:r>
-            <a:endParaRPr lang="en-US" sz="1300" dirty="0"/>
-          </a:p>
-        </p:txBody>
-      </p:sp>
-      <p:sp>
-        <p:nvSpPr>
-          <p:cNvPr id="18" name="Text 16"/>
-          <p:cNvSpPr/>
-          <p:nvPr/>
-        </p:nvSpPr>
-        <p:spPr>
-          <a:xfrm>
-            <a:off x="822960" y="5093208"/>
-            <a:ext cx="548640" cy="365760"/>
-          </a:xfrm>
-          <a:prstGeom prst="rect">
-            <a:avLst/>
-          </a:prstGeom>
-          <a:noFill/>
-          <a:ln/>
-        </p:spPr>
-        <p:txBody>
-          <a:bodyPr wrap="square" lIns="0" tIns="0" rIns="0" bIns="0" rtlCol="0" anchor="t"/>
-          <a:lstStyle/>
-          <a:p>
-            <a:pPr indent="0" marL="0">
-              <a:buNone/>
-            </a:pPr>
-            <a:endParaRPr lang="en-US" sz="1800" dirty="0"/>
-          </a:p>
-        </p:txBody>
-      </p:sp>
-      <p:sp>
-        <p:nvSpPr>
-          <p:cNvPr id="19" name="Text 17"/>
-          <p:cNvSpPr/>
-          <p:nvPr/>
-        </p:nvSpPr>
-        <p:spPr>
-          <a:xfrm>
-            <a:off x="1463040" y="5074920"/>
-            <a:ext cx="4448556" cy="384048"/>
-          </a:xfrm>
-          <a:prstGeom prst="rect">
-            <a:avLst/>
-          </a:prstGeom>
-          <a:noFill/>
-          <a:ln/>
-        </p:spPr>
-        <p:txBody>
-          <a:bodyPr wrap="square" lIns="0" tIns="0" rIns="0" bIns="0" rtlCol="0" anchor="t"/>
-          <a:lstStyle/>
-          <a:p>
-            <a:pPr indent="0" marL="0">
-              <a:buNone/>
-            </a:pPr>
-            <a:r>
-              <a:rPr lang="en-US" sz="1500" b="1" dirty="0">
-                <a:solidFill>
-                  <a:srgbClr val="191F28"/>
-                </a:solidFill>
-                <a:latin typeface="Arial" pitchFamily="34" charset="0"/>
-                <a:ea typeface="Arial" pitchFamily="34" charset="-122"/>
-                <a:cs typeface="Arial" pitchFamily="34" charset="-120"/>
-              </a:rPr>
-              <a:t>실제 심사 의견은 평가기관에 있습니다</a:t>
-            </a:r>
-            <a:endParaRPr lang="en-US" sz="1500" dirty="0"/>
-          </a:p>
-        </p:txBody>
-      </p:sp>
-      <p:sp>
-        <p:nvSpPr>
-          <p:cNvPr id="20" name="Text 18"/>
-          <p:cNvSpPr/>
-          <p:nvPr/>
-        </p:nvSpPr>
-        <p:spPr>
-          <a:xfrm>
-            <a:off x="1463040" y="5486400"/>
-            <a:ext cx="4448556" cy="365760"/>
-          </a:xfrm>
-          <a:prstGeom prst="rect">
-            <a:avLst/>
-          </a:prstGeom>
-          <a:noFill/>
-          <a:ln/>
-        </p:spPr>
-        <p:txBody>
-          <a:bodyPr wrap="square" lIns="0" tIns="0" rIns="0" bIns="0" rtlCol="0" anchor="t"/>
-          <a:lstStyle/>
-          <a:p>
-            <a:pPr indent="0" marL="0">
-              <a:buNone/>
-            </a:pPr>
-            <a:r>
-              <a:rPr lang="en-US" sz="1200" dirty="0">
-                <a:solidFill>
-                  <a:srgbClr val="8B95A1"/>
-                </a:solidFill>
-                <a:latin typeface="Arial" pitchFamily="34" charset="0"/>
-                <a:ea typeface="Arial" pitchFamily="34" charset="-122"/>
-                <a:cs typeface="Arial" pitchFamily="34" charset="-120"/>
-              </a:rPr>
-              <a:t>기관과 연계하면 관점을 실제 심사 의견 유형으로 맞출 수 있습니다</a:t>
-            </a:r>
-            <a:endParaRPr lang="en-US" sz="1200" dirty="0"/>
-          </a:p>
-        </p:txBody>
-      </p:sp>
-      <p:sp>
-        <p:nvSpPr>
-          <p:cNvPr id="21" name="Text 19"/>
-          <p:cNvSpPr/>
-          <p:nvPr/>
-        </p:nvSpPr>
-        <p:spPr>
-          <a:xfrm>
-            <a:off x="6094476" y="5093208"/>
-            <a:ext cx="548640" cy="365760"/>
-          </a:xfrm>
-          <a:prstGeom prst="rect">
-            <a:avLst/>
-          </a:prstGeom>
-          <a:noFill/>
-          <a:ln/>
-        </p:spPr>
-        <p:txBody>
-          <a:bodyPr wrap="square" lIns="0" tIns="0" rIns="0" bIns="0" rtlCol="0" anchor="t"/>
-          <a:lstStyle/>
-          <a:p>
-            <a:pPr indent="0" marL="0">
-              <a:buNone/>
-            </a:pPr>
-            <a:endParaRPr lang="en-US" sz="1800" dirty="0"/>
-          </a:p>
-        </p:txBody>
-      </p:sp>
-      <p:sp>
-        <p:nvSpPr>
-          <p:cNvPr id="22" name="Text 20"/>
-          <p:cNvSpPr/>
-          <p:nvPr/>
-        </p:nvSpPr>
-        <p:spPr>
-          <a:xfrm>
-            <a:off x="6734556" y="5074920"/>
-            <a:ext cx="4631436" cy="384048"/>
-          </a:xfrm>
-          <a:prstGeom prst="rect">
-            <a:avLst/>
-          </a:prstGeom>
-          <a:noFill/>
-          <a:ln/>
-        </p:spPr>
-        <p:txBody>
-          <a:bodyPr wrap="square" lIns="0" tIns="0" rIns="0" bIns="0" rtlCol="0" anchor="t"/>
-          <a:lstStyle/>
-          <a:p>
-            <a:pPr indent="0" marL="0">
-              <a:buNone/>
-            </a:pPr>
-            <a:r>
-              <a:rPr lang="en-US" sz="1500" b="1" dirty="0">
-                <a:solidFill>
-                  <a:srgbClr val="191F28"/>
-                </a:solidFill>
-                <a:latin typeface="Arial" pitchFamily="34" charset="0"/>
-                <a:ea typeface="Arial" pitchFamily="34" charset="-122"/>
-                <a:cs typeface="Arial" pitchFamily="34" charset="-120"/>
-              </a:rPr>
-              <a:t>NAIS 플랫폼에 도구로 꽂힙니다</a:t>
-            </a:r>
-            <a:endParaRPr lang="en-US" sz="1500" dirty="0"/>
-          </a:p>
-        </p:txBody>
-      </p:sp>
-      <p:sp>
-        <p:nvSpPr>
-          <p:cNvPr id="23" name="Text 21"/>
-          <p:cNvSpPr/>
-          <p:nvPr/>
-        </p:nvSpPr>
-        <p:spPr>
-          <a:xfrm>
-            <a:off x="6734556" y="5486400"/>
-            <a:ext cx="4631436" cy="365760"/>
-          </a:xfrm>
-          <a:prstGeom prst="rect">
-            <a:avLst/>
-          </a:prstGeom>
-          <a:noFill/>
-          <a:ln/>
-        </p:spPr>
-        <p:txBody>
-          <a:bodyPr wrap="square" lIns="0" tIns="0" rIns="0" bIns="0" rtlCol="0" anchor="t"/>
-          <a:lstStyle/>
-          <a:p>
-            <a:pPr indent="0" marL="0">
-              <a:buNone/>
-            </a:pPr>
-            <a:r>
-              <a:rPr lang="en-US" sz="1200" dirty="0">
-                <a:solidFill>
-                  <a:srgbClr val="8B95A1"/>
-                </a:solidFill>
-                <a:latin typeface="Arial" pitchFamily="34" charset="0"/>
-                <a:ea typeface="Arial" pitchFamily="34" charset="-122"/>
-                <a:cs typeface="Arial" pitchFamily="34" charset="-120"/>
-              </a:rPr>
-              <a:t>AI 사이언티스트가 과제 신청까지 하는 날, 그 마지막 점검</a:t>
-            </a:r>
-            <a:endParaRPr lang="en-US" sz="1200" dirty="0"/>
+              <a:rPr lang="en-US" sz="1350" b="1" dirty="0">
+                <a:solidFill>
+                  <a:srgbClr val="1B64DA"/>
+                </a:solidFill>
+                <a:latin typeface="Arial" pitchFamily="34" charset="0"/>
+                <a:ea typeface="Arial" pitchFamily="34" charset="-122"/>
+                <a:cs typeface="Arial" pitchFamily="34" charset="-120"/>
+              </a:rPr>
+              <a:t>→ 논문 3편</a:t>
+            </a:r>
+            <a:endParaRPr lang="en-US" sz="1350" dirty="0"/>
           </a:p>
         </p:txBody>
       </p:sp>
@@ -5279,7 +4343,7 @@
         </p:nvSpPr>
         <p:spPr>
           <a:xfrm>
-            <a:off x="822960" y="1051560"/>
+            <a:off x="822960" y="548640"/>
             <a:ext cx="7315200" cy="365760"/>
           </a:xfrm>
           <a:prstGeom prst="rect">
@@ -5304,7 +4368,7 @@
                 <a:ea typeface="Arial" pitchFamily="34" charset="-122"/>
                 <a:cs typeface="Arial" pitchFamily="34" charset="-120"/>
               </a:rPr>
-              <a:t>지금 직접 해 보세요</a:t>
+              <a:t>부록 · 우리 기획서부터</a:t>
             </a:r>
             <a:endParaRPr lang="en-US" sz="1400" dirty="0"/>
           </a:p>
@@ -5318,8 +4382,8 @@
         </p:nvSpPr>
         <p:spPr>
           <a:xfrm>
-            <a:off x="795528" y="1645920"/>
-            <a:ext cx="10543032" cy="2103120"/>
+            <a:off x="795528" y="960120"/>
+            <a:ext cx="10543032" cy="1371600"/>
           </a:xfrm>
           <a:prstGeom prst="rect">
             <a:avLst/>
@@ -5338,7 +4402,7 @@
               <a:buNone/>
             </a:pPr>
             <a:r>
-              <a:rPr lang="en-US" sz="5400" b="1" dirty="0">
+              <a:rPr lang="en-US" sz="3400" b="1" dirty="0">
                 <a:solidFill>
                   <a:srgbClr val="191F28"/>
                 </a:solidFill>
@@ -5346,9 +4410,9 @@
                 <a:ea typeface="Arial" pitchFamily="34" charset="-122"/>
                 <a:cs typeface="Arial" pitchFamily="34" charset="-120"/>
               </a:rPr>
-              <a:t>제출 전에,</a:t>
-            </a:r>
-            <a:endParaRPr lang="en-US" sz="5400" dirty="0"/>
+              <a:t>이 대회 심사표로,</a:t>
+            </a:r>
+            <a:endParaRPr lang="en-US" sz="3400" dirty="0"/>
           </a:p>
           <a:p>
             <a:pPr indent="0" marL="0">
@@ -5358,7 +4422,7 @@
               <a:buNone/>
             </a:pPr>
             <a:r>
-              <a:rPr lang="en-US" sz="5400" b="1" dirty="0">
+              <a:rPr lang="en-US" sz="3400" b="1" dirty="0">
                 <a:solidFill>
                   <a:srgbClr val="3182F6"/>
                 </a:solidFill>
@@ -5366,7 +4430,7 @@
                 <a:ea typeface="Arial" pitchFamily="34" charset="-122"/>
                 <a:cs typeface="Arial" pitchFamily="34" charset="-120"/>
               </a:rPr>
-              <a:t>빈칸</a:t>
+              <a:t>저희 기획서</a:t>
             </a:r>
             <a:pPr indent="0" marL="0">
               <a:lnSpc>
@@ -5375,7 +4439,7 @@
               <a:buNone/>
             </a:pPr>
             <a:r>
-              <a:rPr lang="en-US" sz="5400" b="1" dirty="0">
+              <a:rPr lang="en-US" sz="3400" b="1" dirty="0">
                 <a:solidFill>
                   <a:srgbClr val="191F28"/>
                 </a:solidFill>
@@ -5383,9 +4447,9 @@
                 <a:ea typeface="Arial" pitchFamily="34" charset="-122"/>
                 <a:cs typeface="Arial" pitchFamily="34" charset="-120"/>
               </a:rPr>
-              <a:t>부터.</a:t>
-            </a:r>
-            <a:endParaRPr lang="en-US" sz="5400" dirty="0"/>
+              <a:t>부터 검사했습니다</a:t>
+            </a:r>
+            <a:endParaRPr lang="en-US" sz="3400" dirty="0"/>
           </a:p>
         </p:txBody>
       </p:sp>
@@ -5397,118 +4461,232 @@
         </p:nvSpPr>
         <p:spPr>
           <a:xfrm>
-            <a:off x="822960" y="4114800"/>
-            <a:ext cx="6035040" cy="822960"/>
-          </a:xfrm>
-          <a:prstGeom prst="rect">
-            <a:avLst/>
-          </a:prstGeom>
-          <a:noFill/>
-          <a:ln/>
-        </p:spPr>
-        <p:txBody>
-          <a:bodyPr wrap="square" lIns="0" tIns="0" rIns="0" bIns="0" rtlCol="0" anchor="t"/>
-          <a:lstStyle/>
-          <a:p>
-            <a:pPr indent="0" marL="0">
-              <a:lnSpc>
-                <a:spcPct val="135000"/>
-              </a:lnSpc>
+            <a:off x="822960" y="2606040"/>
+            <a:ext cx="5303520" cy="274320"/>
+          </a:xfrm>
+          <a:prstGeom prst="rect">
+            <a:avLst/>
+          </a:prstGeom>
+          <a:noFill/>
+          <a:ln/>
+        </p:spPr>
+        <p:txBody>
+          <a:bodyPr wrap="square" lIns="0" tIns="0" rIns="0" bIns="0" rtlCol="0" anchor="t"/>
+          <a:lstStyle/>
+          <a:p>
+            <a:pPr indent="0" marL="0">
+              <a:buNone/>
+            </a:pPr>
+            <a:r>
+              <a:rPr lang="en-US" sz="1300" b="1" dirty="0">
+                <a:solidFill>
+                  <a:srgbClr val="8B95A1"/>
+                </a:solidFill>
+                <a:latin typeface="Arial" pitchFamily="34" charset="0"/>
+                <a:ea typeface="Arial" pitchFamily="34" charset="-122"/>
+                <a:cs typeface="Arial" pitchFamily="34" charset="-120"/>
+              </a:rPr>
+              <a:t>관점별로 가장 걸린 점</a:t>
+            </a:r>
+            <a:endParaRPr lang="en-US" sz="1300" dirty="0"/>
+          </a:p>
+        </p:txBody>
+      </p:sp>
+      <p:sp>
+        <p:nvSpPr>
+          <p:cNvPr id="5" name="Text 3"/>
+          <p:cNvSpPr/>
+          <p:nvPr/>
+        </p:nvSpPr>
+        <p:spPr>
+          <a:xfrm>
+            <a:off x="6720840" y="2606040"/>
+            <a:ext cx="4572000" cy="274320"/>
+          </a:xfrm>
+          <a:prstGeom prst="rect">
+            <a:avLst/>
+          </a:prstGeom>
+          <a:noFill/>
+          <a:ln/>
+        </p:spPr>
+        <p:txBody>
+          <a:bodyPr wrap="square" lIns="0" tIns="0" rIns="0" bIns="0" rtlCol="0" anchor="t"/>
+          <a:lstStyle/>
+          <a:p>
+            <a:pPr indent="0" marL="0">
+              <a:buNone/>
+            </a:pPr>
+            <a:r>
+              <a:rPr lang="en-US" sz="1300" b="1" dirty="0">
+                <a:solidFill>
+                  <a:srgbClr val="8B95A1"/>
+                </a:solidFill>
+                <a:latin typeface="Arial" pitchFamily="34" charset="0"/>
+                <a:ea typeface="Arial" pitchFamily="34" charset="-122"/>
+                <a:cs typeface="Arial" pitchFamily="34" charset="-120"/>
+              </a:rPr>
+              <a:t>그래서 오늘</a:t>
+            </a:r>
+            <a:endParaRPr lang="en-US" sz="1300" dirty="0"/>
+          </a:p>
+        </p:txBody>
+      </p:sp>
+      <p:sp>
+        <p:nvSpPr>
+          <p:cNvPr id="6" name="Text 4"/>
+          <p:cNvSpPr/>
+          <p:nvPr/>
+        </p:nvSpPr>
+        <p:spPr>
+          <a:xfrm>
+            <a:off x="822960" y="3017520"/>
+            <a:ext cx="5303520" cy="274320"/>
+          </a:xfrm>
+          <a:prstGeom prst="rect">
+            <a:avLst/>
+          </a:prstGeom>
+          <a:noFill/>
+          <a:ln/>
+        </p:spPr>
+        <p:txBody>
+          <a:bodyPr wrap="square" lIns="0" tIns="0" rIns="0" bIns="0" rtlCol="0" anchor="t"/>
+          <a:lstStyle/>
+          <a:p>
+            <a:pPr indent="0" marL="0">
+              <a:buNone/>
+            </a:pPr>
+            <a:r>
+              <a:rPr lang="en-US" sz="1200" b="1" dirty="0">
+                <a:solidFill>
+                  <a:srgbClr val="3182F6"/>
+                </a:solidFill>
+                <a:latin typeface="Arial" pitchFamily="34" charset="0"/>
+                <a:ea typeface="Arial" pitchFamily="34" charset="-122"/>
+                <a:cs typeface="Arial" pitchFamily="34" charset="-120"/>
+              </a:rPr>
+              <a:t>세부 전문형</a:t>
+            </a:r>
+            <a:endParaRPr lang="en-US" sz="1200" dirty="0"/>
+          </a:p>
+        </p:txBody>
+      </p:sp>
+      <p:sp>
+        <p:nvSpPr>
+          <p:cNvPr id="7" name="Text 5"/>
+          <p:cNvSpPr/>
+          <p:nvPr/>
+        </p:nvSpPr>
+        <p:spPr>
+          <a:xfrm>
+            <a:off x="822960" y="3310128"/>
+            <a:ext cx="5303520" cy="365760"/>
+          </a:xfrm>
+          <a:prstGeom prst="rect">
+            <a:avLst/>
+          </a:prstGeom>
+          <a:noFill/>
+          <a:ln/>
+        </p:spPr>
+        <p:txBody>
+          <a:bodyPr wrap="square" lIns="0" tIns="0" rIns="0" bIns="0" rtlCol="0" anchor="t"/>
+          <a:lstStyle/>
+          <a:p>
+            <a:pPr indent="0" marL="0">
+              <a:buNone/>
+            </a:pPr>
+            <a:r>
+              <a:rPr lang="en-US" sz="1500" b="1" dirty="0">
+                <a:solidFill>
+                  <a:srgbClr val="191F28"/>
+                </a:solidFill>
+                <a:latin typeface="Arial" pitchFamily="34" charset="0"/>
+                <a:ea typeface="Arial" pitchFamily="34" charset="-122"/>
+                <a:cs typeface="Arial" pitchFamily="34" charset="-120"/>
+              </a:rPr>
+              <a:t>혁신성 차별성 구체성 부족</a:t>
+            </a:r>
+            <a:endParaRPr lang="en-US" sz="1500" dirty="0"/>
+          </a:p>
+        </p:txBody>
+      </p:sp>
+      <p:sp>
+        <p:nvSpPr>
+          <p:cNvPr id="8" name="Shape 6"/>
+          <p:cNvSpPr/>
+          <p:nvPr/>
+        </p:nvSpPr>
+        <p:spPr>
+          <a:xfrm>
+            <a:off x="6309360" y="3474720"/>
+            <a:ext cx="274320" cy="0"/>
+          </a:xfrm>
+          <a:prstGeom prst="line">
+            <a:avLst/>
+          </a:prstGeom>
+          <a:noFill/>
+          <a:ln w="15875">
+            <a:solidFill>
+              <a:srgbClr val="8B95A1"/>
+            </a:solidFill>
+            <a:prstDash val="solid"/>
+            <a:tailEnd type="triangle"/>
+          </a:ln>
+        </p:spPr>
+      </p:sp>
+      <p:sp>
+        <p:nvSpPr>
+          <p:cNvPr id="9" name="Text 7"/>
+          <p:cNvSpPr/>
+          <p:nvPr/>
+        </p:nvSpPr>
+        <p:spPr>
+          <a:xfrm>
+            <a:off x="6720840" y="3310128"/>
+            <a:ext cx="4645152" cy="365760"/>
+          </a:xfrm>
+          <a:prstGeom prst="rect">
+            <a:avLst/>
+          </a:prstGeom>
+          <a:noFill/>
+          <a:ln/>
+        </p:spPr>
+        <p:txBody>
+          <a:bodyPr wrap="square" lIns="0" tIns="0" rIns="0" bIns="0" rtlCol="0" anchor="t"/>
+          <a:lstStyle/>
+          <a:p>
+            <a:pPr indent="0" marL="0">
               <a:buNone/>
             </a:pPr>
             <a:r>
               <a:rPr lang="en-US" sz="1500" dirty="0">
                 <a:solidFill>
-                  <a:srgbClr val="4E5968"/>
-                </a:solidFill>
-                <a:latin typeface="Arial" pitchFamily="34" charset="0"/>
-                <a:ea typeface="Arial" pitchFamily="34" charset="-122"/>
-                <a:cs typeface="Arial" pitchFamily="34" charset="-120"/>
-              </a:rPr>
-              <a:t>공고 링크 하나, 초안 하나면 됩니다.</a:t>
+                  <a:srgbClr val="191F28"/>
+                </a:solidFill>
+                <a:latin typeface="Arial" pitchFamily="34" charset="0"/>
+                <a:ea typeface="Arial" pitchFamily="34" charset="-122"/>
+                <a:cs typeface="Arial" pitchFamily="34" charset="-120"/>
+              </a:rPr>
+              <a:t>구조의 차별점과 관점 수 실험을 준비했습니다</a:t>
             </a:r>
             <a:endParaRPr lang="en-US" sz="1500" dirty="0"/>
           </a:p>
-          <a:p>
-            <a:pPr indent="0" marL="0">
-              <a:lnSpc>
-                <a:spcPct val="135000"/>
-              </a:lnSpc>
-              <a:buNone/>
-            </a:pPr>
-            <a:r>
-              <a:rPr lang="en-US" sz="1500" dirty="0">
-                <a:solidFill>
-                  <a:srgbClr val="4E5968"/>
-                </a:solidFill>
-                <a:latin typeface="Arial" pitchFamily="34" charset="0"/>
-                <a:ea typeface="Arial" pitchFamily="34" charset="-122"/>
-                <a:cs typeface="Arial" pitchFamily="34" charset="-120"/>
-              </a:rPr>
-              <a:t>커밋 48개, 테스트 99개, 첫 코드 커밋 09/30 19:19</a:t>
-            </a:r>
-            <a:endParaRPr lang="en-US" sz="1500" dirty="0"/>
-          </a:p>
-        </p:txBody>
-      </p:sp>
-      <p:sp>
-        <p:nvSpPr>
-          <p:cNvPr id="5" name="Text 3"/>
-          <p:cNvSpPr/>
-          <p:nvPr/>
-        </p:nvSpPr>
-        <p:spPr>
-          <a:xfrm>
-            <a:off x="822960" y="5852160"/>
-            <a:ext cx="5486400" cy="411480"/>
-          </a:xfrm>
-          <a:prstGeom prst="rect">
-            <a:avLst/>
-          </a:prstGeom>
-          <a:noFill/>
-          <a:ln/>
-        </p:spPr>
-        <p:txBody>
-          <a:bodyPr wrap="square" lIns="0" tIns="0" rIns="0" bIns="0" rtlCol="0" anchor="t"/>
-          <a:lstStyle/>
-          <a:p>
-            <a:pPr indent="0" marL="0">
-              <a:buNone/>
-            </a:pPr>
-            <a:r>
-              <a:rPr lang="en-US" sz="1600" b="1" dirty="0">
-                <a:solidFill>
-                  <a:srgbClr val="191F28"/>
-                </a:solidFill>
-                <a:latin typeface="Arial" pitchFamily="34" charset="0"/>
-                <a:ea typeface="Arial" pitchFamily="34" charset="-122"/>
-                <a:cs typeface="Arial" pitchFamily="34" charset="-120"/>
-              </a:rPr>
-              <a:t>팀 루미아 · 김태걸 · 박세훈</a:t>
-            </a:r>
-            <a:endParaRPr lang="en-US" sz="1600" dirty="0"/>
-          </a:p>
-        </p:txBody>
-      </p:sp>
-      <p:sp>
-        <p:nvSpPr>
-          <p:cNvPr id="6" name="Shape 4"/>
-          <p:cNvSpPr/>
-          <p:nvPr/>
-        </p:nvSpPr>
-        <p:spPr>
-          <a:xfrm>
-            <a:off x="7269480" y="1828800"/>
-            <a:ext cx="1874520" cy="2788920"/>
-          </a:xfrm>
-          <a:prstGeom prst="roundRect">
-            <a:avLst>
-              <a:gd name="adj" fmla="val 3902"/>
-            </a:avLst>
-          </a:prstGeom>
-          <a:solidFill>
-            <a:srgbClr val="FFFFFF"/>
-          </a:solidFill>
+        </p:txBody>
+      </p:sp>
+      <p:sp>
+        <p:nvSpPr>
+          <p:cNvPr id="10" name="Shape 8"/>
+          <p:cNvSpPr/>
+          <p:nvPr/>
+        </p:nvSpPr>
+        <p:spPr>
+          <a:xfrm>
+            <a:off x="822960" y="3822192"/>
+            <a:ext cx="10543032" cy="0"/>
+          </a:xfrm>
+          <a:prstGeom prst="line">
+            <a:avLst/>
+          </a:prstGeom>
+          <a:noFill/>
           <a:ln w="12700">
             <a:solidFill>
               <a:srgbClr val="E5E8EB"/>
@@ -5517,56 +4695,71 @@
           </a:ln>
         </p:spPr>
       </p:sp>
-      <p:pic>
-        <p:nvPicPr>
-          <p:cNvPr id="7" name="Image 0" descr="/Users/ryugi62/dev/rfp-to-fit/deliver/deck/build/img/qr-live.png">    </p:cNvPr>
-          <p:cNvPicPr>
-            <a:picLocks noChangeAspect="1"/>
-          </p:cNvPicPr>
-          <p:nvPr/>
-        </p:nvPicPr>
-        <p:blipFill>
-          <a:blip r:embed="rId1"/>
-          <a:stretch>
-            <a:fillRect/>
-          </a:stretch>
-        </p:blipFill>
-        <p:spPr>
-          <a:xfrm>
-            <a:off x="7525512" y="2084832"/>
-            <a:ext cx="1371600" cy="1371600"/>
-          </a:xfrm>
-          <a:prstGeom prst="rect">
-            <a:avLst/>
-          </a:prstGeom>
-        </p:spPr>
-      </p:pic>
-      <p:sp>
-        <p:nvSpPr>
-          <p:cNvPr id="8" name="Text 5"/>
-          <p:cNvSpPr/>
-          <p:nvPr/>
-        </p:nvSpPr>
-        <p:spPr>
-          <a:xfrm>
-            <a:off x="7452360" y="3639312"/>
-            <a:ext cx="1508760" cy="320040"/>
-          </a:xfrm>
-          <a:prstGeom prst="rect">
-            <a:avLst/>
-          </a:prstGeom>
-          <a:noFill/>
-          <a:ln/>
-        </p:spPr>
-        <p:txBody>
-          <a:bodyPr wrap="square" lIns="0" tIns="0" rIns="0" bIns="0" rtlCol="0" anchor="t"/>
-          <a:lstStyle/>
-          <a:p>
-            <a:pPr indent="0" marL="0">
-              <a:buNone/>
-            </a:pPr>
-            <a:r>
-              <a:rPr lang="en-US" sz="1400" b="1" dirty="0">
+      <p:sp>
+        <p:nvSpPr>
+          <p:cNvPr id="11" name="Text 9"/>
+          <p:cNvSpPr/>
+          <p:nvPr/>
+        </p:nvSpPr>
+        <p:spPr>
+          <a:xfrm>
+            <a:off x="822960" y="3931920"/>
+            <a:ext cx="5303520" cy="274320"/>
+          </a:xfrm>
+          <a:prstGeom prst="rect">
+            <a:avLst/>
+          </a:prstGeom>
+          <a:noFill/>
+          <a:ln/>
+        </p:spPr>
+        <p:txBody>
+          <a:bodyPr wrap="square" lIns="0" tIns="0" rIns="0" bIns="0" rtlCol="0" anchor="t"/>
+          <a:lstStyle/>
+          <a:p>
+            <a:pPr indent="0" marL="0">
+              <a:buNone/>
+            </a:pPr>
+            <a:r>
+              <a:rPr lang="en-US" sz="1200" b="1" dirty="0">
+                <a:solidFill>
+                  <a:srgbClr val="3182F6"/>
+                </a:solidFill>
+                <a:latin typeface="Arial" pitchFamily="34" charset="0"/>
+                <a:ea typeface="Arial" pitchFamily="34" charset="-122"/>
+                <a:cs typeface="Arial" pitchFamily="34" charset="-120"/>
+              </a:rPr>
+              <a:t>사업성·시장형</a:t>
+            </a:r>
+            <a:endParaRPr lang="en-US" sz="1200" dirty="0"/>
+          </a:p>
+        </p:txBody>
+      </p:sp>
+      <p:sp>
+        <p:nvSpPr>
+          <p:cNvPr id="12" name="Text 10"/>
+          <p:cNvSpPr/>
+          <p:nvPr/>
+        </p:nvSpPr>
+        <p:spPr>
+          <a:xfrm>
+            <a:off x="822960" y="4224528"/>
+            <a:ext cx="5303520" cy="365760"/>
+          </a:xfrm>
+          <a:prstGeom prst="rect">
+            <a:avLst/>
+          </a:prstGeom>
+          <a:noFill/>
+          <a:ln/>
+        </p:spPr>
+        <p:txBody>
+          <a:bodyPr wrap="square" lIns="0" tIns="0" rIns="0" bIns="0" rtlCol="0" anchor="t"/>
+          <a:lstStyle/>
+          <a:p>
+            <a:pPr indent="0" marL="0">
+              <a:buNone/>
+            </a:pPr>
+            <a:r>
+              <a:rPr lang="en-US" sz="1500" b="1" dirty="0">
                 <a:solidFill>
                   <a:srgbClr val="191F28"/>
                 </a:solidFill>
@@ -5574,73 +4767,90 @@
                 <a:ea typeface="Arial" pitchFamily="34" charset="-122"/>
                 <a:cs typeface="Arial" pitchFamily="34" charset="-120"/>
               </a:rPr>
-              <a:t>라이브 앱</a:t>
-            </a:r>
-            <a:endParaRPr lang="en-US" sz="1400" dirty="0"/>
-          </a:p>
-        </p:txBody>
-      </p:sp>
-      <p:sp>
-        <p:nvSpPr>
-          <p:cNvPr id="9" name="Text 6"/>
-          <p:cNvSpPr/>
-          <p:nvPr/>
-        </p:nvSpPr>
-        <p:spPr>
-          <a:xfrm>
-            <a:off x="7452360" y="4005072"/>
-            <a:ext cx="1554480" cy="914400"/>
-          </a:xfrm>
-          <a:prstGeom prst="rect">
-            <a:avLst/>
-          </a:prstGeom>
-          <a:noFill/>
-          <a:ln/>
-        </p:spPr>
-        <p:txBody>
-          <a:bodyPr wrap="square" lIns="0" tIns="0" rIns="0" bIns="0" rtlCol="0" anchor="t"/>
-          <a:lstStyle/>
-          <a:p>
-            <a:pPr indent="0" marL="0">
-              <a:lnSpc>
-                <a:spcPct val="115000"/>
-              </a:lnSpc>
-              <a:buNone/>
-            </a:pPr>
-            <a:r>
-              <a:rPr lang="en-US" sz="950" dirty="0">
-                <a:solidFill>
-                  <a:srgbClr val="8B95A1"/>
-                </a:solidFill>
-                <a:latin typeface="Arial" pitchFamily="34" charset="0"/>
-                <a:ea typeface="Arial" pitchFamily="34" charset="-122"/>
-                <a:cs typeface="Arial" pitchFamily="34" charset="-120"/>
-              </a:rPr>
-              <a:t>ryugi62.github.io/rfp-to-fit/</a:t>
-            </a:r>
-            <a:endParaRPr lang="en-US" sz="950" dirty="0"/>
-          </a:p>
-        </p:txBody>
-      </p:sp>
-      <p:sp>
-        <p:nvSpPr>
-          <p:cNvPr id="10" name="Shape 7"/>
-          <p:cNvSpPr/>
-          <p:nvPr/>
-        </p:nvSpPr>
-        <p:spPr>
-          <a:xfrm>
-            <a:off x="9372600" y="1828800"/>
-            <a:ext cx="1874520" cy="2788920"/>
-          </a:xfrm>
-          <a:prstGeom prst="roundRect">
-            <a:avLst>
-              <a:gd name="adj" fmla="val 3902"/>
-            </a:avLst>
-          </a:prstGeom>
-          <a:solidFill>
-            <a:srgbClr val="FFFFFF"/>
-          </a:solidFill>
+              <a:t>시장수요는 보이나 실증·구매주체가 약함</a:t>
+            </a:r>
+            <a:endParaRPr lang="en-US" sz="1500" dirty="0"/>
+          </a:p>
+        </p:txBody>
+      </p:sp>
+      <p:sp>
+        <p:nvSpPr>
+          <p:cNvPr id="13" name="Shape 11"/>
+          <p:cNvSpPr/>
+          <p:nvPr/>
+        </p:nvSpPr>
+        <p:spPr>
+          <a:xfrm>
+            <a:off x="6309360" y="4389120"/>
+            <a:ext cx="274320" cy="0"/>
+          </a:xfrm>
+          <a:prstGeom prst="line">
+            <a:avLst/>
+          </a:prstGeom>
+          <a:noFill/>
+          <a:ln w="15875">
+            <a:solidFill>
+              <a:srgbClr val="8B95A1"/>
+            </a:solidFill>
+            <a:prstDash val="solid"/>
+            <a:tailEnd type="triangle"/>
+          </a:ln>
+        </p:spPr>
+      </p:sp>
+      <p:sp>
+        <p:nvSpPr>
+          <p:cNvPr id="14" name="Text 12"/>
+          <p:cNvSpPr/>
+          <p:nvPr/>
+        </p:nvSpPr>
+        <p:spPr>
+          <a:xfrm>
+            <a:off x="6720840" y="4224528"/>
+            <a:ext cx="4645152" cy="365760"/>
+          </a:xfrm>
+          <a:prstGeom prst="rect">
+            <a:avLst/>
+          </a:prstGeom>
+          <a:noFill/>
+          <a:ln/>
+        </p:spPr>
+        <p:txBody>
+          <a:bodyPr wrap="square" lIns="0" tIns="0" rIns="0" bIns="0" rtlCol="0" anchor="t"/>
+          <a:lstStyle/>
+          <a:p>
+            <a:pPr indent="0" marL="0">
+              <a:buNone/>
+            </a:pPr>
+            <a:r>
+              <a:rPr lang="en-US" sz="1500" dirty="0">
+                <a:solidFill>
+                  <a:srgbClr val="191F28"/>
+                </a:solidFill>
+                <a:latin typeface="Arial" pitchFamily="34" charset="0"/>
+                <a:ea typeface="Arial" pitchFamily="34" charset="-122"/>
+                <a:cs typeface="Arial" pitchFamily="34" charset="-120"/>
+              </a:rPr>
+              <a:t>첫 실증 대상을 전문기관 사전검토로 정했습니다</a:t>
+            </a:r>
+            <a:endParaRPr lang="en-US" sz="1500" dirty="0"/>
+          </a:p>
+        </p:txBody>
+      </p:sp>
+      <p:sp>
+        <p:nvSpPr>
+          <p:cNvPr id="15" name="Shape 13"/>
+          <p:cNvSpPr/>
+          <p:nvPr/>
+        </p:nvSpPr>
+        <p:spPr>
+          <a:xfrm>
+            <a:off x="822960" y="4736592"/>
+            <a:ext cx="10543032" cy="0"/>
+          </a:xfrm>
+          <a:prstGeom prst="line">
+            <a:avLst/>
+          </a:prstGeom>
+          <a:noFill/>
           <a:ln w="12700">
             <a:solidFill>
               <a:srgbClr val="E5E8EB"/>
@@ -5649,56 +4859,71 @@
           </a:ln>
         </p:spPr>
       </p:sp>
-      <p:pic>
-        <p:nvPicPr>
-          <p:cNvPr id="11" name="Image 1" descr="/Users/ryugi62/dev/rfp-to-fit/deliver/deck/build/img/qr-repo.png">    </p:cNvPr>
-          <p:cNvPicPr>
-            <a:picLocks noChangeAspect="1"/>
-          </p:cNvPicPr>
-          <p:nvPr/>
-        </p:nvPicPr>
-        <p:blipFill>
-          <a:blip r:embed="rId2"/>
-          <a:stretch>
-            <a:fillRect/>
-          </a:stretch>
-        </p:blipFill>
-        <p:spPr>
-          <a:xfrm>
-            <a:off x="9628632" y="2084832"/>
-            <a:ext cx="1371600" cy="1371600"/>
-          </a:xfrm>
-          <a:prstGeom prst="rect">
-            <a:avLst/>
-          </a:prstGeom>
-        </p:spPr>
-      </p:pic>
-      <p:sp>
-        <p:nvSpPr>
-          <p:cNvPr id="12" name="Text 8"/>
-          <p:cNvSpPr/>
-          <p:nvPr/>
-        </p:nvSpPr>
-        <p:spPr>
-          <a:xfrm>
-            <a:off x="9555480" y="3639312"/>
-            <a:ext cx="1508760" cy="320040"/>
-          </a:xfrm>
-          <a:prstGeom prst="rect">
-            <a:avLst/>
-          </a:prstGeom>
-          <a:noFill/>
-          <a:ln/>
-        </p:spPr>
-        <p:txBody>
-          <a:bodyPr wrap="square" lIns="0" tIns="0" rIns="0" bIns="0" rtlCol="0" anchor="t"/>
-          <a:lstStyle/>
-          <a:p>
-            <a:pPr indent="0" marL="0">
-              <a:buNone/>
-            </a:pPr>
-            <a:r>
-              <a:rPr lang="en-US" sz="1400" b="1" dirty="0">
+      <p:sp>
+        <p:nvSpPr>
+          <p:cNvPr id="16" name="Text 14"/>
+          <p:cNvSpPr/>
+          <p:nvPr/>
+        </p:nvSpPr>
+        <p:spPr>
+          <a:xfrm>
+            <a:off x="822960" y="4846320"/>
+            <a:ext cx="5303520" cy="274320"/>
+          </a:xfrm>
+          <a:prstGeom prst="rect">
+            <a:avLst/>
+          </a:prstGeom>
+          <a:noFill/>
+          <a:ln/>
+        </p:spPr>
+        <p:txBody>
+          <a:bodyPr wrap="square" lIns="0" tIns="0" rIns="0" bIns="0" rtlCol="0" anchor="t"/>
+          <a:lstStyle/>
+          <a:p>
+            <a:pPr indent="0" marL="0">
+              <a:buNone/>
+            </a:pPr>
+            <a:r>
+              <a:rPr lang="en-US" sz="1200" b="1" dirty="0">
+                <a:solidFill>
+                  <a:srgbClr val="3182F6"/>
+                </a:solidFill>
+                <a:latin typeface="Arial" pitchFamily="34" charset="0"/>
+                <a:ea typeface="Arial" pitchFamily="34" charset="-122"/>
+                <a:cs typeface="Arial" pitchFamily="34" charset="-120"/>
+              </a:rPr>
+              <a:t>행정·관리형</a:t>
+            </a:r>
+            <a:endParaRPr lang="en-US" sz="1200" dirty="0"/>
+          </a:p>
+        </p:txBody>
+      </p:sp>
+      <p:sp>
+        <p:nvSpPr>
+          <p:cNvPr id="17" name="Text 15"/>
+          <p:cNvSpPr/>
+          <p:nvPr/>
+        </p:nvSpPr>
+        <p:spPr>
+          <a:xfrm>
+            <a:off x="822960" y="5138928"/>
+            <a:ext cx="5303520" cy="365760"/>
+          </a:xfrm>
+          <a:prstGeom prst="rect">
+            <a:avLst/>
+          </a:prstGeom>
+          <a:noFill/>
+          <a:ln/>
+        </p:spPr>
+        <p:txBody>
+          <a:bodyPr wrap="square" lIns="0" tIns="0" rIns="0" bIns="0" rtlCol="0" anchor="t"/>
+          <a:lstStyle/>
+          <a:p>
+            <a:pPr indent="0" marL="0">
+              <a:buNone/>
+            </a:pPr>
+            <a:r>
+              <a:rPr lang="en-US" sz="1500" b="1" dirty="0">
                 <a:solidFill>
                   <a:srgbClr val="191F28"/>
                 </a:solidFill>
@@ -5706,51 +4931,111 @@
                 <a:ea typeface="Arial" pitchFamily="34" charset="-122"/>
                 <a:cs typeface="Arial" pitchFamily="34" charset="-120"/>
               </a:rPr>
-              <a:t>GitHub</a:t>
-            </a:r>
-            <a:endParaRPr lang="en-US" sz="1400" dirty="0"/>
-          </a:p>
-        </p:txBody>
-      </p:sp>
-      <p:sp>
-        <p:nvSpPr>
-          <p:cNvPr id="13" name="Text 9"/>
-          <p:cNvSpPr/>
-          <p:nvPr/>
-        </p:nvSpPr>
-        <p:spPr>
-          <a:xfrm>
-            <a:off x="9555480" y="4005072"/>
-            <a:ext cx="1554480" cy="914400"/>
-          </a:xfrm>
-          <a:prstGeom prst="rect">
-            <a:avLst/>
-          </a:prstGeom>
-          <a:noFill/>
-          <a:ln/>
-        </p:spPr>
-        <p:txBody>
-          <a:bodyPr wrap="square" lIns="0" tIns="0" rIns="0" bIns="0" rtlCol="0" anchor="t"/>
-          <a:lstStyle/>
-          <a:p>
-            <a:pPr indent="0" marL="0">
-              <a:lnSpc>
-                <a:spcPct val="115000"/>
-              </a:lnSpc>
-              <a:buNone/>
-            </a:pPr>
-            <a:r>
-              <a:rPr lang="en-US" sz="950" dirty="0">
-                <a:solidFill>
-                  <a:srgbClr val="8B95A1"/>
-                </a:solidFill>
-                <a:latin typeface="Arial" pitchFamily="34" charset="0"/>
-                <a:ea typeface="Arial" pitchFamily="34" charset="-122"/>
-                <a:cs typeface="Arial" pitchFamily="34" charset="-120"/>
-              </a:rPr>
-              <a:t>github.com/Ryugi62/rfp-to-fit</a:t>
-            </a:r>
-            <a:endParaRPr lang="en-US" sz="950" dirty="0"/>
+              <a:t>해커톤 기간 내 구현 계획의 구체성 부족</a:t>
+            </a:r>
+            <a:endParaRPr lang="en-US" sz="1500" dirty="0"/>
+          </a:p>
+        </p:txBody>
+      </p:sp>
+      <p:sp>
+        <p:nvSpPr>
+          <p:cNvPr id="18" name="Shape 16"/>
+          <p:cNvSpPr/>
+          <p:nvPr/>
+        </p:nvSpPr>
+        <p:spPr>
+          <a:xfrm>
+            <a:off x="6309360" y="5303520"/>
+            <a:ext cx="274320" cy="0"/>
+          </a:xfrm>
+          <a:prstGeom prst="line">
+            <a:avLst/>
+          </a:prstGeom>
+          <a:noFill/>
+          <a:ln w="15875">
+            <a:solidFill>
+              <a:srgbClr val="8B95A1"/>
+            </a:solidFill>
+            <a:prstDash val="solid"/>
+            <a:tailEnd type="triangle"/>
+          </a:ln>
+        </p:spPr>
+      </p:sp>
+      <p:sp>
+        <p:nvSpPr>
+          <p:cNvPr id="19" name="Text 17"/>
+          <p:cNvSpPr/>
+          <p:nvPr/>
+        </p:nvSpPr>
+        <p:spPr>
+          <a:xfrm>
+            <a:off x="6720840" y="5138928"/>
+            <a:ext cx="4645152" cy="365760"/>
+          </a:xfrm>
+          <a:prstGeom prst="rect">
+            <a:avLst/>
+          </a:prstGeom>
+          <a:noFill/>
+          <a:ln/>
+        </p:spPr>
+        <p:txBody>
+          <a:bodyPr wrap="square" lIns="0" tIns="0" rIns="0" bIns="0" rtlCol="0" anchor="t"/>
+          <a:lstStyle/>
+          <a:p>
+            <a:pPr indent="0" marL="0">
+              <a:buNone/>
+            </a:pPr>
+            <a:r>
+              <a:rPr lang="en-US" sz="1500" dirty="0">
+                <a:solidFill>
+                  <a:srgbClr val="191F28"/>
+                </a:solidFill>
+                <a:latin typeface="Arial" pitchFamily="34" charset="0"/>
+                <a:ea typeface="Arial" pitchFamily="34" charset="-122"/>
+                <a:cs typeface="Arial" pitchFamily="34" charset="-120"/>
+              </a:rPr>
+              <a:t>계획 대신 구현 결과와 커밋 기록을 가져왔습니다</a:t>
+            </a:r>
+            <a:endParaRPr lang="en-US" sz="1500" dirty="0"/>
+          </a:p>
+        </p:txBody>
+      </p:sp>
+      <p:sp>
+        <p:nvSpPr>
+          <p:cNvPr id="20" name="Text 18"/>
+          <p:cNvSpPr/>
+          <p:nvPr/>
+        </p:nvSpPr>
+        <p:spPr>
+          <a:xfrm>
+            <a:off x="822960" y="5897880"/>
+            <a:ext cx="10543032" cy="320040"/>
+          </a:xfrm>
+          <a:prstGeom prst="rect">
+            <a:avLst/>
+          </a:prstGeom>
+          <a:noFill/>
+          <a:ln/>
+        </p:spPr>
+        <p:txBody>
+          <a:bodyPr wrap="square" lIns="0" tIns="0" rIns="0" bIns="0" rtlCol="0" anchor="t"/>
+          <a:lstStyle/>
+          <a:p>
+            <a:pPr indent="0" marL="0">
+              <a:buNone/>
+            </a:pPr>
+            <a:r>
+              <a:rPr lang="en-US" sz="1300" dirty="0">
+                <a:solidFill>
+                  <a:srgbClr val="4E5968"/>
+                </a:solidFill>
+                <a:latin typeface="Arial" pitchFamily="34" charset="0"/>
+                <a:ea typeface="Arial" pitchFamily="34" charset="-122"/>
+                <a:cs typeface="Arial" pitchFamily="34" charset="-120"/>
+              </a:rPr>
+              <a:t>결과를 맞히려던 게 아니라, 발표 전에 받을 질문을 먼저 받아 본 것입니다.</a:t>
+            </a:r>
+            <a:endParaRPr lang="en-US" sz="1300" dirty="0"/>
           </a:p>
         </p:txBody>
       </p:sp>
@@ -10607,7 +9892,7 @@
                 <a:ea typeface="Arial" pitchFamily="34" charset="-122"/>
                 <a:cs typeface="Arial" pitchFamily="34" charset="-120"/>
               </a:rPr>
-              <a:t>실패해도 숨기지 않습니다</a:t>
+              <a:t>막혀도, 실패해도 돕니다</a:t>
             </a:r>
             <a:endParaRPr lang="en-US" sz="1400" dirty="0"/>
           </a:p>
@@ -10646,7 +9931,7 @@
                 <a:ea typeface="Arial" pitchFamily="34" charset="-122"/>
                 <a:cs typeface="Arial" pitchFamily="34" charset="-120"/>
               </a:rPr>
-              <a:t>관점 호출이 실패하면 다시 시도하고, 그래도 안 되면 응답 수를 화면에 띄웁니다</a:t>
+              <a:t>모델마다 대체 모델이 있고, 실패한 관점 수는 숨기지 않고 화면에 띄웁니다</a:t>
             </a:r>
             <a:endParaRPr lang="en-US" sz="1300" dirty="0"/>
           </a:p>
@@ -10708,7 +9993,7 @@
                 <a:ea typeface="Arial" pitchFamily="34" charset="-122"/>
                 <a:cs typeface="Arial" pitchFamily="34" charset="-120"/>
               </a:rPr>
-              <a:t>한 회사가 막혀도 돕니다</a:t>
+              <a:t>다른 AI도 씁니다</a:t>
             </a:r>
             <a:endParaRPr lang="en-US" sz="1400" dirty="0"/>
           </a:p>
@@ -10747,7 +10032,7 @@
                 <a:ea typeface="Arial" pitchFamily="34" charset="-122"/>
                 <a:cs typeface="Arial" pitchFamily="34" charset="-120"/>
               </a:rPr>
-              <a:t>모델마다 대체 모델이 있어 한도나 장애 때 자동으로 넘어갑니다</a:t>
+              <a:t>검사 도구를 MCP로 감싸 다른 AI 비서(Codex)에서 실제로 불러 봤습니다</a:t>
             </a:r>
             <a:endParaRPr lang="en-US" sz="1300" dirty="0"/>
           </a:p>
@@ -13225,7 +12510,7 @@
                 <a:ea typeface="Arial" pitchFamily="34" charset="-122"/>
                 <a:cs typeface="Arial" pitchFamily="34" charset="-120"/>
               </a:rPr>
-              <a:t>MCP 도구</a:t>
+              <a:t>측정</a:t>
             </a:r>
             <a:endParaRPr lang="en-US" sz="1400" dirty="0"/>
           </a:p>
@@ -13267,7 +12552,7 @@
                 <a:ea typeface="Arial" pitchFamily="34" charset="-122"/>
                 <a:cs typeface="Arial" pitchFamily="34" charset="-120"/>
               </a:rPr>
-              <a:t>같은 검사 도구를,</a:t>
+              <a:t>처음 보는 공고로도,</a:t>
             </a:r>
             <a:endParaRPr lang="en-US" sz="3400" dirty="0"/>
           </a:p>
@@ -13287,7 +12572,7 @@
                 <a:ea typeface="Arial" pitchFamily="34" charset="-122"/>
                 <a:cs typeface="Arial" pitchFamily="34" charset="-120"/>
               </a:rPr>
-              <a:t>다른 AI 비서</a:t>
+              <a:t>직접</a:t>
             </a:r>
             <a:pPr indent="0" marL="0">
               <a:lnSpc>
@@ -13304,7 +12589,7 @@
                 <a:ea typeface="Arial" pitchFamily="34" charset="-122"/>
                 <a:cs typeface="Arial" pitchFamily="34" charset="-120"/>
               </a:rPr>
-              <a:t>도 씁니다</a:t>
+              <a:t> 쟀습니다</a:t>
             </a:r>
             <a:endParaRPr lang="en-US" sz="3400" dirty="0"/>
           </a:p>
@@ -13318,34 +12603,34 @@
         </p:nvSpPr>
         <p:spPr>
           <a:xfrm>
-            <a:off x="822960" y="2715768"/>
-            <a:ext cx="548640" cy="365760"/>
-          </a:xfrm>
-          <a:prstGeom prst="rect">
-            <a:avLst/>
-          </a:prstGeom>
-          <a:noFill/>
-          <a:ln/>
-        </p:spPr>
-        <p:txBody>
-          <a:bodyPr wrap="square" lIns="0" tIns="0" rIns="0" bIns="0" rtlCol="0" anchor="t"/>
-          <a:lstStyle/>
-          <a:p>
-            <a:pPr indent="0" marL="0">
-              <a:buNone/>
-            </a:pPr>
-            <a:r>
-              <a:rPr lang="en-US" sz="1800" b="1" dirty="0">
-                <a:solidFill>
-                  <a:srgbClr val="3182F6"/>
-                </a:solidFill>
-                <a:latin typeface="Arial" pitchFamily="34" charset="0"/>
-                <a:ea typeface="Arial" pitchFamily="34" charset="-122"/>
-                <a:cs typeface="Arial" pitchFamily="34" charset="-120"/>
-              </a:rPr>
-              <a:t>01</a:t>
-            </a:r>
-            <a:endParaRPr lang="en-US" sz="1800" dirty="0"/>
+            <a:off x="822960" y="2606040"/>
+            <a:ext cx="5486400" cy="274320"/>
+          </a:xfrm>
+          <a:prstGeom prst="rect">
+            <a:avLst/>
+          </a:prstGeom>
+          <a:noFill/>
+          <a:ln/>
+        </p:spPr>
+        <p:txBody>
+          <a:bodyPr wrap="square" lIns="0" tIns="0" rIns="0" bIns="0" rtlCol="0" anchor="t"/>
+          <a:lstStyle/>
+          <a:p>
+            <a:pPr indent="0" marL="0">
+              <a:buNone/>
+            </a:pPr>
+            <a:r>
+              <a:rPr lang="en-US" sz="1300" b="1" dirty="0">
+                <a:solidFill>
+                  <a:srgbClr val="4E5968"/>
+                </a:solidFill>
+                <a:latin typeface="Arial" pitchFamily="34" charset="0"/>
+                <a:ea typeface="Arial" pitchFamily="34" charset="-122"/>
+                <a:cs typeface="Arial" pitchFamily="34" charset="-120"/>
+              </a:rPr>
+              <a:t>요건을 놓치지 않은 비율</a:t>
+            </a:r>
+            <a:endParaRPr lang="en-US" sz="1300" dirty="0"/>
           </a:p>
         </p:txBody>
       </p:sp>
@@ -13357,24 +12642,24 @@
         </p:nvSpPr>
         <p:spPr>
           <a:xfrm>
-            <a:off x="1463040" y="2697480"/>
-            <a:ext cx="5029200" cy="384048"/>
-          </a:xfrm>
-          <a:prstGeom prst="rect">
-            <a:avLst/>
-          </a:prstGeom>
-          <a:noFill/>
-          <a:ln/>
-        </p:spPr>
-        <p:txBody>
-          <a:bodyPr wrap="square" lIns="0" tIns="0" rIns="0" bIns="0" rtlCol="0" anchor="t"/>
-          <a:lstStyle/>
-          <a:p>
-            <a:pPr indent="0" marL="0">
-              <a:buNone/>
-            </a:pPr>
-            <a:r>
-              <a:rPr lang="en-US" sz="1800" b="1" dirty="0">
+            <a:off x="822960" y="2971800"/>
+            <a:ext cx="3108960" cy="310896"/>
+          </a:xfrm>
+          <a:prstGeom prst="rect">
+            <a:avLst/>
+          </a:prstGeom>
+          <a:noFill/>
+          <a:ln/>
+        </p:spPr>
+        <p:txBody>
+          <a:bodyPr wrap="square" lIns="0" tIns="0" rIns="0" bIns="0" rtlCol="0" anchor="t"/>
+          <a:lstStyle/>
+          <a:p>
+            <a:pPr indent="0" marL="0">
+              <a:buNone/>
+            </a:pPr>
+            <a:r>
+              <a:rPr lang="en-US" sz="1400" dirty="0">
                 <a:solidFill>
                   <a:srgbClr val="191F28"/>
                 </a:solidFill>
@@ -13382,9 +12667,9 @@
                 <a:ea typeface="Arial" pitchFamily="34" charset="-122"/>
                 <a:cs typeface="Arial" pitchFamily="34" charset="-120"/>
               </a:rPr>
-              <a:t>search_prior_art</a:t>
-            </a:r>
-            <a:endParaRPr lang="en-US" sz="1800" dirty="0"/>
+              <a:t>우주항공청</a:t>
+            </a:r>
+            <a:endParaRPr lang="en-US" sz="1400" dirty="0"/>
           </a:p>
         </p:txBody>
       </p:sp>
@@ -13396,24 +12681,24 @@
         </p:nvSpPr>
         <p:spPr>
           <a:xfrm>
-            <a:off x="1463040" y="3108960"/>
-            <a:ext cx="5029200" cy="365760"/>
-          </a:xfrm>
-          <a:prstGeom prst="rect">
-            <a:avLst/>
-          </a:prstGeom>
-          <a:noFill/>
-          <a:ln/>
-        </p:spPr>
-        <p:txBody>
-          <a:bodyPr wrap="square" lIns="0" tIns="0" rIns="0" bIns="0" rtlCol="0" anchor="t"/>
-          <a:lstStyle/>
-          <a:p>
-            <a:pPr indent="0" marL="0">
-              <a:buNone/>
-            </a:pPr>
-            <a:r>
-              <a:rPr lang="en-US" sz="1250" dirty="0">
+            <a:off x="3931920" y="2999232"/>
+            <a:ext cx="1463040" cy="274320"/>
+          </a:xfrm>
+          <a:prstGeom prst="rect">
+            <a:avLst/>
+          </a:prstGeom>
+          <a:noFill/>
+          <a:ln/>
+        </p:spPr>
+        <p:txBody>
+          <a:bodyPr wrap="square" lIns="0" tIns="0" rIns="0" bIns="0" rtlCol="0" anchor="t"/>
+          <a:lstStyle/>
+          <a:p>
+            <a:pPr indent="0" marL="0">
+              <a:buNone/>
+            </a:pPr>
+            <a:r>
+              <a:rPr lang="en-US" sz="1100" dirty="0">
                 <a:solidFill>
                   <a:srgbClr val="8B95A1"/>
                 </a:solidFill>
@@ -13421,9 +12706,9 @@
                 <a:ea typeface="Arial" pitchFamily="34" charset="-122"/>
                 <a:cs typeface="Arial" pitchFamily="34" charset="-120"/>
               </a:rPr>
-              <a:t>학술 DB에서 선행연구를 찾습니다. OpenAlex가 막히면 Crossref로 넘어갑니다</a:t>
-            </a:r>
-            <a:endParaRPr lang="en-US" sz="1250" dirty="0"/>
+              <a:t>개발에 쓴 공고</a:t>
+            </a:r>
+            <a:endParaRPr lang="en-US" sz="1100" dirty="0"/>
           </a:p>
         </p:txBody>
       </p:sp>
@@ -13435,34 +12720,34 @@
         </p:nvSpPr>
         <p:spPr>
           <a:xfrm>
-            <a:off x="822960" y="3721608"/>
-            <a:ext cx="548640" cy="365760"/>
-          </a:xfrm>
-          <a:prstGeom prst="rect">
-            <a:avLst/>
-          </a:prstGeom>
-          <a:noFill/>
-          <a:ln/>
-        </p:spPr>
-        <p:txBody>
-          <a:bodyPr wrap="square" lIns="0" tIns="0" rIns="0" bIns="0" rtlCol="0" anchor="t"/>
-          <a:lstStyle/>
-          <a:p>
-            <a:pPr indent="0" marL="0">
-              <a:buNone/>
-            </a:pPr>
-            <a:r>
-              <a:rPr lang="en-US" sz="1800" b="1" dirty="0">
-                <a:solidFill>
-                  <a:srgbClr val="3182F6"/>
-                </a:solidFill>
-                <a:latin typeface="Arial" pitchFamily="34" charset="0"/>
-                <a:ea typeface="Arial" pitchFamily="34" charset="-122"/>
-                <a:cs typeface="Arial" pitchFamily="34" charset="-120"/>
-              </a:rPr>
-              <a:t>02</a:t>
-            </a:r>
-            <a:endParaRPr lang="en-US" sz="1800" dirty="0"/>
+            <a:off x="5394960" y="2971800"/>
+            <a:ext cx="914400" cy="310896"/>
+          </a:xfrm>
+          <a:prstGeom prst="rect">
+            <a:avLst/>
+          </a:prstGeom>
+          <a:noFill/>
+          <a:ln/>
+        </p:spPr>
+        <p:txBody>
+          <a:bodyPr wrap="square" lIns="0" tIns="0" rIns="0" bIns="0" rtlCol="0" anchor="t"/>
+          <a:lstStyle/>
+          <a:p>
+            <a:pPr algn="r" indent="0" marL="0">
+              <a:buNone/>
+            </a:pPr>
+            <a:r>
+              <a:rPr lang="en-US" sz="1600" b="1" dirty="0">
+                <a:solidFill>
+                  <a:srgbClr val="191F28"/>
+                </a:solidFill>
+                <a:latin typeface="Arial" pitchFamily="34" charset="0"/>
+                <a:ea typeface="Arial" pitchFamily="34" charset="-122"/>
+                <a:cs typeface="Arial" pitchFamily="34" charset="-120"/>
+              </a:rPr>
+              <a:t>85%</a:t>
+            </a:r>
+            <a:endParaRPr lang="en-US" sz="1600" dirty="0"/>
           </a:p>
         </p:txBody>
       </p:sp>
@@ -13474,24 +12759,24 @@
         </p:nvSpPr>
         <p:spPr>
           <a:xfrm>
-            <a:off x="1463040" y="3703320"/>
-            <a:ext cx="5029200" cy="384048"/>
-          </a:xfrm>
-          <a:prstGeom prst="rect">
-            <a:avLst/>
-          </a:prstGeom>
-          <a:noFill/>
-          <a:ln/>
-        </p:spPr>
-        <p:txBody>
-          <a:bodyPr wrap="square" lIns="0" tIns="0" rIns="0" bIns="0" rtlCol="0" anchor="t"/>
-          <a:lstStyle/>
-          <a:p>
-            <a:pPr indent="0" marL="0">
-              <a:buNone/>
-            </a:pPr>
-            <a:r>
-              <a:rPr lang="en-US" sz="1800" b="1" dirty="0">
+            <a:off x="822960" y="3392424"/>
+            <a:ext cx="3108960" cy="310896"/>
+          </a:xfrm>
+          <a:prstGeom prst="rect">
+            <a:avLst/>
+          </a:prstGeom>
+          <a:noFill/>
+          <a:ln/>
+        </p:spPr>
+        <p:txBody>
+          <a:bodyPr wrap="square" lIns="0" tIns="0" rIns="0" bIns="0" rtlCol="0" anchor="t"/>
+          <a:lstStyle/>
+          <a:p>
+            <a:pPr indent="0" marL="0">
+              <a:buNone/>
+            </a:pPr>
+            <a:r>
+              <a:rPr lang="en-US" sz="1400" dirty="0">
                 <a:solidFill>
                   <a:srgbClr val="191F28"/>
                 </a:solidFill>
@@ -13499,9 +12784,9 @@
                 <a:ea typeface="Arial" pitchFamily="34" charset="-122"/>
                 <a:cs typeface="Arial" pitchFamily="34" charset="-120"/>
               </a:rPr>
-              <a:t>check_quote</a:t>
-            </a:r>
-            <a:endParaRPr lang="en-US" sz="1800" dirty="0"/>
+              <a:t>산업통상부</a:t>
+            </a:r>
+            <a:endParaRPr lang="en-US" sz="1400" dirty="0"/>
           </a:p>
         </p:txBody>
       </p:sp>
@@ -13513,24 +12798,24 @@
         </p:nvSpPr>
         <p:spPr>
           <a:xfrm>
-            <a:off x="1463040" y="4114800"/>
-            <a:ext cx="5029200" cy="365760"/>
-          </a:xfrm>
-          <a:prstGeom prst="rect">
-            <a:avLst/>
-          </a:prstGeom>
-          <a:noFill/>
-          <a:ln/>
-        </p:spPr>
-        <p:txBody>
-          <a:bodyPr wrap="square" lIns="0" tIns="0" rIns="0" bIns="0" rtlCol="0" anchor="t"/>
-          <a:lstStyle/>
-          <a:p>
-            <a:pPr indent="0" marL="0">
-              <a:buNone/>
-            </a:pPr>
-            <a:r>
-              <a:rPr lang="en-US" sz="1250" dirty="0">
+            <a:off x="3931920" y="3419856"/>
+            <a:ext cx="1463040" cy="274320"/>
+          </a:xfrm>
+          <a:prstGeom prst="rect">
+            <a:avLst/>
+          </a:prstGeom>
+          <a:noFill/>
+          <a:ln/>
+        </p:spPr>
+        <p:txBody>
+          <a:bodyPr wrap="square" lIns="0" tIns="0" rIns="0" bIns="0" rtlCol="0" anchor="t"/>
+          <a:lstStyle/>
+          <a:p>
+            <a:pPr indent="0" marL="0">
+              <a:buNone/>
+            </a:pPr>
+            <a:r>
+              <a:rPr lang="en-US" sz="1100" dirty="0">
                 <a:solidFill>
                   <a:srgbClr val="8B95A1"/>
                 </a:solidFill>
@@ -13538,9 +12823,9 @@
                 <a:ea typeface="Arial" pitchFamily="34" charset="-122"/>
                 <a:cs typeface="Arial" pitchFamily="34" charset="-120"/>
               </a:rPr>
-              <a:t>인용이 원문에 있는지 참, 거짓으로 답합니다</a:t>
-            </a:r>
-            <a:endParaRPr lang="en-US" sz="1250" dirty="0"/>
+              <a:t>개발에 쓴 공고</a:t>
+            </a:r>
+            <a:endParaRPr lang="en-US" sz="1100" dirty="0"/>
           </a:p>
         </p:txBody>
       </p:sp>
@@ -13552,34 +12837,34 @@
         </p:nvSpPr>
         <p:spPr>
           <a:xfrm>
-            <a:off x="822960" y="4727448"/>
-            <a:ext cx="548640" cy="365760"/>
-          </a:xfrm>
-          <a:prstGeom prst="rect">
-            <a:avLst/>
-          </a:prstGeom>
-          <a:noFill/>
-          <a:ln/>
-        </p:spPr>
-        <p:txBody>
-          <a:bodyPr wrap="square" lIns="0" tIns="0" rIns="0" bIns="0" rtlCol="0" anchor="t"/>
-          <a:lstStyle/>
-          <a:p>
-            <a:pPr indent="0" marL="0">
-              <a:buNone/>
-            </a:pPr>
-            <a:r>
-              <a:rPr lang="en-US" sz="1800" b="1" dirty="0">
-                <a:solidFill>
-                  <a:srgbClr val="3182F6"/>
-                </a:solidFill>
-                <a:latin typeface="Arial" pitchFamily="34" charset="0"/>
-                <a:ea typeface="Arial" pitchFamily="34" charset="-122"/>
-                <a:cs typeface="Arial" pitchFamily="34" charset="-120"/>
-              </a:rPr>
-              <a:t>03</a:t>
-            </a:r>
-            <a:endParaRPr lang="en-US" sz="1800" dirty="0"/>
+            <a:off x="5394960" y="3392424"/>
+            <a:ext cx="914400" cy="310896"/>
+          </a:xfrm>
+          <a:prstGeom prst="rect">
+            <a:avLst/>
+          </a:prstGeom>
+          <a:noFill/>
+          <a:ln/>
+        </p:spPr>
+        <p:txBody>
+          <a:bodyPr wrap="square" lIns="0" tIns="0" rIns="0" bIns="0" rtlCol="0" anchor="t"/>
+          <a:lstStyle/>
+          <a:p>
+            <a:pPr algn="r" indent="0" marL="0">
+              <a:buNone/>
+            </a:pPr>
+            <a:r>
+              <a:rPr lang="en-US" sz="1600" b="1" dirty="0">
+                <a:solidFill>
+                  <a:srgbClr val="191F28"/>
+                </a:solidFill>
+                <a:latin typeface="Arial" pitchFamily="34" charset="0"/>
+                <a:ea typeface="Arial" pitchFamily="34" charset="-122"/>
+                <a:cs typeface="Arial" pitchFamily="34" charset="-120"/>
+              </a:rPr>
+              <a:t>93%</a:t>
+            </a:r>
+            <a:endParaRPr lang="en-US" sz="1600" dirty="0"/>
           </a:p>
         </p:txBody>
       </p:sp>
@@ -13591,24 +12876,24 @@
         </p:nvSpPr>
         <p:spPr>
           <a:xfrm>
-            <a:off x="1463040" y="4709160"/>
-            <a:ext cx="5029200" cy="384048"/>
-          </a:xfrm>
-          <a:prstGeom prst="rect">
-            <a:avLst/>
-          </a:prstGeom>
-          <a:noFill/>
-          <a:ln/>
-        </p:spPr>
-        <p:txBody>
-          <a:bodyPr wrap="square" lIns="0" tIns="0" rIns="0" bIns="0" rtlCol="0" anchor="t"/>
-          <a:lstStyle/>
-          <a:p>
-            <a:pPr indent="0" marL="0">
-              <a:buNone/>
-            </a:pPr>
-            <a:r>
-              <a:rPr lang="en-US" sz="1800" b="1" dirty="0">
+            <a:off x="822960" y="3813048"/>
+            <a:ext cx="3108960" cy="310896"/>
+          </a:xfrm>
+          <a:prstGeom prst="rect">
+            <a:avLst/>
+          </a:prstGeom>
+          <a:noFill/>
+          <a:ln/>
+        </p:spPr>
+        <p:txBody>
+          <a:bodyPr wrap="square" lIns="0" tIns="0" rIns="0" bIns="0" rtlCol="0" anchor="t"/>
+          <a:lstStyle/>
+          <a:p>
+            <a:pPr indent="0" marL="0">
+              <a:buNone/>
+            </a:pPr>
+            <a:r>
+              <a:rPr lang="en-US" sz="1400" dirty="0">
                 <a:solidFill>
                   <a:srgbClr val="191F28"/>
                 </a:solidFill>
@@ -13616,9 +12901,9 @@
                 <a:ea typeface="Arial" pitchFamily="34" charset="-122"/>
                 <a:cs typeface="Arial" pitchFamily="34" charset="-120"/>
               </a:rPr>
-              <a:t>왜 도구로 감쌌나</a:t>
-            </a:r>
-            <a:endParaRPr lang="en-US" sz="1800" dirty="0"/>
+              <a:t>NAIS 해커톤</a:t>
+            </a:r>
+            <a:endParaRPr lang="en-US" sz="1400" dirty="0"/>
           </a:p>
         </p:txBody>
       </p:sp>
@@ -13630,24 +12915,24 @@
         </p:nvSpPr>
         <p:spPr>
           <a:xfrm>
-            <a:off x="1463040" y="5120640"/>
-            <a:ext cx="5029200" cy="365760"/>
-          </a:xfrm>
-          <a:prstGeom prst="rect">
-            <a:avLst/>
-          </a:prstGeom>
-          <a:noFill/>
-          <a:ln/>
-        </p:spPr>
-        <p:txBody>
-          <a:bodyPr wrap="square" lIns="0" tIns="0" rIns="0" bIns="0" rtlCol="0" anchor="t"/>
-          <a:lstStyle/>
-          <a:p>
-            <a:pPr indent="0" marL="0">
-              <a:buNone/>
-            </a:pPr>
-            <a:r>
-              <a:rPr lang="en-US" sz="1250" dirty="0">
+            <a:off x="3931920" y="3840480"/>
+            <a:ext cx="1463040" cy="274320"/>
+          </a:xfrm>
+          <a:prstGeom prst="rect">
+            <a:avLst/>
+          </a:prstGeom>
+          <a:noFill/>
+          <a:ln/>
+        </p:spPr>
+        <p:txBody>
+          <a:bodyPr wrap="square" lIns="0" tIns="0" rIns="0" bIns="0" rtlCol="0" anchor="t"/>
+          <a:lstStyle/>
+          <a:p>
+            <a:pPr indent="0" marL="0">
+              <a:buNone/>
+            </a:pPr>
+            <a:r>
+              <a:rPr lang="en-US" sz="1100" dirty="0">
                 <a:solidFill>
                   <a:srgbClr val="8B95A1"/>
                 </a:solidFill>
@@ -13655,34 +12940,385 @@
                 <a:ea typeface="Arial" pitchFamily="34" charset="-122"/>
                 <a:cs typeface="Arial" pitchFamily="34" charset="-120"/>
               </a:rPr>
-              <a:t>어젯밤 실험 도중 OpenAlex가 멈췄을 때, 도구 뒤에서 자동으로 바뀌었습니다. 국내 DB도 같은 자리에 꽂으면 됩니다</a:t>
-            </a:r>
-            <a:endParaRPr lang="en-US" sz="1250" dirty="0"/>
-          </a:p>
-        </p:txBody>
-      </p:sp>
-      <p:sp>
-        <p:nvSpPr>
-          <p:cNvPr id="13" name="Shape 11"/>
-          <p:cNvSpPr/>
-          <p:nvPr/>
-        </p:nvSpPr>
-        <p:spPr>
-          <a:xfrm>
-            <a:off x="6903720" y="2606040"/>
-            <a:ext cx="4462272" cy="3291840"/>
+              <a:t>개발에 쓴 공고</a:t>
+            </a:r>
+            <a:endParaRPr lang="en-US" sz="1100" dirty="0"/>
+          </a:p>
+        </p:txBody>
+      </p:sp>
+      <p:sp>
+        <p:nvSpPr>
+          <p:cNvPr id="13" name="Text 11"/>
+          <p:cNvSpPr/>
+          <p:nvPr/>
+        </p:nvSpPr>
+        <p:spPr>
+          <a:xfrm>
+            <a:off x="5394960" y="3813048"/>
+            <a:ext cx="914400" cy="310896"/>
+          </a:xfrm>
+          <a:prstGeom prst="rect">
+            <a:avLst/>
+          </a:prstGeom>
+          <a:noFill/>
+          <a:ln/>
+        </p:spPr>
+        <p:txBody>
+          <a:bodyPr wrap="square" lIns="0" tIns="0" rIns="0" bIns="0" rtlCol="0" anchor="t"/>
+          <a:lstStyle/>
+          <a:p>
+            <a:pPr algn="r" indent="0" marL="0">
+              <a:buNone/>
+            </a:pPr>
+            <a:r>
+              <a:rPr lang="en-US" sz="1600" b="1" dirty="0">
+                <a:solidFill>
+                  <a:srgbClr val="191F28"/>
+                </a:solidFill>
+                <a:latin typeface="Arial" pitchFamily="34" charset="0"/>
+                <a:ea typeface="Arial" pitchFamily="34" charset="-122"/>
+                <a:cs typeface="Arial" pitchFamily="34" charset="-120"/>
+              </a:rPr>
+              <a:t>87%</a:t>
+            </a:r>
+            <a:endParaRPr lang="en-US" sz="1600" dirty="0"/>
+          </a:p>
+        </p:txBody>
+      </p:sp>
+      <p:sp>
+        <p:nvSpPr>
+          <p:cNvPr id="14" name="Text 12"/>
+          <p:cNvSpPr/>
+          <p:nvPr/>
+        </p:nvSpPr>
+        <p:spPr>
+          <a:xfrm>
+            <a:off x="822960" y="4233672"/>
+            <a:ext cx="3108960" cy="310896"/>
+          </a:xfrm>
+          <a:prstGeom prst="rect">
+            <a:avLst/>
+          </a:prstGeom>
+          <a:noFill/>
+          <a:ln/>
+        </p:spPr>
+        <p:txBody>
+          <a:bodyPr wrap="square" lIns="0" tIns="0" rIns="0" bIns="0" rtlCol="0" anchor="t"/>
+          <a:lstStyle/>
+          <a:p>
+            <a:pPr indent="0" marL="0">
+              <a:buNone/>
+            </a:pPr>
+            <a:r>
+              <a:rPr lang="en-US" sz="1400" b="1" dirty="0">
+                <a:solidFill>
+                  <a:srgbClr val="1B64DA"/>
+                </a:solidFill>
+                <a:latin typeface="Arial" pitchFamily="34" charset="0"/>
+                <a:ea typeface="Arial" pitchFamily="34" charset="-122"/>
+                <a:cs typeface="Arial" pitchFamily="34" charset="-120"/>
+              </a:rPr>
+              <a:t>과기정통부 국가과학자</a:t>
+            </a:r>
+            <a:endParaRPr lang="en-US" sz="1400" dirty="0"/>
+          </a:p>
+        </p:txBody>
+      </p:sp>
+      <p:sp>
+        <p:nvSpPr>
+          <p:cNvPr id="15" name="Text 13"/>
+          <p:cNvSpPr/>
+          <p:nvPr/>
+        </p:nvSpPr>
+        <p:spPr>
+          <a:xfrm>
+            <a:off x="3931920" y="4261104"/>
+            <a:ext cx="1463040" cy="274320"/>
+          </a:xfrm>
+          <a:prstGeom prst="rect">
+            <a:avLst/>
+          </a:prstGeom>
+          <a:noFill/>
+          <a:ln/>
+        </p:spPr>
+        <p:txBody>
+          <a:bodyPr wrap="square" lIns="0" tIns="0" rIns="0" bIns="0" rtlCol="0" anchor="t"/>
+          <a:lstStyle/>
+          <a:p>
+            <a:pPr indent="0" marL="0">
+              <a:buNone/>
+            </a:pPr>
+            <a:r>
+              <a:rPr lang="en-US" sz="1100" dirty="0">
+                <a:solidFill>
+                  <a:srgbClr val="8B95A1"/>
+                </a:solidFill>
+                <a:latin typeface="Arial" pitchFamily="34" charset="0"/>
+                <a:ea typeface="Arial" pitchFamily="34" charset="-122"/>
+                <a:cs typeface="Arial" pitchFamily="34" charset="-120"/>
+              </a:rPr>
+              <a:t>처음 보는 공고</a:t>
+            </a:r>
+            <a:endParaRPr lang="en-US" sz="1100" dirty="0"/>
+          </a:p>
+        </p:txBody>
+      </p:sp>
+      <p:sp>
+        <p:nvSpPr>
+          <p:cNvPr id="16" name="Text 14"/>
+          <p:cNvSpPr/>
+          <p:nvPr/>
+        </p:nvSpPr>
+        <p:spPr>
+          <a:xfrm>
+            <a:off x="5394960" y="4233672"/>
+            <a:ext cx="914400" cy="310896"/>
+          </a:xfrm>
+          <a:prstGeom prst="rect">
+            <a:avLst/>
+          </a:prstGeom>
+          <a:noFill/>
+          <a:ln/>
+        </p:spPr>
+        <p:txBody>
+          <a:bodyPr wrap="square" lIns="0" tIns="0" rIns="0" bIns="0" rtlCol="0" anchor="t"/>
+          <a:lstStyle/>
+          <a:p>
+            <a:pPr algn="r" indent="0" marL="0">
+              <a:buNone/>
+            </a:pPr>
+            <a:r>
+              <a:rPr lang="en-US" sz="1600" b="1" dirty="0">
+                <a:solidFill>
+                  <a:srgbClr val="1B64DA"/>
+                </a:solidFill>
+                <a:latin typeface="Arial" pitchFamily="34" charset="0"/>
+                <a:ea typeface="Arial" pitchFamily="34" charset="-122"/>
+                <a:cs typeface="Arial" pitchFamily="34" charset="-120"/>
+              </a:rPr>
+              <a:t>94%</a:t>
+            </a:r>
+            <a:endParaRPr lang="en-US" sz="1600" dirty="0"/>
+          </a:p>
+        </p:txBody>
+      </p:sp>
+      <p:sp>
+        <p:nvSpPr>
+          <p:cNvPr id="17" name="Text 15"/>
+          <p:cNvSpPr/>
+          <p:nvPr/>
+        </p:nvSpPr>
+        <p:spPr>
+          <a:xfrm>
+            <a:off x="822960" y="4654296"/>
+            <a:ext cx="3108960" cy="310896"/>
+          </a:xfrm>
+          <a:prstGeom prst="rect">
+            <a:avLst/>
+          </a:prstGeom>
+          <a:noFill/>
+          <a:ln/>
+        </p:spPr>
+        <p:txBody>
+          <a:bodyPr wrap="square" lIns="0" tIns="0" rIns="0" bIns="0" rtlCol="0" anchor="t"/>
+          <a:lstStyle/>
+          <a:p>
+            <a:pPr indent="0" marL="0">
+              <a:buNone/>
+            </a:pPr>
+            <a:r>
+              <a:rPr lang="en-US" sz="1400" b="1" dirty="0">
+                <a:solidFill>
+                  <a:srgbClr val="1B64DA"/>
+                </a:solidFill>
+                <a:latin typeface="Arial" pitchFamily="34" charset="0"/>
+                <a:ea typeface="Arial" pitchFamily="34" charset="-122"/>
+                <a:cs typeface="Arial" pitchFamily="34" charset="-120"/>
+              </a:rPr>
+              <a:t>과기정통부 라이징스타</a:t>
+            </a:r>
+            <a:endParaRPr lang="en-US" sz="1400" dirty="0"/>
+          </a:p>
+        </p:txBody>
+      </p:sp>
+      <p:sp>
+        <p:nvSpPr>
+          <p:cNvPr id="18" name="Text 16"/>
+          <p:cNvSpPr/>
+          <p:nvPr/>
+        </p:nvSpPr>
+        <p:spPr>
+          <a:xfrm>
+            <a:off x="3931920" y="4681728"/>
+            <a:ext cx="1463040" cy="274320"/>
+          </a:xfrm>
+          <a:prstGeom prst="rect">
+            <a:avLst/>
+          </a:prstGeom>
+          <a:noFill/>
+          <a:ln/>
+        </p:spPr>
+        <p:txBody>
+          <a:bodyPr wrap="square" lIns="0" tIns="0" rIns="0" bIns="0" rtlCol="0" anchor="t"/>
+          <a:lstStyle/>
+          <a:p>
+            <a:pPr indent="0" marL="0">
+              <a:buNone/>
+            </a:pPr>
+            <a:r>
+              <a:rPr lang="en-US" sz="1100" dirty="0">
+                <a:solidFill>
+                  <a:srgbClr val="8B95A1"/>
+                </a:solidFill>
+                <a:latin typeface="Arial" pitchFamily="34" charset="0"/>
+                <a:ea typeface="Arial" pitchFamily="34" charset="-122"/>
+                <a:cs typeface="Arial" pitchFamily="34" charset="-120"/>
+              </a:rPr>
+              <a:t>처음 보는 공고</a:t>
+            </a:r>
+            <a:endParaRPr lang="en-US" sz="1100" dirty="0"/>
+          </a:p>
+        </p:txBody>
+      </p:sp>
+      <p:sp>
+        <p:nvSpPr>
+          <p:cNvPr id="19" name="Text 17"/>
+          <p:cNvSpPr/>
+          <p:nvPr/>
+        </p:nvSpPr>
+        <p:spPr>
+          <a:xfrm>
+            <a:off x="5394960" y="4654296"/>
+            <a:ext cx="914400" cy="310896"/>
+          </a:xfrm>
+          <a:prstGeom prst="rect">
+            <a:avLst/>
+          </a:prstGeom>
+          <a:noFill/>
+          <a:ln/>
+        </p:spPr>
+        <p:txBody>
+          <a:bodyPr wrap="square" lIns="0" tIns="0" rIns="0" bIns="0" rtlCol="0" anchor="t"/>
+          <a:lstStyle/>
+          <a:p>
+            <a:pPr algn="r" indent="0" marL="0">
+              <a:buNone/>
+            </a:pPr>
+            <a:r>
+              <a:rPr lang="en-US" sz="1600" b="1" dirty="0">
+                <a:solidFill>
+                  <a:srgbClr val="1B64DA"/>
+                </a:solidFill>
+                <a:latin typeface="Arial" pitchFamily="34" charset="0"/>
+                <a:ea typeface="Arial" pitchFamily="34" charset="-122"/>
+                <a:cs typeface="Arial" pitchFamily="34" charset="-120"/>
+              </a:rPr>
+              <a:t>78%</a:t>
+            </a:r>
+            <a:endParaRPr lang="en-US" sz="1600" dirty="0"/>
+          </a:p>
+        </p:txBody>
+      </p:sp>
+      <p:sp>
+        <p:nvSpPr>
+          <p:cNvPr id="20" name="Text 18"/>
+          <p:cNvSpPr/>
+          <p:nvPr/>
+        </p:nvSpPr>
+        <p:spPr>
+          <a:xfrm>
+            <a:off x="822960" y="5120640"/>
+            <a:ext cx="5486400" cy="274320"/>
+          </a:xfrm>
+          <a:prstGeom prst="rect">
+            <a:avLst/>
+          </a:prstGeom>
+          <a:noFill/>
+          <a:ln/>
+        </p:spPr>
+        <p:txBody>
+          <a:bodyPr wrap="square" lIns="0" tIns="0" rIns="0" bIns="0" rtlCol="0" anchor="t"/>
+          <a:lstStyle/>
+          <a:p>
+            <a:pPr indent="0" marL="0">
+              <a:buNone/>
+            </a:pPr>
+            <a:r>
+              <a:rPr lang="en-US" sz="1200" dirty="0">
+                <a:solidFill>
+                  <a:srgbClr val="4E5968"/>
+                </a:solidFill>
+                <a:latin typeface="Arial" pitchFamily="34" charset="0"/>
+                <a:ea typeface="Arial" pitchFamily="34" charset="-122"/>
+                <a:cs typeface="Arial" pitchFamily="34" charset="-120"/>
+              </a:rPr>
+              <a:t>심사표 배점은 다섯 건 모두 정확히 뽑았습니다</a:t>
+            </a:r>
+            <a:endParaRPr lang="en-US" sz="1200" dirty="0"/>
+          </a:p>
+        </p:txBody>
+      </p:sp>
+      <p:sp>
+        <p:nvSpPr>
+          <p:cNvPr id="21" name="Text 19"/>
+          <p:cNvSpPr/>
+          <p:nvPr/>
+        </p:nvSpPr>
+        <p:spPr>
+          <a:xfrm>
+            <a:off x="6675120" y="2606040"/>
+            <a:ext cx="4690872" cy="274320"/>
+          </a:xfrm>
+          <a:prstGeom prst="rect">
+            <a:avLst/>
+          </a:prstGeom>
+          <a:noFill/>
+          <a:ln/>
+        </p:spPr>
+        <p:txBody>
+          <a:bodyPr wrap="square" lIns="0" tIns="0" rIns="0" bIns="0" rtlCol="0" anchor="t"/>
+          <a:lstStyle/>
+          <a:p>
+            <a:pPr indent="0" marL="0">
+              <a:buNone/>
+            </a:pPr>
+            <a:r>
+              <a:rPr lang="en-US" sz="1300" b="1" dirty="0">
+                <a:solidFill>
+                  <a:srgbClr val="4E5968"/>
+                </a:solidFill>
+                <a:latin typeface="Arial" pitchFamily="34" charset="0"/>
+                <a:ea typeface="Arial" pitchFamily="34" charset="-122"/>
+                <a:cs typeface="Arial" pitchFamily="34" charset="-120"/>
+              </a:rPr>
+              <a:t>근거를 일부러 지운 초안 5개, 잘못 짚은 곳</a:t>
+            </a:r>
+            <a:endParaRPr lang="en-US" sz="1300" dirty="0"/>
+          </a:p>
+        </p:txBody>
+      </p:sp>
+      <p:sp>
+        <p:nvSpPr>
+          <p:cNvPr id="22" name="Shape 20"/>
+          <p:cNvSpPr/>
+          <p:nvPr/>
+        </p:nvSpPr>
+        <p:spPr>
+          <a:xfrm>
+            <a:off x="6675120" y="2971800"/>
+            <a:ext cx="1472184" cy="1828800"/>
           </a:xfrm>
           <a:prstGeom prst="roundRect">
             <a:avLst>
-              <a:gd name="adj" fmla="val 2222"/>
+              <a:gd name="adj" fmla="val 4969"/>
             </a:avLst>
           </a:prstGeom>
           <a:solidFill>
-            <a:srgbClr val="F4F6F8"/>
+            <a:srgbClr val="FFFFFF"/>
           </a:solidFill>
           <a:ln w="12700">
             <a:solidFill>
-              <a:srgbClr val="F4F6F8"/>
+              <a:srgbClr val="E5E8EB"/>
             </a:solidFill>
             <a:prstDash val="solid"/>
           </a:ln>
@@ -13690,72 +13326,30 @@
       </p:sp>
       <p:sp>
         <p:nvSpPr>
-          <p:cNvPr id="14" name="Text 12"/>
-          <p:cNvSpPr/>
-          <p:nvPr/>
-        </p:nvSpPr>
-        <p:spPr>
-          <a:xfrm>
-            <a:off x="7178040" y="2788920"/>
-            <a:ext cx="3913632" cy="274320"/>
-          </a:xfrm>
-          <a:prstGeom prst="rect">
-            <a:avLst/>
-          </a:prstGeom>
-          <a:noFill/>
-          <a:ln/>
-        </p:spPr>
-        <p:txBody>
-          <a:bodyPr wrap="square" lIns="0" tIns="0" rIns="0" bIns="0" rtlCol="0" anchor="t"/>
-          <a:lstStyle/>
-          <a:p>
-            <a:pPr indent="0" marL="0">
-              <a:buNone/>
-            </a:pPr>
-            <a:r>
-              <a:rPr lang="en-US" sz="1300" b="1" dirty="0">
-                <a:solidFill>
-                  <a:srgbClr val="3182F6"/>
-                </a:solidFill>
-                <a:latin typeface="Arial" pitchFamily="34" charset="0"/>
-                <a:ea typeface="Arial" pitchFamily="34" charset="-122"/>
-                <a:cs typeface="Arial" pitchFamily="34" charset="-120"/>
-              </a:rPr>
-              <a:t>Codex에 붙여서 실제로 호출해 봤습니다</a:t>
-            </a:r>
-            <a:endParaRPr lang="en-US" sz="1300" dirty="0"/>
-          </a:p>
-        </p:txBody>
-      </p:sp>
-      <p:sp>
-        <p:nvSpPr>
-          <p:cNvPr id="15" name="Text 13"/>
-          <p:cNvSpPr/>
-          <p:nvPr/>
-        </p:nvSpPr>
-        <p:spPr>
-          <a:xfrm>
-            <a:off x="7178040" y="3200400"/>
-            <a:ext cx="3913632" cy="2560320"/>
-          </a:xfrm>
-          <a:prstGeom prst="rect">
-            <a:avLst/>
-          </a:prstGeom>
-          <a:noFill/>
-          <a:ln/>
-        </p:spPr>
-        <p:txBody>
-          <a:bodyPr wrap="square" lIns="0" tIns="0" rIns="0" bIns="0" rtlCol="0" anchor="t"/>
-          <a:lstStyle/>
-          <a:p>
-            <a:pPr indent="0" marL="0">
-              <a:lnSpc>
-                <a:spcPct val="135000"/>
-              </a:lnSpc>
-              <a:buNone/>
-            </a:pPr>
-            <a:r>
-              <a:rPr lang="en-US" sz="1350" b="1" dirty="0">
+          <p:cNvPr id="23" name="Text 21"/>
+          <p:cNvSpPr/>
+          <p:nvPr/>
+        </p:nvSpPr>
+        <p:spPr>
+          <a:xfrm>
+            <a:off x="6812280" y="3108960"/>
+            <a:ext cx="1197864" cy="274320"/>
+          </a:xfrm>
+          <a:prstGeom prst="rect">
+            <a:avLst/>
+          </a:prstGeom>
+          <a:noFill/>
+          <a:ln/>
+        </p:spPr>
+        <p:txBody>
+          <a:bodyPr wrap="square" lIns="0" tIns="0" rIns="0" bIns="0" rtlCol="0" anchor="t"/>
+          <a:lstStyle/>
+          <a:p>
+            <a:pPr indent="0" marL="0">
+              <a:buNone/>
+            </a:pPr>
+            <a:r>
+              <a:rPr lang="en-US" sz="1200" b="1" dirty="0">
                 <a:solidFill>
                   <a:srgbClr val="191F28"/>
                 </a:solidFill>
@@ -13763,19 +13357,182 @@
                 <a:ea typeface="Arial" pitchFamily="34" charset="-122"/>
                 <a:cs typeface="Arial" pitchFamily="34" charset="-120"/>
               </a:rPr>
-              <a:t>check_quote(재현율 90% 이상)</a:t>
-            </a:r>
-            <a:endParaRPr lang="en-US" sz="1350" dirty="0"/>
-          </a:p>
-          <a:p>
-            <a:pPr indent="0" marL="0">
-              <a:lnSpc>
-                <a:spcPct val="135000"/>
-              </a:lnSpc>
-              <a:buNone/>
-            </a:pPr>
-            <a:r>
-              <a:rPr lang="en-US" sz="1350" b="1" dirty="0">
+              <a:t>관점 1개</a:t>
+            </a:r>
+            <a:endParaRPr lang="en-US" sz="1200" dirty="0"/>
+          </a:p>
+        </p:txBody>
+      </p:sp>
+      <p:sp>
+        <p:nvSpPr>
+          <p:cNvPr id="24" name="Text 22"/>
+          <p:cNvSpPr/>
+          <p:nvPr/>
+        </p:nvSpPr>
+        <p:spPr>
+          <a:xfrm>
+            <a:off x="6812280" y="3474720"/>
+            <a:ext cx="1197864" cy="731520"/>
+          </a:xfrm>
+          <a:prstGeom prst="rect">
+            <a:avLst/>
+          </a:prstGeom>
+          <a:noFill/>
+          <a:ln/>
+        </p:spPr>
+        <p:txBody>
+          <a:bodyPr wrap="square" lIns="0" tIns="0" rIns="0" bIns="0" rtlCol="0" anchor="t"/>
+          <a:lstStyle/>
+          <a:p>
+            <a:pPr indent="0" marL="0">
+              <a:buNone/>
+            </a:pPr>
+            <a:r>
+              <a:rPr lang="en-US" sz="4200" b="1" dirty="0">
+                <a:solidFill>
+                  <a:srgbClr val="191F28"/>
+                </a:solidFill>
+                <a:latin typeface="Arial" pitchFamily="34" charset="0"/>
+                <a:ea typeface="Arial" pitchFamily="34" charset="-122"/>
+                <a:cs typeface="Arial" pitchFamily="34" charset="-120"/>
+              </a:rPr>
+              <a:t>3</a:t>
+            </a:r>
+            <a:endParaRPr lang="en-US" sz="4200" dirty="0"/>
+          </a:p>
+        </p:txBody>
+      </p:sp>
+      <p:sp>
+        <p:nvSpPr>
+          <p:cNvPr id="25" name="Text 23"/>
+          <p:cNvSpPr/>
+          <p:nvPr/>
+        </p:nvSpPr>
+        <p:spPr>
+          <a:xfrm>
+            <a:off x="6812280" y="4343400"/>
+            <a:ext cx="1197864" cy="274320"/>
+          </a:xfrm>
+          <a:prstGeom prst="rect">
+            <a:avLst/>
+          </a:prstGeom>
+          <a:noFill/>
+          <a:ln/>
+        </p:spPr>
+        <p:txBody>
+          <a:bodyPr wrap="square" lIns="0" tIns="0" rIns="0" bIns="0" rtlCol="0" anchor="t"/>
+          <a:lstStyle/>
+          <a:p>
+            <a:pPr indent="0" marL="0">
+              <a:buNone/>
+            </a:pPr>
+            <a:r>
+              <a:rPr lang="en-US" sz="1100" dirty="0">
+                <a:solidFill>
+                  <a:srgbClr val="4E5968"/>
+                </a:solidFill>
+                <a:latin typeface="Arial" pitchFamily="34" charset="0"/>
+                <a:ea typeface="Arial" pitchFamily="34" charset="-122"/>
+                <a:cs typeface="Arial" pitchFamily="34" charset="-120"/>
+              </a:rPr>
+              <a:t>찾은 곳 5/5</a:t>
+            </a:r>
+            <a:endParaRPr lang="en-US" sz="1100" dirty="0"/>
+          </a:p>
+        </p:txBody>
+      </p:sp>
+      <p:sp>
+        <p:nvSpPr>
+          <p:cNvPr id="26" name="Shape 24"/>
+          <p:cNvSpPr/>
+          <p:nvPr/>
+        </p:nvSpPr>
+        <p:spPr>
+          <a:xfrm>
+            <a:off x="8284464" y="2971800"/>
+            <a:ext cx="1472184" cy="1828800"/>
+          </a:xfrm>
+          <a:prstGeom prst="roundRect">
+            <a:avLst>
+              <a:gd name="adj" fmla="val 4969"/>
+            </a:avLst>
+          </a:prstGeom>
+          <a:solidFill>
+            <a:srgbClr val="EAF3FF"/>
+          </a:solidFill>
+          <a:ln w="12700">
+            <a:solidFill>
+              <a:srgbClr val="3182F6"/>
+            </a:solidFill>
+            <a:prstDash val="solid"/>
+          </a:ln>
+        </p:spPr>
+      </p:sp>
+      <p:sp>
+        <p:nvSpPr>
+          <p:cNvPr id="27" name="Text 25"/>
+          <p:cNvSpPr/>
+          <p:nvPr/>
+        </p:nvSpPr>
+        <p:spPr>
+          <a:xfrm>
+            <a:off x="8421624" y="3108960"/>
+            <a:ext cx="1197864" cy="274320"/>
+          </a:xfrm>
+          <a:prstGeom prst="rect">
+            <a:avLst/>
+          </a:prstGeom>
+          <a:noFill/>
+          <a:ln/>
+        </p:spPr>
+        <p:txBody>
+          <a:bodyPr wrap="square" lIns="0" tIns="0" rIns="0" bIns="0" rtlCol="0" anchor="t"/>
+          <a:lstStyle/>
+          <a:p>
+            <a:pPr indent="0" marL="0">
+              <a:buNone/>
+            </a:pPr>
+            <a:r>
+              <a:rPr lang="en-US" sz="1200" b="1" dirty="0">
+                <a:solidFill>
+                  <a:srgbClr val="191F28"/>
+                </a:solidFill>
+                <a:latin typeface="Arial" pitchFamily="34" charset="0"/>
+                <a:ea typeface="Arial" pitchFamily="34" charset="-122"/>
+                <a:cs typeface="Arial" pitchFamily="34" charset="-120"/>
+              </a:rPr>
+              <a:t>관점 6개</a:t>
+            </a:r>
+            <a:endParaRPr lang="en-US" sz="1200" dirty="0"/>
+          </a:p>
+        </p:txBody>
+      </p:sp>
+      <p:sp>
+        <p:nvSpPr>
+          <p:cNvPr id="28" name="Text 26"/>
+          <p:cNvSpPr/>
+          <p:nvPr/>
+        </p:nvSpPr>
+        <p:spPr>
+          <a:xfrm>
+            <a:off x="8421624" y="3474720"/>
+            <a:ext cx="1197864" cy="731520"/>
+          </a:xfrm>
+          <a:prstGeom prst="rect">
+            <a:avLst/>
+          </a:prstGeom>
+          <a:noFill/>
+          <a:ln/>
+        </p:spPr>
+        <p:txBody>
+          <a:bodyPr wrap="square" lIns="0" tIns="0" rIns="0" bIns="0" rtlCol="0" anchor="t"/>
+          <a:lstStyle/>
+          <a:p>
+            <a:pPr indent="0" marL="0">
+              <a:buNone/>
+            </a:pPr>
+            <a:r>
+              <a:rPr lang="en-US" sz="4200" b="1" dirty="0">
                 <a:solidFill>
                   <a:srgbClr val="1B64DA"/>
                 </a:solidFill>
@@ -13783,19 +13540,104 @@
                 <a:ea typeface="Arial" pitchFamily="34" charset="-122"/>
                 <a:cs typeface="Arial" pitchFamily="34" charset="-120"/>
               </a:rPr>
-              <a:t>→ 참</a:t>
-            </a:r>
-            <a:endParaRPr lang="en-US" sz="1350" dirty="0"/>
-          </a:p>
-          <a:p>
-            <a:pPr indent="0" marL="0">
-              <a:lnSpc>
-                <a:spcPct val="135000"/>
-              </a:lnSpc>
-              <a:buNone/>
-            </a:pPr>
-            <a:r>
-              <a:rPr lang="en-US" sz="1350" b="1" dirty="0">
+              <a:t>0</a:t>
+            </a:r>
+            <a:endParaRPr lang="en-US" sz="4200" dirty="0"/>
+          </a:p>
+        </p:txBody>
+      </p:sp>
+      <p:sp>
+        <p:nvSpPr>
+          <p:cNvPr id="29" name="Text 27"/>
+          <p:cNvSpPr/>
+          <p:nvPr/>
+        </p:nvSpPr>
+        <p:spPr>
+          <a:xfrm>
+            <a:off x="8421624" y="4343400"/>
+            <a:ext cx="1197864" cy="274320"/>
+          </a:xfrm>
+          <a:prstGeom prst="rect">
+            <a:avLst/>
+          </a:prstGeom>
+          <a:noFill/>
+          <a:ln/>
+        </p:spPr>
+        <p:txBody>
+          <a:bodyPr wrap="square" lIns="0" tIns="0" rIns="0" bIns="0" rtlCol="0" anchor="t"/>
+          <a:lstStyle/>
+          <a:p>
+            <a:pPr indent="0" marL="0">
+              <a:buNone/>
+            </a:pPr>
+            <a:r>
+              <a:rPr lang="en-US" sz="1100" dirty="0">
+                <a:solidFill>
+                  <a:srgbClr val="4E5968"/>
+                </a:solidFill>
+                <a:latin typeface="Arial" pitchFamily="34" charset="0"/>
+                <a:ea typeface="Arial" pitchFamily="34" charset="-122"/>
+                <a:cs typeface="Arial" pitchFamily="34" charset="-120"/>
+              </a:rPr>
+              <a:t>찾은 곳 5/5</a:t>
+            </a:r>
+            <a:endParaRPr lang="en-US" sz="1100" dirty="0"/>
+          </a:p>
+        </p:txBody>
+      </p:sp>
+      <p:sp>
+        <p:nvSpPr>
+          <p:cNvPr id="30" name="Shape 28"/>
+          <p:cNvSpPr/>
+          <p:nvPr/>
+        </p:nvSpPr>
+        <p:spPr>
+          <a:xfrm>
+            <a:off x="9893808" y="2971800"/>
+            <a:ext cx="1472184" cy="1828800"/>
+          </a:xfrm>
+          <a:prstGeom prst="roundRect">
+            <a:avLst>
+              <a:gd name="adj" fmla="val 4969"/>
+            </a:avLst>
+          </a:prstGeom>
+          <a:solidFill>
+            <a:srgbClr val="EAF3FF"/>
+          </a:solidFill>
+          <a:ln w="12700">
+            <a:solidFill>
+              <a:srgbClr val="3182F6"/>
+            </a:solidFill>
+            <a:prstDash val="solid"/>
+          </a:ln>
+        </p:spPr>
+      </p:sp>
+      <p:sp>
+        <p:nvSpPr>
+          <p:cNvPr id="31" name="Text 29"/>
+          <p:cNvSpPr/>
+          <p:nvPr/>
+        </p:nvSpPr>
+        <p:spPr>
+          <a:xfrm>
+            <a:off x="10030968" y="3108960"/>
+            <a:ext cx="1197864" cy="274320"/>
+          </a:xfrm>
+          <a:prstGeom prst="rect">
+            <a:avLst/>
+          </a:prstGeom>
+          <a:noFill/>
+          <a:ln/>
+        </p:spPr>
+        <p:txBody>
+          <a:bodyPr wrap="square" lIns="0" tIns="0" rIns="0" bIns="0" rtlCol="0" anchor="t"/>
+          <a:lstStyle/>
+          <a:p>
+            <a:pPr indent="0" marL="0">
+              <a:buNone/>
+            </a:pPr>
+            <a:r>
+              <a:rPr lang="en-US" sz="1200" b="1" dirty="0">
                 <a:solidFill>
                   <a:srgbClr val="191F28"/>
                 </a:solidFill>
@@ -13803,19 +13645,38 @@
                 <a:ea typeface="Arial" pitchFamily="34" charset="-122"/>
                 <a:cs typeface="Arial" pitchFamily="34" charset="-120"/>
               </a:rPr>
-              <a:t>check_quote(정밀도 95% 달성)</a:t>
-            </a:r>
-            <a:endParaRPr lang="en-US" sz="1350" dirty="0"/>
-          </a:p>
-          <a:p>
-            <a:pPr indent="0" marL="0">
-              <a:lnSpc>
-                <a:spcPct val="135000"/>
-              </a:lnSpc>
-              <a:buNone/>
-            </a:pPr>
-            <a:r>
-              <a:rPr lang="en-US" sz="1350" b="1" dirty="0">
+              <a:t>6개·3사</a:t>
+            </a:r>
+            <a:endParaRPr lang="en-US" sz="1200" dirty="0"/>
+          </a:p>
+        </p:txBody>
+      </p:sp>
+      <p:sp>
+        <p:nvSpPr>
+          <p:cNvPr id="32" name="Text 30"/>
+          <p:cNvSpPr/>
+          <p:nvPr/>
+        </p:nvSpPr>
+        <p:spPr>
+          <a:xfrm>
+            <a:off x="10030968" y="3474720"/>
+            <a:ext cx="1197864" cy="731520"/>
+          </a:xfrm>
+          <a:prstGeom prst="rect">
+            <a:avLst/>
+          </a:prstGeom>
+          <a:noFill/>
+          <a:ln/>
+        </p:spPr>
+        <p:txBody>
+          <a:bodyPr wrap="square" lIns="0" tIns="0" rIns="0" bIns="0" rtlCol="0" anchor="t"/>
+          <a:lstStyle/>
+          <a:p>
+            <a:pPr indent="0" marL="0">
+              <a:buNone/>
+            </a:pPr>
+            <a:r>
+              <a:rPr lang="en-US" sz="4200" b="1" dirty="0">
                 <a:solidFill>
                   <a:srgbClr val="1B64DA"/>
                 </a:solidFill>
@@ -13823,19 +13684,139 @@
                 <a:ea typeface="Arial" pitchFamily="34" charset="-122"/>
                 <a:cs typeface="Arial" pitchFamily="34" charset="-120"/>
               </a:rPr>
-              <a:t>→ 거짓(원문에 없음)</a:t>
-            </a:r>
-            <a:endParaRPr lang="en-US" sz="1350" dirty="0"/>
-          </a:p>
-          <a:p>
-            <a:pPr indent="0" marL="0">
-              <a:lnSpc>
-                <a:spcPct val="135000"/>
-              </a:lnSpc>
-              <a:buNone/>
-            </a:pPr>
-            <a:r>
-              <a:rPr lang="en-US" sz="1350" b="1" dirty="0">
+              <a:t>0</a:t>
+            </a:r>
+            <a:endParaRPr lang="en-US" sz="4200" dirty="0"/>
+          </a:p>
+        </p:txBody>
+      </p:sp>
+      <p:sp>
+        <p:nvSpPr>
+          <p:cNvPr id="33" name="Text 31"/>
+          <p:cNvSpPr/>
+          <p:nvPr/>
+        </p:nvSpPr>
+        <p:spPr>
+          <a:xfrm>
+            <a:off x="10030968" y="4343400"/>
+            <a:ext cx="1197864" cy="274320"/>
+          </a:xfrm>
+          <a:prstGeom prst="rect">
+            <a:avLst/>
+          </a:prstGeom>
+          <a:noFill/>
+          <a:ln/>
+        </p:spPr>
+        <p:txBody>
+          <a:bodyPr wrap="square" lIns="0" tIns="0" rIns="0" bIns="0" rtlCol="0" anchor="t"/>
+          <a:lstStyle/>
+          <a:p>
+            <a:pPr indent="0" marL="0">
+              <a:buNone/>
+            </a:pPr>
+            <a:r>
+              <a:rPr lang="en-US" sz="1100" dirty="0">
+                <a:solidFill>
+                  <a:srgbClr val="4E5968"/>
+                </a:solidFill>
+                <a:latin typeface="Arial" pitchFamily="34" charset="0"/>
+                <a:ea typeface="Arial" pitchFamily="34" charset="-122"/>
+                <a:cs typeface="Arial" pitchFamily="34" charset="-120"/>
+              </a:rPr>
+              <a:t>찾은 곳 4/5</a:t>
+            </a:r>
+            <a:endParaRPr lang="en-US" sz="1100" dirty="0"/>
+          </a:p>
+        </p:txBody>
+      </p:sp>
+      <p:sp>
+        <p:nvSpPr>
+          <p:cNvPr id="34" name="Text 32"/>
+          <p:cNvSpPr/>
+          <p:nvPr/>
+        </p:nvSpPr>
+        <p:spPr>
+          <a:xfrm>
+            <a:off x="6675120" y="5120640"/>
+            <a:ext cx="4690872" cy="274320"/>
+          </a:xfrm>
+          <a:prstGeom prst="rect">
+            <a:avLst/>
+          </a:prstGeom>
+          <a:noFill/>
+          <a:ln/>
+        </p:spPr>
+        <p:txBody>
+          <a:bodyPr wrap="square" lIns="0" tIns="0" rIns="0" bIns="0" rtlCol="0" anchor="t"/>
+          <a:lstStyle/>
+          <a:p>
+            <a:pPr indent="0" marL="0">
+              <a:buNone/>
+            </a:pPr>
+            <a:r>
+              <a:rPr lang="en-US" sz="1200" dirty="0">
+                <a:solidFill>
+                  <a:srgbClr val="4E5968"/>
+                </a:solidFill>
+                <a:latin typeface="Arial" pitchFamily="34" charset="0"/>
+                <a:ea typeface="Arial" pitchFamily="34" charset="-122"/>
+                <a:cs typeface="Arial" pitchFamily="34" charset="-120"/>
+              </a:rPr>
+              <a:t>회사 모델을 섞는 효과는 이번 표본에선 보이지 않았습니다</a:t>
+            </a:r>
+            <a:endParaRPr lang="en-US" sz="1200" dirty="0"/>
+          </a:p>
+        </p:txBody>
+      </p:sp>
+      <p:sp>
+        <p:nvSpPr>
+          <p:cNvPr id="35" name="Shape 33"/>
+          <p:cNvSpPr/>
+          <p:nvPr/>
+        </p:nvSpPr>
+        <p:spPr>
+          <a:xfrm>
+            <a:off x="822960" y="5623560"/>
+            <a:ext cx="10543032" cy="0"/>
+          </a:xfrm>
+          <a:prstGeom prst="line">
+            <a:avLst/>
+          </a:prstGeom>
+          <a:noFill/>
+          <a:ln w="12700">
+            <a:solidFill>
+              <a:srgbClr val="E5E8EB"/>
+            </a:solidFill>
+            <a:prstDash val="solid"/>
+          </a:ln>
+        </p:spPr>
+      </p:sp>
+      <p:sp>
+        <p:nvSpPr>
+          <p:cNvPr id="36" name="Text 34"/>
+          <p:cNvSpPr/>
+          <p:nvPr/>
+        </p:nvSpPr>
+        <p:spPr>
+          <a:xfrm>
+            <a:off x="822960" y="5760720"/>
+            <a:ext cx="10543032" cy="320040"/>
+          </a:xfrm>
+          <a:prstGeom prst="rect">
+            <a:avLst/>
+          </a:prstGeom>
+          <a:noFill/>
+          <a:ln/>
+        </p:spPr>
+        <p:txBody>
+          <a:bodyPr wrap="square" lIns="0" tIns="0" rIns="0" bIns="0" rtlCol="0" anchor="t"/>
+          <a:lstStyle/>
+          <a:p>
+            <a:pPr indent="0" marL="0">
+              <a:buNone/>
+            </a:pPr>
+            <a:r>
+              <a:rPr lang="en-US" sz="1400" b="1" dirty="0">
                 <a:solidFill>
                   <a:srgbClr val="191F28"/>
                 </a:solidFill>
@@ -13843,29 +13824,48 @@
                 <a:ea typeface="Arial" pitchFamily="34" charset="-122"/>
                 <a:cs typeface="Arial" pitchFamily="34" charset="-120"/>
               </a:rPr>
-              <a:t>search_prior_art(grant proposal review)</a:t>
-            </a:r>
-            <a:endParaRPr lang="en-US" sz="1350" dirty="0"/>
-          </a:p>
-          <a:p>
-            <a:pPr indent="0" marL="0">
-              <a:lnSpc>
-                <a:spcPct val="135000"/>
-              </a:lnSpc>
-              <a:buNone/>
-            </a:pPr>
-            <a:r>
-              <a:rPr lang="en-US" sz="1350" b="1" dirty="0">
-                <a:solidFill>
-                  <a:srgbClr val="1B64DA"/>
-                </a:solidFill>
-                <a:latin typeface="Arial" pitchFamily="34" charset="0"/>
-                <a:ea typeface="Arial" pitchFamily="34" charset="-122"/>
-                <a:cs typeface="Arial" pitchFamily="34" charset="-120"/>
-              </a:rPr>
-              <a:t>→ 논문 3편</a:t>
-            </a:r>
-            <a:endParaRPr lang="en-US" sz="1350" dirty="0"/>
+              <a:t>처음 보는 공고에서 뽑은 요건 51개를 원문과 대조해 보니, 지어낸 요건은 0개였습니다</a:t>
+            </a:r>
+            <a:endParaRPr lang="en-US" sz="1400" dirty="0"/>
+          </a:p>
+        </p:txBody>
+      </p:sp>
+      <p:sp>
+        <p:nvSpPr>
+          <p:cNvPr id="37" name="Text 35"/>
+          <p:cNvSpPr/>
+          <p:nvPr/>
+        </p:nvSpPr>
+        <p:spPr>
+          <a:xfrm>
+            <a:off x="822960" y="6355080"/>
+            <a:ext cx="10543032" cy="274320"/>
+          </a:xfrm>
+          <a:prstGeom prst="rect">
+            <a:avLst/>
+          </a:prstGeom>
+          <a:noFill/>
+          <a:ln/>
+        </p:spPr>
+        <p:txBody>
+          <a:bodyPr wrap="square" lIns="0" tIns="0" rIns="0" bIns="0" rtlCol="0" anchor="t"/>
+          <a:lstStyle/>
+          <a:p>
+            <a:pPr indent="0" marL="0">
+              <a:buNone/>
+            </a:pPr>
+            <a:r>
+              <a:rPr lang="en-US" sz="1000" dirty="0">
+                <a:solidFill>
+                  <a:srgbClr val="8B95A1"/>
+                </a:solidFill>
+                <a:latin typeface="Arial" pitchFamily="34" charset="0"/>
+                <a:ea typeface="Arial" pitchFamily="34" charset="-122"/>
+                <a:cs typeface="Arial" pitchFamily="34" charset="-120"/>
+              </a:rPr>
+              <a:t>정답표와 대조 감사는 파이프라인과 다른 회사 모델(Claude)이 작성, 사람 검수는 아님  ·  data/eval, data/holdout 공개</a:t>
+            </a:r>
+            <a:endParaRPr lang="en-US" sz="1000" dirty="0"/>
           </a:p>
         </p:txBody>
       </p:sp>
